--- a/literature_studies/presentations/gen5_lit_mom_03_1_dual_momentum_study.pptx
+++ b/literature_studies/presentations/gen5_lit_mom_03_1_dual_momentum_study.pptx
@@ -2,26 +2,30 @@
 <file path=ppt/presentation.xml><?xml version="1.0" encoding="utf-8"?>
 <p:presentation xmlns:p="http://schemas.openxmlformats.org/presentationml/2006/main">
   <p:sldMasterIdLst>
-    <p:sldMasterId xmlns:r="http://schemas.openxmlformats.org/officeDocument/2006/relationships" id="2147483648" r:id="R4d4eac06176140d4"/>
+    <p:sldMasterId xmlns:r="http://schemas.openxmlformats.org/officeDocument/2006/relationships" id="2147483648" r:id="R18cd756b67c74bba"/>
   </p:sldMasterIdLst>
   <p:notesMasterIdLst>
-    <p:notesMasterId xmlns:r="http://schemas.openxmlformats.org/officeDocument/2006/relationships" r:id="Re1820572d6824c52"/>
+    <p:notesMasterId xmlns:r="http://schemas.openxmlformats.org/officeDocument/2006/relationships" r:id="Rc099882b3f7d4749"/>
   </p:notesMasterIdLst>
   <p:sldIdLst>
-    <p:sldId xmlns:r="http://schemas.openxmlformats.org/officeDocument/2006/relationships" id="256" r:id="R37cd1d8c7aa2492b"/>
-    <p:sldId xmlns:r="http://schemas.openxmlformats.org/officeDocument/2006/relationships" id="257" r:id="R9e3ee2a0b6db41d8"/>
-    <p:sldId xmlns:r="http://schemas.openxmlformats.org/officeDocument/2006/relationships" id="258" r:id="Rb97da3b1116b4969"/>
-    <p:sldId xmlns:r="http://schemas.openxmlformats.org/officeDocument/2006/relationships" id="259" r:id="R3132b9159281465d"/>
-    <p:sldId xmlns:r="http://schemas.openxmlformats.org/officeDocument/2006/relationships" id="260" r:id="Rbe91e4cd08224d05"/>
-    <p:sldId xmlns:r="http://schemas.openxmlformats.org/officeDocument/2006/relationships" id="261" r:id="R14e6c2701558448b"/>
-    <p:sldId xmlns:r="http://schemas.openxmlformats.org/officeDocument/2006/relationships" id="262" r:id="Ra70de3d85e654510"/>
-    <p:sldId xmlns:r="http://schemas.openxmlformats.org/officeDocument/2006/relationships" id="263" r:id="Rd00dcc64f7bc42f5"/>
-    <p:sldId xmlns:r="http://schemas.openxmlformats.org/officeDocument/2006/relationships" id="264" r:id="R85dba230932940fa"/>
-    <p:sldId xmlns:r="http://schemas.openxmlformats.org/officeDocument/2006/relationships" id="265" r:id="R63714a69dc8f42c6"/>
-    <p:sldId xmlns:r="http://schemas.openxmlformats.org/officeDocument/2006/relationships" id="266" r:id="R5c8b0d59df0c467f"/>
-    <p:sldId xmlns:r="http://schemas.openxmlformats.org/officeDocument/2006/relationships" id="267" r:id="Rdc3aca56bd80478c"/>
-    <p:sldId xmlns:r="http://schemas.openxmlformats.org/officeDocument/2006/relationships" id="268" r:id="R241ef376bf1c43f6"/>
-    <p:sldId xmlns:r="http://schemas.openxmlformats.org/officeDocument/2006/relationships" id="269" r:id="R8007c4bce9824cf7"/>
+    <p:sldId xmlns:r="http://schemas.openxmlformats.org/officeDocument/2006/relationships" id="256" r:id="R67d377d24c4a46c5"/>
+    <p:sldId xmlns:r="http://schemas.openxmlformats.org/officeDocument/2006/relationships" id="257" r:id="R57d388cc5d7348ea"/>
+    <p:sldId xmlns:r="http://schemas.openxmlformats.org/officeDocument/2006/relationships" id="258" r:id="R6874ec18b93647af"/>
+    <p:sldId xmlns:r="http://schemas.openxmlformats.org/officeDocument/2006/relationships" id="259" r:id="Re5d6524ae56c4892"/>
+    <p:sldId xmlns:r="http://schemas.openxmlformats.org/officeDocument/2006/relationships" id="260" r:id="Racaa33e15d8a46b8"/>
+    <p:sldId xmlns:r="http://schemas.openxmlformats.org/officeDocument/2006/relationships" id="261" r:id="Rf772bcf2c3c64f2e"/>
+    <p:sldId xmlns:r="http://schemas.openxmlformats.org/officeDocument/2006/relationships" id="262" r:id="R1228e3d941964d65"/>
+    <p:sldId xmlns:r="http://schemas.openxmlformats.org/officeDocument/2006/relationships" id="263" r:id="Ra4b80999d6374d60"/>
+    <p:sldId xmlns:r="http://schemas.openxmlformats.org/officeDocument/2006/relationships" id="264" r:id="R3bb208c373ce4cc8"/>
+    <p:sldId xmlns:r="http://schemas.openxmlformats.org/officeDocument/2006/relationships" id="265" r:id="Rc0079dbb22444b13"/>
+    <p:sldId xmlns:r="http://schemas.openxmlformats.org/officeDocument/2006/relationships" id="266" r:id="Rb333aafb64ce4f4b"/>
+    <p:sldId xmlns:r="http://schemas.openxmlformats.org/officeDocument/2006/relationships" id="267" r:id="Rf022bfe8617b431c"/>
+    <p:sldId xmlns:r="http://schemas.openxmlformats.org/officeDocument/2006/relationships" id="268" r:id="R4836f034c74e4b80"/>
+    <p:sldId xmlns:r="http://schemas.openxmlformats.org/officeDocument/2006/relationships" id="269" r:id="R9932f5473614495f"/>
+    <p:sldId xmlns:r="http://schemas.openxmlformats.org/officeDocument/2006/relationships" id="270" r:id="Rc9be82d4d6ec416a"/>
+    <p:sldId xmlns:r="http://schemas.openxmlformats.org/officeDocument/2006/relationships" id="271" r:id="Rcaa56087912e4056"/>
+    <p:sldId xmlns:r="http://schemas.openxmlformats.org/officeDocument/2006/relationships" id="272" r:id="Ra81fc72b50914992"/>
+    <p:sldId xmlns:r="http://schemas.openxmlformats.org/officeDocument/2006/relationships" id="273" r:id="Rd27da6db26b849d7"/>
   </p:sldIdLst>
   <p:sldSz cx="12192000" cy="6858000"/>
   <p:notesSz cx="6858000" cy="9144000"/>
@@ -1005,6 +1009,416 @@
 </p:notes>
 </file>
 
+<file path=ppt/notesSlides/notesSlide15.xml><?xml version="1.0" encoding="utf-8"?>
+<p:notes xmlns:p="http://schemas.openxmlformats.org/presentationml/2006/main">
+  <p:cSld>
+    <p:spTree>
+      <p:nvGrpSpPr>
+        <p:cNvPr id="1" name=""/>
+        <p:cNvGrpSpPr/>
+        <p:nvPr/>
+      </p:nvGrpSpPr>
+      <p:grpSpPr>
+        <a:xfrm xmlns:a="http://schemas.openxmlformats.org/drawingml/2006/main"/>
+      </p:grpSpPr>
+      <p:sp>
+        <p:nvSpPr>
+          <p:cNvPr id="2" name="Slide Image Placeholder 1"/>
+          <p:cNvSpPr>
+            <a:spLocks xmlns:a="http://schemas.openxmlformats.org/drawingml/2006/main" noGrp="1"/>
+          </p:cNvSpPr>
+          <p:nvPr>
+            <p:ph type="sldImg" idx="0"/>
+          </p:nvPr>
+        </p:nvSpPr>
+        <p:spPr/>
+      </p:sp>
+      <p:sp>
+        <p:nvSpPr>
+          <p:cNvPr id="3" name="Notes Placeholder 2"/>
+          <p:cNvSpPr>
+            <a:spLocks xmlns:a="http://schemas.openxmlformats.org/drawingml/2006/main" noGrp="1"/>
+          </p:cNvSpPr>
+          <p:nvPr>
+            <p:ph type="body" idx="1"/>
+          </p:nvPr>
+        </p:nvSpPr>
+        <p:spPr/>
+        <p:txBody>
+          <a:bodyPr xmlns:a="http://schemas.openxmlformats.org/drawingml/2006/main"/>
+          <a:lstStyle xmlns:a="http://schemas.openxmlformats.org/drawingml/2006/main"/>
+          <a:p xmlns:a="http://schemas.openxmlformats.org/drawingml/2006/main">
+            <a:r>
+              <a:t>The source-described ranking and allocation rule was reproduced on the clean locally admitted window. The attempted refresh did not supply pre-2016 coverage, so the published 2008-2026 span remains an explicit STOP.</a:t>
+            </a:r>
+          </a:p>
+          <a:p xmlns:a="http://schemas.openxmlformats.org/drawingml/2006/main">
+            <a:r>
+              <a:t/>
+            </a:r>
+          </a:p>
+          <a:p xmlns:a="http://schemas.openxmlformats.org/drawingml/2006/main">
+            <a:r>
+              <a:t>[Sources]</a:t>
+            </a:r>
+          </a:p>
+          <a:p xmlns:a="http://schemas.openxmlformats.org/drawingml/2006/main">
+            <a:r>
+              <a:t>- C:/Users/Franc/OneDrive/Documents/Francis/Peltata Project/Time-Series-Modeling-Gen5/runs/research_workbench/literature_grounded/lit_mom_03_1_dual_momentum_mechanics_20260902/mom031_report.md</a:t>
+            </a:r>
+          </a:p>
+          <a:p xmlns:a="http://schemas.openxmlformats.org/drawingml/2006/main">
+            <a:r>
+              <a:t>- C:/Users/Franc/OneDrive/Documents/Francis/Peltata Project/Time-Series-Modeling-Gen5/literature_studies/R/gen5_lit_mom_03_1_dual_momentum_mechanics.R</a:t>
+            </a:r>
+          </a:p>
+          <a:p xmlns:a="http://schemas.openxmlformats.org/drawingml/2006/main">
+            <a:r>
+              <a:t>- C:/Users/Franc/OneDrive/Documents/Francis/Peltata Project/Time-Series-Modeling-Gen5/literature_studies/scripts/run_gen5_lit_mom_03_1_dual_momentum_mechanics.R</a:t>
+            </a:r>
+          </a:p>
+          <a:p xmlns:a="http://schemas.openxmlformats.org/drawingml/2006/main">
+            <a:r>
+              <a:t>- https://quantpedia.com/active-dual-momentum-gtaa-strategy/</a:t>
+            </a:r>
+          </a:p>
+          <a:p xmlns:a="http://schemas.openxmlformats.org/drawingml/2006/main">
+            <a:r>
+              <a:t>- Codex task conversation, 2026-09-02 (operator approval and mechanics readout)</a:t>
+            </a:r>
+          </a:p>
+        </p:txBody>
+      </p:sp>
+      <p:sp>
+        <p:nvSpPr>
+          <p:cNvPr id="4" name="Slide Number Placeholder 3"/>
+          <p:cNvSpPr>
+            <a:spLocks xmlns:a="http://schemas.openxmlformats.org/drawingml/2006/main" noGrp="1"/>
+          </p:cNvSpPr>
+          <p:nvPr>
+            <p:ph type="sldNum" idx="5"/>
+          </p:nvPr>
+        </p:nvSpPr>
+        <p:spPr/>
+        <p:txBody>
+          <a:bodyPr xmlns:a="http://schemas.openxmlformats.org/drawingml/2006/main"/>
+          <a:lstStyle xmlns:a="http://schemas.openxmlformats.org/drawingml/2006/main"/>
+          <a:p xmlns:a="http://schemas.openxmlformats.org/drawingml/2006/main"/>
+        </p:txBody>
+      </p:sp>
+    </p:spTree>
+  </p:cSld>
+  <p:clrMapOvr>
+    <a:masterClrMapping xmlns:a="http://schemas.openxmlformats.org/drawingml/2006/main"/>
+  </p:clrMapOvr>
+</p:notes>
+</file>
+
+<file path=ppt/notesSlides/notesSlide16.xml><?xml version="1.0" encoding="utf-8"?>
+<p:notes xmlns:p="http://schemas.openxmlformats.org/presentationml/2006/main">
+  <p:cSld>
+    <p:spTree>
+      <p:nvGrpSpPr>
+        <p:cNvPr id="1" name=""/>
+        <p:cNvGrpSpPr/>
+        <p:nvPr/>
+      </p:nvGrpSpPr>
+      <p:grpSpPr>
+        <a:xfrm xmlns:a="http://schemas.openxmlformats.org/drawingml/2006/main"/>
+      </p:grpSpPr>
+      <p:sp>
+        <p:nvSpPr>
+          <p:cNvPr id="2" name="Slide Image Placeholder 1"/>
+          <p:cNvSpPr>
+            <a:spLocks xmlns:a="http://schemas.openxmlformats.org/drawingml/2006/main" noGrp="1"/>
+          </p:cNvSpPr>
+          <p:nvPr>
+            <p:ph type="sldImg" idx="0"/>
+          </p:nvPr>
+        </p:nvSpPr>
+        <p:spPr/>
+      </p:sp>
+      <p:sp>
+        <p:nvSpPr>
+          <p:cNvPr id="3" name="Notes Placeholder 2"/>
+          <p:cNvSpPr>
+            <a:spLocks xmlns:a="http://schemas.openxmlformats.org/drawingml/2006/main" noGrp="1"/>
+          </p:cNvSpPr>
+          <p:nvPr>
+            <p:ph type="body" idx="1"/>
+          </p:nvPr>
+        </p:nvSpPr>
+        <p:spPr/>
+        <p:txBody>
+          <a:bodyPr xmlns:a="http://schemas.openxmlformats.org/drawingml/2006/main"/>
+          <a:lstStyle xmlns:a="http://schemas.openxmlformats.org/drawingml/2006/main"/>
+          <a:p xmlns:a="http://schemas.openxmlformats.org/drawingml/2006/main">
+            <a:r>
+              <a:t>The chart displays target allocations only. It is not an equity curve and contains no return outcome. Cash appears when one or more top-ranked assets have non-positive momentum in their sleeve.</a:t>
+            </a:r>
+          </a:p>
+          <a:p xmlns:a="http://schemas.openxmlformats.org/drawingml/2006/main">
+            <a:r>
+              <a:t/>
+            </a:r>
+          </a:p>
+          <a:p xmlns:a="http://schemas.openxmlformats.org/drawingml/2006/main">
+            <a:r>
+              <a:t>[Sources]</a:t>
+            </a:r>
+          </a:p>
+          <a:p xmlns:a="http://schemas.openxmlformats.org/drawingml/2006/main">
+            <a:r>
+              <a:t>- C:/Users/Franc/OneDrive/Documents/Francis/Peltata Project/Time-Series-Modeling-Gen5/runs/research_workbench/literature_grounded/lit_mom_03_1_dual_momentum_mechanics_20260902/mom031_report.md</a:t>
+            </a:r>
+          </a:p>
+          <a:p xmlns:a="http://schemas.openxmlformats.org/drawingml/2006/main">
+            <a:r>
+              <a:t>- C:/Users/Franc/OneDrive/Documents/Francis/Peltata Project/Time-Series-Modeling-Gen5/runs/research_workbench/literature_grounded/lit_mom_03_1_dual_momentum_mechanics_20260902/mom031_mechanics_summary.csv</a:t>
+            </a:r>
+          </a:p>
+          <a:p xmlns:a="http://schemas.openxmlformats.org/drawingml/2006/main">
+            <a:r>
+              <a:t>- C:/Users/Franc/OneDrive/Documents/Francis/Peltata Project/Time-Series-Modeling-Gen5/runs/research_workbench/literature_grounded/lit_mom_03_1_dual_momentum_mechanics_20260902/visuals/mom031_allocation_timeline.png</a:t>
+            </a:r>
+          </a:p>
+          <a:p xmlns:a="http://schemas.openxmlformats.org/drawingml/2006/main">
+            <a:r>
+              <a:t>- Codex task conversation, 2026-09-02 (operator approval and mechanics readout)</a:t>
+            </a:r>
+          </a:p>
+        </p:txBody>
+      </p:sp>
+      <p:sp>
+        <p:nvSpPr>
+          <p:cNvPr id="4" name="Slide Number Placeholder 3"/>
+          <p:cNvSpPr>
+            <a:spLocks xmlns:a="http://schemas.openxmlformats.org/drawingml/2006/main" noGrp="1"/>
+          </p:cNvSpPr>
+          <p:nvPr>
+            <p:ph type="sldNum" idx="5"/>
+          </p:nvPr>
+        </p:nvSpPr>
+        <p:spPr/>
+        <p:txBody>
+          <a:bodyPr xmlns:a="http://schemas.openxmlformats.org/drawingml/2006/main"/>
+          <a:lstStyle xmlns:a="http://schemas.openxmlformats.org/drawingml/2006/main"/>
+          <a:p xmlns:a="http://schemas.openxmlformats.org/drawingml/2006/main"/>
+        </p:txBody>
+      </p:sp>
+    </p:spTree>
+  </p:cSld>
+  <p:clrMapOvr>
+    <a:masterClrMapping xmlns:a="http://schemas.openxmlformats.org/drawingml/2006/main"/>
+  </p:clrMapOvr>
+</p:notes>
+</file>
+
+<file path=ppt/notesSlides/notesSlide17.xml><?xml version="1.0" encoding="utf-8"?>
+<p:notes xmlns:p="http://schemas.openxmlformats.org/presentationml/2006/main">
+  <p:cSld>
+    <p:spTree>
+      <p:nvGrpSpPr>
+        <p:cNvPr id="1" name=""/>
+        <p:cNvGrpSpPr/>
+        <p:nvPr/>
+      </p:nvGrpSpPr>
+      <p:grpSpPr>
+        <a:xfrm xmlns:a="http://schemas.openxmlformats.org/drawingml/2006/main"/>
+      </p:grpSpPr>
+      <p:sp>
+        <p:nvSpPr>
+          <p:cNvPr id="2" name="Slide Image Placeholder 1"/>
+          <p:cNvSpPr>
+            <a:spLocks xmlns:a="http://schemas.openxmlformats.org/drawingml/2006/main" noGrp="1"/>
+          </p:cNvSpPr>
+          <p:nvPr>
+            <p:ph type="sldImg" idx="0"/>
+          </p:nvPr>
+        </p:nvSpPr>
+        <p:spPr/>
+      </p:sp>
+      <p:sp>
+        <p:nvSpPr>
+          <p:cNvPr id="3" name="Notes Placeholder 2"/>
+          <p:cNvSpPr>
+            <a:spLocks xmlns:a="http://schemas.openxmlformats.org/drawingml/2006/main" noGrp="1"/>
+          </p:cNvSpPr>
+          <p:nvPr>
+            <p:ph type="body" idx="1"/>
+          </p:nvPr>
+        </p:nvSpPr>
+        <p:spPr/>
+        <p:txBody>
+          <a:bodyPr xmlns:a="http://schemas.openxmlformats.org/drawingml/2006/main"/>
+          <a:lstStyle xmlns:a="http://schemas.openxmlformats.org/drawingml/2006/main"/>
+          <a:p xmlns:a="http://schemas.openxmlformats.org/drawingml/2006/main">
+            <a:r>
+              <a:t>Representative dates were frozen before rendering the slide. The overlap count is descriptive of allocation mechanics and does not establish that overlap helped returns.</a:t>
+            </a:r>
+          </a:p>
+          <a:p xmlns:a="http://schemas.openxmlformats.org/drawingml/2006/main">
+            <a:r>
+              <a:t/>
+            </a:r>
+          </a:p>
+          <a:p xmlns:a="http://schemas.openxmlformats.org/drawingml/2006/main">
+            <a:r>
+              <a:t>[Sources]</a:t>
+            </a:r>
+          </a:p>
+          <a:p xmlns:a="http://schemas.openxmlformats.org/drawingml/2006/main">
+            <a:r>
+              <a:t>- C:/Users/Franc/OneDrive/Documents/Francis/Peltata Project/Time-Series-Modeling-Gen5/runs/research_workbench/literature_grounded/lit_mom_03_1_dual_momentum_mechanics_20260902/mom031_report.md</a:t>
+            </a:r>
+          </a:p>
+          <a:p xmlns:a="http://schemas.openxmlformats.org/drawingml/2006/main">
+            <a:r>
+              <a:t>- C:/Users/Franc/OneDrive/Documents/Francis/Peltata Project/Time-Series-Modeling-Gen5/runs/research_workbench/literature_grounded/lit_mom_03_1_dual_momentum_mechanics_20260902/mom031_representative_allocations.csv</a:t>
+            </a:r>
+          </a:p>
+          <a:p xmlns:a="http://schemas.openxmlformats.org/drawingml/2006/main">
+            <a:r>
+              <a:t>- C:/Users/Franc/OneDrive/Documents/Francis/Peltata Project/Time-Series-Modeling-Gen5/runs/research_workbench/literature_grounded/lit_mom_03_1_dual_momentum_mechanics_20260902/mom031_weekly_allocation_tape.csv</a:t>
+            </a:r>
+          </a:p>
+          <a:p xmlns:a="http://schemas.openxmlformats.org/drawingml/2006/main">
+            <a:r>
+              <a:t>- Codex task conversation, 2026-09-02 (operator approval and mechanics readout)</a:t>
+            </a:r>
+          </a:p>
+        </p:txBody>
+      </p:sp>
+      <p:sp>
+        <p:nvSpPr>
+          <p:cNvPr id="4" name="Slide Number Placeholder 3"/>
+          <p:cNvSpPr>
+            <a:spLocks xmlns:a="http://schemas.openxmlformats.org/drawingml/2006/main" noGrp="1"/>
+          </p:cNvSpPr>
+          <p:nvPr>
+            <p:ph type="sldNum" idx="5"/>
+          </p:nvPr>
+        </p:nvSpPr>
+        <p:spPr/>
+        <p:txBody>
+          <a:bodyPr xmlns:a="http://schemas.openxmlformats.org/drawingml/2006/main"/>
+          <a:lstStyle xmlns:a="http://schemas.openxmlformats.org/drawingml/2006/main"/>
+          <a:p xmlns:a="http://schemas.openxmlformats.org/drawingml/2006/main"/>
+        </p:txBody>
+      </p:sp>
+    </p:spTree>
+  </p:cSld>
+  <p:clrMapOvr>
+    <a:masterClrMapping xmlns:a="http://schemas.openxmlformats.org/drawingml/2006/main"/>
+  </p:clrMapOvr>
+</p:notes>
+</file>
+
+<file path=ppt/notesSlides/notesSlide18.xml><?xml version="1.0" encoding="utf-8"?>
+<p:notes xmlns:p="http://schemas.openxmlformats.org/presentationml/2006/main">
+  <p:cSld>
+    <p:spTree>
+      <p:nvGrpSpPr>
+        <p:cNvPr id="1" name=""/>
+        <p:cNvGrpSpPr/>
+        <p:nvPr/>
+      </p:nvGrpSpPr>
+      <p:grpSpPr>
+        <a:xfrm xmlns:a="http://schemas.openxmlformats.org/drawingml/2006/main"/>
+      </p:grpSpPr>
+      <p:sp>
+        <p:nvSpPr>
+          <p:cNvPr id="2" name="Slide Image Placeholder 1"/>
+          <p:cNvSpPr>
+            <a:spLocks xmlns:a="http://schemas.openxmlformats.org/drawingml/2006/main" noGrp="1"/>
+          </p:cNvSpPr>
+          <p:nvPr>
+            <p:ph type="sldImg" idx="0"/>
+          </p:nvPr>
+        </p:nvSpPr>
+        <p:spPr/>
+      </p:sp>
+      <p:sp>
+        <p:nvSpPr>
+          <p:cNvPr id="3" name="Notes Placeholder 2"/>
+          <p:cNvSpPr>
+            <a:spLocks xmlns:a="http://schemas.openxmlformats.org/drawingml/2006/main" noGrp="1"/>
+          </p:cNvSpPr>
+          <p:nvPr>
+            <p:ph type="body" idx="1"/>
+          </p:nvPr>
+        </p:nvSpPr>
+        <p:spPr/>
+        <p:txBody>
+          <a:bodyPr xmlns:a="http://schemas.openxmlformats.org/drawingml/2006/main"/>
+          <a:lstStyle xmlns:a="http://schemas.openxmlformats.org/drawingml/2006/main"/>
+          <a:p xmlns:a="http://schemas.openxmlformats.org/drawingml/2006/main">
+            <a:r>
+              <a:t>This slide closes the mechanics-only slice. The next performance gate requires explicit operator authorization under the Gen5 research contract.</a:t>
+            </a:r>
+          </a:p>
+          <a:p xmlns:a="http://schemas.openxmlformats.org/drawingml/2006/main">
+            <a:r>
+              <a:t/>
+            </a:r>
+          </a:p>
+          <a:p xmlns:a="http://schemas.openxmlformats.org/drawingml/2006/main">
+            <a:r>
+              <a:t>[Sources]</a:t>
+            </a:r>
+          </a:p>
+          <a:p xmlns:a="http://schemas.openxmlformats.org/drawingml/2006/main">
+            <a:r>
+              <a:t>- C:/Users/Franc/OneDrive/Documents/Francis/Peltata Project/Time-Series-Modeling-Gen5/runs/research_workbench/literature_grounded/lit_mom_03_1_dual_momentum_mechanics_20260902/mom031_report.md</a:t>
+            </a:r>
+          </a:p>
+          <a:p xmlns:a="http://schemas.openxmlformats.org/drawingml/2006/main">
+            <a:r>
+              <a:t>- C:/Users/Franc/OneDrive/Documents/Francis/Peltata Project/Time-Series-Modeling-Gen5/literature_studies/R/gen5_lit_mom_03_1_dual_momentum_mechanics.R</a:t>
+            </a:r>
+          </a:p>
+          <a:p xmlns:a="http://schemas.openxmlformats.org/drawingml/2006/main">
+            <a:r>
+              <a:t>- C:/Users/Franc/OneDrive/Documents/Francis/Peltata Project/Time-Series-Modeling-Gen5/literature_studies/scripts/run_gen5_lit_mom_03_1_dual_momentum_mechanics.R</a:t>
+            </a:r>
+          </a:p>
+          <a:p xmlns:a="http://schemas.openxmlformats.org/drawingml/2006/main">
+            <a:r>
+              <a:t>- https://quantpedia.com/active-dual-momentum-gtaa-strategy/</a:t>
+            </a:r>
+          </a:p>
+          <a:p xmlns:a="http://schemas.openxmlformats.org/drawingml/2006/main">
+            <a:r>
+              <a:t>- Codex task conversation, 2026-09-02 (operator approval and mechanics readout)</a:t>
+            </a:r>
+          </a:p>
+        </p:txBody>
+      </p:sp>
+      <p:sp>
+        <p:nvSpPr>
+          <p:cNvPr id="4" name="Slide Number Placeholder 3"/>
+          <p:cNvSpPr>
+            <a:spLocks xmlns:a="http://schemas.openxmlformats.org/drawingml/2006/main" noGrp="1"/>
+          </p:cNvSpPr>
+          <p:nvPr>
+            <p:ph type="sldNum" idx="5"/>
+          </p:nvPr>
+        </p:nvSpPr>
+        <p:spPr/>
+        <p:txBody>
+          <a:bodyPr xmlns:a="http://schemas.openxmlformats.org/drawingml/2006/main"/>
+          <a:lstStyle xmlns:a="http://schemas.openxmlformats.org/drawingml/2006/main"/>
+          <a:p xmlns:a="http://schemas.openxmlformats.org/drawingml/2006/main"/>
+        </p:txBody>
+      </p:sp>
+    </p:spTree>
+  </p:cSld>
+  <p:clrMapOvr>
+    <a:masterClrMapping xmlns:a="http://schemas.openxmlformats.org/drawingml/2006/main"/>
+  </p:clrMapOvr>
+</p:notes>
+</file>
+
 <file path=ppt/notesSlides/notesSlide2.xml><?xml version="1.0" encoding="utf-8"?>
 <p:notes xmlns:p="http://schemas.openxmlformats.org/presentationml/2006/main">
   <p:cSld>
@@ -1823,7 +2237,7 @@
   </p:cSld>
   <p:clrMap bg1="lt1" tx1="dk1" bg2="lt2" tx2="dk2" accent1="accent1" accent2="accent2" accent3="accent3" accent4="accent4" accent5="accent5" accent6="accent6" hlink="hlink" folHlink="folHlink"/>
   <p:sldLayoutIdLst>
-    <p:sldLayoutId xmlns:r="http://schemas.openxmlformats.org/officeDocument/2006/relationships" id="2147483649" r:id="Rf63350cd78af4eb0"/>
+    <p:sldLayoutId xmlns:r="http://schemas.openxmlformats.org/officeDocument/2006/relationships" id="2147483649" r:id="R0b1eab2b973f459e"/>
   </p:sldLayoutIdLst>
   <p:txStyles>
     <p:titleStyle>
@@ -2402,6 +2816,7 @@
           <a:lstStyle xmlns:a="http://schemas.openxmlformats.org/drawingml/2006/main"/>
           <a:p xmlns:a="http://schemas.openxmlformats.org/drawingml/2006/main">
             <a:pPr algn="l">
+              <a:buNone/>
               <a:defRPr sz="1275" b="1">
                 <a:solidFill>
                   <a:srgbClr val="3D8DFF"/>
@@ -2458,6 +2873,7 @@
           <a:lstStyle xmlns:a="http://schemas.openxmlformats.org/drawingml/2006/main"/>
           <a:p xmlns:a="http://schemas.openxmlformats.org/drawingml/2006/main">
             <a:pPr algn="l">
+              <a:buNone/>
               <a:defRPr sz="5100" b="1">
                 <a:solidFill>
                   <a:srgbClr val="101820"/>
@@ -2514,6 +2930,7 @@
           <a:lstStyle xmlns:a="http://schemas.openxmlformats.org/drawingml/2006/main"/>
           <a:p xmlns:a="http://schemas.openxmlformats.org/drawingml/2006/main">
             <a:pPr algn="l">
+              <a:buNone/>
               <a:defRPr sz="2325" b="0">
                 <a:solidFill>
                   <a:srgbClr val="52616B"/>
@@ -2603,6 +3020,7 @@
           <a:lstStyle xmlns:a="http://schemas.openxmlformats.org/drawingml/2006/main"/>
           <a:p xmlns:a="http://schemas.openxmlformats.org/drawingml/2006/main">
             <a:pPr algn="l">
+              <a:buNone/>
               <a:defRPr sz="1875" b="1">
                 <a:solidFill>
                   <a:srgbClr val="3D8DFF"/>
@@ -2659,6 +3077,7 @@
           <a:lstStyle xmlns:a="http://schemas.openxmlformats.org/drawingml/2006/main"/>
           <a:p xmlns:a="http://schemas.openxmlformats.org/drawingml/2006/main">
             <a:pPr algn="l">
+              <a:buNone/>
               <a:defRPr sz="1275" b="1">
                 <a:solidFill>
                   <a:srgbClr val="52616B"/>
@@ -2715,6 +3134,7 @@
           <a:lstStyle xmlns:a="http://schemas.openxmlformats.org/drawingml/2006/main"/>
           <a:p xmlns:a="http://schemas.openxmlformats.org/drawingml/2006/main">
             <a:pPr algn="l">
+              <a:buNone/>
               <a:defRPr sz="1950" b="1">
                 <a:solidFill>
                   <a:srgbClr val="101820"/>
@@ -2771,6 +3191,7 @@
           <a:lstStyle xmlns:a="http://schemas.openxmlformats.org/drawingml/2006/main"/>
           <a:p xmlns:a="http://schemas.openxmlformats.org/drawingml/2006/main">
             <a:pPr algn="l">
+              <a:buNone/>
               <a:defRPr sz="1275" b="1">
                 <a:solidFill>
                   <a:srgbClr val="52616B"/>
@@ -2827,6 +3248,7 @@
           <a:lstStyle xmlns:a="http://schemas.openxmlformats.org/drawingml/2006/main"/>
           <a:p xmlns:a="http://schemas.openxmlformats.org/drawingml/2006/main">
             <a:pPr algn="l">
+              <a:buNone/>
               <a:defRPr sz="1950" b="1">
                 <a:solidFill>
                   <a:srgbClr val="C8553D"/>
@@ -2850,6 +3272,7 @@
           </a:p>
           <a:p xmlns:a="http://schemas.openxmlformats.org/drawingml/2006/main">
             <a:pPr algn="l">
+              <a:buNone/>
               <a:defRPr sz="1950" b="1">
                 <a:solidFill>
                   <a:srgbClr val="C8553D"/>
@@ -2906,6 +3329,7 @@
           <a:lstStyle xmlns:a="http://schemas.openxmlformats.org/drawingml/2006/main"/>
           <a:p xmlns:a="http://schemas.openxmlformats.org/drawingml/2006/main">
             <a:pPr algn="l">
+              <a:buNone/>
               <a:defRPr sz="1425" b="0">
                 <a:solidFill>
                   <a:srgbClr val="52616B"/>
@@ -2962,6 +3386,7 @@
           <a:lstStyle xmlns:a="http://schemas.openxmlformats.org/drawingml/2006/main"/>
           <a:p xmlns:a="http://schemas.openxmlformats.org/drawingml/2006/main">
             <a:pPr algn="r">
+              <a:buNone/>
               <a:defRPr sz="1200" b="0">
                 <a:solidFill>
                   <a:srgbClr val="52616B"/>
@@ -3047,6 +3472,7 @@
           <a:lstStyle xmlns:a="http://schemas.openxmlformats.org/drawingml/2006/main"/>
           <a:p xmlns:a="http://schemas.openxmlformats.org/drawingml/2006/main">
             <a:pPr algn="l">
+              <a:buNone/>
               <a:defRPr sz="1200" b="1">
                 <a:solidFill>
                   <a:srgbClr val="3D8DFF"/>
@@ -3103,6 +3529,7 @@
           <a:lstStyle xmlns:a="http://schemas.openxmlformats.org/drawingml/2006/main"/>
           <a:p xmlns:a="http://schemas.openxmlformats.org/drawingml/2006/main">
             <a:pPr algn="l">
+              <a:buNone/>
               <a:defRPr sz="2700" b="1">
                 <a:solidFill>
                   <a:srgbClr val="101820"/>
@@ -3190,6 +3617,7 @@
           <a:lstStyle xmlns:a="http://schemas.openxmlformats.org/drawingml/2006/main"/>
           <a:p xmlns:a="http://schemas.openxmlformats.org/drawingml/2006/main">
             <a:pPr algn="r">
+              <a:buNone/>
               <a:defRPr sz="1200" b="0">
                 <a:solidFill>
                   <a:srgbClr val="52616B"/>
@@ -3310,6 +3738,7 @@
           <a:lstStyle xmlns:a="http://schemas.openxmlformats.org/drawingml/2006/main"/>
           <a:p xmlns:a="http://schemas.openxmlformats.org/drawingml/2006/main">
             <a:pPr algn="l">
+              <a:buNone/>
               <a:defRPr sz="1350" b="1">
                 <a:solidFill>
                   <a:srgbClr val="C8553D"/>
@@ -3366,6 +3795,7 @@
           <a:lstStyle xmlns:a="http://schemas.openxmlformats.org/drawingml/2006/main"/>
           <a:p xmlns:a="http://schemas.openxmlformats.org/drawingml/2006/main">
             <a:pPr algn="l">
+              <a:buNone/>
               <a:defRPr sz="1500" b="1">
                 <a:solidFill>
                   <a:srgbClr val="101820"/>
@@ -3455,6 +3885,7 @@
           <a:lstStyle xmlns:a="http://schemas.openxmlformats.org/drawingml/2006/main"/>
           <a:p xmlns:a="http://schemas.openxmlformats.org/drawingml/2006/main">
             <a:pPr algn="l">
+              <a:buNone/>
               <a:defRPr sz="1350" b="1">
                 <a:solidFill>
                   <a:srgbClr val="C8553D"/>
@@ -3511,6 +3942,7 @@
           <a:lstStyle xmlns:a="http://schemas.openxmlformats.org/drawingml/2006/main"/>
           <a:p xmlns:a="http://schemas.openxmlformats.org/drawingml/2006/main">
             <a:pPr algn="l">
+              <a:buNone/>
               <a:defRPr sz="1500" b="1">
                 <a:solidFill>
                   <a:srgbClr val="101820"/>
@@ -3600,6 +4032,7 @@
           <a:lstStyle xmlns:a="http://schemas.openxmlformats.org/drawingml/2006/main"/>
           <a:p xmlns:a="http://schemas.openxmlformats.org/drawingml/2006/main">
             <a:pPr algn="l">
+              <a:buNone/>
               <a:defRPr sz="1350" b="1">
                 <a:solidFill>
                   <a:srgbClr val="3D8DFF"/>
@@ -3656,6 +4089,7 @@
           <a:lstStyle xmlns:a="http://schemas.openxmlformats.org/drawingml/2006/main"/>
           <a:p xmlns:a="http://schemas.openxmlformats.org/drawingml/2006/main">
             <a:pPr algn="l">
+              <a:buNone/>
               <a:defRPr sz="1500" b="1">
                 <a:solidFill>
                   <a:srgbClr val="101820"/>
@@ -3745,6 +4179,7 @@
           <a:lstStyle xmlns:a="http://schemas.openxmlformats.org/drawingml/2006/main"/>
           <a:p xmlns:a="http://schemas.openxmlformats.org/drawingml/2006/main">
             <a:pPr algn="l">
+              <a:buNone/>
               <a:defRPr sz="1350" b="1">
                 <a:solidFill>
                   <a:srgbClr val="3D8DFF"/>
@@ -3801,6 +4236,7 @@
           <a:lstStyle xmlns:a="http://schemas.openxmlformats.org/drawingml/2006/main"/>
           <a:p xmlns:a="http://schemas.openxmlformats.org/drawingml/2006/main">
             <a:pPr algn="l">
+              <a:buNone/>
               <a:defRPr sz="1500" b="1">
                 <a:solidFill>
                   <a:srgbClr val="101820"/>
@@ -3890,6 +4326,7 @@
           <a:lstStyle xmlns:a="http://schemas.openxmlformats.org/drawingml/2006/main"/>
           <a:p xmlns:a="http://schemas.openxmlformats.org/drawingml/2006/main">
             <a:pPr algn="l">
+              <a:buNone/>
               <a:defRPr sz="1350" b="1">
                 <a:solidFill>
                   <a:srgbClr val="3D8DFF"/>
@@ -3946,6 +4383,7 @@
           <a:lstStyle xmlns:a="http://schemas.openxmlformats.org/drawingml/2006/main"/>
           <a:p xmlns:a="http://schemas.openxmlformats.org/drawingml/2006/main">
             <a:pPr algn="l">
+              <a:buNone/>
               <a:defRPr sz="1500" b="1">
                 <a:solidFill>
                   <a:srgbClr val="101820"/>
@@ -4035,6 +4473,7 @@
           <a:lstStyle xmlns:a="http://schemas.openxmlformats.org/drawingml/2006/main"/>
           <a:p xmlns:a="http://schemas.openxmlformats.org/drawingml/2006/main">
             <a:pPr algn="ctr">
+              <a:buNone/>
               <a:defRPr sz="1875" b="1">
                 <a:solidFill>
                   <a:srgbClr val="C8553D"/>
@@ -4120,6 +4559,7 @@
           <a:lstStyle xmlns:a="http://schemas.openxmlformats.org/drawingml/2006/main"/>
           <a:p xmlns:a="http://schemas.openxmlformats.org/drawingml/2006/main">
             <a:pPr algn="l">
+              <a:buNone/>
               <a:defRPr sz="1200" b="1">
                 <a:solidFill>
                   <a:srgbClr val="3D8DFF"/>
@@ -4176,6 +4616,7 @@
           <a:lstStyle xmlns:a="http://schemas.openxmlformats.org/drawingml/2006/main"/>
           <a:p xmlns:a="http://schemas.openxmlformats.org/drawingml/2006/main">
             <a:pPr algn="l">
+              <a:buNone/>
               <a:defRPr sz="2700" b="1">
                 <a:solidFill>
                   <a:srgbClr val="101820"/>
@@ -4263,6 +4704,7 @@
           <a:lstStyle xmlns:a="http://schemas.openxmlformats.org/drawingml/2006/main"/>
           <a:p xmlns:a="http://schemas.openxmlformats.org/drawingml/2006/main">
             <a:pPr algn="r">
+              <a:buNone/>
               <a:defRPr sz="1200" b="0">
                 <a:solidFill>
                   <a:srgbClr val="52616B"/>
@@ -4319,6 +4761,7 @@
           <a:lstStyle xmlns:a="http://schemas.openxmlformats.org/drawingml/2006/main"/>
           <a:p xmlns:a="http://schemas.openxmlformats.org/drawingml/2006/main">
             <a:pPr algn="l">
+              <a:buNone/>
               <a:defRPr sz="1275" b="1">
                 <a:solidFill>
                   <a:srgbClr val="2E7D5B"/>
@@ -4441,6 +4884,7 @@
           <a:lstStyle xmlns:a="http://schemas.openxmlformats.org/drawingml/2006/main"/>
           <a:p xmlns:a="http://schemas.openxmlformats.org/drawingml/2006/main">
             <a:pPr algn="l">
+              <a:buNone/>
               <a:defRPr sz="1725" b="0">
                 <a:solidFill>
                   <a:srgbClr val="101820"/>
@@ -4530,6 +4974,7 @@
           <a:lstStyle xmlns:a="http://schemas.openxmlformats.org/drawingml/2006/main"/>
           <a:p xmlns:a="http://schemas.openxmlformats.org/drawingml/2006/main">
             <a:pPr algn="l">
+              <a:buNone/>
               <a:defRPr sz="1725" b="0">
                 <a:solidFill>
                   <a:srgbClr val="101820"/>
@@ -4619,6 +5064,7 @@
           <a:lstStyle xmlns:a="http://schemas.openxmlformats.org/drawingml/2006/main"/>
           <a:p xmlns:a="http://schemas.openxmlformats.org/drawingml/2006/main">
             <a:pPr algn="l">
+              <a:buNone/>
               <a:defRPr sz="1725" b="0">
                 <a:solidFill>
                   <a:srgbClr val="101820"/>
@@ -4708,6 +5154,7 @@
           <a:lstStyle xmlns:a="http://schemas.openxmlformats.org/drawingml/2006/main"/>
           <a:p xmlns:a="http://schemas.openxmlformats.org/drawingml/2006/main">
             <a:pPr algn="l">
+              <a:buNone/>
               <a:defRPr sz="1725" b="0">
                 <a:solidFill>
                   <a:srgbClr val="101820"/>
@@ -4797,6 +5244,7 @@
           <a:lstStyle xmlns:a="http://schemas.openxmlformats.org/drawingml/2006/main"/>
           <a:p xmlns:a="http://schemas.openxmlformats.org/drawingml/2006/main">
             <a:pPr algn="l">
+              <a:buNone/>
               <a:defRPr sz="1725" b="0">
                 <a:solidFill>
                   <a:srgbClr val="101820"/>
@@ -4853,6 +5301,7 @@
           <a:lstStyle xmlns:a="http://schemas.openxmlformats.org/drawingml/2006/main"/>
           <a:p xmlns:a="http://schemas.openxmlformats.org/drawingml/2006/main">
             <a:pPr algn="l">
+              <a:buNone/>
               <a:defRPr sz="1275" b="1">
                 <a:solidFill>
                   <a:srgbClr val="C8553D"/>
@@ -4975,6 +5424,7 @@
           <a:lstStyle xmlns:a="http://schemas.openxmlformats.org/drawingml/2006/main"/>
           <a:p xmlns:a="http://schemas.openxmlformats.org/drawingml/2006/main">
             <a:pPr algn="l">
+              <a:buNone/>
               <a:defRPr sz="1725" b="0">
                 <a:solidFill>
                   <a:srgbClr val="101820"/>
@@ -5064,6 +5514,7 @@
           <a:lstStyle xmlns:a="http://schemas.openxmlformats.org/drawingml/2006/main"/>
           <a:p xmlns:a="http://schemas.openxmlformats.org/drawingml/2006/main">
             <a:pPr algn="l">
+              <a:buNone/>
               <a:defRPr sz="1725" b="0">
                 <a:solidFill>
                   <a:srgbClr val="101820"/>
@@ -5153,6 +5604,7 @@
           <a:lstStyle xmlns:a="http://schemas.openxmlformats.org/drawingml/2006/main"/>
           <a:p xmlns:a="http://schemas.openxmlformats.org/drawingml/2006/main">
             <a:pPr algn="l">
+              <a:buNone/>
               <a:defRPr sz="1725" b="0">
                 <a:solidFill>
                   <a:srgbClr val="101820"/>
@@ -5242,6 +5694,7 @@
           <a:lstStyle xmlns:a="http://schemas.openxmlformats.org/drawingml/2006/main"/>
           <a:p xmlns:a="http://schemas.openxmlformats.org/drawingml/2006/main">
             <a:pPr algn="l">
+              <a:buNone/>
               <a:defRPr sz="1725" b="0">
                 <a:solidFill>
                   <a:srgbClr val="101820"/>
@@ -5331,6 +5784,7 @@
           <a:lstStyle xmlns:a="http://schemas.openxmlformats.org/drawingml/2006/main"/>
           <a:p xmlns:a="http://schemas.openxmlformats.org/drawingml/2006/main">
             <a:pPr algn="l">
+              <a:buNone/>
               <a:defRPr sz="1725" b="0">
                 <a:solidFill>
                   <a:srgbClr val="101820"/>
@@ -5416,6 +5870,7 @@
           <a:lstStyle xmlns:a="http://schemas.openxmlformats.org/drawingml/2006/main"/>
           <a:p xmlns:a="http://schemas.openxmlformats.org/drawingml/2006/main">
             <a:pPr algn="l">
+              <a:buNone/>
               <a:defRPr sz="1200" b="1">
                 <a:solidFill>
                   <a:srgbClr val="3D8DFF"/>
@@ -5472,6 +5927,7 @@
           <a:lstStyle xmlns:a="http://schemas.openxmlformats.org/drawingml/2006/main"/>
           <a:p xmlns:a="http://schemas.openxmlformats.org/drawingml/2006/main">
             <a:pPr algn="l">
+              <a:buNone/>
               <a:defRPr sz="2700" b="1">
                 <a:solidFill>
                   <a:srgbClr val="101820"/>
@@ -5559,6 +6015,7 @@
           <a:lstStyle xmlns:a="http://schemas.openxmlformats.org/drawingml/2006/main"/>
           <a:p xmlns:a="http://schemas.openxmlformats.org/drawingml/2006/main">
             <a:pPr algn="r">
+              <a:buNone/>
               <a:defRPr sz="1200" b="0">
                 <a:solidFill>
                   <a:srgbClr val="52616B"/>
@@ -5648,6 +6105,7 @@
           <a:lstStyle xmlns:a="http://schemas.openxmlformats.org/drawingml/2006/main"/>
           <a:p xmlns:a="http://schemas.openxmlformats.org/drawingml/2006/main">
             <a:pPr algn="l">
+              <a:buNone/>
               <a:defRPr sz="2550" b="1">
                 <a:solidFill>
                   <a:srgbClr val="3D8DFF"/>
@@ -5704,6 +6162,7 @@
           <a:lstStyle xmlns:a="http://schemas.openxmlformats.org/drawingml/2006/main"/>
           <a:p xmlns:a="http://schemas.openxmlformats.org/drawingml/2006/main">
             <a:pPr algn="l">
+              <a:buNone/>
               <a:defRPr sz="2175" b="1">
                 <a:solidFill>
                   <a:srgbClr val="101820"/>
@@ -5760,6 +6219,7 @@
           <a:lstStyle xmlns:a="http://schemas.openxmlformats.org/drawingml/2006/main"/>
           <a:p xmlns:a="http://schemas.openxmlformats.org/drawingml/2006/main">
             <a:pPr algn="l">
+              <a:buNone/>
               <a:defRPr sz="1575" b="0">
                 <a:solidFill>
                   <a:srgbClr val="52616B"/>
@@ -5849,6 +6309,7 @@
           <a:lstStyle xmlns:a="http://schemas.openxmlformats.org/drawingml/2006/main"/>
           <a:p xmlns:a="http://schemas.openxmlformats.org/drawingml/2006/main">
             <a:pPr algn="l">
+              <a:buNone/>
               <a:defRPr sz="2550" b="1">
                 <a:solidFill>
                   <a:srgbClr val="3D8DFF"/>
@@ -5905,6 +6366,7 @@
           <a:lstStyle xmlns:a="http://schemas.openxmlformats.org/drawingml/2006/main"/>
           <a:p xmlns:a="http://schemas.openxmlformats.org/drawingml/2006/main">
             <a:pPr algn="l">
+              <a:buNone/>
               <a:defRPr sz="2175" b="1">
                 <a:solidFill>
                   <a:srgbClr val="101820"/>
@@ -5961,6 +6423,7 @@
           <a:lstStyle xmlns:a="http://schemas.openxmlformats.org/drawingml/2006/main"/>
           <a:p xmlns:a="http://schemas.openxmlformats.org/drawingml/2006/main">
             <a:pPr algn="l">
+              <a:buNone/>
               <a:defRPr sz="1575" b="0">
                 <a:solidFill>
                   <a:srgbClr val="52616B"/>
@@ -6050,6 +6513,7 @@
           <a:lstStyle xmlns:a="http://schemas.openxmlformats.org/drawingml/2006/main"/>
           <a:p xmlns:a="http://schemas.openxmlformats.org/drawingml/2006/main">
             <a:pPr algn="l">
+              <a:buNone/>
               <a:defRPr sz="2550" b="1">
                 <a:solidFill>
                   <a:srgbClr val="3D8DFF"/>
@@ -6106,6 +6570,7 @@
           <a:lstStyle xmlns:a="http://schemas.openxmlformats.org/drawingml/2006/main"/>
           <a:p xmlns:a="http://schemas.openxmlformats.org/drawingml/2006/main">
             <a:pPr algn="l">
+              <a:buNone/>
               <a:defRPr sz="2175" b="1">
                 <a:solidFill>
                   <a:srgbClr val="101820"/>
@@ -6162,6 +6627,7 @@
           <a:lstStyle xmlns:a="http://schemas.openxmlformats.org/drawingml/2006/main"/>
           <a:p xmlns:a="http://schemas.openxmlformats.org/drawingml/2006/main">
             <a:pPr algn="l">
+              <a:buNone/>
               <a:defRPr sz="1575" b="0">
                 <a:solidFill>
                   <a:srgbClr val="52616B"/>
@@ -6251,6 +6717,7 @@
           <a:lstStyle xmlns:a="http://schemas.openxmlformats.org/drawingml/2006/main"/>
           <a:p xmlns:a="http://schemas.openxmlformats.org/drawingml/2006/main">
             <a:pPr algn="l">
+              <a:buNone/>
               <a:defRPr sz="2550" b="1">
                 <a:solidFill>
                   <a:srgbClr val="3D8DFF"/>
@@ -6307,6 +6774,7 @@
           <a:lstStyle xmlns:a="http://schemas.openxmlformats.org/drawingml/2006/main"/>
           <a:p xmlns:a="http://schemas.openxmlformats.org/drawingml/2006/main">
             <a:pPr algn="l">
+              <a:buNone/>
               <a:defRPr sz="2175" b="1">
                 <a:solidFill>
                   <a:srgbClr val="101820"/>
@@ -6363,6 +6831,7 @@
           <a:lstStyle xmlns:a="http://schemas.openxmlformats.org/drawingml/2006/main"/>
           <a:p xmlns:a="http://schemas.openxmlformats.org/drawingml/2006/main">
             <a:pPr algn="l">
+              <a:buNone/>
               <a:defRPr sz="1575" b="0">
                 <a:solidFill>
                   <a:srgbClr val="52616B"/>
@@ -6448,6 +6917,7 @@
           <a:lstStyle xmlns:a="http://schemas.openxmlformats.org/drawingml/2006/main"/>
           <a:p xmlns:a="http://schemas.openxmlformats.org/drawingml/2006/main">
             <a:pPr algn="l">
+              <a:buNone/>
               <a:defRPr sz="1200" b="1">
                 <a:solidFill>
                   <a:srgbClr val="3D8DFF"/>
@@ -6504,6 +6974,7 @@
           <a:lstStyle xmlns:a="http://schemas.openxmlformats.org/drawingml/2006/main"/>
           <a:p xmlns:a="http://schemas.openxmlformats.org/drawingml/2006/main">
             <a:pPr algn="l">
+              <a:buNone/>
               <a:defRPr sz="2700" b="1">
                 <a:solidFill>
                   <a:srgbClr val="101820"/>
@@ -6591,6 +7062,7 @@
           <a:lstStyle xmlns:a="http://schemas.openxmlformats.org/drawingml/2006/main"/>
           <a:p xmlns:a="http://schemas.openxmlformats.org/drawingml/2006/main">
             <a:pPr algn="r">
+              <a:buNone/>
               <a:defRPr sz="1200" b="0">
                 <a:solidFill>
                   <a:srgbClr val="52616B"/>
@@ -6680,6 +7152,7 @@
           <a:lstStyle xmlns:a="http://schemas.openxmlformats.org/drawingml/2006/main"/>
           <a:p xmlns:a="http://schemas.openxmlformats.org/drawingml/2006/main">
             <a:pPr algn="l">
+              <a:buNone/>
               <a:defRPr sz="1875" b="1">
                 <a:solidFill>
                   <a:srgbClr val="3D8DFF"/>
@@ -6736,6 +7209,7 @@
           <a:lstStyle xmlns:a="http://schemas.openxmlformats.org/drawingml/2006/main"/>
           <a:p xmlns:a="http://schemas.openxmlformats.org/drawingml/2006/main">
             <a:pPr algn="l">
+              <a:buNone/>
               <a:defRPr sz="1575" b="0">
                 <a:solidFill>
                   <a:srgbClr val="52616B"/>
@@ -6792,6 +7266,7 @@
           <a:lstStyle xmlns:a="http://schemas.openxmlformats.org/drawingml/2006/main"/>
           <a:p xmlns:a="http://schemas.openxmlformats.org/drawingml/2006/main">
             <a:pPr algn="ctr">
+              <a:buNone/>
               <a:defRPr sz="2550" b="1">
                 <a:solidFill>
                   <a:srgbClr val="3D8DFF"/>
@@ -6881,6 +7356,7 @@
           <a:lstStyle xmlns:a="http://schemas.openxmlformats.org/drawingml/2006/main"/>
           <a:p xmlns:a="http://schemas.openxmlformats.org/drawingml/2006/main">
             <a:pPr algn="l">
+              <a:buNone/>
               <a:defRPr sz="1875" b="1">
                 <a:solidFill>
                   <a:srgbClr val="101820"/>
@@ -6937,6 +7413,7 @@
           <a:lstStyle xmlns:a="http://schemas.openxmlformats.org/drawingml/2006/main"/>
           <a:p xmlns:a="http://schemas.openxmlformats.org/drawingml/2006/main">
             <a:pPr algn="l">
+              <a:buNone/>
               <a:defRPr sz="1575" b="0">
                 <a:solidFill>
                   <a:srgbClr val="52616B"/>
@@ -6993,6 +7470,7 @@
           <a:lstStyle xmlns:a="http://schemas.openxmlformats.org/drawingml/2006/main"/>
           <a:p xmlns:a="http://schemas.openxmlformats.org/drawingml/2006/main">
             <a:pPr algn="ctr">
+              <a:buNone/>
               <a:defRPr sz="2550" b="1">
                 <a:solidFill>
                   <a:srgbClr val="3D8DFF"/>
@@ -7082,6 +7560,7 @@
           <a:lstStyle xmlns:a="http://schemas.openxmlformats.org/drawingml/2006/main"/>
           <a:p xmlns:a="http://schemas.openxmlformats.org/drawingml/2006/main">
             <a:pPr algn="l">
+              <a:buNone/>
               <a:defRPr sz="1875" b="1">
                 <a:solidFill>
                   <a:srgbClr val="101820"/>
@@ -7138,6 +7617,7 @@
           <a:lstStyle xmlns:a="http://schemas.openxmlformats.org/drawingml/2006/main"/>
           <a:p xmlns:a="http://schemas.openxmlformats.org/drawingml/2006/main">
             <a:pPr algn="l">
+              <a:buNone/>
               <a:defRPr sz="1575" b="0">
                 <a:solidFill>
                   <a:srgbClr val="52616B"/>
@@ -7194,6 +7674,7 @@
           <a:lstStyle xmlns:a="http://schemas.openxmlformats.org/drawingml/2006/main"/>
           <a:p xmlns:a="http://schemas.openxmlformats.org/drawingml/2006/main">
             <a:pPr algn="ctr">
+              <a:buNone/>
               <a:defRPr sz="2550" b="1">
                 <a:solidFill>
                   <a:srgbClr val="3D8DFF"/>
@@ -7283,6 +7764,7 @@
           <a:lstStyle xmlns:a="http://schemas.openxmlformats.org/drawingml/2006/main"/>
           <a:p xmlns:a="http://schemas.openxmlformats.org/drawingml/2006/main">
             <a:pPr algn="l">
+              <a:buNone/>
               <a:defRPr sz="1875" b="1">
                 <a:solidFill>
                   <a:srgbClr val="101820"/>
@@ -7339,6 +7821,7 @@
           <a:lstStyle xmlns:a="http://schemas.openxmlformats.org/drawingml/2006/main"/>
           <a:p xmlns:a="http://schemas.openxmlformats.org/drawingml/2006/main">
             <a:pPr algn="l">
+              <a:buNone/>
               <a:defRPr sz="1575" b="0">
                 <a:solidFill>
                   <a:srgbClr val="52616B"/>
@@ -7395,6 +7878,7 @@
           <a:lstStyle xmlns:a="http://schemas.openxmlformats.org/drawingml/2006/main"/>
           <a:p xmlns:a="http://schemas.openxmlformats.org/drawingml/2006/main">
             <a:pPr algn="ctr">
+              <a:buNone/>
               <a:defRPr sz="2175" b="1">
                 <a:solidFill>
                   <a:srgbClr val="101820"/>
@@ -7480,6 +7964,7 @@
           <a:lstStyle xmlns:a="http://schemas.openxmlformats.org/drawingml/2006/main"/>
           <a:p xmlns:a="http://schemas.openxmlformats.org/drawingml/2006/main">
             <a:pPr algn="l">
+              <a:buNone/>
               <a:defRPr sz="1200" b="1">
                 <a:solidFill>
                   <a:srgbClr val="3D8DFF"/>
@@ -7536,6 +8021,7 @@
           <a:lstStyle xmlns:a="http://schemas.openxmlformats.org/drawingml/2006/main"/>
           <a:p xmlns:a="http://schemas.openxmlformats.org/drawingml/2006/main">
             <a:pPr algn="l">
+              <a:buNone/>
               <a:defRPr sz="2700" b="1">
                 <a:solidFill>
                   <a:srgbClr val="101820"/>
@@ -7623,6 +8109,7 @@
           <a:lstStyle xmlns:a="http://schemas.openxmlformats.org/drawingml/2006/main"/>
           <a:p xmlns:a="http://schemas.openxmlformats.org/drawingml/2006/main">
             <a:pPr algn="r">
+              <a:buNone/>
               <a:defRPr sz="1200" b="0">
                 <a:solidFill>
                   <a:srgbClr val="52616B"/>
@@ -7679,6 +8166,7 @@
           <a:lstStyle xmlns:a="http://schemas.openxmlformats.org/drawingml/2006/main"/>
           <a:p xmlns:a="http://schemas.openxmlformats.org/drawingml/2006/main">
             <a:pPr algn="l">
+              <a:buNone/>
               <a:defRPr sz="1950" b="1">
                 <a:solidFill>
                   <a:srgbClr val="3D8DFF"/>
@@ -7735,6 +8223,7 @@
           <a:lstStyle xmlns:a="http://schemas.openxmlformats.org/drawingml/2006/main"/>
           <a:p xmlns:a="http://schemas.openxmlformats.org/drawingml/2006/main">
             <a:pPr algn="l">
+              <a:buNone/>
               <a:defRPr sz="2925" b="1">
                 <a:solidFill>
                   <a:srgbClr val="101820"/>
@@ -7791,6 +8280,7 @@
           <a:lstStyle xmlns:a="http://schemas.openxmlformats.org/drawingml/2006/main"/>
           <a:p xmlns:a="http://schemas.openxmlformats.org/drawingml/2006/main">
             <a:pPr algn="l">
+              <a:buNone/>
               <a:defRPr sz="1950" b="0">
                 <a:solidFill>
                   <a:srgbClr val="52616B"/>
@@ -7880,6 +8370,7 @@
           <a:lstStyle xmlns:a="http://schemas.openxmlformats.org/drawingml/2006/main"/>
           <a:p xmlns:a="http://schemas.openxmlformats.org/drawingml/2006/main">
             <a:pPr algn="l">
+              <a:buNone/>
               <a:defRPr sz="1275" b="1">
                 <a:solidFill>
                   <a:srgbClr val="3D8DFF"/>
@@ -7936,6 +8427,7 @@
           <a:lstStyle xmlns:a="http://schemas.openxmlformats.org/drawingml/2006/main"/>
           <a:p xmlns:a="http://schemas.openxmlformats.org/drawingml/2006/main">
             <a:pPr algn="l">
+              <a:buNone/>
               <a:defRPr sz="2625" b="1">
                 <a:solidFill>
                   <a:srgbClr val="101820"/>
@@ -7992,6 +8484,7 @@
           <a:lstStyle xmlns:a="http://schemas.openxmlformats.org/drawingml/2006/main"/>
           <a:p xmlns:a="http://schemas.openxmlformats.org/drawingml/2006/main">
             <a:pPr algn="l">
+              <a:buNone/>
               <a:defRPr sz="1800" b="0">
                 <a:solidFill>
                   <a:srgbClr val="52616B"/>
@@ -8081,6 +8574,7 @@
           <a:lstStyle xmlns:a="http://schemas.openxmlformats.org/drawingml/2006/main"/>
           <a:p xmlns:a="http://schemas.openxmlformats.org/drawingml/2006/main">
             <a:pPr algn="ctr">
+              <a:buNone/>
               <a:defRPr sz="1800" b="1">
                 <a:solidFill>
                   <a:srgbClr val="C8553D"/>
@@ -8108,6 +8602,3018 @@
     <p:extLst>
       <p:ext uri="{BB962C8B-B14F-4D97-AF65-F5344CB8AC3E}">
         <p14:creationId xmlns:p14="http://schemas.microsoft.com/office/powerpoint/2010/main" val="65938535"/>
+      </p:ext>
+    </p:extLst>
+  </p:cSld>
+</p:sld>
+</file>
+
+<file path=ppt/slides/slide15.xml><?xml version="1.0" encoding="utf-8"?>
+<p:sld xmlns:p="http://schemas.openxmlformats.org/presentationml/2006/main">
+  <p:cSld>
+    <p:bg>
+      <p:bgPr>
+        <a:solidFill xmlns:a="http://schemas.openxmlformats.org/drawingml/2006/main">
+          <a:srgbClr val="FFFFFF"/>
+        </a:solidFill>
+      </p:bgPr>
+    </p:bg>
+    <p:spTree>
+      <p:nvGrpSpPr>
+        <p:cNvPr id="1" name=""/>
+        <p:cNvGrpSpPr/>
+        <p:nvPr/>
+      </p:nvGrpSpPr>
+      <p:grpSpPr>
+        <a:xfrm xmlns:a="http://schemas.openxmlformats.org/drawingml/2006/main"/>
+      </p:grpSpPr>
+      <p:sp>
+        <p:nvSpPr>
+          <p:cNvPr id="16" name="">
+            <a:extLst xmlns:a="http://schemas.openxmlformats.org/drawingml/2006/main">
+              <a:ext uri="{FF2B5EF4-FFF2-40B4-BE49-F238E27FC236}">
+                <a16:creationId xmlns:a16="http://schemas.microsoft.com/office/drawing/2014/main" id="{0643D917-60C1-49B6-A04E-D85D24522DCE}"/>
+              </a:ext>
+            </a:extLst>
+          </p:cNvPr>
+          <p:cNvSpPr>
+            <a:spLocks xmlns:a="http://schemas.openxmlformats.org/drawingml/2006/main" noGrp="1"/>
+          </p:cNvSpPr>
+          <p:nvPr/>
+        </p:nvSpPr>
+        <p:spPr>
+          <a:xfrm xmlns:a="http://schemas.openxmlformats.org/drawingml/2006/main">
+            <a:off x="400050" y="228600"/>
+            <a:ext cx="2857500" cy="228600"/>
+          </a:xfrm>
+          <a:prstGeom xmlns:a="http://schemas.openxmlformats.org/drawingml/2006/main" prst="rect">
+            <a:avLst/>
+          </a:prstGeom>
+          <a:noFill xmlns:a="http://schemas.openxmlformats.org/drawingml/2006/main"/>
+          <a:ln xmlns:a="http://schemas.openxmlformats.org/drawingml/2006/main" w="0">
+            <a:noFill/>
+            <a:prstDash val="solid"/>
+          </a:ln>
+        </p:spPr>
+        <p:txBody>
+          <a:bodyPr xmlns:a="http://schemas.openxmlformats.org/drawingml/2006/main" anchor="t"/>
+          <a:lstStyle xmlns:a="http://schemas.openxmlformats.org/drawingml/2006/main"/>
+          <a:p xmlns:a="http://schemas.openxmlformats.org/drawingml/2006/main">
+            <a:pPr algn="l">
+              <a:buNone/>
+              <a:defRPr sz="1200" b="1">
+                <a:solidFill>
+                  <a:srgbClr val="3D8DFF"/>
+                </a:solidFill>
+                <a:latin typeface="Arial"/>
+                <a:ea typeface="Arial"/>
+                <a:cs typeface="Arial"/>
+              </a:defRPr>
+            </a:pPr>
+            <a:r>
+              <a:rPr sz="1200" b="1">
+                <a:solidFill>
+                  <a:srgbClr val="3D8DFF"/>
+                </a:solidFill>
+                <a:latin typeface="Arial"/>
+                <a:ea typeface="Arial"/>
+                <a:cs typeface="Arial"/>
+              </a:rPr>
+              <a:t>LIT-MOM-03.1</a:t>
+            </a:r>
+          </a:p>
+        </p:txBody>
+      </p:sp>
+      <p:sp>
+        <p:nvSpPr>
+          <p:cNvPr id="2" name="">
+            <a:extLst xmlns:a="http://schemas.openxmlformats.org/drawingml/2006/main">
+              <a:ext uri="{FF2B5EF4-FFF2-40B4-BE49-F238E27FC236}">
+                <a16:creationId xmlns:a16="http://schemas.microsoft.com/office/drawing/2014/main" id="{3F51F0D8-19C8-434E-90A3-9CD80434373E}"/>
+              </a:ext>
+            </a:extLst>
+          </p:cNvPr>
+          <p:cNvSpPr>
+            <a:spLocks xmlns:a="http://schemas.openxmlformats.org/drawingml/2006/main" noGrp="1"/>
+          </p:cNvSpPr>
+          <p:nvPr/>
+        </p:nvSpPr>
+        <p:spPr>
+          <a:xfrm xmlns:a="http://schemas.openxmlformats.org/drawingml/2006/main">
+            <a:off x="400050" y="476250"/>
+            <a:ext cx="11049000" cy="819150"/>
+          </a:xfrm>
+          <a:prstGeom xmlns:a="http://schemas.openxmlformats.org/drawingml/2006/main" prst="rect">
+            <a:avLst/>
+          </a:prstGeom>
+          <a:noFill xmlns:a="http://schemas.openxmlformats.org/drawingml/2006/main"/>
+          <a:ln xmlns:a="http://schemas.openxmlformats.org/drawingml/2006/main" w="0">
+            <a:noFill/>
+            <a:prstDash val="solid"/>
+          </a:ln>
+        </p:spPr>
+        <p:txBody>
+          <a:bodyPr xmlns:a="http://schemas.openxmlformats.org/drawingml/2006/main" anchor="t"/>
+          <a:lstStyle xmlns:a="http://schemas.openxmlformats.org/drawingml/2006/main"/>
+          <a:p xmlns:a="http://schemas.openxmlformats.org/drawingml/2006/main">
+            <a:pPr algn="l">
+              <a:buNone/>
+              <a:defRPr sz="2700" b="1">
+                <a:solidFill>
+                  <a:srgbClr val="101820"/>
+                </a:solidFill>
+                <a:latin typeface="Arial"/>
+                <a:ea typeface="Arial"/>
+                <a:cs typeface="Arial"/>
+              </a:defRPr>
+            </a:pPr>
+            <a:r>
+              <a:rPr sz="2700" b="1">
+                <a:solidFill>
+                  <a:srgbClr val="101820"/>
+                </a:solidFill>
+                <a:latin typeface="Arial"/>
+                <a:ea typeface="Arial"/>
+                <a:cs typeface="Arial"/>
+              </a:rPr>
+              <a:t>The rule is reproducible—but the published history is not yet</a:t>
+            </a:r>
+          </a:p>
+        </p:txBody>
+      </p:sp>
+      <p:sp>
+        <p:nvSpPr>
+          <p:cNvPr id="3" name="">
+            <a:extLst xmlns:a="http://schemas.openxmlformats.org/drawingml/2006/main">
+              <a:ext uri="{FF2B5EF4-FFF2-40B4-BE49-F238E27FC236}">
+                <a16:creationId xmlns:a16="http://schemas.microsoft.com/office/drawing/2014/main" id="{9C82D8E5-4706-4E1C-8A9C-3CB6FFDCDE1D}"/>
+              </a:ext>
+            </a:extLst>
+          </p:cNvPr>
+          <p:cNvSpPr>
+            <a:spLocks xmlns:a="http://schemas.openxmlformats.org/drawingml/2006/main" noGrp="1"/>
+          </p:cNvSpPr>
+          <p:nvPr/>
+        </p:nvSpPr>
+        <p:spPr>
+          <a:xfrm xmlns:a="http://schemas.openxmlformats.org/drawingml/2006/main">
+            <a:off x="400050" y="1428750"/>
+            <a:ext cx="11391900" cy="0"/>
+          </a:xfrm>
+          <a:prstGeom xmlns:a="http://schemas.openxmlformats.org/drawingml/2006/main" prst="line">
+            <a:avLst/>
+          </a:prstGeom>
+          <a:noFill xmlns:a="http://schemas.openxmlformats.org/drawingml/2006/main"/>
+          <a:ln xmlns:a="http://schemas.openxmlformats.org/drawingml/2006/main" w="9525">
+            <a:solidFill>
+              <a:srgbClr val="B8BCC4"/>
+            </a:solidFill>
+            <a:prstDash val="solid"/>
+          </a:ln>
+        </p:spPr>
+      </p:sp>
+      <p:sp>
+        <p:nvSpPr>
+          <p:cNvPr id="4" name="">
+            <a:extLst xmlns:a="http://schemas.openxmlformats.org/drawingml/2006/main">
+              <a:ext uri="{FF2B5EF4-FFF2-40B4-BE49-F238E27FC236}">
+                <a16:creationId xmlns:a16="http://schemas.microsoft.com/office/drawing/2014/main" id="{8452295D-1E22-4BA1-B87C-35FC318DE242}"/>
+              </a:ext>
+            </a:extLst>
+          </p:cNvPr>
+          <p:cNvSpPr>
+            <a:spLocks xmlns:a="http://schemas.openxmlformats.org/drawingml/2006/main" noGrp="1"/>
+          </p:cNvSpPr>
+          <p:nvPr/>
+        </p:nvSpPr>
+        <p:spPr>
+          <a:xfrm xmlns:a="http://schemas.openxmlformats.org/drawingml/2006/main">
+            <a:off x="11010900" y="6324600"/>
+            <a:ext cx="762000" cy="266700"/>
+          </a:xfrm>
+          <a:prstGeom xmlns:a="http://schemas.openxmlformats.org/drawingml/2006/main" prst="rect">
+            <a:avLst/>
+          </a:prstGeom>
+          <a:noFill xmlns:a="http://schemas.openxmlformats.org/drawingml/2006/main"/>
+          <a:ln xmlns:a="http://schemas.openxmlformats.org/drawingml/2006/main" w="0">
+            <a:noFill/>
+            <a:prstDash val="solid"/>
+          </a:ln>
+        </p:spPr>
+        <p:txBody>
+          <a:bodyPr xmlns:a="http://schemas.openxmlformats.org/drawingml/2006/main" anchor="t"/>
+          <a:lstStyle xmlns:a="http://schemas.openxmlformats.org/drawingml/2006/main"/>
+          <a:p xmlns:a="http://schemas.openxmlformats.org/drawingml/2006/main">
+            <a:pPr algn="r">
+              <a:buNone/>
+              <a:defRPr sz="1200" b="0">
+                <a:solidFill>
+                  <a:srgbClr val="52616B"/>
+                </a:solidFill>
+                <a:latin typeface="Arial"/>
+                <a:ea typeface="Arial"/>
+                <a:cs typeface="Arial"/>
+              </a:defRPr>
+            </a:pPr>
+            <a:r>
+              <a:rPr sz="1200" b="0">
+                <a:solidFill>
+                  <a:srgbClr val="52616B"/>
+                </a:solidFill>
+                <a:latin typeface="Arial"/>
+                <a:ea typeface="Arial"/>
+                <a:cs typeface="Arial"/>
+              </a:rPr>
+              <a:t>15</a:t>
+            </a:r>
+          </a:p>
+        </p:txBody>
+      </p:sp>
+      <p:sp>
+        <p:nvSpPr>
+          <p:cNvPr id="5" name="">
+            <a:extLst xmlns:a="http://schemas.openxmlformats.org/drawingml/2006/main">
+              <a:ext uri="{FF2B5EF4-FFF2-40B4-BE49-F238E27FC236}">
+                <a16:creationId xmlns:a16="http://schemas.microsoft.com/office/drawing/2014/main" id="{EA84F263-DCB7-4ECF-AC3C-B71C047C289B}"/>
+              </a:ext>
+            </a:extLst>
+          </p:cNvPr>
+          <p:cNvSpPr>
+            <a:spLocks xmlns:a="http://schemas.openxmlformats.org/drawingml/2006/main" noGrp="1"/>
+          </p:cNvSpPr>
+          <p:nvPr/>
+        </p:nvSpPr>
+        <p:spPr>
+          <a:xfrm xmlns:a="http://schemas.openxmlformats.org/drawingml/2006/main">
+            <a:off x="628650" y="1790700"/>
+            <a:ext cx="4953000" cy="3257550"/>
+          </a:xfrm>
+          <a:prstGeom xmlns:a="http://schemas.openxmlformats.org/drawingml/2006/main" prst="rect">
+            <a:avLst/>
+          </a:prstGeom>
+          <a:solidFill xmlns:a="http://schemas.openxmlformats.org/drawingml/2006/main">
+            <a:srgbClr val="E6F2EC"/>
+          </a:solidFill>
+          <a:ln xmlns:a="http://schemas.openxmlformats.org/drawingml/2006/main" w="9525">
+            <a:solidFill>
+              <a:srgbClr val="2E7D5B"/>
+            </a:solidFill>
+            <a:prstDash val="solid"/>
+          </a:ln>
+        </p:spPr>
+      </p:sp>
+      <p:sp>
+        <p:nvSpPr>
+          <p:cNvPr id="6" name="">
+            <a:extLst xmlns:a="http://schemas.openxmlformats.org/drawingml/2006/main">
+              <a:ext uri="{FF2B5EF4-FFF2-40B4-BE49-F238E27FC236}">
+                <a16:creationId xmlns:a16="http://schemas.microsoft.com/office/drawing/2014/main" id="{2535A567-86A3-447F-ABF8-3D7CC1CFCEE3}"/>
+              </a:ext>
+            </a:extLst>
+          </p:cNvPr>
+          <p:cNvSpPr>
+            <a:spLocks xmlns:a="http://schemas.openxmlformats.org/drawingml/2006/main" noGrp="1"/>
+          </p:cNvSpPr>
+          <p:nvPr/>
+        </p:nvSpPr>
+        <p:spPr>
+          <a:xfrm xmlns:a="http://schemas.openxmlformats.org/drawingml/2006/main">
+            <a:off x="971550" y="2114550"/>
+            <a:ext cx="3238500" cy="247650"/>
+          </a:xfrm>
+          <a:prstGeom xmlns:a="http://schemas.openxmlformats.org/drawingml/2006/main" prst="rect">
+            <a:avLst/>
+          </a:prstGeom>
+          <a:noFill xmlns:a="http://schemas.openxmlformats.org/drawingml/2006/main"/>
+          <a:ln xmlns:a="http://schemas.openxmlformats.org/drawingml/2006/main" w="0">
+            <a:noFill/>
+            <a:prstDash val="solid"/>
+          </a:ln>
+        </p:spPr>
+        <p:txBody>
+          <a:bodyPr xmlns:a="http://schemas.openxmlformats.org/drawingml/2006/main" anchor="t"/>
+          <a:lstStyle xmlns:a="http://schemas.openxmlformats.org/drawingml/2006/main"/>
+          <a:p xmlns:a="http://schemas.openxmlformats.org/drawingml/2006/main">
+            <a:pPr algn="l">
+              <a:buNone/>
+              <a:defRPr sz="1275" b="1">
+                <a:solidFill>
+                  <a:srgbClr val="2E7D5B"/>
+                </a:solidFill>
+                <a:latin typeface="Arial"/>
+                <a:ea typeface="Arial"/>
+                <a:cs typeface="Arial"/>
+              </a:defRPr>
+            </a:pPr>
+            <a:r>
+              <a:rPr sz="1275" b="1">
+                <a:solidFill>
+                  <a:srgbClr val="2E7D5B"/>
+                </a:solidFill>
+                <a:latin typeface="Arial"/>
+                <a:ea typeface="Arial"/>
+                <a:cs typeface="Arial"/>
+              </a:rPr>
+              <a:t>PASS · LOCAL MECHANICS</a:t>
+            </a:r>
+          </a:p>
+        </p:txBody>
+      </p:sp>
+      <p:sp>
+        <p:nvSpPr>
+          <p:cNvPr id="7" name="">
+            <a:extLst xmlns:a="http://schemas.openxmlformats.org/drawingml/2006/main">
+              <a:ext uri="{FF2B5EF4-FFF2-40B4-BE49-F238E27FC236}">
+                <a16:creationId xmlns:a16="http://schemas.microsoft.com/office/drawing/2014/main" id="{B0EF5351-B0F9-4A7A-9512-D9DE9A581079}"/>
+              </a:ext>
+            </a:extLst>
+          </p:cNvPr>
+          <p:cNvSpPr>
+            <a:spLocks xmlns:a="http://schemas.openxmlformats.org/drawingml/2006/main" noGrp="1"/>
+          </p:cNvSpPr>
+          <p:nvPr/>
+        </p:nvSpPr>
+        <p:spPr>
+          <a:xfrm xmlns:a="http://schemas.openxmlformats.org/drawingml/2006/main">
+            <a:off x="971550" y="2667000"/>
+            <a:ext cx="1809750" cy="876300"/>
+          </a:xfrm>
+          <a:prstGeom xmlns:a="http://schemas.openxmlformats.org/drawingml/2006/main" prst="rect">
+            <a:avLst/>
+          </a:prstGeom>
+          <a:noFill xmlns:a="http://schemas.openxmlformats.org/drawingml/2006/main"/>
+          <a:ln xmlns:a="http://schemas.openxmlformats.org/drawingml/2006/main" w="0">
+            <a:noFill/>
+            <a:prstDash val="solid"/>
+          </a:ln>
+        </p:spPr>
+        <p:txBody>
+          <a:bodyPr xmlns:a="http://schemas.openxmlformats.org/drawingml/2006/main" anchor="t"/>
+          <a:lstStyle xmlns:a="http://schemas.openxmlformats.org/drawingml/2006/main"/>
+          <a:p xmlns:a="http://schemas.openxmlformats.org/drawingml/2006/main">
+            <a:pPr algn="l">
+              <a:buNone/>
+              <a:defRPr sz="5100" b="1">
+                <a:solidFill>
+                  <a:srgbClr val="2E7D5B"/>
+                </a:solidFill>
+                <a:latin typeface="Arial"/>
+                <a:ea typeface="Arial"/>
+                <a:cs typeface="Arial"/>
+              </a:defRPr>
+            </a:pPr>
+            <a:r>
+              <a:rPr sz="5100" b="1">
+                <a:solidFill>
+                  <a:srgbClr val="2E7D5B"/>
+                </a:solidFill>
+                <a:latin typeface="Arial"/>
+                <a:ea typeface="Arial"/>
+                <a:cs typeface="Arial"/>
+              </a:rPr>
+              <a:t>508</a:t>
+            </a:r>
+          </a:p>
+        </p:txBody>
+      </p:sp>
+      <p:sp>
+        <p:nvSpPr>
+          <p:cNvPr id="8" name="">
+            <a:extLst xmlns:a="http://schemas.openxmlformats.org/drawingml/2006/main">
+              <a:ext uri="{FF2B5EF4-FFF2-40B4-BE49-F238E27FC236}">
+                <a16:creationId xmlns:a16="http://schemas.microsoft.com/office/drawing/2014/main" id="{845D259F-CD58-4A41-8E58-6185E679F682}"/>
+              </a:ext>
+            </a:extLst>
+          </p:cNvPr>
+          <p:cNvSpPr>
+            <a:spLocks xmlns:a="http://schemas.openxmlformats.org/drawingml/2006/main" noGrp="1"/>
+          </p:cNvSpPr>
+          <p:nvPr/>
+        </p:nvSpPr>
+        <p:spPr>
+          <a:xfrm xmlns:a="http://schemas.openxmlformats.org/drawingml/2006/main">
+            <a:off x="2800350" y="2914650"/>
+            <a:ext cx="2324100" cy="457200"/>
+          </a:xfrm>
+          <a:prstGeom xmlns:a="http://schemas.openxmlformats.org/drawingml/2006/main" prst="rect">
+            <a:avLst/>
+          </a:prstGeom>
+          <a:noFill xmlns:a="http://schemas.openxmlformats.org/drawingml/2006/main"/>
+          <a:ln xmlns:a="http://schemas.openxmlformats.org/drawingml/2006/main" w="0">
+            <a:noFill/>
+            <a:prstDash val="solid"/>
+          </a:ln>
+        </p:spPr>
+        <p:txBody>
+          <a:bodyPr xmlns:a="http://schemas.openxmlformats.org/drawingml/2006/main" anchor="t"/>
+          <a:lstStyle xmlns:a="http://schemas.openxmlformats.org/drawingml/2006/main"/>
+          <a:p xmlns:a="http://schemas.openxmlformats.org/drawingml/2006/main">
+            <a:pPr algn="l">
+              <a:buNone/>
+              <a:defRPr sz="2100" b="1">
+                <a:solidFill>
+                  <a:srgbClr val="101820"/>
+                </a:solidFill>
+                <a:latin typeface="Arial"/>
+                <a:ea typeface="Arial"/>
+                <a:cs typeface="Arial"/>
+              </a:defRPr>
+            </a:pPr>
+            <a:r>
+              <a:rPr sz="2100" b="1">
+                <a:solidFill>
+                  <a:srgbClr val="101820"/>
+                </a:solidFill>
+                <a:latin typeface="Arial"/>
+                <a:ea typeface="Arial"/>
+                <a:cs typeface="Arial"/>
+              </a:rPr>
+              <a:t>weekly decisions</a:t>
+            </a:r>
+          </a:p>
+        </p:txBody>
+      </p:sp>
+      <p:sp>
+        <p:nvSpPr>
+          <p:cNvPr id="9" name="">
+            <a:extLst xmlns:a="http://schemas.openxmlformats.org/drawingml/2006/main">
+              <a:ext uri="{FF2B5EF4-FFF2-40B4-BE49-F238E27FC236}">
+                <a16:creationId xmlns:a16="http://schemas.microsoft.com/office/drawing/2014/main" id="{2B561A00-F2ED-46FB-9D93-63A3E1AD5803}"/>
+              </a:ext>
+            </a:extLst>
+          </p:cNvPr>
+          <p:cNvSpPr>
+            <a:spLocks xmlns:a="http://schemas.openxmlformats.org/drawingml/2006/main" noGrp="1"/>
+          </p:cNvSpPr>
+          <p:nvPr/>
+        </p:nvSpPr>
+        <p:spPr>
+          <a:xfrm xmlns:a="http://schemas.openxmlformats.org/drawingml/2006/main">
+            <a:off x="971550" y="3810000"/>
+            <a:ext cx="4000500" cy="933450"/>
+          </a:xfrm>
+          <a:prstGeom xmlns:a="http://schemas.openxmlformats.org/drawingml/2006/main" prst="rect">
+            <a:avLst/>
+          </a:prstGeom>
+          <a:noFill xmlns:a="http://schemas.openxmlformats.org/drawingml/2006/main"/>
+          <a:ln xmlns:a="http://schemas.openxmlformats.org/drawingml/2006/main" w="0">
+            <a:noFill/>
+            <a:prstDash val="solid"/>
+          </a:ln>
+        </p:spPr>
+        <p:txBody>
+          <a:bodyPr xmlns:a="http://schemas.openxmlformats.org/drawingml/2006/main" anchor="t"/>
+          <a:lstStyle xmlns:a="http://schemas.openxmlformats.org/drawingml/2006/main"/>
+          <a:p xmlns:a="http://schemas.openxmlformats.org/drawingml/2006/main">
+            <a:pPr algn="l">
+              <a:buNone/>
+              <a:defRPr sz="1800" b="0">
+                <a:solidFill>
+                  <a:srgbClr val="52616B"/>
+                </a:solidFill>
+                <a:latin typeface="Arial"/>
+                <a:ea typeface="Arial"/>
+                <a:cs typeface="Arial"/>
+              </a:defRPr>
+            </a:pPr>
+            <a:r>
+              <a:rPr sz="1800" b="0">
+                <a:solidFill>
+                  <a:srgbClr val="52616B"/>
+                </a:solidFill>
+                <a:latin typeface="Arial"/>
+                <a:ea typeface="Arial"/>
+                <a:cs typeface="Arial"/>
+              </a:rPr>
+              <a:t>2016-06-29 → 2026-03-18</a:t>
+            </a:r>
+          </a:p>
+          <a:p xmlns:a="http://schemas.openxmlformats.org/drawingml/2006/main">
+            <a:pPr algn="l">
+              <a:buNone/>
+              <a:defRPr sz="1800" b="0">
+                <a:solidFill>
+                  <a:srgbClr val="52616B"/>
+                </a:solidFill>
+                <a:latin typeface="Arial"/>
+                <a:ea typeface="Arial"/>
+                <a:cs typeface="Arial"/>
+              </a:defRPr>
+            </a:pPr>
+            <a:r>
+              <a:rPr sz="1800" b="0">
+                <a:solidFill>
+                  <a:srgbClr val="52616B"/>
+                </a:solidFill>
+                <a:latin typeface="Arial"/>
+                <a:ea typeface="Arial"/>
+                <a:cs typeface="Arial"/>
+              </a:rPr>
+              <a:t>All 11 mechanics checks pass</a:t>
+            </a:r>
+          </a:p>
+          <a:p xmlns:a="http://schemas.openxmlformats.org/drawingml/2006/main">
+            <a:pPr algn="l">
+              <a:buNone/>
+              <a:defRPr sz="1800" b="0">
+                <a:solidFill>
+                  <a:srgbClr val="52616B"/>
+                </a:solidFill>
+                <a:latin typeface="Arial"/>
+                <a:ea typeface="Arial"/>
+                <a:cs typeface="Arial"/>
+              </a:defRPr>
+            </a:pPr>
+            <a:r>
+              <a:rPr sz="1800" b="0">
+                <a:solidFill>
+                  <a:srgbClr val="52616B"/>
+                </a:solidFill>
+                <a:latin typeface="Arial"/>
+                <a:ea typeface="Arial"/>
+                <a:cs typeface="Arial"/>
+              </a:rPr>
+              <a:t>No outcome metrics computed</a:t>
+            </a:r>
+          </a:p>
+        </p:txBody>
+      </p:sp>
+      <p:sp>
+        <p:nvSpPr>
+          <p:cNvPr id="10" name="">
+            <a:extLst xmlns:a="http://schemas.openxmlformats.org/drawingml/2006/main">
+              <a:ext uri="{FF2B5EF4-FFF2-40B4-BE49-F238E27FC236}">
+                <a16:creationId xmlns:a16="http://schemas.microsoft.com/office/drawing/2014/main" id="{D80FDF2D-786A-4D34-8C53-03F5531FEFAA}"/>
+              </a:ext>
+            </a:extLst>
+          </p:cNvPr>
+          <p:cNvSpPr>
+            <a:spLocks xmlns:a="http://schemas.openxmlformats.org/drawingml/2006/main" noGrp="1"/>
+          </p:cNvSpPr>
+          <p:nvPr/>
+        </p:nvSpPr>
+        <p:spPr>
+          <a:xfrm xmlns:a="http://schemas.openxmlformats.org/drawingml/2006/main">
+            <a:off x="6191250" y="1790700"/>
+            <a:ext cx="4953000" cy="3257550"/>
+          </a:xfrm>
+          <a:prstGeom xmlns:a="http://schemas.openxmlformats.org/drawingml/2006/main" prst="rect">
+            <a:avLst/>
+          </a:prstGeom>
+          <a:solidFill xmlns:a="http://schemas.openxmlformats.org/drawingml/2006/main">
+            <a:srgbClr val="F7E7E2"/>
+          </a:solidFill>
+          <a:ln xmlns:a="http://schemas.openxmlformats.org/drawingml/2006/main" w="9525">
+            <a:solidFill>
+              <a:srgbClr val="C8553D"/>
+            </a:solidFill>
+            <a:prstDash val="solid"/>
+          </a:ln>
+        </p:spPr>
+      </p:sp>
+      <p:sp>
+        <p:nvSpPr>
+          <p:cNvPr id="11" name="">
+            <a:extLst xmlns:a="http://schemas.openxmlformats.org/drawingml/2006/main">
+              <a:ext uri="{FF2B5EF4-FFF2-40B4-BE49-F238E27FC236}">
+                <a16:creationId xmlns:a16="http://schemas.microsoft.com/office/drawing/2014/main" id="{E4150C52-9BF1-4205-AAE7-8463BBDA6FD9}"/>
+              </a:ext>
+            </a:extLst>
+          </p:cNvPr>
+          <p:cNvSpPr>
+            <a:spLocks xmlns:a="http://schemas.openxmlformats.org/drawingml/2006/main" noGrp="1"/>
+          </p:cNvSpPr>
+          <p:nvPr/>
+        </p:nvSpPr>
+        <p:spPr>
+          <a:xfrm xmlns:a="http://schemas.openxmlformats.org/drawingml/2006/main">
+            <a:off x="6534150" y="2114550"/>
+            <a:ext cx="3714750" cy="247650"/>
+          </a:xfrm>
+          <a:prstGeom xmlns:a="http://schemas.openxmlformats.org/drawingml/2006/main" prst="rect">
+            <a:avLst/>
+          </a:prstGeom>
+          <a:noFill xmlns:a="http://schemas.openxmlformats.org/drawingml/2006/main"/>
+          <a:ln xmlns:a="http://schemas.openxmlformats.org/drawingml/2006/main" w="0">
+            <a:noFill/>
+            <a:prstDash val="solid"/>
+          </a:ln>
+        </p:spPr>
+        <p:txBody>
+          <a:bodyPr xmlns:a="http://schemas.openxmlformats.org/drawingml/2006/main" anchor="t"/>
+          <a:lstStyle xmlns:a="http://schemas.openxmlformats.org/drawingml/2006/main"/>
+          <a:p xmlns:a="http://schemas.openxmlformats.org/drawingml/2006/main">
+            <a:pPr algn="l">
+              <a:buNone/>
+              <a:defRPr sz="1275" b="1">
+                <a:solidFill>
+                  <a:srgbClr val="C8553D"/>
+                </a:solidFill>
+                <a:latin typeface="Arial"/>
+                <a:ea typeface="Arial"/>
+                <a:cs typeface="Arial"/>
+              </a:defRPr>
+            </a:pPr>
+            <a:r>
+              <a:rPr sz="1275" b="1">
+                <a:solidFill>
+                  <a:srgbClr val="C8553D"/>
+                </a:solidFill>
+                <a:latin typeface="Arial"/>
+                <a:ea typeface="Arial"/>
+                <a:cs typeface="Arial"/>
+              </a:rPr>
+              <a:t>STOP · SOURCE-SPAN COVERAGE</a:t>
+            </a:r>
+          </a:p>
+        </p:txBody>
+      </p:sp>
+      <p:sp>
+        <p:nvSpPr>
+          <p:cNvPr id="12" name="">
+            <a:extLst xmlns:a="http://schemas.openxmlformats.org/drawingml/2006/main">
+              <a:ext uri="{FF2B5EF4-FFF2-40B4-BE49-F238E27FC236}">
+                <a16:creationId xmlns:a16="http://schemas.microsoft.com/office/drawing/2014/main" id="{0606DC9E-2BF6-4A3D-8AA4-5B9D11332D44}"/>
+              </a:ext>
+            </a:extLst>
+          </p:cNvPr>
+          <p:cNvSpPr>
+            <a:spLocks xmlns:a="http://schemas.openxmlformats.org/drawingml/2006/main" noGrp="1"/>
+          </p:cNvSpPr>
+          <p:nvPr/>
+        </p:nvSpPr>
+        <p:spPr>
+          <a:xfrm xmlns:a="http://schemas.openxmlformats.org/drawingml/2006/main">
+            <a:off x="6534150" y="2724150"/>
+            <a:ext cx="4000500" cy="704850"/>
+          </a:xfrm>
+          <a:prstGeom xmlns:a="http://schemas.openxmlformats.org/drawingml/2006/main" prst="rect">
+            <a:avLst/>
+          </a:prstGeom>
+          <a:noFill xmlns:a="http://schemas.openxmlformats.org/drawingml/2006/main"/>
+          <a:ln xmlns:a="http://schemas.openxmlformats.org/drawingml/2006/main" w="0">
+            <a:noFill/>
+            <a:prstDash val="solid"/>
+          </a:ln>
+        </p:spPr>
+        <p:txBody>
+          <a:bodyPr xmlns:a="http://schemas.openxmlformats.org/drawingml/2006/main" anchor="t"/>
+          <a:lstStyle xmlns:a="http://schemas.openxmlformats.org/drawingml/2006/main"/>
+          <a:p xmlns:a="http://schemas.openxmlformats.org/drawingml/2006/main">
+            <a:pPr algn="l">
+              <a:buNone/>
+              <a:defRPr sz="4050" b="1">
+                <a:solidFill>
+                  <a:srgbClr val="C8553D"/>
+                </a:solidFill>
+                <a:latin typeface="Arial"/>
+                <a:ea typeface="Arial"/>
+                <a:cs typeface="Arial"/>
+              </a:defRPr>
+            </a:pPr>
+            <a:r>
+              <a:rPr sz="4050" b="1">
+                <a:solidFill>
+                  <a:srgbClr val="C8553D"/>
+                </a:solidFill>
+                <a:latin typeface="Arial"/>
+                <a:ea typeface="Arial"/>
+                <a:cs typeface="Arial"/>
+              </a:rPr>
+              <a:t>2008–2015</a:t>
+            </a:r>
+          </a:p>
+        </p:txBody>
+      </p:sp>
+      <p:sp>
+        <p:nvSpPr>
+          <p:cNvPr id="13" name="">
+            <a:extLst xmlns:a="http://schemas.openxmlformats.org/drawingml/2006/main">
+              <a:ext uri="{FF2B5EF4-FFF2-40B4-BE49-F238E27FC236}">
+                <a16:creationId xmlns:a16="http://schemas.microsoft.com/office/drawing/2014/main" id="{03283D39-FBEA-479D-88E1-46F1F4C330B5}"/>
+              </a:ext>
+            </a:extLst>
+          </p:cNvPr>
+          <p:cNvSpPr>
+            <a:spLocks xmlns:a="http://schemas.openxmlformats.org/drawingml/2006/main" noGrp="1"/>
+          </p:cNvSpPr>
+          <p:nvPr/>
+        </p:nvSpPr>
+        <p:spPr>
+          <a:xfrm xmlns:a="http://schemas.openxmlformats.org/drawingml/2006/main">
+            <a:off x="6534150" y="3429000"/>
+            <a:ext cx="4000500" cy="457200"/>
+          </a:xfrm>
+          <a:prstGeom xmlns:a="http://schemas.openxmlformats.org/drawingml/2006/main" prst="rect">
+            <a:avLst/>
+          </a:prstGeom>
+          <a:noFill xmlns:a="http://schemas.openxmlformats.org/drawingml/2006/main"/>
+          <a:ln xmlns:a="http://schemas.openxmlformats.org/drawingml/2006/main" w="0">
+            <a:noFill/>
+            <a:prstDash val="solid"/>
+          </a:ln>
+        </p:spPr>
+        <p:txBody>
+          <a:bodyPr xmlns:a="http://schemas.openxmlformats.org/drawingml/2006/main" anchor="t"/>
+          <a:lstStyle xmlns:a="http://schemas.openxmlformats.org/drawingml/2006/main"/>
+          <a:p xmlns:a="http://schemas.openxmlformats.org/drawingml/2006/main">
+            <a:pPr algn="l">
+              <a:buNone/>
+              <a:defRPr sz="2175" b="1">
+                <a:solidFill>
+                  <a:srgbClr val="101820"/>
+                </a:solidFill>
+                <a:latin typeface="Arial"/>
+                <a:ea typeface="Arial"/>
+                <a:cs typeface="Arial"/>
+              </a:defRPr>
+            </a:pPr>
+            <a:r>
+              <a:rPr sz="2175" b="1">
+                <a:solidFill>
+                  <a:srgbClr val="101820"/>
+                </a:solidFill>
+                <a:latin typeface="Arial"/>
+                <a:ea typeface="Arial"/>
+                <a:cs typeface="Arial"/>
+              </a:rPr>
+              <a:t>remains unreproduced</a:t>
+            </a:r>
+          </a:p>
+        </p:txBody>
+      </p:sp>
+      <p:sp>
+        <p:nvSpPr>
+          <p:cNvPr id="14" name="">
+            <a:extLst xmlns:a="http://schemas.openxmlformats.org/drawingml/2006/main">
+              <a:ext uri="{FF2B5EF4-FFF2-40B4-BE49-F238E27FC236}">
+                <a16:creationId xmlns:a16="http://schemas.microsoft.com/office/drawing/2014/main" id="{DB7B3C09-EAFE-41D8-880B-D0BE56096F33}"/>
+              </a:ext>
+            </a:extLst>
+          </p:cNvPr>
+          <p:cNvSpPr>
+            <a:spLocks xmlns:a="http://schemas.openxmlformats.org/drawingml/2006/main" noGrp="1"/>
+          </p:cNvSpPr>
+          <p:nvPr/>
+        </p:nvSpPr>
+        <p:spPr>
+          <a:xfrm xmlns:a="http://schemas.openxmlformats.org/drawingml/2006/main">
+            <a:off x="6534150" y="4000500"/>
+            <a:ext cx="4000500" cy="876300"/>
+          </a:xfrm>
+          <a:prstGeom xmlns:a="http://schemas.openxmlformats.org/drawingml/2006/main" prst="rect">
+            <a:avLst/>
+          </a:prstGeom>
+          <a:noFill xmlns:a="http://schemas.openxmlformats.org/drawingml/2006/main"/>
+          <a:ln xmlns:a="http://schemas.openxmlformats.org/drawingml/2006/main" w="0">
+            <a:noFill/>
+            <a:prstDash val="solid"/>
+          </a:ln>
+        </p:spPr>
+        <p:txBody>
+          <a:bodyPr xmlns:a="http://schemas.openxmlformats.org/drawingml/2006/main" anchor="t"/>
+          <a:lstStyle xmlns:a="http://schemas.openxmlformats.org/drawingml/2006/main"/>
+          <a:p xmlns:a="http://schemas.openxmlformats.org/drawingml/2006/main">
+            <a:pPr algn="l">
+              <a:buNone/>
+              <a:defRPr sz="1500" b="0">
+                <a:solidFill>
+                  <a:srgbClr val="52616B"/>
+                </a:solidFill>
+                <a:latin typeface="Arial"/>
+                <a:ea typeface="Arial"/>
+                <a:cs typeface="Arial"/>
+              </a:defRPr>
+            </a:pPr>
+            <a:r>
+              <a:rPr sz="1500" b="0">
+                <a:solidFill>
+                  <a:srgbClr val="52616B"/>
+                </a:solidFill>
+                <a:latin typeface="Arial"/>
+                <a:ea typeface="Arial"/>
+                <a:cs typeface="Arial"/>
+              </a:rPr>
+              <a:t>The Alpaca account returned complete common history only from 2016. The window was narrowed explicitly—not silently.</a:t>
+            </a:r>
+          </a:p>
+        </p:txBody>
+      </p:sp>
+      <p:sp>
+        <p:nvSpPr>
+          <p:cNvPr id="15" name="">
+            <a:extLst xmlns:a="http://schemas.openxmlformats.org/drawingml/2006/main">
+              <a:ext uri="{FF2B5EF4-FFF2-40B4-BE49-F238E27FC236}">
+                <a16:creationId xmlns:a16="http://schemas.microsoft.com/office/drawing/2014/main" id="{0DF58B95-FF34-44E3-BD69-0887709C26B4}"/>
+              </a:ext>
+            </a:extLst>
+          </p:cNvPr>
+          <p:cNvSpPr>
+            <a:spLocks xmlns:a="http://schemas.openxmlformats.org/drawingml/2006/main" noGrp="1"/>
+          </p:cNvSpPr>
+          <p:nvPr/>
+        </p:nvSpPr>
+        <p:spPr>
+          <a:xfrm xmlns:a="http://schemas.openxmlformats.org/drawingml/2006/main">
+            <a:off x="2133600" y="5505450"/>
+            <a:ext cx="7924800" cy="381000"/>
+          </a:xfrm>
+          <a:prstGeom xmlns:a="http://schemas.openxmlformats.org/drawingml/2006/main" prst="rect">
+            <a:avLst/>
+          </a:prstGeom>
+          <a:noFill xmlns:a="http://schemas.openxmlformats.org/drawingml/2006/main"/>
+          <a:ln xmlns:a="http://schemas.openxmlformats.org/drawingml/2006/main" w="0">
+            <a:noFill/>
+            <a:prstDash val="solid"/>
+          </a:ln>
+        </p:spPr>
+        <p:txBody>
+          <a:bodyPr xmlns:a="http://schemas.openxmlformats.org/drawingml/2006/main" anchor="t"/>
+          <a:lstStyle xmlns:a="http://schemas.openxmlformats.org/drawingml/2006/main"/>
+          <a:p xmlns:a="http://schemas.openxmlformats.org/drawingml/2006/main">
+            <a:pPr algn="ctr">
+              <a:buNone/>
+              <a:defRPr sz="2175" b="1">
+                <a:solidFill>
+                  <a:srgbClr val="101820"/>
+                </a:solidFill>
+                <a:latin typeface="Arial"/>
+                <a:ea typeface="Arial"/>
+                <a:cs typeface="Arial"/>
+              </a:defRPr>
+            </a:pPr>
+            <a:r>
+              <a:rPr sz="2175" b="1">
+                <a:solidFill>
+                  <a:srgbClr val="101820"/>
+                </a:solidFill>
+                <a:latin typeface="Arial"/>
+                <a:ea typeface="Arial"/>
+                <a:cs typeface="Arial"/>
+              </a:rPr>
+              <a:t>This slide proves implementation, not profitability.</a:t>
+            </a:r>
+          </a:p>
+        </p:txBody>
+      </p:sp>
+    </p:spTree>
+    <p:extLst>
+      <p:ext uri="{BB962C8B-B14F-4D97-AF65-F5344CB8AC3E}">
+        <p14:creationId xmlns:p14="http://schemas.microsoft.com/office/powerpoint/2010/main" val="1503881080"/>
+      </p:ext>
+    </p:extLst>
+  </p:cSld>
+</p:sld>
+</file>
+
+<file path=ppt/slides/slide16.xml><?xml version="1.0" encoding="utf-8"?>
+<p:sld xmlns:p="http://schemas.openxmlformats.org/presentationml/2006/main">
+  <p:cSld>
+    <p:bg>
+      <p:bgPr>
+        <a:solidFill xmlns:a="http://schemas.openxmlformats.org/drawingml/2006/main">
+          <a:srgbClr val="FFFFFF"/>
+        </a:solidFill>
+      </p:bgPr>
+    </p:bg>
+    <p:spTree>
+      <p:nvGrpSpPr>
+        <p:cNvPr id="1" name=""/>
+        <p:cNvGrpSpPr/>
+        <p:nvPr/>
+      </p:nvGrpSpPr>
+      <p:grpSpPr>
+        <a:xfrm xmlns:a="http://schemas.openxmlformats.org/drawingml/2006/main"/>
+      </p:grpSpPr>
+      <p:sp>
+        <p:nvSpPr>
+          <p:cNvPr id="13" name="">
+            <a:extLst xmlns:a="http://schemas.openxmlformats.org/drawingml/2006/main">
+              <a:ext uri="{FF2B5EF4-FFF2-40B4-BE49-F238E27FC236}">
+                <a16:creationId xmlns:a16="http://schemas.microsoft.com/office/drawing/2014/main" id="{E7AA0F3C-FA14-482C-9911-54A24769116A}"/>
+              </a:ext>
+            </a:extLst>
+          </p:cNvPr>
+          <p:cNvSpPr>
+            <a:spLocks xmlns:a="http://schemas.openxmlformats.org/drawingml/2006/main" noGrp="1"/>
+          </p:cNvSpPr>
+          <p:nvPr/>
+        </p:nvSpPr>
+        <p:spPr>
+          <a:xfrm xmlns:a="http://schemas.openxmlformats.org/drawingml/2006/main">
+            <a:off x="400050" y="228600"/>
+            <a:ext cx="2857500" cy="228600"/>
+          </a:xfrm>
+          <a:prstGeom xmlns:a="http://schemas.openxmlformats.org/drawingml/2006/main" prst="rect">
+            <a:avLst/>
+          </a:prstGeom>
+          <a:noFill xmlns:a="http://schemas.openxmlformats.org/drawingml/2006/main"/>
+          <a:ln xmlns:a="http://schemas.openxmlformats.org/drawingml/2006/main" w="0">
+            <a:noFill/>
+            <a:prstDash val="solid"/>
+          </a:ln>
+        </p:spPr>
+        <p:txBody>
+          <a:bodyPr xmlns:a="http://schemas.openxmlformats.org/drawingml/2006/main" anchor="t"/>
+          <a:lstStyle xmlns:a="http://schemas.openxmlformats.org/drawingml/2006/main"/>
+          <a:p xmlns:a="http://schemas.openxmlformats.org/drawingml/2006/main">
+            <a:pPr algn="l">
+              <a:buNone/>
+              <a:defRPr sz="1200" b="1">
+                <a:solidFill>
+                  <a:srgbClr val="3D8DFF"/>
+                </a:solidFill>
+                <a:latin typeface="Arial"/>
+                <a:ea typeface="Arial"/>
+                <a:cs typeface="Arial"/>
+              </a:defRPr>
+            </a:pPr>
+            <a:r>
+              <a:rPr sz="1200" b="1">
+                <a:solidFill>
+                  <a:srgbClr val="3D8DFF"/>
+                </a:solidFill>
+                <a:latin typeface="Arial"/>
+                <a:ea typeface="Arial"/>
+                <a:cs typeface="Arial"/>
+              </a:rPr>
+              <a:t>LIT-MOM-03.1</a:t>
+            </a:r>
+          </a:p>
+        </p:txBody>
+      </p:sp>
+      <p:sp>
+        <p:nvSpPr>
+          <p:cNvPr id="2" name="">
+            <a:extLst xmlns:a="http://schemas.openxmlformats.org/drawingml/2006/main">
+              <a:ext uri="{FF2B5EF4-FFF2-40B4-BE49-F238E27FC236}">
+                <a16:creationId xmlns:a16="http://schemas.microsoft.com/office/drawing/2014/main" id="{522D8FEC-18D3-4EAC-98CE-20AF9D03A3AC}"/>
+              </a:ext>
+            </a:extLst>
+          </p:cNvPr>
+          <p:cNvSpPr>
+            <a:spLocks xmlns:a="http://schemas.openxmlformats.org/drawingml/2006/main" noGrp="1"/>
+          </p:cNvSpPr>
+          <p:nvPr/>
+        </p:nvSpPr>
+        <p:spPr>
+          <a:xfrm xmlns:a="http://schemas.openxmlformats.org/drawingml/2006/main">
+            <a:off x="400050" y="476250"/>
+            <a:ext cx="11049000" cy="819150"/>
+          </a:xfrm>
+          <a:prstGeom xmlns:a="http://schemas.openxmlformats.org/drawingml/2006/main" prst="rect">
+            <a:avLst/>
+          </a:prstGeom>
+          <a:noFill xmlns:a="http://schemas.openxmlformats.org/drawingml/2006/main"/>
+          <a:ln xmlns:a="http://schemas.openxmlformats.org/drawingml/2006/main" w="0">
+            <a:noFill/>
+            <a:prstDash val="solid"/>
+          </a:ln>
+        </p:spPr>
+        <p:txBody>
+          <a:bodyPr xmlns:a="http://schemas.openxmlformats.org/drawingml/2006/main" anchor="t"/>
+          <a:lstStyle xmlns:a="http://schemas.openxmlformats.org/drawingml/2006/main"/>
+          <a:p xmlns:a="http://schemas.openxmlformats.org/drawingml/2006/main">
+            <a:pPr algn="l">
+              <a:buNone/>
+              <a:defRPr sz="2700" b="1">
+                <a:solidFill>
+                  <a:srgbClr val="101820"/>
+                </a:solidFill>
+                <a:latin typeface="Arial"/>
+                <a:ea typeface="Arial"/>
+                <a:cs typeface="Arial"/>
+              </a:defRPr>
+            </a:pPr>
+            <a:r>
+              <a:rPr sz="2700" b="1">
+                <a:solidFill>
+                  <a:srgbClr val="101820"/>
+                </a:solidFill>
+                <a:latin typeface="Arial"/>
+                <a:ea typeface="Arial"/>
+                <a:cs typeface="Arial"/>
+              </a:rPr>
+              <a:t>The absolute-momentum veto is an occasional brake—not the normal state</a:t>
+            </a:r>
+          </a:p>
+        </p:txBody>
+      </p:sp>
+      <p:sp>
+        <p:nvSpPr>
+          <p:cNvPr id="3" name="">
+            <a:extLst xmlns:a="http://schemas.openxmlformats.org/drawingml/2006/main">
+              <a:ext uri="{FF2B5EF4-FFF2-40B4-BE49-F238E27FC236}">
+                <a16:creationId xmlns:a16="http://schemas.microsoft.com/office/drawing/2014/main" id="{21605544-2473-417D-B48F-9F8DF40D4FAF}"/>
+              </a:ext>
+            </a:extLst>
+          </p:cNvPr>
+          <p:cNvSpPr>
+            <a:spLocks xmlns:a="http://schemas.openxmlformats.org/drawingml/2006/main" noGrp="1"/>
+          </p:cNvSpPr>
+          <p:nvPr/>
+        </p:nvSpPr>
+        <p:spPr>
+          <a:xfrm xmlns:a="http://schemas.openxmlformats.org/drawingml/2006/main">
+            <a:off x="400050" y="1428750"/>
+            <a:ext cx="11391900" cy="0"/>
+          </a:xfrm>
+          <a:prstGeom xmlns:a="http://schemas.openxmlformats.org/drawingml/2006/main" prst="line">
+            <a:avLst/>
+          </a:prstGeom>
+          <a:noFill xmlns:a="http://schemas.openxmlformats.org/drawingml/2006/main"/>
+          <a:ln xmlns:a="http://schemas.openxmlformats.org/drawingml/2006/main" w="9525">
+            <a:solidFill>
+              <a:srgbClr val="B8BCC4"/>
+            </a:solidFill>
+            <a:prstDash val="solid"/>
+          </a:ln>
+        </p:spPr>
+      </p:sp>
+      <p:sp>
+        <p:nvSpPr>
+          <p:cNvPr id="4" name="">
+            <a:extLst xmlns:a="http://schemas.openxmlformats.org/drawingml/2006/main">
+              <a:ext uri="{FF2B5EF4-FFF2-40B4-BE49-F238E27FC236}">
+                <a16:creationId xmlns:a16="http://schemas.microsoft.com/office/drawing/2014/main" id="{7944BF93-B836-4831-89CE-852C703D91AD}"/>
+              </a:ext>
+            </a:extLst>
+          </p:cNvPr>
+          <p:cNvSpPr>
+            <a:spLocks xmlns:a="http://schemas.openxmlformats.org/drawingml/2006/main" noGrp="1"/>
+          </p:cNvSpPr>
+          <p:nvPr/>
+        </p:nvSpPr>
+        <p:spPr>
+          <a:xfrm xmlns:a="http://schemas.openxmlformats.org/drawingml/2006/main">
+            <a:off x="11010900" y="6324600"/>
+            <a:ext cx="762000" cy="266700"/>
+          </a:xfrm>
+          <a:prstGeom xmlns:a="http://schemas.openxmlformats.org/drawingml/2006/main" prst="rect">
+            <a:avLst/>
+          </a:prstGeom>
+          <a:noFill xmlns:a="http://schemas.openxmlformats.org/drawingml/2006/main"/>
+          <a:ln xmlns:a="http://schemas.openxmlformats.org/drawingml/2006/main" w="0">
+            <a:noFill/>
+            <a:prstDash val="solid"/>
+          </a:ln>
+        </p:spPr>
+        <p:txBody>
+          <a:bodyPr xmlns:a="http://schemas.openxmlformats.org/drawingml/2006/main" anchor="t"/>
+          <a:lstStyle xmlns:a="http://schemas.openxmlformats.org/drawingml/2006/main"/>
+          <a:p xmlns:a="http://schemas.openxmlformats.org/drawingml/2006/main">
+            <a:pPr algn="r">
+              <a:buNone/>
+              <a:defRPr sz="1200" b="0">
+                <a:solidFill>
+                  <a:srgbClr val="52616B"/>
+                </a:solidFill>
+                <a:latin typeface="Arial"/>
+                <a:ea typeface="Arial"/>
+                <a:cs typeface="Arial"/>
+              </a:defRPr>
+            </a:pPr>
+            <a:r>
+              <a:rPr sz="1200" b="0">
+                <a:solidFill>
+                  <a:srgbClr val="52616B"/>
+                </a:solidFill>
+                <a:latin typeface="Arial"/>
+                <a:ea typeface="Arial"/>
+                <a:cs typeface="Arial"/>
+              </a:rPr>
+              <a:t>16</a:t>
+            </a:r>
+          </a:p>
+        </p:txBody>
+      </p:sp>
+      <p:pic>
+        <p:nvPicPr>
+          <p:cNvPr id="19" name=""/>
+          <p:cNvPicPr>
+            <a:picLocks xmlns:a="http://schemas.openxmlformats.org/drawingml/2006/main" noChangeAspect="1"/>
+          </p:cNvPicPr>
+          <p:nvPr/>
+        </p:nvPicPr>
+        <p:blipFill>
+          <a:blip xmlns:r="http://schemas.openxmlformats.org/officeDocument/2006/relationships" xmlns:a="http://schemas.openxmlformats.org/drawingml/2006/main" r:embed="Re0b0c88161b3479f"/>
+          <a:stretch xmlns:a="http://schemas.openxmlformats.org/drawingml/2006/main"/>
+        </p:blipFill>
+        <p:spPr>
+          <a:xfrm xmlns:a="http://schemas.openxmlformats.org/drawingml/2006/main">
+            <a:off x="460699" y="1562100"/>
+            <a:ext cx="8222602" cy="4476750"/>
+          </a:xfrm>
+          <a:prstGeom xmlns:a="http://schemas.openxmlformats.org/drawingml/2006/main" prst="rect">
+            <a:avLst/>
+          </a:prstGeom>
+        </p:spPr>
+      </p:pic>
+      <p:sp>
+        <p:nvSpPr>
+          <p:cNvPr id="6" name="">
+            <a:extLst xmlns:a="http://schemas.openxmlformats.org/drawingml/2006/main">
+              <a:ext uri="{FF2B5EF4-FFF2-40B4-BE49-F238E27FC236}">
+                <a16:creationId xmlns:a16="http://schemas.microsoft.com/office/drawing/2014/main" id="{DBF73623-95B1-48A7-A168-959D4ACF9EF6}"/>
+              </a:ext>
+            </a:extLst>
+          </p:cNvPr>
+          <p:cNvSpPr>
+            <a:spLocks xmlns:a="http://schemas.openxmlformats.org/drawingml/2006/main" noGrp="1"/>
+          </p:cNvSpPr>
+          <p:nvPr/>
+        </p:nvSpPr>
+        <p:spPr>
+          <a:xfrm xmlns:a="http://schemas.openxmlformats.org/drawingml/2006/main">
+            <a:off x="8991600" y="1733550"/>
+            <a:ext cx="2724150" cy="3905250"/>
+          </a:xfrm>
+          <a:prstGeom xmlns:a="http://schemas.openxmlformats.org/drawingml/2006/main" prst="rect">
+            <a:avLst/>
+          </a:prstGeom>
+          <a:solidFill xmlns:a="http://schemas.openxmlformats.org/drawingml/2006/main">
+            <a:srgbClr val="EAF5FB"/>
+          </a:solidFill>
+          <a:ln xmlns:a="http://schemas.openxmlformats.org/drawingml/2006/main" w="9525">
+            <a:solidFill>
+              <a:srgbClr val="6DCBF4"/>
+            </a:solidFill>
+            <a:prstDash val="solid"/>
+          </a:ln>
+        </p:spPr>
+      </p:sp>
+      <p:sp>
+        <p:nvSpPr>
+          <p:cNvPr id="7" name="">
+            <a:extLst xmlns:a="http://schemas.openxmlformats.org/drawingml/2006/main">
+              <a:ext uri="{FF2B5EF4-FFF2-40B4-BE49-F238E27FC236}">
+                <a16:creationId xmlns:a16="http://schemas.microsoft.com/office/drawing/2014/main" id="{454D3BC9-AB19-4F57-985E-DDB05A7434C0}"/>
+              </a:ext>
+            </a:extLst>
+          </p:cNvPr>
+          <p:cNvSpPr>
+            <a:spLocks xmlns:a="http://schemas.openxmlformats.org/drawingml/2006/main" noGrp="1"/>
+          </p:cNvSpPr>
+          <p:nvPr/>
+        </p:nvSpPr>
+        <p:spPr>
+          <a:xfrm xmlns:a="http://schemas.openxmlformats.org/drawingml/2006/main">
+            <a:off x="9258300" y="2019300"/>
+            <a:ext cx="2095500" cy="247650"/>
+          </a:xfrm>
+          <a:prstGeom xmlns:a="http://schemas.openxmlformats.org/drawingml/2006/main" prst="rect">
+            <a:avLst/>
+          </a:prstGeom>
+          <a:noFill xmlns:a="http://schemas.openxmlformats.org/drawingml/2006/main"/>
+          <a:ln xmlns:a="http://schemas.openxmlformats.org/drawingml/2006/main" w="0">
+            <a:noFill/>
+            <a:prstDash val="solid"/>
+          </a:ln>
+        </p:spPr>
+        <p:txBody>
+          <a:bodyPr xmlns:a="http://schemas.openxmlformats.org/drawingml/2006/main" anchor="t"/>
+          <a:lstStyle xmlns:a="http://schemas.openxmlformats.org/drawingml/2006/main"/>
+          <a:p xmlns:a="http://schemas.openxmlformats.org/drawingml/2006/main">
+            <a:pPr algn="l">
+              <a:buNone/>
+              <a:defRPr sz="1275" b="1">
+                <a:solidFill>
+                  <a:srgbClr val="3D8DFF"/>
+                </a:solidFill>
+                <a:latin typeface="Arial"/>
+                <a:ea typeface="Arial"/>
+                <a:cs typeface="Arial"/>
+              </a:defRPr>
+            </a:pPr>
+            <a:r>
+              <a:rPr sz="1275" b="1">
+                <a:solidFill>
+                  <a:srgbClr val="3D8DFF"/>
+                </a:solidFill>
+                <a:latin typeface="Arial"/>
+                <a:ea typeface="Arial"/>
+                <a:cs typeface="Arial"/>
+              </a:rPr>
+              <a:t>MECHANICS READOUT</a:t>
+            </a:r>
+          </a:p>
+        </p:txBody>
+      </p:sp>
+      <p:sp>
+        <p:nvSpPr>
+          <p:cNvPr id="8" name="">
+            <a:extLst xmlns:a="http://schemas.openxmlformats.org/drawingml/2006/main">
+              <a:ext uri="{FF2B5EF4-FFF2-40B4-BE49-F238E27FC236}">
+                <a16:creationId xmlns:a16="http://schemas.microsoft.com/office/drawing/2014/main" id="{50CF5D67-77D5-4062-92DB-E9771F376463}"/>
+              </a:ext>
+            </a:extLst>
+          </p:cNvPr>
+          <p:cNvSpPr>
+            <a:spLocks xmlns:a="http://schemas.openxmlformats.org/drawingml/2006/main" noGrp="1"/>
+          </p:cNvSpPr>
+          <p:nvPr/>
+        </p:nvSpPr>
+        <p:spPr>
+          <a:xfrm xmlns:a="http://schemas.openxmlformats.org/drawingml/2006/main">
+            <a:off x="9258300" y="2571750"/>
+            <a:ext cx="2095500" cy="552450"/>
+          </a:xfrm>
+          <a:prstGeom xmlns:a="http://schemas.openxmlformats.org/drawingml/2006/main" prst="rect">
+            <a:avLst/>
+          </a:prstGeom>
+          <a:noFill xmlns:a="http://schemas.openxmlformats.org/drawingml/2006/main"/>
+          <a:ln xmlns:a="http://schemas.openxmlformats.org/drawingml/2006/main" w="0">
+            <a:noFill/>
+            <a:prstDash val="solid"/>
+          </a:ln>
+        </p:spPr>
+        <p:txBody>
+          <a:bodyPr xmlns:a="http://schemas.openxmlformats.org/drawingml/2006/main" anchor="t"/>
+          <a:lstStyle xmlns:a="http://schemas.openxmlformats.org/drawingml/2006/main"/>
+          <a:p xmlns:a="http://schemas.openxmlformats.org/drawingml/2006/main">
+            <a:pPr algn="l">
+              <a:buNone/>
+              <a:defRPr sz="3000" b="1">
+                <a:solidFill>
+                  <a:srgbClr val="101820"/>
+                </a:solidFill>
+                <a:latin typeface="Arial"/>
+                <a:ea typeface="Arial"/>
+                <a:cs typeface="Arial"/>
+              </a:defRPr>
+            </a:pPr>
+            <a:r>
+              <a:rPr sz="3000" b="1">
+                <a:solidFill>
+                  <a:srgbClr val="101820"/>
+                </a:solidFill>
+                <a:latin typeface="Arial"/>
+                <a:ea typeface="Arial"/>
+                <a:cs typeface="Arial"/>
+              </a:rPr>
+              <a:t>463 / 508</a:t>
+            </a:r>
+          </a:p>
+        </p:txBody>
+      </p:sp>
+      <p:sp>
+        <p:nvSpPr>
+          <p:cNvPr id="9" name="">
+            <a:extLst xmlns:a="http://schemas.openxmlformats.org/drawingml/2006/main">
+              <a:ext uri="{FF2B5EF4-FFF2-40B4-BE49-F238E27FC236}">
+                <a16:creationId xmlns:a16="http://schemas.microsoft.com/office/drawing/2014/main" id="{7C0B5D7F-B17A-4AC9-835E-6E44FD9128EC}"/>
+              </a:ext>
+            </a:extLst>
+          </p:cNvPr>
+          <p:cNvSpPr>
+            <a:spLocks xmlns:a="http://schemas.openxmlformats.org/drawingml/2006/main" noGrp="1"/>
+          </p:cNvSpPr>
+          <p:nvPr/>
+        </p:nvSpPr>
+        <p:spPr>
+          <a:xfrm xmlns:a="http://schemas.openxmlformats.org/drawingml/2006/main">
+            <a:off x="9258300" y="3105150"/>
+            <a:ext cx="2095500" cy="400050"/>
+          </a:xfrm>
+          <a:prstGeom xmlns:a="http://schemas.openxmlformats.org/drawingml/2006/main" prst="rect">
+            <a:avLst/>
+          </a:prstGeom>
+          <a:noFill xmlns:a="http://schemas.openxmlformats.org/drawingml/2006/main"/>
+          <a:ln xmlns:a="http://schemas.openxmlformats.org/drawingml/2006/main" w="0">
+            <a:noFill/>
+            <a:prstDash val="solid"/>
+          </a:ln>
+        </p:spPr>
+        <p:txBody>
+          <a:bodyPr xmlns:a="http://schemas.openxmlformats.org/drawingml/2006/main" anchor="t"/>
+          <a:lstStyle xmlns:a="http://schemas.openxmlformats.org/drawingml/2006/main"/>
+          <a:p xmlns:a="http://schemas.openxmlformats.org/drawingml/2006/main">
+            <a:pPr algn="l">
+              <a:buNone/>
+              <a:defRPr sz="1650" b="0">
+                <a:solidFill>
+                  <a:srgbClr val="52616B"/>
+                </a:solidFill>
+                <a:latin typeface="Arial"/>
+                <a:ea typeface="Arial"/>
+                <a:cs typeface="Arial"/>
+              </a:defRPr>
+            </a:pPr>
+            <a:r>
+              <a:rPr sz="1650" b="0">
+                <a:solidFill>
+                  <a:srgbClr val="52616B"/>
+                </a:solidFill>
+                <a:latin typeface="Arial"/>
+                <a:ea typeface="Arial"/>
+                <a:cs typeface="Arial"/>
+              </a:rPr>
+              <a:t>weeks fully invested</a:t>
+            </a:r>
+          </a:p>
+        </p:txBody>
+      </p:sp>
+      <p:sp>
+        <p:nvSpPr>
+          <p:cNvPr id="10" name="">
+            <a:extLst xmlns:a="http://schemas.openxmlformats.org/drawingml/2006/main">
+              <a:ext uri="{FF2B5EF4-FFF2-40B4-BE49-F238E27FC236}">
+                <a16:creationId xmlns:a16="http://schemas.microsoft.com/office/drawing/2014/main" id="{DE7E78EB-BFD1-417B-B781-C8666F0A80F8}"/>
+              </a:ext>
+            </a:extLst>
+          </p:cNvPr>
+          <p:cNvSpPr>
+            <a:spLocks xmlns:a="http://schemas.openxmlformats.org/drawingml/2006/main" noGrp="1"/>
+          </p:cNvSpPr>
+          <p:nvPr/>
+        </p:nvSpPr>
+        <p:spPr>
+          <a:xfrm xmlns:a="http://schemas.openxmlformats.org/drawingml/2006/main">
+            <a:off x="9258300" y="3790950"/>
+            <a:ext cx="2095500" cy="552450"/>
+          </a:xfrm>
+          <a:prstGeom xmlns:a="http://schemas.openxmlformats.org/drawingml/2006/main" prst="rect">
+            <a:avLst/>
+          </a:prstGeom>
+          <a:noFill xmlns:a="http://schemas.openxmlformats.org/drawingml/2006/main"/>
+          <a:ln xmlns:a="http://schemas.openxmlformats.org/drawingml/2006/main" w="0">
+            <a:noFill/>
+            <a:prstDash val="solid"/>
+          </a:ln>
+        </p:spPr>
+        <p:txBody>
+          <a:bodyPr xmlns:a="http://schemas.openxmlformats.org/drawingml/2006/main" anchor="t"/>
+          <a:lstStyle xmlns:a="http://schemas.openxmlformats.org/drawingml/2006/main"/>
+          <a:p xmlns:a="http://schemas.openxmlformats.org/drawingml/2006/main">
+            <a:pPr algn="l">
+              <a:buNone/>
+              <a:defRPr sz="3000" b="1">
+                <a:solidFill>
+                  <a:srgbClr val="3D8DFF"/>
+                </a:solidFill>
+                <a:latin typeface="Arial"/>
+                <a:ea typeface="Arial"/>
+                <a:cs typeface="Arial"/>
+              </a:defRPr>
+            </a:pPr>
+            <a:r>
+              <a:rPr sz="3000" b="1">
+                <a:solidFill>
+                  <a:srgbClr val="3D8DFF"/>
+                </a:solidFill>
+                <a:latin typeface="Arial"/>
+                <a:ea typeface="Arial"/>
+                <a:cs typeface="Arial"/>
+              </a:rPr>
+              <a:t>2.6%</a:t>
+            </a:r>
+          </a:p>
+        </p:txBody>
+      </p:sp>
+      <p:sp>
+        <p:nvSpPr>
+          <p:cNvPr id="11" name="">
+            <a:extLst xmlns:a="http://schemas.openxmlformats.org/drawingml/2006/main">
+              <a:ext uri="{FF2B5EF4-FFF2-40B4-BE49-F238E27FC236}">
+                <a16:creationId xmlns:a16="http://schemas.microsoft.com/office/drawing/2014/main" id="{5DFE562A-9915-489A-BC82-2F762B044604}"/>
+              </a:ext>
+            </a:extLst>
+          </p:cNvPr>
+          <p:cNvSpPr>
+            <a:spLocks xmlns:a="http://schemas.openxmlformats.org/drawingml/2006/main" noGrp="1"/>
+          </p:cNvSpPr>
+          <p:nvPr/>
+        </p:nvSpPr>
+        <p:spPr>
+          <a:xfrm xmlns:a="http://schemas.openxmlformats.org/drawingml/2006/main">
+            <a:off x="9258300" y="4324350"/>
+            <a:ext cx="2095500" cy="400050"/>
+          </a:xfrm>
+          <a:prstGeom xmlns:a="http://schemas.openxmlformats.org/drawingml/2006/main" prst="rect">
+            <a:avLst/>
+          </a:prstGeom>
+          <a:noFill xmlns:a="http://schemas.openxmlformats.org/drawingml/2006/main"/>
+          <a:ln xmlns:a="http://schemas.openxmlformats.org/drawingml/2006/main" w="0">
+            <a:noFill/>
+            <a:prstDash val="solid"/>
+          </a:ln>
+        </p:spPr>
+        <p:txBody>
+          <a:bodyPr xmlns:a="http://schemas.openxmlformats.org/drawingml/2006/main" anchor="t"/>
+          <a:lstStyle xmlns:a="http://schemas.openxmlformats.org/drawingml/2006/main"/>
+          <a:p xmlns:a="http://schemas.openxmlformats.org/drawingml/2006/main">
+            <a:pPr algn="l">
+              <a:buNone/>
+              <a:defRPr sz="1650" b="0">
+                <a:solidFill>
+                  <a:srgbClr val="52616B"/>
+                </a:solidFill>
+                <a:latin typeface="Arial"/>
+                <a:ea typeface="Arial"/>
+                <a:cs typeface="Arial"/>
+              </a:defRPr>
+            </a:pPr>
+            <a:r>
+              <a:rPr sz="1650" b="0">
+                <a:solidFill>
+                  <a:srgbClr val="52616B"/>
+                </a:solidFill>
+                <a:latin typeface="Arial"/>
+                <a:ea typeface="Arial"/>
+                <a:cs typeface="Arial"/>
+              </a:rPr>
+              <a:t>average cash weight</a:t>
+            </a:r>
+          </a:p>
+        </p:txBody>
+      </p:sp>
+      <p:sp>
+        <p:nvSpPr>
+          <p:cNvPr id="12" name="">
+            <a:extLst xmlns:a="http://schemas.openxmlformats.org/drawingml/2006/main">
+              <a:ext uri="{FF2B5EF4-FFF2-40B4-BE49-F238E27FC236}">
+                <a16:creationId xmlns:a16="http://schemas.microsoft.com/office/drawing/2014/main" id="{9A127473-A846-4BDC-AD98-EA1A2A6F11AD}"/>
+              </a:ext>
+            </a:extLst>
+          </p:cNvPr>
+          <p:cNvSpPr>
+            <a:spLocks xmlns:a="http://schemas.openxmlformats.org/drawingml/2006/main" noGrp="1"/>
+          </p:cNvSpPr>
+          <p:nvPr/>
+        </p:nvSpPr>
+        <p:spPr>
+          <a:xfrm xmlns:a="http://schemas.openxmlformats.org/drawingml/2006/main">
+            <a:off x="9258300" y="4972050"/>
+            <a:ext cx="2095500" cy="381000"/>
+          </a:xfrm>
+          <a:prstGeom xmlns:a="http://schemas.openxmlformats.org/drawingml/2006/main" prst="rect">
+            <a:avLst/>
+          </a:prstGeom>
+          <a:noFill xmlns:a="http://schemas.openxmlformats.org/drawingml/2006/main"/>
+          <a:ln xmlns:a="http://schemas.openxmlformats.org/drawingml/2006/main" w="0">
+            <a:noFill/>
+            <a:prstDash val="solid"/>
+          </a:ln>
+        </p:spPr>
+        <p:txBody>
+          <a:bodyPr xmlns:a="http://schemas.openxmlformats.org/drawingml/2006/main" anchor="t"/>
+          <a:lstStyle xmlns:a="http://schemas.openxmlformats.org/drawingml/2006/main"/>
+          <a:p xmlns:a="http://schemas.openxmlformats.org/drawingml/2006/main">
+            <a:pPr algn="l">
+              <a:buNone/>
+              <a:defRPr sz="1950" b="1">
+                <a:solidFill>
+                  <a:srgbClr val="101820"/>
+                </a:solidFill>
+                <a:latin typeface="Arial"/>
+                <a:ea typeface="Arial"/>
+                <a:cs typeface="Arial"/>
+              </a:defRPr>
+            </a:pPr>
+            <a:r>
+              <a:rPr sz="1950" b="1">
+                <a:solidFill>
+                  <a:srgbClr val="101820"/>
+                </a:solidFill>
+                <a:latin typeface="Arial"/>
+                <a:ea typeface="Arial"/>
+                <a:cs typeface="Arial"/>
+              </a:rPr>
+              <a:t>0% → 66.7%</a:t>
+            </a:r>
+          </a:p>
+        </p:txBody>
+      </p:sp>
+    </p:spTree>
+    <p:extLst>
+      <p:ext uri="{BB962C8B-B14F-4D97-AF65-F5344CB8AC3E}">
+        <p14:creationId xmlns:p14="http://schemas.microsoft.com/office/powerpoint/2010/main" val="1063912481"/>
+      </p:ext>
+    </p:extLst>
+  </p:cSld>
+</p:sld>
+</file>
+
+<file path=ppt/slides/slide17.xml><?xml version="1.0" encoding="utf-8"?>
+<p:sld xmlns:p="http://schemas.openxmlformats.org/presentationml/2006/main">
+  <p:cSld>
+    <p:bg>
+      <p:bgPr>
+        <a:solidFill xmlns:a="http://schemas.openxmlformats.org/drawingml/2006/main">
+          <a:srgbClr val="FFFFFF"/>
+        </a:solidFill>
+      </p:bgPr>
+    </p:bg>
+    <p:spTree>
+      <p:nvGrpSpPr>
+        <p:cNvPr id="1" name=""/>
+        <p:cNvGrpSpPr/>
+        <p:nvPr/>
+      </p:nvGrpSpPr>
+      <p:grpSpPr>
+        <a:xfrm xmlns:a="http://schemas.openxmlformats.org/drawingml/2006/main"/>
+      </p:grpSpPr>
+      <p:sp>
+        <p:nvSpPr>
+          <p:cNvPr id="14" name="">
+            <a:extLst xmlns:a="http://schemas.openxmlformats.org/drawingml/2006/main">
+              <a:ext uri="{FF2B5EF4-FFF2-40B4-BE49-F238E27FC236}">
+                <a16:creationId xmlns:a16="http://schemas.microsoft.com/office/drawing/2014/main" id="{39B7BB28-C5CF-47BA-A918-FA17029EB44A}"/>
+              </a:ext>
+            </a:extLst>
+          </p:cNvPr>
+          <p:cNvSpPr>
+            <a:spLocks xmlns:a="http://schemas.openxmlformats.org/drawingml/2006/main" noGrp="1"/>
+          </p:cNvSpPr>
+          <p:nvPr/>
+        </p:nvSpPr>
+        <p:spPr>
+          <a:xfrm xmlns:a="http://schemas.openxmlformats.org/drawingml/2006/main">
+            <a:off x="400050" y="228600"/>
+            <a:ext cx="2857500" cy="228600"/>
+          </a:xfrm>
+          <a:prstGeom xmlns:a="http://schemas.openxmlformats.org/drawingml/2006/main" prst="rect">
+            <a:avLst/>
+          </a:prstGeom>
+          <a:noFill xmlns:a="http://schemas.openxmlformats.org/drawingml/2006/main"/>
+          <a:ln xmlns:a="http://schemas.openxmlformats.org/drawingml/2006/main" w="0">
+            <a:noFill/>
+            <a:prstDash val="solid"/>
+          </a:ln>
+        </p:spPr>
+        <p:txBody>
+          <a:bodyPr xmlns:a="http://schemas.openxmlformats.org/drawingml/2006/main" anchor="t"/>
+          <a:lstStyle xmlns:a="http://schemas.openxmlformats.org/drawingml/2006/main"/>
+          <a:p xmlns:a="http://schemas.openxmlformats.org/drawingml/2006/main">
+            <a:pPr algn="l">
+              <a:buNone/>
+              <a:defRPr sz="1200" b="1">
+                <a:solidFill>
+                  <a:srgbClr val="3D8DFF"/>
+                </a:solidFill>
+                <a:latin typeface="Arial"/>
+                <a:ea typeface="Arial"/>
+                <a:cs typeface="Arial"/>
+              </a:defRPr>
+            </a:pPr>
+            <a:r>
+              <a:rPr sz="1200" b="1">
+                <a:solidFill>
+                  <a:srgbClr val="3D8DFF"/>
+                </a:solidFill>
+                <a:latin typeface="Arial"/>
+                <a:ea typeface="Arial"/>
+                <a:cs typeface="Arial"/>
+              </a:rPr>
+              <a:t>LIT-MOM-03.1</a:t>
+            </a:r>
+          </a:p>
+        </p:txBody>
+      </p:sp>
+      <p:sp>
+        <p:nvSpPr>
+          <p:cNvPr id="2" name="">
+            <a:extLst xmlns:a="http://schemas.openxmlformats.org/drawingml/2006/main">
+              <a:ext uri="{FF2B5EF4-FFF2-40B4-BE49-F238E27FC236}">
+                <a16:creationId xmlns:a16="http://schemas.microsoft.com/office/drawing/2014/main" id="{8C401559-67C5-4215-B579-93FC871FC00D}"/>
+              </a:ext>
+            </a:extLst>
+          </p:cNvPr>
+          <p:cNvSpPr>
+            <a:spLocks xmlns:a="http://schemas.openxmlformats.org/drawingml/2006/main" noGrp="1"/>
+          </p:cNvSpPr>
+          <p:nvPr/>
+        </p:nvSpPr>
+        <p:spPr>
+          <a:xfrm xmlns:a="http://schemas.openxmlformats.org/drawingml/2006/main">
+            <a:off x="400050" y="476250"/>
+            <a:ext cx="11049000" cy="819150"/>
+          </a:xfrm>
+          <a:prstGeom xmlns:a="http://schemas.openxmlformats.org/drawingml/2006/main" prst="rect">
+            <a:avLst/>
+          </a:prstGeom>
+          <a:noFill xmlns:a="http://schemas.openxmlformats.org/drawingml/2006/main"/>
+          <a:ln xmlns:a="http://schemas.openxmlformats.org/drawingml/2006/main" w="0">
+            <a:noFill/>
+            <a:prstDash val="solid"/>
+          </a:ln>
+        </p:spPr>
+        <p:txBody>
+          <a:bodyPr xmlns:a="http://schemas.openxmlformats.org/drawingml/2006/main" anchor="t"/>
+          <a:lstStyle xmlns:a="http://schemas.openxmlformats.org/drawingml/2006/main"/>
+          <a:p xmlns:a="http://schemas.openxmlformats.org/drawingml/2006/main">
+            <a:pPr algn="l">
+              <a:buNone/>
+              <a:defRPr sz="2700" b="1">
+                <a:solidFill>
+                  <a:srgbClr val="101820"/>
+                </a:solidFill>
+                <a:latin typeface="Arial"/>
+                <a:ea typeface="Arial"/>
+                <a:cs typeface="Arial"/>
+              </a:defRPr>
+            </a:pPr>
+            <a:r>
+              <a:rPr sz="2700" b="1">
+                <a:solidFill>
+                  <a:srgbClr val="101820"/>
+                </a:solidFill>
+                <a:latin typeface="Arial"/>
+                <a:ea typeface="Arial"/>
+                <a:cs typeface="Arial"/>
+              </a:rPr>
+              <a:t>The two horizons usually concentrate on the same winners</a:t>
+            </a:r>
+          </a:p>
+        </p:txBody>
+      </p:sp>
+      <p:sp>
+        <p:nvSpPr>
+          <p:cNvPr id="3" name="">
+            <a:extLst xmlns:a="http://schemas.openxmlformats.org/drawingml/2006/main">
+              <a:ext uri="{FF2B5EF4-FFF2-40B4-BE49-F238E27FC236}">
+                <a16:creationId xmlns:a16="http://schemas.microsoft.com/office/drawing/2014/main" id="{FE913BAC-F3B9-4338-8958-15CBEBB596BB}"/>
+              </a:ext>
+            </a:extLst>
+          </p:cNvPr>
+          <p:cNvSpPr>
+            <a:spLocks xmlns:a="http://schemas.openxmlformats.org/drawingml/2006/main" noGrp="1"/>
+          </p:cNvSpPr>
+          <p:nvPr/>
+        </p:nvSpPr>
+        <p:spPr>
+          <a:xfrm xmlns:a="http://schemas.openxmlformats.org/drawingml/2006/main">
+            <a:off x="400050" y="1428750"/>
+            <a:ext cx="11391900" cy="0"/>
+          </a:xfrm>
+          <a:prstGeom xmlns:a="http://schemas.openxmlformats.org/drawingml/2006/main" prst="line">
+            <a:avLst/>
+          </a:prstGeom>
+          <a:noFill xmlns:a="http://schemas.openxmlformats.org/drawingml/2006/main"/>
+          <a:ln xmlns:a="http://schemas.openxmlformats.org/drawingml/2006/main" w="9525">
+            <a:solidFill>
+              <a:srgbClr val="B8BCC4"/>
+            </a:solidFill>
+            <a:prstDash val="solid"/>
+          </a:ln>
+        </p:spPr>
+      </p:sp>
+      <p:sp>
+        <p:nvSpPr>
+          <p:cNvPr id="4" name="">
+            <a:extLst xmlns:a="http://schemas.openxmlformats.org/drawingml/2006/main">
+              <a:ext uri="{FF2B5EF4-FFF2-40B4-BE49-F238E27FC236}">
+                <a16:creationId xmlns:a16="http://schemas.microsoft.com/office/drawing/2014/main" id="{80D32FF2-05B5-4DF6-BBF4-B1464DC9B66A}"/>
+              </a:ext>
+            </a:extLst>
+          </p:cNvPr>
+          <p:cNvSpPr>
+            <a:spLocks xmlns:a="http://schemas.openxmlformats.org/drawingml/2006/main" noGrp="1"/>
+          </p:cNvSpPr>
+          <p:nvPr/>
+        </p:nvSpPr>
+        <p:spPr>
+          <a:xfrm xmlns:a="http://schemas.openxmlformats.org/drawingml/2006/main">
+            <a:off x="11372850" y="6324600"/>
+            <a:ext cx="400050" cy="266700"/>
+          </a:xfrm>
+          <a:prstGeom xmlns:a="http://schemas.openxmlformats.org/drawingml/2006/main" prst="rect">
+            <a:avLst/>
+          </a:prstGeom>
+          <a:noFill xmlns:a="http://schemas.openxmlformats.org/drawingml/2006/main"/>
+          <a:ln xmlns:a="http://schemas.openxmlformats.org/drawingml/2006/main" w="0">
+            <a:noFill/>
+            <a:prstDash val="solid"/>
+          </a:ln>
+        </p:spPr>
+        <p:txBody>
+          <a:bodyPr xmlns:a="http://schemas.openxmlformats.org/drawingml/2006/main" anchor="t"/>
+          <a:lstStyle xmlns:a="http://schemas.openxmlformats.org/drawingml/2006/main"/>
+          <a:p xmlns:a="http://schemas.openxmlformats.org/drawingml/2006/main">
+            <a:pPr algn="l">
+              <a:buNone/>
+              <a:defRPr sz="1200" b="0">
+                <a:solidFill>
+                  <a:srgbClr val="52616B"/>
+                </a:solidFill>
+                <a:latin typeface="Arial"/>
+                <a:ea typeface="Arial"/>
+                <a:cs typeface="Arial"/>
+              </a:defRPr>
+            </a:pPr>
+            <a:r>
+              <a:rPr sz="1200" b="0">
+                <a:solidFill>
+                  <a:srgbClr val="52616B"/>
+                </a:solidFill>
+                <a:latin typeface="Arial"/>
+                <a:ea typeface="Arial"/>
+                <a:cs typeface="Arial"/>
+              </a:rPr>
+              <a:t>17</a:t>
+            </a:r>
+          </a:p>
+        </p:txBody>
+      </p:sp>
+      <p:pic>
+        <p:nvPicPr>
+          <p:cNvPr id="22" name=""/>
+          <p:cNvPicPr>
+            <a:picLocks xmlns:a="http://schemas.openxmlformats.org/drawingml/2006/main" noChangeAspect="1"/>
+          </p:cNvPicPr>
+          <p:nvPr/>
+        </p:nvPicPr>
+        <p:blipFill>
+          <a:blip xmlns:r="http://schemas.openxmlformats.org/officeDocument/2006/relationships" xmlns:a="http://schemas.openxmlformats.org/drawingml/2006/main" r:embed="Rb35fa0dd1d5040a2"/>
+          <a:stretch xmlns:a="http://schemas.openxmlformats.org/drawingml/2006/main"/>
+        </p:blipFill>
+        <p:spPr>
+          <a:xfrm xmlns:a="http://schemas.openxmlformats.org/drawingml/2006/main">
+            <a:off x="401022" y="1657350"/>
+            <a:ext cx="7522806" cy="4095750"/>
+          </a:xfrm>
+          <a:prstGeom xmlns:a="http://schemas.openxmlformats.org/drawingml/2006/main" prst="rect">
+            <a:avLst/>
+          </a:prstGeom>
+        </p:spPr>
+      </p:pic>
+      <p:sp>
+        <p:nvSpPr>
+          <p:cNvPr id="6" name="">
+            <a:extLst xmlns:a="http://schemas.openxmlformats.org/drawingml/2006/main">
+              <a:ext uri="{FF2B5EF4-FFF2-40B4-BE49-F238E27FC236}">
+                <a16:creationId xmlns:a16="http://schemas.microsoft.com/office/drawing/2014/main" id="{8B7E846F-BE01-42E8-9EBB-9EA3FC7567F0}"/>
+              </a:ext>
+            </a:extLst>
+          </p:cNvPr>
+          <p:cNvSpPr>
+            <a:spLocks xmlns:a="http://schemas.openxmlformats.org/drawingml/2006/main" noGrp="1"/>
+          </p:cNvSpPr>
+          <p:nvPr/>
+        </p:nvSpPr>
+        <p:spPr>
+          <a:xfrm xmlns:a="http://schemas.openxmlformats.org/drawingml/2006/main">
+            <a:off x="8153400" y="1695450"/>
+            <a:ext cx="3429000" cy="4057650"/>
+          </a:xfrm>
+          <a:prstGeom xmlns:a="http://schemas.openxmlformats.org/drawingml/2006/main" prst="rect">
+            <a:avLst/>
+          </a:prstGeom>
+          <a:solidFill xmlns:a="http://schemas.openxmlformats.org/drawingml/2006/main">
+            <a:srgbClr val="EAF5FB"/>
+          </a:solidFill>
+          <a:ln xmlns:a="http://schemas.openxmlformats.org/drawingml/2006/main" w="9525">
+            <a:solidFill>
+              <a:srgbClr val="6DCBF4"/>
+            </a:solidFill>
+            <a:prstDash val="solid"/>
+          </a:ln>
+        </p:spPr>
+      </p:sp>
+      <p:sp>
+        <p:nvSpPr>
+          <p:cNvPr id="7" name="">
+            <a:extLst xmlns:a="http://schemas.openxmlformats.org/drawingml/2006/main">
+              <a:ext uri="{FF2B5EF4-FFF2-40B4-BE49-F238E27FC236}">
+                <a16:creationId xmlns:a16="http://schemas.microsoft.com/office/drawing/2014/main" id="{7A48CFB1-8F2F-43AD-84B5-5B62F4FCE8D1}"/>
+              </a:ext>
+            </a:extLst>
+          </p:cNvPr>
+          <p:cNvSpPr>
+            <a:spLocks xmlns:a="http://schemas.openxmlformats.org/drawingml/2006/main" noGrp="1"/>
+          </p:cNvSpPr>
+          <p:nvPr/>
+        </p:nvSpPr>
+        <p:spPr>
+          <a:xfrm xmlns:a="http://schemas.openxmlformats.org/drawingml/2006/main">
+            <a:off x="8496300" y="2000250"/>
+            <a:ext cx="2476500" cy="247650"/>
+          </a:xfrm>
+          <a:prstGeom xmlns:a="http://schemas.openxmlformats.org/drawingml/2006/main" prst="rect">
+            <a:avLst/>
+          </a:prstGeom>
+          <a:noFill xmlns:a="http://schemas.openxmlformats.org/drawingml/2006/main"/>
+          <a:ln xmlns:a="http://schemas.openxmlformats.org/drawingml/2006/main" w="0">
+            <a:noFill/>
+            <a:prstDash val="solid"/>
+          </a:ln>
+        </p:spPr>
+        <p:txBody>
+          <a:bodyPr xmlns:a="http://schemas.openxmlformats.org/drawingml/2006/main" anchor="t"/>
+          <a:lstStyle xmlns:a="http://schemas.openxmlformats.org/drawingml/2006/main"/>
+          <a:p xmlns:a="http://schemas.openxmlformats.org/drawingml/2006/main">
+            <a:pPr algn="l">
+              <a:buNone/>
+              <a:defRPr sz="1275" b="1">
+                <a:solidFill>
+                  <a:srgbClr val="3D8DFF"/>
+                </a:solidFill>
+                <a:latin typeface="Arial"/>
+                <a:ea typeface="Arial"/>
+                <a:cs typeface="Arial"/>
+              </a:defRPr>
+            </a:pPr>
+            <a:r>
+              <a:rPr sz="1275" b="1">
+                <a:solidFill>
+                  <a:srgbClr val="3D8DFF"/>
+                </a:solidFill>
+                <a:latin typeface="Arial"/>
+                <a:ea typeface="Arial"/>
+                <a:cs typeface="Arial"/>
+              </a:rPr>
+              <a:t>SLEEVE OVERLAP</a:t>
+            </a:r>
+          </a:p>
+        </p:txBody>
+      </p:sp>
+      <p:sp>
+        <p:nvSpPr>
+          <p:cNvPr id="8" name="">
+            <a:extLst xmlns:a="http://schemas.openxmlformats.org/drawingml/2006/main">
+              <a:ext uri="{FF2B5EF4-FFF2-40B4-BE49-F238E27FC236}">
+                <a16:creationId xmlns:a16="http://schemas.microsoft.com/office/drawing/2014/main" id="{DC731ED7-5F85-42CB-A69F-0889CEA3331A}"/>
+              </a:ext>
+            </a:extLst>
+          </p:cNvPr>
+          <p:cNvSpPr>
+            <a:spLocks xmlns:a="http://schemas.openxmlformats.org/drawingml/2006/main" noGrp="1"/>
+          </p:cNvSpPr>
+          <p:nvPr/>
+        </p:nvSpPr>
+        <p:spPr>
+          <a:xfrm xmlns:a="http://schemas.openxmlformats.org/drawingml/2006/main">
+            <a:off x="8496300" y="2533650"/>
+            <a:ext cx="2686050" cy="609600"/>
+          </a:xfrm>
+          <a:prstGeom xmlns:a="http://schemas.openxmlformats.org/drawingml/2006/main" prst="rect">
+            <a:avLst/>
+          </a:prstGeom>
+          <a:noFill xmlns:a="http://schemas.openxmlformats.org/drawingml/2006/main"/>
+          <a:ln xmlns:a="http://schemas.openxmlformats.org/drawingml/2006/main" w="0">
+            <a:noFill/>
+            <a:prstDash val="solid"/>
+          </a:ln>
+        </p:spPr>
+        <p:txBody>
+          <a:bodyPr xmlns:a="http://schemas.openxmlformats.org/drawingml/2006/main" anchor="t"/>
+          <a:lstStyle xmlns:a="http://schemas.openxmlformats.org/drawingml/2006/main"/>
+          <a:p xmlns:a="http://schemas.openxmlformats.org/drawingml/2006/main">
+            <a:pPr algn="l">
+              <a:buNone/>
+              <a:defRPr sz="3375" b="1">
+                <a:solidFill>
+                  <a:srgbClr val="3D8DFF"/>
+                </a:solidFill>
+                <a:latin typeface="Arial"/>
+                <a:ea typeface="Arial"/>
+                <a:cs typeface="Arial"/>
+              </a:defRPr>
+            </a:pPr>
+            <a:r>
+              <a:rPr sz="3375" b="1">
+                <a:solidFill>
+                  <a:srgbClr val="3D8DFF"/>
+                </a:solidFill>
+                <a:latin typeface="Arial"/>
+                <a:ea typeface="Arial"/>
+                <a:cs typeface="Arial"/>
+              </a:rPr>
+              <a:t>488 / 508</a:t>
+            </a:r>
+          </a:p>
+        </p:txBody>
+      </p:sp>
+      <p:sp>
+        <p:nvSpPr>
+          <p:cNvPr id="9" name="">
+            <a:extLst xmlns:a="http://schemas.openxmlformats.org/drawingml/2006/main">
+              <a:ext uri="{FF2B5EF4-FFF2-40B4-BE49-F238E27FC236}">
+                <a16:creationId xmlns:a16="http://schemas.microsoft.com/office/drawing/2014/main" id="{406DC0E8-33AD-4797-87D6-8B560493E789}"/>
+              </a:ext>
+            </a:extLst>
+          </p:cNvPr>
+          <p:cNvSpPr>
+            <a:spLocks xmlns:a="http://schemas.openxmlformats.org/drawingml/2006/main" noGrp="1"/>
+          </p:cNvSpPr>
+          <p:nvPr/>
+        </p:nvSpPr>
+        <p:spPr>
+          <a:xfrm xmlns:a="http://schemas.openxmlformats.org/drawingml/2006/main">
+            <a:off x="8496300" y="3105150"/>
+            <a:ext cx="2686050" cy="400050"/>
+          </a:xfrm>
+          <a:prstGeom xmlns:a="http://schemas.openxmlformats.org/drawingml/2006/main" prst="rect">
+            <a:avLst/>
+          </a:prstGeom>
+          <a:noFill xmlns:a="http://schemas.openxmlformats.org/drawingml/2006/main"/>
+          <a:ln xmlns:a="http://schemas.openxmlformats.org/drawingml/2006/main" w="0">
+            <a:noFill/>
+            <a:prstDash val="solid"/>
+          </a:ln>
+        </p:spPr>
+        <p:txBody>
+          <a:bodyPr xmlns:a="http://schemas.openxmlformats.org/drawingml/2006/main" anchor="t"/>
+          <a:lstStyle xmlns:a="http://schemas.openxmlformats.org/drawingml/2006/main"/>
+          <a:p xmlns:a="http://schemas.openxmlformats.org/drawingml/2006/main">
+            <a:pPr algn="l">
+              <a:buNone/>
+              <a:defRPr sz="1725" b="0">
+                <a:solidFill>
+                  <a:srgbClr val="52616B"/>
+                </a:solidFill>
+                <a:latin typeface="Arial"/>
+                <a:ea typeface="Arial"/>
+                <a:cs typeface="Arial"/>
+              </a:defRPr>
+            </a:pPr>
+            <a:r>
+              <a:rPr sz="1725" b="0">
+                <a:solidFill>
+                  <a:srgbClr val="52616B"/>
+                </a:solidFill>
+                <a:latin typeface="Arial"/>
+                <a:ea typeface="Arial"/>
+                <a:cs typeface="Arial"/>
+              </a:rPr>
+              <a:t>weeks shared ≥1 ETF</a:t>
+            </a:r>
+          </a:p>
+        </p:txBody>
+      </p:sp>
+      <p:sp>
+        <p:nvSpPr>
+          <p:cNvPr id="10" name="">
+            <a:extLst xmlns:a="http://schemas.openxmlformats.org/drawingml/2006/main">
+              <a:ext uri="{FF2B5EF4-FFF2-40B4-BE49-F238E27FC236}">
+                <a16:creationId xmlns:a16="http://schemas.microsoft.com/office/drawing/2014/main" id="{A0EB914A-A236-47F4-91E9-BA72FF10432A}"/>
+              </a:ext>
+            </a:extLst>
+          </p:cNvPr>
+          <p:cNvSpPr>
+            <a:spLocks xmlns:a="http://schemas.openxmlformats.org/drawingml/2006/main" noGrp="1"/>
+          </p:cNvSpPr>
+          <p:nvPr/>
+        </p:nvSpPr>
+        <p:spPr>
+          <a:xfrm xmlns:a="http://schemas.openxmlformats.org/drawingml/2006/main">
+            <a:off x="8496300" y="3714750"/>
+            <a:ext cx="2686050" cy="0"/>
+          </a:xfrm>
+          <a:prstGeom xmlns:a="http://schemas.openxmlformats.org/drawingml/2006/main" prst="line">
+            <a:avLst/>
+          </a:prstGeom>
+          <a:noFill xmlns:a="http://schemas.openxmlformats.org/drawingml/2006/main"/>
+          <a:ln xmlns:a="http://schemas.openxmlformats.org/drawingml/2006/main" w="19050">
+            <a:solidFill>
+              <a:srgbClr val="6DCBF4"/>
+            </a:solidFill>
+            <a:prstDash val="solid"/>
+          </a:ln>
+        </p:spPr>
+      </p:sp>
+      <p:sp>
+        <p:nvSpPr>
+          <p:cNvPr id="11" name="">
+            <a:extLst xmlns:a="http://schemas.openxmlformats.org/drawingml/2006/main">
+              <a:ext uri="{FF2B5EF4-FFF2-40B4-BE49-F238E27FC236}">
+                <a16:creationId xmlns:a16="http://schemas.microsoft.com/office/drawing/2014/main" id="{63C90848-627F-4872-9F08-0BCEBC58FC88}"/>
+              </a:ext>
+            </a:extLst>
+          </p:cNvPr>
+          <p:cNvSpPr>
+            <a:spLocks xmlns:a="http://schemas.openxmlformats.org/drawingml/2006/main" noGrp="1"/>
+          </p:cNvSpPr>
+          <p:nvPr/>
+        </p:nvSpPr>
+        <p:spPr>
+          <a:xfrm xmlns:a="http://schemas.openxmlformats.org/drawingml/2006/main">
+            <a:off x="8496300" y="3962400"/>
+            <a:ext cx="2686050" cy="323850"/>
+          </a:xfrm>
+          <a:prstGeom xmlns:a="http://schemas.openxmlformats.org/drawingml/2006/main" prst="rect">
+            <a:avLst/>
+          </a:prstGeom>
+          <a:noFill xmlns:a="http://schemas.openxmlformats.org/drawingml/2006/main"/>
+          <a:ln xmlns:a="http://schemas.openxmlformats.org/drawingml/2006/main" w="0">
+            <a:noFill/>
+            <a:prstDash val="solid"/>
+          </a:ln>
+        </p:spPr>
+        <p:txBody>
+          <a:bodyPr xmlns:a="http://schemas.openxmlformats.org/drawingml/2006/main" anchor="t"/>
+          <a:lstStyle xmlns:a="http://schemas.openxmlformats.org/drawingml/2006/main"/>
+          <a:p xmlns:a="http://schemas.openxmlformats.org/drawingml/2006/main">
+            <a:pPr algn="l">
+              <a:buNone/>
+              <a:defRPr sz="1575" b="1">
+                <a:solidFill>
+                  <a:srgbClr val="101820"/>
+                </a:solidFill>
+                <a:latin typeface="Arial"/>
+                <a:ea typeface="Arial"/>
+                <a:cs typeface="Arial"/>
+              </a:defRPr>
+            </a:pPr>
+            <a:r>
+              <a:rPr sz="1575" b="1">
+                <a:solidFill>
+                  <a:srgbClr val="101820"/>
+                </a:solidFill>
+                <a:latin typeface="Arial"/>
+                <a:ea typeface="Arial"/>
+                <a:cs typeface="Arial"/>
+              </a:rPr>
+              <a:t>Latest decision · 2026-03-18</a:t>
+            </a:r>
+          </a:p>
+        </p:txBody>
+      </p:sp>
+      <p:sp>
+        <p:nvSpPr>
+          <p:cNvPr id="12" name="">
+            <a:extLst xmlns:a="http://schemas.openxmlformats.org/drawingml/2006/main">
+              <a:ext uri="{FF2B5EF4-FFF2-40B4-BE49-F238E27FC236}">
+                <a16:creationId xmlns:a16="http://schemas.microsoft.com/office/drawing/2014/main" id="{70090FDC-931D-4B56-AD5D-C71AA6FC29F9}"/>
+              </a:ext>
+            </a:extLst>
+          </p:cNvPr>
+          <p:cNvSpPr>
+            <a:spLocks xmlns:a="http://schemas.openxmlformats.org/drawingml/2006/main" noGrp="1"/>
+          </p:cNvSpPr>
+          <p:nvPr/>
+        </p:nvSpPr>
+        <p:spPr>
+          <a:xfrm xmlns:a="http://schemas.openxmlformats.org/drawingml/2006/main">
+            <a:off x="8496300" y="4419600"/>
+            <a:ext cx="2686050" cy="1009650"/>
+          </a:xfrm>
+          <a:prstGeom xmlns:a="http://schemas.openxmlformats.org/drawingml/2006/main" prst="rect">
+            <a:avLst/>
+          </a:prstGeom>
+          <a:noFill xmlns:a="http://schemas.openxmlformats.org/drawingml/2006/main"/>
+          <a:ln xmlns:a="http://schemas.openxmlformats.org/drawingml/2006/main" w="0">
+            <a:noFill/>
+            <a:prstDash val="solid"/>
+          </a:ln>
+        </p:spPr>
+        <p:txBody>
+          <a:bodyPr xmlns:a="http://schemas.openxmlformats.org/drawingml/2006/main" anchor="t"/>
+          <a:lstStyle xmlns:a="http://schemas.openxmlformats.org/drawingml/2006/main"/>
+          <a:p xmlns:a="http://schemas.openxmlformats.org/drawingml/2006/main">
+            <a:pPr algn="l">
+              <a:buNone/>
+              <a:defRPr sz="1725" b="0">
+                <a:solidFill>
+                  <a:srgbClr val="52616B"/>
+                </a:solidFill>
+                <a:latin typeface="Arial"/>
+                <a:ea typeface="Arial"/>
+                <a:cs typeface="Arial"/>
+              </a:defRPr>
+            </a:pPr>
+            <a:r>
+              <a:rPr sz="1725" b="0">
+                <a:solidFill>
+                  <a:srgbClr val="52616B"/>
+                </a:solidFill>
+                <a:latin typeface="Arial"/>
+                <a:ea typeface="Arial"/>
+                <a:cs typeface="Arial"/>
+              </a:rPr>
+              <a:t>10w  UUP · GLD · USO</a:t>
+            </a:r>
+          </a:p>
+          <a:p xmlns:a="http://schemas.openxmlformats.org/drawingml/2006/main">
+            <a:pPr algn="l">
+              <a:buNone/>
+              <a:defRPr sz="1725" b="0">
+                <a:solidFill>
+                  <a:srgbClr val="52616B"/>
+                </a:solidFill>
+                <a:latin typeface="Arial"/>
+                <a:ea typeface="Arial"/>
+                <a:cs typeface="Arial"/>
+              </a:defRPr>
+            </a:pPr>
+            <a:r>
+              <a:rPr sz="1725" b="0">
+                <a:solidFill>
+                  <a:srgbClr val="52616B"/>
+                </a:solidFill>
+                <a:latin typeface="Arial"/>
+                <a:ea typeface="Arial"/>
+                <a:cs typeface="Arial"/>
+              </a:rPr>
+              <a:t>25w  GLD · USO · EEM</a:t>
+            </a:r>
+          </a:p>
+          <a:p xmlns:a="http://schemas.openxmlformats.org/drawingml/2006/main">
+            <a:pPr algn="l">
+              <a:buNone/>
+              <a:defRPr sz="1725" b="0">
+                <a:solidFill>
+                  <a:srgbClr val="52616B"/>
+                </a:solidFill>
+                <a:latin typeface="Arial"/>
+                <a:ea typeface="Arial"/>
+                <a:cs typeface="Arial"/>
+              </a:defRPr>
+            </a:pPr>
+            <a:r>
+              <a:rPr sz="1725" b="0">
+                <a:solidFill>
+                  <a:srgbClr val="52616B"/>
+                </a:solidFill>
+                <a:latin typeface="Arial"/>
+                <a:ea typeface="Arial"/>
+                <a:cs typeface="Arial"/>
+              </a:rPr>
+              <a:t>Cash  0%</a:t>
+            </a:r>
+          </a:p>
+        </p:txBody>
+      </p:sp>
+      <p:sp>
+        <p:nvSpPr>
+          <p:cNvPr id="13" name="">
+            <a:extLst xmlns:a="http://schemas.openxmlformats.org/drawingml/2006/main">
+              <a:ext uri="{FF2B5EF4-FFF2-40B4-BE49-F238E27FC236}">
+                <a16:creationId xmlns:a16="http://schemas.microsoft.com/office/drawing/2014/main" id="{F166845D-8E26-4804-AAA3-D76C79B2D4FB}"/>
+              </a:ext>
+            </a:extLst>
+          </p:cNvPr>
+          <p:cNvSpPr>
+            <a:spLocks xmlns:a="http://schemas.openxmlformats.org/drawingml/2006/main" noGrp="1"/>
+          </p:cNvSpPr>
+          <p:nvPr/>
+        </p:nvSpPr>
+        <p:spPr>
+          <a:xfrm xmlns:a="http://schemas.openxmlformats.org/drawingml/2006/main">
+            <a:off x="1066800" y="5886450"/>
+            <a:ext cx="9620250" cy="323850"/>
+          </a:xfrm>
+          <a:prstGeom xmlns:a="http://schemas.openxmlformats.org/drawingml/2006/main" prst="rect">
+            <a:avLst/>
+          </a:prstGeom>
+          <a:noFill xmlns:a="http://schemas.openxmlformats.org/drawingml/2006/main"/>
+          <a:ln xmlns:a="http://schemas.openxmlformats.org/drawingml/2006/main" w="0">
+            <a:noFill/>
+            <a:prstDash val="solid"/>
+          </a:ln>
+        </p:spPr>
+        <p:txBody>
+          <a:bodyPr xmlns:a="http://schemas.openxmlformats.org/drawingml/2006/main" anchor="t"/>
+          <a:lstStyle xmlns:a="http://schemas.openxmlformats.org/drawingml/2006/main"/>
+          <a:p xmlns:a="http://schemas.openxmlformats.org/drawingml/2006/main">
+            <a:pPr algn="ctr">
+              <a:buNone/>
+              <a:defRPr sz="1800" b="1">
+                <a:solidFill>
+                  <a:srgbClr val="101820"/>
+                </a:solidFill>
+                <a:latin typeface="Arial"/>
+                <a:ea typeface="Arial"/>
+                <a:cs typeface="Arial"/>
+              </a:defRPr>
+            </a:pPr>
+            <a:r>
+              <a:rPr sz="1800" b="1">
+                <a:solidFill>
+                  <a:srgbClr val="101820"/>
+                </a:solidFill>
+                <a:latin typeface="Arial"/>
+                <a:ea typeface="Arial"/>
+                <a:cs typeface="Arial"/>
+              </a:rPr>
+              <a:t>Shared selections stack: one ETF can receive two one-sixth slots = one-third.</a:t>
+            </a:r>
+          </a:p>
+        </p:txBody>
+      </p:sp>
+      <p:sp>
+        <p:nvSpPr>
+          <p:cNvPr id="16" name="">
+            <a:extLst xmlns:a="http://schemas.openxmlformats.org/drawingml/2006/main">
+              <a:ext uri="{FF2B5EF4-FFF2-40B4-BE49-F238E27FC236}">
+                <a16:creationId xmlns:a16="http://schemas.microsoft.com/office/drawing/2014/main" id="{CBB05286-4B59-4C91-A588-5CD09F062F89}"/>
+              </a:ext>
+            </a:extLst>
+          </p:cNvPr>
+          <p:cNvSpPr>
+            <a:spLocks xmlns:a="http://schemas.openxmlformats.org/drawingml/2006/main" noGrp="1"/>
+          </p:cNvSpPr>
+          <p:nvPr/>
+        </p:nvSpPr>
+        <p:spPr>
+          <a:xfrm xmlns:a="http://schemas.openxmlformats.org/drawingml/2006/main">
+            <a:off x="11144250" y="6324600"/>
+            <a:ext cx="628650" cy="266700"/>
+          </a:xfrm>
+          <a:prstGeom xmlns:a="http://schemas.openxmlformats.org/drawingml/2006/main" prst="rect">
+            <a:avLst/>
+          </a:prstGeom>
+          <a:noFill xmlns:a="http://schemas.openxmlformats.org/drawingml/2006/main"/>
+          <a:ln xmlns:a="http://schemas.openxmlformats.org/drawingml/2006/main" w="0">
+            <a:noFill/>
+            <a:prstDash val="solid"/>
+          </a:ln>
+        </p:spPr>
+        <p:txBody>
+          <a:bodyPr xmlns:a="http://schemas.openxmlformats.org/drawingml/2006/main" anchor="t"/>
+          <a:lstStyle xmlns:a="http://schemas.openxmlformats.org/drawingml/2006/main"/>
+          <a:p xmlns:a="http://schemas.openxmlformats.org/drawingml/2006/main">
+            <a:pPr algn="r">
+              <a:buNone/>
+              <a:defRPr sz="1200" b="0">
+                <a:solidFill>
+                  <a:srgbClr val="52616B"/>
+                </a:solidFill>
+                <a:latin typeface="Arial"/>
+                <a:ea typeface="Arial"/>
+                <a:cs typeface="Arial"/>
+              </a:defRPr>
+            </a:pPr>
+            <a:r>
+              <a:rPr sz="1200" b="0">
+                <a:solidFill>
+                  <a:srgbClr val="52616B"/>
+                </a:solidFill>
+                <a:latin typeface="Arial"/>
+                <a:ea typeface="Arial"/>
+                <a:cs typeface="Arial"/>
+              </a:rPr>
+              <a:t/>
+            </a:r>
+          </a:p>
+        </p:txBody>
+      </p:sp>
+    </p:spTree>
+    <p:extLst>
+      <p:ext uri="{BB962C8B-B14F-4D97-AF65-F5344CB8AC3E}">
+        <p14:creationId xmlns:p14="http://schemas.microsoft.com/office/powerpoint/2010/main" val="1019663795"/>
+      </p:ext>
+    </p:extLst>
+  </p:cSld>
+</p:sld>
+</file>
+
+<file path=ppt/slides/slide18.xml><?xml version="1.0" encoding="utf-8"?>
+<p:sld xmlns:p="http://schemas.openxmlformats.org/presentationml/2006/main">
+  <p:cSld>
+    <p:bg>
+      <p:bgPr>
+        <a:solidFill xmlns:a="http://schemas.openxmlformats.org/drawingml/2006/main">
+          <a:srgbClr val="FFFFFF"/>
+        </a:solidFill>
+      </p:bgPr>
+    </p:bg>
+    <p:spTree>
+      <p:nvGrpSpPr>
+        <p:cNvPr id="1" name=""/>
+        <p:cNvGrpSpPr/>
+        <p:nvPr/>
+      </p:nvGrpSpPr>
+      <p:grpSpPr>
+        <a:xfrm xmlns:a="http://schemas.openxmlformats.org/drawingml/2006/main"/>
+      </p:grpSpPr>
+      <p:sp>
+        <p:nvSpPr>
+          <p:cNvPr id="16" name="">
+            <a:extLst xmlns:a="http://schemas.openxmlformats.org/drawingml/2006/main">
+              <a:ext uri="{FF2B5EF4-FFF2-40B4-BE49-F238E27FC236}">
+                <a16:creationId xmlns:a16="http://schemas.microsoft.com/office/drawing/2014/main" id="{D2DB7632-9321-4B0D-B49B-BAF52F1D5F3F}"/>
+              </a:ext>
+            </a:extLst>
+          </p:cNvPr>
+          <p:cNvSpPr>
+            <a:spLocks xmlns:a="http://schemas.openxmlformats.org/drawingml/2006/main" noGrp="1"/>
+          </p:cNvSpPr>
+          <p:nvPr/>
+        </p:nvSpPr>
+        <p:spPr>
+          <a:xfrm xmlns:a="http://schemas.openxmlformats.org/drawingml/2006/main">
+            <a:off x="400050" y="228600"/>
+            <a:ext cx="2857500" cy="228600"/>
+          </a:xfrm>
+          <a:prstGeom xmlns:a="http://schemas.openxmlformats.org/drawingml/2006/main" prst="rect">
+            <a:avLst/>
+          </a:prstGeom>
+          <a:noFill xmlns:a="http://schemas.openxmlformats.org/drawingml/2006/main"/>
+          <a:ln xmlns:a="http://schemas.openxmlformats.org/drawingml/2006/main" w="0">
+            <a:noFill/>
+            <a:prstDash val="solid"/>
+          </a:ln>
+        </p:spPr>
+        <p:txBody>
+          <a:bodyPr xmlns:a="http://schemas.openxmlformats.org/drawingml/2006/main" anchor="t"/>
+          <a:lstStyle xmlns:a="http://schemas.openxmlformats.org/drawingml/2006/main"/>
+          <a:p xmlns:a="http://schemas.openxmlformats.org/drawingml/2006/main">
+            <a:pPr algn="l">
+              <a:buNone/>
+              <a:defRPr sz="1200" b="1">
+                <a:solidFill>
+                  <a:srgbClr val="3D8DFF"/>
+                </a:solidFill>
+                <a:latin typeface="Arial"/>
+                <a:ea typeface="Arial"/>
+                <a:cs typeface="Arial"/>
+              </a:defRPr>
+            </a:pPr>
+            <a:r>
+              <a:rPr sz="1200" b="1">
+                <a:solidFill>
+                  <a:srgbClr val="3D8DFF"/>
+                </a:solidFill>
+                <a:latin typeface="Arial"/>
+                <a:ea typeface="Arial"/>
+                <a:cs typeface="Arial"/>
+              </a:rPr>
+              <a:t>LIT-MOM-03.1</a:t>
+            </a:r>
+          </a:p>
+        </p:txBody>
+      </p:sp>
+      <p:sp>
+        <p:nvSpPr>
+          <p:cNvPr id="2" name="">
+            <a:extLst xmlns:a="http://schemas.openxmlformats.org/drawingml/2006/main">
+              <a:ext uri="{FF2B5EF4-FFF2-40B4-BE49-F238E27FC236}">
+                <a16:creationId xmlns:a16="http://schemas.microsoft.com/office/drawing/2014/main" id="{4F6E0FE8-6C1B-4A13-9D2D-6E11399D4DD1}"/>
+              </a:ext>
+            </a:extLst>
+          </p:cNvPr>
+          <p:cNvSpPr>
+            <a:spLocks xmlns:a="http://schemas.openxmlformats.org/drawingml/2006/main" noGrp="1"/>
+          </p:cNvSpPr>
+          <p:nvPr/>
+        </p:nvSpPr>
+        <p:spPr>
+          <a:xfrm xmlns:a="http://schemas.openxmlformats.org/drawingml/2006/main">
+            <a:off x="400050" y="476250"/>
+            <a:ext cx="11049000" cy="819150"/>
+          </a:xfrm>
+          <a:prstGeom xmlns:a="http://schemas.openxmlformats.org/drawingml/2006/main" prst="rect">
+            <a:avLst/>
+          </a:prstGeom>
+          <a:noFill xmlns:a="http://schemas.openxmlformats.org/drawingml/2006/main"/>
+          <a:ln xmlns:a="http://schemas.openxmlformats.org/drawingml/2006/main" w="0">
+            <a:noFill/>
+            <a:prstDash val="solid"/>
+          </a:ln>
+        </p:spPr>
+        <p:txBody>
+          <a:bodyPr xmlns:a="http://schemas.openxmlformats.org/drawingml/2006/main" anchor="t"/>
+          <a:lstStyle xmlns:a="http://schemas.openxmlformats.org/drawingml/2006/main"/>
+          <a:p xmlns:a="http://schemas.openxmlformats.org/drawingml/2006/main">
+            <a:pPr algn="l">
+              <a:buNone/>
+              <a:defRPr sz="2700" b="1">
+                <a:solidFill>
+                  <a:srgbClr val="101820"/>
+                </a:solidFill>
+                <a:latin typeface="Arial"/>
+                <a:ea typeface="Arial"/>
+                <a:cs typeface="Arial"/>
+              </a:defRPr>
+            </a:pPr>
+            <a:r>
+              <a:rPr sz="2700" b="1">
+                <a:solidFill>
+                  <a:srgbClr val="101820"/>
+                </a:solidFill>
+                <a:latin typeface="Arial"/>
+                <a:ea typeface="Arial"/>
+                <a:cs typeface="Arial"/>
+              </a:rPr>
+              <a:t>Mechanics are now inspectable; value-add remains the next question</a:t>
+            </a:r>
+          </a:p>
+        </p:txBody>
+      </p:sp>
+      <p:sp>
+        <p:nvSpPr>
+          <p:cNvPr id="3" name="">
+            <a:extLst xmlns:a="http://schemas.openxmlformats.org/drawingml/2006/main">
+              <a:ext uri="{FF2B5EF4-FFF2-40B4-BE49-F238E27FC236}">
+                <a16:creationId xmlns:a16="http://schemas.microsoft.com/office/drawing/2014/main" id="{0E0B56DB-4E40-4B87-BA34-B14274318353}"/>
+              </a:ext>
+            </a:extLst>
+          </p:cNvPr>
+          <p:cNvSpPr>
+            <a:spLocks xmlns:a="http://schemas.openxmlformats.org/drawingml/2006/main" noGrp="1"/>
+          </p:cNvSpPr>
+          <p:nvPr/>
+        </p:nvSpPr>
+        <p:spPr>
+          <a:xfrm xmlns:a="http://schemas.openxmlformats.org/drawingml/2006/main">
+            <a:off x="400050" y="1428750"/>
+            <a:ext cx="11391900" cy="0"/>
+          </a:xfrm>
+          <a:prstGeom xmlns:a="http://schemas.openxmlformats.org/drawingml/2006/main" prst="line">
+            <a:avLst/>
+          </a:prstGeom>
+          <a:noFill xmlns:a="http://schemas.openxmlformats.org/drawingml/2006/main"/>
+          <a:ln xmlns:a="http://schemas.openxmlformats.org/drawingml/2006/main" w="9525">
+            <a:solidFill>
+              <a:srgbClr val="B8BCC4"/>
+            </a:solidFill>
+            <a:prstDash val="solid"/>
+          </a:ln>
+        </p:spPr>
+      </p:sp>
+      <p:sp>
+        <p:nvSpPr>
+          <p:cNvPr id="4" name="">
+            <a:extLst xmlns:a="http://schemas.openxmlformats.org/drawingml/2006/main">
+              <a:ext uri="{FF2B5EF4-FFF2-40B4-BE49-F238E27FC236}">
+                <a16:creationId xmlns:a16="http://schemas.microsoft.com/office/drawing/2014/main" id="{609465AD-88DC-48BC-BDAC-EBEFA9C8F7B5}"/>
+              </a:ext>
+            </a:extLst>
+          </p:cNvPr>
+          <p:cNvSpPr>
+            <a:spLocks xmlns:a="http://schemas.openxmlformats.org/drawingml/2006/main" noGrp="1"/>
+          </p:cNvSpPr>
+          <p:nvPr/>
+        </p:nvSpPr>
+        <p:spPr>
+          <a:xfrm xmlns:a="http://schemas.openxmlformats.org/drawingml/2006/main">
+            <a:off x="11010900" y="6324600"/>
+            <a:ext cx="762000" cy="266700"/>
+          </a:xfrm>
+          <a:prstGeom xmlns:a="http://schemas.openxmlformats.org/drawingml/2006/main" prst="rect">
+            <a:avLst/>
+          </a:prstGeom>
+          <a:noFill xmlns:a="http://schemas.openxmlformats.org/drawingml/2006/main"/>
+          <a:ln xmlns:a="http://schemas.openxmlformats.org/drawingml/2006/main" w="0">
+            <a:noFill/>
+            <a:prstDash val="solid"/>
+          </a:ln>
+        </p:spPr>
+        <p:txBody>
+          <a:bodyPr xmlns:a="http://schemas.openxmlformats.org/drawingml/2006/main" anchor="t"/>
+          <a:lstStyle xmlns:a="http://schemas.openxmlformats.org/drawingml/2006/main"/>
+          <a:p xmlns:a="http://schemas.openxmlformats.org/drawingml/2006/main">
+            <a:pPr algn="r">
+              <a:buNone/>
+              <a:defRPr sz="1200" b="0">
+                <a:solidFill>
+                  <a:srgbClr val="52616B"/>
+                </a:solidFill>
+                <a:latin typeface="Arial"/>
+                <a:ea typeface="Arial"/>
+                <a:cs typeface="Arial"/>
+              </a:defRPr>
+            </a:pPr>
+            <a:r>
+              <a:rPr sz="1200" b="0">
+                <a:solidFill>
+                  <a:srgbClr val="52616B"/>
+                </a:solidFill>
+                <a:latin typeface="Arial"/>
+                <a:ea typeface="Arial"/>
+                <a:cs typeface="Arial"/>
+              </a:rPr>
+              <a:t>18</a:t>
+            </a:r>
+          </a:p>
+        </p:txBody>
+      </p:sp>
+      <p:sp>
+        <p:nvSpPr>
+          <p:cNvPr id="5" name="">
+            <a:extLst xmlns:a="http://schemas.openxmlformats.org/drawingml/2006/main">
+              <a:ext uri="{FF2B5EF4-FFF2-40B4-BE49-F238E27FC236}">
+                <a16:creationId xmlns:a16="http://schemas.microsoft.com/office/drawing/2014/main" id="{CD393174-0A3C-4E18-A0E5-CFFEAB42B506}"/>
+              </a:ext>
+            </a:extLst>
+          </p:cNvPr>
+          <p:cNvSpPr>
+            <a:spLocks xmlns:a="http://schemas.openxmlformats.org/drawingml/2006/main" noGrp="1"/>
+          </p:cNvSpPr>
+          <p:nvPr/>
+        </p:nvSpPr>
+        <p:spPr>
+          <a:xfrm xmlns:a="http://schemas.openxmlformats.org/drawingml/2006/main">
+            <a:off x="666750" y="1752600"/>
+            <a:ext cx="10858500" cy="1028700"/>
+          </a:xfrm>
+          <a:prstGeom xmlns:a="http://schemas.openxmlformats.org/drawingml/2006/main" prst="rect">
+            <a:avLst/>
+          </a:prstGeom>
+          <a:solidFill xmlns:a="http://schemas.openxmlformats.org/drawingml/2006/main">
+            <a:srgbClr val="E6F2EC"/>
+          </a:solidFill>
+          <a:ln xmlns:a="http://schemas.openxmlformats.org/drawingml/2006/main" w="9525">
+            <a:solidFill>
+              <a:srgbClr val="2E7D5B"/>
+            </a:solidFill>
+            <a:prstDash val="solid"/>
+          </a:ln>
+        </p:spPr>
+      </p:sp>
+      <p:sp>
+        <p:nvSpPr>
+          <p:cNvPr id="6" name="">
+            <a:extLst xmlns:a="http://schemas.openxmlformats.org/drawingml/2006/main">
+              <a:ext uri="{FF2B5EF4-FFF2-40B4-BE49-F238E27FC236}">
+                <a16:creationId xmlns:a16="http://schemas.microsoft.com/office/drawing/2014/main" id="{802C9A30-9CD1-4907-B5B7-2F6BE57885E8}"/>
+              </a:ext>
+            </a:extLst>
+          </p:cNvPr>
+          <p:cNvSpPr>
+            <a:spLocks xmlns:a="http://schemas.openxmlformats.org/drawingml/2006/main" noGrp="1"/>
+          </p:cNvSpPr>
+          <p:nvPr/>
+        </p:nvSpPr>
+        <p:spPr>
+          <a:xfrm xmlns:a="http://schemas.openxmlformats.org/drawingml/2006/main">
+            <a:off x="952500" y="2000250"/>
+            <a:ext cx="2190750" cy="400050"/>
+          </a:xfrm>
+          <a:prstGeom xmlns:a="http://schemas.openxmlformats.org/drawingml/2006/main" prst="rect">
+            <a:avLst/>
+          </a:prstGeom>
+          <a:noFill xmlns:a="http://schemas.openxmlformats.org/drawingml/2006/main"/>
+          <a:ln xmlns:a="http://schemas.openxmlformats.org/drawingml/2006/main" w="0">
+            <a:noFill/>
+            <a:prstDash val="solid"/>
+          </a:ln>
+        </p:spPr>
+        <p:txBody>
+          <a:bodyPr xmlns:a="http://schemas.openxmlformats.org/drawingml/2006/main" anchor="t"/>
+          <a:lstStyle xmlns:a="http://schemas.openxmlformats.org/drawingml/2006/main"/>
+          <a:p xmlns:a="http://schemas.openxmlformats.org/drawingml/2006/main">
+            <a:pPr algn="l">
+              <a:buNone/>
+              <a:defRPr sz="2025" b="1">
+                <a:solidFill>
+                  <a:srgbClr val="2E7D5B"/>
+                </a:solidFill>
+                <a:latin typeface="Arial"/>
+                <a:ea typeface="Arial"/>
+                <a:cs typeface="Arial"/>
+              </a:defRPr>
+            </a:pPr>
+            <a:r>
+              <a:rPr sz="2025" b="1">
+                <a:solidFill>
+                  <a:srgbClr val="2E7D5B"/>
+                </a:solidFill>
+                <a:latin typeface="Arial"/>
+                <a:ea typeface="Arial"/>
+                <a:cs typeface="Arial"/>
+              </a:rPr>
+              <a:t>Established</a:t>
+            </a:r>
+          </a:p>
+        </p:txBody>
+      </p:sp>
+      <p:sp>
+        <p:nvSpPr>
+          <p:cNvPr id="7" name="">
+            <a:extLst xmlns:a="http://schemas.openxmlformats.org/drawingml/2006/main">
+              <a:ext uri="{FF2B5EF4-FFF2-40B4-BE49-F238E27FC236}">
+                <a16:creationId xmlns:a16="http://schemas.microsoft.com/office/drawing/2014/main" id="{4C0B6826-C1CD-407B-B1BD-7E0FDA1C4296}"/>
+              </a:ext>
+            </a:extLst>
+          </p:cNvPr>
+          <p:cNvSpPr>
+            <a:spLocks xmlns:a="http://schemas.openxmlformats.org/drawingml/2006/main" noGrp="1"/>
+          </p:cNvSpPr>
+          <p:nvPr/>
+        </p:nvSpPr>
+        <p:spPr>
+          <a:xfrm xmlns:a="http://schemas.openxmlformats.org/drawingml/2006/main">
+            <a:off x="3276600" y="1943100"/>
+            <a:ext cx="7772400" cy="647700"/>
+          </a:xfrm>
+          <a:prstGeom xmlns:a="http://schemas.openxmlformats.org/drawingml/2006/main" prst="rect">
+            <a:avLst/>
+          </a:prstGeom>
+          <a:noFill xmlns:a="http://schemas.openxmlformats.org/drawingml/2006/main"/>
+          <a:ln xmlns:a="http://schemas.openxmlformats.org/drawingml/2006/main" w="0">
+            <a:noFill/>
+            <a:prstDash val="solid"/>
+          </a:ln>
+        </p:spPr>
+        <p:txBody>
+          <a:bodyPr xmlns:a="http://schemas.openxmlformats.org/drawingml/2006/main" anchor="t"/>
+          <a:lstStyle xmlns:a="http://schemas.openxmlformats.org/drawingml/2006/main"/>
+          <a:p xmlns:a="http://schemas.openxmlformats.org/drawingml/2006/main">
+            <a:pPr algn="l">
+              <a:buNone/>
+              <a:defRPr sz="1725" b="0">
+                <a:solidFill>
+                  <a:srgbClr val="101820"/>
+                </a:solidFill>
+                <a:latin typeface="Arial"/>
+                <a:ea typeface="Arial"/>
+                <a:cs typeface="Arial"/>
+              </a:defRPr>
+            </a:pPr>
+            <a:r>
+              <a:rPr sz="1725" b="0">
+                <a:solidFill>
+                  <a:srgbClr val="101820"/>
+                </a:solidFill>
+                <a:latin typeface="Arial"/>
+                <a:ea typeface="Arial"/>
+                <a:cs typeface="Arial"/>
+              </a:rPr>
+              <a:t>Exact ranks, vetoes, one-sixth slots, duplicate-sleeve stacking, holiday fallback, and next-open designation.</a:t>
+            </a:r>
+          </a:p>
+        </p:txBody>
+      </p:sp>
+      <p:sp>
+        <p:nvSpPr>
+          <p:cNvPr id="8" name="">
+            <a:extLst xmlns:a="http://schemas.openxmlformats.org/drawingml/2006/main">
+              <a:ext uri="{FF2B5EF4-FFF2-40B4-BE49-F238E27FC236}">
+                <a16:creationId xmlns:a16="http://schemas.microsoft.com/office/drawing/2014/main" id="{3AFAF26A-2C8D-481A-8C17-B8A9A3967177}"/>
+              </a:ext>
+            </a:extLst>
+          </p:cNvPr>
+          <p:cNvSpPr>
+            <a:spLocks xmlns:a="http://schemas.openxmlformats.org/drawingml/2006/main" noGrp="1"/>
+          </p:cNvSpPr>
+          <p:nvPr/>
+        </p:nvSpPr>
+        <p:spPr>
+          <a:xfrm xmlns:a="http://schemas.openxmlformats.org/drawingml/2006/main">
+            <a:off x="666750" y="3048000"/>
+            <a:ext cx="10858500" cy="1028700"/>
+          </a:xfrm>
+          <a:prstGeom xmlns:a="http://schemas.openxmlformats.org/drawingml/2006/main" prst="rect">
+            <a:avLst/>
+          </a:prstGeom>
+          <a:solidFill xmlns:a="http://schemas.openxmlformats.org/drawingml/2006/main">
+            <a:srgbClr val="F7E7E2"/>
+          </a:solidFill>
+          <a:ln xmlns:a="http://schemas.openxmlformats.org/drawingml/2006/main" w="9525">
+            <a:solidFill>
+              <a:srgbClr val="C8553D"/>
+            </a:solidFill>
+            <a:prstDash val="solid"/>
+          </a:ln>
+        </p:spPr>
+      </p:sp>
+      <p:sp>
+        <p:nvSpPr>
+          <p:cNvPr id="9" name="">
+            <a:extLst xmlns:a="http://schemas.openxmlformats.org/drawingml/2006/main">
+              <a:ext uri="{FF2B5EF4-FFF2-40B4-BE49-F238E27FC236}">
+                <a16:creationId xmlns:a16="http://schemas.microsoft.com/office/drawing/2014/main" id="{DDE8FBE1-8020-4B7A-932E-FC73716C919B}"/>
+              </a:ext>
+            </a:extLst>
+          </p:cNvPr>
+          <p:cNvSpPr>
+            <a:spLocks xmlns:a="http://schemas.openxmlformats.org/drawingml/2006/main" noGrp="1"/>
+          </p:cNvSpPr>
+          <p:nvPr/>
+        </p:nvSpPr>
+        <p:spPr>
+          <a:xfrm xmlns:a="http://schemas.openxmlformats.org/drawingml/2006/main">
+            <a:off x="952500" y="3295650"/>
+            <a:ext cx="2190750" cy="400050"/>
+          </a:xfrm>
+          <a:prstGeom xmlns:a="http://schemas.openxmlformats.org/drawingml/2006/main" prst="rect">
+            <a:avLst/>
+          </a:prstGeom>
+          <a:noFill xmlns:a="http://schemas.openxmlformats.org/drawingml/2006/main"/>
+          <a:ln xmlns:a="http://schemas.openxmlformats.org/drawingml/2006/main" w="0">
+            <a:noFill/>
+            <a:prstDash val="solid"/>
+          </a:ln>
+        </p:spPr>
+        <p:txBody>
+          <a:bodyPr xmlns:a="http://schemas.openxmlformats.org/drawingml/2006/main" anchor="t"/>
+          <a:lstStyle xmlns:a="http://schemas.openxmlformats.org/drawingml/2006/main"/>
+          <a:p xmlns:a="http://schemas.openxmlformats.org/drawingml/2006/main">
+            <a:pPr algn="l">
+              <a:buNone/>
+              <a:defRPr sz="2025" b="1">
+                <a:solidFill>
+                  <a:srgbClr val="C8553D"/>
+                </a:solidFill>
+                <a:latin typeface="Arial"/>
+                <a:ea typeface="Arial"/>
+                <a:cs typeface="Arial"/>
+              </a:defRPr>
+            </a:pPr>
+            <a:r>
+              <a:rPr sz="2025" b="1">
+                <a:solidFill>
+                  <a:srgbClr val="C8553D"/>
+                </a:solidFill>
+                <a:latin typeface="Arial"/>
+                <a:ea typeface="Arial"/>
+                <a:cs typeface="Arial"/>
+              </a:rPr>
+              <a:t>Not established</a:t>
+            </a:r>
+          </a:p>
+        </p:txBody>
+      </p:sp>
+      <p:sp>
+        <p:nvSpPr>
+          <p:cNvPr id="10" name="">
+            <a:extLst xmlns:a="http://schemas.openxmlformats.org/drawingml/2006/main">
+              <a:ext uri="{FF2B5EF4-FFF2-40B4-BE49-F238E27FC236}">
+                <a16:creationId xmlns:a16="http://schemas.microsoft.com/office/drawing/2014/main" id="{E6DA919C-47F4-4345-87E2-1F6DF9D0EC90}"/>
+              </a:ext>
+            </a:extLst>
+          </p:cNvPr>
+          <p:cNvSpPr>
+            <a:spLocks xmlns:a="http://schemas.openxmlformats.org/drawingml/2006/main" noGrp="1"/>
+          </p:cNvSpPr>
+          <p:nvPr/>
+        </p:nvSpPr>
+        <p:spPr>
+          <a:xfrm xmlns:a="http://schemas.openxmlformats.org/drawingml/2006/main">
+            <a:off x="3276600" y="3238500"/>
+            <a:ext cx="7772400" cy="647700"/>
+          </a:xfrm>
+          <a:prstGeom xmlns:a="http://schemas.openxmlformats.org/drawingml/2006/main" prst="rect">
+            <a:avLst/>
+          </a:prstGeom>
+          <a:noFill xmlns:a="http://schemas.openxmlformats.org/drawingml/2006/main"/>
+          <a:ln xmlns:a="http://schemas.openxmlformats.org/drawingml/2006/main" w="0">
+            <a:noFill/>
+            <a:prstDash val="solid"/>
+          </a:ln>
+        </p:spPr>
+        <p:txBody>
+          <a:bodyPr xmlns:a="http://schemas.openxmlformats.org/drawingml/2006/main" anchor="t"/>
+          <a:lstStyle xmlns:a="http://schemas.openxmlformats.org/drawingml/2006/main"/>
+          <a:p xmlns:a="http://schemas.openxmlformats.org/drawingml/2006/main">
+            <a:pPr algn="l">
+              <a:buNone/>
+              <a:defRPr sz="1725" b="0">
+                <a:solidFill>
+                  <a:srgbClr val="101820"/>
+                </a:solidFill>
+                <a:latin typeface="Arial"/>
+                <a:ea typeface="Arial"/>
+                <a:cs typeface="Arial"/>
+              </a:defRPr>
+            </a:pPr>
+            <a:r>
+              <a:rPr sz="1725" b="0">
+                <a:solidFill>
+                  <a:srgbClr val="101820"/>
+                </a:solidFill>
+                <a:latin typeface="Arial"/>
+                <a:ea typeface="Arial"/>
+                <a:cs typeface="Arial"/>
+              </a:rPr>
+              <a:t>No returns, costs, turnover drag, drawdown, baseline comparison, parameter robustness, or edge claim.</a:t>
+            </a:r>
+          </a:p>
+        </p:txBody>
+      </p:sp>
+      <p:sp>
+        <p:nvSpPr>
+          <p:cNvPr id="11" name="">
+            <a:extLst xmlns:a="http://schemas.openxmlformats.org/drawingml/2006/main">
+              <a:ext uri="{FF2B5EF4-FFF2-40B4-BE49-F238E27FC236}">
+                <a16:creationId xmlns:a16="http://schemas.microsoft.com/office/drawing/2014/main" id="{0879E259-AD91-4B41-8E67-E5334F74BAB8}"/>
+              </a:ext>
+            </a:extLst>
+          </p:cNvPr>
+          <p:cNvSpPr>
+            <a:spLocks xmlns:a="http://schemas.openxmlformats.org/drawingml/2006/main" noGrp="1"/>
+          </p:cNvSpPr>
+          <p:nvPr/>
+        </p:nvSpPr>
+        <p:spPr>
+          <a:xfrm xmlns:a="http://schemas.openxmlformats.org/drawingml/2006/main">
+            <a:off x="666750" y="4343400"/>
+            <a:ext cx="10858500" cy="1028700"/>
+          </a:xfrm>
+          <a:prstGeom xmlns:a="http://schemas.openxmlformats.org/drawingml/2006/main" prst="rect">
+            <a:avLst/>
+          </a:prstGeom>
+          <a:solidFill xmlns:a="http://schemas.openxmlformats.org/drawingml/2006/main">
+            <a:srgbClr val="EDEDED"/>
+          </a:solidFill>
+          <a:ln xmlns:a="http://schemas.openxmlformats.org/drawingml/2006/main" w="9525">
+            <a:solidFill>
+              <a:srgbClr val="52616B"/>
+            </a:solidFill>
+            <a:prstDash val="solid"/>
+          </a:ln>
+        </p:spPr>
+      </p:sp>
+      <p:sp>
+        <p:nvSpPr>
+          <p:cNvPr id="12" name="">
+            <a:extLst xmlns:a="http://schemas.openxmlformats.org/drawingml/2006/main">
+              <a:ext uri="{FF2B5EF4-FFF2-40B4-BE49-F238E27FC236}">
+                <a16:creationId xmlns:a16="http://schemas.microsoft.com/office/drawing/2014/main" id="{FE0E70E3-6874-4441-9FD1-1060221212D9}"/>
+              </a:ext>
+            </a:extLst>
+          </p:cNvPr>
+          <p:cNvSpPr>
+            <a:spLocks xmlns:a="http://schemas.openxmlformats.org/drawingml/2006/main" noGrp="1"/>
+          </p:cNvSpPr>
+          <p:nvPr/>
+        </p:nvSpPr>
+        <p:spPr>
+          <a:xfrm xmlns:a="http://schemas.openxmlformats.org/drawingml/2006/main">
+            <a:off x="952500" y="4591050"/>
+            <a:ext cx="2190750" cy="400050"/>
+          </a:xfrm>
+          <a:prstGeom xmlns:a="http://schemas.openxmlformats.org/drawingml/2006/main" prst="rect">
+            <a:avLst/>
+          </a:prstGeom>
+          <a:noFill xmlns:a="http://schemas.openxmlformats.org/drawingml/2006/main"/>
+          <a:ln xmlns:a="http://schemas.openxmlformats.org/drawingml/2006/main" w="0">
+            <a:noFill/>
+            <a:prstDash val="solid"/>
+          </a:ln>
+        </p:spPr>
+        <p:txBody>
+          <a:bodyPr xmlns:a="http://schemas.openxmlformats.org/drawingml/2006/main" anchor="t"/>
+          <a:lstStyle xmlns:a="http://schemas.openxmlformats.org/drawingml/2006/main"/>
+          <a:p xmlns:a="http://schemas.openxmlformats.org/drawingml/2006/main">
+            <a:pPr algn="l">
+              <a:buNone/>
+              <a:defRPr sz="2025" b="1">
+                <a:solidFill>
+                  <a:srgbClr val="52616B"/>
+                </a:solidFill>
+                <a:latin typeface="Arial"/>
+                <a:ea typeface="Arial"/>
+                <a:cs typeface="Arial"/>
+              </a:defRPr>
+            </a:pPr>
+            <a:r>
+              <a:rPr sz="2025" b="1">
+                <a:solidFill>
+                  <a:srgbClr val="52616B"/>
+                </a:solidFill>
+                <a:latin typeface="Arial"/>
+                <a:ea typeface="Arial"/>
+                <a:cs typeface="Arial"/>
+              </a:rPr>
+              <a:t>Coverage STOP</a:t>
+            </a:r>
+          </a:p>
+        </p:txBody>
+      </p:sp>
+      <p:sp>
+        <p:nvSpPr>
+          <p:cNvPr id="13" name="">
+            <a:extLst xmlns:a="http://schemas.openxmlformats.org/drawingml/2006/main">
+              <a:ext uri="{FF2B5EF4-FFF2-40B4-BE49-F238E27FC236}">
+                <a16:creationId xmlns:a16="http://schemas.microsoft.com/office/drawing/2014/main" id="{7D88D2F7-BBA9-4B06-83BF-EF6C40360B55}"/>
+              </a:ext>
+            </a:extLst>
+          </p:cNvPr>
+          <p:cNvSpPr>
+            <a:spLocks xmlns:a="http://schemas.openxmlformats.org/drawingml/2006/main" noGrp="1"/>
+          </p:cNvSpPr>
+          <p:nvPr/>
+        </p:nvSpPr>
+        <p:spPr>
+          <a:xfrm xmlns:a="http://schemas.openxmlformats.org/drawingml/2006/main">
+            <a:off x="3276600" y="4533900"/>
+            <a:ext cx="7772400" cy="647700"/>
+          </a:xfrm>
+          <a:prstGeom xmlns:a="http://schemas.openxmlformats.org/drawingml/2006/main" prst="rect">
+            <a:avLst/>
+          </a:prstGeom>
+          <a:noFill xmlns:a="http://schemas.openxmlformats.org/drawingml/2006/main"/>
+          <a:ln xmlns:a="http://schemas.openxmlformats.org/drawingml/2006/main" w="0">
+            <a:noFill/>
+            <a:prstDash val="solid"/>
+          </a:ln>
+        </p:spPr>
+        <p:txBody>
+          <a:bodyPr xmlns:a="http://schemas.openxmlformats.org/drawingml/2006/main" anchor="t"/>
+          <a:lstStyle xmlns:a="http://schemas.openxmlformats.org/drawingml/2006/main"/>
+          <a:p xmlns:a="http://schemas.openxmlformats.org/drawingml/2006/main">
+            <a:pPr algn="l">
+              <a:buNone/>
+              <a:defRPr sz="1725" b="0">
+                <a:solidFill>
+                  <a:srgbClr val="101820"/>
+                </a:solidFill>
+                <a:latin typeface="Arial"/>
+                <a:ea typeface="Arial"/>
+                <a:cs typeface="Arial"/>
+              </a:defRPr>
+            </a:pPr>
+            <a:r>
+              <a:rPr sz="1725" b="0">
+                <a:solidFill>
+                  <a:srgbClr val="101820"/>
+                </a:solidFill>
+                <a:latin typeface="Arial"/>
+                <a:ea typeface="Arial"/>
+                <a:cs typeface="Arial"/>
+              </a:rPr>
+              <a:t>The publisher's 2008–2015 segment is unavailable under the current Alpaca account and provider contract.</a:t>
+            </a:r>
+          </a:p>
+        </p:txBody>
+      </p:sp>
+      <p:sp>
+        <p:nvSpPr>
+          <p:cNvPr id="14" name="">
+            <a:extLst xmlns:a="http://schemas.openxmlformats.org/drawingml/2006/main">
+              <a:ext uri="{FF2B5EF4-FFF2-40B4-BE49-F238E27FC236}">
+                <a16:creationId xmlns:a16="http://schemas.microsoft.com/office/drawing/2014/main" id="{F7E3D076-54D1-4B3D-8F4A-D11630B25FFC}"/>
+              </a:ext>
+            </a:extLst>
+          </p:cNvPr>
+          <p:cNvSpPr>
+            <a:spLocks xmlns:a="http://schemas.openxmlformats.org/drawingml/2006/main" noGrp="1"/>
+          </p:cNvSpPr>
+          <p:nvPr/>
+        </p:nvSpPr>
+        <p:spPr>
+          <a:xfrm xmlns:a="http://schemas.openxmlformats.org/drawingml/2006/main">
+            <a:off x="2114550" y="5753100"/>
+            <a:ext cx="7962900" cy="495300"/>
+          </a:xfrm>
+          <a:prstGeom xmlns:a="http://schemas.openxmlformats.org/drawingml/2006/main" prst="rect">
+            <a:avLst/>
+          </a:prstGeom>
+          <a:solidFill xmlns:a="http://schemas.openxmlformats.org/drawingml/2006/main">
+            <a:srgbClr val="EAF5FB"/>
+          </a:solidFill>
+          <a:ln xmlns:a="http://schemas.openxmlformats.org/drawingml/2006/main" w="9525">
+            <a:solidFill>
+              <a:srgbClr val="6DCBF4"/>
+            </a:solidFill>
+            <a:prstDash val="solid"/>
+          </a:ln>
+        </p:spPr>
+      </p:sp>
+      <p:sp>
+        <p:nvSpPr>
+          <p:cNvPr id="15" name="">
+            <a:extLst xmlns:a="http://schemas.openxmlformats.org/drawingml/2006/main">
+              <a:ext uri="{FF2B5EF4-FFF2-40B4-BE49-F238E27FC236}">
+                <a16:creationId xmlns:a16="http://schemas.microsoft.com/office/drawing/2014/main" id="{FF7807EE-5E9A-4AC4-A3F2-FA1CED7A80A8}"/>
+              </a:ext>
+            </a:extLst>
+          </p:cNvPr>
+          <p:cNvSpPr>
+            <a:spLocks xmlns:a="http://schemas.openxmlformats.org/drawingml/2006/main" noGrp="1"/>
+          </p:cNvSpPr>
+          <p:nvPr/>
+        </p:nvSpPr>
+        <p:spPr>
+          <a:xfrm xmlns:a="http://schemas.openxmlformats.org/drawingml/2006/main">
+            <a:off x="2343150" y="5753100"/>
+            <a:ext cx="7505700" cy="457200"/>
+          </a:xfrm>
+          <a:prstGeom xmlns:a="http://schemas.openxmlformats.org/drawingml/2006/main" prst="rect">
+            <a:avLst/>
+          </a:prstGeom>
+          <a:noFill xmlns:a="http://schemas.openxmlformats.org/drawingml/2006/main"/>
+          <a:ln xmlns:a="http://schemas.openxmlformats.org/drawingml/2006/main" w="0">
+            <a:noFill/>
+            <a:prstDash val="solid"/>
+          </a:ln>
+        </p:spPr>
+        <p:txBody>
+          <a:bodyPr xmlns:a="http://schemas.openxmlformats.org/drawingml/2006/main" anchor="t"/>
+          <a:lstStyle xmlns:a="http://schemas.openxmlformats.org/drawingml/2006/main"/>
+          <a:p xmlns:a="http://schemas.openxmlformats.org/drawingml/2006/main">
+            <a:pPr algn="ctr">
+              <a:buNone/>
+              <a:defRPr sz="1350" b="1">
+                <a:solidFill>
+                  <a:srgbClr val="3D8DFF"/>
+                </a:solidFill>
+                <a:latin typeface="Arial"/>
+                <a:ea typeface="Arial"/>
+                <a:cs typeface="Arial"/>
+              </a:defRPr>
+            </a:pPr>
+            <a:r>
+              <a:rPr sz="1350" b="1">
+                <a:solidFill>
+                  <a:srgbClr val="3D8DFF"/>
+                </a:solidFill>
+                <a:latin typeface="Arial"/>
+                <a:ea typeface="Arial"/>
+                <a:cs typeface="Arial"/>
+              </a:rPr>
+              <a:t>Next proposed gate: causal 2016–2026 replay against cash, equal-weight, relative-only, absolute-only, and attainable long-only ownership.</a:t>
+            </a:r>
+          </a:p>
+        </p:txBody>
+      </p:sp>
+    </p:spTree>
+    <p:extLst>
+      <p:ext uri="{BB962C8B-B14F-4D97-AF65-F5344CB8AC3E}">
+        <p14:creationId xmlns:p14="http://schemas.microsoft.com/office/powerpoint/2010/main" val="733918031"/>
       </p:ext>
     </p:extLst>
   </p:cSld>
@@ -8166,6 +11672,7 @@
           <a:lstStyle xmlns:a="http://schemas.openxmlformats.org/drawingml/2006/main"/>
           <a:p xmlns:a="http://schemas.openxmlformats.org/drawingml/2006/main">
             <a:pPr algn="l">
+              <a:buNone/>
               <a:defRPr sz="1200" b="1">
                 <a:solidFill>
                   <a:srgbClr val="3D8DFF"/>
@@ -8222,6 +11729,7 @@
           <a:lstStyle xmlns:a="http://schemas.openxmlformats.org/drawingml/2006/main"/>
           <a:p xmlns:a="http://schemas.openxmlformats.org/drawingml/2006/main">
             <a:pPr algn="l">
+              <a:buNone/>
               <a:defRPr sz="2700" b="1">
                 <a:solidFill>
                   <a:srgbClr val="101820"/>
@@ -8309,6 +11817,7 @@
           <a:lstStyle xmlns:a="http://schemas.openxmlformats.org/drawingml/2006/main"/>
           <a:p xmlns:a="http://schemas.openxmlformats.org/drawingml/2006/main">
             <a:pPr algn="r">
+              <a:buNone/>
               <a:defRPr sz="1200" b="0">
                 <a:solidFill>
                   <a:srgbClr val="52616B"/>
@@ -8365,6 +11874,7 @@
           <a:lstStyle xmlns:a="http://schemas.openxmlformats.org/drawingml/2006/main"/>
           <a:p xmlns:a="http://schemas.openxmlformats.org/drawingml/2006/main">
             <a:pPr algn="l">
+              <a:buNone/>
               <a:defRPr sz="1275" b="1">
                 <a:solidFill>
                   <a:srgbClr val="2E7D5B"/>
@@ -8421,6 +11931,7 @@
           <a:lstStyle xmlns:a="http://schemas.openxmlformats.org/drawingml/2006/main"/>
           <a:p xmlns:a="http://schemas.openxmlformats.org/drawingml/2006/main">
             <a:pPr algn="l">
+              <a:buNone/>
               <a:defRPr sz="2250" b="1">
                 <a:solidFill>
                   <a:srgbClr val="101820"/>
@@ -8510,6 +12021,7 @@
           <a:lstStyle xmlns:a="http://schemas.openxmlformats.org/drawingml/2006/main"/>
           <a:p xmlns:a="http://schemas.openxmlformats.org/drawingml/2006/main">
             <a:pPr algn="ctr">
+              <a:buNone/>
               <a:defRPr sz="2025" b="1">
                 <a:solidFill>
                   <a:srgbClr val="2E7D5B"/>
@@ -8566,6 +12078,7 @@
           <a:lstStyle xmlns:a="http://schemas.openxmlformats.org/drawingml/2006/main"/>
           <a:p xmlns:a="http://schemas.openxmlformats.org/drawingml/2006/main">
             <a:pPr algn="l">
+              <a:buNone/>
               <a:defRPr sz="1275" b="1">
                 <a:solidFill>
                   <a:srgbClr val="C8553D"/>
@@ -8622,6 +12135,7 @@
           <a:lstStyle xmlns:a="http://schemas.openxmlformats.org/drawingml/2006/main"/>
           <a:p xmlns:a="http://schemas.openxmlformats.org/drawingml/2006/main">
             <a:pPr algn="l">
+              <a:buNone/>
               <a:defRPr sz="2250" b="1">
                 <a:solidFill>
                   <a:srgbClr val="101820"/>
@@ -8711,6 +12225,7 @@
           <a:lstStyle xmlns:a="http://schemas.openxmlformats.org/drawingml/2006/main"/>
           <a:p xmlns:a="http://schemas.openxmlformats.org/drawingml/2006/main">
             <a:pPr algn="ctr">
+              <a:buNone/>
               <a:defRPr sz="2025" b="1">
                 <a:solidFill>
                   <a:srgbClr val="C8553D"/>
@@ -8767,6 +12282,7 @@
           <a:lstStyle xmlns:a="http://schemas.openxmlformats.org/drawingml/2006/main"/>
           <a:p xmlns:a="http://schemas.openxmlformats.org/drawingml/2006/main">
             <a:pPr algn="ctr">
+              <a:buNone/>
               <a:defRPr sz="2025" b="1">
                 <a:solidFill>
                   <a:srgbClr val="101820"/>
@@ -8852,6 +12368,7 @@
           <a:lstStyle xmlns:a="http://schemas.openxmlformats.org/drawingml/2006/main"/>
           <a:p xmlns:a="http://schemas.openxmlformats.org/drawingml/2006/main">
             <a:pPr algn="l">
+              <a:buNone/>
               <a:defRPr sz="1200" b="1">
                 <a:solidFill>
                   <a:srgbClr val="3D8DFF"/>
@@ -8908,6 +12425,7 @@
           <a:lstStyle xmlns:a="http://schemas.openxmlformats.org/drawingml/2006/main"/>
           <a:p xmlns:a="http://schemas.openxmlformats.org/drawingml/2006/main">
             <a:pPr algn="l">
+              <a:buNone/>
               <a:defRPr sz="2700" b="1">
                 <a:solidFill>
                   <a:srgbClr val="101820"/>
@@ -8995,6 +12513,7 @@
           <a:lstStyle xmlns:a="http://schemas.openxmlformats.org/drawingml/2006/main"/>
           <a:p xmlns:a="http://schemas.openxmlformats.org/drawingml/2006/main">
             <a:pPr algn="r">
+              <a:buNone/>
               <a:defRPr sz="1200" b="0">
                 <a:solidFill>
                   <a:srgbClr val="52616B"/>
@@ -9051,6 +12570,7 @@
           <a:lstStyle xmlns:a="http://schemas.openxmlformats.org/drawingml/2006/main"/>
           <a:p xmlns:a="http://schemas.openxmlformats.org/drawingml/2006/main">
             <a:pPr algn="l">
+              <a:buNone/>
               <a:defRPr sz="1275" b="1">
                 <a:solidFill>
                   <a:srgbClr val="C8553D"/>
@@ -9140,6 +12660,7 @@
           <a:lstStyle xmlns:a="http://schemas.openxmlformats.org/drawingml/2006/main"/>
           <a:p xmlns:a="http://schemas.openxmlformats.org/drawingml/2006/main">
             <a:pPr algn="ctr">
+              <a:buNone/>
               <a:defRPr sz="2550" b="1">
                 <a:solidFill>
                   <a:srgbClr val="101820"/>
@@ -9163,6 +12684,7 @@
           </a:p>
           <a:p xmlns:a="http://schemas.openxmlformats.org/drawingml/2006/main">
             <a:pPr algn="ctr">
+              <a:buNone/>
               <a:defRPr sz="2550" b="1">
                 <a:solidFill>
                   <a:srgbClr val="101820"/>
@@ -9219,6 +12741,7 @@
           <a:lstStyle xmlns:a="http://schemas.openxmlformats.org/drawingml/2006/main"/>
           <a:p xmlns:a="http://schemas.openxmlformats.org/drawingml/2006/main">
             <a:pPr algn="ctr">
+              <a:buNone/>
               <a:defRPr sz="1650" b="0">
                 <a:solidFill>
                   <a:srgbClr val="C8553D"/>
@@ -9399,6 +12922,7 @@
           <a:lstStyle xmlns:a="http://schemas.openxmlformats.org/drawingml/2006/main"/>
           <a:p xmlns:a="http://schemas.openxmlformats.org/drawingml/2006/main">
             <a:pPr algn="l">
+              <a:buNone/>
               <a:defRPr sz="1275" b="1">
                 <a:solidFill>
                   <a:srgbClr val="3D8DFF"/>
@@ -10448,6 +13972,7 @@
           <a:lstStyle xmlns:a="http://schemas.openxmlformats.org/drawingml/2006/main"/>
           <a:p xmlns:a="http://schemas.openxmlformats.org/drawingml/2006/main">
             <a:pPr algn="ctr">
+              <a:buNone/>
               <a:defRPr sz="1725" b="1">
                 <a:solidFill>
                   <a:srgbClr val="101820"/>
@@ -10504,6 +14029,7 @@
           <a:lstStyle xmlns:a="http://schemas.openxmlformats.org/drawingml/2006/main"/>
           <a:p xmlns:a="http://schemas.openxmlformats.org/drawingml/2006/main">
             <a:pPr algn="ctr">
+              <a:buNone/>
               <a:defRPr sz="2100" b="1">
                 <a:solidFill>
                   <a:srgbClr val="101820"/>
@@ -10589,6 +14115,7 @@
           <a:lstStyle xmlns:a="http://schemas.openxmlformats.org/drawingml/2006/main"/>
           <a:p xmlns:a="http://schemas.openxmlformats.org/drawingml/2006/main">
             <a:pPr algn="l">
+              <a:buNone/>
               <a:defRPr sz="1200" b="1">
                 <a:solidFill>
                   <a:srgbClr val="3D8DFF"/>
@@ -10645,6 +14172,7 @@
           <a:lstStyle xmlns:a="http://schemas.openxmlformats.org/drawingml/2006/main"/>
           <a:p xmlns:a="http://schemas.openxmlformats.org/drawingml/2006/main">
             <a:pPr algn="l">
+              <a:buNone/>
               <a:defRPr sz="2700" b="1">
                 <a:solidFill>
                   <a:srgbClr val="101820"/>
@@ -10732,6 +14260,7 @@
           <a:lstStyle xmlns:a="http://schemas.openxmlformats.org/drawingml/2006/main"/>
           <a:p xmlns:a="http://schemas.openxmlformats.org/drawingml/2006/main">
             <a:pPr algn="r">
+              <a:buNone/>
               <a:defRPr sz="1200" b="0">
                 <a:solidFill>
                   <a:srgbClr val="52616B"/>
@@ -10821,6 +14350,7 @@
           <a:lstStyle xmlns:a="http://schemas.openxmlformats.org/drawingml/2006/main"/>
           <a:p xmlns:a="http://schemas.openxmlformats.org/drawingml/2006/main">
             <a:pPr algn="l">
+              <a:buNone/>
               <a:defRPr sz="1350" b="1">
                 <a:solidFill>
                   <a:srgbClr val="3D8DFF"/>
@@ -10877,6 +14407,7 @@
           <a:lstStyle xmlns:a="http://schemas.openxmlformats.org/drawingml/2006/main"/>
           <a:p xmlns:a="http://schemas.openxmlformats.org/drawingml/2006/main">
             <a:pPr algn="l">
+              <a:buNone/>
               <a:defRPr sz="1725" b="1">
                 <a:solidFill>
                   <a:srgbClr val="101820"/>
@@ -10933,6 +14464,7 @@
           <a:lstStyle xmlns:a="http://schemas.openxmlformats.org/drawingml/2006/main"/>
           <a:p xmlns:a="http://schemas.openxmlformats.org/drawingml/2006/main">
             <a:pPr algn="l">
+              <a:buNone/>
               <a:defRPr sz="1575" b="0">
                 <a:solidFill>
                   <a:srgbClr val="52616B"/>
@@ -11022,6 +14554,7 @@
           <a:lstStyle xmlns:a="http://schemas.openxmlformats.org/drawingml/2006/main"/>
           <a:p xmlns:a="http://schemas.openxmlformats.org/drawingml/2006/main">
             <a:pPr algn="l">
+              <a:buNone/>
               <a:defRPr sz="1350" b="1">
                 <a:solidFill>
                   <a:srgbClr val="3D8DFF"/>
@@ -11078,6 +14611,7 @@
           <a:lstStyle xmlns:a="http://schemas.openxmlformats.org/drawingml/2006/main"/>
           <a:p xmlns:a="http://schemas.openxmlformats.org/drawingml/2006/main">
             <a:pPr algn="l">
+              <a:buNone/>
               <a:defRPr sz="1725" b="1">
                 <a:solidFill>
                   <a:srgbClr val="101820"/>
@@ -11134,6 +14668,7 @@
           <a:lstStyle xmlns:a="http://schemas.openxmlformats.org/drawingml/2006/main"/>
           <a:p xmlns:a="http://schemas.openxmlformats.org/drawingml/2006/main">
             <a:pPr algn="l">
+              <a:buNone/>
               <a:defRPr sz="1575" b="0">
                 <a:solidFill>
                   <a:srgbClr val="52616B"/>
@@ -11223,6 +14758,7 @@
           <a:lstStyle xmlns:a="http://schemas.openxmlformats.org/drawingml/2006/main"/>
           <a:p xmlns:a="http://schemas.openxmlformats.org/drawingml/2006/main">
             <a:pPr algn="l">
+              <a:buNone/>
               <a:defRPr sz="1350" b="1">
                 <a:solidFill>
                   <a:srgbClr val="C8553D"/>
@@ -11279,6 +14815,7 @@
           <a:lstStyle xmlns:a="http://schemas.openxmlformats.org/drawingml/2006/main"/>
           <a:p xmlns:a="http://schemas.openxmlformats.org/drawingml/2006/main">
             <a:pPr algn="l">
+              <a:buNone/>
               <a:defRPr sz="1725" b="1">
                 <a:solidFill>
                   <a:srgbClr val="101820"/>
@@ -11335,6 +14872,7 @@
           <a:lstStyle xmlns:a="http://schemas.openxmlformats.org/drawingml/2006/main"/>
           <a:p xmlns:a="http://schemas.openxmlformats.org/drawingml/2006/main">
             <a:pPr algn="l">
+              <a:buNone/>
               <a:defRPr sz="1575" b="0">
                 <a:solidFill>
                   <a:srgbClr val="52616B"/>
@@ -11420,6 +14958,7 @@
           <a:lstStyle xmlns:a="http://schemas.openxmlformats.org/drawingml/2006/main"/>
           <a:p xmlns:a="http://schemas.openxmlformats.org/drawingml/2006/main">
             <a:pPr algn="l">
+              <a:buNone/>
               <a:defRPr sz="1200" b="1">
                 <a:solidFill>
                   <a:srgbClr val="3D8DFF"/>
@@ -11476,6 +15015,7 @@
           <a:lstStyle xmlns:a="http://schemas.openxmlformats.org/drawingml/2006/main"/>
           <a:p xmlns:a="http://schemas.openxmlformats.org/drawingml/2006/main">
             <a:pPr algn="l">
+              <a:buNone/>
               <a:defRPr sz="2700" b="1">
                 <a:solidFill>
                   <a:srgbClr val="101820"/>
@@ -11563,6 +15103,7 @@
           <a:lstStyle xmlns:a="http://schemas.openxmlformats.org/drawingml/2006/main"/>
           <a:p xmlns:a="http://schemas.openxmlformats.org/drawingml/2006/main">
             <a:pPr algn="r">
+              <a:buNone/>
               <a:defRPr sz="1200" b="0">
                 <a:solidFill>
                   <a:srgbClr val="52616B"/>
@@ -11652,6 +15193,7 @@
           <a:lstStyle xmlns:a="http://schemas.openxmlformats.org/drawingml/2006/main"/>
           <a:p xmlns:a="http://schemas.openxmlformats.org/drawingml/2006/main">
             <a:pPr algn="l">
+              <a:buNone/>
               <a:defRPr sz="1650" b="1">
                 <a:solidFill>
                   <a:srgbClr val="3D8DFF"/>
@@ -11708,6 +15250,7 @@
           <a:lstStyle xmlns:a="http://schemas.openxmlformats.org/drawingml/2006/main"/>
           <a:p xmlns:a="http://schemas.openxmlformats.org/drawingml/2006/main">
             <a:pPr algn="l">
+              <a:buNone/>
               <a:defRPr sz="2100" b="1">
                 <a:solidFill>
                   <a:srgbClr val="101820"/>
@@ -11764,6 +15307,7 @@
           <a:lstStyle xmlns:a="http://schemas.openxmlformats.org/drawingml/2006/main"/>
           <a:p xmlns:a="http://schemas.openxmlformats.org/drawingml/2006/main">
             <a:pPr algn="l">
+              <a:buNone/>
               <a:defRPr sz="1575" b="0">
                 <a:solidFill>
                   <a:srgbClr val="52616B"/>
@@ -11853,6 +15397,7 @@
           <a:lstStyle xmlns:a="http://schemas.openxmlformats.org/drawingml/2006/main"/>
           <a:p xmlns:a="http://schemas.openxmlformats.org/drawingml/2006/main">
             <a:pPr algn="l">
+              <a:buNone/>
               <a:defRPr sz="1650" b="1">
                 <a:solidFill>
                   <a:srgbClr val="3D8DFF"/>
@@ -11909,6 +15454,7 @@
           <a:lstStyle xmlns:a="http://schemas.openxmlformats.org/drawingml/2006/main"/>
           <a:p xmlns:a="http://schemas.openxmlformats.org/drawingml/2006/main">
             <a:pPr algn="l">
+              <a:buNone/>
               <a:defRPr sz="2100" b="1">
                 <a:solidFill>
                   <a:srgbClr val="101820"/>
@@ -11965,6 +15511,7 @@
           <a:lstStyle xmlns:a="http://schemas.openxmlformats.org/drawingml/2006/main"/>
           <a:p xmlns:a="http://schemas.openxmlformats.org/drawingml/2006/main">
             <a:pPr algn="l">
+              <a:buNone/>
               <a:defRPr sz="1575" b="0">
                 <a:solidFill>
                   <a:srgbClr val="52616B"/>
@@ -12054,6 +15601,7 @@
           <a:lstStyle xmlns:a="http://schemas.openxmlformats.org/drawingml/2006/main"/>
           <a:p xmlns:a="http://schemas.openxmlformats.org/drawingml/2006/main">
             <a:pPr algn="l">
+              <a:buNone/>
               <a:defRPr sz="1650" b="1">
                 <a:solidFill>
                   <a:srgbClr val="C8553D"/>
@@ -12110,6 +15658,7 @@
           <a:lstStyle xmlns:a="http://schemas.openxmlformats.org/drawingml/2006/main"/>
           <a:p xmlns:a="http://schemas.openxmlformats.org/drawingml/2006/main">
             <a:pPr algn="l">
+              <a:buNone/>
               <a:defRPr sz="2100" b="1">
                 <a:solidFill>
                   <a:srgbClr val="101820"/>
@@ -12166,6 +15715,7 @@
           <a:lstStyle xmlns:a="http://schemas.openxmlformats.org/drawingml/2006/main"/>
           <a:p xmlns:a="http://schemas.openxmlformats.org/drawingml/2006/main">
             <a:pPr algn="l">
+              <a:buNone/>
               <a:defRPr sz="1575" b="0">
                 <a:solidFill>
                   <a:srgbClr val="52616B"/>
@@ -12255,6 +15805,7 @@
           <a:lstStyle xmlns:a="http://schemas.openxmlformats.org/drawingml/2006/main"/>
           <a:p xmlns:a="http://schemas.openxmlformats.org/drawingml/2006/main">
             <a:pPr algn="l">
+              <a:buNone/>
               <a:defRPr sz="1650" b="1">
                 <a:solidFill>
                   <a:srgbClr val="3D8DFF"/>
@@ -12311,6 +15862,7 @@
           <a:lstStyle xmlns:a="http://schemas.openxmlformats.org/drawingml/2006/main"/>
           <a:p xmlns:a="http://schemas.openxmlformats.org/drawingml/2006/main">
             <a:pPr algn="l">
+              <a:buNone/>
               <a:defRPr sz="2100" b="1">
                 <a:solidFill>
                   <a:srgbClr val="101820"/>
@@ -12367,6 +15919,7 @@
           <a:lstStyle xmlns:a="http://schemas.openxmlformats.org/drawingml/2006/main"/>
           <a:p xmlns:a="http://schemas.openxmlformats.org/drawingml/2006/main">
             <a:pPr algn="l">
+              <a:buNone/>
               <a:defRPr sz="1575" b="0">
                 <a:solidFill>
                   <a:srgbClr val="52616B"/>
@@ -12452,6 +16005,7 @@
           <a:lstStyle xmlns:a="http://schemas.openxmlformats.org/drawingml/2006/main"/>
           <a:p xmlns:a="http://schemas.openxmlformats.org/drawingml/2006/main">
             <a:pPr algn="l">
+              <a:buNone/>
               <a:defRPr sz="1200" b="1">
                 <a:solidFill>
                   <a:srgbClr val="3D8DFF"/>
@@ -12508,6 +16062,7 @@
           <a:lstStyle xmlns:a="http://schemas.openxmlformats.org/drawingml/2006/main"/>
           <a:p xmlns:a="http://schemas.openxmlformats.org/drawingml/2006/main">
             <a:pPr algn="l">
+              <a:buNone/>
               <a:defRPr sz="2700" b="1">
                 <a:solidFill>
                   <a:srgbClr val="101820"/>
@@ -12595,6 +16150,7 @@
           <a:lstStyle xmlns:a="http://schemas.openxmlformats.org/drawingml/2006/main"/>
           <a:p xmlns:a="http://schemas.openxmlformats.org/drawingml/2006/main">
             <a:pPr algn="r">
+              <a:buNone/>
               <a:defRPr sz="1200" b="0">
                 <a:solidFill>
                   <a:srgbClr val="52616B"/>
@@ -12651,6 +16207,7 @@
           <a:lstStyle xmlns:a="http://schemas.openxmlformats.org/drawingml/2006/main"/>
           <a:p xmlns:a="http://schemas.openxmlformats.org/drawingml/2006/main">
             <a:pPr algn="l">
+              <a:buNone/>
               <a:defRPr sz="2325" b="1">
                 <a:solidFill>
                   <a:srgbClr val="101820"/>
@@ -12707,6 +16264,7 @@
           <a:lstStyle xmlns:a="http://schemas.openxmlformats.org/drawingml/2006/main"/>
           <a:p xmlns:a="http://schemas.openxmlformats.org/drawingml/2006/main">
             <a:pPr algn="l">
+              <a:buNone/>
               <a:defRPr sz="1875" b="0">
                 <a:solidFill>
                   <a:srgbClr val="52616B"/>
@@ -12796,6 +16354,7 @@
           <a:lstStyle xmlns:a="http://schemas.openxmlformats.org/drawingml/2006/main"/>
           <a:p xmlns:a="http://schemas.openxmlformats.org/drawingml/2006/main">
             <a:pPr algn="l">
+              <a:buNone/>
               <a:defRPr sz="1575" b="1">
                 <a:solidFill>
                   <a:srgbClr val="101820"/>
@@ -12852,6 +16411,7 @@
           <a:lstStyle xmlns:a="http://schemas.openxmlformats.org/drawingml/2006/main"/>
           <a:p xmlns:a="http://schemas.openxmlformats.org/drawingml/2006/main">
             <a:pPr algn="l">
+              <a:buNone/>
               <a:defRPr sz="1500" b="0">
                 <a:solidFill>
                   <a:srgbClr val="52616B"/>
@@ -12941,6 +16501,7 @@
           <a:lstStyle xmlns:a="http://schemas.openxmlformats.org/drawingml/2006/main"/>
           <a:p xmlns:a="http://schemas.openxmlformats.org/drawingml/2006/main">
             <a:pPr algn="l">
+              <a:buNone/>
               <a:defRPr sz="1575" b="1">
                 <a:solidFill>
                   <a:srgbClr val="101820"/>
@@ -12997,6 +16558,7 @@
           <a:lstStyle xmlns:a="http://schemas.openxmlformats.org/drawingml/2006/main"/>
           <a:p xmlns:a="http://schemas.openxmlformats.org/drawingml/2006/main">
             <a:pPr algn="l">
+              <a:buNone/>
               <a:defRPr sz="1500" b="0">
                 <a:solidFill>
                   <a:srgbClr val="52616B"/>
@@ -13086,6 +16648,7 @@
           <a:lstStyle xmlns:a="http://schemas.openxmlformats.org/drawingml/2006/main"/>
           <a:p xmlns:a="http://schemas.openxmlformats.org/drawingml/2006/main">
             <a:pPr algn="l">
+              <a:buNone/>
               <a:defRPr sz="1575" b="1">
                 <a:solidFill>
                   <a:srgbClr val="101820"/>
@@ -13142,6 +16705,7 @@
           <a:lstStyle xmlns:a="http://schemas.openxmlformats.org/drawingml/2006/main"/>
           <a:p xmlns:a="http://schemas.openxmlformats.org/drawingml/2006/main">
             <a:pPr algn="l">
+              <a:buNone/>
               <a:defRPr sz="1500" b="0">
                 <a:solidFill>
                   <a:srgbClr val="52616B"/>
@@ -13231,6 +16795,7 @@
           <a:lstStyle xmlns:a="http://schemas.openxmlformats.org/drawingml/2006/main"/>
           <a:p xmlns:a="http://schemas.openxmlformats.org/drawingml/2006/main">
             <a:pPr algn="l">
+              <a:buNone/>
               <a:defRPr sz="1575" b="1">
                 <a:solidFill>
                   <a:srgbClr val="C8553D"/>
@@ -13287,6 +16852,7 @@
           <a:lstStyle xmlns:a="http://schemas.openxmlformats.org/drawingml/2006/main"/>
           <a:p xmlns:a="http://schemas.openxmlformats.org/drawingml/2006/main">
             <a:pPr algn="l">
+              <a:buNone/>
               <a:defRPr sz="1500" b="0">
                 <a:solidFill>
                   <a:srgbClr val="52616B"/>
@@ -13372,6 +16938,7 @@
           <a:lstStyle xmlns:a="http://schemas.openxmlformats.org/drawingml/2006/main"/>
           <a:p xmlns:a="http://schemas.openxmlformats.org/drawingml/2006/main">
             <a:pPr algn="l">
+              <a:buNone/>
               <a:defRPr sz="1200" b="1">
                 <a:solidFill>
                   <a:srgbClr val="3D8DFF"/>
@@ -13428,6 +16995,7 @@
           <a:lstStyle xmlns:a="http://schemas.openxmlformats.org/drawingml/2006/main"/>
           <a:p xmlns:a="http://schemas.openxmlformats.org/drawingml/2006/main">
             <a:pPr algn="l">
+              <a:buNone/>
               <a:defRPr sz="2700" b="1">
                 <a:solidFill>
                   <a:srgbClr val="101820"/>
@@ -13515,6 +17083,7 @@
           <a:lstStyle xmlns:a="http://schemas.openxmlformats.org/drawingml/2006/main"/>
           <a:p xmlns:a="http://schemas.openxmlformats.org/drawingml/2006/main">
             <a:pPr algn="r">
+              <a:buNone/>
               <a:defRPr sz="1200" b="0">
                 <a:solidFill>
                   <a:srgbClr val="52616B"/>
@@ -13637,6 +17206,7 @@
           <a:lstStyle xmlns:a="http://schemas.openxmlformats.org/drawingml/2006/main"/>
           <a:p xmlns:a="http://schemas.openxmlformats.org/drawingml/2006/main">
             <a:pPr algn="l">
+              <a:buNone/>
               <a:defRPr sz="2175" b="1">
                 <a:solidFill>
                   <a:srgbClr val="101820"/>
@@ -13693,6 +17263,7 @@
           <a:lstStyle xmlns:a="http://schemas.openxmlformats.org/drawingml/2006/main"/>
           <a:p xmlns:a="http://schemas.openxmlformats.org/drawingml/2006/main">
             <a:pPr algn="l">
+              <a:buNone/>
               <a:defRPr sz="1650" b="0">
                 <a:solidFill>
                   <a:srgbClr val="52616B"/>
@@ -13815,6 +17386,7 @@
           <a:lstStyle xmlns:a="http://schemas.openxmlformats.org/drawingml/2006/main"/>
           <a:p xmlns:a="http://schemas.openxmlformats.org/drawingml/2006/main">
             <a:pPr algn="l">
+              <a:buNone/>
               <a:defRPr sz="2175" b="1">
                 <a:solidFill>
                   <a:srgbClr val="101820"/>
@@ -13871,6 +17443,7 @@
           <a:lstStyle xmlns:a="http://schemas.openxmlformats.org/drawingml/2006/main"/>
           <a:p xmlns:a="http://schemas.openxmlformats.org/drawingml/2006/main">
             <a:pPr algn="l">
+              <a:buNone/>
               <a:defRPr sz="1650" b="0">
                 <a:solidFill>
                   <a:srgbClr val="52616B"/>
@@ -13993,6 +17566,7 @@
           <a:lstStyle xmlns:a="http://schemas.openxmlformats.org/drawingml/2006/main"/>
           <a:p xmlns:a="http://schemas.openxmlformats.org/drawingml/2006/main">
             <a:pPr algn="l">
+              <a:buNone/>
               <a:defRPr sz="2175" b="1">
                 <a:solidFill>
                   <a:srgbClr val="101820"/>
@@ -14049,6 +17623,7 @@
           <a:lstStyle xmlns:a="http://schemas.openxmlformats.org/drawingml/2006/main"/>
           <a:p xmlns:a="http://schemas.openxmlformats.org/drawingml/2006/main">
             <a:pPr algn="l">
+              <a:buNone/>
               <a:defRPr sz="1650" b="0">
                 <a:solidFill>
                   <a:srgbClr val="52616B"/>
@@ -14105,6 +17680,7 @@
           <a:lstStyle xmlns:a="http://schemas.openxmlformats.org/drawingml/2006/main"/>
           <a:p xmlns:a="http://schemas.openxmlformats.org/drawingml/2006/main">
             <a:pPr algn="ctr">
+              <a:buNone/>
               <a:defRPr sz="2100" b="1">
                 <a:solidFill>
                   <a:srgbClr val="101820"/>
@@ -14190,6 +17766,7 @@
           <a:lstStyle xmlns:a="http://schemas.openxmlformats.org/drawingml/2006/main"/>
           <a:p xmlns:a="http://schemas.openxmlformats.org/drawingml/2006/main">
             <a:pPr algn="l">
+              <a:buNone/>
               <a:defRPr sz="1200" b="1">
                 <a:solidFill>
                   <a:srgbClr val="3D8DFF"/>
@@ -14246,6 +17823,7 @@
           <a:lstStyle xmlns:a="http://schemas.openxmlformats.org/drawingml/2006/main"/>
           <a:p xmlns:a="http://schemas.openxmlformats.org/drawingml/2006/main">
             <a:pPr algn="l">
+              <a:buNone/>
               <a:defRPr sz="2700" b="1">
                 <a:solidFill>
                   <a:srgbClr val="101820"/>
@@ -14333,6 +17911,7 @@
           <a:lstStyle xmlns:a="http://schemas.openxmlformats.org/drawingml/2006/main"/>
           <a:p xmlns:a="http://schemas.openxmlformats.org/drawingml/2006/main">
             <a:pPr algn="r">
+              <a:buNone/>
               <a:defRPr sz="1200" b="0">
                 <a:solidFill>
                   <a:srgbClr val="52616B"/>
@@ -14455,6 +18034,7 @@
           <a:lstStyle xmlns:a="http://schemas.openxmlformats.org/drawingml/2006/main"/>
           <a:p xmlns:a="http://schemas.openxmlformats.org/drawingml/2006/main">
             <a:pPr algn="l">
+              <a:buNone/>
               <a:defRPr sz="2175" b="1">
                 <a:solidFill>
                   <a:srgbClr val="101820"/>
@@ -14511,6 +18091,7 @@
           <a:lstStyle xmlns:a="http://schemas.openxmlformats.org/drawingml/2006/main"/>
           <a:p xmlns:a="http://schemas.openxmlformats.org/drawingml/2006/main">
             <a:pPr algn="l">
+              <a:buNone/>
               <a:defRPr sz="1650" b="0">
                 <a:solidFill>
                   <a:srgbClr val="52616B"/>
@@ -14633,6 +18214,7 @@
           <a:lstStyle xmlns:a="http://schemas.openxmlformats.org/drawingml/2006/main"/>
           <a:p xmlns:a="http://schemas.openxmlformats.org/drawingml/2006/main">
             <a:pPr algn="l">
+              <a:buNone/>
               <a:defRPr sz="2175" b="1">
                 <a:solidFill>
                   <a:srgbClr val="101820"/>
@@ -14689,6 +18271,7 @@
           <a:lstStyle xmlns:a="http://schemas.openxmlformats.org/drawingml/2006/main"/>
           <a:p xmlns:a="http://schemas.openxmlformats.org/drawingml/2006/main">
             <a:pPr algn="l">
+              <a:buNone/>
               <a:defRPr sz="1650" b="0">
                 <a:solidFill>
                   <a:srgbClr val="52616B"/>
@@ -14811,6 +18394,7 @@
           <a:lstStyle xmlns:a="http://schemas.openxmlformats.org/drawingml/2006/main"/>
           <a:p xmlns:a="http://schemas.openxmlformats.org/drawingml/2006/main">
             <a:pPr algn="l">
+              <a:buNone/>
               <a:defRPr sz="2175" b="1">
                 <a:solidFill>
                   <a:srgbClr val="101820"/>
@@ -14867,6 +18451,7 @@
           <a:lstStyle xmlns:a="http://schemas.openxmlformats.org/drawingml/2006/main"/>
           <a:p xmlns:a="http://schemas.openxmlformats.org/drawingml/2006/main">
             <a:pPr algn="l">
+              <a:buNone/>
               <a:defRPr sz="1650" b="0">
                 <a:solidFill>
                   <a:srgbClr val="52616B"/>
@@ -14923,6 +18508,7 @@
           <a:lstStyle xmlns:a="http://schemas.openxmlformats.org/drawingml/2006/main"/>
           <a:p xmlns:a="http://schemas.openxmlformats.org/drawingml/2006/main">
             <a:pPr algn="ctr">
+              <a:buNone/>
               <a:defRPr sz="2175" b="1">
                 <a:solidFill>
                   <a:srgbClr val="101820"/>
@@ -15008,6 +18594,7 @@
           <a:lstStyle xmlns:a="http://schemas.openxmlformats.org/drawingml/2006/main"/>
           <a:p xmlns:a="http://schemas.openxmlformats.org/drawingml/2006/main">
             <a:pPr algn="l">
+              <a:buNone/>
               <a:defRPr sz="1200" b="1">
                 <a:solidFill>
                   <a:srgbClr val="3D8DFF"/>
@@ -15064,6 +18651,7 @@
           <a:lstStyle xmlns:a="http://schemas.openxmlformats.org/drawingml/2006/main"/>
           <a:p xmlns:a="http://schemas.openxmlformats.org/drawingml/2006/main">
             <a:pPr algn="l">
+              <a:buNone/>
               <a:defRPr sz="2700" b="1">
                 <a:solidFill>
                   <a:srgbClr val="101820"/>
@@ -15151,6 +18739,7 @@
           <a:lstStyle xmlns:a="http://schemas.openxmlformats.org/drawingml/2006/main"/>
           <a:p xmlns:a="http://schemas.openxmlformats.org/drawingml/2006/main">
             <a:pPr algn="r">
+              <a:buNone/>
               <a:defRPr sz="1200" b="0">
                 <a:solidFill>
                   <a:srgbClr val="52616B"/>
@@ -15207,6 +18796,7 @@
           <a:lstStyle xmlns:a="http://schemas.openxmlformats.org/drawingml/2006/main"/>
           <a:p xmlns:a="http://schemas.openxmlformats.org/drawingml/2006/main">
             <a:pPr algn="l">
+              <a:buNone/>
               <a:defRPr sz="1275" b="1">
                 <a:solidFill>
                   <a:srgbClr val="3D8DFF"/>
@@ -15263,6 +18853,7 @@
           <a:lstStyle xmlns:a="http://schemas.openxmlformats.org/drawingml/2006/main"/>
           <a:p xmlns:a="http://schemas.openxmlformats.org/drawingml/2006/main">
             <a:pPr algn="l">
+              <a:buNone/>
               <a:defRPr sz="2025" b="1">
                 <a:solidFill>
                   <a:srgbClr val="101820"/>
@@ -15350,6 +18941,7 @@
           <a:lstStyle xmlns:a="http://schemas.openxmlformats.org/drawingml/2006/main"/>
           <a:p xmlns:a="http://schemas.openxmlformats.org/drawingml/2006/main">
             <a:pPr algn="l">
+              <a:buNone/>
               <a:defRPr sz="1275" b="1">
                 <a:solidFill>
                   <a:srgbClr val="3D8DFF"/>
@@ -15406,6 +18998,7 @@
           <a:lstStyle xmlns:a="http://schemas.openxmlformats.org/drawingml/2006/main"/>
           <a:p xmlns:a="http://schemas.openxmlformats.org/drawingml/2006/main">
             <a:pPr algn="l">
+              <a:buNone/>
               <a:defRPr sz="2025" b="1">
                 <a:solidFill>
                   <a:srgbClr val="101820"/>
@@ -15429,6 +19022,7 @@
           </a:p>
           <a:p xmlns:a="http://schemas.openxmlformats.org/drawingml/2006/main">
             <a:pPr algn="l">
+              <a:buNone/>
               <a:defRPr sz="2025" b="1">
                 <a:solidFill>
                   <a:srgbClr val="101820"/>
@@ -15485,6 +19079,7 @@
           <a:lstStyle xmlns:a="http://schemas.openxmlformats.org/drawingml/2006/main"/>
           <a:p xmlns:a="http://schemas.openxmlformats.org/drawingml/2006/main">
             <a:pPr algn="l">
+              <a:buNone/>
               <a:defRPr sz="1275" b="1">
                 <a:solidFill>
                   <a:srgbClr val="3D8DFF"/>
@@ -15541,6 +19136,7 @@
           <a:lstStyle xmlns:a="http://schemas.openxmlformats.org/drawingml/2006/main"/>
           <a:p xmlns:a="http://schemas.openxmlformats.org/drawingml/2006/main">
             <a:pPr algn="l">
+              <a:buNone/>
               <a:defRPr sz="2025" b="1">
                 <a:solidFill>
                   <a:srgbClr val="101820"/>
@@ -15564,6 +19160,7 @@
           </a:p>
           <a:p xmlns:a="http://schemas.openxmlformats.org/drawingml/2006/main">
             <a:pPr algn="l">
+              <a:buNone/>
               <a:defRPr sz="2025" b="1">
                 <a:solidFill>
                   <a:srgbClr val="101820"/>
@@ -15620,6 +19217,7 @@
           <a:lstStyle xmlns:a="http://schemas.openxmlformats.org/drawingml/2006/main"/>
           <a:p xmlns:a="http://schemas.openxmlformats.org/drawingml/2006/main">
             <a:pPr algn="l">
+              <a:buNone/>
               <a:defRPr sz="1275" b="1">
                 <a:solidFill>
                   <a:srgbClr val="3D8DFF"/>
@@ -15676,6 +19274,7 @@
           <a:lstStyle xmlns:a="http://schemas.openxmlformats.org/drawingml/2006/main"/>
           <a:p xmlns:a="http://schemas.openxmlformats.org/drawingml/2006/main">
             <a:pPr algn="l">
+              <a:buNone/>
               <a:defRPr sz="2025" b="1">
                 <a:solidFill>
                   <a:srgbClr val="101820"/>
@@ -15699,6 +19298,7 @@
           </a:p>
           <a:p xmlns:a="http://schemas.openxmlformats.org/drawingml/2006/main">
             <a:pPr algn="l">
+              <a:buNone/>
               <a:defRPr sz="2025" b="1">
                 <a:solidFill>
                   <a:srgbClr val="101820"/>
@@ -15755,6 +19355,7 @@
           <a:lstStyle xmlns:a="http://schemas.openxmlformats.org/drawingml/2006/main"/>
           <a:p xmlns:a="http://schemas.openxmlformats.org/drawingml/2006/main">
             <a:pPr algn="l">
+              <a:buNone/>
               <a:defRPr sz="1275" b="1">
                 <a:solidFill>
                   <a:srgbClr val="3D8DFF"/>
@@ -15811,6 +19412,7 @@
           <a:lstStyle xmlns:a="http://schemas.openxmlformats.org/drawingml/2006/main"/>
           <a:p xmlns:a="http://schemas.openxmlformats.org/drawingml/2006/main">
             <a:pPr algn="l">
+              <a:buNone/>
               <a:defRPr sz="2025" b="1">
                 <a:solidFill>
                   <a:srgbClr val="101820"/>
@@ -15834,6 +19436,7 @@
           </a:p>
           <a:p xmlns:a="http://schemas.openxmlformats.org/drawingml/2006/main">
             <a:pPr algn="l">
+              <a:buNone/>
               <a:defRPr sz="2025" b="1">
                 <a:solidFill>
                   <a:srgbClr val="101820"/>
@@ -15923,6 +19526,7 @@
           <a:lstStyle xmlns:a="http://schemas.openxmlformats.org/drawingml/2006/main"/>
           <a:p xmlns:a="http://schemas.openxmlformats.org/drawingml/2006/main">
             <a:pPr algn="ctr">
+              <a:buNone/>
               <a:defRPr sz="1800" b="1">
                 <a:solidFill>
                   <a:srgbClr val="101820"/>

--- a/literature_studies/presentations/gen5_lit_mom_03_1_dual_momentum_study.pptx
+++ b/literature_studies/presentations/gen5_lit_mom_03_1_dual_momentum_study.pptx
@@ -2,30 +2,36 @@
 <file path=ppt/presentation.xml><?xml version="1.0" encoding="utf-8"?>
 <p:presentation xmlns:p="http://schemas.openxmlformats.org/presentationml/2006/main">
   <p:sldMasterIdLst>
-    <p:sldMasterId xmlns:r="http://schemas.openxmlformats.org/officeDocument/2006/relationships" id="2147483648" r:id="R18cd756b67c74bba"/>
+    <p:sldMasterId xmlns:r="http://schemas.openxmlformats.org/officeDocument/2006/relationships" id="2147483648" r:id="Rae8d336e5b5d4fbb"/>
   </p:sldMasterIdLst>
   <p:notesMasterIdLst>
-    <p:notesMasterId xmlns:r="http://schemas.openxmlformats.org/officeDocument/2006/relationships" r:id="Rc099882b3f7d4749"/>
+    <p:notesMasterId xmlns:r="http://schemas.openxmlformats.org/officeDocument/2006/relationships" r:id="Reefde1dab9354374"/>
   </p:notesMasterIdLst>
   <p:sldIdLst>
-    <p:sldId xmlns:r="http://schemas.openxmlformats.org/officeDocument/2006/relationships" id="256" r:id="R67d377d24c4a46c5"/>
-    <p:sldId xmlns:r="http://schemas.openxmlformats.org/officeDocument/2006/relationships" id="257" r:id="R57d388cc5d7348ea"/>
-    <p:sldId xmlns:r="http://schemas.openxmlformats.org/officeDocument/2006/relationships" id="258" r:id="R6874ec18b93647af"/>
-    <p:sldId xmlns:r="http://schemas.openxmlformats.org/officeDocument/2006/relationships" id="259" r:id="Re5d6524ae56c4892"/>
-    <p:sldId xmlns:r="http://schemas.openxmlformats.org/officeDocument/2006/relationships" id="260" r:id="Racaa33e15d8a46b8"/>
-    <p:sldId xmlns:r="http://schemas.openxmlformats.org/officeDocument/2006/relationships" id="261" r:id="Rf772bcf2c3c64f2e"/>
-    <p:sldId xmlns:r="http://schemas.openxmlformats.org/officeDocument/2006/relationships" id="262" r:id="R1228e3d941964d65"/>
-    <p:sldId xmlns:r="http://schemas.openxmlformats.org/officeDocument/2006/relationships" id="263" r:id="Ra4b80999d6374d60"/>
-    <p:sldId xmlns:r="http://schemas.openxmlformats.org/officeDocument/2006/relationships" id="264" r:id="R3bb208c373ce4cc8"/>
-    <p:sldId xmlns:r="http://schemas.openxmlformats.org/officeDocument/2006/relationships" id="265" r:id="Rc0079dbb22444b13"/>
-    <p:sldId xmlns:r="http://schemas.openxmlformats.org/officeDocument/2006/relationships" id="266" r:id="Rb333aafb64ce4f4b"/>
-    <p:sldId xmlns:r="http://schemas.openxmlformats.org/officeDocument/2006/relationships" id="267" r:id="Rf022bfe8617b431c"/>
-    <p:sldId xmlns:r="http://schemas.openxmlformats.org/officeDocument/2006/relationships" id="268" r:id="R4836f034c74e4b80"/>
-    <p:sldId xmlns:r="http://schemas.openxmlformats.org/officeDocument/2006/relationships" id="269" r:id="R9932f5473614495f"/>
-    <p:sldId xmlns:r="http://schemas.openxmlformats.org/officeDocument/2006/relationships" id="270" r:id="Rc9be82d4d6ec416a"/>
-    <p:sldId xmlns:r="http://schemas.openxmlformats.org/officeDocument/2006/relationships" id="271" r:id="Rcaa56087912e4056"/>
-    <p:sldId xmlns:r="http://schemas.openxmlformats.org/officeDocument/2006/relationships" id="272" r:id="Ra81fc72b50914992"/>
-    <p:sldId xmlns:r="http://schemas.openxmlformats.org/officeDocument/2006/relationships" id="273" r:id="Rd27da6db26b849d7"/>
+    <p:sldId xmlns:r="http://schemas.openxmlformats.org/officeDocument/2006/relationships" id="256" r:id="Rf1f985c451244870"/>
+    <p:sldId xmlns:r="http://schemas.openxmlformats.org/officeDocument/2006/relationships" id="257" r:id="R086d61e7b0e14306"/>
+    <p:sldId xmlns:r="http://schemas.openxmlformats.org/officeDocument/2006/relationships" id="258" r:id="Rdb3246f22be04b89"/>
+    <p:sldId xmlns:r="http://schemas.openxmlformats.org/officeDocument/2006/relationships" id="259" r:id="R3776790a6e1e478b"/>
+    <p:sldId xmlns:r="http://schemas.openxmlformats.org/officeDocument/2006/relationships" id="260" r:id="R01aeeb47b2d547dc"/>
+    <p:sldId xmlns:r="http://schemas.openxmlformats.org/officeDocument/2006/relationships" id="261" r:id="Re9ed46d5f5b54c0b"/>
+    <p:sldId xmlns:r="http://schemas.openxmlformats.org/officeDocument/2006/relationships" id="262" r:id="R655b5d346be74df1"/>
+    <p:sldId xmlns:r="http://schemas.openxmlformats.org/officeDocument/2006/relationships" id="263" r:id="R99abe4febb8e48ad"/>
+    <p:sldId xmlns:r="http://schemas.openxmlformats.org/officeDocument/2006/relationships" id="264" r:id="R9c64e1fd01db478c"/>
+    <p:sldId xmlns:r="http://schemas.openxmlformats.org/officeDocument/2006/relationships" id="265" r:id="Rfeb6dae1e1c74157"/>
+    <p:sldId xmlns:r="http://schemas.openxmlformats.org/officeDocument/2006/relationships" id="266" r:id="Rb56e179abecd45ae"/>
+    <p:sldId xmlns:r="http://schemas.openxmlformats.org/officeDocument/2006/relationships" id="267" r:id="R349ef24c29c541c6"/>
+    <p:sldId xmlns:r="http://schemas.openxmlformats.org/officeDocument/2006/relationships" id="268" r:id="R82cb72ea139a4bea"/>
+    <p:sldId xmlns:r="http://schemas.openxmlformats.org/officeDocument/2006/relationships" id="269" r:id="R609a8c6a49d9457a"/>
+    <p:sldId xmlns:r="http://schemas.openxmlformats.org/officeDocument/2006/relationships" id="270" r:id="R66b81e4378fc4f6f"/>
+    <p:sldId xmlns:r="http://schemas.openxmlformats.org/officeDocument/2006/relationships" id="271" r:id="R6f7dcb02ed7a450a"/>
+    <p:sldId xmlns:r="http://schemas.openxmlformats.org/officeDocument/2006/relationships" id="272" r:id="Rd6617f9ed0864dd3"/>
+    <p:sldId xmlns:r="http://schemas.openxmlformats.org/officeDocument/2006/relationships" id="273" r:id="R4bd5ace1f61640fd"/>
+    <p:sldId xmlns:r="http://schemas.openxmlformats.org/officeDocument/2006/relationships" id="274" r:id="R979f8d5d87604970"/>
+    <p:sldId xmlns:r="http://schemas.openxmlformats.org/officeDocument/2006/relationships" id="275" r:id="R9afc7c20eaea4eaa"/>
+    <p:sldId xmlns:r="http://schemas.openxmlformats.org/officeDocument/2006/relationships" id="276" r:id="Rd67d518ba3b24696"/>
+    <p:sldId xmlns:r="http://schemas.openxmlformats.org/officeDocument/2006/relationships" id="277" r:id="R8abde3f35b094194"/>
+    <p:sldId xmlns:r="http://schemas.openxmlformats.org/officeDocument/2006/relationships" id="278" r:id="R744a3fb6fe464d3f"/>
+    <p:sldId xmlns:r="http://schemas.openxmlformats.org/officeDocument/2006/relationships" id="279" r:id="Rcccf665801694fba"/>
   </p:sldIdLst>
   <p:sldSz cx="12192000" cy="6858000"/>
   <p:notesSz cx="6858000" cy="9144000"/>
@@ -459,7 +465,7 @@
           <a:lstStyle xmlns:a="http://schemas.openxmlformats.org/drawingml/2006/main"/>
           <a:p xmlns:a="http://schemas.openxmlformats.org/drawingml/2006/main">
             <a:r>
-              <a:t>The video is treated as a practitioner literature source that generates a falsifiable hypothesis. The deck does not import the publisher's performance claims as Gen5 authority.</a:t>
+              <a:t>The deck now contains both the source/mechanics opening and the authorized 2016-2026 causal replay. The replay remains retrospective, overlaps the source's parameter-selection history, and creates neither independent confirmation nor forward authority.</a:t>
             </a:r>
           </a:p>
           <a:p xmlns:a="http://schemas.openxmlformats.org/drawingml/2006/main">
@@ -484,12 +490,22 @@
           </a:p>
           <a:p xmlns:a="http://schemas.openxmlformats.org/drawingml/2006/main">
             <a:r>
-              <a:t>- C:/Users/Franc/OneDrive/Documents/Francis/Peltata Project/Time-Series-Modeling-Gen5/literature_studies/docs/GEN5_LITERATURE_GROUNDED_STRATEGY_RESEARCH_NOMENCLATURE.md</a:t>
-            </a:r>
-          </a:p>
-          <a:p xmlns:a="http://schemas.openxmlformats.org/drawingml/2006/main">
-            <a:r>
-              <a:t>- Codex task conversation, 2026-09-02 (operator/assistant momentum interpretation huddle)</a:t>
+              <a:t>- C:/Users/Franc/OneDrive/Documents/Francis/Peltata Project/Time-Series-Modeling-Gen5/runs/research_workbench/literature_grounded/lit_mom_03_1_dual_momentum_replay_20260902/mom031r_report.md</a:t>
+            </a:r>
+          </a:p>
+          <a:p xmlns:a="http://schemas.openxmlformats.org/drawingml/2006/main">
+            <a:r>
+              <a:t>- C:/Users/Franc/OneDrive/Documents/Francis/Peltata Project/Time-Series-Modeling-Gen5/literature_studies/docs/GEN5_LIT_MOM_03_1_DUAL_MOMENTUM_REPLAY_RESULTS.md</a:t>
+            </a:r>
+          </a:p>
+          <a:p xmlns:a="http://schemas.openxmlformats.org/drawingml/2006/main">
+            <a:r>
+              <a:t>- Codex task conversation, 2026-09-02 (operator approval and replay interpretation)</a:t>
+            </a:r>
+          </a:p>
+          <a:p xmlns:a="http://schemas.openxmlformats.org/drawingml/2006/main">
+            <a:r>
+              <a:t>[/Sources]</a:t>
             </a:r>
           </a:p>
         </p:txBody>
@@ -1419,6 +1435,121 @@
 </p:notes>
 </file>
 
+<file path=ppt/notesSlides/notesSlide19.xml><?xml version="1.0" encoding="utf-8"?>
+<p:notes xmlns:p="http://schemas.openxmlformats.org/presentationml/2006/main">
+  <p:cSld>
+    <p:spTree>
+      <p:nvGrpSpPr>
+        <p:cNvPr id="1" name=""/>
+        <p:cNvGrpSpPr/>
+        <p:nvPr/>
+      </p:nvGrpSpPr>
+      <p:grpSpPr>
+        <a:xfrm xmlns:a="http://schemas.openxmlformats.org/drawingml/2006/main"/>
+      </p:grpSpPr>
+      <p:sp>
+        <p:nvSpPr>
+          <p:cNvPr id="2" name="Slide Image Placeholder 1"/>
+          <p:cNvSpPr>
+            <a:spLocks xmlns:a="http://schemas.openxmlformats.org/drawingml/2006/main" noGrp="1"/>
+          </p:cNvSpPr>
+          <p:nvPr>
+            <p:ph type="sldImg" idx="0"/>
+          </p:nvPr>
+        </p:nvSpPr>
+        <p:spPr/>
+      </p:sp>
+      <p:sp>
+        <p:nvSpPr>
+          <p:cNvPr id="3" name="Notes Placeholder 2"/>
+          <p:cNvSpPr>
+            <a:spLocks xmlns:a="http://schemas.openxmlformats.org/drawingml/2006/main" noGrp="1"/>
+          </p:cNvSpPr>
+          <p:nvPr>
+            <p:ph type="body" idx="1"/>
+          </p:nvPr>
+        </p:nvSpPr>
+        <p:spPr/>
+        <p:txBody>
+          <a:bodyPr xmlns:a="http://schemas.openxmlformats.org/drawingml/2006/main"/>
+          <a:lstStyle xmlns:a="http://schemas.openxmlformats.org/drawingml/2006/main"/>
+          <a:p xmlns:a="http://schemas.openxmlformats.org/drawingml/2006/main">
+            <a:r>
+              <a:t>This begins the authorized economic replay. The left panel describes the complete source rule. The right panel gives the key component-attribution result: the source and relative-only paths were essentially the same.</a:t>
+            </a:r>
+          </a:p>
+          <a:p xmlns:a="http://schemas.openxmlformats.org/drawingml/2006/main">
+            <a:r>
+              <a:t/>
+            </a:r>
+          </a:p>
+          <a:p xmlns:a="http://schemas.openxmlformats.org/drawingml/2006/main">
+            <a:r>
+              <a:t>[Sources]</a:t>
+            </a:r>
+          </a:p>
+          <a:p xmlns:a="http://schemas.openxmlformats.org/drawingml/2006/main">
+            <a:r>
+              <a:t>- C:/Users/Franc/OneDrive/Documents/Francis/Peltata Project/Time-Series-Modeling-Gen5/runs/research_workbench/literature_grounded/lit_mom_03_1_dual_momentum_replay_20260902/mom031r_report.md</a:t>
+            </a:r>
+          </a:p>
+          <a:p xmlns:a="http://schemas.openxmlformats.org/drawingml/2006/main">
+            <a:r>
+              <a:t>- C:/Users/Franc/OneDrive/Documents/Francis/Peltata Project/Time-Series-Modeling-Gen5/runs/research_workbench/literature_grounded/lit_mom_03_1_dual_momentum_replay_20260902/mom031r_portfolio_metrics.csv</a:t>
+            </a:r>
+          </a:p>
+          <a:p xmlns:a="http://schemas.openxmlformats.org/drawingml/2006/main">
+            <a:r>
+              <a:t>- C:/Users/Franc/OneDrive/Documents/Francis/Peltata Project/Time-Series-Modeling-Gen5/runs/research_workbench/literature_grounded/lit_mom_03_1_dual_momentum_replay_20260902/mom031r_source_control_comparisons.csv</a:t>
+            </a:r>
+          </a:p>
+          <a:p xmlns:a="http://schemas.openxmlformats.org/drawingml/2006/main">
+            <a:r>
+              <a:t>- C:/Users/Franc/OneDrive/Documents/Francis/Peltata Project/Time-Series-Modeling-Gen5/literature_studies/R/gen5_lit_mom_03_1_dual_momentum_replay.R</a:t>
+            </a:r>
+          </a:p>
+          <a:p xmlns:a="http://schemas.openxmlformats.org/drawingml/2006/main">
+            <a:r>
+              <a:t>- C:/Users/Franc/OneDrive/Documents/Francis/Peltata Project/Time-Series-Modeling-Gen5/literature_studies/scripts/run_gen5_lit_mom_03_1_dual_momentum_replay.R</a:t>
+            </a:r>
+          </a:p>
+          <a:p xmlns:a="http://schemas.openxmlformats.org/drawingml/2006/main">
+            <a:r>
+              <a:t>- Codex task conversation, 2026-09-02 (operator approval and replay interpretation)</a:t>
+            </a:r>
+          </a:p>
+          <a:p xmlns:a="http://schemas.openxmlformats.org/drawingml/2006/main">
+            <a:r>
+              <a:t>[/Sources]</a:t>
+            </a:r>
+          </a:p>
+        </p:txBody>
+      </p:sp>
+      <p:sp>
+        <p:nvSpPr>
+          <p:cNvPr id="4" name="Slide Number Placeholder 3"/>
+          <p:cNvSpPr>
+            <a:spLocks xmlns:a="http://schemas.openxmlformats.org/drawingml/2006/main" noGrp="1"/>
+          </p:cNvSpPr>
+          <p:nvPr>
+            <p:ph type="sldNum" idx="5"/>
+          </p:nvPr>
+        </p:nvSpPr>
+        <p:spPr/>
+        <p:txBody>
+          <a:bodyPr xmlns:a="http://schemas.openxmlformats.org/drawingml/2006/main"/>
+          <a:lstStyle xmlns:a="http://schemas.openxmlformats.org/drawingml/2006/main"/>
+          <a:p xmlns:a="http://schemas.openxmlformats.org/drawingml/2006/main"/>
+        </p:txBody>
+      </p:sp>
+    </p:spTree>
+  </p:cSld>
+  <p:clrMapOvr>
+    <a:masterClrMapping xmlns:a="http://schemas.openxmlformats.org/drawingml/2006/main"/>
+  </p:clrMapOvr>
+</p:notes>
+</file>
+
 <file path=ppt/notesSlides/notesSlide2.xml><?xml version="1.0" encoding="utf-8"?>
 <p:notes xmlns:p="http://schemas.openxmlformats.org/presentationml/2006/main">
   <p:cSld>
@@ -1495,6 +1626,541 @@
           <a:p xmlns:a="http://schemas.openxmlformats.org/drawingml/2006/main">
             <a:r>
               <a:t>- Codex task conversation, 2026-09-02 (operator/assistant momentum interpretation huddle)</a:t>
+            </a:r>
+          </a:p>
+        </p:txBody>
+      </p:sp>
+      <p:sp>
+        <p:nvSpPr>
+          <p:cNvPr id="4" name="Slide Number Placeholder 3"/>
+          <p:cNvSpPr>
+            <a:spLocks xmlns:a="http://schemas.openxmlformats.org/drawingml/2006/main" noGrp="1"/>
+          </p:cNvSpPr>
+          <p:nvPr>
+            <p:ph type="sldNum" idx="5"/>
+          </p:nvPr>
+        </p:nvSpPr>
+        <p:spPr/>
+        <p:txBody>
+          <a:bodyPr xmlns:a="http://schemas.openxmlformats.org/drawingml/2006/main"/>
+          <a:lstStyle xmlns:a="http://schemas.openxmlformats.org/drawingml/2006/main"/>
+          <a:p xmlns:a="http://schemas.openxmlformats.org/drawingml/2006/main"/>
+        </p:txBody>
+      </p:sp>
+    </p:spTree>
+  </p:cSld>
+  <p:clrMapOvr>
+    <a:masterClrMapping xmlns:a="http://schemas.openxmlformats.org/drawingml/2006/main"/>
+  </p:clrMapOvr>
+</p:notes>
+</file>
+
+<file path=ppt/notesSlides/notesSlide20.xml><?xml version="1.0" encoding="utf-8"?>
+<p:notes xmlns:p="http://schemas.openxmlformats.org/presentationml/2006/main">
+  <p:cSld>
+    <p:spTree>
+      <p:nvGrpSpPr>
+        <p:cNvPr id="1" name=""/>
+        <p:cNvGrpSpPr/>
+        <p:nvPr/>
+      </p:nvGrpSpPr>
+      <p:grpSpPr>
+        <a:xfrm xmlns:a="http://schemas.openxmlformats.org/drawingml/2006/main"/>
+      </p:grpSpPr>
+      <p:sp>
+        <p:nvSpPr>
+          <p:cNvPr id="2" name="Slide Image Placeholder 1"/>
+          <p:cNvSpPr>
+            <a:spLocks xmlns:a="http://schemas.openxmlformats.org/drawingml/2006/main" noGrp="1"/>
+          </p:cNvSpPr>
+          <p:nvPr>
+            <p:ph type="sldImg" idx="0"/>
+          </p:nvPr>
+        </p:nvSpPr>
+        <p:spPr/>
+      </p:sp>
+      <p:sp>
+        <p:nvSpPr>
+          <p:cNvPr id="3" name="Notes Placeholder 2"/>
+          <p:cNvSpPr>
+            <a:spLocks xmlns:a="http://schemas.openxmlformats.org/drawingml/2006/main" noGrp="1"/>
+          </p:cNvSpPr>
+          <p:nvPr>
+            <p:ph type="body" idx="1"/>
+          </p:nvPr>
+        </p:nvSpPr>
+        <p:spPr/>
+        <p:txBody>
+          <a:bodyPr xmlns:a="http://schemas.openxmlformats.org/drawingml/2006/main"/>
+          <a:lstStyle xmlns:a="http://schemas.openxmlformats.org/drawingml/2006/main"/>
+          <a:p xmlns:a="http://schemas.openxmlformats.org/drawingml/2006/main">
+            <a:r>
+              <a:t>All paths use completed Wednesday-close signals and next-common-open execution. The log-scale chart shows that SPY finished higher, while the source and relative-only lines overlap and experience shallower drawdowns than SPY.</a:t>
+            </a:r>
+          </a:p>
+          <a:p xmlns:a="http://schemas.openxmlformats.org/drawingml/2006/main">
+            <a:r>
+              <a:t/>
+            </a:r>
+          </a:p>
+          <a:p xmlns:a="http://schemas.openxmlformats.org/drawingml/2006/main">
+            <a:r>
+              <a:t>[Sources]</a:t>
+            </a:r>
+          </a:p>
+          <a:p xmlns:a="http://schemas.openxmlformats.org/drawingml/2006/main">
+            <a:r>
+              <a:t>- C:/Users/Franc/OneDrive/Documents/Francis/Peltata Project/Time-Series-Modeling-Gen5/runs/research_workbench/literature_grounded/lit_mom_03_1_dual_momentum_replay_20260902/mom031r_report.md</a:t>
+            </a:r>
+          </a:p>
+          <a:p xmlns:a="http://schemas.openxmlformats.org/drawingml/2006/main">
+            <a:r>
+              <a:t>- C:/Users/Franc/OneDrive/Documents/Francis/Peltata Project/Time-Series-Modeling-Gen5/runs/research_workbench/literature_grounded/lit_mom_03_1_dual_momentum_replay_20260902/mom031r_portfolio_metrics.csv</a:t>
+            </a:r>
+          </a:p>
+          <a:p xmlns:a="http://schemas.openxmlformats.org/drawingml/2006/main">
+            <a:r>
+              <a:t>- C:/Users/Franc/OneDrive/Documents/Francis/Peltata Project/Time-Series-Modeling-Gen5/runs/research_workbench/literature_grounded/lit_mom_03_1_dual_momentum_replay_20260902/visuals/mom031r_growth_of_one.png</a:t>
+            </a:r>
+          </a:p>
+          <a:p xmlns:a="http://schemas.openxmlformats.org/drawingml/2006/main">
+            <a:r>
+              <a:t>- C:/Users/Franc/OneDrive/Documents/Francis/Peltata Project/Time-Series-Modeling-Gen5/literature_studies/R/gen5_lit_mom_03_1_dual_momentum_replay.R</a:t>
+            </a:r>
+          </a:p>
+          <a:p xmlns:a="http://schemas.openxmlformats.org/drawingml/2006/main">
+            <a:r>
+              <a:t>- Codex task conversation, 2026-09-02 (operator approval and replay interpretation)</a:t>
+            </a:r>
+          </a:p>
+          <a:p xmlns:a="http://schemas.openxmlformats.org/drawingml/2006/main">
+            <a:r>
+              <a:t>[/Sources]</a:t>
+            </a:r>
+          </a:p>
+        </p:txBody>
+      </p:sp>
+      <p:sp>
+        <p:nvSpPr>
+          <p:cNvPr id="4" name="Slide Number Placeholder 3"/>
+          <p:cNvSpPr>
+            <a:spLocks xmlns:a="http://schemas.openxmlformats.org/drawingml/2006/main" noGrp="1"/>
+          </p:cNvSpPr>
+          <p:nvPr>
+            <p:ph type="sldNum" idx="5"/>
+          </p:nvPr>
+        </p:nvSpPr>
+        <p:spPr/>
+        <p:txBody>
+          <a:bodyPr xmlns:a="http://schemas.openxmlformats.org/drawingml/2006/main"/>
+          <a:lstStyle xmlns:a="http://schemas.openxmlformats.org/drawingml/2006/main"/>
+          <a:p xmlns:a="http://schemas.openxmlformats.org/drawingml/2006/main"/>
+        </p:txBody>
+      </p:sp>
+    </p:spTree>
+  </p:cSld>
+  <p:clrMapOvr>
+    <a:masterClrMapping xmlns:a="http://schemas.openxmlformats.org/drawingml/2006/main"/>
+  </p:clrMapOvr>
+</p:notes>
+</file>
+
+<file path=ppt/notesSlides/notesSlide21.xml><?xml version="1.0" encoding="utf-8"?>
+<p:notes xmlns:p="http://schemas.openxmlformats.org/presentationml/2006/main">
+  <p:cSld>
+    <p:spTree>
+      <p:nvGrpSpPr>
+        <p:cNvPr id="1" name=""/>
+        <p:cNvGrpSpPr/>
+        <p:nvPr/>
+      </p:nvGrpSpPr>
+      <p:grpSpPr>
+        <a:xfrm xmlns:a="http://schemas.openxmlformats.org/drawingml/2006/main"/>
+      </p:grpSpPr>
+      <p:sp>
+        <p:nvSpPr>
+          <p:cNvPr id="2" name="Slide Image Placeholder 1"/>
+          <p:cNvSpPr>
+            <a:spLocks xmlns:a="http://schemas.openxmlformats.org/drawingml/2006/main" noGrp="1"/>
+          </p:cNvSpPr>
+          <p:nvPr>
+            <p:ph type="sldImg" idx="0"/>
+          </p:nvPr>
+        </p:nvSpPr>
+        <p:spPr/>
+      </p:sp>
+      <p:sp>
+        <p:nvSpPr>
+          <p:cNvPr id="3" name="Notes Placeholder 2"/>
+          <p:cNvSpPr>
+            <a:spLocks xmlns:a="http://schemas.openxmlformats.org/drawingml/2006/main" noGrp="1"/>
+          </p:cNvSpPr>
+          <p:nvPr>
+            <p:ph type="body" idx="1"/>
+          </p:nvPr>
+        </p:nvSpPr>
+        <p:spPr/>
+        <p:txBody>
+          <a:bodyPr xmlns:a="http://schemas.openxmlformats.org/drawingml/2006/main"/>
+          <a:lstStyle xmlns:a="http://schemas.openxmlformats.org/drawingml/2006/main"/>
+          <a:p xmlns:a="http://schemas.openxmlformats.org/drawingml/2006/main">
+            <a:r>
+              <a:t>The five-control decomposition prevents the source endpoint from being mistaken for unique dual-momentum value. Source separated from absolute-only and cash after BH, but not from relative-only, equal-weight all nine, or SPY on the frozen weekly-difference test.</a:t>
+            </a:r>
+          </a:p>
+          <a:p xmlns:a="http://schemas.openxmlformats.org/drawingml/2006/main">
+            <a:r>
+              <a:t/>
+            </a:r>
+          </a:p>
+          <a:p xmlns:a="http://schemas.openxmlformats.org/drawingml/2006/main">
+            <a:r>
+              <a:t>[Sources]</a:t>
+            </a:r>
+          </a:p>
+          <a:p xmlns:a="http://schemas.openxmlformats.org/drawingml/2006/main">
+            <a:r>
+              <a:t>- C:/Users/Franc/OneDrive/Documents/Francis/Peltata Project/Time-Series-Modeling-Gen5/runs/research_workbench/literature_grounded/lit_mom_03_1_dual_momentum_replay_20260902/mom031r_report.md</a:t>
+            </a:r>
+          </a:p>
+          <a:p xmlns:a="http://schemas.openxmlformats.org/drawingml/2006/main">
+            <a:r>
+              <a:t>- C:/Users/Franc/OneDrive/Documents/Francis/Peltata Project/Time-Series-Modeling-Gen5/runs/research_workbench/literature_grounded/lit_mom_03_1_dual_momentum_replay_20260902/mom031r_portfolio_metrics.csv</a:t>
+            </a:r>
+          </a:p>
+          <a:p xmlns:a="http://schemas.openxmlformats.org/drawingml/2006/main">
+            <a:r>
+              <a:t>- C:/Users/Franc/OneDrive/Documents/Francis/Peltata Project/Time-Series-Modeling-Gen5/runs/research_workbench/literature_grounded/lit_mom_03_1_dual_momentum_replay_20260902/mom031r_source_control_comparisons.csv</a:t>
+            </a:r>
+          </a:p>
+          <a:p xmlns:a="http://schemas.openxmlformats.org/drawingml/2006/main">
+            <a:r>
+              <a:t>- Codex task conversation, 2026-09-02 (operator approval and replay interpretation)</a:t>
+            </a:r>
+          </a:p>
+          <a:p xmlns:a="http://schemas.openxmlformats.org/drawingml/2006/main">
+            <a:r>
+              <a:t>[/Sources]</a:t>
+            </a:r>
+          </a:p>
+        </p:txBody>
+      </p:sp>
+      <p:sp>
+        <p:nvSpPr>
+          <p:cNvPr id="4" name="Slide Number Placeholder 3"/>
+          <p:cNvSpPr>
+            <a:spLocks xmlns:a="http://schemas.openxmlformats.org/drawingml/2006/main" noGrp="1"/>
+          </p:cNvSpPr>
+          <p:nvPr>
+            <p:ph type="sldNum" idx="5"/>
+          </p:nvPr>
+        </p:nvSpPr>
+        <p:spPr/>
+        <p:txBody>
+          <a:bodyPr xmlns:a="http://schemas.openxmlformats.org/drawingml/2006/main"/>
+          <a:lstStyle xmlns:a="http://schemas.openxmlformats.org/drawingml/2006/main"/>
+          <a:p xmlns:a="http://schemas.openxmlformats.org/drawingml/2006/main"/>
+        </p:txBody>
+      </p:sp>
+    </p:spTree>
+  </p:cSld>
+  <p:clrMapOvr>
+    <a:masterClrMapping xmlns:a="http://schemas.openxmlformats.org/drawingml/2006/main"/>
+  </p:clrMapOvr>
+</p:notes>
+</file>
+
+<file path=ppt/notesSlides/notesSlide22.xml><?xml version="1.0" encoding="utf-8"?>
+<p:notes xmlns:p="http://schemas.openxmlformats.org/presentationml/2006/main">
+  <p:cSld>
+    <p:spTree>
+      <p:nvGrpSpPr>
+        <p:cNvPr id="1" name=""/>
+        <p:cNvGrpSpPr/>
+        <p:nvPr/>
+      </p:nvGrpSpPr>
+      <p:grpSpPr>
+        <a:xfrm xmlns:a="http://schemas.openxmlformats.org/drawingml/2006/main"/>
+      </p:grpSpPr>
+      <p:sp>
+        <p:nvSpPr>
+          <p:cNvPr id="2" name="Slide Image Placeholder 1"/>
+          <p:cNvSpPr>
+            <a:spLocks xmlns:a="http://schemas.openxmlformats.org/drawingml/2006/main" noGrp="1"/>
+          </p:cNvSpPr>
+          <p:nvPr>
+            <p:ph type="sldImg" idx="0"/>
+          </p:nvPr>
+        </p:nvSpPr>
+        <p:spPr/>
+      </p:sp>
+      <p:sp>
+        <p:nvSpPr>
+          <p:cNvPr id="3" name="Notes Placeholder 2"/>
+          <p:cNvSpPr>
+            <a:spLocks xmlns:a="http://schemas.openxmlformats.org/drawingml/2006/main" noGrp="1"/>
+          </p:cNvSpPr>
+          <p:nvPr>
+            <p:ph type="body" idx="1"/>
+          </p:nvPr>
+        </p:nvSpPr>
+        <p:spPr/>
+        <p:txBody>
+          <a:bodyPr xmlns:a="http://schemas.openxmlformats.org/drawingml/2006/main"/>
+          <a:lstStyle xmlns:a="http://schemas.openxmlformats.org/drawingml/2006/main"/>
+          <a:p xmlns:a="http://schemas.openxmlformats.org/drawingml/2006/main">
+            <a:r>
+              <a:t>The source occupied an attractive middle ground: similar CAGR to relative-only, higher CAGR than equal-weight, and lower drawdown than both equal-weight and SPY. It did not dominate SPY because SPY had higher CAGR.</a:t>
+            </a:r>
+          </a:p>
+          <a:p xmlns:a="http://schemas.openxmlformats.org/drawingml/2006/main">
+            <a:r>
+              <a:t/>
+            </a:r>
+          </a:p>
+          <a:p xmlns:a="http://schemas.openxmlformats.org/drawingml/2006/main">
+            <a:r>
+              <a:t>[Sources]</a:t>
+            </a:r>
+          </a:p>
+          <a:p xmlns:a="http://schemas.openxmlformats.org/drawingml/2006/main">
+            <a:r>
+              <a:t>- C:/Users/Franc/OneDrive/Documents/Francis/Peltata Project/Time-Series-Modeling-Gen5/runs/research_workbench/literature_grounded/lit_mom_03_1_dual_momentum_replay_20260902/mom031r_report.md</a:t>
+            </a:r>
+          </a:p>
+          <a:p xmlns:a="http://schemas.openxmlformats.org/drawingml/2006/main">
+            <a:r>
+              <a:t>- C:/Users/Franc/OneDrive/Documents/Francis/Peltata Project/Time-Series-Modeling-Gen5/runs/research_workbench/literature_grounded/lit_mom_03_1_dual_momentum_replay_20260902/mom031r_portfolio_metrics.csv</a:t>
+            </a:r>
+          </a:p>
+          <a:p xmlns:a="http://schemas.openxmlformats.org/drawingml/2006/main">
+            <a:r>
+              <a:t>- C:/Users/Franc/OneDrive/Documents/Francis/Peltata Project/Time-Series-Modeling-Gen5/runs/research_workbench/literature_grounded/lit_mom_03_1_dual_momentum_replay_20260902/visuals/mom031r_risk_return.png</a:t>
+            </a:r>
+          </a:p>
+          <a:p xmlns:a="http://schemas.openxmlformats.org/drawingml/2006/main">
+            <a:r>
+              <a:t>- Codex task conversation, 2026-09-02 (operator approval and replay interpretation)</a:t>
+            </a:r>
+          </a:p>
+          <a:p xmlns:a="http://schemas.openxmlformats.org/drawingml/2006/main">
+            <a:r>
+              <a:t>[/Sources]</a:t>
+            </a:r>
+          </a:p>
+        </p:txBody>
+      </p:sp>
+      <p:sp>
+        <p:nvSpPr>
+          <p:cNvPr id="4" name="Slide Number Placeholder 3"/>
+          <p:cNvSpPr>
+            <a:spLocks xmlns:a="http://schemas.openxmlformats.org/drawingml/2006/main" noGrp="1"/>
+          </p:cNvSpPr>
+          <p:nvPr>
+            <p:ph type="sldNum" idx="5"/>
+          </p:nvPr>
+        </p:nvSpPr>
+        <p:spPr/>
+        <p:txBody>
+          <a:bodyPr xmlns:a="http://schemas.openxmlformats.org/drawingml/2006/main"/>
+          <a:lstStyle xmlns:a="http://schemas.openxmlformats.org/drawingml/2006/main"/>
+          <a:p xmlns:a="http://schemas.openxmlformats.org/drawingml/2006/main"/>
+        </p:txBody>
+      </p:sp>
+    </p:spTree>
+  </p:cSld>
+  <p:clrMapOvr>
+    <a:masterClrMapping xmlns:a="http://schemas.openxmlformats.org/drawingml/2006/main"/>
+  </p:clrMapOvr>
+</p:notes>
+</file>
+
+<file path=ppt/notesSlides/notesSlide23.xml><?xml version="1.0" encoding="utf-8"?>
+<p:notes xmlns:p="http://schemas.openxmlformats.org/presentationml/2006/main">
+  <p:cSld>
+    <p:spTree>
+      <p:nvGrpSpPr>
+        <p:cNvPr id="1" name=""/>
+        <p:cNvGrpSpPr/>
+        <p:nvPr/>
+      </p:nvGrpSpPr>
+      <p:grpSpPr>
+        <a:xfrm xmlns:a="http://schemas.openxmlformats.org/drawingml/2006/main"/>
+      </p:grpSpPr>
+      <p:sp>
+        <p:nvSpPr>
+          <p:cNvPr id="2" name="Slide Image Placeholder 1"/>
+          <p:cNvSpPr>
+            <a:spLocks xmlns:a="http://schemas.openxmlformats.org/drawingml/2006/main" noGrp="1"/>
+          </p:cNvSpPr>
+          <p:nvPr>
+            <p:ph type="sldImg" idx="0"/>
+          </p:nvPr>
+        </p:nvSpPr>
+        <p:spPr/>
+      </p:sp>
+      <p:sp>
+        <p:nvSpPr>
+          <p:cNvPr id="3" name="Notes Placeholder 2"/>
+          <p:cNvSpPr>
+            <a:spLocks xmlns:a="http://schemas.openxmlformats.org/drawingml/2006/main" noGrp="1"/>
+          </p:cNvSpPr>
+          <p:nvPr>
+            <p:ph type="body" idx="1"/>
+          </p:nvPr>
+        </p:nvSpPr>
+        <p:spPr/>
+        <p:txBody>
+          <a:bodyPr xmlns:a="http://schemas.openxmlformats.org/drawingml/2006/main"/>
+          <a:lstStyle xmlns:a="http://schemas.openxmlformats.org/drawingml/2006/main"/>
+          <a:p xmlns:a="http://schemas.openxmlformats.org/drawingml/2006/main">
+            <a:r>
+              <a:t>The source result was not confined to one broad phase: each of 2016-2019, 2020-2022, and 2023-2026 was positive. Calendar-year behavior nevertheless reinforces the attribution result because relative-only follows the source almost exactly.</a:t>
+            </a:r>
+          </a:p>
+          <a:p xmlns:a="http://schemas.openxmlformats.org/drawingml/2006/main">
+            <a:r>
+              <a:t/>
+            </a:r>
+          </a:p>
+          <a:p xmlns:a="http://schemas.openxmlformats.org/drawingml/2006/main">
+            <a:r>
+              <a:t>[Sources]</a:t>
+            </a:r>
+          </a:p>
+          <a:p xmlns:a="http://schemas.openxmlformats.org/drawingml/2006/main">
+            <a:r>
+              <a:t>- C:/Users/Franc/OneDrive/Documents/Francis/Peltata Project/Time-Series-Modeling-Gen5/runs/research_workbench/literature_grounded/lit_mom_03_1_dual_momentum_replay_20260902/mom031r_report.md</a:t>
+            </a:r>
+          </a:p>
+          <a:p xmlns:a="http://schemas.openxmlformats.org/drawingml/2006/main">
+            <a:r>
+              <a:t>- C:/Users/Franc/OneDrive/Documents/Francis/Peltata Project/Time-Series-Modeling-Gen5/runs/research_workbench/literature_grounded/lit_mom_03_1_dual_momentum_replay_20260902/mom031r_calendar_years.csv</a:t>
+            </a:r>
+          </a:p>
+          <a:p xmlns:a="http://schemas.openxmlformats.org/drawingml/2006/main">
+            <a:r>
+              <a:t>- C:/Users/Franc/OneDrive/Documents/Francis/Peltata Project/Time-Series-Modeling-Gen5/runs/research_workbench/literature_grounded/lit_mom_03_1_dual_momentum_replay_20260902/mom031r_phases.csv</a:t>
+            </a:r>
+          </a:p>
+          <a:p xmlns:a="http://schemas.openxmlformats.org/drawingml/2006/main">
+            <a:r>
+              <a:t>- Codex task conversation, 2026-09-02 (operator approval and replay interpretation)</a:t>
+            </a:r>
+          </a:p>
+          <a:p xmlns:a="http://schemas.openxmlformats.org/drawingml/2006/main">
+            <a:r>
+              <a:t>[/Sources]</a:t>
+            </a:r>
+          </a:p>
+        </p:txBody>
+      </p:sp>
+      <p:sp>
+        <p:nvSpPr>
+          <p:cNvPr id="4" name="Slide Number Placeholder 3"/>
+          <p:cNvSpPr>
+            <a:spLocks xmlns:a="http://schemas.openxmlformats.org/drawingml/2006/main" noGrp="1"/>
+          </p:cNvSpPr>
+          <p:nvPr>
+            <p:ph type="sldNum" idx="5"/>
+          </p:nvPr>
+        </p:nvSpPr>
+        <p:spPr/>
+        <p:txBody>
+          <a:bodyPr xmlns:a="http://schemas.openxmlformats.org/drawingml/2006/main"/>
+          <a:lstStyle xmlns:a="http://schemas.openxmlformats.org/drawingml/2006/main"/>
+          <a:p xmlns:a="http://schemas.openxmlformats.org/drawingml/2006/main"/>
+        </p:txBody>
+      </p:sp>
+    </p:spTree>
+  </p:cSld>
+  <p:clrMapOvr>
+    <a:masterClrMapping xmlns:a="http://schemas.openxmlformats.org/drawingml/2006/main"/>
+  </p:clrMapOvr>
+</p:notes>
+</file>
+
+<file path=ppt/notesSlides/notesSlide24.xml><?xml version="1.0" encoding="utf-8"?>
+<p:notes xmlns:p="http://schemas.openxmlformats.org/presentationml/2006/main">
+  <p:cSld>
+    <p:spTree>
+      <p:nvGrpSpPr>
+        <p:cNvPr id="1" name=""/>
+        <p:cNvGrpSpPr/>
+        <p:nvPr/>
+      </p:nvGrpSpPr>
+      <p:grpSpPr>
+        <a:xfrm xmlns:a="http://schemas.openxmlformats.org/drawingml/2006/main"/>
+      </p:grpSpPr>
+      <p:sp>
+        <p:nvSpPr>
+          <p:cNvPr id="2" name="Slide Image Placeholder 1"/>
+          <p:cNvSpPr>
+            <a:spLocks xmlns:a="http://schemas.openxmlformats.org/drawingml/2006/main" noGrp="1"/>
+          </p:cNvSpPr>
+          <p:nvPr>
+            <p:ph type="sldImg" idx="0"/>
+          </p:nvPr>
+        </p:nvSpPr>
+        <p:spPr/>
+      </p:sp>
+      <p:sp>
+        <p:nvSpPr>
+          <p:cNvPr id="3" name="Notes Placeholder 2"/>
+          <p:cNvSpPr>
+            <a:spLocks xmlns:a="http://schemas.openxmlformats.org/drawingml/2006/main" noGrp="1"/>
+          </p:cNvSpPr>
+          <p:nvPr>
+            <p:ph type="body" idx="1"/>
+          </p:nvPr>
+        </p:nvSpPr>
+        <p:spPr/>
+        <p:txBody>
+          <a:bodyPr xmlns:a="http://schemas.openxmlformats.org/drawingml/2006/main"/>
+          <a:lstStyle xmlns:a="http://schemas.openxmlformats.org/drawingml/2006/main"/>
+          <a:p xmlns:a="http://schemas.openxmlformats.org/drawingml/2006/main">
+            <a:r>
+              <a:t>This closes the authorized retrospective replay. The evidence supports preserving the relative-rotation clue, but the result is neither an independent replication of the publisher's selected rule nor authority for forward use.</a:t>
+            </a:r>
+          </a:p>
+          <a:p xmlns:a="http://schemas.openxmlformats.org/drawingml/2006/main">
+            <a:r>
+              <a:t/>
+            </a:r>
+          </a:p>
+          <a:p xmlns:a="http://schemas.openxmlformats.org/drawingml/2006/main">
+            <a:r>
+              <a:t>[Sources]</a:t>
+            </a:r>
+          </a:p>
+          <a:p xmlns:a="http://schemas.openxmlformats.org/drawingml/2006/main">
+            <a:r>
+              <a:t>- C:/Users/Franc/OneDrive/Documents/Francis/Peltata Project/Time-Series-Modeling-Gen5/runs/research_workbench/literature_grounded/lit_mom_03_1_dual_momentum_replay_20260902/mom031r_report.md</a:t>
+            </a:r>
+          </a:p>
+          <a:p xmlns:a="http://schemas.openxmlformats.org/drawingml/2006/main">
+            <a:r>
+              <a:t>- C:/Users/Franc/OneDrive/Documents/Francis/Peltata Project/Time-Series-Modeling-Gen5/runs/research_workbench/literature_grounded/lit_mom_03_1_dual_momentum_replay_20260902/mom031r_portfolio_metrics.csv</a:t>
+            </a:r>
+          </a:p>
+          <a:p xmlns:a="http://schemas.openxmlformats.org/drawingml/2006/main">
+            <a:r>
+              <a:t>- C:/Users/Franc/OneDrive/Documents/Francis/Peltata Project/Time-Series-Modeling-Gen5/runs/research_workbench/literature_grounded/lit_mom_03_1_dual_momentum_replay_20260902/mom031r_source_control_comparisons.csv</a:t>
+            </a:r>
+          </a:p>
+          <a:p xmlns:a="http://schemas.openxmlformats.org/drawingml/2006/main">
+            <a:r>
+              <a:t>- C:/Users/Franc/OneDrive/Documents/Francis/Peltata Project/Time-Series-Modeling-Gen5/literature_studies/docs/GEN5_LIT_MOM_03_1_DUAL_MOMENTUM_REPLAY_RESULTS.md</a:t>
+            </a:r>
+          </a:p>
+          <a:p xmlns:a="http://schemas.openxmlformats.org/drawingml/2006/main">
+            <a:r>
+              <a:t>- Codex task conversation, 2026-09-02 (operator approval and replay interpretation)</a:t>
+            </a:r>
+          </a:p>
+          <a:p xmlns:a="http://schemas.openxmlformats.org/drawingml/2006/main">
+            <a:r>
+              <a:t>[/Sources]</a:t>
             </a:r>
           </a:p>
         </p:txBody>
@@ -2237,7 +2903,7 @@
   </p:cSld>
   <p:clrMap bg1="lt1" tx1="dk1" bg2="lt2" tx2="dk2" accent1="accent1" accent2="accent2" accent3="accent3" accent4="accent4" accent5="accent5" accent6="accent6" hlink="hlink" folHlink="folHlink"/>
   <p:sldLayoutIdLst>
-    <p:sldLayoutId xmlns:r="http://schemas.openxmlformats.org/officeDocument/2006/relationships" id="2147483649" r:id="R0b1eab2b973f459e"/>
+    <p:sldLayoutId xmlns:r="http://schemas.openxmlformats.org/officeDocument/2006/relationships" id="2147483649" r:id="Ra685f9f8fd8d411f"/>
   </p:sldLayoutIdLst>
   <p:txStyles>
     <p:titleStyle>
@@ -3267,7 +3933,7 @@
                 <a:ea typeface="Arial"/>
                 <a:cs typeface="Arial"/>
               </a:rPr>
-              <a:t>Hypothesis and mechanics only</a:t>
+              <a:t>Retrospective replay only</a:t>
             </a:r>
           </a:p>
           <a:p xmlns:a="http://schemas.openxmlformats.org/drawingml/2006/main">
@@ -3348,7 +4014,7 @@
                 <a:ea typeface="Arial"/>
                 <a:cs typeface="Arial"/>
               </a:rPr>
-              <a:t>Opening study deck · 2 September 2026</a:t>
+              <a:t>Study deck · updated 2 September 2026</a:t>
             </a:r>
           </a:p>
         </p:txBody>
@@ -9687,28 +10353,6 @@
           </a:p>
         </p:txBody>
       </p:sp>
-      <p:pic>
-        <p:nvPicPr>
-          <p:cNvPr id="19" name=""/>
-          <p:cNvPicPr>
-            <a:picLocks xmlns:a="http://schemas.openxmlformats.org/drawingml/2006/main" noChangeAspect="1"/>
-          </p:cNvPicPr>
-          <p:nvPr/>
-        </p:nvPicPr>
-        <p:blipFill>
-          <a:blip xmlns:r="http://schemas.openxmlformats.org/officeDocument/2006/relationships" xmlns:a="http://schemas.openxmlformats.org/drawingml/2006/main" r:embed="Re0b0c88161b3479f"/>
-          <a:stretch xmlns:a="http://schemas.openxmlformats.org/drawingml/2006/main"/>
-        </p:blipFill>
-        <p:spPr>
-          <a:xfrm xmlns:a="http://schemas.openxmlformats.org/drawingml/2006/main">
-            <a:off x="460699" y="1562100"/>
-            <a:ext cx="8222602" cy="4476750"/>
-          </a:xfrm>
-          <a:prstGeom xmlns:a="http://schemas.openxmlformats.org/drawingml/2006/main" prst="rect">
-            <a:avLst/>
-          </a:prstGeom>
-        </p:spPr>
-      </p:pic>
       <p:sp>
         <p:nvSpPr>
           <p:cNvPr id="6" name="">
@@ -10084,6 +10728,28 @@
           </a:p>
         </p:txBody>
       </p:sp>
+      <p:pic>
+        <p:nvPicPr>
+          <p:cNvPr id="26" name=""/>
+          <p:cNvPicPr>
+            <a:picLocks xmlns:a="http://schemas.openxmlformats.org/drawingml/2006/main" noChangeAspect="1"/>
+          </p:cNvPicPr>
+          <p:nvPr/>
+        </p:nvPicPr>
+        <p:blipFill>
+          <a:blip xmlns:r="http://schemas.openxmlformats.org/officeDocument/2006/relationships" xmlns:a="http://schemas.openxmlformats.org/drawingml/2006/main" r:embed="R32eb528c5fd845d2"/>
+          <a:stretch xmlns:a="http://schemas.openxmlformats.org/drawingml/2006/main"/>
+        </p:blipFill>
+        <p:spPr>
+          <a:xfrm xmlns:a="http://schemas.openxmlformats.org/drawingml/2006/main">
+            <a:off x="460699" y="1562100"/>
+            <a:ext cx="8222602" cy="4476750"/>
+          </a:xfrm>
+          <a:prstGeom xmlns:a="http://schemas.openxmlformats.org/drawingml/2006/main" prst="rect">
+            <a:avLst/>
+          </a:prstGeom>
+        </p:spPr>
+      </p:pic>
     </p:spTree>
     <p:extLst>
       <p:ext uri="{BB962C8B-B14F-4D97-AF65-F5344CB8AC3E}">
@@ -10315,28 +10981,6 @@
           </a:p>
         </p:txBody>
       </p:sp>
-      <p:pic>
-        <p:nvPicPr>
-          <p:cNvPr id="22" name=""/>
-          <p:cNvPicPr>
-            <a:picLocks xmlns:a="http://schemas.openxmlformats.org/drawingml/2006/main" noChangeAspect="1"/>
-          </p:cNvPicPr>
-          <p:nvPr/>
-        </p:nvPicPr>
-        <p:blipFill>
-          <a:blip xmlns:r="http://schemas.openxmlformats.org/officeDocument/2006/relationships" xmlns:a="http://schemas.openxmlformats.org/drawingml/2006/main" r:embed="Rb35fa0dd1d5040a2"/>
-          <a:stretch xmlns:a="http://schemas.openxmlformats.org/drawingml/2006/main"/>
-        </p:blipFill>
-        <p:spPr>
-          <a:xfrm xmlns:a="http://schemas.openxmlformats.org/drawingml/2006/main">
-            <a:off x="401022" y="1657350"/>
-            <a:ext cx="7522806" cy="4095750"/>
-          </a:xfrm>
-          <a:prstGeom xmlns:a="http://schemas.openxmlformats.org/drawingml/2006/main" prst="rect">
-            <a:avLst/>
-          </a:prstGeom>
-        </p:spPr>
-      </p:pic>
       <p:sp>
         <p:nvSpPr>
           <p:cNvPr id="6" name="">
@@ -10848,6 +11492,28 @@
           </a:p>
         </p:txBody>
       </p:sp>
+      <p:pic>
+        <p:nvPicPr>
+          <p:cNvPr id="31" name=""/>
+          <p:cNvPicPr>
+            <a:picLocks xmlns:a="http://schemas.openxmlformats.org/drawingml/2006/main" noChangeAspect="1"/>
+          </p:cNvPicPr>
+          <p:nvPr/>
+        </p:nvPicPr>
+        <p:blipFill>
+          <a:blip xmlns:r="http://schemas.openxmlformats.org/officeDocument/2006/relationships" xmlns:a="http://schemas.openxmlformats.org/drawingml/2006/main" r:embed="Rd6c1e1cddc184ce5"/>
+          <a:stretch xmlns:a="http://schemas.openxmlformats.org/drawingml/2006/main"/>
+        </p:blipFill>
+        <p:spPr>
+          <a:xfrm xmlns:a="http://schemas.openxmlformats.org/drawingml/2006/main">
+            <a:off x="401022" y="1657350"/>
+            <a:ext cx="7522806" cy="4095750"/>
+          </a:xfrm>
+          <a:prstGeom xmlns:a="http://schemas.openxmlformats.org/drawingml/2006/main" prst="rect">
+            <a:avLst/>
+          </a:prstGeom>
+        </p:spPr>
+      </p:pic>
     </p:spTree>
     <p:extLst>
       <p:ext uri="{BB962C8B-B14F-4D97-AF65-F5344CB8AC3E}">
@@ -11620,6 +12286,912 @@
 </p:sld>
 </file>
 
+<file path=ppt/slides/slide19.xml><?xml version="1.0" encoding="utf-8"?>
+<p:sld xmlns:p="http://schemas.openxmlformats.org/presentationml/2006/main">
+  <p:cSld>
+    <p:bg>
+      <p:bgPr>
+        <a:solidFill xmlns:a="http://schemas.openxmlformats.org/drawingml/2006/main">
+          <a:srgbClr val="FFFFFF"/>
+        </a:solidFill>
+      </p:bgPr>
+    </p:bg>
+    <p:spTree>
+      <p:nvGrpSpPr>
+        <p:cNvPr id="1" name=""/>
+        <p:cNvGrpSpPr/>
+        <p:nvPr/>
+      </p:nvGrpSpPr>
+      <p:grpSpPr>
+        <a:xfrm xmlns:a="http://schemas.openxmlformats.org/drawingml/2006/main"/>
+      </p:grpSpPr>
+      <p:sp>
+        <p:nvSpPr>
+          <p:cNvPr id="16" name="">
+            <a:extLst xmlns:a="http://schemas.openxmlformats.org/drawingml/2006/main">
+              <a:ext uri="{FF2B5EF4-FFF2-40B4-BE49-F238E27FC236}">
+                <a16:creationId xmlns:a16="http://schemas.microsoft.com/office/drawing/2014/main" id="{0643D917-60C1-49B6-A04E-D85D24522DCE}"/>
+              </a:ext>
+            </a:extLst>
+          </p:cNvPr>
+          <p:cNvSpPr>
+            <a:spLocks xmlns:a="http://schemas.openxmlformats.org/drawingml/2006/main" noGrp="1"/>
+          </p:cNvSpPr>
+          <p:nvPr/>
+        </p:nvSpPr>
+        <p:spPr>
+          <a:xfrm xmlns:a="http://schemas.openxmlformats.org/drawingml/2006/main">
+            <a:off x="400050" y="228600"/>
+            <a:ext cx="2857500" cy="228600"/>
+          </a:xfrm>
+          <a:prstGeom xmlns:a="http://schemas.openxmlformats.org/drawingml/2006/main" prst="rect">
+            <a:avLst/>
+          </a:prstGeom>
+          <a:noFill xmlns:a="http://schemas.openxmlformats.org/drawingml/2006/main"/>
+          <a:ln xmlns:a="http://schemas.openxmlformats.org/drawingml/2006/main" w="0">
+            <a:noFill/>
+            <a:prstDash val="solid"/>
+          </a:ln>
+        </p:spPr>
+        <p:txBody>
+          <a:bodyPr xmlns:a="http://schemas.openxmlformats.org/drawingml/2006/main" anchor="t"/>
+          <a:lstStyle xmlns:a="http://schemas.openxmlformats.org/drawingml/2006/main"/>
+          <a:p xmlns:a="http://schemas.openxmlformats.org/drawingml/2006/main">
+            <a:pPr algn="l">
+              <a:buNone/>
+              <a:defRPr sz="1200" b="1">
+                <a:solidFill>
+                  <a:srgbClr val="3D8DFF"/>
+                </a:solidFill>
+                <a:latin typeface="Arial"/>
+                <a:ea typeface="Arial"/>
+                <a:cs typeface="Arial"/>
+              </a:defRPr>
+            </a:pPr>
+            <a:r>
+              <a:rPr sz="1200" b="1">
+                <a:solidFill>
+                  <a:srgbClr val="3D8DFF"/>
+                </a:solidFill>
+                <a:latin typeface="Arial"/>
+                <a:ea typeface="Arial"/>
+                <a:cs typeface="Arial"/>
+              </a:rPr>
+              <a:t>LIT-MOM-03.1</a:t>
+            </a:r>
+          </a:p>
+        </p:txBody>
+      </p:sp>
+      <p:sp>
+        <p:nvSpPr>
+          <p:cNvPr id="2" name="">
+            <a:extLst xmlns:a="http://schemas.openxmlformats.org/drawingml/2006/main">
+              <a:ext uri="{FF2B5EF4-FFF2-40B4-BE49-F238E27FC236}">
+                <a16:creationId xmlns:a16="http://schemas.microsoft.com/office/drawing/2014/main" id="{3F51F0D8-19C8-434E-90A3-9CD80434373E}"/>
+              </a:ext>
+            </a:extLst>
+          </p:cNvPr>
+          <p:cNvSpPr>
+            <a:spLocks xmlns:a="http://schemas.openxmlformats.org/drawingml/2006/main" noGrp="1"/>
+          </p:cNvSpPr>
+          <p:nvPr/>
+        </p:nvSpPr>
+        <p:spPr>
+          <a:xfrm xmlns:a="http://schemas.openxmlformats.org/drawingml/2006/main">
+            <a:off x="400050" y="476250"/>
+            <a:ext cx="11049000" cy="819150"/>
+          </a:xfrm>
+          <a:prstGeom xmlns:a="http://schemas.openxmlformats.org/drawingml/2006/main" prst="rect">
+            <a:avLst/>
+          </a:prstGeom>
+          <a:noFill xmlns:a="http://schemas.openxmlformats.org/drawingml/2006/main"/>
+          <a:ln xmlns:a="http://schemas.openxmlformats.org/drawingml/2006/main" w="0">
+            <a:noFill/>
+            <a:prstDash val="solid"/>
+          </a:ln>
+        </p:spPr>
+        <p:txBody>
+          <a:bodyPr xmlns:a="http://schemas.openxmlformats.org/drawingml/2006/main" anchor="t"/>
+          <a:lstStyle xmlns:a="http://schemas.openxmlformats.org/drawingml/2006/main"/>
+          <a:p xmlns:a="http://schemas.openxmlformats.org/drawingml/2006/main">
+            <a:pPr algn="l">
+              <a:buNone/>
+              <a:defRPr sz="2700" b="1">
+                <a:solidFill>
+                  <a:srgbClr val="101820"/>
+                </a:solidFill>
+                <a:latin typeface="Arial"/>
+                <a:ea typeface="Arial"/>
+                <a:cs typeface="Arial"/>
+              </a:defRPr>
+            </a:pPr>
+            <a:r>
+              <a:rPr sz="2700" b="1">
+                <a:solidFill>
+                  <a:srgbClr val="101820"/>
+                </a:solidFill>
+                <a:latin typeface="Arial"/>
+                <a:ea typeface="Arial"/>
+                <a:cs typeface="Arial"/>
+              </a:rPr>
+              <a:t>The replay looks attractive—but the dual layer adds almost nothing</a:t>
+            </a:r>
+          </a:p>
+        </p:txBody>
+      </p:sp>
+      <p:sp>
+        <p:nvSpPr>
+          <p:cNvPr id="3" name="">
+            <a:extLst xmlns:a="http://schemas.openxmlformats.org/drawingml/2006/main">
+              <a:ext uri="{FF2B5EF4-FFF2-40B4-BE49-F238E27FC236}">
+                <a16:creationId xmlns:a16="http://schemas.microsoft.com/office/drawing/2014/main" id="{9C82D8E5-4706-4E1C-8A9C-3CB6FFDCDE1D}"/>
+              </a:ext>
+            </a:extLst>
+          </p:cNvPr>
+          <p:cNvSpPr>
+            <a:spLocks xmlns:a="http://schemas.openxmlformats.org/drawingml/2006/main" noGrp="1"/>
+          </p:cNvSpPr>
+          <p:nvPr/>
+        </p:nvSpPr>
+        <p:spPr>
+          <a:xfrm xmlns:a="http://schemas.openxmlformats.org/drawingml/2006/main">
+            <a:off x="400050" y="1428750"/>
+            <a:ext cx="11391900" cy="0"/>
+          </a:xfrm>
+          <a:prstGeom xmlns:a="http://schemas.openxmlformats.org/drawingml/2006/main" prst="line">
+            <a:avLst/>
+          </a:prstGeom>
+          <a:noFill xmlns:a="http://schemas.openxmlformats.org/drawingml/2006/main"/>
+          <a:ln xmlns:a="http://schemas.openxmlformats.org/drawingml/2006/main" w="9525">
+            <a:solidFill>
+              <a:srgbClr val="B8BCC4"/>
+            </a:solidFill>
+            <a:prstDash val="solid"/>
+          </a:ln>
+        </p:spPr>
+      </p:sp>
+      <p:sp>
+        <p:nvSpPr>
+          <p:cNvPr id="4" name="">
+            <a:extLst xmlns:a="http://schemas.openxmlformats.org/drawingml/2006/main">
+              <a:ext uri="{FF2B5EF4-FFF2-40B4-BE49-F238E27FC236}">
+                <a16:creationId xmlns:a16="http://schemas.microsoft.com/office/drawing/2014/main" id="{8452295D-1E22-4BA1-B87C-35FC318DE242}"/>
+              </a:ext>
+            </a:extLst>
+          </p:cNvPr>
+          <p:cNvSpPr>
+            <a:spLocks xmlns:a="http://schemas.openxmlformats.org/drawingml/2006/main" noGrp="1"/>
+          </p:cNvSpPr>
+          <p:nvPr/>
+        </p:nvSpPr>
+        <p:spPr>
+          <a:xfrm xmlns:a="http://schemas.openxmlformats.org/drawingml/2006/main">
+            <a:off x="11010900" y="6324600"/>
+            <a:ext cx="762000" cy="266700"/>
+          </a:xfrm>
+          <a:prstGeom xmlns:a="http://schemas.openxmlformats.org/drawingml/2006/main" prst="rect">
+            <a:avLst/>
+          </a:prstGeom>
+          <a:noFill xmlns:a="http://schemas.openxmlformats.org/drawingml/2006/main"/>
+          <a:ln xmlns:a="http://schemas.openxmlformats.org/drawingml/2006/main" w="0">
+            <a:noFill/>
+            <a:prstDash val="solid"/>
+          </a:ln>
+        </p:spPr>
+        <p:txBody>
+          <a:bodyPr xmlns:a="http://schemas.openxmlformats.org/drawingml/2006/main" anchor="t"/>
+          <a:lstStyle xmlns:a="http://schemas.openxmlformats.org/drawingml/2006/main"/>
+          <a:p xmlns:a="http://schemas.openxmlformats.org/drawingml/2006/main">
+            <a:pPr algn="r">
+              <a:buNone/>
+              <a:defRPr sz="1200" b="0">
+                <a:solidFill>
+                  <a:srgbClr val="52616B"/>
+                </a:solidFill>
+                <a:latin typeface="Arial"/>
+                <a:ea typeface="Arial"/>
+                <a:cs typeface="Arial"/>
+              </a:defRPr>
+            </a:pPr>
+            <a:r>
+              <a:rPr sz="1200" b="0">
+                <a:solidFill>
+                  <a:srgbClr val="52616B"/>
+                </a:solidFill>
+                <a:latin typeface="Arial"/>
+                <a:ea typeface="Arial"/>
+                <a:cs typeface="Arial"/>
+              </a:rPr>
+              <a:t>19</a:t>
+            </a:r>
+          </a:p>
+        </p:txBody>
+      </p:sp>
+      <p:sp>
+        <p:nvSpPr>
+          <p:cNvPr id="5" name="">
+            <a:extLst xmlns:a="http://schemas.openxmlformats.org/drawingml/2006/main">
+              <a:ext uri="{FF2B5EF4-FFF2-40B4-BE49-F238E27FC236}">
+                <a16:creationId xmlns:a16="http://schemas.microsoft.com/office/drawing/2014/main" id="{EA84F263-DCB7-4ECF-AC3C-B71C047C289B}"/>
+              </a:ext>
+            </a:extLst>
+          </p:cNvPr>
+          <p:cNvSpPr>
+            <a:spLocks xmlns:a="http://schemas.openxmlformats.org/drawingml/2006/main" noGrp="1"/>
+          </p:cNvSpPr>
+          <p:nvPr/>
+        </p:nvSpPr>
+        <p:spPr>
+          <a:xfrm xmlns:a="http://schemas.openxmlformats.org/drawingml/2006/main">
+            <a:off x="628650" y="1790700"/>
+            <a:ext cx="4953000" cy="3257550"/>
+          </a:xfrm>
+          <a:prstGeom xmlns:a="http://schemas.openxmlformats.org/drawingml/2006/main" prst="rect">
+            <a:avLst/>
+          </a:prstGeom>
+          <a:solidFill xmlns:a="http://schemas.openxmlformats.org/drawingml/2006/main">
+            <a:srgbClr val="E6F2EC"/>
+          </a:solidFill>
+          <a:ln xmlns:a="http://schemas.openxmlformats.org/drawingml/2006/main" w="9525">
+            <a:solidFill>
+              <a:srgbClr val="2E7D5B"/>
+            </a:solidFill>
+            <a:prstDash val="solid"/>
+          </a:ln>
+        </p:spPr>
+      </p:sp>
+      <p:sp>
+        <p:nvSpPr>
+          <p:cNvPr id="6" name="">
+            <a:extLst xmlns:a="http://schemas.openxmlformats.org/drawingml/2006/main">
+              <a:ext uri="{FF2B5EF4-FFF2-40B4-BE49-F238E27FC236}">
+                <a16:creationId xmlns:a16="http://schemas.microsoft.com/office/drawing/2014/main" id="{2535A567-86A3-447F-ABF8-3D7CC1CFCEE3}"/>
+              </a:ext>
+            </a:extLst>
+          </p:cNvPr>
+          <p:cNvSpPr>
+            <a:spLocks xmlns:a="http://schemas.openxmlformats.org/drawingml/2006/main" noGrp="1"/>
+          </p:cNvSpPr>
+          <p:nvPr/>
+        </p:nvSpPr>
+        <p:spPr>
+          <a:xfrm xmlns:a="http://schemas.openxmlformats.org/drawingml/2006/main">
+            <a:off x="971550" y="2114550"/>
+            <a:ext cx="3238500" cy="247650"/>
+          </a:xfrm>
+          <a:prstGeom xmlns:a="http://schemas.openxmlformats.org/drawingml/2006/main" prst="rect">
+            <a:avLst/>
+          </a:prstGeom>
+          <a:noFill xmlns:a="http://schemas.openxmlformats.org/drawingml/2006/main"/>
+          <a:ln xmlns:a="http://schemas.openxmlformats.org/drawingml/2006/main" w="0">
+            <a:noFill/>
+            <a:prstDash val="solid"/>
+          </a:ln>
+        </p:spPr>
+        <p:txBody>
+          <a:bodyPr xmlns:a="http://schemas.openxmlformats.org/drawingml/2006/main" anchor="t"/>
+          <a:lstStyle xmlns:a="http://schemas.openxmlformats.org/drawingml/2006/main"/>
+          <a:p xmlns:a="http://schemas.openxmlformats.org/drawingml/2006/main">
+            <a:pPr algn="l">
+              <a:buNone/>
+              <a:defRPr sz="1275" b="1">
+                <a:solidFill>
+                  <a:srgbClr val="2E7D5B"/>
+                </a:solidFill>
+                <a:latin typeface="Arial"/>
+                <a:ea typeface="Arial"/>
+                <a:cs typeface="Arial"/>
+              </a:defRPr>
+            </a:pPr>
+            <a:r>
+              <a:rPr sz="1275" b="1">
+                <a:solidFill>
+                  <a:srgbClr val="2E7D5B"/>
+                </a:solidFill>
+                <a:latin typeface="Arial"/>
+                <a:ea typeface="Arial"/>
+                <a:cs typeface="Arial"/>
+              </a:rPr>
+              <a:t>REPLAY · SOURCE RULE</a:t>
+            </a:r>
+          </a:p>
+        </p:txBody>
+      </p:sp>
+      <p:sp>
+        <p:nvSpPr>
+          <p:cNvPr id="7" name="">
+            <a:extLst xmlns:a="http://schemas.openxmlformats.org/drawingml/2006/main">
+              <a:ext uri="{FF2B5EF4-FFF2-40B4-BE49-F238E27FC236}">
+                <a16:creationId xmlns:a16="http://schemas.microsoft.com/office/drawing/2014/main" id="{B0EF5351-B0F9-4A7A-9512-D9DE9A581079}"/>
+              </a:ext>
+            </a:extLst>
+          </p:cNvPr>
+          <p:cNvSpPr>
+            <a:spLocks xmlns:a="http://schemas.openxmlformats.org/drawingml/2006/main" noGrp="1"/>
+          </p:cNvSpPr>
+          <p:nvPr/>
+        </p:nvSpPr>
+        <p:spPr>
+          <a:xfrm xmlns:a="http://schemas.openxmlformats.org/drawingml/2006/main">
+            <a:off x="971550" y="2667000"/>
+            <a:ext cx="1809750" cy="876300"/>
+          </a:xfrm>
+          <a:prstGeom xmlns:a="http://schemas.openxmlformats.org/drawingml/2006/main" prst="rect">
+            <a:avLst/>
+          </a:prstGeom>
+          <a:noFill xmlns:a="http://schemas.openxmlformats.org/drawingml/2006/main"/>
+          <a:ln xmlns:a="http://schemas.openxmlformats.org/drawingml/2006/main" w="0">
+            <a:noFill/>
+            <a:prstDash val="solid"/>
+          </a:ln>
+        </p:spPr>
+        <p:txBody>
+          <a:bodyPr xmlns:a="http://schemas.openxmlformats.org/drawingml/2006/main" anchor="t"/>
+          <a:lstStyle xmlns:a="http://schemas.openxmlformats.org/drawingml/2006/main"/>
+          <a:p xmlns:a="http://schemas.openxmlformats.org/drawingml/2006/main">
+            <a:pPr algn="l">
+              <a:buNone/>
+              <a:defRPr sz="5100" b="1">
+                <a:solidFill>
+                  <a:srgbClr val="2E7D5B"/>
+                </a:solidFill>
+                <a:latin typeface="Arial"/>
+                <a:ea typeface="Arial"/>
+                <a:cs typeface="Arial"/>
+              </a:defRPr>
+            </a:pPr>
+            <a:r>
+              <a:rPr sz="5100" b="1">
+                <a:solidFill>
+                  <a:srgbClr val="2E7D5B"/>
+                </a:solidFill>
+                <a:latin typeface="Arial"/>
+                <a:ea typeface="Arial"/>
+                <a:cs typeface="Arial"/>
+              </a:rPr>
+              <a:t>3.05x</a:t>
+            </a:r>
+          </a:p>
+        </p:txBody>
+      </p:sp>
+      <p:sp>
+        <p:nvSpPr>
+          <p:cNvPr id="8" name="">
+            <a:extLst xmlns:a="http://schemas.openxmlformats.org/drawingml/2006/main">
+              <a:ext uri="{FF2B5EF4-FFF2-40B4-BE49-F238E27FC236}">
+                <a16:creationId xmlns:a16="http://schemas.microsoft.com/office/drawing/2014/main" id="{845D259F-CD58-4A41-8E58-6185E679F682}"/>
+              </a:ext>
+            </a:extLst>
+          </p:cNvPr>
+          <p:cNvSpPr>
+            <a:spLocks xmlns:a="http://schemas.openxmlformats.org/drawingml/2006/main" noGrp="1"/>
+          </p:cNvSpPr>
+          <p:nvPr/>
+        </p:nvSpPr>
+        <p:spPr>
+          <a:xfrm xmlns:a="http://schemas.openxmlformats.org/drawingml/2006/main">
+            <a:off x="2800350" y="2914650"/>
+            <a:ext cx="2324100" cy="457200"/>
+          </a:xfrm>
+          <a:prstGeom xmlns:a="http://schemas.openxmlformats.org/drawingml/2006/main" prst="rect">
+            <a:avLst/>
+          </a:prstGeom>
+          <a:noFill xmlns:a="http://schemas.openxmlformats.org/drawingml/2006/main"/>
+          <a:ln xmlns:a="http://schemas.openxmlformats.org/drawingml/2006/main" w="0">
+            <a:noFill/>
+            <a:prstDash val="solid"/>
+          </a:ln>
+        </p:spPr>
+        <p:txBody>
+          <a:bodyPr xmlns:a="http://schemas.openxmlformats.org/drawingml/2006/main" anchor="t"/>
+          <a:lstStyle xmlns:a="http://schemas.openxmlformats.org/drawingml/2006/main"/>
+          <a:p xmlns:a="http://schemas.openxmlformats.org/drawingml/2006/main">
+            <a:pPr algn="l">
+              <a:buNone/>
+              <a:defRPr sz="2100" b="1">
+                <a:solidFill>
+                  <a:srgbClr val="101820"/>
+                </a:solidFill>
+                <a:latin typeface="Arial"/>
+                <a:ea typeface="Arial"/>
+                <a:cs typeface="Arial"/>
+              </a:defRPr>
+            </a:pPr>
+            <a:r>
+              <a:rPr sz="2100" b="1">
+                <a:solidFill>
+                  <a:srgbClr val="101820"/>
+                </a:solidFill>
+                <a:latin typeface="Arial"/>
+                <a:ea typeface="Arial"/>
+                <a:cs typeface="Arial"/>
+              </a:rPr>
+              <a:t>ending wealth</a:t>
+            </a:r>
+          </a:p>
+        </p:txBody>
+      </p:sp>
+      <p:sp>
+        <p:nvSpPr>
+          <p:cNvPr id="9" name="">
+            <a:extLst xmlns:a="http://schemas.openxmlformats.org/drawingml/2006/main">
+              <a:ext uri="{FF2B5EF4-FFF2-40B4-BE49-F238E27FC236}">
+                <a16:creationId xmlns:a16="http://schemas.microsoft.com/office/drawing/2014/main" id="{2B561A00-F2ED-46FB-9D93-63A3E1AD5803}"/>
+              </a:ext>
+            </a:extLst>
+          </p:cNvPr>
+          <p:cNvSpPr>
+            <a:spLocks xmlns:a="http://schemas.openxmlformats.org/drawingml/2006/main" noGrp="1"/>
+          </p:cNvSpPr>
+          <p:nvPr/>
+        </p:nvSpPr>
+        <p:spPr>
+          <a:xfrm xmlns:a="http://schemas.openxmlformats.org/drawingml/2006/main">
+            <a:off x="971550" y="3810000"/>
+            <a:ext cx="4000500" cy="933450"/>
+          </a:xfrm>
+          <a:prstGeom xmlns:a="http://schemas.openxmlformats.org/drawingml/2006/main" prst="rect">
+            <a:avLst/>
+          </a:prstGeom>
+          <a:noFill xmlns:a="http://schemas.openxmlformats.org/drawingml/2006/main"/>
+          <a:ln xmlns:a="http://schemas.openxmlformats.org/drawingml/2006/main" w="0">
+            <a:noFill/>
+            <a:prstDash val="solid"/>
+          </a:ln>
+        </p:spPr>
+        <p:txBody>
+          <a:bodyPr xmlns:a="http://schemas.openxmlformats.org/drawingml/2006/main" anchor="t"/>
+          <a:lstStyle xmlns:a="http://schemas.openxmlformats.org/drawingml/2006/main"/>
+          <a:p xmlns:a="http://schemas.openxmlformats.org/drawingml/2006/main">
+            <a:pPr algn="l">
+              <a:buNone/>
+              <a:defRPr sz="1800" b="0">
+                <a:solidFill>
+                  <a:srgbClr val="52616B"/>
+                </a:solidFill>
+                <a:latin typeface="Arial"/>
+                <a:ea typeface="Arial"/>
+                <a:cs typeface="Arial"/>
+              </a:defRPr>
+            </a:pPr>
+            <a:r>
+              <a:rPr sz="1800" b="0">
+                <a:solidFill>
+                  <a:srgbClr val="52616B"/>
+                </a:solidFill>
+                <a:latin typeface="Arial"/>
+                <a:ea typeface="Arial"/>
+                <a:cs typeface="Arial"/>
+              </a:rPr>
+              <a:t>12.17% net CAGR</a:t>
+            </a:r>
+          </a:p>
+          <a:p xmlns:a="http://schemas.openxmlformats.org/drawingml/2006/main">
+            <a:pPr algn="l">
+              <a:buNone/>
+              <a:defRPr sz="1800" b="0">
+                <a:solidFill>
+                  <a:srgbClr val="52616B"/>
+                </a:solidFill>
+                <a:latin typeface="Arial"/>
+                <a:ea typeface="Arial"/>
+                <a:cs typeface="Arial"/>
+              </a:defRPr>
+            </a:pPr>
+            <a:r>
+              <a:rPr sz="1800" b="0">
+                <a:solidFill>
+                  <a:srgbClr val="52616B"/>
+                </a:solidFill>
+                <a:latin typeface="Arial"/>
+                <a:ea typeface="Arial"/>
+                <a:cs typeface="Arial"/>
+              </a:rPr>
+              <a:t>-15.45% max drawdown</a:t>
+            </a:r>
+          </a:p>
+          <a:p xmlns:a="http://schemas.openxmlformats.org/drawingml/2006/main">
+            <a:pPr algn="l">
+              <a:buNone/>
+              <a:defRPr sz="1800" b="0">
+                <a:solidFill>
+                  <a:srgbClr val="52616B"/>
+                </a:solidFill>
+                <a:latin typeface="Arial"/>
+                <a:ea typeface="Arial"/>
+                <a:cs typeface="Arial"/>
+              </a:defRPr>
+            </a:pPr>
+            <a:r>
+              <a:rPr sz="1800" b="0">
+                <a:solidFill>
+                  <a:srgbClr val="52616B"/>
+                </a:solidFill>
+                <a:latin typeface="Arial"/>
+                <a:ea typeface="Arial"/>
+                <a:cs typeface="Arial"/>
+              </a:rPr>
+              <a:t>507 causal intervals</a:t>
+            </a:r>
+          </a:p>
+        </p:txBody>
+      </p:sp>
+      <p:sp>
+        <p:nvSpPr>
+          <p:cNvPr id="10" name="">
+            <a:extLst xmlns:a="http://schemas.openxmlformats.org/drawingml/2006/main">
+              <a:ext uri="{FF2B5EF4-FFF2-40B4-BE49-F238E27FC236}">
+                <a16:creationId xmlns:a16="http://schemas.microsoft.com/office/drawing/2014/main" id="{D80FDF2D-786A-4D34-8C53-03F5531FEFAA}"/>
+              </a:ext>
+            </a:extLst>
+          </p:cNvPr>
+          <p:cNvSpPr>
+            <a:spLocks xmlns:a="http://schemas.openxmlformats.org/drawingml/2006/main" noGrp="1"/>
+          </p:cNvSpPr>
+          <p:nvPr/>
+        </p:nvSpPr>
+        <p:spPr>
+          <a:xfrm xmlns:a="http://schemas.openxmlformats.org/drawingml/2006/main">
+            <a:off x="6191250" y="1790700"/>
+            <a:ext cx="4953000" cy="3257550"/>
+          </a:xfrm>
+          <a:prstGeom xmlns:a="http://schemas.openxmlformats.org/drawingml/2006/main" prst="rect">
+            <a:avLst/>
+          </a:prstGeom>
+          <a:solidFill xmlns:a="http://schemas.openxmlformats.org/drawingml/2006/main">
+            <a:srgbClr val="F7E7E2"/>
+          </a:solidFill>
+          <a:ln xmlns:a="http://schemas.openxmlformats.org/drawingml/2006/main" w="9525">
+            <a:solidFill>
+              <a:srgbClr val="C8553D"/>
+            </a:solidFill>
+            <a:prstDash val="solid"/>
+          </a:ln>
+        </p:spPr>
+      </p:sp>
+      <p:sp>
+        <p:nvSpPr>
+          <p:cNvPr id="11" name="">
+            <a:extLst xmlns:a="http://schemas.openxmlformats.org/drawingml/2006/main">
+              <a:ext uri="{FF2B5EF4-FFF2-40B4-BE49-F238E27FC236}">
+                <a16:creationId xmlns:a16="http://schemas.microsoft.com/office/drawing/2014/main" id="{E4150C52-9BF1-4205-AAE7-8463BBDA6FD9}"/>
+              </a:ext>
+            </a:extLst>
+          </p:cNvPr>
+          <p:cNvSpPr>
+            <a:spLocks xmlns:a="http://schemas.openxmlformats.org/drawingml/2006/main" noGrp="1"/>
+          </p:cNvSpPr>
+          <p:nvPr/>
+        </p:nvSpPr>
+        <p:spPr>
+          <a:xfrm xmlns:a="http://schemas.openxmlformats.org/drawingml/2006/main">
+            <a:off x="6534150" y="2114550"/>
+            <a:ext cx="3714750" cy="247650"/>
+          </a:xfrm>
+          <a:prstGeom xmlns:a="http://schemas.openxmlformats.org/drawingml/2006/main" prst="rect">
+            <a:avLst/>
+          </a:prstGeom>
+          <a:noFill xmlns:a="http://schemas.openxmlformats.org/drawingml/2006/main"/>
+          <a:ln xmlns:a="http://schemas.openxmlformats.org/drawingml/2006/main" w="0">
+            <a:noFill/>
+            <a:prstDash val="solid"/>
+          </a:ln>
+        </p:spPr>
+        <p:txBody>
+          <a:bodyPr xmlns:a="http://schemas.openxmlformats.org/drawingml/2006/main" anchor="t"/>
+          <a:lstStyle xmlns:a="http://schemas.openxmlformats.org/drawingml/2006/main"/>
+          <a:p xmlns:a="http://schemas.openxmlformats.org/drawingml/2006/main">
+            <a:pPr algn="l">
+              <a:buNone/>
+              <a:defRPr sz="1275" b="1">
+                <a:solidFill>
+                  <a:srgbClr val="C8553D"/>
+                </a:solidFill>
+                <a:latin typeface="Arial"/>
+                <a:ea typeface="Arial"/>
+                <a:cs typeface="Arial"/>
+              </a:defRPr>
+            </a:pPr>
+            <a:r>
+              <a:rPr sz="1275" b="1">
+                <a:solidFill>
+                  <a:srgbClr val="C8553D"/>
+                </a:solidFill>
+                <a:latin typeface="Arial"/>
+                <a:ea typeface="Arial"/>
+                <a:cs typeface="Arial"/>
+              </a:rPr>
+              <a:t>ATTRIBUTION · DUAL LAYER</a:t>
+            </a:r>
+          </a:p>
+        </p:txBody>
+      </p:sp>
+      <p:sp>
+        <p:nvSpPr>
+          <p:cNvPr id="12" name="">
+            <a:extLst xmlns:a="http://schemas.openxmlformats.org/drawingml/2006/main">
+              <a:ext uri="{FF2B5EF4-FFF2-40B4-BE49-F238E27FC236}">
+                <a16:creationId xmlns:a16="http://schemas.microsoft.com/office/drawing/2014/main" id="{0606DC9E-2BF6-4A3D-8AA4-5B9D11332D44}"/>
+              </a:ext>
+            </a:extLst>
+          </p:cNvPr>
+          <p:cNvSpPr>
+            <a:spLocks xmlns:a="http://schemas.openxmlformats.org/drawingml/2006/main" noGrp="1"/>
+          </p:cNvSpPr>
+          <p:nvPr/>
+        </p:nvSpPr>
+        <p:spPr>
+          <a:xfrm xmlns:a="http://schemas.openxmlformats.org/drawingml/2006/main">
+            <a:off x="6534150" y="2724150"/>
+            <a:ext cx="4000500" cy="704850"/>
+          </a:xfrm>
+          <a:prstGeom xmlns:a="http://schemas.openxmlformats.org/drawingml/2006/main" prst="rect">
+            <a:avLst/>
+          </a:prstGeom>
+          <a:noFill xmlns:a="http://schemas.openxmlformats.org/drawingml/2006/main"/>
+          <a:ln xmlns:a="http://schemas.openxmlformats.org/drawingml/2006/main" w="0">
+            <a:noFill/>
+            <a:prstDash val="solid"/>
+          </a:ln>
+        </p:spPr>
+        <p:txBody>
+          <a:bodyPr xmlns:a="http://schemas.openxmlformats.org/drawingml/2006/main" anchor="t"/>
+          <a:lstStyle xmlns:a="http://schemas.openxmlformats.org/drawingml/2006/main"/>
+          <a:p xmlns:a="http://schemas.openxmlformats.org/drawingml/2006/main">
+            <a:pPr algn="l">
+              <a:buNone/>
+              <a:defRPr sz="4050" b="1">
+                <a:solidFill>
+                  <a:srgbClr val="C8553D"/>
+                </a:solidFill>
+                <a:latin typeface="Arial"/>
+                <a:ea typeface="Arial"/>
+                <a:cs typeface="Arial"/>
+              </a:defRPr>
+            </a:pPr>
+            <a:r>
+              <a:rPr sz="4050" b="1">
+                <a:solidFill>
+                  <a:srgbClr val="C8553D"/>
+                </a:solidFill>
+                <a:latin typeface="Arial"/>
+                <a:ea typeface="Arial"/>
+                <a:cs typeface="Arial"/>
+              </a:rPr>
+              <a:t>≈ 0</a:t>
+            </a:r>
+          </a:p>
+        </p:txBody>
+      </p:sp>
+      <p:sp>
+        <p:nvSpPr>
+          <p:cNvPr id="13" name="">
+            <a:extLst xmlns:a="http://schemas.openxmlformats.org/drawingml/2006/main">
+              <a:ext uri="{FF2B5EF4-FFF2-40B4-BE49-F238E27FC236}">
+                <a16:creationId xmlns:a16="http://schemas.microsoft.com/office/drawing/2014/main" id="{03283D39-FBEA-479D-88E1-46F1F4C330B5}"/>
+              </a:ext>
+            </a:extLst>
+          </p:cNvPr>
+          <p:cNvSpPr>
+            <a:spLocks xmlns:a="http://schemas.openxmlformats.org/drawingml/2006/main" noGrp="1"/>
+          </p:cNvSpPr>
+          <p:nvPr/>
+        </p:nvSpPr>
+        <p:spPr>
+          <a:xfrm xmlns:a="http://schemas.openxmlformats.org/drawingml/2006/main">
+            <a:off x="6534150" y="3429000"/>
+            <a:ext cx="4000500" cy="457200"/>
+          </a:xfrm>
+          <a:prstGeom xmlns:a="http://schemas.openxmlformats.org/drawingml/2006/main" prst="rect">
+            <a:avLst/>
+          </a:prstGeom>
+          <a:noFill xmlns:a="http://schemas.openxmlformats.org/drawingml/2006/main"/>
+          <a:ln xmlns:a="http://schemas.openxmlformats.org/drawingml/2006/main" w="0">
+            <a:noFill/>
+            <a:prstDash val="solid"/>
+          </a:ln>
+        </p:spPr>
+        <p:txBody>
+          <a:bodyPr xmlns:a="http://schemas.openxmlformats.org/drawingml/2006/main" anchor="t"/>
+          <a:lstStyle xmlns:a="http://schemas.openxmlformats.org/drawingml/2006/main"/>
+          <a:p xmlns:a="http://schemas.openxmlformats.org/drawingml/2006/main">
+            <a:pPr algn="l">
+              <a:buNone/>
+              <a:defRPr sz="2175" b="1">
+                <a:solidFill>
+                  <a:srgbClr val="101820"/>
+                </a:solidFill>
+                <a:latin typeface="Arial"/>
+                <a:ea typeface="Arial"/>
+                <a:cs typeface="Arial"/>
+              </a:defRPr>
+            </a:pPr>
+            <a:r>
+              <a:rPr sz="2175" b="1">
+                <a:solidFill>
+                  <a:srgbClr val="101820"/>
+                </a:solidFill>
+                <a:latin typeface="Arial"/>
+                <a:ea typeface="Arial"/>
+                <a:cs typeface="Arial"/>
+              </a:rPr>
+              <a:t>incremental value</a:t>
+            </a:r>
+          </a:p>
+        </p:txBody>
+      </p:sp>
+      <p:sp>
+        <p:nvSpPr>
+          <p:cNvPr id="14" name="">
+            <a:extLst xmlns:a="http://schemas.openxmlformats.org/drawingml/2006/main">
+              <a:ext uri="{FF2B5EF4-FFF2-40B4-BE49-F238E27FC236}">
+                <a16:creationId xmlns:a16="http://schemas.microsoft.com/office/drawing/2014/main" id="{DB7B3C09-EAFE-41D8-880B-D0BE56096F33}"/>
+              </a:ext>
+            </a:extLst>
+          </p:cNvPr>
+          <p:cNvSpPr>
+            <a:spLocks xmlns:a="http://schemas.openxmlformats.org/drawingml/2006/main" noGrp="1"/>
+          </p:cNvSpPr>
+          <p:nvPr/>
+        </p:nvSpPr>
+        <p:spPr>
+          <a:xfrm xmlns:a="http://schemas.openxmlformats.org/drawingml/2006/main">
+            <a:off x="6534150" y="4000500"/>
+            <a:ext cx="4000500" cy="876300"/>
+          </a:xfrm>
+          <a:prstGeom xmlns:a="http://schemas.openxmlformats.org/drawingml/2006/main" prst="rect">
+            <a:avLst/>
+          </a:prstGeom>
+          <a:noFill xmlns:a="http://schemas.openxmlformats.org/drawingml/2006/main"/>
+          <a:ln xmlns:a="http://schemas.openxmlformats.org/drawingml/2006/main" w="0">
+            <a:noFill/>
+            <a:prstDash val="solid"/>
+          </a:ln>
+        </p:spPr>
+        <p:txBody>
+          <a:bodyPr xmlns:a="http://schemas.openxmlformats.org/drawingml/2006/main" anchor="t"/>
+          <a:lstStyle xmlns:a="http://schemas.openxmlformats.org/drawingml/2006/main"/>
+          <a:p xmlns:a="http://schemas.openxmlformats.org/drawingml/2006/main">
+            <a:pPr algn="l">
+              <a:buNone/>
+              <a:defRPr sz="1500" b="0">
+                <a:solidFill>
+                  <a:srgbClr val="52616B"/>
+                </a:solidFill>
+                <a:latin typeface="Arial"/>
+                <a:ea typeface="Arial"/>
+                <a:cs typeface="Arial"/>
+              </a:defRPr>
+            </a:pPr>
+            <a:r>
+              <a:rPr sz="1500" b="0">
+                <a:solidFill>
+                  <a:srgbClr val="52616B"/>
+                </a:solidFill>
+                <a:latin typeface="Arial"/>
+                <a:ea typeface="Arial"/>
+                <a:cs typeface="Arial"/>
+              </a:rPr>
+              <a:t>12.17% vs 12.18% CAGR</a:t>
+            </a:r>
+          </a:p>
+          <a:p xmlns:a="http://schemas.openxmlformats.org/drawingml/2006/main">
+            <a:pPr algn="l">
+              <a:buNone/>
+              <a:defRPr sz="1500" b="0">
+                <a:solidFill>
+                  <a:srgbClr val="52616B"/>
+                </a:solidFill>
+                <a:latin typeface="Arial"/>
+                <a:ea typeface="Arial"/>
+                <a:cs typeface="Arial"/>
+              </a:defRPr>
+            </a:pPr>
+            <a:r>
+              <a:rPr sz="1500" b="0">
+                <a:solidFill>
+                  <a:srgbClr val="52616B"/>
+                </a:solidFill>
+                <a:latin typeface="Arial"/>
+                <a:ea typeface="Arial"/>
+                <a:cs typeface="Arial"/>
+              </a:rPr>
+              <a:t>Same -15.45% max drawdown</a:t>
+            </a:r>
+          </a:p>
+          <a:p xmlns:a="http://schemas.openxmlformats.org/drawingml/2006/main">
+            <a:pPr algn="l">
+              <a:buNone/>
+              <a:defRPr sz="1500" b="0">
+                <a:solidFill>
+                  <a:srgbClr val="52616B"/>
+                </a:solidFill>
+                <a:latin typeface="Arial"/>
+                <a:ea typeface="Arial"/>
+                <a:cs typeface="Arial"/>
+              </a:defRPr>
+            </a:pPr>
+            <a:r>
+              <a:rPr sz="1500" b="0">
+                <a:solidFill>
+                  <a:srgbClr val="52616B"/>
+                </a:solidFill>
+                <a:latin typeface="Arial"/>
+                <a:ea typeface="Arial"/>
+                <a:cs typeface="Arial"/>
+              </a:rPr>
+              <a:t>97.44% average exposure</a:t>
+            </a:r>
+          </a:p>
+        </p:txBody>
+      </p:sp>
+      <p:sp>
+        <p:nvSpPr>
+          <p:cNvPr id="15" name="">
+            <a:extLst xmlns:a="http://schemas.openxmlformats.org/drawingml/2006/main">
+              <a:ext uri="{FF2B5EF4-FFF2-40B4-BE49-F238E27FC236}">
+                <a16:creationId xmlns:a16="http://schemas.microsoft.com/office/drawing/2014/main" id="{0DF58B95-FF34-44E3-BD69-0887709C26B4}"/>
+              </a:ext>
+            </a:extLst>
+          </p:cNvPr>
+          <p:cNvSpPr>
+            <a:spLocks xmlns:a="http://schemas.openxmlformats.org/drawingml/2006/main" noGrp="1"/>
+          </p:cNvSpPr>
+          <p:nvPr/>
+        </p:nvSpPr>
+        <p:spPr>
+          <a:xfrm xmlns:a="http://schemas.openxmlformats.org/drawingml/2006/main">
+            <a:off x="2133600" y="5505450"/>
+            <a:ext cx="7924800" cy="381000"/>
+          </a:xfrm>
+          <a:prstGeom xmlns:a="http://schemas.openxmlformats.org/drawingml/2006/main" prst="rect">
+            <a:avLst/>
+          </a:prstGeom>
+          <a:noFill xmlns:a="http://schemas.openxmlformats.org/drawingml/2006/main"/>
+          <a:ln xmlns:a="http://schemas.openxmlformats.org/drawingml/2006/main" w="0">
+            <a:noFill/>
+            <a:prstDash val="solid"/>
+          </a:ln>
+        </p:spPr>
+        <p:txBody>
+          <a:bodyPr xmlns:a="http://schemas.openxmlformats.org/drawingml/2006/main" anchor="t"/>
+          <a:lstStyle xmlns:a="http://schemas.openxmlformats.org/drawingml/2006/main"/>
+          <a:p xmlns:a="http://schemas.openxmlformats.org/drawingml/2006/main">
+            <a:pPr algn="ctr">
+              <a:buNone/>
+              <a:defRPr sz="2175" b="1">
+                <a:solidFill>
+                  <a:srgbClr val="101820"/>
+                </a:solidFill>
+                <a:latin typeface="Arial"/>
+                <a:ea typeface="Arial"/>
+                <a:cs typeface="Arial"/>
+              </a:defRPr>
+            </a:pPr>
+            <a:r>
+              <a:rPr sz="2175" b="1">
+                <a:solidFill>
+                  <a:srgbClr val="101820"/>
+                </a:solidFill>
+                <a:latin typeface="Arial"/>
+                <a:ea typeface="Arial"/>
+                <a:cs typeface="Arial"/>
+              </a:rPr>
+              <a:t>The attractive shape came from relative selection—not the absolute veto.</a:t>
+            </a:r>
+          </a:p>
+        </p:txBody>
+      </p:sp>
+    </p:spTree>
+    <p:extLst>
+      <p:ext uri="{BB962C8B-B14F-4D97-AF65-F5344CB8AC3E}">
+        <p14:creationId xmlns:p14="http://schemas.microsoft.com/office/powerpoint/2010/main" val="1503881080"/>
+      </p:ext>
+    </p:extLst>
+  </p:cSld>
+</p:sld>
+</file>
+
 <file path=ppt/slides/slide2.xml><?xml version="1.0" encoding="utf-8"?>
 <p:sld xmlns:p="http://schemas.openxmlformats.org/presentationml/2006/main">
   <p:cSld>
@@ -12310,6 +13882,3660 @@
     <p:extLst>
       <p:ext uri="{BB962C8B-B14F-4D97-AF65-F5344CB8AC3E}">
         <p14:creationId xmlns:p14="http://schemas.microsoft.com/office/powerpoint/2010/main" val="1347413341"/>
+      </p:ext>
+    </p:extLst>
+  </p:cSld>
+</p:sld>
+</file>
+
+<file path=ppt/slides/slide20.xml><?xml version="1.0" encoding="utf-8"?>
+<p:sld xmlns:p="http://schemas.openxmlformats.org/presentationml/2006/main">
+  <p:cSld>
+    <p:bg>
+      <p:bgPr>
+        <a:solidFill xmlns:a="http://schemas.openxmlformats.org/drawingml/2006/main">
+          <a:srgbClr val="FFFFFF"/>
+        </a:solidFill>
+      </p:bgPr>
+    </p:bg>
+    <p:spTree>
+      <p:nvGrpSpPr>
+        <p:cNvPr id="1" name=""/>
+        <p:cNvGrpSpPr/>
+        <p:nvPr/>
+      </p:nvGrpSpPr>
+      <p:grpSpPr>
+        <a:xfrm xmlns:a="http://schemas.openxmlformats.org/drawingml/2006/main"/>
+      </p:grpSpPr>
+      <p:sp>
+        <p:nvSpPr>
+          <p:cNvPr id="13" name="">
+            <a:extLst xmlns:a="http://schemas.openxmlformats.org/drawingml/2006/main">
+              <a:ext uri="{FF2B5EF4-FFF2-40B4-BE49-F238E27FC236}">
+                <a16:creationId xmlns:a16="http://schemas.microsoft.com/office/drawing/2014/main" id="{E7AA0F3C-FA14-482C-9911-54A24769116A}"/>
+              </a:ext>
+            </a:extLst>
+          </p:cNvPr>
+          <p:cNvSpPr>
+            <a:spLocks xmlns:a="http://schemas.openxmlformats.org/drawingml/2006/main" noGrp="1"/>
+          </p:cNvSpPr>
+          <p:nvPr/>
+        </p:nvSpPr>
+        <p:spPr>
+          <a:xfrm xmlns:a="http://schemas.openxmlformats.org/drawingml/2006/main">
+            <a:off x="400050" y="228600"/>
+            <a:ext cx="2857500" cy="228600"/>
+          </a:xfrm>
+          <a:prstGeom xmlns:a="http://schemas.openxmlformats.org/drawingml/2006/main" prst="rect">
+            <a:avLst/>
+          </a:prstGeom>
+          <a:noFill xmlns:a="http://schemas.openxmlformats.org/drawingml/2006/main"/>
+          <a:ln xmlns:a="http://schemas.openxmlformats.org/drawingml/2006/main" w="0">
+            <a:noFill/>
+            <a:prstDash val="solid"/>
+          </a:ln>
+        </p:spPr>
+        <p:txBody>
+          <a:bodyPr xmlns:a="http://schemas.openxmlformats.org/drawingml/2006/main" anchor="t"/>
+          <a:lstStyle xmlns:a="http://schemas.openxmlformats.org/drawingml/2006/main"/>
+          <a:p xmlns:a="http://schemas.openxmlformats.org/drawingml/2006/main">
+            <a:pPr algn="l">
+              <a:buNone/>
+              <a:defRPr sz="1200" b="1">
+                <a:solidFill>
+                  <a:srgbClr val="3D8DFF"/>
+                </a:solidFill>
+                <a:latin typeface="Arial"/>
+                <a:ea typeface="Arial"/>
+                <a:cs typeface="Arial"/>
+              </a:defRPr>
+            </a:pPr>
+            <a:r>
+              <a:rPr sz="1200" b="1">
+                <a:solidFill>
+                  <a:srgbClr val="3D8DFF"/>
+                </a:solidFill>
+                <a:latin typeface="Arial"/>
+                <a:ea typeface="Arial"/>
+                <a:cs typeface="Arial"/>
+              </a:rPr>
+              <a:t>LIT-MOM-03.1</a:t>
+            </a:r>
+          </a:p>
+        </p:txBody>
+      </p:sp>
+      <p:sp>
+        <p:nvSpPr>
+          <p:cNvPr id="2" name="">
+            <a:extLst xmlns:a="http://schemas.openxmlformats.org/drawingml/2006/main">
+              <a:ext uri="{FF2B5EF4-FFF2-40B4-BE49-F238E27FC236}">
+                <a16:creationId xmlns:a16="http://schemas.microsoft.com/office/drawing/2014/main" id="{522D8FEC-18D3-4EAC-98CE-20AF9D03A3AC}"/>
+              </a:ext>
+            </a:extLst>
+          </p:cNvPr>
+          <p:cNvSpPr>
+            <a:spLocks xmlns:a="http://schemas.openxmlformats.org/drawingml/2006/main" noGrp="1"/>
+          </p:cNvSpPr>
+          <p:nvPr/>
+        </p:nvSpPr>
+        <p:spPr>
+          <a:xfrm xmlns:a="http://schemas.openxmlformats.org/drawingml/2006/main">
+            <a:off x="400050" y="476250"/>
+            <a:ext cx="11049000" cy="819150"/>
+          </a:xfrm>
+          <a:prstGeom xmlns:a="http://schemas.openxmlformats.org/drawingml/2006/main" prst="rect">
+            <a:avLst/>
+          </a:prstGeom>
+          <a:noFill xmlns:a="http://schemas.openxmlformats.org/drawingml/2006/main"/>
+          <a:ln xmlns:a="http://schemas.openxmlformats.org/drawingml/2006/main" w="0">
+            <a:noFill/>
+            <a:prstDash val="solid"/>
+          </a:ln>
+        </p:spPr>
+        <p:txBody>
+          <a:bodyPr xmlns:a="http://schemas.openxmlformats.org/drawingml/2006/main" anchor="t"/>
+          <a:lstStyle xmlns:a="http://schemas.openxmlformats.org/drawingml/2006/main"/>
+          <a:p xmlns:a="http://schemas.openxmlformats.org/drawingml/2006/main">
+            <a:pPr algn="l">
+              <a:buNone/>
+              <a:defRPr sz="2700" b="1">
+                <a:solidFill>
+                  <a:srgbClr val="101820"/>
+                </a:solidFill>
+                <a:latin typeface="Arial"/>
+                <a:ea typeface="Arial"/>
+                <a:cs typeface="Arial"/>
+              </a:defRPr>
+            </a:pPr>
+            <a:r>
+              <a:rPr sz="2700" b="1">
+                <a:solidFill>
+                  <a:srgbClr val="101820"/>
+                </a:solidFill>
+                <a:latin typeface="Arial"/>
+                <a:ea typeface="Arial"/>
+                <a:cs typeface="Arial"/>
+              </a:rPr>
+              <a:t>SPY earned more; dual momentum surrendered less in drawdowns</a:t>
+            </a:r>
+          </a:p>
+        </p:txBody>
+      </p:sp>
+      <p:sp>
+        <p:nvSpPr>
+          <p:cNvPr id="3" name="">
+            <a:extLst xmlns:a="http://schemas.openxmlformats.org/drawingml/2006/main">
+              <a:ext uri="{FF2B5EF4-FFF2-40B4-BE49-F238E27FC236}">
+                <a16:creationId xmlns:a16="http://schemas.microsoft.com/office/drawing/2014/main" id="{21605544-2473-417D-B48F-9F8DF40D4FAF}"/>
+              </a:ext>
+            </a:extLst>
+          </p:cNvPr>
+          <p:cNvSpPr>
+            <a:spLocks xmlns:a="http://schemas.openxmlformats.org/drawingml/2006/main" noGrp="1"/>
+          </p:cNvSpPr>
+          <p:nvPr/>
+        </p:nvSpPr>
+        <p:spPr>
+          <a:xfrm xmlns:a="http://schemas.openxmlformats.org/drawingml/2006/main">
+            <a:off x="400050" y="1428750"/>
+            <a:ext cx="11391900" cy="0"/>
+          </a:xfrm>
+          <a:prstGeom xmlns:a="http://schemas.openxmlformats.org/drawingml/2006/main" prst="line">
+            <a:avLst/>
+          </a:prstGeom>
+          <a:noFill xmlns:a="http://schemas.openxmlformats.org/drawingml/2006/main"/>
+          <a:ln xmlns:a="http://schemas.openxmlformats.org/drawingml/2006/main" w="9525">
+            <a:solidFill>
+              <a:srgbClr val="B8BCC4"/>
+            </a:solidFill>
+            <a:prstDash val="solid"/>
+          </a:ln>
+        </p:spPr>
+      </p:sp>
+      <p:sp>
+        <p:nvSpPr>
+          <p:cNvPr id="4" name="">
+            <a:extLst xmlns:a="http://schemas.openxmlformats.org/drawingml/2006/main">
+              <a:ext uri="{FF2B5EF4-FFF2-40B4-BE49-F238E27FC236}">
+                <a16:creationId xmlns:a16="http://schemas.microsoft.com/office/drawing/2014/main" id="{7944BF93-B836-4831-89CE-852C703D91AD}"/>
+              </a:ext>
+            </a:extLst>
+          </p:cNvPr>
+          <p:cNvSpPr>
+            <a:spLocks xmlns:a="http://schemas.openxmlformats.org/drawingml/2006/main" noGrp="1"/>
+          </p:cNvSpPr>
+          <p:nvPr/>
+        </p:nvSpPr>
+        <p:spPr>
+          <a:xfrm xmlns:a="http://schemas.openxmlformats.org/drawingml/2006/main">
+            <a:off x="11010900" y="6324600"/>
+            <a:ext cx="762000" cy="266700"/>
+          </a:xfrm>
+          <a:prstGeom xmlns:a="http://schemas.openxmlformats.org/drawingml/2006/main" prst="rect">
+            <a:avLst/>
+          </a:prstGeom>
+          <a:noFill xmlns:a="http://schemas.openxmlformats.org/drawingml/2006/main"/>
+          <a:ln xmlns:a="http://schemas.openxmlformats.org/drawingml/2006/main" w="0">
+            <a:noFill/>
+            <a:prstDash val="solid"/>
+          </a:ln>
+        </p:spPr>
+        <p:txBody>
+          <a:bodyPr xmlns:a="http://schemas.openxmlformats.org/drawingml/2006/main" anchor="t"/>
+          <a:lstStyle xmlns:a="http://schemas.openxmlformats.org/drawingml/2006/main"/>
+          <a:p xmlns:a="http://schemas.openxmlformats.org/drawingml/2006/main">
+            <a:pPr algn="r">
+              <a:buNone/>
+              <a:defRPr sz="1200" b="0">
+                <a:solidFill>
+                  <a:srgbClr val="52616B"/>
+                </a:solidFill>
+                <a:latin typeface="Arial"/>
+                <a:ea typeface="Arial"/>
+                <a:cs typeface="Arial"/>
+              </a:defRPr>
+            </a:pPr>
+            <a:r>
+              <a:rPr sz="1200" b="0">
+                <a:solidFill>
+                  <a:srgbClr val="52616B"/>
+                </a:solidFill>
+                <a:latin typeface="Arial"/>
+                <a:ea typeface="Arial"/>
+                <a:cs typeface="Arial"/>
+              </a:rPr>
+              <a:t>20</a:t>
+            </a:r>
+          </a:p>
+        </p:txBody>
+      </p:sp>
+      <p:sp>
+        <p:nvSpPr>
+          <p:cNvPr id="6" name="">
+            <a:extLst xmlns:a="http://schemas.openxmlformats.org/drawingml/2006/main">
+              <a:ext uri="{FF2B5EF4-FFF2-40B4-BE49-F238E27FC236}">
+                <a16:creationId xmlns:a16="http://schemas.microsoft.com/office/drawing/2014/main" id="{DBF73623-95B1-48A7-A168-959D4ACF9EF6}"/>
+              </a:ext>
+            </a:extLst>
+          </p:cNvPr>
+          <p:cNvSpPr>
+            <a:spLocks xmlns:a="http://schemas.openxmlformats.org/drawingml/2006/main" noGrp="1"/>
+          </p:cNvSpPr>
+          <p:nvPr/>
+        </p:nvSpPr>
+        <p:spPr>
+          <a:xfrm xmlns:a="http://schemas.openxmlformats.org/drawingml/2006/main">
+            <a:off x="8991600" y="1733550"/>
+            <a:ext cx="2724150" cy="3905250"/>
+          </a:xfrm>
+          <a:prstGeom xmlns:a="http://schemas.openxmlformats.org/drawingml/2006/main" prst="rect">
+            <a:avLst/>
+          </a:prstGeom>
+          <a:solidFill xmlns:a="http://schemas.openxmlformats.org/drawingml/2006/main">
+            <a:srgbClr val="EAF5FB"/>
+          </a:solidFill>
+          <a:ln xmlns:a="http://schemas.openxmlformats.org/drawingml/2006/main" w="9525">
+            <a:solidFill>
+              <a:srgbClr val="6DCBF4"/>
+            </a:solidFill>
+            <a:prstDash val="solid"/>
+          </a:ln>
+        </p:spPr>
+      </p:sp>
+      <p:sp>
+        <p:nvSpPr>
+          <p:cNvPr id="7" name="">
+            <a:extLst xmlns:a="http://schemas.openxmlformats.org/drawingml/2006/main">
+              <a:ext uri="{FF2B5EF4-FFF2-40B4-BE49-F238E27FC236}">
+                <a16:creationId xmlns:a16="http://schemas.microsoft.com/office/drawing/2014/main" id="{454D3BC9-AB19-4F57-985E-DDB05A7434C0}"/>
+              </a:ext>
+            </a:extLst>
+          </p:cNvPr>
+          <p:cNvSpPr>
+            <a:spLocks xmlns:a="http://schemas.openxmlformats.org/drawingml/2006/main" noGrp="1"/>
+          </p:cNvSpPr>
+          <p:nvPr/>
+        </p:nvSpPr>
+        <p:spPr>
+          <a:xfrm xmlns:a="http://schemas.openxmlformats.org/drawingml/2006/main">
+            <a:off x="9258300" y="2019300"/>
+            <a:ext cx="2095500" cy="247650"/>
+          </a:xfrm>
+          <a:prstGeom xmlns:a="http://schemas.openxmlformats.org/drawingml/2006/main" prst="rect">
+            <a:avLst/>
+          </a:prstGeom>
+          <a:noFill xmlns:a="http://schemas.openxmlformats.org/drawingml/2006/main"/>
+          <a:ln xmlns:a="http://schemas.openxmlformats.org/drawingml/2006/main" w="0">
+            <a:noFill/>
+            <a:prstDash val="solid"/>
+          </a:ln>
+        </p:spPr>
+        <p:txBody>
+          <a:bodyPr xmlns:a="http://schemas.openxmlformats.org/drawingml/2006/main" anchor="t"/>
+          <a:lstStyle xmlns:a="http://schemas.openxmlformats.org/drawingml/2006/main"/>
+          <a:p xmlns:a="http://schemas.openxmlformats.org/drawingml/2006/main">
+            <a:pPr algn="l">
+              <a:buNone/>
+              <a:defRPr sz="1275" b="1">
+                <a:solidFill>
+                  <a:srgbClr val="3D8DFF"/>
+                </a:solidFill>
+                <a:latin typeface="Arial"/>
+                <a:ea typeface="Arial"/>
+                <a:cs typeface="Arial"/>
+              </a:defRPr>
+            </a:pPr>
+            <a:r>
+              <a:rPr sz="1275" b="1">
+                <a:solidFill>
+                  <a:srgbClr val="3D8DFF"/>
+                </a:solidFill>
+                <a:latin typeface="Arial"/>
+                <a:ea typeface="Arial"/>
+                <a:cs typeface="Arial"/>
+              </a:rPr>
+              <a:t>SOURCE RULE</a:t>
+            </a:r>
+          </a:p>
+        </p:txBody>
+      </p:sp>
+      <p:sp>
+        <p:nvSpPr>
+          <p:cNvPr id="8" name="">
+            <a:extLst xmlns:a="http://schemas.openxmlformats.org/drawingml/2006/main">
+              <a:ext uri="{FF2B5EF4-FFF2-40B4-BE49-F238E27FC236}">
+                <a16:creationId xmlns:a16="http://schemas.microsoft.com/office/drawing/2014/main" id="{50CF5D67-77D5-4062-92DB-E9771F376463}"/>
+              </a:ext>
+            </a:extLst>
+          </p:cNvPr>
+          <p:cNvSpPr>
+            <a:spLocks xmlns:a="http://schemas.openxmlformats.org/drawingml/2006/main" noGrp="1"/>
+          </p:cNvSpPr>
+          <p:nvPr/>
+        </p:nvSpPr>
+        <p:spPr>
+          <a:xfrm xmlns:a="http://schemas.openxmlformats.org/drawingml/2006/main">
+            <a:off x="9258300" y="2571750"/>
+            <a:ext cx="2095500" cy="552450"/>
+          </a:xfrm>
+          <a:prstGeom xmlns:a="http://schemas.openxmlformats.org/drawingml/2006/main" prst="rect">
+            <a:avLst/>
+          </a:prstGeom>
+          <a:noFill xmlns:a="http://schemas.openxmlformats.org/drawingml/2006/main"/>
+          <a:ln xmlns:a="http://schemas.openxmlformats.org/drawingml/2006/main" w="0">
+            <a:noFill/>
+            <a:prstDash val="solid"/>
+          </a:ln>
+        </p:spPr>
+        <p:txBody>
+          <a:bodyPr xmlns:a="http://schemas.openxmlformats.org/drawingml/2006/main" anchor="t"/>
+          <a:lstStyle xmlns:a="http://schemas.openxmlformats.org/drawingml/2006/main"/>
+          <a:p xmlns:a="http://schemas.openxmlformats.org/drawingml/2006/main">
+            <a:pPr algn="l">
+              <a:buNone/>
+              <a:defRPr sz="3000" b="1">
+                <a:solidFill>
+                  <a:srgbClr val="101820"/>
+                </a:solidFill>
+                <a:latin typeface="Arial"/>
+                <a:ea typeface="Arial"/>
+                <a:cs typeface="Arial"/>
+              </a:defRPr>
+            </a:pPr>
+            <a:r>
+              <a:rPr sz="3000" b="1">
+                <a:solidFill>
+                  <a:srgbClr val="101820"/>
+                </a:solidFill>
+                <a:latin typeface="Arial"/>
+                <a:ea typeface="Arial"/>
+                <a:cs typeface="Arial"/>
+              </a:rPr>
+              <a:t>12.17%</a:t>
+            </a:r>
+          </a:p>
+        </p:txBody>
+      </p:sp>
+      <p:sp>
+        <p:nvSpPr>
+          <p:cNvPr id="9" name="">
+            <a:extLst xmlns:a="http://schemas.openxmlformats.org/drawingml/2006/main">
+              <a:ext uri="{FF2B5EF4-FFF2-40B4-BE49-F238E27FC236}">
+                <a16:creationId xmlns:a16="http://schemas.microsoft.com/office/drawing/2014/main" id="{7C0B5D7F-B17A-4AC9-835E-6E44FD9128EC}"/>
+              </a:ext>
+            </a:extLst>
+          </p:cNvPr>
+          <p:cNvSpPr>
+            <a:spLocks xmlns:a="http://schemas.openxmlformats.org/drawingml/2006/main" noGrp="1"/>
+          </p:cNvSpPr>
+          <p:nvPr/>
+        </p:nvSpPr>
+        <p:spPr>
+          <a:xfrm xmlns:a="http://schemas.openxmlformats.org/drawingml/2006/main">
+            <a:off x="9258300" y="3105150"/>
+            <a:ext cx="2095500" cy="400050"/>
+          </a:xfrm>
+          <a:prstGeom xmlns:a="http://schemas.openxmlformats.org/drawingml/2006/main" prst="rect">
+            <a:avLst/>
+          </a:prstGeom>
+          <a:noFill xmlns:a="http://schemas.openxmlformats.org/drawingml/2006/main"/>
+          <a:ln xmlns:a="http://schemas.openxmlformats.org/drawingml/2006/main" w="0">
+            <a:noFill/>
+            <a:prstDash val="solid"/>
+          </a:ln>
+        </p:spPr>
+        <p:txBody>
+          <a:bodyPr xmlns:a="http://schemas.openxmlformats.org/drawingml/2006/main" anchor="t"/>
+          <a:lstStyle xmlns:a="http://schemas.openxmlformats.org/drawingml/2006/main"/>
+          <a:p xmlns:a="http://schemas.openxmlformats.org/drawingml/2006/main">
+            <a:pPr algn="l">
+              <a:buNone/>
+              <a:defRPr sz="1650" b="0">
+                <a:solidFill>
+                  <a:srgbClr val="52616B"/>
+                </a:solidFill>
+                <a:latin typeface="Arial"/>
+                <a:ea typeface="Arial"/>
+                <a:cs typeface="Arial"/>
+              </a:defRPr>
+            </a:pPr>
+            <a:r>
+              <a:rPr sz="1650" b="0">
+                <a:solidFill>
+                  <a:srgbClr val="52616B"/>
+                </a:solidFill>
+                <a:latin typeface="Arial"/>
+                <a:ea typeface="Arial"/>
+                <a:cs typeface="Arial"/>
+              </a:rPr>
+              <a:t>net CAGR</a:t>
+            </a:r>
+          </a:p>
+        </p:txBody>
+      </p:sp>
+      <p:sp>
+        <p:nvSpPr>
+          <p:cNvPr id="10" name="">
+            <a:extLst xmlns:a="http://schemas.openxmlformats.org/drawingml/2006/main">
+              <a:ext uri="{FF2B5EF4-FFF2-40B4-BE49-F238E27FC236}">
+                <a16:creationId xmlns:a16="http://schemas.microsoft.com/office/drawing/2014/main" id="{DE7E78EB-BFD1-417B-B781-C8666F0A80F8}"/>
+              </a:ext>
+            </a:extLst>
+          </p:cNvPr>
+          <p:cNvSpPr>
+            <a:spLocks xmlns:a="http://schemas.openxmlformats.org/drawingml/2006/main" noGrp="1"/>
+          </p:cNvSpPr>
+          <p:nvPr/>
+        </p:nvSpPr>
+        <p:spPr>
+          <a:xfrm xmlns:a="http://schemas.openxmlformats.org/drawingml/2006/main">
+            <a:off x="9258300" y="3790950"/>
+            <a:ext cx="2095500" cy="552450"/>
+          </a:xfrm>
+          <a:prstGeom xmlns:a="http://schemas.openxmlformats.org/drawingml/2006/main" prst="rect">
+            <a:avLst/>
+          </a:prstGeom>
+          <a:noFill xmlns:a="http://schemas.openxmlformats.org/drawingml/2006/main"/>
+          <a:ln xmlns:a="http://schemas.openxmlformats.org/drawingml/2006/main" w="0">
+            <a:noFill/>
+            <a:prstDash val="solid"/>
+          </a:ln>
+        </p:spPr>
+        <p:txBody>
+          <a:bodyPr xmlns:a="http://schemas.openxmlformats.org/drawingml/2006/main" anchor="t"/>
+          <a:lstStyle xmlns:a="http://schemas.openxmlformats.org/drawingml/2006/main"/>
+          <a:p xmlns:a="http://schemas.openxmlformats.org/drawingml/2006/main">
+            <a:pPr algn="l">
+              <a:buNone/>
+              <a:defRPr sz="3000" b="1">
+                <a:solidFill>
+                  <a:srgbClr val="3D8DFF"/>
+                </a:solidFill>
+                <a:latin typeface="Arial"/>
+                <a:ea typeface="Arial"/>
+                <a:cs typeface="Arial"/>
+              </a:defRPr>
+            </a:pPr>
+            <a:r>
+              <a:rPr sz="3000" b="1">
+                <a:solidFill>
+                  <a:srgbClr val="3D8DFF"/>
+                </a:solidFill>
+                <a:latin typeface="Arial"/>
+                <a:ea typeface="Arial"/>
+                <a:cs typeface="Arial"/>
+              </a:rPr>
+              <a:t>-15.45%</a:t>
+            </a:r>
+          </a:p>
+        </p:txBody>
+      </p:sp>
+      <p:sp>
+        <p:nvSpPr>
+          <p:cNvPr id="11" name="">
+            <a:extLst xmlns:a="http://schemas.openxmlformats.org/drawingml/2006/main">
+              <a:ext uri="{FF2B5EF4-FFF2-40B4-BE49-F238E27FC236}">
+                <a16:creationId xmlns:a16="http://schemas.microsoft.com/office/drawing/2014/main" id="{5DFE562A-9915-489A-BC82-2F762B044604}"/>
+              </a:ext>
+            </a:extLst>
+          </p:cNvPr>
+          <p:cNvSpPr>
+            <a:spLocks xmlns:a="http://schemas.openxmlformats.org/drawingml/2006/main" noGrp="1"/>
+          </p:cNvSpPr>
+          <p:nvPr/>
+        </p:nvSpPr>
+        <p:spPr>
+          <a:xfrm xmlns:a="http://schemas.openxmlformats.org/drawingml/2006/main">
+            <a:off x="9258300" y="4324350"/>
+            <a:ext cx="2095500" cy="400050"/>
+          </a:xfrm>
+          <a:prstGeom xmlns:a="http://schemas.openxmlformats.org/drawingml/2006/main" prst="rect">
+            <a:avLst/>
+          </a:prstGeom>
+          <a:noFill xmlns:a="http://schemas.openxmlformats.org/drawingml/2006/main"/>
+          <a:ln xmlns:a="http://schemas.openxmlformats.org/drawingml/2006/main" w="0">
+            <a:noFill/>
+            <a:prstDash val="solid"/>
+          </a:ln>
+        </p:spPr>
+        <p:txBody>
+          <a:bodyPr xmlns:a="http://schemas.openxmlformats.org/drawingml/2006/main" anchor="t"/>
+          <a:lstStyle xmlns:a="http://schemas.openxmlformats.org/drawingml/2006/main"/>
+          <a:p xmlns:a="http://schemas.openxmlformats.org/drawingml/2006/main">
+            <a:pPr algn="l">
+              <a:buNone/>
+              <a:defRPr sz="1650" b="0">
+                <a:solidFill>
+                  <a:srgbClr val="52616B"/>
+                </a:solidFill>
+                <a:latin typeface="Arial"/>
+                <a:ea typeface="Arial"/>
+                <a:cs typeface="Arial"/>
+              </a:defRPr>
+            </a:pPr>
+            <a:r>
+              <a:rPr sz="1650" b="0">
+                <a:solidFill>
+                  <a:srgbClr val="52616B"/>
+                </a:solidFill>
+                <a:latin typeface="Arial"/>
+                <a:ea typeface="Arial"/>
+                <a:cs typeface="Arial"/>
+              </a:rPr>
+              <a:t>maximum drawdown</a:t>
+            </a:r>
+          </a:p>
+        </p:txBody>
+      </p:sp>
+      <p:sp>
+        <p:nvSpPr>
+          <p:cNvPr id="12" name="">
+            <a:extLst xmlns:a="http://schemas.openxmlformats.org/drawingml/2006/main">
+              <a:ext uri="{FF2B5EF4-FFF2-40B4-BE49-F238E27FC236}">
+                <a16:creationId xmlns:a16="http://schemas.microsoft.com/office/drawing/2014/main" id="{9A127473-A846-4BDC-AD98-EA1A2A6F11AD}"/>
+              </a:ext>
+            </a:extLst>
+          </p:cNvPr>
+          <p:cNvSpPr>
+            <a:spLocks xmlns:a="http://schemas.openxmlformats.org/drawingml/2006/main" noGrp="1"/>
+          </p:cNvSpPr>
+          <p:nvPr/>
+        </p:nvSpPr>
+        <p:spPr>
+          <a:xfrm xmlns:a="http://schemas.openxmlformats.org/drawingml/2006/main">
+            <a:off x="9258300" y="4972050"/>
+            <a:ext cx="2095500" cy="381000"/>
+          </a:xfrm>
+          <a:prstGeom xmlns:a="http://schemas.openxmlformats.org/drawingml/2006/main" prst="rect">
+            <a:avLst/>
+          </a:prstGeom>
+          <a:noFill xmlns:a="http://schemas.openxmlformats.org/drawingml/2006/main"/>
+          <a:ln xmlns:a="http://schemas.openxmlformats.org/drawingml/2006/main" w="0">
+            <a:noFill/>
+            <a:prstDash val="solid"/>
+          </a:ln>
+        </p:spPr>
+        <p:txBody>
+          <a:bodyPr xmlns:a="http://schemas.openxmlformats.org/drawingml/2006/main" anchor="t"/>
+          <a:lstStyle xmlns:a="http://schemas.openxmlformats.org/drawingml/2006/main"/>
+          <a:p xmlns:a="http://schemas.openxmlformats.org/drawingml/2006/main">
+            <a:pPr algn="l">
+              <a:buNone/>
+              <a:defRPr sz="1950" b="1">
+                <a:solidFill>
+                  <a:srgbClr val="101820"/>
+                </a:solidFill>
+                <a:latin typeface="Arial"/>
+                <a:ea typeface="Arial"/>
+                <a:cs typeface="Arial"/>
+              </a:defRPr>
+            </a:pPr>
+            <a:r>
+              <a:rPr sz="1950" b="1">
+                <a:solidFill>
+                  <a:srgbClr val="101820"/>
+                </a:solidFill>
+                <a:latin typeface="Arial"/>
+                <a:ea typeface="Arial"/>
+                <a:cs typeface="Arial"/>
+              </a:rPr>
+              <a:t>3.05× ending wealth</a:t>
+            </a:r>
+          </a:p>
+        </p:txBody>
+      </p:sp>
+      <p:pic>
+        <p:nvPicPr>
+          <p:cNvPr id="26" name=""/>
+          <p:cNvPicPr>
+            <a:picLocks xmlns:a="http://schemas.openxmlformats.org/drawingml/2006/main" noChangeAspect="1"/>
+          </p:cNvPicPr>
+          <p:nvPr/>
+        </p:nvPicPr>
+        <p:blipFill>
+          <a:blip xmlns:r="http://schemas.openxmlformats.org/officeDocument/2006/relationships" xmlns:a="http://schemas.openxmlformats.org/drawingml/2006/main" r:embed="Rb5b3a08ed9974db7"/>
+          <a:stretch xmlns:a="http://schemas.openxmlformats.org/drawingml/2006/main"/>
+        </p:blipFill>
+        <p:spPr>
+          <a:xfrm xmlns:a="http://schemas.openxmlformats.org/drawingml/2006/main">
+            <a:off x="460699" y="1562100"/>
+            <a:ext cx="8222602" cy="4476750"/>
+          </a:xfrm>
+          <a:prstGeom xmlns:a="http://schemas.openxmlformats.org/drawingml/2006/main" prst="rect">
+            <a:avLst/>
+          </a:prstGeom>
+        </p:spPr>
+      </p:pic>
+    </p:spTree>
+    <p:extLst>
+      <p:ext uri="{BB962C8B-B14F-4D97-AF65-F5344CB8AC3E}">
+        <p14:creationId xmlns:p14="http://schemas.microsoft.com/office/powerpoint/2010/main" val="1063912481"/>
+      </p:ext>
+    </p:extLst>
+  </p:cSld>
+</p:sld>
+</file>
+
+<file path=ppt/slides/slide21.xml><?xml version="1.0" encoding="utf-8"?>
+<p:sld xmlns:p="http://schemas.openxmlformats.org/presentationml/2006/main">
+  <p:cSld>
+    <p:bg>
+      <p:bgPr>
+        <a:solidFill xmlns:a="http://schemas.openxmlformats.org/drawingml/2006/main">
+          <a:srgbClr val="FFFFFF"/>
+        </a:solidFill>
+      </p:bgPr>
+    </p:bg>
+    <p:spTree>
+      <p:nvGrpSpPr>
+        <p:cNvPr id="1" name=""/>
+        <p:cNvGrpSpPr/>
+        <p:nvPr/>
+      </p:nvGrpSpPr>
+      <p:grpSpPr>
+        <a:xfrm xmlns:a="http://schemas.openxmlformats.org/drawingml/2006/main"/>
+      </p:grpSpPr>
+      <p:sp>
+        <p:nvSpPr>
+          <p:cNvPr id="16" name="">
+            <a:extLst xmlns:a="http://schemas.openxmlformats.org/drawingml/2006/main">
+              <a:ext uri="{FF2B5EF4-FFF2-40B4-BE49-F238E27FC236}">
+                <a16:creationId xmlns:a16="http://schemas.microsoft.com/office/drawing/2014/main" id="{D2DB7632-9321-4B0D-B49B-BAF52F1D5F3F}"/>
+              </a:ext>
+            </a:extLst>
+          </p:cNvPr>
+          <p:cNvSpPr>
+            <a:spLocks xmlns:a="http://schemas.openxmlformats.org/drawingml/2006/main" noGrp="1"/>
+          </p:cNvSpPr>
+          <p:nvPr/>
+        </p:nvSpPr>
+        <p:spPr>
+          <a:xfrm xmlns:a="http://schemas.openxmlformats.org/drawingml/2006/main">
+            <a:off x="400050" y="228600"/>
+            <a:ext cx="2857500" cy="228600"/>
+          </a:xfrm>
+          <a:prstGeom xmlns:a="http://schemas.openxmlformats.org/drawingml/2006/main" prst="rect">
+            <a:avLst/>
+          </a:prstGeom>
+          <a:noFill xmlns:a="http://schemas.openxmlformats.org/drawingml/2006/main"/>
+          <a:ln xmlns:a="http://schemas.openxmlformats.org/drawingml/2006/main" w="0">
+            <a:noFill/>
+            <a:prstDash val="solid"/>
+          </a:ln>
+        </p:spPr>
+        <p:txBody>
+          <a:bodyPr xmlns:a="http://schemas.openxmlformats.org/drawingml/2006/main" anchor="t"/>
+          <a:lstStyle xmlns:a="http://schemas.openxmlformats.org/drawingml/2006/main"/>
+          <a:p xmlns:a="http://schemas.openxmlformats.org/drawingml/2006/main">
+            <a:pPr algn="l">
+              <a:buNone/>
+              <a:defRPr sz="1200" b="1">
+                <a:solidFill>
+                  <a:srgbClr val="3D8DFF"/>
+                </a:solidFill>
+                <a:latin typeface="Arial"/>
+                <a:ea typeface="Arial"/>
+                <a:cs typeface="Arial"/>
+              </a:defRPr>
+            </a:pPr>
+            <a:r>
+              <a:rPr sz="1200" b="1">
+                <a:solidFill>
+                  <a:srgbClr val="3D8DFF"/>
+                </a:solidFill>
+                <a:latin typeface="Arial"/>
+                <a:ea typeface="Arial"/>
+                <a:cs typeface="Arial"/>
+              </a:rPr>
+              <a:t>LIT-MOM-03.1</a:t>
+            </a:r>
+          </a:p>
+        </p:txBody>
+      </p:sp>
+      <p:sp>
+        <p:nvSpPr>
+          <p:cNvPr id="2" name="">
+            <a:extLst xmlns:a="http://schemas.openxmlformats.org/drawingml/2006/main">
+              <a:ext uri="{FF2B5EF4-FFF2-40B4-BE49-F238E27FC236}">
+                <a16:creationId xmlns:a16="http://schemas.microsoft.com/office/drawing/2014/main" id="{4F6E0FE8-6C1B-4A13-9D2D-6E11399D4DD1}"/>
+              </a:ext>
+            </a:extLst>
+          </p:cNvPr>
+          <p:cNvSpPr>
+            <a:spLocks xmlns:a="http://schemas.openxmlformats.org/drawingml/2006/main" noGrp="1"/>
+          </p:cNvSpPr>
+          <p:nvPr/>
+        </p:nvSpPr>
+        <p:spPr>
+          <a:xfrm xmlns:a="http://schemas.openxmlformats.org/drawingml/2006/main">
+            <a:off x="400050" y="476250"/>
+            <a:ext cx="11049000" cy="819150"/>
+          </a:xfrm>
+          <a:prstGeom xmlns:a="http://schemas.openxmlformats.org/drawingml/2006/main" prst="rect">
+            <a:avLst/>
+          </a:prstGeom>
+          <a:noFill xmlns:a="http://schemas.openxmlformats.org/drawingml/2006/main"/>
+          <a:ln xmlns:a="http://schemas.openxmlformats.org/drawingml/2006/main" w="0">
+            <a:noFill/>
+            <a:prstDash val="solid"/>
+          </a:ln>
+        </p:spPr>
+        <p:txBody>
+          <a:bodyPr xmlns:a="http://schemas.openxmlformats.org/drawingml/2006/main" anchor="t"/>
+          <a:lstStyle xmlns:a="http://schemas.openxmlformats.org/drawingml/2006/main"/>
+          <a:p xmlns:a="http://schemas.openxmlformats.org/drawingml/2006/main">
+            <a:pPr algn="l">
+              <a:buNone/>
+              <a:defRPr sz="2700" b="1">
+                <a:solidFill>
+                  <a:srgbClr val="101820"/>
+                </a:solidFill>
+                <a:latin typeface="Arial"/>
+                <a:ea typeface="Arial"/>
+                <a:cs typeface="Arial"/>
+              </a:defRPr>
+            </a:pPr>
+            <a:r>
+              <a:rPr sz="2700" b="1">
+                <a:solidFill>
+                  <a:srgbClr val="101820"/>
+                </a:solidFill>
+                <a:latin typeface="Arial"/>
+                <a:ea typeface="Arial"/>
+                <a:cs typeface="Arial"/>
+              </a:rPr>
+              <a:t>The controls identify relative selection as the active ingredient</a:t>
+            </a:r>
+          </a:p>
+        </p:txBody>
+      </p:sp>
+      <p:sp>
+        <p:nvSpPr>
+          <p:cNvPr id="3" name="">
+            <a:extLst xmlns:a="http://schemas.openxmlformats.org/drawingml/2006/main">
+              <a:ext uri="{FF2B5EF4-FFF2-40B4-BE49-F238E27FC236}">
+                <a16:creationId xmlns:a16="http://schemas.microsoft.com/office/drawing/2014/main" id="{0E0B56DB-4E40-4B87-BA34-B14274318353}"/>
+              </a:ext>
+            </a:extLst>
+          </p:cNvPr>
+          <p:cNvSpPr>
+            <a:spLocks xmlns:a="http://schemas.openxmlformats.org/drawingml/2006/main" noGrp="1"/>
+          </p:cNvSpPr>
+          <p:nvPr/>
+        </p:nvSpPr>
+        <p:spPr>
+          <a:xfrm xmlns:a="http://schemas.openxmlformats.org/drawingml/2006/main">
+            <a:off x="400050" y="1428750"/>
+            <a:ext cx="11391900" cy="0"/>
+          </a:xfrm>
+          <a:prstGeom xmlns:a="http://schemas.openxmlformats.org/drawingml/2006/main" prst="line">
+            <a:avLst/>
+          </a:prstGeom>
+          <a:noFill xmlns:a="http://schemas.openxmlformats.org/drawingml/2006/main"/>
+          <a:ln xmlns:a="http://schemas.openxmlformats.org/drawingml/2006/main" w="9525">
+            <a:solidFill>
+              <a:srgbClr val="B8BCC4"/>
+            </a:solidFill>
+            <a:prstDash val="solid"/>
+          </a:ln>
+        </p:spPr>
+      </p:sp>
+      <p:sp>
+        <p:nvSpPr>
+          <p:cNvPr id="4" name="">
+            <a:extLst xmlns:a="http://schemas.openxmlformats.org/drawingml/2006/main">
+              <a:ext uri="{FF2B5EF4-FFF2-40B4-BE49-F238E27FC236}">
+                <a16:creationId xmlns:a16="http://schemas.microsoft.com/office/drawing/2014/main" id="{609465AD-88DC-48BC-BDAC-EBEFA9C8F7B5}"/>
+              </a:ext>
+            </a:extLst>
+          </p:cNvPr>
+          <p:cNvSpPr>
+            <a:spLocks xmlns:a="http://schemas.openxmlformats.org/drawingml/2006/main" noGrp="1"/>
+          </p:cNvSpPr>
+          <p:nvPr/>
+        </p:nvSpPr>
+        <p:spPr>
+          <a:xfrm xmlns:a="http://schemas.openxmlformats.org/drawingml/2006/main">
+            <a:off x="11010900" y="6324600"/>
+            <a:ext cx="762000" cy="266700"/>
+          </a:xfrm>
+          <a:prstGeom xmlns:a="http://schemas.openxmlformats.org/drawingml/2006/main" prst="rect">
+            <a:avLst/>
+          </a:prstGeom>
+          <a:noFill xmlns:a="http://schemas.openxmlformats.org/drawingml/2006/main"/>
+          <a:ln xmlns:a="http://schemas.openxmlformats.org/drawingml/2006/main" w="0">
+            <a:noFill/>
+            <a:prstDash val="solid"/>
+          </a:ln>
+        </p:spPr>
+        <p:txBody>
+          <a:bodyPr xmlns:a="http://schemas.openxmlformats.org/drawingml/2006/main" anchor="t"/>
+          <a:lstStyle xmlns:a="http://schemas.openxmlformats.org/drawingml/2006/main"/>
+          <a:p xmlns:a="http://schemas.openxmlformats.org/drawingml/2006/main">
+            <a:pPr algn="r">
+              <a:buNone/>
+              <a:defRPr sz="1200" b="0">
+                <a:solidFill>
+                  <a:srgbClr val="52616B"/>
+                </a:solidFill>
+                <a:latin typeface="Arial"/>
+                <a:ea typeface="Arial"/>
+                <a:cs typeface="Arial"/>
+              </a:defRPr>
+            </a:pPr>
+            <a:r>
+              <a:rPr sz="1200" b="0">
+                <a:solidFill>
+                  <a:srgbClr val="52616B"/>
+                </a:solidFill>
+                <a:latin typeface="Arial"/>
+                <a:ea typeface="Arial"/>
+                <a:cs typeface="Arial"/>
+              </a:rPr>
+              <a:t>21</a:t>
+            </a:r>
+          </a:p>
+        </p:txBody>
+      </p:sp>
+      <p:sp>
+        <p:nvSpPr>
+          <p:cNvPr id="5" name="">
+            <a:extLst xmlns:a="http://schemas.openxmlformats.org/drawingml/2006/main">
+              <a:ext uri="{FF2B5EF4-FFF2-40B4-BE49-F238E27FC236}">
+                <a16:creationId xmlns:a16="http://schemas.microsoft.com/office/drawing/2014/main" id="{CD393174-0A3C-4E18-A0E5-CFFEAB42B506}"/>
+              </a:ext>
+            </a:extLst>
+          </p:cNvPr>
+          <p:cNvSpPr>
+            <a:spLocks xmlns:a="http://schemas.openxmlformats.org/drawingml/2006/main" noGrp="1"/>
+          </p:cNvSpPr>
+          <p:nvPr/>
+        </p:nvSpPr>
+        <p:spPr>
+          <a:xfrm xmlns:a="http://schemas.openxmlformats.org/drawingml/2006/main">
+            <a:off x="666750" y="1752600"/>
+            <a:ext cx="10858500" cy="1028700"/>
+          </a:xfrm>
+          <a:prstGeom xmlns:a="http://schemas.openxmlformats.org/drawingml/2006/main" prst="rect">
+            <a:avLst/>
+          </a:prstGeom>
+          <a:solidFill xmlns:a="http://schemas.openxmlformats.org/drawingml/2006/main">
+            <a:srgbClr val="E6F2EC"/>
+          </a:solidFill>
+          <a:ln xmlns:a="http://schemas.openxmlformats.org/drawingml/2006/main" w="9525">
+            <a:solidFill>
+              <a:srgbClr val="2E7D5B"/>
+            </a:solidFill>
+            <a:prstDash val="solid"/>
+          </a:ln>
+        </p:spPr>
+      </p:sp>
+      <p:sp>
+        <p:nvSpPr>
+          <p:cNvPr id="6" name="">
+            <a:extLst xmlns:a="http://schemas.openxmlformats.org/drawingml/2006/main">
+              <a:ext uri="{FF2B5EF4-FFF2-40B4-BE49-F238E27FC236}">
+                <a16:creationId xmlns:a16="http://schemas.microsoft.com/office/drawing/2014/main" id="{802C9A30-9CD1-4907-B5B7-2F6BE57885E8}"/>
+              </a:ext>
+            </a:extLst>
+          </p:cNvPr>
+          <p:cNvSpPr>
+            <a:spLocks xmlns:a="http://schemas.openxmlformats.org/drawingml/2006/main" noGrp="1"/>
+          </p:cNvSpPr>
+          <p:nvPr/>
+        </p:nvSpPr>
+        <p:spPr>
+          <a:xfrm xmlns:a="http://schemas.openxmlformats.org/drawingml/2006/main">
+            <a:off x="952500" y="2000250"/>
+            <a:ext cx="2190750" cy="400050"/>
+          </a:xfrm>
+          <a:prstGeom xmlns:a="http://schemas.openxmlformats.org/drawingml/2006/main" prst="rect">
+            <a:avLst/>
+          </a:prstGeom>
+          <a:noFill xmlns:a="http://schemas.openxmlformats.org/drawingml/2006/main"/>
+          <a:ln xmlns:a="http://schemas.openxmlformats.org/drawingml/2006/main" w="0">
+            <a:noFill/>
+            <a:prstDash val="solid"/>
+          </a:ln>
+        </p:spPr>
+        <p:txBody>
+          <a:bodyPr xmlns:a="http://schemas.openxmlformats.org/drawingml/2006/main" anchor="t"/>
+          <a:lstStyle xmlns:a="http://schemas.openxmlformats.org/drawingml/2006/main"/>
+          <a:p xmlns:a="http://schemas.openxmlformats.org/drawingml/2006/main">
+            <a:pPr algn="l">
+              <a:buNone/>
+              <a:defRPr sz="2025" b="1">
+                <a:solidFill>
+                  <a:srgbClr val="2E7D5B"/>
+                </a:solidFill>
+                <a:latin typeface="Arial"/>
+                <a:ea typeface="Arial"/>
+                <a:cs typeface="Arial"/>
+              </a:defRPr>
+            </a:pPr>
+            <a:r>
+              <a:rPr sz="2025" b="1">
+                <a:solidFill>
+                  <a:srgbClr val="2E7D5B"/>
+                </a:solidFill>
+                <a:latin typeface="Arial"/>
+                <a:ea typeface="Arial"/>
+                <a:cs typeface="Arial"/>
+              </a:rPr>
+              <a:t>Relative-only</a:t>
+            </a:r>
+          </a:p>
+        </p:txBody>
+      </p:sp>
+      <p:sp>
+        <p:nvSpPr>
+          <p:cNvPr id="7" name="">
+            <a:extLst xmlns:a="http://schemas.openxmlformats.org/drawingml/2006/main">
+              <a:ext uri="{FF2B5EF4-FFF2-40B4-BE49-F238E27FC236}">
+                <a16:creationId xmlns:a16="http://schemas.microsoft.com/office/drawing/2014/main" id="{4C0B6826-C1CD-407B-B1BD-7E0FDA1C4296}"/>
+              </a:ext>
+            </a:extLst>
+          </p:cNvPr>
+          <p:cNvSpPr>
+            <a:spLocks xmlns:a="http://schemas.openxmlformats.org/drawingml/2006/main" noGrp="1"/>
+          </p:cNvSpPr>
+          <p:nvPr/>
+        </p:nvSpPr>
+        <p:spPr>
+          <a:xfrm xmlns:a="http://schemas.openxmlformats.org/drawingml/2006/main">
+            <a:off x="3276600" y="1943100"/>
+            <a:ext cx="7772400" cy="647700"/>
+          </a:xfrm>
+          <a:prstGeom xmlns:a="http://schemas.openxmlformats.org/drawingml/2006/main" prst="rect">
+            <a:avLst/>
+          </a:prstGeom>
+          <a:noFill xmlns:a="http://schemas.openxmlformats.org/drawingml/2006/main"/>
+          <a:ln xmlns:a="http://schemas.openxmlformats.org/drawingml/2006/main" w="0">
+            <a:noFill/>
+            <a:prstDash val="solid"/>
+          </a:ln>
+        </p:spPr>
+        <p:txBody>
+          <a:bodyPr xmlns:a="http://schemas.openxmlformats.org/drawingml/2006/main" anchor="t"/>
+          <a:lstStyle xmlns:a="http://schemas.openxmlformats.org/drawingml/2006/main"/>
+          <a:p xmlns:a="http://schemas.openxmlformats.org/drawingml/2006/main">
+            <a:pPr algn="l">
+              <a:buNone/>
+              <a:defRPr sz="1725" b="0">
+                <a:solidFill>
+                  <a:srgbClr val="101820"/>
+                </a:solidFill>
+                <a:latin typeface="Arial"/>
+                <a:ea typeface="Arial"/>
+                <a:cs typeface="Arial"/>
+              </a:defRPr>
+            </a:pPr>
+            <a:r>
+              <a:rPr sz="1725" b="0">
+                <a:solidFill>
+                  <a:srgbClr val="101820"/>
+                </a:solidFill>
+                <a:latin typeface="Arial"/>
+                <a:ea typeface="Arial"/>
+                <a:cs typeface="Arial"/>
+              </a:rPr>
+              <a:t>Source and relative-only were virtually identical: 12.17% vs 12.18% CAGR and the same -15.45% drawdown.</a:t>
+            </a:r>
+          </a:p>
+        </p:txBody>
+      </p:sp>
+      <p:sp>
+        <p:nvSpPr>
+          <p:cNvPr id="8" name="">
+            <a:extLst xmlns:a="http://schemas.openxmlformats.org/drawingml/2006/main">
+              <a:ext uri="{FF2B5EF4-FFF2-40B4-BE49-F238E27FC236}">
+                <a16:creationId xmlns:a16="http://schemas.microsoft.com/office/drawing/2014/main" id="{3AFAF26A-2C8D-481A-8C17-B8A9A3967177}"/>
+              </a:ext>
+            </a:extLst>
+          </p:cNvPr>
+          <p:cNvSpPr>
+            <a:spLocks xmlns:a="http://schemas.openxmlformats.org/drawingml/2006/main" noGrp="1"/>
+          </p:cNvSpPr>
+          <p:nvPr/>
+        </p:nvSpPr>
+        <p:spPr>
+          <a:xfrm xmlns:a="http://schemas.openxmlformats.org/drawingml/2006/main">
+            <a:off x="666750" y="3048000"/>
+            <a:ext cx="10858500" cy="1028700"/>
+          </a:xfrm>
+          <a:prstGeom xmlns:a="http://schemas.openxmlformats.org/drawingml/2006/main" prst="rect">
+            <a:avLst/>
+          </a:prstGeom>
+          <a:solidFill xmlns:a="http://schemas.openxmlformats.org/drawingml/2006/main">
+            <a:srgbClr val="F7E7E2"/>
+          </a:solidFill>
+          <a:ln xmlns:a="http://schemas.openxmlformats.org/drawingml/2006/main" w="9525">
+            <a:solidFill>
+              <a:srgbClr val="C8553D"/>
+            </a:solidFill>
+            <a:prstDash val="solid"/>
+          </a:ln>
+        </p:spPr>
+      </p:sp>
+      <p:sp>
+        <p:nvSpPr>
+          <p:cNvPr id="9" name="">
+            <a:extLst xmlns:a="http://schemas.openxmlformats.org/drawingml/2006/main">
+              <a:ext uri="{FF2B5EF4-FFF2-40B4-BE49-F238E27FC236}">
+                <a16:creationId xmlns:a16="http://schemas.microsoft.com/office/drawing/2014/main" id="{DDE8FBE1-8020-4B7A-932E-FC73716C919B}"/>
+              </a:ext>
+            </a:extLst>
+          </p:cNvPr>
+          <p:cNvSpPr>
+            <a:spLocks xmlns:a="http://schemas.openxmlformats.org/drawingml/2006/main" noGrp="1"/>
+          </p:cNvSpPr>
+          <p:nvPr/>
+        </p:nvSpPr>
+        <p:spPr>
+          <a:xfrm xmlns:a="http://schemas.openxmlformats.org/drawingml/2006/main">
+            <a:off x="952500" y="3295650"/>
+            <a:ext cx="2190750" cy="400050"/>
+          </a:xfrm>
+          <a:prstGeom xmlns:a="http://schemas.openxmlformats.org/drawingml/2006/main" prst="rect">
+            <a:avLst/>
+          </a:prstGeom>
+          <a:noFill xmlns:a="http://schemas.openxmlformats.org/drawingml/2006/main"/>
+          <a:ln xmlns:a="http://schemas.openxmlformats.org/drawingml/2006/main" w="0">
+            <a:noFill/>
+            <a:prstDash val="solid"/>
+          </a:ln>
+        </p:spPr>
+        <p:txBody>
+          <a:bodyPr xmlns:a="http://schemas.openxmlformats.org/drawingml/2006/main" anchor="t"/>
+          <a:lstStyle xmlns:a="http://schemas.openxmlformats.org/drawingml/2006/main"/>
+          <a:p xmlns:a="http://schemas.openxmlformats.org/drawingml/2006/main">
+            <a:pPr algn="l">
+              <a:buNone/>
+              <a:defRPr sz="2025" b="1">
+                <a:solidFill>
+                  <a:srgbClr val="C8553D"/>
+                </a:solidFill>
+                <a:latin typeface="Arial"/>
+                <a:ea typeface="Arial"/>
+                <a:cs typeface="Arial"/>
+              </a:defRPr>
+            </a:pPr>
+            <a:r>
+              <a:rPr sz="2025" b="1">
+                <a:solidFill>
+                  <a:srgbClr val="C8553D"/>
+                </a:solidFill>
+                <a:latin typeface="Arial"/>
+                <a:ea typeface="Arial"/>
+                <a:cs typeface="Arial"/>
+              </a:rPr>
+              <a:t>SPY ownership</a:t>
+            </a:r>
+          </a:p>
+        </p:txBody>
+      </p:sp>
+      <p:sp>
+        <p:nvSpPr>
+          <p:cNvPr id="10" name="">
+            <a:extLst xmlns:a="http://schemas.openxmlformats.org/drawingml/2006/main">
+              <a:ext uri="{FF2B5EF4-FFF2-40B4-BE49-F238E27FC236}">
+                <a16:creationId xmlns:a16="http://schemas.microsoft.com/office/drawing/2014/main" id="{E6DA919C-47F4-4345-87E2-1F6DF9D0EC90}"/>
+              </a:ext>
+            </a:extLst>
+          </p:cNvPr>
+          <p:cNvSpPr>
+            <a:spLocks xmlns:a="http://schemas.openxmlformats.org/drawingml/2006/main" noGrp="1"/>
+          </p:cNvSpPr>
+          <p:nvPr/>
+        </p:nvSpPr>
+        <p:spPr>
+          <a:xfrm xmlns:a="http://schemas.openxmlformats.org/drawingml/2006/main">
+            <a:off x="3276600" y="3238500"/>
+            <a:ext cx="7772400" cy="647700"/>
+          </a:xfrm>
+          <a:prstGeom xmlns:a="http://schemas.openxmlformats.org/drawingml/2006/main" prst="rect">
+            <a:avLst/>
+          </a:prstGeom>
+          <a:noFill xmlns:a="http://schemas.openxmlformats.org/drawingml/2006/main"/>
+          <a:ln xmlns:a="http://schemas.openxmlformats.org/drawingml/2006/main" w="0">
+            <a:noFill/>
+            <a:prstDash val="solid"/>
+          </a:ln>
+        </p:spPr>
+        <p:txBody>
+          <a:bodyPr xmlns:a="http://schemas.openxmlformats.org/drawingml/2006/main" anchor="t"/>
+          <a:lstStyle xmlns:a="http://schemas.openxmlformats.org/drawingml/2006/main"/>
+          <a:p xmlns:a="http://schemas.openxmlformats.org/drawingml/2006/main">
+            <a:pPr algn="l">
+              <a:buNone/>
+              <a:defRPr sz="1725" b="0">
+                <a:solidFill>
+                  <a:srgbClr val="101820"/>
+                </a:solidFill>
+                <a:latin typeface="Arial"/>
+                <a:ea typeface="Arial"/>
+                <a:cs typeface="Arial"/>
+              </a:defRPr>
+            </a:pPr>
+            <a:r>
+              <a:rPr sz="1725" b="0">
+                <a:solidFill>
+                  <a:srgbClr val="101820"/>
+                </a:solidFill>
+                <a:latin typeface="Arial"/>
+                <a:ea typeface="Arial"/>
+                <a:cs typeface="Arial"/>
+              </a:rPr>
+              <a:t>SPY compounded faster at 14.36% CAGR, but suffered a much deeper -29.16% maximum drawdown.</a:t>
+            </a:r>
+          </a:p>
+        </p:txBody>
+      </p:sp>
+      <p:sp>
+        <p:nvSpPr>
+          <p:cNvPr id="11" name="">
+            <a:extLst xmlns:a="http://schemas.openxmlformats.org/drawingml/2006/main">
+              <a:ext uri="{FF2B5EF4-FFF2-40B4-BE49-F238E27FC236}">
+                <a16:creationId xmlns:a16="http://schemas.microsoft.com/office/drawing/2014/main" id="{0879E259-AD91-4B41-8E67-E5334F74BAB8}"/>
+              </a:ext>
+            </a:extLst>
+          </p:cNvPr>
+          <p:cNvSpPr>
+            <a:spLocks xmlns:a="http://schemas.openxmlformats.org/drawingml/2006/main" noGrp="1"/>
+          </p:cNvSpPr>
+          <p:nvPr/>
+        </p:nvSpPr>
+        <p:spPr>
+          <a:xfrm xmlns:a="http://schemas.openxmlformats.org/drawingml/2006/main">
+            <a:off x="666750" y="4343400"/>
+            <a:ext cx="10858500" cy="1028700"/>
+          </a:xfrm>
+          <a:prstGeom xmlns:a="http://schemas.openxmlformats.org/drawingml/2006/main" prst="rect">
+            <a:avLst/>
+          </a:prstGeom>
+          <a:solidFill xmlns:a="http://schemas.openxmlformats.org/drawingml/2006/main">
+            <a:srgbClr val="EDEDED"/>
+          </a:solidFill>
+          <a:ln xmlns:a="http://schemas.openxmlformats.org/drawingml/2006/main" w="9525">
+            <a:solidFill>
+              <a:srgbClr val="52616B"/>
+            </a:solidFill>
+            <a:prstDash val="solid"/>
+          </a:ln>
+        </p:spPr>
+      </p:sp>
+      <p:sp>
+        <p:nvSpPr>
+          <p:cNvPr id="12" name="">
+            <a:extLst xmlns:a="http://schemas.openxmlformats.org/drawingml/2006/main">
+              <a:ext uri="{FF2B5EF4-FFF2-40B4-BE49-F238E27FC236}">
+                <a16:creationId xmlns:a16="http://schemas.microsoft.com/office/drawing/2014/main" id="{FE0E70E3-6874-4441-9FD1-1060221212D9}"/>
+              </a:ext>
+            </a:extLst>
+          </p:cNvPr>
+          <p:cNvSpPr>
+            <a:spLocks xmlns:a="http://schemas.openxmlformats.org/drawingml/2006/main" noGrp="1"/>
+          </p:cNvSpPr>
+          <p:nvPr/>
+        </p:nvSpPr>
+        <p:spPr>
+          <a:xfrm xmlns:a="http://schemas.openxmlformats.org/drawingml/2006/main">
+            <a:off x="952500" y="4591050"/>
+            <a:ext cx="2190750" cy="400050"/>
+          </a:xfrm>
+          <a:prstGeom xmlns:a="http://schemas.openxmlformats.org/drawingml/2006/main" prst="rect">
+            <a:avLst/>
+          </a:prstGeom>
+          <a:noFill xmlns:a="http://schemas.openxmlformats.org/drawingml/2006/main"/>
+          <a:ln xmlns:a="http://schemas.openxmlformats.org/drawingml/2006/main" w="0">
+            <a:noFill/>
+            <a:prstDash val="solid"/>
+          </a:ln>
+        </p:spPr>
+        <p:txBody>
+          <a:bodyPr xmlns:a="http://schemas.openxmlformats.org/drawingml/2006/main" anchor="t"/>
+          <a:lstStyle xmlns:a="http://schemas.openxmlformats.org/drawingml/2006/main"/>
+          <a:p xmlns:a="http://schemas.openxmlformats.org/drawingml/2006/main">
+            <a:pPr algn="l">
+              <a:buNone/>
+              <a:defRPr sz="2025" b="1">
+                <a:solidFill>
+                  <a:srgbClr val="52616B"/>
+                </a:solidFill>
+                <a:latin typeface="Arial"/>
+                <a:ea typeface="Arial"/>
+                <a:cs typeface="Arial"/>
+              </a:defRPr>
+            </a:pPr>
+            <a:r>
+              <a:rPr sz="2025" b="1">
+                <a:solidFill>
+                  <a:srgbClr val="52616B"/>
+                </a:solidFill>
+                <a:latin typeface="Arial"/>
+                <a:ea typeface="Arial"/>
+                <a:cs typeface="Arial"/>
+              </a:rPr>
+              <a:t>Equal-weight</a:t>
+            </a:r>
+          </a:p>
+        </p:txBody>
+      </p:sp>
+      <p:sp>
+        <p:nvSpPr>
+          <p:cNvPr id="13" name="">
+            <a:extLst xmlns:a="http://schemas.openxmlformats.org/drawingml/2006/main">
+              <a:ext uri="{FF2B5EF4-FFF2-40B4-BE49-F238E27FC236}">
+                <a16:creationId xmlns:a16="http://schemas.microsoft.com/office/drawing/2014/main" id="{7D88D2F7-BBA9-4B06-83BF-EF6C40360B55}"/>
+              </a:ext>
+            </a:extLst>
+          </p:cNvPr>
+          <p:cNvSpPr>
+            <a:spLocks xmlns:a="http://schemas.openxmlformats.org/drawingml/2006/main" noGrp="1"/>
+          </p:cNvSpPr>
+          <p:nvPr/>
+        </p:nvSpPr>
+        <p:spPr>
+          <a:xfrm xmlns:a="http://schemas.openxmlformats.org/drawingml/2006/main">
+            <a:off x="3276600" y="4533900"/>
+            <a:ext cx="7772400" cy="647700"/>
+          </a:xfrm>
+          <a:prstGeom xmlns:a="http://schemas.openxmlformats.org/drawingml/2006/main" prst="rect">
+            <a:avLst/>
+          </a:prstGeom>
+          <a:noFill xmlns:a="http://schemas.openxmlformats.org/drawingml/2006/main"/>
+          <a:ln xmlns:a="http://schemas.openxmlformats.org/drawingml/2006/main" w="0">
+            <a:noFill/>
+            <a:prstDash val="solid"/>
+          </a:ln>
+        </p:spPr>
+        <p:txBody>
+          <a:bodyPr xmlns:a="http://schemas.openxmlformats.org/drawingml/2006/main" anchor="t"/>
+          <a:lstStyle xmlns:a="http://schemas.openxmlformats.org/drawingml/2006/main"/>
+          <a:p xmlns:a="http://schemas.openxmlformats.org/drawingml/2006/main">
+            <a:pPr algn="l">
+              <a:buNone/>
+              <a:defRPr sz="1725" b="0">
+                <a:solidFill>
+                  <a:srgbClr val="101820"/>
+                </a:solidFill>
+                <a:latin typeface="Arial"/>
+                <a:ea typeface="Arial"/>
+                <a:cs typeface="Arial"/>
+              </a:defRPr>
+            </a:pPr>
+            <a:r>
+              <a:rPr sz="1725" b="0">
+                <a:solidFill>
+                  <a:srgbClr val="101820"/>
+                </a:solidFill>
+                <a:latin typeface="Arial"/>
+                <a:ea typeface="Arial"/>
+                <a:cs typeface="Arial"/>
+              </a:rPr>
+              <a:t>Source led by 2.90 CAGR points and cut drawdown by 5.33 points; the weekly-difference interval still crossed zero.</a:t>
+            </a:r>
+          </a:p>
+        </p:txBody>
+      </p:sp>
+      <p:sp>
+        <p:nvSpPr>
+          <p:cNvPr id="14" name="">
+            <a:extLst xmlns:a="http://schemas.openxmlformats.org/drawingml/2006/main">
+              <a:ext uri="{FF2B5EF4-FFF2-40B4-BE49-F238E27FC236}">
+                <a16:creationId xmlns:a16="http://schemas.microsoft.com/office/drawing/2014/main" id="{F7E3D076-54D1-4B3D-8F4A-D11630B25FFC}"/>
+              </a:ext>
+            </a:extLst>
+          </p:cNvPr>
+          <p:cNvSpPr>
+            <a:spLocks xmlns:a="http://schemas.openxmlformats.org/drawingml/2006/main" noGrp="1"/>
+          </p:cNvSpPr>
+          <p:nvPr/>
+        </p:nvSpPr>
+        <p:spPr>
+          <a:xfrm xmlns:a="http://schemas.openxmlformats.org/drawingml/2006/main">
+            <a:off x="2114550" y="5753100"/>
+            <a:ext cx="7962900" cy="495300"/>
+          </a:xfrm>
+          <a:prstGeom xmlns:a="http://schemas.openxmlformats.org/drawingml/2006/main" prst="rect">
+            <a:avLst/>
+          </a:prstGeom>
+          <a:solidFill xmlns:a="http://schemas.openxmlformats.org/drawingml/2006/main">
+            <a:srgbClr val="EAF5FB"/>
+          </a:solidFill>
+          <a:ln xmlns:a="http://schemas.openxmlformats.org/drawingml/2006/main" w="9525">
+            <a:solidFill>
+              <a:srgbClr val="6DCBF4"/>
+            </a:solidFill>
+            <a:prstDash val="solid"/>
+          </a:ln>
+        </p:spPr>
+      </p:sp>
+      <p:sp>
+        <p:nvSpPr>
+          <p:cNvPr id="15" name="">
+            <a:extLst xmlns:a="http://schemas.openxmlformats.org/drawingml/2006/main">
+              <a:ext uri="{FF2B5EF4-FFF2-40B4-BE49-F238E27FC236}">
+                <a16:creationId xmlns:a16="http://schemas.microsoft.com/office/drawing/2014/main" id="{FF7807EE-5E9A-4AC4-A3F2-FA1CED7A80A8}"/>
+              </a:ext>
+            </a:extLst>
+          </p:cNvPr>
+          <p:cNvSpPr>
+            <a:spLocks xmlns:a="http://schemas.openxmlformats.org/drawingml/2006/main" noGrp="1"/>
+          </p:cNvSpPr>
+          <p:nvPr/>
+        </p:nvSpPr>
+        <p:spPr>
+          <a:xfrm xmlns:a="http://schemas.openxmlformats.org/drawingml/2006/main">
+            <a:off x="2343150" y="5753100"/>
+            <a:ext cx="7505700" cy="457200"/>
+          </a:xfrm>
+          <a:prstGeom xmlns:a="http://schemas.openxmlformats.org/drawingml/2006/main" prst="rect">
+            <a:avLst/>
+          </a:prstGeom>
+          <a:noFill xmlns:a="http://schemas.openxmlformats.org/drawingml/2006/main"/>
+          <a:ln xmlns:a="http://schemas.openxmlformats.org/drawingml/2006/main" w="0">
+            <a:noFill/>
+            <a:prstDash val="solid"/>
+          </a:ln>
+        </p:spPr>
+        <p:txBody>
+          <a:bodyPr xmlns:a="http://schemas.openxmlformats.org/drawingml/2006/main" anchor="t"/>
+          <a:lstStyle xmlns:a="http://schemas.openxmlformats.org/drawingml/2006/main"/>
+          <a:p xmlns:a="http://schemas.openxmlformats.org/drawingml/2006/main">
+            <a:pPr algn="ctr">
+              <a:buNone/>
+              <a:defRPr sz="1350" b="1">
+                <a:solidFill>
+                  <a:srgbClr val="3D8DFF"/>
+                </a:solidFill>
+                <a:latin typeface="Arial"/>
+                <a:ea typeface="Arial"/>
+                <a:cs typeface="Arial"/>
+              </a:defRPr>
+            </a:pPr>
+            <a:r>
+              <a:rPr sz="1350" b="1">
+                <a:solidFill>
+                  <a:srgbClr val="3D8DFF"/>
+                </a:solidFill>
+                <a:latin typeface="Arial"/>
+                <a:ea typeface="Arial"/>
+                <a:cs typeface="Arial"/>
+              </a:rPr>
+              <a:t>The clearest win is risk shaping—not demonstrated ownership outperformance.</a:t>
+            </a:r>
+          </a:p>
+        </p:txBody>
+      </p:sp>
+    </p:spTree>
+    <p:extLst>
+      <p:ext uri="{BB962C8B-B14F-4D97-AF65-F5344CB8AC3E}">
+        <p14:creationId xmlns:p14="http://schemas.microsoft.com/office/powerpoint/2010/main" val="733918031"/>
+      </p:ext>
+    </p:extLst>
+  </p:cSld>
+</p:sld>
+</file>
+
+<file path=ppt/slides/slide22.xml><?xml version="1.0" encoding="utf-8"?>
+<p:sld xmlns:p="http://schemas.openxmlformats.org/presentationml/2006/main">
+  <p:cSld>
+    <p:bg>
+      <p:bgPr>
+        <a:solidFill xmlns:a="http://schemas.openxmlformats.org/drawingml/2006/main">
+          <a:srgbClr val="FFFFFF"/>
+        </a:solidFill>
+      </p:bgPr>
+    </p:bg>
+    <p:spTree>
+      <p:nvGrpSpPr>
+        <p:cNvPr id="1" name=""/>
+        <p:cNvGrpSpPr/>
+        <p:nvPr/>
+      </p:nvGrpSpPr>
+      <p:grpSpPr>
+        <a:xfrm xmlns:a="http://schemas.openxmlformats.org/drawingml/2006/main"/>
+      </p:grpSpPr>
+      <p:sp>
+        <p:nvSpPr>
+          <p:cNvPr id="14" name="">
+            <a:extLst xmlns:a="http://schemas.openxmlformats.org/drawingml/2006/main">
+              <a:ext uri="{FF2B5EF4-FFF2-40B4-BE49-F238E27FC236}">
+                <a16:creationId xmlns:a16="http://schemas.microsoft.com/office/drawing/2014/main" id="{39B7BB28-C5CF-47BA-A918-FA17029EB44A}"/>
+              </a:ext>
+            </a:extLst>
+          </p:cNvPr>
+          <p:cNvSpPr>
+            <a:spLocks xmlns:a="http://schemas.openxmlformats.org/drawingml/2006/main" noGrp="1"/>
+          </p:cNvSpPr>
+          <p:nvPr/>
+        </p:nvSpPr>
+        <p:spPr>
+          <a:xfrm xmlns:a="http://schemas.openxmlformats.org/drawingml/2006/main">
+            <a:off x="400050" y="228600"/>
+            <a:ext cx="2857500" cy="228600"/>
+          </a:xfrm>
+          <a:prstGeom xmlns:a="http://schemas.openxmlformats.org/drawingml/2006/main" prst="rect">
+            <a:avLst/>
+          </a:prstGeom>
+          <a:noFill xmlns:a="http://schemas.openxmlformats.org/drawingml/2006/main"/>
+          <a:ln xmlns:a="http://schemas.openxmlformats.org/drawingml/2006/main" w="0">
+            <a:noFill/>
+            <a:prstDash val="solid"/>
+          </a:ln>
+        </p:spPr>
+        <p:txBody>
+          <a:bodyPr xmlns:a="http://schemas.openxmlformats.org/drawingml/2006/main" anchor="t"/>
+          <a:lstStyle xmlns:a="http://schemas.openxmlformats.org/drawingml/2006/main"/>
+          <a:p xmlns:a="http://schemas.openxmlformats.org/drawingml/2006/main">
+            <a:pPr algn="l">
+              <a:buNone/>
+              <a:defRPr sz="1200" b="1">
+                <a:solidFill>
+                  <a:srgbClr val="3D8DFF"/>
+                </a:solidFill>
+                <a:latin typeface="Arial"/>
+                <a:ea typeface="Arial"/>
+                <a:cs typeface="Arial"/>
+              </a:defRPr>
+            </a:pPr>
+            <a:r>
+              <a:rPr sz="1200" b="1">
+                <a:solidFill>
+                  <a:srgbClr val="3D8DFF"/>
+                </a:solidFill>
+                <a:latin typeface="Arial"/>
+                <a:ea typeface="Arial"/>
+                <a:cs typeface="Arial"/>
+              </a:rPr>
+              <a:t>LIT-MOM-03.1</a:t>
+            </a:r>
+          </a:p>
+        </p:txBody>
+      </p:sp>
+      <p:sp>
+        <p:nvSpPr>
+          <p:cNvPr id="2" name="">
+            <a:extLst xmlns:a="http://schemas.openxmlformats.org/drawingml/2006/main">
+              <a:ext uri="{FF2B5EF4-FFF2-40B4-BE49-F238E27FC236}">
+                <a16:creationId xmlns:a16="http://schemas.microsoft.com/office/drawing/2014/main" id="{8C401559-67C5-4215-B579-93FC871FC00D}"/>
+              </a:ext>
+            </a:extLst>
+          </p:cNvPr>
+          <p:cNvSpPr>
+            <a:spLocks xmlns:a="http://schemas.openxmlformats.org/drawingml/2006/main" noGrp="1"/>
+          </p:cNvSpPr>
+          <p:nvPr/>
+        </p:nvSpPr>
+        <p:spPr>
+          <a:xfrm xmlns:a="http://schemas.openxmlformats.org/drawingml/2006/main">
+            <a:off x="400050" y="476250"/>
+            <a:ext cx="11049000" cy="819150"/>
+          </a:xfrm>
+          <a:prstGeom xmlns:a="http://schemas.openxmlformats.org/drawingml/2006/main" prst="rect">
+            <a:avLst/>
+          </a:prstGeom>
+          <a:noFill xmlns:a="http://schemas.openxmlformats.org/drawingml/2006/main"/>
+          <a:ln xmlns:a="http://schemas.openxmlformats.org/drawingml/2006/main" w="0">
+            <a:noFill/>
+            <a:prstDash val="solid"/>
+          </a:ln>
+        </p:spPr>
+        <p:txBody>
+          <a:bodyPr xmlns:a="http://schemas.openxmlformats.org/drawingml/2006/main" anchor="t"/>
+          <a:lstStyle xmlns:a="http://schemas.openxmlformats.org/drawingml/2006/main"/>
+          <a:p xmlns:a="http://schemas.openxmlformats.org/drawingml/2006/main">
+            <a:pPr algn="l">
+              <a:buNone/>
+              <a:defRPr sz="2700" b="1">
+                <a:solidFill>
+                  <a:srgbClr val="101820"/>
+                </a:solidFill>
+                <a:latin typeface="Arial"/>
+                <a:ea typeface="Arial"/>
+                <a:cs typeface="Arial"/>
+              </a:defRPr>
+            </a:pPr>
+            <a:r>
+              <a:rPr sz="2700" b="1">
+                <a:solidFill>
+                  <a:srgbClr val="101820"/>
+                </a:solidFill>
+                <a:latin typeface="Arial"/>
+                <a:ea typeface="Arial"/>
+                <a:cs typeface="Arial"/>
+              </a:rPr>
+              <a:t>The strategy bought a smoother path—not the highest return</a:t>
+            </a:r>
+          </a:p>
+        </p:txBody>
+      </p:sp>
+      <p:sp>
+        <p:nvSpPr>
+          <p:cNvPr id="3" name="">
+            <a:extLst xmlns:a="http://schemas.openxmlformats.org/drawingml/2006/main">
+              <a:ext uri="{FF2B5EF4-FFF2-40B4-BE49-F238E27FC236}">
+                <a16:creationId xmlns:a16="http://schemas.microsoft.com/office/drawing/2014/main" id="{FE913BAC-F3B9-4338-8958-15CBEBB596BB}"/>
+              </a:ext>
+            </a:extLst>
+          </p:cNvPr>
+          <p:cNvSpPr>
+            <a:spLocks xmlns:a="http://schemas.openxmlformats.org/drawingml/2006/main" noGrp="1"/>
+          </p:cNvSpPr>
+          <p:nvPr/>
+        </p:nvSpPr>
+        <p:spPr>
+          <a:xfrm xmlns:a="http://schemas.openxmlformats.org/drawingml/2006/main">
+            <a:off x="400050" y="1428750"/>
+            <a:ext cx="11391900" cy="0"/>
+          </a:xfrm>
+          <a:prstGeom xmlns:a="http://schemas.openxmlformats.org/drawingml/2006/main" prst="line">
+            <a:avLst/>
+          </a:prstGeom>
+          <a:noFill xmlns:a="http://schemas.openxmlformats.org/drawingml/2006/main"/>
+          <a:ln xmlns:a="http://schemas.openxmlformats.org/drawingml/2006/main" w="9525">
+            <a:solidFill>
+              <a:srgbClr val="B8BCC4"/>
+            </a:solidFill>
+            <a:prstDash val="solid"/>
+          </a:ln>
+        </p:spPr>
+      </p:sp>
+      <p:sp>
+        <p:nvSpPr>
+          <p:cNvPr id="4" name="">
+            <a:extLst xmlns:a="http://schemas.openxmlformats.org/drawingml/2006/main">
+              <a:ext uri="{FF2B5EF4-FFF2-40B4-BE49-F238E27FC236}">
+                <a16:creationId xmlns:a16="http://schemas.microsoft.com/office/drawing/2014/main" id="{80D32FF2-05B5-4DF6-BBF4-B1464DC9B66A}"/>
+              </a:ext>
+            </a:extLst>
+          </p:cNvPr>
+          <p:cNvSpPr>
+            <a:spLocks xmlns:a="http://schemas.openxmlformats.org/drawingml/2006/main" noGrp="1"/>
+          </p:cNvSpPr>
+          <p:nvPr/>
+        </p:nvSpPr>
+        <p:spPr>
+          <a:xfrm xmlns:a="http://schemas.openxmlformats.org/drawingml/2006/main">
+            <a:off x="11372850" y="6324600"/>
+            <a:ext cx="400050" cy="266700"/>
+          </a:xfrm>
+          <a:prstGeom xmlns:a="http://schemas.openxmlformats.org/drawingml/2006/main" prst="rect">
+            <a:avLst/>
+          </a:prstGeom>
+          <a:noFill xmlns:a="http://schemas.openxmlformats.org/drawingml/2006/main"/>
+          <a:ln xmlns:a="http://schemas.openxmlformats.org/drawingml/2006/main" w="0">
+            <a:noFill/>
+            <a:prstDash val="solid"/>
+          </a:ln>
+        </p:spPr>
+        <p:txBody>
+          <a:bodyPr xmlns:a="http://schemas.openxmlformats.org/drawingml/2006/main" anchor="t"/>
+          <a:lstStyle xmlns:a="http://schemas.openxmlformats.org/drawingml/2006/main"/>
+          <a:p xmlns:a="http://schemas.openxmlformats.org/drawingml/2006/main">
+            <a:pPr algn="l">
+              <a:buNone/>
+              <a:defRPr sz="1200" b="0">
+                <a:solidFill>
+                  <a:srgbClr val="52616B"/>
+                </a:solidFill>
+                <a:latin typeface="Arial"/>
+                <a:ea typeface="Arial"/>
+                <a:cs typeface="Arial"/>
+              </a:defRPr>
+            </a:pPr>
+            <a:r>
+              <a:rPr sz="1200" b="0">
+                <a:solidFill>
+                  <a:srgbClr val="52616B"/>
+                </a:solidFill>
+                <a:latin typeface="Arial"/>
+                <a:ea typeface="Arial"/>
+                <a:cs typeface="Arial"/>
+              </a:rPr>
+              <a:t>22</a:t>
+            </a:r>
+          </a:p>
+        </p:txBody>
+      </p:sp>
+      <p:sp>
+        <p:nvSpPr>
+          <p:cNvPr id="6" name="">
+            <a:extLst xmlns:a="http://schemas.openxmlformats.org/drawingml/2006/main">
+              <a:ext uri="{FF2B5EF4-FFF2-40B4-BE49-F238E27FC236}">
+                <a16:creationId xmlns:a16="http://schemas.microsoft.com/office/drawing/2014/main" id="{8B7E846F-BE01-42E8-9EBB-9EA3FC7567F0}"/>
+              </a:ext>
+            </a:extLst>
+          </p:cNvPr>
+          <p:cNvSpPr>
+            <a:spLocks xmlns:a="http://schemas.openxmlformats.org/drawingml/2006/main" noGrp="1"/>
+          </p:cNvSpPr>
+          <p:nvPr/>
+        </p:nvSpPr>
+        <p:spPr>
+          <a:xfrm xmlns:a="http://schemas.openxmlformats.org/drawingml/2006/main">
+            <a:off x="8153400" y="1695450"/>
+            <a:ext cx="3429000" cy="4057650"/>
+          </a:xfrm>
+          <a:prstGeom xmlns:a="http://schemas.openxmlformats.org/drawingml/2006/main" prst="rect">
+            <a:avLst/>
+          </a:prstGeom>
+          <a:solidFill xmlns:a="http://schemas.openxmlformats.org/drawingml/2006/main">
+            <a:srgbClr val="EAF5FB"/>
+          </a:solidFill>
+          <a:ln xmlns:a="http://schemas.openxmlformats.org/drawingml/2006/main" w="9525">
+            <a:solidFill>
+              <a:srgbClr val="6DCBF4"/>
+            </a:solidFill>
+            <a:prstDash val="solid"/>
+          </a:ln>
+        </p:spPr>
+      </p:sp>
+      <p:sp>
+        <p:nvSpPr>
+          <p:cNvPr id="7" name="">
+            <a:extLst xmlns:a="http://schemas.openxmlformats.org/drawingml/2006/main">
+              <a:ext uri="{FF2B5EF4-FFF2-40B4-BE49-F238E27FC236}">
+                <a16:creationId xmlns:a16="http://schemas.microsoft.com/office/drawing/2014/main" id="{7A48CFB1-8F2F-43AD-84B5-5B62F4FCE8D1}"/>
+              </a:ext>
+            </a:extLst>
+          </p:cNvPr>
+          <p:cNvSpPr>
+            <a:spLocks xmlns:a="http://schemas.openxmlformats.org/drawingml/2006/main" noGrp="1"/>
+          </p:cNvSpPr>
+          <p:nvPr/>
+        </p:nvSpPr>
+        <p:spPr>
+          <a:xfrm xmlns:a="http://schemas.openxmlformats.org/drawingml/2006/main">
+            <a:off x="8496300" y="2000250"/>
+            <a:ext cx="2476500" cy="247650"/>
+          </a:xfrm>
+          <a:prstGeom xmlns:a="http://schemas.openxmlformats.org/drawingml/2006/main" prst="rect">
+            <a:avLst/>
+          </a:prstGeom>
+          <a:noFill xmlns:a="http://schemas.openxmlformats.org/drawingml/2006/main"/>
+          <a:ln xmlns:a="http://schemas.openxmlformats.org/drawingml/2006/main" w="0">
+            <a:noFill/>
+            <a:prstDash val="solid"/>
+          </a:ln>
+        </p:spPr>
+        <p:txBody>
+          <a:bodyPr xmlns:a="http://schemas.openxmlformats.org/drawingml/2006/main" anchor="t"/>
+          <a:lstStyle xmlns:a="http://schemas.openxmlformats.org/drawingml/2006/main"/>
+          <a:p xmlns:a="http://schemas.openxmlformats.org/drawingml/2006/main">
+            <a:pPr algn="l">
+              <a:buNone/>
+              <a:defRPr sz="1275" b="1">
+                <a:solidFill>
+                  <a:srgbClr val="3D8DFF"/>
+                </a:solidFill>
+                <a:latin typeface="Arial"/>
+                <a:ea typeface="Arial"/>
+                <a:cs typeface="Arial"/>
+              </a:defRPr>
+            </a:pPr>
+            <a:r>
+              <a:rPr sz="1275" b="1">
+                <a:solidFill>
+                  <a:srgbClr val="3D8DFF"/>
+                </a:solidFill>
+                <a:latin typeface="Arial"/>
+                <a:ea typeface="Arial"/>
+                <a:cs typeface="Arial"/>
+              </a:rPr>
+              <a:t>RISK / RETURN</a:t>
+            </a:r>
+          </a:p>
+        </p:txBody>
+      </p:sp>
+      <p:sp>
+        <p:nvSpPr>
+          <p:cNvPr id="8" name="">
+            <a:extLst xmlns:a="http://schemas.openxmlformats.org/drawingml/2006/main">
+              <a:ext uri="{FF2B5EF4-FFF2-40B4-BE49-F238E27FC236}">
+                <a16:creationId xmlns:a16="http://schemas.microsoft.com/office/drawing/2014/main" id="{DC731ED7-5F85-42CB-A69F-0889CEA3331A}"/>
+              </a:ext>
+            </a:extLst>
+          </p:cNvPr>
+          <p:cNvSpPr>
+            <a:spLocks xmlns:a="http://schemas.openxmlformats.org/drawingml/2006/main" noGrp="1"/>
+          </p:cNvSpPr>
+          <p:nvPr/>
+        </p:nvSpPr>
+        <p:spPr>
+          <a:xfrm xmlns:a="http://schemas.openxmlformats.org/drawingml/2006/main">
+            <a:off x="8496300" y="2533650"/>
+            <a:ext cx="2686050" cy="609600"/>
+          </a:xfrm>
+          <a:prstGeom xmlns:a="http://schemas.openxmlformats.org/drawingml/2006/main" prst="rect">
+            <a:avLst/>
+          </a:prstGeom>
+          <a:noFill xmlns:a="http://schemas.openxmlformats.org/drawingml/2006/main"/>
+          <a:ln xmlns:a="http://schemas.openxmlformats.org/drawingml/2006/main" w="0">
+            <a:noFill/>
+            <a:prstDash val="solid"/>
+          </a:ln>
+        </p:spPr>
+        <p:txBody>
+          <a:bodyPr xmlns:a="http://schemas.openxmlformats.org/drawingml/2006/main" anchor="t"/>
+          <a:lstStyle xmlns:a="http://schemas.openxmlformats.org/drawingml/2006/main"/>
+          <a:p xmlns:a="http://schemas.openxmlformats.org/drawingml/2006/main">
+            <a:pPr algn="l">
+              <a:buNone/>
+              <a:defRPr sz="3375" b="1">
+                <a:solidFill>
+                  <a:srgbClr val="3D8DFF"/>
+                </a:solidFill>
+                <a:latin typeface="Arial"/>
+                <a:ea typeface="Arial"/>
+                <a:cs typeface="Arial"/>
+              </a:defRPr>
+            </a:pPr>
+            <a:r>
+              <a:rPr sz="3375" b="1">
+                <a:solidFill>
+                  <a:srgbClr val="3D8DFF"/>
+                </a:solidFill>
+                <a:latin typeface="Arial"/>
+                <a:ea typeface="Arial"/>
+                <a:cs typeface="Arial"/>
+              </a:rPr>
+              <a:t>-13.7 pp</a:t>
+            </a:r>
+          </a:p>
+        </p:txBody>
+      </p:sp>
+      <p:sp>
+        <p:nvSpPr>
+          <p:cNvPr id="9" name="">
+            <a:extLst xmlns:a="http://schemas.openxmlformats.org/drawingml/2006/main">
+              <a:ext uri="{FF2B5EF4-FFF2-40B4-BE49-F238E27FC236}">
+                <a16:creationId xmlns:a16="http://schemas.microsoft.com/office/drawing/2014/main" id="{406DC0E8-33AD-4797-87D6-8B560493E789}"/>
+              </a:ext>
+            </a:extLst>
+          </p:cNvPr>
+          <p:cNvSpPr>
+            <a:spLocks xmlns:a="http://schemas.openxmlformats.org/drawingml/2006/main" noGrp="1"/>
+          </p:cNvSpPr>
+          <p:nvPr/>
+        </p:nvSpPr>
+        <p:spPr>
+          <a:xfrm xmlns:a="http://schemas.openxmlformats.org/drawingml/2006/main">
+            <a:off x="8496300" y="3105150"/>
+            <a:ext cx="2686050" cy="400050"/>
+          </a:xfrm>
+          <a:prstGeom xmlns:a="http://schemas.openxmlformats.org/drawingml/2006/main" prst="rect">
+            <a:avLst/>
+          </a:prstGeom>
+          <a:noFill xmlns:a="http://schemas.openxmlformats.org/drawingml/2006/main"/>
+          <a:ln xmlns:a="http://schemas.openxmlformats.org/drawingml/2006/main" w="0">
+            <a:noFill/>
+            <a:prstDash val="solid"/>
+          </a:ln>
+        </p:spPr>
+        <p:txBody>
+          <a:bodyPr xmlns:a="http://schemas.openxmlformats.org/drawingml/2006/main" anchor="t"/>
+          <a:lstStyle xmlns:a="http://schemas.openxmlformats.org/drawingml/2006/main"/>
+          <a:p xmlns:a="http://schemas.openxmlformats.org/drawingml/2006/main">
+            <a:pPr algn="l">
+              <a:buNone/>
+              <a:defRPr sz="1725" b="0">
+                <a:solidFill>
+                  <a:srgbClr val="52616B"/>
+                </a:solidFill>
+                <a:latin typeface="Arial"/>
+                <a:ea typeface="Arial"/>
+                <a:cs typeface="Arial"/>
+              </a:defRPr>
+            </a:pPr>
+            <a:r>
+              <a:rPr sz="1725" b="0">
+                <a:solidFill>
+                  <a:srgbClr val="52616B"/>
+                </a:solidFill>
+                <a:latin typeface="Arial"/>
+                <a:ea typeface="Arial"/>
+                <a:cs typeface="Arial"/>
+              </a:rPr>
+              <a:t>max-drawdown gap vs SPY</a:t>
+            </a:r>
+          </a:p>
+        </p:txBody>
+      </p:sp>
+      <p:sp>
+        <p:nvSpPr>
+          <p:cNvPr id="10" name="">
+            <a:extLst xmlns:a="http://schemas.openxmlformats.org/drawingml/2006/main">
+              <a:ext uri="{FF2B5EF4-FFF2-40B4-BE49-F238E27FC236}">
+                <a16:creationId xmlns:a16="http://schemas.microsoft.com/office/drawing/2014/main" id="{A0EB914A-A236-47F4-91E9-BA72FF10432A}"/>
+              </a:ext>
+            </a:extLst>
+          </p:cNvPr>
+          <p:cNvSpPr>
+            <a:spLocks xmlns:a="http://schemas.openxmlformats.org/drawingml/2006/main" noGrp="1"/>
+          </p:cNvSpPr>
+          <p:nvPr/>
+        </p:nvSpPr>
+        <p:spPr>
+          <a:xfrm xmlns:a="http://schemas.openxmlformats.org/drawingml/2006/main">
+            <a:off x="8496300" y="3714750"/>
+            <a:ext cx="2686050" cy="0"/>
+          </a:xfrm>
+          <a:prstGeom xmlns:a="http://schemas.openxmlformats.org/drawingml/2006/main" prst="line">
+            <a:avLst/>
+          </a:prstGeom>
+          <a:noFill xmlns:a="http://schemas.openxmlformats.org/drawingml/2006/main"/>
+          <a:ln xmlns:a="http://schemas.openxmlformats.org/drawingml/2006/main" w="19050">
+            <a:solidFill>
+              <a:srgbClr val="6DCBF4"/>
+            </a:solidFill>
+            <a:prstDash val="solid"/>
+          </a:ln>
+        </p:spPr>
+      </p:sp>
+      <p:sp>
+        <p:nvSpPr>
+          <p:cNvPr id="11" name="">
+            <a:extLst xmlns:a="http://schemas.openxmlformats.org/drawingml/2006/main">
+              <a:ext uri="{FF2B5EF4-FFF2-40B4-BE49-F238E27FC236}">
+                <a16:creationId xmlns:a16="http://schemas.microsoft.com/office/drawing/2014/main" id="{63C90848-627F-4872-9F08-0BCEBC58FC88}"/>
+              </a:ext>
+            </a:extLst>
+          </p:cNvPr>
+          <p:cNvSpPr>
+            <a:spLocks xmlns:a="http://schemas.openxmlformats.org/drawingml/2006/main" noGrp="1"/>
+          </p:cNvSpPr>
+          <p:nvPr/>
+        </p:nvSpPr>
+        <p:spPr>
+          <a:xfrm xmlns:a="http://schemas.openxmlformats.org/drawingml/2006/main">
+            <a:off x="8496300" y="3962400"/>
+            <a:ext cx="2686050" cy="323850"/>
+          </a:xfrm>
+          <a:prstGeom xmlns:a="http://schemas.openxmlformats.org/drawingml/2006/main" prst="rect">
+            <a:avLst/>
+          </a:prstGeom>
+          <a:noFill xmlns:a="http://schemas.openxmlformats.org/drawingml/2006/main"/>
+          <a:ln xmlns:a="http://schemas.openxmlformats.org/drawingml/2006/main" w="0">
+            <a:noFill/>
+            <a:prstDash val="solid"/>
+          </a:ln>
+        </p:spPr>
+        <p:txBody>
+          <a:bodyPr xmlns:a="http://schemas.openxmlformats.org/drawingml/2006/main" anchor="t"/>
+          <a:lstStyle xmlns:a="http://schemas.openxmlformats.org/drawingml/2006/main"/>
+          <a:p xmlns:a="http://schemas.openxmlformats.org/drawingml/2006/main">
+            <a:pPr algn="l">
+              <a:buNone/>
+              <a:defRPr sz="1575" b="1">
+                <a:solidFill>
+                  <a:srgbClr val="101820"/>
+                </a:solidFill>
+                <a:latin typeface="Arial"/>
+                <a:ea typeface="Arial"/>
+                <a:cs typeface="Arial"/>
+              </a:defRPr>
+            </a:pPr>
+            <a:r>
+              <a:rPr sz="1575" b="1">
+                <a:solidFill>
+                  <a:srgbClr val="101820"/>
+                </a:solidFill>
+                <a:latin typeface="Arial"/>
+                <a:ea typeface="Arial"/>
+                <a:cs typeface="Arial"/>
+              </a:rPr>
+              <a:t>SPY still led</a:t>
+            </a:r>
+          </a:p>
+        </p:txBody>
+      </p:sp>
+      <p:sp>
+        <p:nvSpPr>
+          <p:cNvPr id="12" name="">
+            <a:extLst xmlns:a="http://schemas.openxmlformats.org/drawingml/2006/main">
+              <a:ext uri="{FF2B5EF4-FFF2-40B4-BE49-F238E27FC236}">
+                <a16:creationId xmlns:a16="http://schemas.microsoft.com/office/drawing/2014/main" id="{70090FDC-931D-4B56-AD5D-C71AA6FC29F9}"/>
+              </a:ext>
+            </a:extLst>
+          </p:cNvPr>
+          <p:cNvSpPr>
+            <a:spLocks xmlns:a="http://schemas.openxmlformats.org/drawingml/2006/main" noGrp="1"/>
+          </p:cNvSpPr>
+          <p:nvPr/>
+        </p:nvSpPr>
+        <p:spPr>
+          <a:xfrm xmlns:a="http://schemas.openxmlformats.org/drawingml/2006/main">
+            <a:off x="8496300" y="4419600"/>
+            <a:ext cx="2686050" cy="1009650"/>
+          </a:xfrm>
+          <a:prstGeom xmlns:a="http://schemas.openxmlformats.org/drawingml/2006/main" prst="rect">
+            <a:avLst/>
+          </a:prstGeom>
+          <a:noFill xmlns:a="http://schemas.openxmlformats.org/drawingml/2006/main"/>
+          <a:ln xmlns:a="http://schemas.openxmlformats.org/drawingml/2006/main" w="0">
+            <a:noFill/>
+            <a:prstDash val="solid"/>
+          </a:ln>
+        </p:spPr>
+        <p:txBody>
+          <a:bodyPr xmlns:a="http://schemas.openxmlformats.org/drawingml/2006/main" anchor="t"/>
+          <a:lstStyle xmlns:a="http://schemas.openxmlformats.org/drawingml/2006/main"/>
+          <a:p xmlns:a="http://schemas.openxmlformats.org/drawingml/2006/main">
+            <a:pPr algn="l">
+              <a:buNone/>
+              <a:defRPr sz="1725" b="0">
+                <a:solidFill>
+                  <a:srgbClr val="52616B"/>
+                </a:solidFill>
+                <a:latin typeface="Arial"/>
+                <a:ea typeface="Arial"/>
+                <a:cs typeface="Arial"/>
+              </a:defRPr>
+            </a:pPr>
+            <a:r>
+              <a:rPr sz="1725" b="0">
+                <a:solidFill>
+                  <a:srgbClr val="52616B"/>
+                </a:solidFill>
+                <a:latin typeface="Arial"/>
+                <a:ea typeface="Arial"/>
+                <a:cs typeface="Arial"/>
+              </a:rPr>
+              <a:t>14.36% CAGR</a:t>
+            </a:r>
+          </a:p>
+          <a:p xmlns:a="http://schemas.openxmlformats.org/drawingml/2006/main">
+            <a:pPr algn="l">
+              <a:buNone/>
+              <a:defRPr sz="1725" b="0">
+                <a:solidFill>
+                  <a:srgbClr val="52616B"/>
+                </a:solidFill>
+                <a:latin typeface="Arial"/>
+                <a:ea typeface="Arial"/>
+                <a:cs typeface="Arial"/>
+              </a:defRPr>
+            </a:pPr>
+            <a:r>
+              <a:rPr sz="1725" b="0">
+                <a:solidFill>
+                  <a:srgbClr val="52616B"/>
+                </a:solidFill>
+                <a:latin typeface="Arial"/>
+                <a:ea typeface="Arial"/>
+                <a:cs typeface="Arial"/>
+              </a:rPr>
+              <a:t>vs source 12.17%</a:t>
+            </a:r>
+          </a:p>
+        </p:txBody>
+      </p:sp>
+      <p:sp>
+        <p:nvSpPr>
+          <p:cNvPr id="13" name="">
+            <a:extLst xmlns:a="http://schemas.openxmlformats.org/drawingml/2006/main">
+              <a:ext uri="{FF2B5EF4-FFF2-40B4-BE49-F238E27FC236}">
+                <a16:creationId xmlns:a16="http://schemas.microsoft.com/office/drawing/2014/main" id="{F166845D-8E26-4804-AAA3-D76C79B2D4FB}"/>
+              </a:ext>
+            </a:extLst>
+          </p:cNvPr>
+          <p:cNvSpPr>
+            <a:spLocks xmlns:a="http://schemas.openxmlformats.org/drawingml/2006/main" noGrp="1"/>
+          </p:cNvSpPr>
+          <p:nvPr/>
+        </p:nvSpPr>
+        <p:spPr>
+          <a:xfrm xmlns:a="http://schemas.openxmlformats.org/drawingml/2006/main">
+            <a:off x="1066800" y="5886450"/>
+            <a:ext cx="9620250" cy="323850"/>
+          </a:xfrm>
+          <a:prstGeom xmlns:a="http://schemas.openxmlformats.org/drawingml/2006/main" prst="rect">
+            <a:avLst/>
+          </a:prstGeom>
+          <a:noFill xmlns:a="http://schemas.openxmlformats.org/drawingml/2006/main"/>
+          <a:ln xmlns:a="http://schemas.openxmlformats.org/drawingml/2006/main" w="0">
+            <a:noFill/>
+            <a:prstDash val="solid"/>
+          </a:ln>
+        </p:spPr>
+        <p:txBody>
+          <a:bodyPr xmlns:a="http://schemas.openxmlformats.org/drawingml/2006/main" anchor="t"/>
+          <a:lstStyle xmlns:a="http://schemas.openxmlformats.org/drawingml/2006/main"/>
+          <a:p xmlns:a="http://schemas.openxmlformats.org/drawingml/2006/main">
+            <a:pPr algn="ctr">
+              <a:buNone/>
+              <a:defRPr sz="1800" b="1">
+                <a:solidFill>
+                  <a:srgbClr val="101820"/>
+                </a:solidFill>
+                <a:latin typeface="Arial"/>
+                <a:ea typeface="Arial"/>
+                <a:cs typeface="Arial"/>
+              </a:defRPr>
+            </a:pPr>
+            <a:r>
+              <a:rPr sz="1800" b="1">
+                <a:solidFill>
+                  <a:srgbClr val="101820"/>
+                </a:solidFill>
+                <a:latin typeface="Arial"/>
+                <a:ea typeface="Arial"/>
+                <a:cs typeface="Arial"/>
+              </a:rPr>
+              <a:t>Whether that tradeoff is valuable depends on the operator’s objective.</a:t>
+            </a:r>
+          </a:p>
+        </p:txBody>
+      </p:sp>
+      <p:sp>
+        <p:nvSpPr>
+          <p:cNvPr id="16" name="">
+            <a:extLst xmlns:a="http://schemas.openxmlformats.org/drawingml/2006/main">
+              <a:ext uri="{FF2B5EF4-FFF2-40B4-BE49-F238E27FC236}">
+                <a16:creationId xmlns:a16="http://schemas.microsoft.com/office/drawing/2014/main" id="{CBB05286-4B59-4C91-A588-5CD09F062F89}"/>
+              </a:ext>
+            </a:extLst>
+          </p:cNvPr>
+          <p:cNvSpPr>
+            <a:spLocks xmlns:a="http://schemas.openxmlformats.org/drawingml/2006/main" noGrp="1"/>
+          </p:cNvSpPr>
+          <p:nvPr/>
+        </p:nvSpPr>
+        <p:spPr>
+          <a:xfrm xmlns:a="http://schemas.openxmlformats.org/drawingml/2006/main">
+            <a:off x="11144250" y="6324600"/>
+            <a:ext cx="628650" cy="266700"/>
+          </a:xfrm>
+          <a:prstGeom xmlns:a="http://schemas.openxmlformats.org/drawingml/2006/main" prst="rect">
+            <a:avLst/>
+          </a:prstGeom>
+          <a:noFill xmlns:a="http://schemas.openxmlformats.org/drawingml/2006/main"/>
+          <a:ln xmlns:a="http://schemas.openxmlformats.org/drawingml/2006/main" w="0">
+            <a:noFill/>
+            <a:prstDash val="solid"/>
+          </a:ln>
+        </p:spPr>
+        <p:txBody>
+          <a:bodyPr xmlns:a="http://schemas.openxmlformats.org/drawingml/2006/main" anchor="t"/>
+          <a:lstStyle xmlns:a="http://schemas.openxmlformats.org/drawingml/2006/main"/>
+          <a:p xmlns:a="http://schemas.openxmlformats.org/drawingml/2006/main">
+            <a:pPr algn="r">
+              <a:buNone/>
+              <a:defRPr sz="1200" b="0">
+                <a:solidFill>
+                  <a:srgbClr val="52616B"/>
+                </a:solidFill>
+                <a:latin typeface="Arial"/>
+                <a:ea typeface="Arial"/>
+                <a:cs typeface="Arial"/>
+              </a:defRPr>
+            </a:pPr>
+            <a:r>
+              <a:rPr sz="1200" b="0">
+                <a:solidFill>
+                  <a:srgbClr val="52616B"/>
+                </a:solidFill>
+                <a:latin typeface="Arial"/>
+                <a:ea typeface="Arial"/>
+                <a:cs typeface="Arial"/>
+              </a:rPr>
+              <a:t/>
+            </a:r>
+          </a:p>
+        </p:txBody>
+      </p:sp>
+      <p:pic>
+        <p:nvPicPr>
+          <p:cNvPr id="31" name=""/>
+          <p:cNvPicPr>
+            <a:picLocks xmlns:a="http://schemas.openxmlformats.org/drawingml/2006/main" noChangeAspect="1"/>
+          </p:cNvPicPr>
+          <p:nvPr/>
+        </p:nvPicPr>
+        <p:blipFill>
+          <a:blip xmlns:r="http://schemas.openxmlformats.org/officeDocument/2006/relationships" xmlns:a="http://schemas.openxmlformats.org/drawingml/2006/main" r:embed="R2e4dd40e4f094ae5"/>
+          <a:stretch xmlns:a="http://schemas.openxmlformats.org/drawingml/2006/main"/>
+        </p:blipFill>
+        <p:spPr>
+          <a:xfrm xmlns:a="http://schemas.openxmlformats.org/drawingml/2006/main">
+            <a:off x="818956" y="1657350"/>
+            <a:ext cx="6686939" cy="4095750"/>
+          </a:xfrm>
+          <a:prstGeom xmlns:a="http://schemas.openxmlformats.org/drawingml/2006/main" prst="rect">
+            <a:avLst/>
+          </a:prstGeom>
+        </p:spPr>
+      </p:pic>
+    </p:spTree>
+    <p:extLst>
+      <p:ext uri="{BB962C8B-B14F-4D97-AF65-F5344CB8AC3E}">
+        <p14:creationId xmlns:p14="http://schemas.microsoft.com/office/powerpoint/2010/main" val="1019663795"/>
+      </p:ext>
+    </p:extLst>
+  </p:cSld>
+</p:sld>
+</file>
+
+<file path=ppt/slides/slide23.xml><?xml version="1.0" encoding="utf-8"?>
+<p:sld xmlns:p="http://schemas.openxmlformats.org/presentationml/2006/main">
+  <p:cSld>
+    <p:bg>
+      <p:bgPr>
+        <a:solidFill xmlns:a="http://schemas.openxmlformats.org/drawingml/2006/main">
+          <a:srgbClr val="FFFFFF"/>
+        </a:solidFill>
+      </p:bgPr>
+    </p:bg>
+    <p:spTree>
+      <p:nvGrpSpPr>
+        <p:cNvPr id="1" name=""/>
+        <p:cNvGrpSpPr/>
+        <p:nvPr/>
+      </p:nvGrpSpPr>
+      <p:grpSpPr>
+        <a:xfrm xmlns:a="http://schemas.openxmlformats.org/drawingml/2006/main"/>
+      </p:grpSpPr>
+      <p:sp>
+        <p:nvSpPr>
+          <p:cNvPr id="16" name="">
+            <a:extLst xmlns:a="http://schemas.openxmlformats.org/drawingml/2006/main">
+              <a:ext uri="{FF2B5EF4-FFF2-40B4-BE49-F238E27FC236}">
+                <a16:creationId xmlns:a16="http://schemas.microsoft.com/office/drawing/2014/main" id="{D2DB7632-9321-4B0D-B49B-BAF52F1D5F3F}"/>
+              </a:ext>
+            </a:extLst>
+          </p:cNvPr>
+          <p:cNvSpPr>
+            <a:spLocks xmlns:a="http://schemas.openxmlformats.org/drawingml/2006/main" noGrp="1"/>
+          </p:cNvSpPr>
+          <p:nvPr/>
+        </p:nvSpPr>
+        <p:spPr>
+          <a:xfrm xmlns:a="http://schemas.openxmlformats.org/drawingml/2006/main">
+            <a:off x="400050" y="228600"/>
+            <a:ext cx="2857500" cy="228600"/>
+          </a:xfrm>
+          <a:prstGeom xmlns:a="http://schemas.openxmlformats.org/drawingml/2006/main" prst="rect">
+            <a:avLst/>
+          </a:prstGeom>
+          <a:noFill xmlns:a="http://schemas.openxmlformats.org/drawingml/2006/main"/>
+          <a:ln xmlns:a="http://schemas.openxmlformats.org/drawingml/2006/main" w="0">
+            <a:noFill/>
+            <a:prstDash val="solid"/>
+          </a:ln>
+        </p:spPr>
+        <p:txBody>
+          <a:bodyPr xmlns:a="http://schemas.openxmlformats.org/drawingml/2006/main" anchor="t"/>
+          <a:lstStyle xmlns:a="http://schemas.openxmlformats.org/drawingml/2006/main"/>
+          <a:p xmlns:a="http://schemas.openxmlformats.org/drawingml/2006/main">
+            <a:pPr algn="l">
+              <a:buNone/>
+              <a:defRPr sz="1200" b="1">
+                <a:solidFill>
+                  <a:srgbClr val="3D8DFF"/>
+                </a:solidFill>
+                <a:latin typeface="Arial"/>
+                <a:ea typeface="Arial"/>
+                <a:cs typeface="Arial"/>
+              </a:defRPr>
+            </a:pPr>
+            <a:r>
+              <a:rPr sz="1200" b="1">
+                <a:solidFill>
+                  <a:srgbClr val="3D8DFF"/>
+                </a:solidFill>
+                <a:latin typeface="Arial"/>
+                <a:ea typeface="Arial"/>
+                <a:cs typeface="Arial"/>
+              </a:rPr>
+              <a:t>LIT-MOM-03.1</a:t>
+            </a:r>
+          </a:p>
+        </p:txBody>
+      </p:sp>
+      <p:sp>
+        <p:nvSpPr>
+          <p:cNvPr id="2" name="">
+            <a:extLst xmlns:a="http://schemas.openxmlformats.org/drawingml/2006/main">
+              <a:ext uri="{FF2B5EF4-FFF2-40B4-BE49-F238E27FC236}">
+                <a16:creationId xmlns:a16="http://schemas.microsoft.com/office/drawing/2014/main" id="{4F6E0FE8-6C1B-4A13-9D2D-6E11399D4DD1}"/>
+              </a:ext>
+            </a:extLst>
+          </p:cNvPr>
+          <p:cNvSpPr>
+            <a:spLocks xmlns:a="http://schemas.openxmlformats.org/drawingml/2006/main" noGrp="1"/>
+          </p:cNvSpPr>
+          <p:nvPr/>
+        </p:nvSpPr>
+        <p:spPr>
+          <a:xfrm xmlns:a="http://schemas.openxmlformats.org/drawingml/2006/main">
+            <a:off x="400050" y="476250"/>
+            <a:ext cx="11049000" cy="819150"/>
+          </a:xfrm>
+          <a:prstGeom xmlns:a="http://schemas.openxmlformats.org/drawingml/2006/main" prst="rect">
+            <a:avLst/>
+          </a:prstGeom>
+          <a:noFill xmlns:a="http://schemas.openxmlformats.org/drawingml/2006/main"/>
+          <a:ln xmlns:a="http://schemas.openxmlformats.org/drawingml/2006/main" w="0">
+            <a:noFill/>
+            <a:prstDash val="solid"/>
+          </a:ln>
+        </p:spPr>
+        <p:txBody>
+          <a:bodyPr xmlns:a="http://schemas.openxmlformats.org/drawingml/2006/main" anchor="t"/>
+          <a:lstStyle xmlns:a="http://schemas.openxmlformats.org/drawingml/2006/main"/>
+          <a:p xmlns:a="http://schemas.openxmlformats.org/drawingml/2006/main">
+            <a:pPr algn="l">
+              <a:buNone/>
+              <a:defRPr sz="2700" b="1">
+                <a:solidFill>
+                  <a:srgbClr val="101820"/>
+                </a:solidFill>
+                <a:latin typeface="Arial"/>
+                <a:ea typeface="Arial"/>
+                <a:cs typeface="Arial"/>
+              </a:defRPr>
+            </a:pPr>
+            <a:r>
+              <a:rPr sz="2700" b="1">
+                <a:solidFill>
+                  <a:srgbClr val="101820"/>
+                </a:solidFill>
+                <a:latin typeface="Arial"/>
+                <a:ea typeface="Arial"/>
+                <a:cs typeface="Arial"/>
+              </a:rPr>
+              <a:t>Performance was broad through time—but still mirrored relative-only</a:t>
+            </a:r>
+          </a:p>
+        </p:txBody>
+      </p:sp>
+      <p:sp>
+        <p:nvSpPr>
+          <p:cNvPr id="3" name="">
+            <a:extLst xmlns:a="http://schemas.openxmlformats.org/drawingml/2006/main">
+              <a:ext uri="{FF2B5EF4-FFF2-40B4-BE49-F238E27FC236}">
+                <a16:creationId xmlns:a16="http://schemas.microsoft.com/office/drawing/2014/main" id="{0E0B56DB-4E40-4B87-BA34-B14274318353}"/>
+              </a:ext>
+            </a:extLst>
+          </p:cNvPr>
+          <p:cNvSpPr>
+            <a:spLocks xmlns:a="http://schemas.openxmlformats.org/drawingml/2006/main" noGrp="1"/>
+          </p:cNvSpPr>
+          <p:nvPr/>
+        </p:nvSpPr>
+        <p:spPr>
+          <a:xfrm xmlns:a="http://schemas.openxmlformats.org/drawingml/2006/main">
+            <a:off x="400050" y="1428750"/>
+            <a:ext cx="11391900" cy="0"/>
+          </a:xfrm>
+          <a:prstGeom xmlns:a="http://schemas.openxmlformats.org/drawingml/2006/main" prst="line">
+            <a:avLst/>
+          </a:prstGeom>
+          <a:noFill xmlns:a="http://schemas.openxmlformats.org/drawingml/2006/main"/>
+          <a:ln xmlns:a="http://schemas.openxmlformats.org/drawingml/2006/main" w="9525">
+            <a:solidFill>
+              <a:srgbClr val="B8BCC4"/>
+            </a:solidFill>
+            <a:prstDash val="solid"/>
+          </a:ln>
+        </p:spPr>
+      </p:sp>
+      <p:sp>
+        <p:nvSpPr>
+          <p:cNvPr id="4" name="">
+            <a:extLst xmlns:a="http://schemas.openxmlformats.org/drawingml/2006/main">
+              <a:ext uri="{FF2B5EF4-FFF2-40B4-BE49-F238E27FC236}">
+                <a16:creationId xmlns:a16="http://schemas.microsoft.com/office/drawing/2014/main" id="{609465AD-88DC-48BC-BDAC-EBEFA9C8F7B5}"/>
+              </a:ext>
+            </a:extLst>
+          </p:cNvPr>
+          <p:cNvSpPr>
+            <a:spLocks xmlns:a="http://schemas.openxmlformats.org/drawingml/2006/main" noGrp="1"/>
+          </p:cNvSpPr>
+          <p:nvPr/>
+        </p:nvSpPr>
+        <p:spPr>
+          <a:xfrm xmlns:a="http://schemas.openxmlformats.org/drawingml/2006/main">
+            <a:off x="11010900" y="6324600"/>
+            <a:ext cx="762000" cy="266700"/>
+          </a:xfrm>
+          <a:prstGeom xmlns:a="http://schemas.openxmlformats.org/drawingml/2006/main" prst="rect">
+            <a:avLst/>
+          </a:prstGeom>
+          <a:noFill xmlns:a="http://schemas.openxmlformats.org/drawingml/2006/main"/>
+          <a:ln xmlns:a="http://schemas.openxmlformats.org/drawingml/2006/main" w="0">
+            <a:noFill/>
+            <a:prstDash val="solid"/>
+          </a:ln>
+        </p:spPr>
+        <p:txBody>
+          <a:bodyPr xmlns:a="http://schemas.openxmlformats.org/drawingml/2006/main" anchor="t"/>
+          <a:lstStyle xmlns:a="http://schemas.openxmlformats.org/drawingml/2006/main"/>
+          <a:p xmlns:a="http://schemas.openxmlformats.org/drawingml/2006/main">
+            <a:pPr algn="r">
+              <a:buNone/>
+              <a:defRPr sz="1200" b="0">
+                <a:solidFill>
+                  <a:srgbClr val="52616B"/>
+                </a:solidFill>
+                <a:latin typeface="Arial"/>
+                <a:ea typeface="Arial"/>
+                <a:cs typeface="Arial"/>
+              </a:defRPr>
+            </a:pPr>
+            <a:r>
+              <a:rPr sz="1200" b="0">
+                <a:solidFill>
+                  <a:srgbClr val="52616B"/>
+                </a:solidFill>
+                <a:latin typeface="Arial"/>
+                <a:ea typeface="Arial"/>
+                <a:cs typeface="Arial"/>
+              </a:rPr>
+              <a:t>23</a:t>
+            </a:r>
+          </a:p>
+        </p:txBody>
+      </p:sp>
+      <p:sp>
+        <p:nvSpPr>
+          <p:cNvPr id="5" name="">
+            <a:extLst xmlns:a="http://schemas.openxmlformats.org/drawingml/2006/main">
+              <a:ext uri="{FF2B5EF4-FFF2-40B4-BE49-F238E27FC236}">
+                <a16:creationId xmlns:a16="http://schemas.microsoft.com/office/drawing/2014/main" id="{CD393174-0A3C-4E18-A0E5-CFFEAB42B506}"/>
+              </a:ext>
+            </a:extLst>
+          </p:cNvPr>
+          <p:cNvSpPr>
+            <a:spLocks xmlns:a="http://schemas.openxmlformats.org/drawingml/2006/main" noGrp="1"/>
+          </p:cNvSpPr>
+          <p:nvPr/>
+        </p:nvSpPr>
+        <p:spPr>
+          <a:xfrm xmlns:a="http://schemas.openxmlformats.org/drawingml/2006/main">
+            <a:off x="666750" y="1752600"/>
+            <a:ext cx="10858500" cy="1028700"/>
+          </a:xfrm>
+          <a:prstGeom xmlns:a="http://schemas.openxmlformats.org/drawingml/2006/main" prst="rect">
+            <a:avLst/>
+          </a:prstGeom>
+          <a:solidFill xmlns:a="http://schemas.openxmlformats.org/drawingml/2006/main">
+            <a:srgbClr val="E6F2EC"/>
+          </a:solidFill>
+          <a:ln xmlns:a="http://schemas.openxmlformats.org/drawingml/2006/main" w="9525">
+            <a:solidFill>
+              <a:srgbClr val="2E7D5B"/>
+            </a:solidFill>
+            <a:prstDash val="solid"/>
+          </a:ln>
+        </p:spPr>
+      </p:sp>
+      <p:sp>
+        <p:nvSpPr>
+          <p:cNvPr id="6" name="">
+            <a:extLst xmlns:a="http://schemas.openxmlformats.org/drawingml/2006/main">
+              <a:ext uri="{FF2B5EF4-FFF2-40B4-BE49-F238E27FC236}">
+                <a16:creationId xmlns:a16="http://schemas.microsoft.com/office/drawing/2014/main" id="{802C9A30-9CD1-4907-B5B7-2F6BE57885E8}"/>
+              </a:ext>
+            </a:extLst>
+          </p:cNvPr>
+          <p:cNvSpPr>
+            <a:spLocks xmlns:a="http://schemas.openxmlformats.org/drawingml/2006/main" noGrp="1"/>
+          </p:cNvSpPr>
+          <p:nvPr/>
+        </p:nvSpPr>
+        <p:spPr>
+          <a:xfrm xmlns:a="http://schemas.openxmlformats.org/drawingml/2006/main">
+            <a:off x="952500" y="2000250"/>
+            <a:ext cx="2190750" cy="400050"/>
+          </a:xfrm>
+          <a:prstGeom xmlns:a="http://schemas.openxmlformats.org/drawingml/2006/main" prst="rect">
+            <a:avLst/>
+          </a:prstGeom>
+          <a:noFill xmlns:a="http://schemas.openxmlformats.org/drawingml/2006/main"/>
+          <a:ln xmlns:a="http://schemas.openxmlformats.org/drawingml/2006/main" w="0">
+            <a:noFill/>
+            <a:prstDash val="solid"/>
+          </a:ln>
+        </p:spPr>
+        <p:txBody>
+          <a:bodyPr xmlns:a="http://schemas.openxmlformats.org/drawingml/2006/main" anchor="t"/>
+          <a:lstStyle xmlns:a="http://schemas.openxmlformats.org/drawingml/2006/main"/>
+          <a:p xmlns:a="http://schemas.openxmlformats.org/drawingml/2006/main">
+            <a:pPr algn="l">
+              <a:buNone/>
+              <a:defRPr sz="2025" b="1">
+                <a:solidFill>
+                  <a:srgbClr val="2E7D5B"/>
+                </a:solidFill>
+                <a:latin typeface="Arial"/>
+                <a:ea typeface="Arial"/>
+                <a:cs typeface="Arial"/>
+              </a:defRPr>
+            </a:pPr>
+            <a:r>
+              <a:rPr sz="2025" b="1">
+                <a:solidFill>
+                  <a:srgbClr val="2E7D5B"/>
+                </a:solidFill>
+                <a:latin typeface="Arial"/>
+                <a:ea typeface="Arial"/>
+                <a:cs typeface="Arial"/>
+              </a:rPr>
+              <a:t>2016–2019</a:t>
+            </a:r>
+          </a:p>
+        </p:txBody>
+      </p:sp>
+      <p:sp>
+        <p:nvSpPr>
+          <p:cNvPr id="7" name="">
+            <a:extLst xmlns:a="http://schemas.openxmlformats.org/drawingml/2006/main">
+              <a:ext uri="{FF2B5EF4-FFF2-40B4-BE49-F238E27FC236}">
+                <a16:creationId xmlns:a16="http://schemas.microsoft.com/office/drawing/2014/main" id="{4C0B6826-C1CD-407B-B1BD-7E0FDA1C4296}"/>
+              </a:ext>
+            </a:extLst>
+          </p:cNvPr>
+          <p:cNvSpPr>
+            <a:spLocks xmlns:a="http://schemas.openxmlformats.org/drawingml/2006/main" noGrp="1"/>
+          </p:cNvSpPr>
+          <p:nvPr/>
+        </p:nvSpPr>
+        <p:spPr>
+          <a:xfrm xmlns:a="http://schemas.openxmlformats.org/drawingml/2006/main">
+            <a:off x="3276600" y="1943100"/>
+            <a:ext cx="7772400" cy="647700"/>
+          </a:xfrm>
+          <a:prstGeom xmlns:a="http://schemas.openxmlformats.org/drawingml/2006/main" prst="rect">
+            <a:avLst/>
+          </a:prstGeom>
+          <a:noFill xmlns:a="http://schemas.openxmlformats.org/drawingml/2006/main"/>
+          <a:ln xmlns:a="http://schemas.openxmlformats.org/drawingml/2006/main" w="0">
+            <a:noFill/>
+            <a:prstDash val="solid"/>
+          </a:ln>
+        </p:spPr>
+        <p:txBody>
+          <a:bodyPr xmlns:a="http://schemas.openxmlformats.org/drawingml/2006/main" anchor="t"/>
+          <a:lstStyle xmlns:a="http://schemas.openxmlformats.org/drawingml/2006/main"/>
+          <a:p xmlns:a="http://schemas.openxmlformats.org/drawingml/2006/main">
+            <a:pPr algn="l">
+              <a:buNone/>
+              <a:defRPr sz="1725" b="0">
+                <a:solidFill>
+                  <a:srgbClr val="101820"/>
+                </a:solidFill>
+                <a:latin typeface="Arial"/>
+                <a:ea typeface="Arial"/>
+                <a:cs typeface="Arial"/>
+              </a:defRPr>
+            </a:pPr>
+            <a:r>
+              <a:rPr sz="1725" b="0">
+                <a:solidFill>
+                  <a:srgbClr val="101820"/>
+                </a:solidFill>
+                <a:latin typeface="Arial"/>
+                <a:ea typeface="Arial"/>
+                <a:cs typeface="Arial"/>
+              </a:rPr>
+              <a:t>+29.4% source return; relative-only +30.2%. The two paths were already close in the earliest admitted phase.</a:t>
+            </a:r>
+          </a:p>
+        </p:txBody>
+      </p:sp>
+      <p:sp>
+        <p:nvSpPr>
+          <p:cNvPr id="8" name="">
+            <a:extLst xmlns:a="http://schemas.openxmlformats.org/drawingml/2006/main">
+              <a:ext uri="{FF2B5EF4-FFF2-40B4-BE49-F238E27FC236}">
+                <a16:creationId xmlns:a16="http://schemas.microsoft.com/office/drawing/2014/main" id="{3AFAF26A-2C8D-481A-8C17-B8A9A3967177}"/>
+              </a:ext>
+            </a:extLst>
+          </p:cNvPr>
+          <p:cNvSpPr>
+            <a:spLocks xmlns:a="http://schemas.openxmlformats.org/drawingml/2006/main" noGrp="1"/>
+          </p:cNvSpPr>
+          <p:nvPr/>
+        </p:nvSpPr>
+        <p:spPr>
+          <a:xfrm xmlns:a="http://schemas.openxmlformats.org/drawingml/2006/main">
+            <a:off x="666750" y="3048000"/>
+            <a:ext cx="10858500" cy="1028700"/>
+          </a:xfrm>
+          <a:prstGeom xmlns:a="http://schemas.openxmlformats.org/drawingml/2006/main" prst="rect">
+            <a:avLst/>
+          </a:prstGeom>
+          <a:solidFill xmlns:a="http://schemas.openxmlformats.org/drawingml/2006/main">
+            <a:srgbClr val="F7E7E2"/>
+          </a:solidFill>
+          <a:ln xmlns:a="http://schemas.openxmlformats.org/drawingml/2006/main" w="9525">
+            <a:solidFill>
+              <a:srgbClr val="C8553D"/>
+            </a:solidFill>
+            <a:prstDash val="solid"/>
+          </a:ln>
+        </p:spPr>
+      </p:sp>
+      <p:sp>
+        <p:nvSpPr>
+          <p:cNvPr id="9" name="">
+            <a:extLst xmlns:a="http://schemas.openxmlformats.org/drawingml/2006/main">
+              <a:ext uri="{FF2B5EF4-FFF2-40B4-BE49-F238E27FC236}">
+                <a16:creationId xmlns:a16="http://schemas.microsoft.com/office/drawing/2014/main" id="{DDE8FBE1-8020-4B7A-932E-FC73716C919B}"/>
+              </a:ext>
+            </a:extLst>
+          </p:cNvPr>
+          <p:cNvSpPr>
+            <a:spLocks xmlns:a="http://schemas.openxmlformats.org/drawingml/2006/main" noGrp="1"/>
+          </p:cNvSpPr>
+          <p:nvPr/>
+        </p:nvSpPr>
+        <p:spPr>
+          <a:xfrm xmlns:a="http://schemas.openxmlformats.org/drawingml/2006/main">
+            <a:off x="952500" y="3295650"/>
+            <a:ext cx="2190750" cy="400050"/>
+          </a:xfrm>
+          <a:prstGeom xmlns:a="http://schemas.openxmlformats.org/drawingml/2006/main" prst="rect">
+            <a:avLst/>
+          </a:prstGeom>
+          <a:noFill xmlns:a="http://schemas.openxmlformats.org/drawingml/2006/main"/>
+          <a:ln xmlns:a="http://schemas.openxmlformats.org/drawingml/2006/main" w="0">
+            <a:noFill/>
+            <a:prstDash val="solid"/>
+          </a:ln>
+        </p:spPr>
+        <p:txBody>
+          <a:bodyPr xmlns:a="http://schemas.openxmlformats.org/drawingml/2006/main" anchor="t"/>
+          <a:lstStyle xmlns:a="http://schemas.openxmlformats.org/drawingml/2006/main"/>
+          <a:p xmlns:a="http://schemas.openxmlformats.org/drawingml/2006/main">
+            <a:pPr algn="l">
+              <a:buNone/>
+              <a:defRPr sz="2025" b="1">
+                <a:solidFill>
+                  <a:srgbClr val="C8553D"/>
+                </a:solidFill>
+                <a:latin typeface="Arial"/>
+                <a:ea typeface="Arial"/>
+                <a:cs typeface="Arial"/>
+              </a:defRPr>
+            </a:pPr>
+            <a:r>
+              <a:rPr sz="2025" b="1">
+                <a:solidFill>
+                  <a:srgbClr val="C8553D"/>
+                </a:solidFill>
+                <a:latin typeface="Arial"/>
+                <a:ea typeface="Arial"/>
+                <a:cs typeface="Arial"/>
+              </a:rPr>
+              <a:t>2020–2022</a:t>
+            </a:r>
+          </a:p>
+        </p:txBody>
+      </p:sp>
+      <p:sp>
+        <p:nvSpPr>
+          <p:cNvPr id="10" name="">
+            <a:extLst xmlns:a="http://schemas.openxmlformats.org/drawingml/2006/main">
+              <a:ext uri="{FF2B5EF4-FFF2-40B4-BE49-F238E27FC236}">
+                <a16:creationId xmlns:a16="http://schemas.microsoft.com/office/drawing/2014/main" id="{E6DA919C-47F4-4345-87E2-1F6DF9D0EC90}"/>
+              </a:ext>
+            </a:extLst>
+          </p:cNvPr>
+          <p:cNvSpPr>
+            <a:spLocks xmlns:a="http://schemas.openxmlformats.org/drawingml/2006/main" noGrp="1"/>
+          </p:cNvSpPr>
+          <p:nvPr/>
+        </p:nvSpPr>
+        <p:spPr>
+          <a:xfrm xmlns:a="http://schemas.openxmlformats.org/drawingml/2006/main">
+            <a:off x="3276600" y="3238500"/>
+            <a:ext cx="7772400" cy="647700"/>
+          </a:xfrm>
+          <a:prstGeom xmlns:a="http://schemas.openxmlformats.org/drawingml/2006/main" prst="rect">
+            <a:avLst/>
+          </a:prstGeom>
+          <a:noFill xmlns:a="http://schemas.openxmlformats.org/drawingml/2006/main"/>
+          <a:ln xmlns:a="http://schemas.openxmlformats.org/drawingml/2006/main" w="0">
+            <a:noFill/>
+            <a:prstDash val="solid"/>
+          </a:ln>
+        </p:spPr>
+        <p:txBody>
+          <a:bodyPr xmlns:a="http://schemas.openxmlformats.org/drawingml/2006/main" anchor="t"/>
+          <a:lstStyle xmlns:a="http://schemas.openxmlformats.org/drawingml/2006/main"/>
+          <a:p xmlns:a="http://schemas.openxmlformats.org/drawingml/2006/main">
+            <a:pPr algn="l">
+              <a:buNone/>
+              <a:defRPr sz="1725" b="0">
+                <a:solidFill>
+                  <a:srgbClr val="101820"/>
+                </a:solidFill>
+                <a:latin typeface="Arial"/>
+                <a:ea typeface="Arial"/>
+                <a:cs typeface="Arial"/>
+              </a:defRPr>
+            </a:pPr>
+            <a:r>
+              <a:rPr sz="1725" b="0">
+                <a:solidFill>
+                  <a:srgbClr val="101820"/>
+                </a:solidFill>
+                <a:latin typeface="Arial"/>
+                <a:ea typeface="Arial"/>
+                <a:cs typeface="Arial"/>
+              </a:rPr>
+              <a:t>+36.0% source return; relative-only +35.0%. The absolute veto was most active here, yet changed little.</a:t>
+            </a:r>
+          </a:p>
+        </p:txBody>
+      </p:sp>
+      <p:sp>
+        <p:nvSpPr>
+          <p:cNvPr id="11" name="">
+            <a:extLst xmlns:a="http://schemas.openxmlformats.org/drawingml/2006/main">
+              <a:ext uri="{FF2B5EF4-FFF2-40B4-BE49-F238E27FC236}">
+                <a16:creationId xmlns:a16="http://schemas.microsoft.com/office/drawing/2014/main" id="{0879E259-AD91-4B41-8E67-E5334F74BAB8}"/>
+              </a:ext>
+            </a:extLst>
+          </p:cNvPr>
+          <p:cNvSpPr>
+            <a:spLocks xmlns:a="http://schemas.openxmlformats.org/drawingml/2006/main" noGrp="1"/>
+          </p:cNvSpPr>
+          <p:nvPr/>
+        </p:nvSpPr>
+        <p:spPr>
+          <a:xfrm xmlns:a="http://schemas.openxmlformats.org/drawingml/2006/main">
+            <a:off x="666750" y="4343400"/>
+            <a:ext cx="10858500" cy="1028700"/>
+          </a:xfrm>
+          <a:prstGeom xmlns:a="http://schemas.openxmlformats.org/drawingml/2006/main" prst="rect">
+            <a:avLst/>
+          </a:prstGeom>
+          <a:solidFill xmlns:a="http://schemas.openxmlformats.org/drawingml/2006/main">
+            <a:srgbClr val="EDEDED"/>
+          </a:solidFill>
+          <a:ln xmlns:a="http://schemas.openxmlformats.org/drawingml/2006/main" w="9525">
+            <a:solidFill>
+              <a:srgbClr val="52616B"/>
+            </a:solidFill>
+            <a:prstDash val="solid"/>
+          </a:ln>
+        </p:spPr>
+      </p:sp>
+      <p:sp>
+        <p:nvSpPr>
+          <p:cNvPr id="12" name="">
+            <a:extLst xmlns:a="http://schemas.openxmlformats.org/drawingml/2006/main">
+              <a:ext uri="{FF2B5EF4-FFF2-40B4-BE49-F238E27FC236}">
+                <a16:creationId xmlns:a16="http://schemas.microsoft.com/office/drawing/2014/main" id="{FE0E70E3-6874-4441-9FD1-1060221212D9}"/>
+              </a:ext>
+            </a:extLst>
+          </p:cNvPr>
+          <p:cNvSpPr>
+            <a:spLocks xmlns:a="http://schemas.openxmlformats.org/drawingml/2006/main" noGrp="1"/>
+          </p:cNvSpPr>
+          <p:nvPr/>
+        </p:nvSpPr>
+        <p:spPr>
+          <a:xfrm xmlns:a="http://schemas.openxmlformats.org/drawingml/2006/main">
+            <a:off x="952500" y="4591050"/>
+            <a:ext cx="2190750" cy="400050"/>
+          </a:xfrm>
+          <a:prstGeom xmlns:a="http://schemas.openxmlformats.org/drawingml/2006/main" prst="rect">
+            <a:avLst/>
+          </a:prstGeom>
+          <a:noFill xmlns:a="http://schemas.openxmlformats.org/drawingml/2006/main"/>
+          <a:ln xmlns:a="http://schemas.openxmlformats.org/drawingml/2006/main" w="0">
+            <a:noFill/>
+            <a:prstDash val="solid"/>
+          </a:ln>
+        </p:spPr>
+        <p:txBody>
+          <a:bodyPr xmlns:a="http://schemas.openxmlformats.org/drawingml/2006/main" anchor="t"/>
+          <a:lstStyle xmlns:a="http://schemas.openxmlformats.org/drawingml/2006/main"/>
+          <a:p xmlns:a="http://schemas.openxmlformats.org/drawingml/2006/main">
+            <a:pPr algn="l">
+              <a:buNone/>
+              <a:defRPr sz="2025" b="1">
+                <a:solidFill>
+                  <a:srgbClr val="52616B"/>
+                </a:solidFill>
+                <a:latin typeface="Arial"/>
+                <a:ea typeface="Arial"/>
+                <a:cs typeface="Arial"/>
+              </a:defRPr>
+            </a:pPr>
+            <a:r>
+              <a:rPr sz="2025" b="1">
+                <a:solidFill>
+                  <a:srgbClr val="52616B"/>
+                </a:solidFill>
+                <a:latin typeface="Arial"/>
+                <a:ea typeface="Arial"/>
+                <a:cs typeface="Arial"/>
+              </a:rPr>
+              <a:t>2023–2026</a:t>
+            </a:r>
+          </a:p>
+        </p:txBody>
+      </p:sp>
+      <p:sp>
+        <p:nvSpPr>
+          <p:cNvPr id="13" name="">
+            <a:extLst xmlns:a="http://schemas.openxmlformats.org/drawingml/2006/main">
+              <a:ext uri="{FF2B5EF4-FFF2-40B4-BE49-F238E27FC236}">
+                <a16:creationId xmlns:a16="http://schemas.microsoft.com/office/drawing/2014/main" id="{7D88D2F7-BBA9-4B06-83BF-EF6C40360B55}"/>
+              </a:ext>
+            </a:extLst>
+          </p:cNvPr>
+          <p:cNvSpPr>
+            <a:spLocks xmlns:a="http://schemas.openxmlformats.org/drawingml/2006/main" noGrp="1"/>
+          </p:cNvSpPr>
+          <p:nvPr/>
+        </p:nvSpPr>
+        <p:spPr>
+          <a:xfrm xmlns:a="http://schemas.openxmlformats.org/drawingml/2006/main">
+            <a:off x="3276600" y="4533900"/>
+            <a:ext cx="7772400" cy="647700"/>
+          </a:xfrm>
+          <a:prstGeom xmlns:a="http://schemas.openxmlformats.org/drawingml/2006/main" prst="rect">
+            <a:avLst/>
+          </a:prstGeom>
+          <a:noFill xmlns:a="http://schemas.openxmlformats.org/drawingml/2006/main"/>
+          <a:ln xmlns:a="http://schemas.openxmlformats.org/drawingml/2006/main" w="0">
+            <a:noFill/>
+            <a:prstDash val="solid"/>
+          </a:ln>
+        </p:spPr>
+        <p:txBody>
+          <a:bodyPr xmlns:a="http://schemas.openxmlformats.org/drawingml/2006/main" anchor="t"/>
+          <a:lstStyle xmlns:a="http://schemas.openxmlformats.org/drawingml/2006/main"/>
+          <a:p xmlns:a="http://schemas.openxmlformats.org/drawingml/2006/main">
+            <a:pPr algn="l">
+              <a:buNone/>
+              <a:defRPr sz="1725" b="0">
+                <a:solidFill>
+                  <a:srgbClr val="101820"/>
+                </a:solidFill>
+                <a:latin typeface="Arial"/>
+                <a:ea typeface="Arial"/>
+                <a:cs typeface="Arial"/>
+              </a:defRPr>
+            </a:pPr>
+            <a:r>
+              <a:rPr sz="1725" b="0">
+                <a:solidFill>
+                  <a:srgbClr val="101820"/>
+                </a:solidFill>
+                <a:latin typeface="Arial"/>
+                <a:ea typeface="Arial"/>
+                <a:cs typeface="Arial"/>
+              </a:rPr>
+              <a:t>+73.5% source return; relative-only +73.8%. The near-identity persisted into the latest phase.</a:t>
+            </a:r>
+          </a:p>
+        </p:txBody>
+      </p:sp>
+      <p:sp>
+        <p:nvSpPr>
+          <p:cNvPr id="14" name="">
+            <a:extLst xmlns:a="http://schemas.openxmlformats.org/drawingml/2006/main">
+              <a:ext uri="{FF2B5EF4-FFF2-40B4-BE49-F238E27FC236}">
+                <a16:creationId xmlns:a16="http://schemas.microsoft.com/office/drawing/2014/main" id="{F7E3D076-54D1-4B3D-8F4A-D11630B25FFC}"/>
+              </a:ext>
+            </a:extLst>
+          </p:cNvPr>
+          <p:cNvSpPr>
+            <a:spLocks xmlns:a="http://schemas.openxmlformats.org/drawingml/2006/main" noGrp="1"/>
+          </p:cNvSpPr>
+          <p:nvPr/>
+        </p:nvSpPr>
+        <p:spPr>
+          <a:xfrm xmlns:a="http://schemas.openxmlformats.org/drawingml/2006/main">
+            <a:off x="2114550" y="5753100"/>
+            <a:ext cx="7962900" cy="495300"/>
+          </a:xfrm>
+          <a:prstGeom xmlns:a="http://schemas.openxmlformats.org/drawingml/2006/main" prst="rect">
+            <a:avLst/>
+          </a:prstGeom>
+          <a:solidFill xmlns:a="http://schemas.openxmlformats.org/drawingml/2006/main">
+            <a:srgbClr val="EAF5FB"/>
+          </a:solidFill>
+          <a:ln xmlns:a="http://schemas.openxmlformats.org/drawingml/2006/main" w="9525">
+            <a:solidFill>
+              <a:srgbClr val="6DCBF4"/>
+            </a:solidFill>
+            <a:prstDash val="solid"/>
+          </a:ln>
+        </p:spPr>
+      </p:sp>
+      <p:sp>
+        <p:nvSpPr>
+          <p:cNvPr id="15" name="">
+            <a:extLst xmlns:a="http://schemas.openxmlformats.org/drawingml/2006/main">
+              <a:ext uri="{FF2B5EF4-FFF2-40B4-BE49-F238E27FC236}">
+                <a16:creationId xmlns:a16="http://schemas.microsoft.com/office/drawing/2014/main" id="{FF7807EE-5E9A-4AC4-A3F2-FA1CED7A80A8}"/>
+              </a:ext>
+            </a:extLst>
+          </p:cNvPr>
+          <p:cNvSpPr>
+            <a:spLocks xmlns:a="http://schemas.openxmlformats.org/drawingml/2006/main" noGrp="1"/>
+          </p:cNvSpPr>
+          <p:nvPr/>
+        </p:nvSpPr>
+        <p:spPr>
+          <a:xfrm xmlns:a="http://schemas.openxmlformats.org/drawingml/2006/main">
+            <a:off x="2343150" y="5753100"/>
+            <a:ext cx="7505700" cy="457200"/>
+          </a:xfrm>
+          <a:prstGeom xmlns:a="http://schemas.openxmlformats.org/drawingml/2006/main" prst="rect">
+            <a:avLst/>
+          </a:prstGeom>
+          <a:noFill xmlns:a="http://schemas.openxmlformats.org/drawingml/2006/main"/>
+          <a:ln xmlns:a="http://schemas.openxmlformats.org/drawingml/2006/main" w="0">
+            <a:noFill/>
+            <a:prstDash val="solid"/>
+          </a:ln>
+        </p:spPr>
+        <p:txBody>
+          <a:bodyPr xmlns:a="http://schemas.openxmlformats.org/drawingml/2006/main" anchor="t"/>
+          <a:lstStyle xmlns:a="http://schemas.openxmlformats.org/drawingml/2006/main"/>
+          <a:p xmlns:a="http://schemas.openxmlformats.org/drawingml/2006/main">
+            <a:pPr algn="ctr">
+              <a:buNone/>
+              <a:defRPr sz="1350" b="1">
+                <a:solidFill>
+                  <a:srgbClr val="3D8DFF"/>
+                </a:solidFill>
+                <a:latin typeface="Arial"/>
+                <a:ea typeface="Arial"/>
+                <a:cs typeface="Arial"/>
+              </a:defRPr>
+            </a:pPr>
+            <a:r>
+              <a:rPr sz="1350" b="1">
+                <a:solidFill>
+                  <a:srgbClr val="3D8DFF"/>
+                </a:solidFill>
+                <a:latin typeface="Arial"/>
+                <a:ea typeface="Arial"/>
+                <a:cs typeface="Arial"/>
+              </a:rPr>
+              <a:t>Three positive phases strengthen the clue—but do not create untouched confirmation.</a:t>
+            </a:r>
+          </a:p>
+        </p:txBody>
+      </p:sp>
+    </p:spTree>
+    <p:extLst>
+      <p:ext uri="{BB962C8B-B14F-4D97-AF65-F5344CB8AC3E}">
+        <p14:creationId xmlns:p14="http://schemas.microsoft.com/office/powerpoint/2010/main" val="733918031"/>
+      </p:ext>
+    </p:extLst>
+  </p:cSld>
+</p:sld>
+</file>
+
+<file path=ppt/slides/slide24.xml><?xml version="1.0" encoding="utf-8"?>
+<p:sld xmlns:p="http://schemas.openxmlformats.org/presentationml/2006/main">
+  <p:cSld>
+    <p:bg>
+      <p:bgPr>
+        <a:solidFill xmlns:a="http://schemas.openxmlformats.org/drawingml/2006/main">
+          <a:srgbClr val="FFFFFF"/>
+        </a:solidFill>
+      </p:bgPr>
+    </p:bg>
+    <p:spTree>
+      <p:nvGrpSpPr>
+        <p:cNvPr id="1" name=""/>
+        <p:cNvGrpSpPr/>
+        <p:nvPr/>
+      </p:nvGrpSpPr>
+      <p:grpSpPr>
+        <a:xfrm xmlns:a="http://schemas.openxmlformats.org/drawingml/2006/main"/>
+      </p:grpSpPr>
+      <p:sp>
+        <p:nvSpPr>
+          <p:cNvPr id="16" name="">
+            <a:extLst xmlns:a="http://schemas.openxmlformats.org/drawingml/2006/main">
+              <a:ext uri="{FF2B5EF4-FFF2-40B4-BE49-F238E27FC236}">
+                <a16:creationId xmlns:a16="http://schemas.microsoft.com/office/drawing/2014/main" id="{D2DB7632-9321-4B0D-B49B-BAF52F1D5F3F}"/>
+              </a:ext>
+            </a:extLst>
+          </p:cNvPr>
+          <p:cNvSpPr>
+            <a:spLocks xmlns:a="http://schemas.openxmlformats.org/drawingml/2006/main" noGrp="1"/>
+          </p:cNvSpPr>
+          <p:nvPr/>
+        </p:nvSpPr>
+        <p:spPr>
+          <a:xfrm xmlns:a="http://schemas.openxmlformats.org/drawingml/2006/main">
+            <a:off x="400050" y="228600"/>
+            <a:ext cx="2857500" cy="228600"/>
+          </a:xfrm>
+          <a:prstGeom xmlns:a="http://schemas.openxmlformats.org/drawingml/2006/main" prst="rect">
+            <a:avLst/>
+          </a:prstGeom>
+          <a:noFill xmlns:a="http://schemas.openxmlformats.org/drawingml/2006/main"/>
+          <a:ln xmlns:a="http://schemas.openxmlformats.org/drawingml/2006/main" w="0">
+            <a:noFill/>
+            <a:prstDash val="solid"/>
+          </a:ln>
+        </p:spPr>
+        <p:txBody>
+          <a:bodyPr xmlns:a="http://schemas.openxmlformats.org/drawingml/2006/main" anchor="t"/>
+          <a:lstStyle xmlns:a="http://schemas.openxmlformats.org/drawingml/2006/main"/>
+          <a:p xmlns:a="http://schemas.openxmlformats.org/drawingml/2006/main">
+            <a:pPr algn="l">
+              <a:buNone/>
+              <a:defRPr sz="1200" b="1">
+                <a:solidFill>
+                  <a:srgbClr val="3D8DFF"/>
+                </a:solidFill>
+                <a:latin typeface="Arial"/>
+                <a:ea typeface="Arial"/>
+                <a:cs typeface="Arial"/>
+              </a:defRPr>
+            </a:pPr>
+            <a:r>
+              <a:rPr sz="1200" b="1">
+                <a:solidFill>
+                  <a:srgbClr val="3D8DFF"/>
+                </a:solidFill>
+                <a:latin typeface="Arial"/>
+                <a:ea typeface="Arial"/>
+                <a:cs typeface="Arial"/>
+              </a:rPr>
+              <a:t>LIT-MOM-03.1</a:t>
+            </a:r>
+          </a:p>
+        </p:txBody>
+      </p:sp>
+      <p:sp>
+        <p:nvSpPr>
+          <p:cNvPr id="2" name="">
+            <a:extLst xmlns:a="http://schemas.openxmlformats.org/drawingml/2006/main">
+              <a:ext uri="{FF2B5EF4-FFF2-40B4-BE49-F238E27FC236}">
+                <a16:creationId xmlns:a16="http://schemas.microsoft.com/office/drawing/2014/main" id="{4F6E0FE8-6C1B-4A13-9D2D-6E11399D4DD1}"/>
+              </a:ext>
+            </a:extLst>
+          </p:cNvPr>
+          <p:cNvSpPr>
+            <a:spLocks xmlns:a="http://schemas.openxmlformats.org/drawingml/2006/main" noGrp="1"/>
+          </p:cNvSpPr>
+          <p:nvPr/>
+        </p:nvSpPr>
+        <p:spPr>
+          <a:xfrm xmlns:a="http://schemas.openxmlformats.org/drawingml/2006/main">
+            <a:off x="400050" y="476250"/>
+            <a:ext cx="11049000" cy="819150"/>
+          </a:xfrm>
+          <a:prstGeom xmlns:a="http://schemas.openxmlformats.org/drawingml/2006/main" prst="rect">
+            <a:avLst/>
+          </a:prstGeom>
+          <a:noFill xmlns:a="http://schemas.openxmlformats.org/drawingml/2006/main"/>
+          <a:ln xmlns:a="http://schemas.openxmlformats.org/drawingml/2006/main" w="0">
+            <a:noFill/>
+            <a:prstDash val="solid"/>
+          </a:ln>
+        </p:spPr>
+        <p:txBody>
+          <a:bodyPr xmlns:a="http://schemas.openxmlformats.org/drawingml/2006/main" anchor="t"/>
+          <a:lstStyle xmlns:a="http://schemas.openxmlformats.org/drawingml/2006/main"/>
+          <a:p xmlns:a="http://schemas.openxmlformats.org/drawingml/2006/main">
+            <a:pPr algn="l">
+              <a:buNone/>
+              <a:defRPr sz="2700" b="1">
+                <a:solidFill>
+                  <a:srgbClr val="101820"/>
+                </a:solidFill>
+                <a:latin typeface="Arial"/>
+                <a:ea typeface="Arial"/>
+                <a:cs typeface="Arial"/>
+              </a:defRPr>
+            </a:pPr>
+            <a:r>
+              <a:rPr sz="2700" b="1">
+                <a:solidFill>
+                  <a:srgbClr val="101820"/>
+                </a:solidFill>
+                <a:latin typeface="Arial"/>
+                <a:ea typeface="Arial"/>
+                <a:cs typeface="Arial"/>
+              </a:rPr>
+              <a:t>Preserve the clue: this is relative rotation, not confirmed edge</a:t>
+            </a:r>
+          </a:p>
+        </p:txBody>
+      </p:sp>
+      <p:sp>
+        <p:nvSpPr>
+          <p:cNvPr id="3" name="">
+            <a:extLst xmlns:a="http://schemas.openxmlformats.org/drawingml/2006/main">
+              <a:ext uri="{FF2B5EF4-FFF2-40B4-BE49-F238E27FC236}">
+                <a16:creationId xmlns:a16="http://schemas.microsoft.com/office/drawing/2014/main" id="{0E0B56DB-4E40-4B87-BA34-B14274318353}"/>
+              </a:ext>
+            </a:extLst>
+          </p:cNvPr>
+          <p:cNvSpPr>
+            <a:spLocks xmlns:a="http://schemas.openxmlformats.org/drawingml/2006/main" noGrp="1"/>
+          </p:cNvSpPr>
+          <p:nvPr/>
+        </p:nvSpPr>
+        <p:spPr>
+          <a:xfrm xmlns:a="http://schemas.openxmlformats.org/drawingml/2006/main">
+            <a:off x="400050" y="1428750"/>
+            <a:ext cx="11391900" cy="0"/>
+          </a:xfrm>
+          <a:prstGeom xmlns:a="http://schemas.openxmlformats.org/drawingml/2006/main" prst="line">
+            <a:avLst/>
+          </a:prstGeom>
+          <a:noFill xmlns:a="http://schemas.openxmlformats.org/drawingml/2006/main"/>
+          <a:ln xmlns:a="http://schemas.openxmlformats.org/drawingml/2006/main" w="9525">
+            <a:solidFill>
+              <a:srgbClr val="B8BCC4"/>
+            </a:solidFill>
+            <a:prstDash val="solid"/>
+          </a:ln>
+        </p:spPr>
+      </p:sp>
+      <p:sp>
+        <p:nvSpPr>
+          <p:cNvPr id="4" name="">
+            <a:extLst xmlns:a="http://schemas.openxmlformats.org/drawingml/2006/main">
+              <a:ext uri="{FF2B5EF4-FFF2-40B4-BE49-F238E27FC236}">
+                <a16:creationId xmlns:a16="http://schemas.microsoft.com/office/drawing/2014/main" id="{609465AD-88DC-48BC-BDAC-EBEFA9C8F7B5}"/>
+              </a:ext>
+            </a:extLst>
+          </p:cNvPr>
+          <p:cNvSpPr>
+            <a:spLocks xmlns:a="http://schemas.openxmlformats.org/drawingml/2006/main" noGrp="1"/>
+          </p:cNvSpPr>
+          <p:nvPr/>
+        </p:nvSpPr>
+        <p:spPr>
+          <a:xfrm xmlns:a="http://schemas.openxmlformats.org/drawingml/2006/main">
+            <a:off x="11010900" y="6324600"/>
+            <a:ext cx="762000" cy="266700"/>
+          </a:xfrm>
+          <a:prstGeom xmlns:a="http://schemas.openxmlformats.org/drawingml/2006/main" prst="rect">
+            <a:avLst/>
+          </a:prstGeom>
+          <a:noFill xmlns:a="http://schemas.openxmlformats.org/drawingml/2006/main"/>
+          <a:ln xmlns:a="http://schemas.openxmlformats.org/drawingml/2006/main" w="0">
+            <a:noFill/>
+            <a:prstDash val="solid"/>
+          </a:ln>
+        </p:spPr>
+        <p:txBody>
+          <a:bodyPr xmlns:a="http://schemas.openxmlformats.org/drawingml/2006/main" anchor="t"/>
+          <a:lstStyle xmlns:a="http://schemas.openxmlformats.org/drawingml/2006/main"/>
+          <a:p xmlns:a="http://schemas.openxmlformats.org/drawingml/2006/main">
+            <a:pPr algn="r">
+              <a:buNone/>
+              <a:defRPr sz="1200" b="0">
+                <a:solidFill>
+                  <a:srgbClr val="52616B"/>
+                </a:solidFill>
+                <a:latin typeface="Arial"/>
+                <a:ea typeface="Arial"/>
+                <a:cs typeface="Arial"/>
+              </a:defRPr>
+            </a:pPr>
+            <a:r>
+              <a:rPr sz="1200" b="0">
+                <a:solidFill>
+                  <a:srgbClr val="52616B"/>
+                </a:solidFill>
+                <a:latin typeface="Arial"/>
+                <a:ea typeface="Arial"/>
+                <a:cs typeface="Arial"/>
+              </a:rPr>
+              <a:t>24</a:t>
+            </a:r>
+          </a:p>
+        </p:txBody>
+      </p:sp>
+      <p:sp>
+        <p:nvSpPr>
+          <p:cNvPr id="5" name="">
+            <a:extLst xmlns:a="http://schemas.openxmlformats.org/drawingml/2006/main">
+              <a:ext uri="{FF2B5EF4-FFF2-40B4-BE49-F238E27FC236}">
+                <a16:creationId xmlns:a16="http://schemas.microsoft.com/office/drawing/2014/main" id="{CD393174-0A3C-4E18-A0E5-CFFEAB42B506}"/>
+              </a:ext>
+            </a:extLst>
+          </p:cNvPr>
+          <p:cNvSpPr>
+            <a:spLocks xmlns:a="http://schemas.openxmlformats.org/drawingml/2006/main" noGrp="1"/>
+          </p:cNvSpPr>
+          <p:nvPr/>
+        </p:nvSpPr>
+        <p:spPr>
+          <a:xfrm xmlns:a="http://schemas.openxmlformats.org/drawingml/2006/main">
+            <a:off x="666750" y="1752600"/>
+            <a:ext cx="10858500" cy="1028700"/>
+          </a:xfrm>
+          <a:prstGeom xmlns:a="http://schemas.openxmlformats.org/drawingml/2006/main" prst="rect">
+            <a:avLst/>
+          </a:prstGeom>
+          <a:solidFill xmlns:a="http://schemas.openxmlformats.org/drawingml/2006/main">
+            <a:srgbClr val="E6F2EC"/>
+          </a:solidFill>
+          <a:ln xmlns:a="http://schemas.openxmlformats.org/drawingml/2006/main" w="9525">
+            <a:solidFill>
+              <a:srgbClr val="2E7D5B"/>
+            </a:solidFill>
+            <a:prstDash val="solid"/>
+          </a:ln>
+        </p:spPr>
+      </p:sp>
+      <p:sp>
+        <p:nvSpPr>
+          <p:cNvPr id="6" name="">
+            <a:extLst xmlns:a="http://schemas.openxmlformats.org/drawingml/2006/main">
+              <a:ext uri="{FF2B5EF4-FFF2-40B4-BE49-F238E27FC236}">
+                <a16:creationId xmlns:a16="http://schemas.microsoft.com/office/drawing/2014/main" id="{802C9A30-9CD1-4907-B5B7-2F6BE57885E8}"/>
+              </a:ext>
+            </a:extLst>
+          </p:cNvPr>
+          <p:cNvSpPr>
+            <a:spLocks xmlns:a="http://schemas.openxmlformats.org/drawingml/2006/main" noGrp="1"/>
+          </p:cNvSpPr>
+          <p:nvPr/>
+        </p:nvSpPr>
+        <p:spPr>
+          <a:xfrm xmlns:a="http://schemas.openxmlformats.org/drawingml/2006/main">
+            <a:off x="952500" y="2000250"/>
+            <a:ext cx="2190750" cy="400050"/>
+          </a:xfrm>
+          <a:prstGeom xmlns:a="http://schemas.openxmlformats.org/drawingml/2006/main" prst="rect">
+            <a:avLst/>
+          </a:prstGeom>
+          <a:noFill xmlns:a="http://schemas.openxmlformats.org/drawingml/2006/main"/>
+          <a:ln xmlns:a="http://schemas.openxmlformats.org/drawingml/2006/main" w="0">
+            <a:noFill/>
+            <a:prstDash val="solid"/>
+          </a:ln>
+        </p:spPr>
+        <p:txBody>
+          <a:bodyPr xmlns:a="http://schemas.openxmlformats.org/drawingml/2006/main" anchor="t"/>
+          <a:lstStyle xmlns:a="http://schemas.openxmlformats.org/drawingml/2006/main"/>
+          <a:p xmlns:a="http://schemas.openxmlformats.org/drawingml/2006/main">
+            <a:pPr algn="l">
+              <a:buNone/>
+              <a:defRPr sz="2025" b="1">
+                <a:solidFill>
+                  <a:srgbClr val="2E7D5B"/>
+                </a:solidFill>
+                <a:latin typeface="Arial"/>
+                <a:ea typeface="Arial"/>
+                <a:cs typeface="Arial"/>
+              </a:defRPr>
+            </a:pPr>
+            <a:r>
+              <a:rPr sz="2025" b="1">
+                <a:solidFill>
+                  <a:srgbClr val="2E7D5B"/>
+                </a:solidFill>
+                <a:latin typeface="Arial"/>
+                <a:ea typeface="Arial"/>
+                <a:cs typeface="Arial"/>
+              </a:rPr>
+              <a:t>Established</a:t>
+            </a:r>
+          </a:p>
+        </p:txBody>
+      </p:sp>
+      <p:sp>
+        <p:nvSpPr>
+          <p:cNvPr id="7" name="">
+            <a:extLst xmlns:a="http://schemas.openxmlformats.org/drawingml/2006/main">
+              <a:ext uri="{FF2B5EF4-FFF2-40B4-BE49-F238E27FC236}">
+                <a16:creationId xmlns:a16="http://schemas.microsoft.com/office/drawing/2014/main" id="{4C0B6826-C1CD-407B-B1BD-7E0FDA1C4296}"/>
+              </a:ext>
+            </a:extLst>
+          </p:cNvPr>
+          <p:cNvSpPr>
+            <a:spLocks xmlns:a="http://schemas.openxmlformats.org/drawingml/2006/main" noGrp="1"/>
+          </p:cNvSpPr>
+          <p:nvPr/>
+        </p:nvSpPr>
+        <p:spPr>
+          <a:xfrm xmlns:a="http://schemas.openxmlformats.org/drawingml/2006/main">
+            <a:off x="3276600" y="1943100"/>
+            <a:ext cx="7772400" cy="647700"/>
+          </a:xfrm>
+          <a:prstGeom xmlns:a="http://schemas.openxmlformats.org/drawingml/2006/main" prst="rect">
+            <a:avLst/>
+          </a:prstGeom>
+          <a:noFill xmlns:a="http://schemas.openxmlformats.org/drawingml/2006/main"/>
+          <a:ln xmlns:a="http://schemas.openxmlformats.org/drawingml/2006/main" w="0">
+            <a:noFill/>
+            <a:prstDash val="solid"/>
+          </a:ln>
+        </p:spPr>
+        <p:txBody>
+          <a:bodyPr xmlns:a="http://schemas.openxmlformats.org/drawingml/2006/main" anchor="t"/>
+          <a:lstStyle xmlns:a="http://schemas.openxmlformats.org/drawingml/2006/main"/>
+          <a:p xmlns:a="http://schemas.openxmlformats.org/drawingml/2006/main">
+            <a:pPr algn="l">
+              <a:buNone/>
+              <a:defRPr sz="1725" b="0">
+                <a:solidFill>
+                  <a:srgbClr val="101820"/>
+                </a:solidFill>
+                <a:latin typeface="Arial"/>
+                <a:ea typeface="Arial"/>
+                <a:cs typeface="Arial"/>
+              </a:defRPr>
+            </a:pPr>
+            <a:r>
+              <a:rPr sz="1725" b="0">
+                <a:solidFill>
+                  <a:srgbClr val="101820"/>
+                </a:solidFill>
+                <a:latin typeface="Arial"/>
+                <a:ea typeface="Arial"/>
+                <a:cs typeface="Arial"/>
+              </a:rPr>
+              <a:t>Causal replay, costs, five frozen controls, positive results in all three broad phases, and materially lower drawdown than SPY.</a:t>
+            </a:r>
+          </a:p>
+        </p:txBody>
+      </p:sp>
+      <p:sp>
+        <p:nvSpPr>
+          <p:cNvPr id="8" name="">
+            <a:extLst xmlns:a="http://schemas.openxmlformats.org/drawingml/2006/main">
+              <a:ext uri="{FF2B5EF4-FFF2-40B4-BE49-F238E27FC236}">
+                <a16:creationId xmlns:a16="http://schemas.microsoft.com/office/drawing/2014/main" id="{3AFAF26A-2C8D-481A-8C17-B8A9A3967177}"/>
+              </a:ext>
+            </a:extLst>
+          </p:cNvPr>
+          <p:cNvSpPr>
+            <a:spLocks xmlns:a="http://schemas.openxmlformats.org/drawingml/2006/main" noGrp="1"/>
+          </p:cNvSpPr>
+          <p:nvPr/>
+        </p:nvSpPr>
+        <p:spPr>
+          <a:xfrm xmlns:a="http://schemas.openxmlformats.org/drawingml/2006/main">
+            <a:off x="666750" y="3048000"/>
+            <a:ext cx="10858500" cy="1028700"/>
+          </a:xfrm>
+          <a:prstGeom xmlns:a="http://schemas.openxmlformats.org/drawingml/2006/main" prst="rect">
+            <a:avLst/>
+          </a:prstGeom>
+          <a:solidFill xmlns:a="http://schemas.openxmlformats.org/drawingml/2006/main">
+            <a:srgbClr val="F7E7E2"/>
+          </a:solidFill>
+          <a:ln xmlns:a="http://schemas.openxmlformats.org/drawingml/2006/main" w="9525">
+            <a:solidFill>
+              <a:srgbClr val="C8553D"/>
+            </a:solidFill>
+            <a:prstDash val="solid"/>
+          </a:ln>
+        </p:spPr>
+      </p:sp>
+      <p:sp>
+        <p:nvSpPr>
+          <p:cNvPr id="9" name="">
+            <a:extLst xmlns:a="http://schemas.openxmlformats.org/drawingml/2006/main">
+              <a:ext uri="{FF2B5EF4-FFF2-40B4-BE49-F238E27FC236}">
+                <a16:creationId xmlns:a16="http://schemas.microsoft.com/office/drawing/2014/main" id="{DDE8FBE1-8020-4B7A-932E-FC73716C919B}"/>
+              </a:ext>
+            </a:extLst>
+          </p:cNvPr>
+          <p:cNvSpPr>
+            <a:spLocks xmlns:a="http://schemas.openxmlformats.org/drawingml/2006/main" noGrp="1"/>
+          </p:cNvSpPr>
+          <p:nvPr/>
+        </p:nvSpPr>
+        <p:spPr>
+          <a:xfrm xmlns:a="http://schemas.openxmlformats.org/drawingml/2006/main">
+            <a:off x="952500" y="3295650"/>
+            <a:ext cx="2190750" cy="400050"/>
+          </a:xfrm>
+          <a:prstGeom xmlns:a="http://schemas.openxmlformats.org/drawingml/2006/main" prst="rect">
+            <a:avLst/>
+          </a:prstGeom>
+          <a:noFill xmlns:a="http://schemas.openxmlformats.org/drawingml/2006/main"/>
+          <a:ln xmlns:a="http://schemas.openxmlformats.org/drawingml/2006/main" w="0">
+            <a:noFill/>
+            <a:prstDash val="solid"/>
+          </a:ln>
+        </p:spPr>
+        <p:txBody>
+          <a:bodyPr xmlns:a="http://schemas.openxmlformats.org/drawingml/2006/main" anchor="t"/>
+          <a:lstStyle xmlns:a="http://schemas.openxmlformats.org/drawingml/2006/main"/>
+          <a:p xmlns:a="http://schemas.openxmlformats.org/drawingml/2006/main">
+            <a:pPr algn="l">
+              <a:buNone/>
+              <a:defRPr sz="2025" b="1">
+                <a:solidFill>
+                  <a:srgbClr val="C8553D"/>
+                </a:solidFill>
+                <a:latin typeface="Arial"/>
+                <a:ea typeface="Arial"/>
+                <a:cs typeface="Arial"/>
+              </a:defRPr>
+            </a:pPr>
+            <a:r>
+              <a:rPr sz="2025" b="1">
+                <a:solidFill>
+                  <a:srgbClr val="C8553D"/>
+                </a:solidFill>
+                <a:latin typeface="Arial"/>
+                <a:ea typeface="Arial"/>
+                <a:cs typeface="Arial"/>
+              </a:rPr>
+              <a:t>Not established</a:t>
+            </a:r>
+          </a:p>
+        </p:txBody>
+      </p:sp>
+      <p:sp>
+        <p:nvSpPr>
+          <p:cNvPr id="10" name="">
+            <a:extLst xmlns:a="http://schemas.openxmlformats.org/drawingml/2006/main">
+              <a:ext uri="{FF2B5EF4-FFF2-40B4-BE49-F238E27FC236}">
+                <a16:creationId xmlns:a16="http://schemas.microsoft.com/office/drawing/2014/main" id="{E6DA919C-47F4-4345-87E2-1F6DF9D0EC90}"/>
+              </a:ext>
+            </a:extLst>
+          </p:cNvPr>
+          <p:cNvSpPr>
+            <a:spLocks xmlns:a="http://schemas.openxmlformats.org/drawingml/2006/main" noGrp="1"/>
+          </p:cNvSpPr>
+          <p:nvPr/>
+        </p:nvSpPr>
+        <p:spPr>
+          <a:xfrm xmlns:a="http://schemas.openxmlformats.org/drawingml/2006/main">
+            <a:off x="3276600" y="3238500"/>
+            <a:ext cx="7772400" cy="647700"/>
+          </a:xfrm>
+          <a:prstGeom xmlns:a="http://schemas.openxmlformats.org/drawingml/2006/main" prst="rect">
+            <a:avLst/>
+          </a:prstGeom>
+          <a:noFill xmlns:a="http://schemas.openxmlformats.org/drawingml/2006/main"/>
+          <a:ln xmlns:a="http://schemas.openxmlformats.org/drawingml/2006/main" w="0">
+            <a:noFill/>
+            <a:prstDash val="solid"/>
+          </a:ln>
+        </p:spPr>
+        <p:txBody>
+          <a:bodyPr xmlns:a="http://schemas.openxmlformats.org/drawingml/2006/main" anchor="t"/>
+          <a:lstStyle xmlns:a="http://schemas.openxmlformats.org/drawingml/2006/main"/>
+          <a:p xmlns:a="http://schemas.openxmlformats.org/drawingml/2006/main">
+            <a:pPr algn="l">
+              <a:buNone/>
+              <a:defRPr sz="1725" b="0">
+                <a:solidFill>
+                  <a:srgbClr val="101820"/>
+                </a:solidFill>
+                <a:latin typeface="Arial"/>
+                <a:ea typeface="Arial"/>
+                <a:cs typeface="Arial"/>
+              </a:defRPr>
+            </a:pPr>
+            <a:r>
+              <a:rPr sz="1725" b="0">
+                <a:solidFill>
+                  <a:srgbClr val="101820"/>
+                </a:solidFill>
+                <a:latin typeface="Arial"/>
+                <a:ea typeface="Arial"/>
+                <a:cs typeface="Arial"/>
+              </a:rPr>
+              <a:t>No incremental absolute-veto value, no stable advantage over equal-weight, no raw-CAGR win over SPY, and no untouched confirmation.</a:t>
+            </a:r>
+          </a:p>
+        </p:txBody>
+      </p:sp>
+      <p:sp>
+        <p:nvSpPr>
+          <p:cNvPr id="11" name="">
+            <a:extLst xmlns:a="http://schemas.openxmlformats.org/drawingml/2006/main">
+              <a:ext uri="{FF2B5EF4-FFF2-40B4-BE49-F238E27FC236}">
+                <a16:creationId xmlns:a16="http://schemas.microsoft.com/office/drawing/2014/main" id="{0879E259-AD91-4B41-8E67-E5334F74BAB8}"/>
+              </a:ext>
+            </a:extLst>
+          </p:cNvPr>
+          <p:cNvSpPr>
+            <a:spLocks xmlns:a="http://schemas.openxmlformats.org/drawingml/2006/main" noGrp="1"/>
+          </p:cNvSpPr>
+          <p:nvPr/>
+        </p:nvSpPr>
+        <p:spPr>
+          <a:xfrm xmlns:a="http://schemas.openxmlformats.org/drawingml/2006/main">
+            <a:off x="666750" y="4343400"/>
+            <a:ext cx="10858500" cy="1028700"/>
+          </a:xfrm>
+          <a:prstGeom xmlns:a="http://schemas.openxmlformats.org/drawingml/2006/main" prst="rect">
+            <a:avLst/>
+          </a:prstGeom>
+          <a:solidFill xmlns:a="http://schemas.openxmlformats.org/drawingml/2006/main">
+            <a:srgbClr val="EDEDED"/>
+          </a:solidFill>
+          <a:ln xmlns:a="http://schemas.openxmlformats.org/drawingml/2006/main" w="9525">
+            <a:solidFill>
+              <a:srgbClr val="52616B"/>
+            </a:solidFill>
+            <a:prstDash val="solid"/>
+          </a:ln>
+        </p:spPr>
+      </p:sp>
+      <p:sp>
+        <p:nvSpPr>
+          <p:cNvPr id="12" name="">
+            <a:extLst xmlns:a="http://schemas.openxmlformats.org/drawingml/2006/main">
+              <a:ext uri="{FF2B5EF4-FFF2-40B4-BE49-F238E27FC236}">
+                <a16:creationId xmlns:a16="http://schemas.microsoft.com/office/drawing/2014/main" id="{FE0E70E3-6874-4441-9FD1-1060221212D9}"/>
+              </a:ext>
+            </a:extLst>
+          </p:cNvPr>
+          <p:cNvSpPr>
+            <a:spLocks xmlns:a="http://schemas.openxmlformats.org/drawingml/2006/main" noGrp="1"/>
+          </p:cNvSpPr>
+          <p:nvPr/>
+        </p:nvSpPr>
+        <p:spPr>
+          <a:xfrm xmlns:a="http://schemas.openxmlformats.org/drawingml/2006/main">
+            <a:off x="952500" y="4591050"/>
+            <a:ext cx="2190750" cy="400050"/>
+          </a:xfrm>
+          <a:prstGeom xmlns:a="http://schemas.openxmlformats.org/drawingml/2006/main" prst="rect">
+            <a:avLst/>
+          </a:prstGeom>
+          <a:noFill xmlns:a="http://schemas.openxmlformats.org/drawingml/2006/main"/>
+          <a:ln xmlns:a="http://schemas.openxmlformats.org/drawingml/2006/main" w="0">
+            <a:noFill/>
+            <a:prstDash val="solid"/>
+          </a:ln>
+        </p:spPr>
+        <p:txBody>
+          <a:bodyPr xmlns:a="http://schemas.openxmlformats.org/drawingml/2006/main" anchor="t"/>
+          <a:lstStyle xmlns:a="http://schemas.openxmlformats.org/drawingml/2006/main"/>
+          <a:p xmlns:a="http://schemas.openxmlformats.org/drawingml/2006/main">
+            <a:pPr algn="l">
+              <a:buNone/>
+              <a:defRPr sz="2025" b="1">
+                <a:solidFill>
+                  <a:srgbClr val="52616B"/>
+                </a:solidFill>
+                <a:latin typeface="Arial"/>
+                <a:ea typeface="Arial"/>
+                <a:cs typeface="Arial"/>
+              </a:defRPr>
+            </a:pPr>
+            <a:r>
+              <a:rPr sz="2025" b="1">
+                <a:solidFill>
+                  <a:srgbClr val="52616B"/>
+                </a:solidFill>
+                <a:latin typeface="Arial"/>
+                <a:ea typeface="Arial"/>
+                <a:cs typeface="Arial"/>
+              </a:rPr>
+              <a:t>Coverage STOP</a:t>
+            </a:r>
+          </a:p>
+        </p:txBody>
+      </p:sp>
+      <p:sp>
+        <p:nvSpPr>
+          <p:cNvPr id="13" name="">
+            <a:extLst xmlns:a="http://schemas.openxmlformats.org/drawingml/2006/main">
+              <a:ext uri="{FF2B5EF4-FFF2-40B4-BE49-F238E27FC236}">
+                <a16:creationId xmlns:a16="http://schemas.microsoft.com/office/drawing/2014/main" id="{7D88D2F7-BBA9-4B06-83BF-EF6C40360B55}"/>
+              </a:ext>
+            </a:extLst>
+          </p:cNvPr>
+          <p:cNvSpPr>
+            <a:spLocks xmlns:a="http://schemas.openxmlformats.org/drawingml/2006/main" noGrp="1"/>
+          </p:cNvSpPr>
+          <p:nvPr/>
+        </p:nvSpPr>
+        <p:spPr>
+          <a:xfrm xmlns:a="http://schemas.openxmlformats.org/drawingml/2006/main">
+            <a:off x="3276600" y="4533900"/>
+            <a:ext cx="7772400" cy="647700"/>
+          </a:xfrm>
+          <a:prstGeom xmlns:a="http://schemas.openxmlformats.org/drawingml/2006/main" prst="rect">
+            <a:avLst/>
+          </a:prstGeom>
+          <a:noFill xmlns:a="http://schemas.openxmlformats.org/drawingml/2006/main"/>
+          <a:ln xmlns:a="http://schemas.openxmlformats.org/drawingml/2006/main" w="0">
+            <a:noFill/>
+            <a:prstDash val="solid"/>
+          </a:ln>
+        </p:spPr>
+        <p:txBody>
+          <a:bodyPr xmlns:a="http://schemas.openxmlformats.org/drawingml/2006/main" anchor="t"/>
+          <a:lstStyle xmlns:a="http://schemas.openxmlformats.org/drawingml/2006/main"/>
+          <a:p xmlns:a="http://schemas.openxmlformats.org/drawingml/2006/main">
+            <a:pPr algn="l">
+              <a:buNone/>
+              <a:defRPr sz="1725" b="0">
+                <a:solidFill>
+                  <a:srgbClr val="101820"/>
+                </a:solidFill>
+                <a:latin typeface="Arial"/>
+                <a:ea typeface="Arial"/>
+                <a:cs typeface="Arial"/>
+              </a:defRPr>
+            </a:pPr>
+            <a:r>
+              <a:rPr sz="1725" b="0">
+                <a:solidFill>
+                  <a:srgbClr val="101820"/>
+                </a:solidFill>
+                <a:latin typeface="Arial"/>
+                <a:ea typeface="Arial"/>
+                <a:cs typeface="Arial"/>
+              </a:rPr>
+              <a:t>The publisher’s 2008–2015 segment is unavailable; this replay overlaps the source’s parameter-selection history.</a:t>
+            </a:r>
+          </a:p>
+        </p:txBody>
+      </p:sp>
+      <p:sp>
+        <p:nvSpPr>
+          <p:cNvPr id="14" name="">
+            <a:extLst xmlns:a="http://schemas.openxmlformats.org/drawingml/2006/main">
+              <a:ext uri="{FF2B5EF4-FFF2-40B4-BE49-F238E27FC236}">
+                <a16:creationId xmlns:a16="http://schemas.microsoft.com/office/drawing/2014/main" id="{F7E3D076-54D1-4B3D-8F4A-D11630B25FFC}"/>
+              </a:ext>
+            </a:extLst>
+          </p:cNvPr>
+          <p:cNvSpPr>
+            <a:spLocks xmlns:a="http://schemas.openxmlformats.org/drawingml/2006/main" noGrp="1"/>
+          </p:cNvSpPr>
+          <p:nvPr/>
+        </p:nvSpPr>
+        <p:spPr>
+          <a:xfrm xmlns:a="http://schemas.openxmlformats.org/drawingml/2006/main">
+            <a:off x="2114550" y="5753100"/>
+            <a:ext cx="7962900" cy="495300"/>
+          </a:xfrm>
+          <a:prstGeom xmlns:a="http://schemas.openxmlformats.org/drawingml/2006/main" prst="rect">
+            <a:avLst/>
+          </a:prstGeom>
+          <a:solidFill xmlns:a="http://schemas.openxmlformats.org/drawingml/2006/main">
+            <a:srgbClr val="EAF5FB"/>
+          </a:solidFill>
+          <a:ln xmlns:a="http://schemas.openxmlformats.org/drawingml/2006/main" w="9525">
+            <a:solidFill>
+              <a:srgbClr val="6DCBF4"/>
+            </a:solidFill>
+            <a:prstDash val="solid"/>
+          </a:ln>
+        </p:spPr>
+      </p:sp>
+      <p:sp>
+        <p:nvSpPr>
+          <p:cNvPr id="15" name="">
+            <a:extLst xmlns:a="http://schemas.openxmlformats.org/drawingml/2006/main">
+              <a:ext uri="{FF2B5EF4-FFF2-40B4-BE49-F238E27FC236}">
+                <a16:creationId xmlns:a16="http://schemas.microsoft.com/office/drawing/2014/main" id="{FF7807EE-5E9A-4AC4-A3F2-FA1CED7A80A8}"/>
+              </a:ext>
+            </a:extLst>
+          </p:cNvPr>
+          <p:cNvSpPr>
+            <a:spLocks xmlns:a="http://schemas.openxmlformats.org/drawingml/2006/main" noGrp="1"/>
+          </p:cNvSpPr>
+          <p:nvPr/>
+        </p:nvSpPr>
+        <p:spPr>
+          <a:xfrm xmlns:a="http://schemas.openxmlformats.org/drawingml/2006/main">
+            <a:off x="2343150" y="5753100"/>
+            <a:ext cx="7505700" cy="457200"/>
+          </a:xfrm>
+          <a:prstGeom xmlns:a="http://schemas.openxmlformats.org/drawingml/2006/main" prst="rect">
+            <a:avLst/>
+          </a:prstGeom>
+          <a:noFill xmlns:a="http://schemas.openxmlformats.org/drawingml/2006/main"/>
+          <a:ln xmlns:a="http://schemas.openxmlformats.org/drawingml/2006/main" w="0">
+            <a:noFill/>
+            <a:prstDash val="solid"/>
+          </a:ln>
+        </p:spPr>
+        <p:txBody>
+          <a:bodyPr xmlns:a="http://schemas.openxmlformats.org/drawingml/2006/main" anchor="t"/>
+          <a:lstStyle xmlns:a="http://schemas.openxmlformats.org/drawingml/2006/main"/>
+          <a:p xmlns:a="http://schemas.openxmlformats.org/drawingml/2006/main">
+            <a:pPr algn="ctr">
+              <a:buNone/>
+              <a:defRPr sz="1350" b="1">
+                <a:solidFill>
+                  <a:srgbClr val="3D8DFF"/>
+                </a:solidFill>
+                <a:latin typeface="Arial"/>
+                <a:ea typeface="Arial"/>
+                <a:cs typeface="Arial"/>
+              </a:defRPr>
+            </a:pPr>
+            <a:r>
+              <a:rPr sz="1350" b="1">
+                <a:solidFill>
+                  <a:srgbClr val="3D8DFF"/>
+                </a:solidFill>
+                <a:latin typeface="Arial"/>
+                <a:ea typeface="Arial"/>
+                <a:cs typeface="Arial"/>
+              </a:rPr>
+              <a:t>Next proposed gate: pre-freeze robustness checks for relative rotation—then decide whether an untouched forward test is warranted.</a:t>
+            </a:r>
+          </a:p>
+        </p:txBody>
+      </p:sp>
+    </p:spTree>
+    <p:extLst>
+      <p:ext uri="{BB962C8B-B14F-4D97-AF65-F5344CB8AC3E}">
+        <p14:creationId xmlns:p14="http://schemas.microsoft.com/office/powerpoint/2010/main" val="733918031"/>
       </p:ext>
     </p:extLst>
   </p:cSld>

--- a/literature_studies/presentations/gen5_lit_mom_03_1_dual_momentum_study.pptx
+++ b/literature_studies/presentations/gen5_lit_mom_03_1_dual_momentum_study.pptx
@@ -2,36 +2,42 @@
 <file path=ppt/presentation.xml><?xml version="1.0" encoding="utf-8"?>
 <p:presentation xmlns:p="http://schemas.openxmlformats.org/presentationml/2006/main">
   <p:sldMasterIdLst>
-    <p:sldMasterId xmlns:r="http://schemas.openxmlformats.org/officeDocument/2006/relationships" id="2147483648" r:id="Rae8d336e5b5d4fbb"/>
+    <p:sldMasterId xmlns:r="http://schemas.openxmlformats.org/officeDocument/2006/relationships" id="2147483648" r:id="Rb5e94ffe28194d38"/>
   </p:sldMasterIdLst>
   <p:notesMasterIdLst>
-    <p:notesMasterId xmlns:r="http://schemas.openxmlformats.org/officeDocument/2006/relationships" r:id="Reefde1dab9354374"/>
+    <p:notesMasterId xmlns:r="http://schemas.openxmlformats.org/officeDocument/2006/relationships" r:id="R19394660097e453b"/>
   </p:notesMasterIdLst>
   <p:sldIdLst>
-    <p:sldId xmlns:r="http://schemas.openxmlformats.org/officeDocument/2006/relationships" id="256" r:id="Rf1f985c451244870"/>
-    <p:sldId xmlns:r="http://schemas.openxmlformats.org/officeDocument/2006/relationships" id="257" r:id="R086d61e7b0e14306"/>
-    <p:sldId xmlns:r="http://schemas.openxmlformats.org/officeDocument/2006/relationships" id="258" r:id="Rdb3246f22be04b89"/>
-    <p:sldId xmlns:r="http://schemas.openxmlformats.org/officeDocument/2006/relationships" id="259" r:id="R3776790a6e1e478b"/>
-    <p:sldId xmlns:r="http://schemas.openxmlformats.org/officeDocument/2006/relationships" id="260" r:id="R01aeeb47b2d547dc"/>
-    <p:sldId xmlns:r="http://schemas.openxmlformats.org/officeDocument/2006/relationships" id="261" r:id="Re9ed46d5f5b54c0b"/>
-    <p:sldId xmlns:r="http://schemas.openxmlformats.org/officeDocument/2006/relationships" id="262" r:id="R655b5d346be74df1"/>
-    <p:sldId xmlns:r="http://schemas.openxmlformats.org/officeDocument/2006/relationships" id="263" r:id="R99abe4febb8e48ad"/>
-    <p:sldId xmlns:r="http://schemas.openxmlformats.org/officeDocument/2006/relationships" id="264" r:id="R9c64e1fd01db478c"/>
-    <p:sldId xmlns:r="http://schemas.openxmlformats.org/officeDocument/2006/relationships" id="265" r:id="Rfeb6dae1e1c74157"/>
-    <p:sldId xmlns:r="http://schemas.openxmlformats.org/officeDocument/2006/relationships" id="266" r:id="Rb56e179abecd45ae"/>
-    <p:sldId xmlns:r="http://schemas.openxmlformats.org/officeDocument/2006/relationships" id="267" r:id="R349ef24c29c541c6"/>
-    <p:sldId xmlns:r="http://schemas.openxmlformats.org/officeDocument/2006/relationships" id="268" r:id="R82cb72ea139a4bea"/>
-    <p:sldId xmlns:r="http://schemas.openxmlformats.org/officeDocument/2006/relationships" id="269" r:id="R609a8c6a49d9457a"/>
-    <p:sldId xmlns:r="http://schemas.openxmlformats.org/officeDocument/2006/relationships" id="270" r:id="R66b81e4378fc4f6f"/>
-    <p:sldId xmlns:r="http://schemas.openxmlformats.org/officeDocument/2006/relationships" id="271" r:id="R6f7dcb02ed7a450a"/>
-    <p:sldId xmlns:r="http://schemas.openxmlformats.org/officeDocument/2006/relationships" id="272" r:id="Rd6617f9ed0864dd3"/>
-    <p:sldId xmlns:r="http://schemas.openxmlformats.org/officeDocument/2006/relationships" id="273" r:id="R4bd5ace1f61640fd"/>
-    <p:sldId xmlns:r="http://schemas.openxmlformats.org/officeDocument/2006/relationships" id="274" r:id="R979f8d5d87604970"/>
-    <p:sldId xmlns:r="http://schemas.openxmlformats.org/officeDocument/2006/relationships" id="275" r:id="R9afc7c20eaea4eaa"/>
-    <p:sldId xmlns:r="http://schemas.openxmlformats.org/officeDocument/2006/relationships" id="276" r:id="Rd67d518ba3b24696"/>
-    <p:sldId xmlns:r="http://schemas.openxmlformats.org/officeDocument/2006/relationships" id="277" r:id="R8abde3f35b094194"/>
-    <p:sldId xmlns:r="http://schemas.openxmlformats.org/officeDocument/2006/relationships" id="278" r:id="R744a3fb6fe464d3f"/>
-    <p:sldId xmlns:r="http://schemas.openxmlformats.org/officeDocument/2006/relationships" id="279" r:id="Rcccf665801694fba"/>
+    <p:sldId xmlns:r="http://schemas.openxmlformats.org/officeDocument/2006/relationships" id="256" r:id="Rff16d336a36b4d07"/>
+    <p:sldId xmlns:r="http://schemas.openxmlformats.org/officeDocument/2006/relationships" id="257" r:id="R7e0bff10a1f443bc"/>
+    <p:sldId xmlns:r="http://schemas.openxmlformats.org/officeDocument/2006/relationships" id="258" r:id="R15f26f5cd1d049f3"/>
+    <p:sldId xmlns:r="http://schemas.openxmlformats.org/officeDocument/2006/relationships" id="259" r:id="R283d69e17d4844b6"/>
+    <p:sldId xmlns:r="http://schemas.openxmlformats.org/officeDocument/2006/relationships" id="260" r:id="R306f4e653e1c416d"/>
+    <p:sldId xmlns:r="http://schemas.openxmlformats.org/officeDocument/2006/relationships" id="261" r:id="Refd33f11af484a87"/>
+    <p:sldId xmlns:r="http://schemas.openxmlformats.org/officeDocument/2006/relationships" id="262" r:id="Ra5a11fca8c204178"/>
+    <p:sldId xmlns:r="http://schemas.openxmlformats.org/officeDocument/2006/relationships" id="263" r:id="Raf4f29be857f4a70"/>
+    <p:sldId xmlns:r="http://schemas.openxmlformats.org/officeDocument/2006/relationships" id="264" r:id="R559ecea52e774177"/>
+    <p:sldId xmlns:r="http://schemas.openxmlformats.org/officeDocument/2006/relationships" id="265" r:id="Rc501f1f2f3594e4a"/>
+    <p:sldId xmlns:r="http://schemas.openxmlformats.org/officeDocument/2006/relationships" id="266" r:id="R69418494d56540d0"/>
+    <p:sldId xmlns:r="http://schemas.openxmlformats.org/officeDocument/2006/relationships" id="267" r:id="R930f4354dc9a49d8"/>
+    <p:sldId xmlns:r="http://schemas.openxmlformats.org/officeDocument/2006/relationships" id="268" r:id="R973e7b16ca5144a9"/>
+    <p:sldId xmlns:r="http://schemas.openxmlformats.org/officeDocument/2006/relationships" id="269" r:id="Raff26dbb5a3d42d6"/>
+    <p:sldId xmlns:r="http://schemas.openxmlformats.org/officeDocument/2006/relationships" id="270" r:id="R6e98f1f05a01477f"/>
+    <p:sldId xmlns:r="http://schemas.openxmlformats.org/officeDocument/2006/relationships" id="271" r:id="R7a2d649341a8453a"/>
+    <p:sldId xmlns:r="http://schemas.openxmlformats.org/officeDocument/2006/relationships" id="272" r:id="R05d80ee482ad4a38"/>
+    <p:sldId xmlns:r="http://schemas.openxmlformats.org/officeDocument/2006/relationships" id="273" r:id="R69b1ae7d29014257"/>
+    <p:sldId xmlns:r="http://schemas.openxmlformats.org/officeDocument/2006/relationships" id="274" r:id="Ra981aad52a7c4bdd"/>
+    <p:sldId xmlns:r="http://schemas.openxmlformats.org/officeDocument/2006/relationships" id="275" r:id="Rb7d797d782ab43f1"/>
+    <p:sldId xmlns:r="http://schemas.openxmlformats.org/officeDocument/2006/relationships" id="276" r:id="R0b6d5e8ead504e71"/>
+    <p:sldId xmlns:r="http://schemas.openxmlformats.org/officeDocument/2006/relationships" id="277" r:id="Rec7a265a76424cf4"/>
+    <p:sldId xmlns:r="http://schemas.openxmlformats.org/officeDocument/2006/relationships" id="278" r:id="Rfa221f685c174be9"/>
+    <p:sldId xmlns:r="http://schemas.openxmlformats.org/officeDocument/2006/relationships" id="279" r:id="R6a0fa6d36ade48e2"/>
+    <p:sldId xmlns:r="http://schemas.openxmlformats.org/officeDocument/2006/relationships" id="280" r:id="R5a05494894cb43f7"/>
+    <p:sldId xmlns:r="http://schemas.openxmlformats.org/officeDocument/2006/relationships" id="281" r:id="R5e49ccab04054e27"/>
+    <p:sldId xmlns:r="http://schemas.openxmlformats.org/officeDocument/2006/relationships" id="282" r:id="Ra47cda2131bf46f8"/>
+    <p:sldId xmlns:r="http://schemas.openxmlformats.org/officeDocument/2006/relationships" id="283" r:id="Reb2f54dde43b4829"/>
+    <p:sldId xmlns:r="http://schemas.openxmlformats.org/officeDocument/2006/relationships" id="284" r:id="R3fb9934cd90a4a1e"/>
+    <p:sldId xmlns:r="http://schemas.openxmlformats.org/officeDocument/2006/relationships" id="285" r:id="R79896a76c1b94168"/>
   </p:sldIdLst>
   <p:sldSz cx="12192000" cy="6858000"/>
   <p:notesSz cx="6858000" cy="9144000"/>
@@ -465,7 +471,7 @@
           <a:lstStyle xmlns:a="http://schemas.openxmlformats.org/drawingml/2006/main"/>
           <a:p xmlns:a="http://schemas.openxmlformats.org/drawingml/2006/main">
             <a:r>
-              <a:t>The deck now contains both the source/mechanics opening and the authorized 2016-2026 causal replay. The replay remains retrospective, overlaps the source's parameter-selection history, and creates neither independent confirmation nor forward authority.</a:t>
+              <a:t>This deck now records the literature hypothesis, mechanics proof, retrospective nine-ETF replay, and descriptive transport POCs across a sector-ETF fleet and eleven static stock-sector fleets. The stock results are survivor-biased and the deck grants no forward authority.</a:t>
             </a:r>
           </a:p>
           <a:p xmlns:a="http://schemas.openxmlformats.org/drawingml/2006/main">
@@ -490,17 +496,17 @@
           </a:p>
           <a:p xmlns:a="http://schemas.openxmlformats.org/drawingml/2006/main">
             <a:r>
-              <a:t>- C:/Users/Franc/OneDrive/Documents/Francis/Peltata Project/Time-Series-Modeling-Gen5/runs/research_workbench/literature_grounded/lit_mom_03_1_dual_momentum_replay_20260902/mom031r_report.md</a:t>
-            </a:r>
-          </a:p>
-          <a:p xmlns:a="http://schemas.openxmlformats.org/drawingml/2006/main">
-            <a:r>
-              <a:t>- C:/Users/Franc/OneDrive/Documents/Francis/Peltata Project/Time-Series-Modeling-Gen5/literature_studies/docs/GEN5_LIT_MOM_03_1_DUAL_MOMENTUM_REPLAY_RESULTS.md</a:t>
-            </a:r>
-          </a:p>
-          <a:p xmlns:a="http://schemas.openxmlformats.org/drawingml/2006/main">
-            <a:r>
-              <a:t>- Codex task conversation, 2026-09-02 (operator approval and replay interpretation)</a:t>
+              <a:t>- C:/Users/Franc/OneDrive/Documents/Francis/Peltata Project/Time-Series-Modeling-Gen5/literature_studies/docs/GEN5_LIT_MOM_03_2_UNIVERSE_TRANSPORT_RESULTS.md</a:t>
+            </a:r>
+          </a:p>
+          <a:p xmlns:a="http://schemas.openxmlformats.org/drawingml/2006/main">
+            <a:r>
+              <a:t>- C:/Users/Franc/OneDrive/Documents/Francis/Peltata Project/Time-Series-Modeling-Gen5/runs/research_workbench/literature_grounded/lit_mom_03_2_universe_transport_20260903/mom032_report.md</a:t>
+            </a:r>
+          </a:p>
+          <a:p xmlns:a="http://schemas.openxmlformats.org/drawingml/2006/main">
+            <a:r>
+              <a:t>- Codex task conversation, 2026-09-03 (operator approval and transport interpretation)</a:t>
             </a:r>
           </a:p>
           <a:p xmlns:a="http://schemas.openxmlformats.org/drawingml/2006/main">
@@ -598,6 +604,11 @@
               <a:t>- https://www.youtube.com/watch?v=c1HDiohiqLU</a:t>
             </a:r>
           </a:p>
+          <a:p xmlns:a="http://schemas.openxmlformats.org/drawingml/2006/main">
+            <a:r>
+              <a:t>[/Sources]</a:t>
+            </a:r>
+          </a:p>
         </p:txBody>
       </p:sp>
       <p:sp>
@@ -693,6 +704,11 @@
               <a:t>- Codex task conversation, 2026-09-02 (operator/assistant momentum interpretation huddle)</a:t>
             </a:r>
           </a:p>
+          <a:p xmlns:a="http://schemas.openxmlformats.org/drawingml/2006/main">
+            <a:r>
+              <a:t>[/Sources]</a:t>
+            </a:r>
+          </a:p>
         </p:txBody>
       </p:sp>
       <p:sp>
@@ -793,6 +809,11 @@
               <a:t>- Codex task conversation, 2026-09-02 (operator/assistant momentum interpretation huddle)</a:t>
             </a:r>
           </a:p>
+          <a:p xmlns:a="http://schemas.openxmlformats.org/drawingml/2006/main">
+            <a:r>
+              <a:t>[/Sources]</a:t>
+            </a:r>
+          </a:p>
         </p:txBody>
       </p:sp>
       <p:sp>
@@ -888,6 +909,11 @@
               <a:t>- Codex task conversation, 2026-09-02 (operator/assistant momentum interpretation huddle)</a:t>
             </a:r>
           </a:p>
+          <a:p xmlns:a="http://schemas.openxmlformats.org/drawingml/2006/main">
+            <a:r>
+              <a:t>[/Sources]</a:t>
+            </a:r>
+          </a:p>
         </p:txBody>
       </p:sp>
       <p:sp>
@@ -998,6 +1024,11 @@
               <a:t>- Codex task conversation, 2026-09-02 (operator/assistant momentum interpretation huddle)</a:t>
             </a:r>
           </a:p>
+          <a:p xmlns:a="http://schemas.openxmlformats.org/drawingml/2006/main">
+            <a:r>
+              <a:t>[/Sources]</a:t>
+            </a:r>
+          </a:p>
         </p:txBody>
       </p:sp>
       <p:sp>
@@ -1103,6 +1134,11 @@
               <a:t>- Codex task conversation, 2026-09-02 (operator approval and mechanics readout)</a:t>
             </a:r>
           </a:p>
+          <a:p xmlns:a="http://schemas.openxmlformats.org/drawingml/2006/main">
+            <a:r>
+              <a:t>[/Sources]</a:t>
+            </a:r>
+          </a:p>
         </p:txBody>
       </p:sp>
       <p:sp>
@@ -1203,6 +1239,11 @@
               <a:t>- Codex task conversation, 2026-09-02 (operator approval and mechanics readout)</a:t>
             </a:r>
           </a:p>
+          <a:p xmlns:a="http://schemas.openxmlformats.org/drawingml/2006/main">
+            <a:r>
+              <a:t>[/Sources]</a:t>
+            </a:r>
+          </a:p>
         </p:txBody>
       </p:sp>
       <p:sp>
@@ -1303,6 +1344,11 @@
               <a:t>- Codex task conversation, 2026-09-02 (operator approval and mechanics readout)</a:t>
             </a:r>
           </a:p>
+          <a:p xmlns:a="http://schemas.openxmlformats.org/drawingml/2006/main">
+            <a:r>
+              <a:t>[/Sources]</a:t>
+            </a:r>
+          </a:p>
         </p:txBody>
       </p:sp>
       <p:sp>
@@ -1408,6 +1454,11 @@
               <a:t>- Codex task conversation, 2026-09-02 (operator approval and mechanics readout)</a:t>
             </a:r>
           </a:p>
+          <a:p xmlns:a="http://schemas.openxmlformats.org/drawingml/2006/main">
+            <a:r>
+              <a:t>[/Sources]</a:t>
+            </a:r>
+          </a:p>
         </p:txBody>
       </p:sp>
       <p:sp>
@@ -1628,6 +1679,11 @@
               <a:t>- Codex task conversation, 2026-09-02 (operator/assistant momentum interpretation huddle)</a:t>
             </a:r>
           </a:p>
+          <a:p xmlns:a="http://schemas.openxmlformats.org/drawingml/2006/main">
+            <a:r>
+              <a:t>[/Sources]</a:t>
+            </a:r>
+          </a:p>
         </p:txBody>
       </p:sp>
       <p:sp>
@@ -2190,6 +2246,576 @@
 </p:notes>
 </file>
 
+<file path=ppt/notesSlides/notesSlide25.xml><?xml version="1.0" encoding="utf-8"?>
+<p:notes xmlns:p="http://schemas.openxmlformats.org/presentationml/2006/main">
+  <p:cSld>
+    <p:spTree>
+      <p:nvGrpSpPr>
+        <p:cNvPr id="1" name=""/>
+        <p:cNvGrpSpPr/>
+        <p:nvPr/>
+      </p:nvGrpSpPr>
+      <p:grpSpPr>
+        <a:xfrm xmlns:a="http://schemas.openxmlformats.org/drawingml/2006/main"/>
+      </p:grpSpPr>
+      <p:sp>
+        <p:nvSpPr>
+          <p:cNvPr id="2" name="Slide Image Placeholder 1"/>
+          <p:cNvSpPr>
+            <a:spLocks xmlns:a="http://schemas.openxmlformats.org/drawingml/2006/main" noGrp="1"/>
+          </p:cNvSpPr>
+          <p:nvPr>
+            <p:ph type="sldImg" idx="0"/>
+          </p:nvPr>
+        </p:nvSpPr>
+        <p:spPr/>
+      </p:sp>
+      <p:sp>
+        <p:nvSpPr>
+          <p:cNvPr id="3" name="Notes Placeholder 2"/>
+          <p:cNvSpPr>
+            <a:spLocks xmlns:a="http://schemas.openxmlformats.org/drawingml/2006/main" noGrp="1"/>
+          </p:cNvSpPr>
+          <p:nvPr>
+            <p:ph type="body" idx="1"/>
+          </p:nvPr>
+        </p:nvSpPr>
+        <p:spPr/>
+        <p:txBody>
+          <a:bodyPr xmlns:a="http://schemas.openxmlformats.org/drawingml/2006/main"/>
+          <a:lstStyle xmlns:a="http://schemas.openxmlformats.org/drawingml/2006/main"/>
+          <a:p xmlns:a="http://schemas.openxmlformats.org/drawingml/2006/main">
+            <a:r>
+              <a:t>This section changes only the ranking fleet while freezing the published mechanics. The clean sector-ETF test and the eleven static stock-sector POCs both challenge broad return transport.</a:t>
+            </a:r>
+          </a:p>
+          <a:p xmlns:a="http://schemas.openxmlformats.org/drawingml/2006/main">
+            <a:r>
+              <a:t/>
+            </a:r>
+          </a:p>
+          <a:p xmlns:a="http://schemas.openxmlformats.org/drawingml/2006/main">
+            <a:r>
+              <a:t>[Sources]</a:t>
+            </a:r>
+          </a:p>
+          <a:p xmlns:a="http://schemas.openxmlformats.org/drawingml/2006/main">
+            <a:r>
+              <a:t>- C:/Users/Franc/OneDrive/Documents/Francis/Peltata Project/Time-Series-Modeling-Gen5/runs/research_workbench/literature_grounded/lit_mom_03_2_universe_transport_20260903/mom032_report.md</a:t>
+            </a:r>
+          </a:p>
+          <a:p xmlns:a="http://schemas.openxmlformats.org/drawingml/2006/main">
+            <a:r>
+              <a:t>- C:/Users/Franc/OneDrive/Documents/Francis/Peltata Project/Time-Series-Modeling-Gen5/runs/research_workbench/literature_grounded/lit_mom_03_2_universe_transport_20260903/mom032_transport_summary.csv</a:t>
+            </a:r>
+          </a:p>
+          <a:p xmlns:a="http://schemas.openxmlformats.org/drawingml/2006/main">
+            <a:r>
+              <a:t>- C:/Users/Franc/OneDrive/Documents/Francis/Peltata Project/Time-Series-Modeling-Gen5/runs/research_workbench/literature_grounded/lit_mom_03_2_universe_transport_20260903/mom032_portfolio_metrics.csv</a:t>
+            </a:r>
+          </a:p>
+          <a:p xmlns:a="http://schemas.openxmlformats.org/drawingml/2006/main">
+            <a:r>
+              <a:t>- C:/Users/Franc/OneDrive/Documents/Francis/Peltata Project/Time-Series-Modeling-Gen5/runs/research_workbench/literature_grounded/lit_mom_03_2_universe_transport_20260903/mom032_universe_registry.csv</a:t>
+            </a:r>
+          </a:p>
+          <a:p xmlns:a="http://schemas.openxmlformats.org/drawingml/2006/main">
+            <a:r>
+              <a:t>- C:/Users/Franc/OneDrive/Documents/Francis/Peltata Project/Time-Series-Modeling-Gen5/literature_studies/R/gen5_lit_mom_03_2_universe_transport.R</a:t>
+            </a:r>
+          </a:p>
+          <a:p xmlns:a="http://schemas.openxmlformats.org/drawingml/2006/main">
+            <a:r>
+              <a:t>- C:/Users/Franc/OneDrive/Documents/Francis/Peltata Project/Time-Series-Modeling-Gen5/literature_studies/scripts/run_gen5_lit_mom_03_2_universe_transport.R</a:t>
+            </a:r>
+          </a:p>
+          <a:p xmlns:a="http://schemas.openxmlformats.org/drawingml/2006/main">
+            <a:r>
+              <a:t>- Codex task conversation, 2026-09-03 (operator approval and transport interpretation)</a:t>
+            </a:r>
+          </a:p>
+          <a:p xmlns:a="http://schemas.openxmlformats.org/drawingml/2006/main">
+            <a:r>
+              <a:t>[/Sources]</a:t>
+            </a:r>
+          </a:p>
+        </p:txBody>
+      </p:sp>
+      <p:sp>
+        <p:nvSpPr>
+          <p:cNvPr id="4" name="Slide Number Placeholder 3"/>
+          <p:cNvSpPr>
+            <a:spLocks xmlns:a="http://schemas.openxmlformats.org/drawingml/2006/main" noGrp="1"/>
+          </p:cNvSpPr>
+          <p:nvPr>
+            <p:ph type="sldNum" idx="5"/>
+          </p:nvPr>
+        </p:nvSpPr>
+        <p:spPr/>
+        <p:txBody>
+          <a:bodyPr xmlns:a="http://schemas.openxmlformats.org/drawingml/2006/main"/>
+          <a:lstStyle xmlns:a="http://schemas.openxmlformats.org/drawingml/2006/main"/>
+          <a:p xmlns:a="http://schemas.openxmlformats.org/drawingml/2006/main"/>
+        </p:txBody>
+      </p:sp>
+    </p:spTree>
+  </p:cSld>
+  <p:clrMapOvr>
+    <a:masterClrMapping xmlns:a="http://schemas.openxmlformats.org/drawingml/2006/main"/>
+  </p:clrMapOvr>
+</p:notes>
+</file>
+
+<file path=ppt/notesSlides/notesSlide26.xml><?xml version="1.0" encoding="utf-8"?>
+<p:notes xmlns:p="http://schemas.openxmlformats.org/presentationml/2006/main">
+  <p:cSld>
+    <p:spTree>
+      <p:nvGrpSpPr>
+        <p:cNvPr id="1" name=""/>
+        <p:cNvGrpSpPr/>
+        <p:nvPr/>
+      </p:nvGrpSpPr>
+      <p:grpSpPr>
+        <a:xfrm xmlns:a="http://schemas.openxmlformats.org/drawingml/2006/main"/>
+      </p:grpSpPr>
+      <p:sp>
+        <p:nvSpPr>
+          <p:cNvPr id="2" name="Slide Image Placeholder 1"/>
+          <p:cNvSpPr>
+            <a:spLocks xmlns:a="http://schemas.openxmlformats.org/drawingml/2006/main" noGrp="1"/>
+          </p:cNvSpPr>
+          <p:nvPr>
+            <p:ph type="sldImg" idx="0"/>
+          </p:nvPr>
+        </p:nvSpPr>
+        <p:spPr/>
+      </p:sp>
+      <p:sp>
+        <p:nvSpPr>
+          <p:cNvPr id="3" name="Notes Placeholder 2"/>
+          <p:cNvSpPr>
+            <a:spLocks xmlns:a="http://schemas.openxmlformats.org/drawingml/2006/main" noGrp="1"/>
+          </p:cNvSpPr>
+          <p:nvPr>
+            <p:ph type="body" idx="1"/>
+          </p:nvPr>
+        </p:nvSpPr>
+        <p:spPr/>
+        <p:txBody>
+          <a:bodyPr xmlns:a="http://schemas.openxmlformats.org/drawingml/2006/main"/>
+          <a:lstStyle xmlns:a="http://schemas.openxmlformats.org/drawingml/2006/main"/>
+          <a:p xmlns:a="http://schemas.openxmlformats.org/drawingml/2006/main">
+            <a:r>
+              <a:t>Every universe uses the same causal 10/25-week, top-three, positive-only signal and the same execution and cost convention. XLC is excluded from the sector-ETF fleet because its inception postdates the requested history.</a:t>
+            </a:r>
+          </a:p>
+          <a:p xmlns:a="http://schemas.openxmlformats.org/drawingml/2006/main">
+            <a:r>
+              <a:t/>
+            </a:r>
+          </a:p>
+          <a:p xmlns:a="http://schemas.openxmlformats.org/drawingml/2006/main">
+            <a:r>
+              <a:t>[Sources]</a:t>
+            </a:r>
+          </a:p>
+          <a:p xmlns:a="http://schemas.openxmlformats.org/drawingml/2006/main">
+            <a:r>
+              <a:t>- C:/Users/Franc/OneDrive/Documents/Francis/Peltata Project/Time-Series-Modeling-Gen5/runs/research_workbench/literature_grounded/lit_mom_03_2_universe_transport_20260903/mom032_report.md</a:t>
+            </a:r>
+          </a:p>
+          <a:p xmlns:a="http://schemas.openxmlformats.org/drawingml/2006/main">
+            <a:r>
+              <a:t>- C:/Users/Franc/OneDrive/Documents/Francis/Peltata Project/Time-Series-Modeling-Gen5/runs/research_workbench/literature_grounded/lit_mom_03_2_universe_transport_20260903/mom032_universe_registry.csv</a:t>
+            </a:r>
+          </a:p>
+          <a:p xmlns:a="http://schemas.openxmlformats.org/drawingml/2006/main">
+            <a:r>
+              <a:t>- C:/Users/Franc/OneDrive/Documents/Francis/Peltata Project/Time-Series-Modeling-Gen5/operator_hypothesis_lab/registries/return_geometry_wide_atlas.csv</a:t>
+            </a:r>
+          </a:p>
+          <a:p xmlns:a="http://schemas.openxmlformats.org/drawingml/2006/main">
+            <a:r>
+              <a:t>- C:/Users/Franc/OneDrive/Documents/Francis/Peltata Project/Time-Series-Modeling-Gen5/literature_studies/R/gen5_lit_mom_03_2_universe_transport.R</a:t>
+            </a:r>
+          </a:p>
+          <a:p xmlns:a="http://schemas.openxmlformats.org/drawingml/2006/main">
+            <a:r>
+              <a:t>- C:/Users/Franc/OneDrive/Documents/Francis/Peltata Project/Time-Series-Modeling-Gen5/literature_studies/scripts/run_gen5_lit_mom_03_2_universe_transport.R</a:t>
+            </a:r>
+          </a:p>
+          <a:p xmlns:a="http://schemas.openxmlformats.org/drawingml/2006/main">
+            <a:r>
+              <a:t>- Codex task conversation, 2026-09-03 (operator approval and transport interpretation)</a:t>
+            </a:r>
+          </a:p>
+          <a:p xmlns:a="http://schemas.openxmlformats.org/drawingml/2006/main">
+            <a:r>
+              <a:t>[/Sources]</a:t>
+            </a:r>
+          </a:p>
+        </p:txBody>
+      </p:sp>
+      <p:sp>
+        <p:nvSpPr>
+          <p:cNvPr id="4" name="Slide Number Placeholder 3"/>
+          <p:cNvSpPr>
+            <a:spLocks xmlns:a="http://schemas.openxmlformats.org/drawingml/2006/main" noGrp="1"/>
+          </p:cNvSpPr>
+          <p:nvPr>
+            <p:ph type="sldNum" idx="5"/>
+          </p:nvPr>
+        </p:nvSpPr>
+        <p:spPr/>
+        <p:txBody>
+          <a:bodyPr xmlns:a="http://schemas.openxmlformats.org/drawingml/2006/main"/>
+          <a:lstStyle xmlns:a="http://schemas.openxmlformats.org/drawingml/2006/main"/>
+          <a:p xmlns:a="http://schemas.openxmlformats.org/drawingml/2006/main"/>
+        </p:txBody>
+      </p:sp>
+    </p:spTree>
+  </p:cSld>
+  <p:clrMapOvr>
+    <a:masterClrMapping xmlns:a="http://schemas.openxmlformats.org/drawingml/2006/main"/>
+  </p:clrMapOvr>
+</p:notes>
+</file>
+
+<file path=ppt/notesSlides/notesSlide27.xml><?xml version="1.0" encoding="utf-8"?>
+<p:notes xmlns:p="http://schemas.openxmlformats.org/presentationml/2006/main">
+  <p:cSld>
+    <p:spTree>
+      <p:nvGrpSpPr>
+        <p:cNvPr id="1" name=""/>
+        <p:cNvGrpSpPr/>
+        <p:nvPr/>
+      </p:nvGrpSpPr>
+      <p:grpSpPr>
+        <a:xfrm xmlns:a="http://schemas.openxmlformats.org/drawingml/2006/main"/>
+      </p:grpSpPr>
+      <p:sp>
+        <p:nvSpPr>
+          <p:cNvPr id="2" name="Slide Image Placeholder 1"/>
+          <p:cNvSpPr>
+            <a:spLocks xmlns:a="http://schemas.openxmlformats.org/drawingml/2006/main" noGrp="1"/>
+          </p:cNvSpPr>
+          <p:nvPr>
+            <p:ph type="sldImg" idx="0"/>
+          </p:nvPr>
+        </p:nvSpPr>
+        <p:spPr/>
+      </p:sp>
+      <p:sp>
+        <p:nvSpPr>
+          <p:cNvPr id="3" name="Notes Placeholder 2"/>
+          <p:cNvSpPr>
+            <a:spLocks xmlns:a="http://schemas.openxmlformats.org/drawingml/2006/main" noGrp="1"/>
+          </p:cNvSpPr>
+          <p:nvPr>
+            <p:ph type="body" idx="1"/>
+          </p:nvPr>
+        </p:nvSpPr>
+        <p:spPr/>
+        <p:txBody>
+          <a:bodyPr xmlns:a="http://schemas.openxmlformats.org/drawingml/2006/main"/>
+          <a:lstStyle xmlns:a="http://schemas.openxmlformats.org/drawingml/2006/main"/>
+          <a:p xmlns:a="http://schemas.openxmlformats.org/drawingml/2006/main">
+            <a:r>
+              <a:t>The heatmap separates return enhancement from risk shaping. Technology is the only stock fleet with higher source CAGR than equal weight, and its advantage is only 0.43 percentage points. Source drawdown is shallower than equal weight in six of eleven stock sectors.</a:t>
+            </a:r>
+          </a:p>
+          <a:p xmlns:a="http://schemas.openxmlformats.org/drawingml/2006/main">
+            <a:r>
+              <a:t/>
+            </a:r>
+          </a:p>
+          <a:p xmlns:a="http://schemas.openxmlformats.org/drawingml/2006/main">
+            <a:r>
+              <a:t>[Sources]</a:t>
+            </a:r>
+          </a:p>
+          <a:p xmlns:a="http://schemas.openxmlformats.org/drawingml/2006/main">
+            <a:r>
+              <a:t>- C:/Users/Franc/OneDrive/Documents/Francis/Peltata Project/Time-Series-Modeling-Gen5/runs/research_workbench/literature_grounded/lit_mom_03_2_universe_transport_20260903/mom032_report.md</a:t>
+            </a:r>
+          </a:p>
+          <a:p xmlns:a="http://schemas.openxmlformats.org/drawingml/2006/main">
+            <a:r>
+              <a:t>- C:/Users/Franc/OneDrive/Documents/Francis/Peltata Project/Time-Series-Modeling-Gen5/runs/research_workbench/literature_grounded/lit_mom_03_2_universe_transport_20260903/mom032_transport_summary.csv</a:t>
+            </a:r>
+          </a:p>
+          <a:p xmlns:a="http://schemas.openxmlformats.org/drawingml/2006/main">
+            <a:r>
+              <a:t>- C:/Users/Franc/OneDrive/Documents/Francis/Peltata Project/Time-Series-Modeling-Gen5/runs/research_workbench/literature_grounded/lit_mom_03_2_universe_transport_20260903/mom032_portfolio_metrics.csv</a:t>
+            </a:r>
+          </a:p>
+          <a:p xmlns:a="http://schemas.openxmlformats.org/drawingml/2006/main">
+            <a:r>
+              <a:t>- C:/Users/Franc/OneDrive/Documents/Francis/Peltata Project/Time-Series-Modeling-Gen5/runs/research_workbench/literature_grounded/lit_mom_03_2_universe_transport_20260903/visuals/mom032_transport_scorecard.png</a:t>
+            </a:r>
+          </a:p>
+          <a:p xmlns:a="http://schemas.openxmlformats.org/drawingml/2006/main">
+            <a:r>
+              <a:t>- Codex task conversation, 2026-09-03 (operator approval and transport interpretation)</a:t>
+            </a:r>
+          </a:p>
+          <a:p xmlns:a="http://schemas.openxmlformats.org/drawingml/2006/main">
+            <a:r>
+              <a:t>[/Sources]</a:t>
+            </a:r>
+          </a:p>
+        </p:txBody>
+      </p:sp>
+      <p:sp>
+        <p:nvSpPr>
+          <p:cNvPr id="4" name="Slide Number Placeholder 3"/>
+          <p:cNvSpPr>
+            <a:spLocks xmlns:a="http://schemas.openxmlformats.org/drawingml/2006/main" noGrp="1"/>
+          </p:cNvSpPr>
+          <p:nvPr>
+            <p:ph type="sldNum" idx="5"/>
+          </p:nvPr>
+        </p:nvSpPr>
+        <p:spPr/>
+        <p:txBody>
+          <a:bodyPr xmlns:a="http://schemas.openxmlformats.org/drawingml/2006/main"/>
+          <a:lstStyle xmlns:a="http://schemas.openxmlformats.org/drawingml/2006/main"/>
+          <a:p xmlns:a="http://schemas.openxmlformats.org/drawingml/2006/main"/>
+        </p:txBody>
+      </p:sp>
+    </p:spTree>
+  </p:cSld>
+  <p:clrMapOvr>
+    <a:masterClrMapping xmlns:a="http://schemas.openxmlformats.org/drawingml/2006/main"/>
+  </p:clrMapOvr>
+</p:notes>
+</file>
+
+<file path=ppt/notesSlides/notesSlide28.xml><?xml version="1.0" encoding="utf-8"?>
+<p:notes xmlns:p="http://schemas.openxmlformats.org/presentationml/2006/main">
+  <p:cSld>
+    <p:spTree>
+      <p:nvGrpSpPr>
+        <p:cNvPr id="1" name=""/>
+        <p:cNvGrpSpPr/>
+        <p:nvPr/>
+      </p:nvGrpSpPr>
+      <p:grpSpPr>
+        <a:xfrm xmlns:a="http://schemas.openxmlformats.org/drawingml/2006/main"/>
+      </p:grpSpPr>
+      <p:sp>
+        <p:nvSpPr>
+          <p:cNvPr id="2" name="Slide Image Placeholder 1"/>
+          <p:cNvSpPr>
+            <a:spLocks xmlns:a="http://schemas.openxmlformats.org/drawingml/2006/main" noGrp="1"/>
+          </p:cNvSpPr>
+          <p:nvPr>
+            <p:ph type="sldImg" idx="0"/>
+          </p:nvPr>
+        </p:nvSpPr>
+        <p:spPr/>
+      </p:sp>
+      <p:sp>
+        <p:nvSpPr>
+          <p:cNvPr id="3" name="Notes Placeholder 2"/>
+          <p:cNvSpPr>
+            <a:spLocks xmlns:a="http://schemas.openxmlformats.org/drawingml/2006/main" noGrp="1"/>
+          </p:cNvSpPr>
+          <p:nvPr>
+            <p:ph type="body" idx="1"/>
+          </p:nvPr>
+        </p:nvSpPr>
+        <p:spPr/>
+        <p:txBody>
+          <a:bodyPr xmlns:a="http://schemas.openxmlformats.org/drawingml/2006/main"/>
+          <a:lstStyle xmlns:a="http://schemas.openxmlformats.org/drawingml/2006/main"/>
+          <a:p xmlns:a="http://schemas.openxmlformats.org/drawingml/2006/main">
+            <a:r>
+              <a:t>Unlike the nine-ETF replay, the absolute gate is active across these fleets. It lowers CAGR in every fleet while improving maximum drawdown in nine of twelve, revealing a repeated defense-for-return tradeoff rather than free incremental alpha.</a:t>
+            </a:r>
+          </a:p>
+          <a:p xmlns:a="http://schemas.openxmlformats.org/drawingml/2006/main">
+            <a:r>
+              <a:t/>
+            </a:r>
+          </a:p>
+          <a:p xmlns:a="http://schemas.openxmlformats.org/drawingml/2006/main">
+            <a:r>
+              <a:t>[Sources]</a:t>
+            </a:r>
+          </a:p>
+          <a:p xmlns:a="http://schemas.openxmlformats.org/drawingml/2006/main">
+            <a:r>
+              <a:t>- C:/Users/Franc/OneDrive/Documents/Francis/Peltata Project/Time-Series-Modeling-Gen5/runs/research_workbench/literature_grounded/lit_mom_03_2_universe_transport_20260903/mom032_report.md</a:t>
+            </a:r>
+          </a:p>
+          <a:p xmlns:a="http://schemas.openxmlformats.org/drawingml/2006/main">
+            <a:r>
+              <a:t>- C:/Users/Franc/OneDrive/Documents/Francis/Peltata Project/Time-Series-Modeling-Gen5/runs/research_workbench/literature_grounded/lit_mom_03_2_universe_transport_20260903/mom032_transport_summary.csv</a:t>
+            </a:r>
+          </a:p>
+          <a:p xmlns:a="http://schemas.openxmlformats.org/drawingml/2006/main">
+            <a:r>
+              <a:t>- C:/Users/Franc/OneDrive/Documents/Francis/Peltata Project/Time-Series-Modeling-Gen5/runs/research_workbench/literature_grounded/lit_mom_03_2_universe_transport_20260903/mom032_portfolio_metrics.csv</a:t>
+            </a:r>
+          </a:p>
+          <a:p xmlns:a="http://schemas.openxmlformats.org/drawingml/2006/main">
+            <a:r>
+              <a:t>- C:/Users/Franc/OneDrive/Documents/Francis/Peltata Project/Time-Series-Modeling-Gen5/runs/research_workbench/literature_grounded/lit_mom_03_2_universe_transport_20260903/visuals/mom032_component_attribution.png</a:t>
+            </a:r>
+          </a:p>
+          <a:p xmlns:a="http://schemas.openxmlformats.org/drawingml/2006/main">
+            <a:r>
+              <a:t>- Codex task conversation, 2026-09-03 (operator approval and transport interpretation)</a:t>
+            </a:r>
+          </a:p>
+          <a:p xmlns:a="http://schemas.openxmlformats.org/drawingml/2006/main">
+            <a:r>
+              <a:t>[/Sources]</a:t>
+            </a:r>
+          </a:p>
+        </p:txBody>
+      </p:sp>
+      <p:sp>
+        <p:nvSpPr>
+          <p:cNvPr id="4" name="Slide Number Placeholder 3"/>
+          <p:cNvSpPr>
+            <a:spLocks xmlns:a="http://schemas.openxmlformats.org/drawingml/2006/main" noGrp="1"/>
+          </p:cNvSpPr>
+          <p:nvPr>
+            <p:ph type="sldNum" idx="5"/>
+          </p:nvPr>
+        </p:nvSpPr>
+        <p:spPr/>
+        <p:txBody>
+          <a:bodyPr xmlns:a="http://schemas.openxmlformats.org/drawingml/2006/main"/>
+          <a:lstStyle xmlns:a="http://schemas.openxmlformats.org/drawingml/2006/main"/>
+          <a:p xmlns:a="http://schemas.openxmlformats.org/drawingml/2006/main"/>
+        </p:txBody>
+      </p:sp>
+    </p:spTree>
+  </p:cSld>
+  <p:clrMapOvr>
+    <a:masterClrMapping xmlns:a="http://schemas.openxmlformats.org/drawingml/2006/main"/>
+  </p:clrMapOvr>
+</p:notes>
+</file>
+
+<file path=ppt/notesSlides/notesSlide29.xml><?xml version="1.0" encoding="utf-8"?>
+<p:notes xmlns:p="http://schemas.openxmlformats.org/presentationml/2006/main">
+  <p:cSld>
+    <p:spTree>
+      <p:nvGrpSpPr>
+        <p:cNvPr id="1" name=""/>
+        <p:cNvGrpSpPr/>
+        <p:nvPr/>
+      </p:nvGrpSpPr>
+      <p:grpSpPr>
+        <a:xfrm xmlns:a="http://schemas.openxmlformats.org/drawingml/2006/main"/>
+      </p:grpSpPr>
+      <p:sp>
+        <p:nvSpPr>
+          <p:cNvPr id="2" name="Slide Image Placeholder 1"/>
+          <p:cNvSpPr>
+            <a:spLocks xmlns:a="http://schemas.openxmlformats.org/drawingml/2006/main" noGrp="1"/>
+          </p:cNvSpPr>
+          <p:nvPr>
+            <p:ph type="sldImg" idx="0"/>
+          </p:nvPr>
+        </p:nvSpPr>
+        <p:spPr/>
+      </p:sp>
+      <p:sp>
+        <p:nvSpPr>
+          <p:cNvPr id="3" name="Notes Placeholder 2"/>
+          <p:cNvSpPr>
+            <a:spLocks xmlns:a="http://schemas.openxmlformats.org/drawingml/2006/main" noGrp="1"/>
+          </p:cNvSpPr>
+          <p:nvPr>
+            <p:ph type="body" idx="1"/>
+          </p:nvPr>
+        </p:nvSpPr>
+        <p:spPr/>
+        <p:txBody>
+          <a:bodyPr xmlns:a="http://schemas.openxmlformats.org/drawingml/2006/main"/>
+          <a:lstStyle xmlns:a="http://schemas.openxmlformats.org/drawingml/2006/main"/>
+          <a:p xmlns:a="http://schemas.openxmlformats.org/drawingml/2006/main">
+            <a:r>
+              <a:t>Stock portfolios are a legitimate way to test whether a ranking principle is mechanically asset-agnostic. Here, however, the membership list is conditioned on present availability and complete history, so it is explicitly exploratory rather than a clean confirmation panel.</a:t>
+            </a:r>
+          </a:p>
+          <a:p xmlns:a="http://schemas.openxmlformats.org/drawingml/2006/main">
+            <a:r>
+              <a:t/>
+            </a:r>
+          </a:p>
+          <a:p xmlns:a="http://schemas.openxmlformats.org/drawingml/2006/main">
+            <a:r>
+              <a:t>[Sources]</a:t>
+            </a:r>
+          </a:p>
+          <a:p xmlns:a="http://schemas.openxmlformats.org/drawingml/2006/main">
+            <a:r>
+              <a:t>- C:/Users/Franc/OneDrive/Documents/Francis/Peltata Project/Time-Series-Modeling-Gen5/runs/research_workbench/literature_grounded/lit_mom_03_2_universe_transport_20260903/mom032_report.md</a:t>
+            </a:r>
+          </a:p>
+          <a:p xmlns:a="http://schemas.openxmlformats.org/drawingml/2006/main">
+            <a:r>
+              <a:t>- C:/Users/Franc/OneDrive/Documents/Francis/Peltata Project/Time-Series-Modeling-Gen5/runs/research_workbench/literature_grounded/lit_mom_03_2_universe_transport_20260903/mom032_transport_summary.csv</a:t>
+            </a:r>
+          </a:p>
+          <a:p xmlns:a="http://schemas.openxmlformats.org/drawingml/2006/main">
+            <a:r>
+              <a:t>- C:/Users/Franc/OneDrive/Documents/Francis/Peltata Project/Time-Series-Modeling-Gen5/runs/research_workbench/literature_grounded/lit_mom_03_2_universe_transport_20260903/mom032_universe_registry.csv</a:t>
+            </a:r>
+          </a:p>
+          <a:p xmlns:a="http://schemas.openxmlformats.org/drawingml/2006/main">
+            <a:r>
+              <a:t>- C:/Users/Franc/OneDrive/Documents/Francis/Peltata Project/Time-Series-Modeling-Gen5/operator_hypothesis_lab/registries/return_geometry_wide_atlas.csv</a:t>
+            </a:r>
+          </a:p>
+          <a:p xmlns:a="http://schemas.openxmlformats.org/drawingml/2006/main">
+            <a:r>
+              <a:t>- C:/Users/Franc/OneDrive/Documents/Francis/Peltata Project/Time-Series-Modeling-Gen5/literature_studies/docs/GEN5_LIT_MOM_03_2_UNIVERSE_TRANSPORT_RESULTS.md</a:t>
+            </a:r>
+          </a:p>
+          <a:p xmlns:a="http://schemas.openxmlformats.org/drawingml/2006/main">
+            <a:r>
+              <a:t>- Codex task conversation, 2026-09-03 (operator approval and transport interpretation)</a:t>
+            </a:r>
+          </a:p>
+          <a:p xmlns:a="http://schemas.openxmlformats.org/drawingml/2006/main">
+            <a:r>
+              <a:t>[/Sources]</a:t>
+            </a:r>
+          </a:p>
+        </p:txBody>
+      </p:sp>
+      <p:sp>
+        <p:nvSpPr>
+          <p:cNvPr id="4" name="Slide Number Placeholder 3"/>
+          <p:cNvSpPr>
+            <a:spLocks xmlns:a="http://schemas.openxmlformats.org/drawingml/2006/main" noGrp="1"/>
+          </p:cNvSpPr>
+          <p:nvPr>
+            <p:ph type="sldNum" idx="5"/>
+          </p:nvPr>
+        </p:nvSpPr>
+        <p:spPr/>
+        <p:txBody>
+          <a:bodyPr xmlns:a="http://schemas.openxmlformats.org/drawingml/2006/main"/>
+          <a:lstStyle xmlns:a="http://schemas.openxmlformats.org/drawingml/2006/main"/>
+          <a:p xmlns:a="http://schemas.openxmlformats.org/drawingml/2006/main"/>
+        </p:txBody>
+      </p:sp>
+    </p:spTree>
+  </p:cSld>
+  <p:clrMapOvr>
+    <a:masterClrMapping xmlns:a="http://schemas.openxmlformats.org/drawingml/2006/main"/>
+  </p:clrMapOvr>
+</p:notes>
+</file>
+
 <file path=ppt/notesSlides/notesSlide3.xml><?xml version="1.0" encoding="utf-8"?>
 <p:notes xmlns:p="http://schemas.openxmlformats.org/presentationml/2006/main">
   <p:cSld>
@@ -2256,6 +2882,131 @@
           <a:p xmlns:a="http://schemas.openxmlformats.org/drawingml/2006/main">
             <a:r>
               <a:t>- https://www.aqr.com/Insights/Research/Journal-Article/Time-Series-Momentum</a:t>
+            </a:r>
+          </a:p>
+          <a:p xmlns:a="http://schemas.openxmlformats.org/drawingml/2006/main">
+            <a:r>
+              <a:t>[/Sources]</a:t>
+            </a:r>
+          </a:p>
+        </p:txBody>
+      </p:sp>
+      <p:sp>
+        <p:nvSpPr>
+          <p:cNvPr id="4" name="Slide Number Placeholder 3"/>
+          <p:cNvSpPr>
+            <a:spLocks xmlns:a="http://schemas.openxmlformats.org/drawingml/2006/main" noGrp="1"/>
+          </p:cNvSpPr>
+          <p:nvPr>
+            <p:ph type="sldNum" idx="5"/>
+          </p:nvPr>
+        </p:nvSpPr>
+        <p:spPr/>
+        <p:txBody>
+          <a:bodyPr xmlns:a="http://schemas.openxmlformats.org/drawingml/2006/main"/>
+          <a:lstStyle xmlns:a="http://schemas.openxmlformats.org/drawingml/2006/main"/>
+          <a:p xmlns:a="http://schemas.openxmlformats.org/drawingml/2006/main"/>
+        </p:txBody>
+      </p:sp>
+    </p:spTree>
+  </p:cSld>
+  <p:clrMapOvr>
+    <a:masterClrMapping xmlns:a="http://schemas.openxmlformats.org/drawingml/2006/main"/>
+  </p:clrMapOvr>
+</p:notes>
+</file>
+
+<file path=ppt/notesSlides/notesSlide30.xml><?xml version="1.0" encoding="utf-8"?>
+<p:notes xmlns:p="http://schemas.openxmlformats.org/presentationml/2006/main">
+  <p:cSld>
+    <p:spTree>
+      <p:nvGrpSpPr>
+        <p:cNvPr id="1" name=""/>
+        <p:cNvGrpSpPr/>
+        <p:nvPr/>
+      </p:nvGrpSpPr>
+      <p:grpSpPr>
+        <a:xfrm xmlns:a="http://schemas.openxmlformats.org/drawingml/2006/main"/>
+      </p:grpSpPr>
+      <p:sp>
+        <p:nvSpPr>
+          <p:cNvPr id="2" name="Slide Image Placeholder 1"/>
+          <p:cNvSpPr>
+            <a:spLocks xmlns:a="http://schemas.openxmlformats.org/drawingml/2006/main" noGrp="1"/>
+          </p:cNvSpPr>
+          <p:nvPr>
+            <p:ph type="sldImg" idx="0"/>
+          </p:nvPr>
+        </p:nvSpPr>
+        <p:spPr/>
+      </p:sp>
+      <p:sp>
+        <p:nvSpPr>
+          <p:cNvPr id="3" name="Notes Placeholder 2"/>
+          <p:cNvSpPr>
+            <a:spLocks xmlns:a="http://schemas.openxmlformats.org/drawingml/2006/main" noGrp="1"/>
+          </p:cNvSpPr>
+          <p:nvPr>
+            <p:ph type="body" idx="1"/>
+          </p:nvPr>
+        </p:nvSpPr>
+        <p:spPr/>
+        <p:txBody>
+          <a:bodyPr xmlns:a="http://schemas.openxmlformats.org/drawingml/2006/main"/>
+          <a:lstStyle xmlns:a="http://schemas.openxmlformats.org/drawingml/2006/main"/>
+          <a:p xmlns:a="http://schemas.openxmlformats.org/drawingml/2006/main">
+            <a:r>
+              <a:t>The mechanics are not ETF-specific, but their economic value is universe-specific. The cleanest transported finding is that the absolute gate trades return for defense. A new research gate is required before testing a broad stock fleet or alternative risk controls.</a:t>
+            </a:r>
+          </a:p>
+          <a:p xmlns:a="http://schemas.openxmlformats.org/drawingml/2006/main">
+            <a:r>
+              <a:t/>
+            </a:r>
+          </a:p>
+          <a:p xmlns:a="http://schemas.openxmlformats.org/drawingml/2006/main">
+            <a:r>
+              <a:t>[Sources]</a:t>
+            </a:r>
+          </a:p>
+          <a:p xmlns:a="http://schemas.openxmlformats.org/drawingml/2006/main">
+            <a:r>
+              <a:t>- C:/Users/Franc/OneDrive/Documents/Francis/Peltata Project/Time-Series-Modeling-Gen5/runs/research_workbench/literature_grounded/lit_mom_03_2_universe_transport_20260903/mom032_report.md</a:t>
+            </a:r>
+          </a:p>
+          <a:p xmlns:a="http://schemas.openxmlformats.org/drawingml/2006/main">
+            <a:r>
+              <a:t>- C:/Users/Franc/OneDrive/Documents/Francis/Peltata Project/Time-Series-Modeling-Gen5/runs/research_workbench/literature_grounded/lit_mom_03_2_universe_transport_20260903/mom032_transport_summary.csv</a:t>
+            </a:r>
+          </a:p>
+          <a:p xmlns:a="http://schemas.openxmlformats.org/drawingml/2006/main">
+            <a:r>
+              <a:t>- C:/Users/Franc/OneDrive/Documents/Francis/Peltata Project/Time-Series-Modeling-Gen5/runs/research_workbench/literature_grounded/lit_mom_03_2_universe_transport_20260903/mom032_portfolio_metrics.csv</a:t>
+            </a:r>
+          </a:p>
+          <a:p xmlns:a="http://schemas.openxmlformats.org/drawingml/2006/main">
+            <a:r>
+              <a:t>- C:/Users/Franc/OneDrive/Documents/Francis/Peltata Project/Time-Series-Modeling-Gen5/literature_studies/docs/GEN5_LIT_MOM_03_2_UNIVERSE_TRANSPORT_RESULTS.md</a:t>
+            </a:r>
+          </a:p>
+          <a:p xmlns:a="http://schemas.openxmlformats.org/drawingml/2006/main">
+            <a:r>
+              <a:t>- C:/Users/Franc/OneDrive/Documents/Francis/Peltata Project/Time-Series-Modeling-Gen5/literature_studies/R/gen5_lit_mom_03_2_universe_transport.R</a:t>
+            </a:r>
+          </a:p>
+          <a:p xmlns:a="http://schemas.openxmlformats.org/drawingml/2006/main">
+            <a:r>
+              <a:t>- C:/Users/Franc/OneDrive/Documents/Francis/Peltata Project/Time-Series-Modeling-Gen5/literature_studies/scripts/run_gen5_lit_mom_03_2_universe_transport.R</a:t>
+            </a:r>
+          </a:p>
+          <a:p xmlns:a="http://schemas.openxmlformats.org/drawingml/2006/main">
+            <a:r>
+              <a:t>- Codex task conversation, 2026-09-03 (operator approval and transport interpretation)</a:t>
+            </a:r>
+          </a:p>
+          <a:p xmlns:a="http://schemas.openxmlformats.org/drawingml/2006/main">
+            <a:r>
+              <a:t>[/Sources]</a:t>
             </a:r>
           </a:p>
         </p:txBody>
@@ -2358,6 +3109,11 @@
               <a:t>- Codex task conversation, 2026-09-02 (operator/assistant momentum interpretation huddle)</a:t>
             </a:r>
           </a:p>
+          <a:p xmlns:a="http://schemas.openxmlformats.org/drawingml/2006/main">
+            <a:r>
+              <a:t>[/Sources]</a:t>
+            </a:r>
+          </a:p>
         </p:txBody>
       </p:sp>
       <p:sp>
@@ -2463,6 +3219,11 @@
               <a:t>- Codex task conversation, 2026-09-02 (operator/assistant momentum interpretation huddle)</a:t>
             </a:r>
           </a:p>
+          <a:p xmlns:a="http://schemas.openxmlformats.org/drawingml/2006/main">
+            <a:r>
+              <a:t>[/Sources]</a:t>
+            </a:r>
+          </a:p>
         </p:txBody>
       </p:sp>
       <p:sp>
@@ -2558,6 +3319,11 @@
               <a:t>- Codex task conversation, 2026-09-02 (operator/assistant momentum interpretation huddle)</a:t>
             </a:r>
           </a:p>
+          <a:p xmlns:a="http://schemas.openxmlformats.org/drawingml/2006/main">
+            <a:r>
+              <a:t>[/Sources]</a:t>
+            </a:r>
+          </a:p>
         </p:txBody>
       </p:sp>
       <p:sp>
@@ -2653,6 +3419,11 @@
               <a:t>- https://doi.org/10.2139/ssrn.2042750</a:t>
             </a:r>
           </a:p>
+          <a:p xmlns:a="http://schemas.openxmlformats.org/drawingml/2006/main">
+            <a:r>
+              <a:t>[/Sources]</a:t>
+            </a:r>
+          </a:p>
         </p:txBody>
       </p:sp>
       <p:sp>
@@ -2748,6 +3519,11 @@
               <a:t>- https://quantpedia.com/dual-vs-single-momentum-in-commodities-enhancing-risk-adjusted-returns-through-absolute-trend-filtering/</a:t>
             </a:r>
           </a:p>
+          <a:p xmlns:a="http://schemas.openxmlformats.org/drawingml/2006/main">
+            <a:r>
+              <a:t>[/Sources]</a:t>
+            </a:r>
+          </a:p>
         </p:txBody>
       </p:sp>
       <p:sp>
@@ -2836,6 +3612,11 @@
           <a:p xmlns:a="http://schemas.openxmlformats.org/drawingml/2006/main">
             <a:r>
               <a:t>- https://www.youtube.com/watch?v=c1HDiohiqLU</a:t>
+            </a:r>
+          </a:p>
+          <a:p xmlns:a="http://schemas.openxmlformats.org/drawingml/2006/main">
+            <a:r>
+              <a:t>[/Sources]</a:t>
             </a:r>
           </a:p>
         </p:txBody>
@@ -2903,7 +3684,7 @@
   </p:cSld>
   <p:clrMap bg1="lt1" tx1="dk1" bg2="lt2" tx2="dk2" accent1="accent1" accent2="accent2" accent3="accent3" accent4="accent4" accent5="accent5" accent6="accent6" hlink="hlink" folHlink="folHlink"/>
   <p:sldLayoutIdLst>
-    <p:sldLayoutId xmlns:r="http://schemas.openxmlformats.org/officeDocument/2006/relationships" id="2147483649" r:id="Ra685f9f8fd8d411f"/>
+    <p:sldLayoutId xmlns:r="http://schemas.openxmlformats.org/officeDocument/2006/relationships" id="2147483649" r:id="Red431e6d64d54af7"/>
   </p:sldLayoutIdLst>
   <p:txStyles>
     <p:titleStyle>
@@ -3933,7 +4714,7 @@
                 <a:ea typeface="Arial"/>
                 <a:cs typeface="Arial"/>
               </a:rPr>
-              <a:t>Retrospective replay only</a:t>
+              <a:t>Descriptive transport POCs</a:t>
             </a:r>
           </a:p>
           <a:p xmlns:a="http://schemas.openxmlformats.org/drawingml/2006/main">
@@ -4014,7 +4795,7 @@
                 <a:ea typeface="Arial"/>
                 <a:cs typeface="Arial"/>
               </a:rPr>
-              <a:t>Study deck · updated 2 September 2026</a:t>
+              <a:t>Study deck · updated 3 September 2026</a:t>
             </a:r>
           </a:p>
         </p:txBody>
@@ -8758,8 +9539,8 @@
         </p:nvSpPr>
         <p:spPr>
           <a:xfrm xmlns:a="http://schemas.openxmlformats.org/drawingml/2006/main">
-            <a:off x="11315700" y="6362700"/>
-            <a:ext cx="457200" cy="228600"/>
+            <a:off x="11163300" y="6362700"/>
+            <a:ext cx="609600" cy="228600"/>
           </a:xfrm>
           <a:prstGeom xmlns:a="http://schemas.openxmlformats.org/drawingml/2006/main" prst="rect">
             <a:avLst/>
@@ -10312,8 +11093,8 @@
         </p:nvSpPr>
         <p:spPr>
           <a:xfrm xmlns:a="http://schemas.openxmlformats.org/drawingml/2006/main">
-            <a:off x="11010900" y="6324600"/>
-            <a:ext cx="762000" cy="266700"/>
+            <a:off x="11163300" y="6362700"/>
+            <a:ext cx="609600" cy="228600"/>
           </a:xfrm>
           <a:prstGeom xmlns:a="http://schemas.openxmlformats.org/drawingml/2006/main" prst="rect">
             <a:avLst/>
@@ -10737,7 +11518,7 @@
           <p:nvPr/>
         </p:nvPicPr>
         <p:blipFill>
-          <a:blip xmlns:r="http://schemas.openxmlformats.org/officeDocument/2006/relationships" xmlns:a="http://schemas.openxmlformats.org/drawingml/2006/main" r:embed="R32eb528c5fd845d2"/>
+          <a:blip xmlns:r="http://schemas.openxmlformats.org/officeDocument/2006/relationships" xmlns:a="http://schemas.openxmlformats.org/drawingml/2006/main" r:embed="R140b277587264f00"/>
           <a:stretch xmlns:a="http://schemas.openxmlformats.org/drawingml/2006/main"/>
         </p:blipFill>
         <p:spPr>
@@ -11501,7 +12282,7 @@
           <p:nvPr/>
         </p:nvPicPr>
         <p:blipFill>
-          <a:blip xmlns:r="http://schemas.openxmlformats.org/officeDocument/2006/relationships" xmlns:a="http://schemas.openxmlformats.org/drawingml/2006/main" r:embed="Rd6c1e1cddc184ce5"/>
+          <a:blip xmlns:r="http://schemas.openxmlformats.org/officeDocument/2006/relationships" xmlns:a="http://schemas.openxmlformats.org/drawingml/2006/main" r:embed="R0c45ba86dc7e4f4c"/>
           <a:stretch xmlns:a="http://schemas.openxmlformats.org/drawingml/2006/main"/>
         </p:blipFill>
         <p:spPr>
@@ -14493,7 +15274,7 @@
           <p:nvPr/>
         </p:nvPicPr>
         <p:blipFill>
-          <a:blip xmlns:r="http://schemas.openxmlformats.org/officeDocument/2006/relationships" xmlns:a="http://schemas.openxmlformats.org/drawingml/2006/main" r:embed="Rb5b3a08ed9974db7"/>
+          <a:blip xmlns:r="http://schemas.openxmlformats.org/officeDocument/2006/relationships" xmlns:a="http://schemas.openxmlformats.org/drawingml/2006/main" r:embed="R2f43510b0ca94b09"/>
           <a:stretch xmlns:a="http://schemas.openxmlformats.org/drawingml/2006/main"/>
         </p:blipFill>
         <p:spPr>
@@ -15995,7 +16776,7 @@
           <p:nvPr/>
         </p:nvPicPr>
         <p:blipFill>
-          <a:blip xmlns:r="http://schemas.openxmlformats.org/officeDocument/2006/relationships" xmlns:a="http://schemas.openxmlformats.org/drawingml/2006/main" r:embed="R2e4dd40e4f094ae5"/>
+          <a:blip xmlns:r="http://schemas.openxmlformats.org/officeDocument/2006/relationships" xmlns:a="http://schemas.openxmlformats.org/drawingml/2006/main" r:embed="Rf58f8bc329064bf7"/>
           <a:stretch xmlns:a="http://schemas.openxmlformats.org/drawingml/2006/main"/>
         </p:blipFill>
         <p:spPr>
@@ -16960,8 +17741,8 @@
         </p:nvSpPr>
         <p:spPr>
           <a:xfrm xmlns:a="http://schemas.openxmlformats.org/drawingml/2006/main">
-            <a:off x="11010900" y="6324600"/>
-            <a:ext cx="762000" cy="266700"/>
+            <a:off x="11163300" y="6362700"/>
+            <a:ext cx="609600" cy="228600"/>
           </a:xfrm>
           <a:prstGeom xmlns:a="http://schemas.openxmlformats.org/drawingml/2006/main" prst="rect">
             <a:avLst/>
@@ -17528,6 +18309,3988 @@
                 <a:cs typeface="Arial"/>
               </a:rPr>
               <a:t>Next proposed gate: pre-freeze robustness checks for relative rotation—then decide whether an untouched forward test is warranted.</a:t>
+            </a:r>
+          </a:p>
+        </p:txBody>
+      </p:sp>
+    </p:spTree>
+    <p:extLst>
+      <p:ext uri="{BB962C8B-B14F-4D97-AF65-F5344CB8AC3E}">
+        <p14:creationId xmlns:p14="http://schemas.microsoft.com/office/powerpoint/2010/main" val="733918031"/>
+      </p:ext>
+    </p:extLst>
+  </p:cSld>
+</p:sld>
+</file>
+
+<file path=ppt/slides/slide25.xml><?xml version="1.0" encoding="utf-8"?>
+<p:sld xmlns:p="http://schemas.openxmlformats.org/presentationml/2006/main">
+  <p:cSld>
+    <p:bg>
+      <p:bgPr>
+        <a:solidFill xmlns:a="http://schemas.openxmlformats.org/drawingml/2006/main">
+          <a:srgbClr val="FFFFFF"/>
+        </a:solidFill>
+      </p:bgPr>
+    </p:bg>
+    <p:spTree>
+      <p:nvGrpSpPr>
+        <p:cNvPr id="1" name=""/>
+        <p:cNvGrpSpPr/>
+        <p:nvPr/>
+      </p:nvGrpSpPr>
+      <p:grpSpPr>
+        <a:xfrm xmlns:a="http://schemas.openxmlformats.org/drawingml/2006/main"/>
+      </p:grpSpPr>
+      <p:sp>
+        <p:nvSpPr>
+          <p:cNvPr id="16" name="">
+            <a:extLst xmlns:a="http://schemas.openxmlformats.org/drawingml/2006/main">
+              <a:ext uri="{FF2B5EF4-FFF2-40B4-BE49-F238E27FC236}">
+                <a16:creationId xmlns:a16="http://schemas.microsoft.com/office/drawing/2014/main" id="{0643D917-60C1-49B6-A04E-D85D24522DCE}"/>
+              </a:ext>
+            </a:extLst>
+          </p:cNvPr>
+          <p:cNvSpPr>
+            <a:spLocks xmlns:a="http://schemas.openxmlformats.org/drawingml/2006/main" noGrp="1"/>
+          </p:cNvSpPr>
+          <p:nvPr/>
+        </p:nvSpPr>
+        <p:spPr>
+          <a:xfrm xmlns:a="http://schemas.openxmlformats.org/drawingml/2006/main">
+            <a:off x="400050" y="228600"/>
+            <a:ext cx="2857500" cy="228600"/>
+          </a:xfrm>
+          <a:prstGeom xmlns:a="http://schemas.openxmlformats.org/drawingml/2006/main" prst="rect">
+            <a:avLst/>
+          </a:prstGeom>
+          <a:noFill xmlns:a="http://schemas.openxmlformats.org/drawingml/2006/main"/>
+          <a:ln xmlns:a="http://schemas.openxmlformats.org/drawingml/2006/main" w="0">
+            <a:noFill/>
+            <a:prstDash val="solid"/>
+          </a:ln>
+        </p:spPr>
+        <p:txBody>
+          <a:bodyPr xmlns:a="http://schemas.openxmlformats.org/drawingml/2006/main" anchor="t"/>
+          <a:lstStyle xmlns:a="http://schemas.openxmlformats.org/drawingml/2006/main"/>
+          <a:p xmlns:a="http://schemas.openxmlformats.org/drawingml/2006/main">
+            <a:pPr algn="l">
+              <a:buNone/>
+              <a:defRPr sz="1200" b="1">
+                <a:solidFill>
+                  <a:srgbClr val="3D8DFF"/>
+                </a:solidFill>
+                <a:latin typeface="Arial"/>
+                <a:ea typeface="Arial"/>
+                <a:cs typeface="Arial"/>
+              </a:defRPr>
+            </a:pPr>
+            <a:r>
+              <a:rPr sz="1200" b="1">
+                <a:solidFill>
+                  <a:srgbClr val="3D8DFF"/>
+                </a:solidFill>
+                <a:latin typeface="Arial"/>
+                <a:ea typeface="Arial"/>
+                <a:cs typeface="Arial"/>
+              </a:rPr>
+              <a:t>UNIVERSE TRANSPORT · DESCRIPTIVE POC</a:t>
+            </a:r>
+          </a:p>
+        </p:txBody>
+      </p:sp>
+      <p:sp>
+        <p:nvSpPr>
+          <p:cNvPr id="2" name="">
+            <a:extLst xmlns:a="http://schemas.openxmlformats.org/drawingml/2006/main">
+              <a:ext uri="{FF2B5EF4-FFF2-40B4-BE49-F238E27FC236}">
+                <a16:creationId xmlns:a16="http://schemas.microsoft.com/office/drawing/2014/main" id="{3F51F0D8-19C8-434E-90A3-9CD80434373E}"/>
+              </a:ext>
+            </a:extLst>
+          </p:cNvPr>
+          <p:cNvSpPr>
+            <a:spLocks xmlns:a="http://schemas.openxmlformats.org/drawingml/2006/main" noGrp="1"/>
+          </p:cNvSpPr>
+          <p:nvPr/>
+        </p:nvSpPr>
+        <p:spPr>
+          <a:xfrm xmlns:a="http://schemas.openxmlformats.org/drawingml/2006/main">
+            <a:off x="400050" y="476250"/>
+            <a:ext cx="11049000" cy="819150"/>
+          </a:xfrm>
+          <a:prstGeom xmlns:a="http://schemas.openxmlformats.org/drawingml/2006/main" prst="rect">
+            <a:avLst/>
+          </a:prstGeom>
+          <a:noFill xmlns:a="http://schemas.openxmlformats.org/drawingml/2006/main"/>
+          <a:ln xmlns:a="http://schemas.openxmlformats.org/drawingml/2006/main" w="0">
+            <a:noFill/>
+            <a:prstDash val="solid"/>
+          </a:ln>
+        </p:spPr>
+        <p:txBody>
+          <a:bodyPr xmlns:a="http://schemas.openxmlformats.org/drawingml/2006/main" anchor="t"/>
+          <a:lstStyle xmlns:a="http://schemas.openxmlformats.org/drawingml/2006/main"/>
+          <a:p xmlns:a="http://schemas.openxmlformats.org/drawingml/2006/main">
+            <a:pPr algn="l">
+              <a:buNone/>
+              <a:defRPr sz="2700" b="1">
+                <a:solidFill>
+                  <a:srgbClr val="101820"/>
+                </a:solidFill>
+                <a:latin typeface="Arial"/>
+                <a:ea typeface="Arial"/>
+                <a:cs typeface="Arial"/>
+              </a:defRPr>
+            </a:pPr>
+            <a:r>
+              <a:rPr sz="2700" b="1">
+                <a:solidFill>
+                  <a:srgbClr val="101820"/>
+                </a:solidFill>
+                <a:latin typeface="Arial"/>
+                <a:ea typeface="Arial"/>
+                <a:cs typeface="Arial"/>
+              </a:rPr>
+              <a:t>The same rule does not transport as a return enhancer</a:t>
+            </a:r>
+          </a:p>
+        </p:txBody>
+      </p:sp>
+      <p:sp>
+        <p:nvSpPr>
+          <p:cNvPr id="3" name="">
+            <a:extLst xmlns:a="http://schemas.openxmlformats.org/drawingml/2006/main">
+              <a:ext uri="{FF2B5EF4-FFF2-40B4-BE49-F238E27FC236}">
+                <a16:creationId xmlns:a16="http://schemas.microsoft.com/office/drawing/2014/main" id="{9C82D8E5-4706-4E1C-8A9C-3CB6FFDCDE1D}"/>
+              </a:ext>
+            </a:extLst>
+          </p:cNvPr>
+          <p:cNvSpPr>
+            <a:spLocks xmlns:a="http://schemas.openxmlformats.org/drawingml/2006/main" noGrp="1"/>
+          </p:cNvSpPr>
+          <p:nvPr/>
+        </p:nvSpPr>
+        <p:spPr>
+          <a:xfrm xmlns:a="http://schemas.openxmlformats.org/drawingml/2006/main">
+            <a:off x="400050" y="1428750"/>
+            <a:ext cx="11391900" cy="0"/>
+          </a:xfrm>
+          <a:prstGeom xmlns:a="http://schemas.openxmlformats.org/drawingml/2006/main" prst="line">
+            <a:avLst/>
+          </a:prstGeom>
+          <a:noFill xmlns:a="http://schemas.openxmlformats.org/drawingml/2006/main"/>
+          <a:ln xmlns:a="http://schemas.openxmlformats.org/drawingml/2006/main" w="9525">
+            <a:solidFill>
+              <a:srgbClr val="B8BCC4"/>
+            </a:solidFill>
+            <a:prstDash val="solid"/>
+          </a:ln>
+        </p:spPr>
+      </p:sp>
+      <p:sp>
+        <p:nvSpPr>
+          <p:cNvPr id="4" name="">
+            <a:extLst xmlns:a="http://schemas.openxmlformats.org/drawingml/2006/main">
+              <a:ext uri="{FF2B5EF4-FFF2-40B4-BE49-F238E27FC236}">
+                <a16:creationId xmlns:a16="http://schemas.microsoft.com/office/drawing/2014/main" id="{8452295D-1E22-4BA1-B87C-35FC318DE242}"/>
+              </a:ext>
+            </a:extLst>
+          </p:cNvPr>
+          <p:cNvSpPr>
+            <a:spLocks xmlns:a="http://schemas.openxmlformats.org/drawingml/2006/main" noGrp="1"/>
+          </p:cNvSpPr>
+          <p:nvPr/>
+        </p:nvSpPr>
+        <p:spPr>
+          <a:xfrm xmlns:a="http://schemas.openxmlformats.org/drawingml/2006/main">
+            <a:off x="11163300" y="6362700"/>
+            <a:ext cx="609600" cy="228600"/>
+          </a:xfrm>
+          <a:prstGeom xmlns:a="http://schemas.openxmlformats.org/drawingml/2006/main" prst="rect">
+            <a:avLst/>
+          </a:prstGeom>
+          <a:noFill xmlns:a="http://schemas.openxmlformats.org/drawingml/2006/main"/>
+          <a:ln xmlns:a="http://schemas.openxmlformats.org/drawingml/2006/main" w="0">
+            <a:noFill/>
+            <a:prstDash val="solid"/>
+          </a:ln>
+        </p:spPr>
+        <p:txBody>
+          <a:bodyPr xmlns:a="http://schemas.openxmlformats.org/drawingml/2006/main" anchor="t"/>
+          <a:lstStyle xmlns:a="http://schemas.openxmlformats.org/drawingml/2006/main"/>
+          <a:p xmlns:a="http://schemas.openxmlformats.org/drawingml/2006/main">
+            <a:pPr algn="r">
+              <a:buNone/>
+              <a:defRPr sz="1200" b="0">
+                <a:solidFill>
+                  <a:srgbClr val="52616B"/>
+                </a:solidFill>
+                <a:latin typeface="Arial"/>
+                <a:ea typeface="Arial"/>
+                <a:cs typeface="Arial"/>
+              </a:defRPr>
+            </a:pPr>
+            <a:r>
+              <a:rPr sz="1200" b="0">
+                <a:solidFill>
+                  <a:srgbClr val="52616B"/>
+                </a:solidFill>
+                <a:latin typeface="Arial"/>
+                <a:ea typeface="Arial"/>
+                <a:cs typeface="Arial"/>
+              </a:rPr>
+              <a:t>25</a:t>
+            </a:r>
+          </a:p>
+        </p:txBody>
+      </p:sp>
+      <p:sp>
+        <p:nvSpPr>
+          <p:cNvPr id="5" name="">
+            <a:extLst xmlns:a="http://schemas.openxmlformats.org/drawingml/2006/main">
+              <a:ext uri="{FF2B5EF4-FFF2-40B4-BE49-F238E27FC236}">
+                <a16:creationId xmlns:a16="http://schemas.microsoft.com/office/drawing/2014/main" id="{EA84F263-DCB7-4ECF-AC3C-B71C047C289B}"/>
+              </a:ext>
+            </a:extLst>
+          </p:cNvPr>
+          <p:cNvSpPr>
+            <a:spLocks xmlns:a="http://schemas.openxmlformats.org/drawingml/2006/main" noGrp="1"/>
+          </p:cNvSpPr>
+          <p:nvPr/>
+        </p:nvSpPr>
+        <p:spPr>
+          <a:xfrm xmlns:a="http://schemas.openxmlformats.org/drawingml/2006/main">
+            <a:off x="628650" y="1790700"/>
+            <a:ext cx="4953000" cy="3257550"/>
+          </a:xfrm>
+          <a:prstGeom xmlns:a="http://schemas.openxmlformats.org/drawingml/2006/main" prst="rect">
+            <a:avLst/>
+          </a:prstGeom>
+          <a:solidFill xmlns:a="http://schemas.openxmlformats.org/drawingml/2006/main">
+            <a:srgbClr val="E6F2EC"/>
+          </a:solidFill>
+          <a:ln xmlns:a="http://schemas.openxmlformats.org/drawingml/2006/main" w="9525">
+            <a:solidFill>
+              <a:srgbClr val="2E7D5B"/>
+            </a:solidFill>
+            <a:prstDash val="solid"/>
+          </a:ln>
+        </p:spPr>
+      </p:sp>
+      <p:sp>
+        <p:nvSpPr>
+          <p:cNvPr id="6" name="">
+            <a:extLst xmlns:a="http://schemas.openxmlformats.org/drawingml/2006/main">
+              <a:ext uri="{FF2B5EF4-FFF2-40B4-BE49-F238E27FC236}">
+                <a16:creationId xmlns:a16="http://schemas.microsoft.com/office/drawing/2014/main" id="{2535A567-86A3-447F-ABF8-3D7CC1CFCEE3}"/>
+              </a:ext>
+            </a:extLst>
+          </p:cNvPr>
+          <p:cNvSpPr>
+            <a:spLocks xmlns:a="http://schemas.openxmlformats.org/drawingml/2006/main" noGrp="1"/>
+          </p:cNvSpPr>
+          <p:nvPr/>
+        </p:nvSpPr>
+        <p:spPr>
+          <a:xfrm xmlns:a="http://schemas.openxmlformats.org/drawingml/2006/main">
+            <a:off x="971550" y="2114550"/>
+            <a:ext cx="3238500" cy="247650"/>
+          </a:xfrm>
+          <a:prstGeom xmlns:a="http://schemas.openxmlformats.org/drawingml/2006/main" prst="rect">
+            <a:avLst/>
+          </a:prstGeom>
+          <a:noFill xmlns:a="http://schemas.openxmlformats.org/drawingml/2006/main"/>
+          <a:ln xmlns:a="http://schemas.openxmlformats.org/drawingml/2006/main" w="0">
+            <a:noFill/>
+            <a:prstDash val="solid"/>
+          </a:ln>
+        </p:spPr>
+        <p:txBody>
+          <a:bodyPr xmlns:a="http://schemas.openxmlformats.org/drawingml/2006/main" anchor="t"/>
+          <a:lstStyle xmlns:a="http://schemas.openxmlformats.org/drawingml/2006/main"/>
+          <a:p xmlns:a="http://schemas.openxmlformats.org/drawingml/2006/main">
+            <a:pPr algn="l">
+              <a:buNone/>
+              <a:defRPr sz="1275" b="1">
+                <a:solidFill>
+                  <a:srgbClr val="2E7D5B"/>
+                </a:solidFill>
+                <a:latin typeface="Arial"/>
+                <a:ea typeface="Arial"/>
+                <a:cs typeface="Arial"/>
+              </a:defRPr>
+            </a:pPr>
+            <a:r>
+              <a:rPr sz="1275" b="1">
+                <a:solidFill>
+                  <a:srgbClr val="2E7D5B"/>
+                </a:solidFill>
+                <a:latin typeface="Arial"/>
+                <a:ea typeface="Arial"/>
+                <a:cs typeface="Arial"/>
+              </a:rPr>
+              <a:t>FROZEN BREADTH</a:t>
+            </a:r>
+          </a:p>
+        </p:txBody>
+      </p:sp>
+      <p:sp>
+        <p:nvSpPr>
+          <p:cNvPr id="7" name="">
+            <a:extLst xmlns:a="http://schemas.openxmlformats.org/drawingml/2006/main">
+              <a:ext uri="{FF2B5EF4-FFF2-40B4-BE49-F238E27FC236}">
+                <a16:creationId xmlns:a16="http://schemas.microsoft.com/office/drawing/2014/main" id="{B0EF5351-B0F9-4A7A-9512-D9DE9A581079}"/>
+              </a:ext>
+            </a:extLst>
+          </p:cNvPr>
+          <p:cNvSpPr>
+            <a:spLocks xmlns:a="http://schemas.openxmlformats.org/drawingml/2006/main" noGrp="1"/>
+          </p:cNvSpPr>
+          <p:nvPr/>
+        </p:nvSpPr>
+        <p:spPr>
+          <a:xfrm xmlns:a="http://schemas.openxmlformats.org/drawingml/2006/main">
+            <a:off x="971550" y="2667000"/>
+            <a:ext cx="1809750" cy="876300"/>
+          </a:xfrm>
+          <a:prstGeom xmlns:a="http://schemas.openxmlformats.org/drawingml/2006/main" prst="rect">
+            <a:avLst/>
+          </a:prstGeom>
+          <a:noFill xmlns:a="http://schemas.openxmlformats.org/drawingml/2006/main"/>
+          <a:ln xmlns:a="http://schemas.openxmlformats.org/drawingml/2006/main" w="0">
+            <a:noFill/>
+            <a:prstDash val="solid"/>
+          </a:ln>
+        </p:spPr>
+        <p:txBody>
+          <a:bodyPr xmlns:a="http://schemas.openxmlformats.org/drawingml/2006/main" anchor="t"/>
+          <a:lstStyle xmlns:a="http://schemas.openxmlformats.org/drawingml/2006/main"/>
+          <a:p xmlns:a="http://schemas.openxmlformats.org/drawingml/2006/main">
+            <a:pPr algn="l">
+              <a:buNone/>
+              <a:defRPr sz="5100" b="1">
+                <a:solidFill>
+                  <a:srgbClr val="2E7D5B"/>
+                </a:solidFill>
+                <a:latin typeface="Arial"/>
+                <a:ea typeface="Arial"/>
+                <a:cs typeface="Arial"/>
+              </a:defRPr>
+            </a:pPr>
+            <a:r>
+              <a:rPr sz="5100" b="1">
+                <a:solidFill>
+                  <a:srgbClr val="2E7D5B"/>
+                </a:solidFill>
+                <a:latin typeface="Arial"/>
+                <a:ea typeface="Arial"/>
+                <a:cs typeface="Arial"/>
+              </a:rPr>
+              <a:t>12</a:t>
+            </a:r>
+          </a:p>
+        </p:txBody>
+      </p:sp>
+      <p:sp>
+        <p:nvSpPr>
+          <p:cNvPr id="8" name="">
+            <a:extLst xmlns:a="http://schemas.openxmlformats.org/drawingml/2006/main">
+              <a:ext uri="{FF2B5EF4-FFF2-40B4-BE49-F238E27FC236}">
+                <a16:creationId xmlns:a16="http://schemas.microsoft.com/office/drawing/2014/main" id="{845D259F-CD58-4A41-8E58-6185E679F682}"/>
+              </a:ext>
+            </a:extLst>
+          </p:cNvPr>
+          <p:cNvSpPr>
+            <a:spLocks xmlns:a="http://schemas.openxmlformats.org/drawingml/2006/main" noGrp="1"/>
+          </p:cNvSpPr>
+          <p:nvPr/>
+        </p:nvSpPr>
+        <p:spPr>
+          <a:xfrm xmlns:a="http://schemas.openxmlformats.org/drawingml/2006/main">
+            <a:off x="2800350" y="2914650"/>
+            <a:ext cx="2324100" cy="457200"/>
+          </a:xfrm>
+          <a:prstGeom xmlns:a="http://schemas.openxmlformats.org/drawingml/2006/main" prst="rect">
+            <a:avLst/>
+          </a:prstGeom>
+          <a:noFill xmlns:a="http://schemas.openxmlformats.org/drawingml/2006/main"/>
+          <a:ln xmlns:a="http://schemas.openxmlformats.org/drawingml/2006/main" w="0">
+            <a:noFill/>
+            <a:prstDash val="solid"/>
+          </a:ln>
+        </p:spPr>
+        <p:txBody>
+          <a:bodyPr xmlns:a="http://schemas.openxmlformats.org/drawingml/2006/main" anchor="t"/>
+          <a:lstStyle xmlns:a="http://schemas.openxmlformats.org/drawingml/2006/main"/>
+          <a:p xmlns:a="http://schemas.openxmlformats.org/drawingml/2006/main">
+            <a:pPr algn="l">
+              <a:buNone/>
+              <a:defRPr sz="2100" b="1">
+                <a:solidFill>
+                  <a:srgbClr val="101820"/>
+                </a:solidFill>
+                <a:latin typeface="Arial"/>
+                <a:ea typeface="Arial"/>
+                <a:cs typeface="Arial"/>
+              </a:defRPr>
+            </a:pPr>
+            <a:r>
+              <a:rPr sz="2100" b="1">
+                <a:solidFill>
+                  <a:srgbClr val="101820"/>
+                </a:solidFill>
+                <a:latin typeface="Arial"/>
+                <a:ea typeface="Arial"/>
+                <a:cs typeface="Arial"/>
+              </a:rPr>
+              <a:t>independent fleets</a:t>
+            </a:r>
+          </a:p>
+        </p:txBody>
+      </p:sp>
+      <p:sp>
+        <p:nvSpPr>
+          <p:cNvPr id="9" name="">
+            <a:extLst xmlns:a="http://schemas.openxmlformats.org/drawingml/2006/main">
+              <a:ext uri="{FF2B5EF4-FFF2-40B4-BE49-F238E27FC236}">
+                <a16:creationId xmlns:a16="http://schemas.microsoft.com/office/drawing/2014/main" id="{2B561A00-F2ED-46FB-9D93-63A3E1AD5803}"/>
+              </a:ext>
+            </a:extLst>
+          </p:cNvPr>
+          <p:cNvSpPr>
+            <a:spLocks xmlns:a="http://schemas.openxmlformats.org/drawingml/2006/main" noGrp="1"/>
+          </p:cNvSpPr>
+          <p:nvPr/>
+        </p:nvSpPr>
+        <p:spPr>
+          <a:xfrm xmlns:a="http://schemas.openxmlformats.org/drawingml/2006/main">
+            <a:off x="971550" y="3810000"/>
+            <a:ext cx="4000500" cy="933450"/>
+          </a:xfrm>
+          <a:prstGeom xmlns:a="http://schemas.openxmlformats.org/drawingml/2006/main" prst="rect">
+            <a:avLst/>
+          </a:prstGeom>
+          <a:noFill xmlns:a="http://schemas.openxmlformats.org/drawingml/2006/main"/>
+          <a:ln xmlns:a="http://schemas.openxmlformats.org/drawingml/2006/main" w="0">
+            <a:noFill/>
+            <a:prstDash val="solid"/>
+          </a:ln>
+        </p:spPr>
+        <p:txBody>
+          <a:bodyPr xmlns:a="http://schemas.openxmlformats.org/drawingml/2006/main" anchor="t"/>
+          <a:lstStyle xmlns:a="http://schemas.openxmlformats.org/drawingml/2006/main"/>
+          <a:p xmlns:a="http://schemas.openxmlformats.org/drawingml/2006/main">
+            <a:pPr algn="l">
+              <a:buNone/>
+              <a:defRPr sz="1800" b="0">
+                <a:solidFill>
+                  <a:srgbClr val="52616B"/>
+                </a:solidFill>
+                <a:latin typeface="Arial"/>
+                <a:ea typeface="Arial"/>
+                <a:cs typeface="Arial"/>
+              </a:defRPr>
+            </a:pPr>
+            <a:r>
+              <a:rPr sz="1800" b="0">
+                <a:solidFill>
+                  <a:srgbClr val="52616B"/>
+                </a:solidFill>
+                <a:latin typeface="Arial"/>
+                <a:ea typeface="Arial"/>
+                <a:cs typeface="Arial"/>
+              </a:rPr>
+              <a:t>1 sector-ETF fleet</a:t>
+            </a:r>
+          </a:p>
+          <a:p xmlns:a="http://schemas.openxmlformats.org/drawingml/2006/main">
+            <a:pPr algn="l">
+              <a:buNone/>
+              <a:defRPr sz="1800" b="0">
+                <a:solidFill>
+                  <a:srgbClr val="52616B"/>
+                </a:solidFill>
+                <a:latin typeface="Arial"/>
+                <a:ea typeface="Arial"/>
+                <a:cs typeface="Arial"/>
+              </a:defRPr>
+            </a:pPr>
+            <a:r>
+              <a:rPr sz="1800" b="0">
+                <a:solidFill>
+                  <a:srgbClr val="52616B"/>
+                </a:solidFill>
+                <a:latin typeface="Arial"/>
+                <a:ea typeface="Arial"/>
+                <a:cs typeface="Arial"/>
+              </a:rPr>
+              <a:t>11 stock-sector fleets</a:t>
+            </a:r>
+          </a:p>
+          <a:p xmlns:a="http://schemas.openxmlformats.org/drawingml/2006/main">
+            <a:pPr algn="l">
+              <a:buNone/>
+              <a:defRPr sz="1800" b="0">
+                <a:solidFill>
+                  <a:srgbClr val="52616B"/>
+                </a:solidFill>
+                <a:latin typeface="Arial"/>
+                <a:ea typeface="Arial"/>
+                <a:cs typeface="Arial"/>
+              </a:defRPr>
+            </a:pPr>
+            <a:r>
+              <a:rPr sz="1800" b="0">
+                <a:solidFill>
+                  <a:srgbClr val="52616B"/>
+                </a:solidFill>
+                <a:latin typeface="Arial"/>
+                <a:ea typeface="Arial"/>
+                <a:cs typeface="Arial"/>
+              </a:rPr>
+              <a:t>507 intervals per fleet</a:t>
+            </a:r>
+          </a:p>
+        </p:txBody>
+      </p:sp>
+      <p:sp>
+        <p:nvSpPr>
+          <p:cNvPr id="10" name="">
+            <a:extLst xmlns:a="http://schemas.openxmlformats.org/drawingml/2006/main">
+              <a:ext uri="{FF2B5EF4-FFF2-40B4-BE49-F238E27FC236}">
+                <a16:creationId xmlns:a16="http://schemas.microsoft.com/office/drawing/2014/main" id="{D80FDF2D-786A-4D34-8C53-03F5531FEFAA}"/>
+              </a:ext>
+            </a:extLst>
+          </p:cNvPr>
+          <p:cNvSpPr>
+            <a:spLocks xmlns:a="http://schemas.openxmlformats.org/drawingml/2006/main" noGrp="1"/>
+          </p:cNvSpPr>
+          <p:nvPr/>
+        </p:nvSpPr>
+        <p:spPr>
+          <a:xfrm xmlns:a="http://schemas.openxmlformats.org/drawingml/2006/main">
+            <a:off x="6191250" y="1790700"/>
+            <a:ext cx="4953000" cy="3257550"/>
+          </a:xfrm>
+          <a:prstGeom xmlns:a="http://schemas.openxmlformats.org/drawingml/2006/main" prst="rect">
+            <a:avLst/>
+          </a:prstGeom>
+          <a:solidFill xmlns:a="http://schemas.openxmlformats.org/drawingml/2006/main">
+            <a:srgbClr val="F7E7E2"/>
+          </a:solidFill>
+          <a:ln xmlns:a="http://schemas.openxmlformats.org/drawingml/2006/main" w="9525">
+            <a:solidFill>
+              <a:srgbClr val="C8553D"/>
+            </a:solidFill>
+            <a:prstDash val="solid"/>
+          </a:ln>
+        </p:spPr>
+      </p:sp>
+      <p:sp>
+        <p:nvSpPr>
+          <p:cNvPr id="11" name="">
+            <a:extLst xmlns:a="http://schemas.openxmlformats.org/drawingml/2006/main">
+              <a:ext uri="{FF2B5EF4-FFF2-40B4-BE49-F238E27FC236}">
+                <a16:creationId xmlns:a16="http://schemas.microsoft.com/office/drawing/2014/main" id="{E4150C52-9BF1-4205-AAE7-8463BBDA6FD9}"/>
+              </a:ext>
+            </a:extLst>
+          </p:cNvPr>
+          <p:cNvSpPr>
+            <a:spLocks xmlns:a="http://schemas.openxmlformats.org/drawingml/2006/main" noGrp="1"/>
+          </p:cNvSpPr>
+          <p:nvPr/>
+        </p:nvSpPr>
+        <p:spPr>
+          <a:xfrm xmlns:a="http://schemas.openxmlformats.org/drawingml/2006/main">
+            <a:off x="6534150" y="2114550"/>
+            <a:ext cx="3714750" cy="247650"/>
+          </a:xfrm>
+          <a:prstGeom xmlns:a="http://schemas.openxmlformats.org/drawingml/2006/main" prst="rect">
+            <a:avLst/>
+          </a:prstGeom>
+          <a:noFill xmlns:a="http://schemas.openxmlformats.org/drawingml/2006/main"/>
+          <a:ln xmlns:a="http://schemas.openxmlformats.org/drawingml/2006/main" w="0">
+            <a:noFill/>
+            <a:prstDash val="solid"/>
+          </a:ln>
+        </p:spPr>
+        <p:txBody>
+          <a:bodyPr xmlns:a="http://schemas.openxmlformats.org/drawingml/2006/main" anchor="t"/>
+          <a:lstStyle xmlns:a="http://schemas.openxmlformats.org/drawingml/2006/main"/>
+          <a:p xmlns:a="http://schemas.openxmlformats.org/drawingml/2006/main">
+            <a:pPr algn="l">
+              <a:buNone/>
+              <a:defRPr sz="1275" b="1">
+                <a:solidFill>
+                  <a:srgbClr val="C8553D"/>
+                </a:solidFill>
+                <a:latin typeface="Arial"/>
+                <a:ea typeface="Arial"/>
+                <a:cs typeface="Arial"/>
+              </a:defRPr>
+            </a:pPr>
+            <a:r>
+              <a:rPr sz="1275" b="1">
+                <a:solidFill>
+                  <a:srgbClr val="C8553D"/>
+                </a:solidFill>
+                <a:latin typeface="Arial"/>
+                <a:ea typeface="Arial"/>
+                <a:cs typeface="Arial"/>
+              </a:rPr>
+              <a:t>RETURN TRANSPORT</a:t>
+            </a:r>
+          </a:p>
+        </p:txBody>
+      </p:sp>
+      <p:sp>
+        <p:nvSpPr>
+          <p:cNvPr id="12" name="">
+            <a:extLst xmlns:a="http://schemas.openxmlformats.org/drawingml/2006/main">
+              <a:ext uri="{FF2B5EF4-FFF2-40B4-BE49-F238E27FC236}">
+                <a16:creationId xmlns:a16="http://schemas.microsoft.com/office/drawing/2014/main" id="{0606DC9E-2BF6-4A3D-8AA4-5B9D11332D44}"/>
+              </a:ext>
+            </a:extLst>
+          </p:cNvPr>
+          <p:cNvSpPr>
+            <a:spLocks xmlns:a="http://schemas.openxmlformats.org/drawingml/2006/main" noGrp="1"/>
+          </p:cNvSpPr>
+          <p:nvPr/>
+        </p:nvSpPr>
+        <p:spPr>
+          <a:xfrm xmlns:a="http://schemas.openxmlformats.org/drawingml/2006/main">
+            <a:off x="6534150" y="2724150"/>
+            <a:ext cx="4000500" cy="704850"/>
+          </a:xfrm>
+          <a:prstGeom xmlns:a="http://schemas.openxmlformats.org/drawingml/2006/main" prst="rect">
+            <a:avLst/>
+          </a:prstGeom>
+          <a:noFill xmlns:a="http://schemas.openxmlformats.org/drawingml/2006/main"/>
+          <a:ln xmlns:a="http://schemas.openxmlformats.org/drawingml/2006/main" w="0">
+            <a:noFill/>
+            <a:prstDash val="solid"/>
+          </a:ln>
+        </p:spPr>
+        <p:txBody>
+          <a:bodyPr xmlns:a="http://schemas.openxmlformats.org/drawingml/2006/main" anchor="t"/>
+          <a:lstStyle xmlns:a="http://schemas.openxmlformats.org/drawingml/2006/main"/>
+          <a:p xmlns:a="http://schemas.openxmlformats.org/drawingml/2006/main">
+            <a:pPr algn="l">
+              <a:buNone/>
+              <a:defRPr sz="4050" b="1">
+                <a:solidFill>
+                  <a:srgbClr val="C8553D"/>
+                </a:solidFill>
+                <a:latin typeface="Arial"/>
+                <a:ea typeface="Arial"/>
+                <a:cs typeface="Arial"/>
+              </a:defRPr>
+            </a:pPr>
+            <a:r>
+              <a:rPr sz="4050" b="1">
+                <a:solidFill>
+                  <a:srgbClr val="C8553D"/>
+                </a:solidFill>
+                <a:latin typeface="Arial"/>
+                <a:ea typeface="Arial"/>
+                <a:cs typeface="Arial"/>
+              </a:rPr>
+              <a:t>1 / 11</a:t>
+            </a:r>
+          </a:p>
+        </p:txBody>
+      </p:sp>
+      <p:sp>
+        <p:nvSpPr>
+          <p:cNvPr id="13" name="">
+            <a:extLst xmlns:a="http://schemas.openxmlformats.org/drawingml/2006/main">
+              <a:ext uri="{FF2B5EF4-FFF2-40B4-BE49-F238E27FC236}">
+                <a16:creationId xmlns:a16="http://schemas.microsoft.com/office/drawing/2014/main" id="{03283D39-FBEA-479D-88E1-46F1F4C330B5}"/>
+              </a:ext>
+            </a:extLst>
+          </p:cNvPr>
+          <p:cNvSpPr>
+            <a:spLocks xmlns:a="http://schemas.openxmlformats.org/drawingml/2006/main" noGrp="1"/>
+          </p:cNvSpPr>
+          <p:nvPr/>
+        </p:nvSpPr>
+        <p:spPr>
+          <a:xfrm xmlns:a="http://schemas.openxmlformats.org/drawingml/2006/main">
+            <a:off x="6534150" y="3429000"/>
+            <a:ext cx="4000500" cy="457200"/>
+          </a:xfrm>
+          <a:prstGeom xmlns:a="http://schemas.openxmlformats.org/drawingml/2006/main" prst="rect">
+            <a:avLst/>
+          </a:prstGeom>
+          <a:noFill xmlns:a="http://schemas.openxmlformats.org/drawingml/2006/main"/>
+          <a:ln xmlns:a="http://schemas.openxmlformats.org/drawingml/2006/main" w="0">
+            <a:noFill/>
+            <a:prstDash val="solid"/>
+          </a:ln>
+        </p:spPr>
+        <p:txBody>
+          <a:bodyPr xmlns:a="http://schemas.openxmlformats.org/drawingml/2006/main" anchor="t"/>
+          <a:lstStyle xmlns:a="http://schemas.openxmlformats.org/drawingml/2006/main"/>
+          <a:p xmlns:a="http://schemas.openxmlformats.org/drawingml/2006/main">
+            <a:pPr algn="l">
+              <a:buNone/>
+              <a:defRPr sz="2175" b="1">
+                <a:solidFill>
+                  <a:srgbClr val="101820"/>
+                </a:solidFill>
+                <a:latin typeface="Arial"/>
+                <a:ea typeface="Arial"/>
+                <a:cs typeface="Arial"/>
+              </a:defRPr>
+            </a:pPr>
+            <a:r>
+              <a:rPr sz="2175" b="1">
+                <a:solidFill>
+                  <a:srgbClr val="101820"/>
+                </a:solidFill>
+                <a:latin typeface="Arial"/>
+                <a:ea typeface="Arial"/>
+                <a:cs typeface="Arial"/>
+              </a:rPr>
+              <a:t>sector wins vs equal weight</a:t>
+            </a:r>
+          </a:p>
+        </p:txBody>
+      </p:sp>
+      <p:sp>
+        <p:nvSpPr>
+          <p:cNvPr id="14" name="">
+            <a:extLst xmlns:a="http://schemas.openxmlformats.org/drawingml/2006/main">
+              <a:ext uri="{FF2B5EF4-FFF2-40B4-BE49-F238E27FC236}">
+                <a16:creationId xmlns:a16="http://schemas.microsoft.com/office/drawing/2014/main" id="{DB7B3C09-EAFE-41D8-880B-D0BE56096F33}"/>
+              </a:ext>
+            </a:extLst>
+          </p:cNvPr>
+          <p:cNvSpPr>
+            <a:spLocks xmlns:a="http://schemas.openxmlformats.org/drawingml/2006/main" noGrp="1"/>
+          </p:cNvSpPr>
+          <p:nvPr/>
+        </p:nvSpPr>
+        <p:spPr>
+          <a:xfrm xmlns:a="http://schemas.openxmlformats.org/drawingml/2006/main">
+            <a:off x="6534150" y="4000500"/>
+            <a:ext cx="4000500" cy="876300"/>
+          </a:xfrm>
+          <a:prstGeom xmlns:a="http://schemas.openxmlformats.org/drawingml/2006/main" prst="rect">
+            <a:avLst/>
+          </a:prstGeom>
+          <a:noFill xmlns:a="http://schemas.openxmlformats.org/drawingml/2006/main"/>
+          <a:ln xmlns:a="http://schemas.openxmlformats.org/drawingml/2006/main" w="0">
+            <a:noFill/>
+            <a:prstDash val="solid"/>
+          </a:ln>
+        </p:spPr>
+        <p:txBody>
+          <a:bodyPr xmlns:a="http://schemas.openxmlformats.org/drawingml/2006/main" anchor="t"/>
+          <a:lstStyle xmlns:a="http://schemas.openxmlformats.org/drawingml/2006/main"/>
+          <a:p xmlns:a="http://schemas.openxmlformats.org/drawingml/2006/main">
+            <a:pPr algn="l">
+              <a:buNone/>
+              <a:defRPr sz="1500" b="0">
+                <a:solidFill>
+                  <a:srgbClr val="52616B"/>
+                </a:solidFill>
+                <a:latin typeface="Arial"/>
+                <a:ea typeface="Arial"/>
+                <a:cs typeface="Arial"/>
+              </a:defRPr>
+            </a:pPr>
+            <a:r>
+              <a:rPr sz="1500" b="0">
+                <a:solidFill>
+                  <a:srgbClr val="52616B"/>
+                </a:solidFill>
+                <a:latin typeface="Arial"/>
+                <a:ea typeface="Arial"/>
+                <a:cs typeface="Arial"/>
+              </a:rPr>
+              <a:t>Sector ETFs: -3.45 pp</a:t>
+            </a:r>
+          </a:p>
+          <a:p xmlns:a="http://schemas.openxmlformats.org/drawingml/2006/main">
+            <a:pPr algn="l">
+              <a:buNone/>
+              <a:defRPr sz="1500" b="0">
+                <a:solidFill>
+                  <a:srgbClr val="52616B"/>
+                </a:solidFill>
+                <a:latin typeface="Arial"/>
+                <a:ea typeface="Arial"/>
+                <a:cs typeface="Arial"/>
+              </a:defRPr>
+            </a:pPr>
+            <a:r>
+              <a:rPr sz="1500" b="0">
+                <a:solidFill>
+                  <a:srgbClr val="52616B"/>
+                </a:solidFill>
+                <a:latin typeface="Arial"/>
+                <a:ea typeface="Arial"/>
+                <a:cs typeface="Arial"/>
+              </a:rPr>
+              <a:t>Static-stock evidence only</a:t>
+            </a:r>
+          </a:p>
+        </p:txBody>
+      </p:sp>
+      <p:sp>
+        <p:nvSpPr>
+          <p:cNvPr id="15" name="">
+            <a:extLst xmlns:a="http://schemas.openxmlformats.org/drawingml/2006/main">
+              <a:ext uri="{FF2B5EF4-FFF2-40B4-BE49-F238E27FC236}">
+                <a16:creationId xmlns:a16="http://schemas.microsoft.com/office/drawing/2014/main" id="{0DF58B95-FF34-44E3-BD69-0887709C26B4}"/>
+              </a:ext>
+            </a:extLst>
+          </p:cNvPr>
+          <p:cNvSpPr>
+            <a:spLocks xmlns:a="http://schemas.openxmlformats.org/drawingml/2006/main" noGrp="1"/>
+          </p:cNvSpPr>
+          <p:nvPr/>
+        </p:nvSpPr>
+        <p:spPr>
+          <a:xfrm xmlns:a="http://schemas.openxmlformats.org/drawingml/2006/main">
+            <a:off x="2133600" y="5505450"/>
+            <a:ext cx="7924800" cy="381000"/>
+          </a:xfrm>
+          <a:prstGeom xmlns:a="http://schemas.openxmlformats.org/drawingml/2006/main" prst="rect">
+            <a:avLst/>
+          </a:prstGeom>
+          <a:noFill xmlns:a="http://schemas.openxmlformats.org/drawingml/2006/main"/>
+          <a:ln xmlns:a="http://schemas.openxmlformats.org/drawingml/2006/main" w="0">
+            <a:noFill/>
+            <a:prstDash val="solid"/>
+          </a:ln>
+        </p:spPr>
+        <p:txBody>
+          <a:bodyPr xmlns:a="http://schemas.openxmlformats.org/drawingml/2006/main" anchor="t"/>
+          <a:lstStyle xmlns:a="http://schemas.openxmlformats.org/drawingml/2006/main"/>
+          <a:p xmlns:a="http://schemas.openxmlformats.org/drawingml/2006/main">
+            <a:pPr algn="ctr">
+              <a:buNone/>
+              <a:defRPr sz="2175" b="1">
+                <a:solidFill>
+                  <a:srgbClr val="101820"/>
+                </a:solidFill>
+                <a:latin typeface="Arial"/>
+                <a:ea typeface="Arial"/>
+                <a:cs typeface="Arial"/>
+              </a:defRPr>
+            </a:pPr>
+            <a:r>
+              <a:rPr sz="2175" b="1">
+                <a:solidFill>
+                  <a:srgbClr val="101820"/>
+                </a:solidFill>
+                <a:latin typeface="Arial"/>
+                <a:ea typeface="Arial"/>
+                <a:cs typeface="Arial"/>
+              </a:rPr>
+              <a:t>Universe choice is part of the hypothesis—not a neutral input.</a:t>
+            </a:r>
+          </a:p>
+        </p:txBody>
+      </p:sp>
+    </p:spTree>
+    <p:extLst>
+      <p:ext uri="{BB962C8B-B14F-4D97-AF65-F5344CB8AC3E}">
+        <p14:creationId xmlns:p14="http://schemas.microsoft.com/office/powerpoint/2010/main" val="1503881080"/>
+      </p:ext>
+    </p:extLst>
+  </p:cSld>
+</p:sld>
+</file>
+
+<file path=ppt/slides/slide26.xml><?xml version="1.0" encoding="utf-8"?>
+<p:sld xmlns:p="http://schemas.openxmlformats.org/presentationml/2006/main">
+  <p:cSld>
+    <p:bg>
+      <p:bgPr>
+        <a:solidFill xmlns:a="http://schemas.openxmlformats.org/drawingml/2006/main">
+          <a:srgbClr val="FFFFFF"/>
+        </a:solidFill>
+      </p:bgPr>
+    </p:bg>
+    <p:spTree>
+      <p:nvGrpSpPr>
+        <p:cNvPr id="1" name=""/>
+        <p:cNvGrpSpPr/>
+        <p:nvPr/>
+      </p:nvGrpSpPr>
+      <p:grpSpPr>
+        <a:xfrm xmlns:a="http://schemas.openxmlformats.org/drawingml/2006/main"/>
+      </p:grpSpPr>
+      <p:sp>
+        <p:nvSpPr>
+          <p:cNvPr id="18" name="">
+            <a:extLst xmlns:a="http://schemas.openxmlformats.org/drawingml/2006/main">
+              <a:ext uri="{FF2B5EF4-FFF2-40B4-BE49-F238E27FC236}">
+                <a16:creationId xmlns:a16="http://schemas.microsoft.com/office/drawing/2014/main" id="{86AB4CD6-A066-4BA6-83E2-7BED7686F042}"/>
+              </a:ext>
+            </a:extLst>
+          </p:cNvPr>
+          <p:cNvSpPr>
+            <a:spLocks xmlns:a="http://schemas.openxmlformats.org/drawingml/2006/main" noGrp="1"/>
+          </p:cNvSpPr>
+          <p:nvPr/>
+        </p:nvSpPr>
+        <p:spPr>
+          <a:xfrm xmlns:a="http://schemas.openxmlformats.org/drawingml/2006/main">
+            <a:off x="400050" y="228600"/>
+            <a:ext cx="2857500" cy="228600"/>
+          </a:xfrm>
+          <a:prstGeom xmlns:a="http://schemas.openxmlformats.org/drawingml/2006/main" prst="rect">
+            <a:avLst/>
+          </a:prstGeom>
+          <a:noFill xmlns:a="http://schemas.openxmlformats.org/drawingml/2006/main"/>
+          <a:ln xmlns:a="http://schemas.openxmlformats.org/drawingml/2006/main" w="0">
+            <a:noFill/>
+            <a:prstDash val="solid"/>
+          </a:ln>
+        </p:spPr>
+        <p:txBody>
+          <a:bodyPr xmlns:a="http://schemas.openxmlformats.org/drawingml/2006/main" anchor="t"/>
+          <a:lstStyle xmlns:a="http://schemas.openxmlformats.org/drawingml/2006/main"/>
+          <a:p xmlns:a="http://schemas.openxmlformats.org/drawingml/2006/main">
+            <a:pPr algn="l">
+              <a:buNone/>
+              <a:defRPr sz="1200" b="1">
+                <a:solidFill>
+                  <a:srgbClr val="3D8DFF"/>
+                </a:solidFill>
+                <a:latin typeface="Arial"/>
+                <a:ea typeface="Arial"/>
+                <a:cs typeface="Arial"/>
+              </a:defRPr>
+            </a:pPr>
+            <a:r>
+              <a:rPr sz="1200" b="1">
+                <a:solidFill>
+                  <a:srgbClr val="3D8DFF"/>
+                </a:solidFill>
+                <a:latin typeface="Arial"/>
+                <a:ea typeface="Arial"/>
+                <a:cs typeface="Arial"/>
+              </a:rPr>
+              <a:t>UNIVERSE TRANSPORT · FROZEN CONTRACT</a:t>
+            </a:r>
+          </a:p>
+        </p:txBody>
+      </p:sp>
+      <p:sp>
+        <p:nvSpPr>
+          <p:cNvPr id="2" name="slide-9-title">
+            <a:extLst xmlns:a="http://schemas.openxmlformats.org/drawingml/2006/main">
+              <a:ext uri="{FF2B5EF4-FFF2-40B4-BE49-F238E27FC236}">
+                <a16:creationId xmlns:a16="http://schemas.microsoft.com/office/drawing/2014/main" id="{204441B9-2B0E-4029-B489-A1293A42A74D}"/>
+              </a:ext>
+            </a:extLst>
+          </p:cNvPr>
+          <p:cNvSpPr>
+            <a:spLocks xmlns:a="http://schemas.openxmlformats.org/drawingml/2006/main" noGrp="1"/>
+          </p:cNvSpPr>
+          <p:nvPr/>
+        </p:nvSpPr>
+        <p:spPr>
+          <a:xfrm xmlns:a="http://schemas.openxmlformats.org/drawingml/2006/main">
+            <a:off x="400050" y="476250"/>
+            <a:ext cx="11049000" cy="819150"/>
+          </a:xfrm>
+          <a:prstGeom xmlns:a="http://schemas.openxmlformats.org/drawingml/2006/main" prst="rect">
+            <a:avLst/>
+          </a:prstGeom>
+          <a:noFill xmlns:a="http://schemas.openxmlformats.org/drawingml/2006/main"/>
+          <a:ln xmlns:a="http://schemas.openxmlformats.org/drawingml/2006/main" w="0">
+            <a:noFill/>
+            <a:prstDash val="solid"/>
+          </a:ln>
+        </p:spPr>
+        <p:txBody>
+          <a:bodyPr xmlns:a="http://schemas.openxmlformats.org/drawingml/2006/main" anchor="t"/>
+          <a:lstStyle xmlns:a="http://schemas.openxmlformats.org/drawingml/2006/main"/>
+          <a:p xmlns:a="http://schemas.openxmlformats.org/drawingml/2006/main">
+            <a:pPr algn="l">
+              <a:buNone/>
+              <a:defRPr sz="2700" b="1">
+                <a:solidFill>
+                  <a:srgbClr val="101820"/>
+                </a:solidFill>
+                <a:latin typeface="Arial"/>
+                <a:ea typeface="Arial"/>
+                <a:cs typeface="Arial"/>
+              </a:defRPr>
+            </a:pPr>
+            <a:r>
+              <a:rPr sz="2700" b="1">
+                <a:solidFill>
+                  <a:srgbClr val="101820"/>
+                </a:solidFill>
+                <a:latin typeface="Arial"/>
+                <a:ea typeface="Arial"/>
+                <a:cs typeface="Arial"/>
+              </a:rPr>
+              <a:t>Only the fleet changes</a:t>
+            </a:r>
+          </a:p>
+        </p:txBody>
+      </p:sp>
+      <p:sp>
+        <p:nvSpPr>
+          <p:cNvPr id="3" name="">
+            <a:extLst xmlns:a="http://schemas.openxmlformats.org/drawingml/2006/main">
+              <a:ext uri="{FF2B5EF4-FFF2-40B4-BE49-F238E27FC236}">
+                <a16:creationId xmlns:a16="http://schemas.microsoft.com/office/drawing/2014/main" id="{9C4A5C3A-384E-47D6-952B-25278B045246}"/>
+              </a:ext>
+            </a:extLst>
+          </p:cNvPr>
+          <p:cNvSpPr>
+            <a:spLocks xmlns:a="http://schemas.openxmlformats.org/drawingml/2006/main" noGrp="1"/>
+          </p:cNvSpPr>
+          <p:nvPr/>
+        </p:nvSpPr>
+        <p:spPr>
+          <a:xfrm xmlns:a="http://schemas.openxmlformats.org/drawingml/2006/main">
+            <a:off x="400050" y="1428750"/>
+            <a:ext cx="11391900" cy="0"/>
+          </a:xfrm>
+          <a:prstGeom xmlns:a="http://schemas.openxmlformats.org/drawingml/2006/main" prst="line">
+            <a:avLst/>
+          </a:prstGeom>
+          <a:noFill xmlns:a="http://schemas.openxmlformats.org/drawingml/2006/main"/>
+          <a:ln xmlns:a="http://schemas.openxmlformats.org/drawingml/2006/main" w="9525">
+            <a:solidFill>
+              <a:srgbClr val="B8BCC4"/>
+            </a:solidFill>
+            <a:prstDash val="solid"/>
+          </a:ln>
+        </p:spPr>
+      </p:sp>
+      <p:sp>
+        <p:nvSpPr>
+          <p:cNvPr id="4" name="slide-9-number">
+            <a:extLst xmlns:a="http://schemas.openxmlformats.org/drawingml/2006/main">
+              <a:ext uri="{FF2B5EF4-FFF2-40B4-BE49-F238E27FC236}">
+                <a16:creationId xmlns:a16="http://schemas.microsoft.com/office/drawing/2014/main" id="{5EBD817D-F347-40A2-BECC-BF81DCE7FD7B}"/>
+              </a:ext>
+            </a:extLst>
+          </p:cNvPr>
+          <p:cNvSpPr>
+            <a:spLocks xmlns:a="http://schemas.openxmlformats.org/drawingml/2006/main" noGrp="1"/>
+          </p:cNvSpPr>
+          <p:nvPr/>
+        </p:nvSpPr>
+        <p:spPr>
+          <a:xfrm xmlns:a="http://schemas.openxmlformats.org/drawingml/2006/main">
+            <a:off x="11163300" y="6362700"/>
+            <a:ext cx="609600" cy="228600"/>
+          </a:xfrm>
+          <a:prstGeom xmlns:a="http://schemas.openxmlformats.org/drawingml/2006/main" prst="rect">
+            <a:avLst/>
+          </a:prstGeom>
+          <a:noFill xmlns:a="http://schemas.openxmlformats.org/drawingml/2006/main"/>
+          <a:ln xmlns:a="http://schemas.openxmlformats.org/drawingml/2006/main" w="0">
+            <a:noFill/>
+            <a:prstDash val="solid"/>
+          </a:ln>
+        </p:spPr>
+        <p:txBody>
+          <a:bodyPr xmlns:a="http://schemas.openxmlformats.org/drawingml/2006/main" anchor="t"/>
+          <a:lstStyle xmlns:a="http://schemas.openxmlformats.org/drawingml/2006/main"/>
+          <a:p xmlns:a="http://schemas.openxmlformats.org/drawingml/2006/main">
+            <a:pPr algn="r">
+              <a:buNone/>
+              <a:defRPr sz="1200" b="0">
+                <a:solidFill>
+                  <a:srgbClr val="52616B"/>
+                </a:solidFill>
+                <a:latin typeface="Arial"/>
+                <a:ea typeface="Arial"/>
+                <a:cs typeface="Arial"/>
+              </a:defRPr>
+            </a:pPr>
+            <a:r>
+              <a:rPr sz="1200" b="0">
+                <a:solidFill>
+                  <a:srgbClr val="52616B"/>
+                </a:solidFill>
+                <a:latin typeface="Arial"/>
+                <a:ea typeface="Arial"/>
+                <a:cs typeface="Arial"/>
+              </a:rPr>
+              <a:t> 26</a:t>
+            </a:r>
+          </a:p>
+        </p:txBody>
+      </p:sp>
+      <p:sp>
+        <p:nvSpPr>
+          <p:cNvPr id="5" name="">
+            <a:extLst xmlns:a="http://schemas.openxmlformats.org/drawingml/2006/main">
+              <a:ext uri="{FF2B5EF4-FFF2-40B4-BE49-F238E27FC236}">
+                <a16:creationId xmlns:a16="http://schemas.microsoft.com/office/drawing/2014/main" id="{CE16435F-A773-4C41-B1F9-65A53A461560}"/>
+              </a:ext>
+            </a:extLst>
+          </p:cNvPr>
+          <p:cNvSpPr>
+            <a:spLocks xmlns:a="http://schemas.openxmlformats.org/drawingml/2006/main" noGrp="1"/>
+          </p:cNvSpPr>
+          <p:nvPr/>
+        </p:nvSpPr>
+        <p:spPr>
+          <a:xfrm xmlns:a="http://schemas.openxmlformats.org/drawingml/2006/main">
+            <a:off x="609600" y="1657350"/>
+            <a:ext cx="1714500" cy="247650"/>
+          </a:xfrm>
+          <a:prstGeom xmlns:a="http://schemas.openxmlformats.org/drawingml/2006/main" prst="rect">
+            <a:avLst/>
+          </a:prstGeom>
+          <a:noFill xmlns:a="http://schemas.openxmlformats.org/drawingml/2006/main"/>
+          <a:ln xmlns:a="http://schemas.openxmlformats.org/drawingml/2006/main" w="0">
+            <a:noFill/>
+            <a:prstDash val="solid"/>
+          </a:ln>
+        </p:spPr>
+        <p:txBody>
+          <a:bodyPr xmlns:a="http://schemas.openxmlformats.org/drawingml/2006/main" anchor="t"/>
+          <a:lstStyle xmlns:a="http://schemas.openxmlformats.org/drawingml/2006/main"/>
+          <a:p xmlns:a="http://schemas.openxmlformats.org/drawingml/2006/main">
+            <a:pPr algn="l">
+              <a:buNone/>
+              <a:defRPr sz="1275" b="1">
+                <a:solidFill>
+                  <a:srgbClr val="3D8DFF"/>
+                </a:solidFill>
+                <a:latin typeface="Arial"/>
+                <a:ea typeface="Arial"/>
+                <a:cs typeface="Arial"/>
+              </a:defRPr>
+            </a:pPr>
+            <a:r>
+              <a:rPr sz="1275" b="1">
+                <a:solidFill>
+                  <a:srgbClr val="3D8DFF"/>
+                </a:solidFill>
+                <a:latin typeface="Arial"/>
+                <a:ea typeface="Arial"/>
+                <a:cs typeface="Arial"/>
+              </a:rPr>
+              <a:t>UNIVERSE</a:t>
+            </a:r>
+          </a:p>
+        </p:txBody>
+      </p:sp>
+      <p:sp>
+        <p:nvSpPr>
+          <p:cNvPr id="6" name="">
+            <a:extLst xmlns:a="http://schemas.openxmlformats.org/drawingml/2006/main">
+              <a:ext uri="{FF2B5EF4-FFF2-40B4-BE49-F238E27FC236}">
+                <a16:creationId xmlns:a16="http://schemas.microsoft.com/office/drawing/2014/main" id="{DA51A465-7554-45A3-89FC-97D4DC096775}"/>
+              </a:ext>
+            </a:extLst>
+          </p:cNvPr>
+          <p:cNvSpPr>
+            <a:spLocks xmlns:a="http://schemas.openxmlformats.org/drawingml/2006/main" noGrp="1"/>
+          </p:cNvSpPr>
+          <p:nvPr/>
+        </p:nvSpPr>
+        <p:spPr>
+          <a:xfrm xmlns:a="http://schemas.openxmlformats.org/drawingml/2006/main">
+            <a:off x="609600" y="2019300"/>
+            <a:ext cx="10953750" cy="400050"/>
+          </a:xfrm>
+          <a:prstGeom xmlns:a="http://schemas.openxmlformats.org/drawingml/2006/main" prst="rect">
+            <a:avLst/>
+          </a:prstGeom>
+          <a:noFill xmlns:a="http://schemas.openxmlformats.org/drawingml/2006/main"/>
+          <a:ln xmlns:a="http://schemas.openxmlformats.org/drawingml/2006/main" w="0">
+            <a:noFill/>
+            <a:prstDash val="solid"/>
+          </a:ln>
+        </p:spPr>
+        <p:txBody>
+          <a:bodyPr xmlns:a="http://schemas.openxmlformats.org/drawingml/2006/main" anchor="t"/>
+          <a:lstStyle xmlns:a="http://schemas.openxmlformats.org/drawingml/2006/main"/>
+          <a:p xmlns:a="http://schemas.openxmlformats.org/drawingml/2006/main">
+            <a:pPr algn="l">
+              <a:buNone/>
+              <a:defRPr sz="2025" b="1">
+                <a:solidFill>
+                  <a:srgbClr val="101820"/>
+                </a:solidFill>
+                <a:latin typeface="Arial"/>
+                <a:ea typeface="Arial"/>
+                <a:cs typeface="Arial"/>
+              </a:defRPr>
+            </a:pPr>
+            <a:r>
+              <a:rPr sz="2025" b="1">
+                <a:solidFill>
+                  <a:srgbClr val="101820"/>
+                </a:solidFill>
+                <a:latin typeface="Arial"/>
+                <a:ea typeface="Arial"/>
+                <a:cs typeface="Arial"/>
+              </a:rPr>
+              <a:t>10 sector ETFs + eleven 8-stock sector baskets</a:t>
+            </a:r>
+          </a:p>
+        </p:txBody>
+      </p:sp>
+      <p:sp>
+        <p:nvSpPr>
+          <p:cNvPr id="7" name="">
+            <a:extLst xmlns:a="http://schemas.openxmlformats.org/drawingml/2006/main">
+              <a:ext uri="{FF2B5EF4-FFF2-40B4-BE49-F238E27FC236}">
+                <a16:creationId xmlns:a16="http://schemas.microsoft.com/office/drawing/2014/main" id="{8A9F2320-DB88-4F35-8CC6-DB00FC1B05DE}"/>
+              </a:ext>
+            </a:extLst>
+          </p:cNvPr>
+          <p:cNvSpPr>
+            <a:spLocks xmlns:a="http://schemas.openxmlformats.org/drawingml/2006/main" noGrp="1"/>
+          </p:cNvSpPr>
+          <p:nvPr/>
+        </p:nvSpPr>
+        <p:spPr>
+          <a:xfrm xmlns:a="http://schemas.openxmlformats.org/drawingml/2006/main">
+            <a:off x="609600" y="2647950"/>
+            <a:ext cx="10953750" cy="0"/>
+          </a:xfrm>
+          <a:prstGeom xmlns:a="http://schemas.openxmlformats.org/drawingml/2006/main" prst="line">
+            <a:avLst/>
+          </a:prstGeom>
+          <a:noFill xmlns:a="http://schemas.openxmlformats.org/drawingml/2006/main"/>
+          <a:ln xmlns:a="http://schemas.openxmlformats.org/drawingml/2006/main" w="9525">
+            <a:solidFill>
+              <a:srgbClr val="B8BCC4"/>
+            </a:solidFill>
+            <a:prstDash val="solid"/>
+          </a:ln>
+        </p:spPr>
+      </p:sp>
+      <p:sp>
+        <p:nvSpPr>
+          <p:cNvPr id="8" name="">
+            <a:extLst xmlns:a="http://schemas.openxmlformats.org/drawingml/2006/main">
+              <a:ext uri="{FF2B5EF4-FFF2-40B4-BE49-F238E27FC236}">
+                <a16:creationId xmlns:a16="http://schemas.microsoft.com/office/drawing/2014/main" id="{1F61F531-F8BA-48C3-B110-1E615831EA34}"/>
+              </a:ext>
+            </a:extLst>
+          </p:cNvPr>
+          <p:cNvSpPr>
+            <a:spLocks xmlns:a="http://schemas.openxmlformats.org/drawingml/2006/main" noGrp="1"/>
+          </p:cNvSpPr>
+          <p:nvPr/>
+        </p:nvSpPr>
+        <p:spPr>
+          <a:xfrm xmlns:a="http://schemas.openxmlformats.org/drawingml/2006/main">
+            <a:off x="666750" y="3067050"/>
+            <a:ext cx="2286000" cy="266700"/>
+          </a:xfrm>
+          <a:prstGeom xmlns:a="http://schemas.openxmlformats.org/drawingml/2006/main" prst="rect">
+            <a:avLst/>
+          </a:prstGeom>
+          <a:noFill xmlns:a="http://schemas.openxmlformats.org/drawingml/2006/main"/>
+          <a:ln xmlns:a="http://schemas.openxmlformats.org/drawingml/2006/main" w="0">
+            <a:noFill/>
+            <a:prstDash val="solid"/>
+          </a:ln>
+        </p:spPr>
+        <p:txBody>
+          <a:bodyPr xmlns:a="http://schemas.openxmlformats.org/drawingml/2006/main" anchor="t"/>
+          <a:lstStyle xmlns:a="http://schemas.openxmlformats.org/drawingml/2006/main"/>
+          <a:p xmlns:a="http://schemas.openxmlformats.org/drawingml/2006/main">
+            <a:pPr algn="l">
+              <a:buNone/>
+              <a:defRPr sz="1275" b="1">
+                <a:solidFill>
+                  <a:srgbClr val="3D8DFF"/>
+                </a:solidFill>
+                <a:latin typeface="Arial"/>
+                <a:ea typeface="Arial"/>
+                <a:cs typeface="Arial"/>
+              </a:defRPr>
+            </a:pPr>
+            <a:r>
+              <a:rPr sz="1275" b="1">
+                <a:solidFill>
+                  <a:srgbClr val="3D8DFF"/>
+                </a:solidFill>
+                <a:latin typeface="Arial"/>
+                <a:ea typeface="Arial"/>
+                <a:cs typeface="Arial"/>
+              </a:rPr>
+              <a:t>FLEETS</a:t>
+            </a:r>
+          </a:p>
+        </p:txBody>
+      </p:sp>
+      <p:sp>
+        <p:nvSpPr>
+          <p:cNvPr id="9" name="">
+            <a:extLst xmlns:a="http://schemas.openxmlformats.org/drawingml/2006/main">
+              <a:ext uri="{FF2B5EF4-FFF2-40B4-BE49-F238E27FC236}">
+                <a16:creationId xmlns:a16="http://schemas.microsoft.com/office/drawing/2014/main" id="{47A3F430-BD14-424C-8A98-AA2A7B48047A}"/>
+              </a:ext>
+            </a:extLst>
+          </p:cNvPr>
+          <p:cNvSpPr>
+            <a:spLocks xmlns:a="http://schemas.openxmlformats.org/drawingml/2006/main" noGrp="1"/>
+          </p:cNvSpPr>
+          <p:nvPr/>
+        </p:nvSpPr>
+        <p:spPr>
+          <a:xfrm xmlns:a="http://schemas.openxmlformats.org/drawingml/2006/main">
+            <a:off x="666750" y="3524250"/>
+            <a:ext cx="2286000" cy="1028700"/>
+          </a:xfrm>
+          <a:prstGeom xmlns:a="http://schemas.openxmlformats.org/drawingml/2006/main" prst="rect">
+            <a:avLst/>
+          </a:prstGeom>
+          <a:noFill xmlns:a="http://schemas.openxmlformats.org/drawingml/2006/main"/>
+          <a:ln xmlns:a="http://schemas.openxmlformats.org/drawingml/2006/main" w="0">
+            <a:noFill/>
+            <a:prstDash val="solid"/>
+          </a:ln>
+        </p:spPr>
+        <p:txBody>
+          <a:bodyPr xmlns:a="http://schemas.openxmlformats.org/drawingml/2006/main" anchor="t"/>
+          <a:lstStyle xmlns:a="http://schemas.openxmlformats.org/drawingml/2006/main"/>
+          <a:p xmlns:a="http://schemas.openxmlformats.org/drawingml/2006/main">
+            <a:pPr algn="l">
+              <a:buNone/>
+              <a:defRPr sz="2025" b="1">
+                <a:solidFill>
+                  <a:srgbClr val="101820"/>
+                </a:solidFill>
+                <a:latin typeface="Arial"/>
+                <a:ea typeface="Arial"/>
+                <a:cs typeface="Arial"/>
+              </a:defRPr>
+            </a:pPr>
+            <a:r>
+              <a:rPr sz="2025" b="1">
+                <a:solidFill>
+                  <a:srgbClr val="101820"/>
+                </a:solidFill>
+                <a:latin typeface="Arial"/>
+                <a:ea typeface="Arial"/>
+                <a:cs typeface="Arial"/>
+              </a:rPr>
+              <a:t>Frozen before outcomes</a:t>
+            </a:r>
+          </a:p>
+        </p:txBody>
+      </p:sp>
+      <p:sp>
+        <p:nvSpPr>
+          <p:cNvPr id="10" name="">
+            <a:extLst xmlns:a="http://schemas.openxmlformats.org/drawingml/2006/main">
+              <a:ext uri="{FF2B5EF4-FFF2-40B4-BE49-F238E27FC236}">
+                <a16:creationId xmlns:a16="http://schemas.microsoft.com/office/drawing/2014/main" id="{7B4B8567-8507-4AD7-A8F3-B7C8821C4E8E}"/>
+              </a:ext>
+            </a:extLst>
+          </p:cNvPr>
+          <p:cNvSpPr>
+            <a:spLocks xmlns:a="http://schemas.openxmlformats.org/drawingml/2006/main" noGrp="1"/>
+          </p:cNvSpPr>
+          <p:nvPr/>
+        </p:nvSpPr>
+        <p:spPr>
+          <a:xfrm xmlns:a="http://schemas.openxmlformats.org/drawingml/2006/main">
+            <a:off x="3429000" y="3067050"/>
+            <a:ext cx="2286000" cy="266700"/>
+          </a:xfrm>
+          <a:prstGeom xmlns:a="http://schemas.openxmlformats.org/drawingml/2006/main" prst="rect">
+            <a:avLst/>
+          </a:prstGeom>
+          <a:noFill xmlns:a="http://schemas.openxmlformats.org/drawingml/2006/main"/>
+          <a:ln xmlns:a="http://schemas.openxmlformats.org/drawingml/2006/main" w="0">
+            <a:noFill/>
+            <a:prstDash val="solid"/>
+          </a:ln>
+        </p:spPr>
+        <p:txBody>
+          <a:bodyPr xmlns:a="http://schemas.openxmlformats.org/drawingml/2006/main" anchor="t"/>
+          <a:lstStyle xmlns:a="http://schemas.openxmlformats.org/drawingml/2006/main"/>
+          <a:p xmlns:a="http://schemas.openxmlformats.org/drawingml/2006/main">
+            <a:pPr algn="l">
+              <a:buNone/>
+              <a:defRPr sz="1275" b="1">
+                <a:solidFill>
+                  <a:srgbClr val="3D8DFF"/>
+                </a:solidFill>
+                <a:latin typeface="Arial"/>
+                <a:ea typeface="Arial"/>
+                <a:cs typeface="Arial"/>
+              </a:defRPr>
+            </a:pPr>
+            <a:r>
+              <a:rPr sz="1275" b="1">
+                <a:solidFill>
+                  <a:srgbClr val="3D8DFF"/>
+                </a:solidFill>
+                <a:latin typeface="Arial"/>
+                <a:ea typeface="Arial"/>
+                <a:cs typeface="Arial"/>
+              </a:rPr>
+              <a:t>SIGNAL</a:t>
+            </a:r>
+          </a:p>
+        </p:txBody>
+      </p:sp>
+      <p:sp>
+        <p:nvSpPr>
+          <p:cNvPr id="11" name="">
+            <a:extLst xmlns:a="http://schemas.openxmlformats.org/drawingml/2006/main">
+              <a:ext uri="{FF2B5EF4-FFF2-40B4-BE49-F238E27FC236}">
+                <a16:creationId xmlns:a16="http://schemas.microsoft.com/office/drawing/2014/main" id="{EE99CB67-3B4D-4239-96EC-C5AE0846EE8A}"/>
+              </a:ext>
+            </a:extLst>
+          </p:cNvPr>
+          <p:cNvSpPr>
+            <a:spLocks xmlns:a="http://schemas.openxmlformats.org/drawingml/2006/main" noGrp="1"/>
+          </p:cNvSpPr>
+          <p:nvPr/>
+        </p:nvSpPr>
+        <p:spPr>
+          <a:xfrm xmlns:a="http://schemas.openxmlformats.org/drawingml/2006/main">
+            <a:off x="3429000" y="3524250"/>
+            <a:ext cx="2286000" cy="1028700"/>
+          </a:xfrm>
+          <a:prstGeom xmlns:a="http://schemas.openxmlformats.org/drawingml/2006/main" prst="rect">
+            <a:avLst/>
+          </a:prstGeom>
+          <a:noFill xmlns:a="http://schemas.openxmlformats.org/drawingml/2006/main"/>
+          <a:ln xmlns:a="http://schemas.openxmlformats.org/drawingml/2006/main" w="0">
+            <a:noFill/>
+            <a:prstDash val="solid"/>
+          </a:ln>
+        </p:spPr>
+        <p:txBody>
+          <a:bodyPr xmlns:a="http://schemas.openxmlformats.org/drawingml/2006/main" anchor="t"/>
+          <a:lstStyle xmlns:a="http://schemas.openxmlformats.org/drawingml/2006/main"/>
+          <a:p xmlns:a="http://schemas.openxmlformats.org/drawingml/2006/main">
+            <a:pPr algn="l">
+              <a:buNone/>
+              <a:defRPr sz="2025" b="1">
+                <a:solidFill>
+                  <a:srgbClr val="101820"/>
+                </a:solidFill>
+                <a:latin typeface="Arial"/>
+                <a:ea typeface="Arial"/>
+                <a:cs typeface="Arial"/>
+              </a:defRPr>
+            </a:pPr>
+            <a:r>
+              <a:rPr sz="2025" b="1">
+                <a:solidFill>
+                  <a:srgbClr val="101820"/>
+                </a:solidFill>
+                <a:latin typeface="Arial"/>
+                <a:ea typeface="Arial"/>
+                <a:cs typeface="Arial"/>
+              </a:rPr>
+              <a:t>Wednesday close</a:t>
+            </a:r>
+          </a:p>
+          <a:p xmlns:a="http://schemas.openxmlformats.org/drawingml/2006/main">
+            <a:pPr algn="l">
+              <a:buNone/>
+              <a:defRPr sz="2025" b="1">
+                <a:solidFill>
+                  <a:srgbClr val="101820"/>
+                </a:solidFill>
+                <a:latin typeface="Arial"/>
+                <a:ea typeface="Arial"/>
+                <a:cs typeface="Arial"/>
+              </a:defRPr>
+            </a:pPr>
+            <a:r>
+              <a:rPr sz="2025" b="1">
+                <a:solidFill>
+                  <a:srgbClr val="101820"/>
+                </a:solidFill>
+                <a:latin typeface="Arial"/>
+                <a:ea typeface="Arial"/>
+                <a:cs typeface="Arial"/>
+              </a:rPr>
+              <a:t>10- &amp; 25-week ROC</a:t>
+            </a:r>
+          </a:p>
+        </p:txBody>
+      </p:sp>
+      <p:sp>
+        <p:nvSpPr>
+          <p:cNvPr id="12" name="">
+            <a:extLst xmlns:a="http://schemas.openxmlformats.org/drawingml/2006/main">
+              <a:ext uri="{FF2B5EF4-FFF2-40B4-BE49-F238E27FC236}">
+                <a16:creationId xmlns:a16="http://schemas.microsoft.com/office/drawing/2014/main" id="{E2336303-E925-419F-BA88-E200EA9CDF26}"/>
+              </a:ext>
+            </a:extLst>
+          </p:cNvPr>
+          <p:cNvSpPr>
+            <a:spLocks xmlns:a="http://schemas.openxmlformats.org/drawingml/2006/main" noGrp="1"/>
+          </p:cNvSpPr>
+          <p:nvPr/>
+        </p:nvSpPr>
+        <p:spPr>
+          <a:xfrm xmlns:a="http://schemas.openxmlformats.org/drawingml/2006/main">
+            <a:off x="6191250" y="3067050"/>
+            <a:ext cx="2286000" cy="266700"/>
+          </a:xfrm>
+          <a:prstGeom xmlns:a="http://schemas.openxmlformats.org/drawingml/2006/main" prst="rect">
+            <a:avLst/>
+          </a:prstGeom>
+          <a:noFill xmlns:a="http://schemas.openxmlformats.org/drawingml/2006/main"/>
+          <a:ln xmlns:a="http://schemas.openxmlformats.org/drawingml/2006/main" w="0">
+            <a:noFill/>
+            <a:prstDash val="solid"/>
+          </a:ln>
+        </p:spPr>
+        <p:txBody>
+          <a:bodyPr xmlns:a="http://schemas.openxmlformats.org/drawingml/2006/main" anchor="t"/>
+          <a:lstStyle xmlns:a="http://schemas.openxmlformats.org/drawingml/2006/main"/>
+          <a:p xmlns:a="http://schemas.openxmlformats.org/drawingml/2006/main">
+            <a:pPr algn="l">
+              <a:buNone/>
+              <a:defRPr sz="1275" b="1">
+                <a:solidFill>
+                  <a:srgbClr val="3D8DFF"/>
+                </a:solidFill>
+                <a:latin typeface="Arial"/>
+                <a:ea typeface="Arial"/>
+                <a:cs typeface="Arial"/>
+              </a:defRPr>
+            </a:pPr>
+            <a:r>
+              <a:rPr sz="1275" b="1">
+                <a:solidFill>
+                  <a:srgbClr val="3D8DFF"/>
+                </a:solidFill>
+                <a:latin typeface="Arial"/>
+                <a:ea typeface="Arial"/>
+                <a:cs typeface="Arial"/>
+              </a:rPr>
+              <a:t>SELECTION</a:t>
+            </a:r>
+          </a:p>
+        </p:txBody>
+      </p:sp>
+      <p:sp>
+        <p:nvSpPr>
+          <p:cNvPr id="13" name="">
+            <a:extLst xmlns:a="http://schemas.openxmlformats.org/drawingml/2006/main">
+              <a:ext uri="{FF2B5EF4-FFF2-40B4-BE49-F238E27FC236}">
+                <a16:creationId xmlns:a16="http://schemas.microsoft.com/office/drawing/2014/main" id="{E87F69DB-3722-4584-ACD7-5794C8CC09D7}"/>
+              </a:ext>
+            </a:extLst>
+          </p:cNvPr>
+          <p:cNvSpPr>
+            <a:spLocks xmlns:a="http://schemas.openxmlformats.org/drawingml/2006/main" noGrp="1"/>
+          </p:cNvSpPr>
+          <p:nvPr/>
+        </p:nvSpPr>
+        <p:spPr>
+          <a:xfrm xmlns:a="http://schemas.openxmlformats.org/drawingml/2006/main">
+            <a:off x="6191250" y="3524250"/>
+            <a:ext cx="2286000" cy="1028700"/>
+          </a:xfrm>
+          <a:prstGeom xmlns:a="http://schemas.openxmlformats.org/drawingml/2006/main" prst="rect">
+            <a:avLst/>
+          </a:prstGeom>
+          <a:noFill xmlns:a="http://schemas.openxmlformats.org/drawingml/2006/main"/>
+          <a:ln xmlns:a="http://schemas.openxmlformats.org/drawingml/2006/main" w="0">
+            <a:noFill/>
+            <a:prstDash val="solid"/>
+          </a:ln>
+        </p:spPr>
+        <p:txBody>
+          <a:bodyPr xmlns:a="http://schemas.openxmlformats.org/drawingml/2006/main" anchor="t"/>
+          <a:lstStyle xmlns:a="http://schemas.openxmlformats.org/drawingml/2006/main"/>
+          <a:p xmlns:a="http://schemas.openxmlformats.org/drawingml/2006/main">
+            <a:pPr algn="l">
+              <a:buNone/>
+              <a:defRPr sz="2025" b="1">
+                <a:solidFill>
+                  <a:srgbClr val="101820"/>
+                </a:solidFill>
+                <a:latin typeface="Arial"/>
+                <a:ea typeface="Arial"/>
+                <a:cs typeface="Arial"/>
+              </a:defRPr>
+            </a:pPr>
+            <a:r>
+              <a:rPr sz="2025" b="1">
+                <a:solidFill>
+                  <a:srgbClr val="101820"/>
+                </a:solidFill>
+                <a:latin typeface="Arial"/>
+                <a:ea typeface="Arial"/>
+                <a:cs typeface="Arial"/>
+              </a:rPr>
+              <a:t>Top 3 per sleeve</a:t>
+            </a:r>
+          </a:p>
+          <a:p xmlns:a="http://schemas.openxmlformats.org/drawingml/2006/main">
+            <a:pPr algn="l">
+              <a:buNone/>
+              <a:defRPr sz="2025" b="1">
+                <a:solidFill>
+                  <a:srgbClr val="101820"/>
+                </a:solidFill>
+                <a:latin typeface="Arial"/>
+                <a:ea typeface="Arial"/>
+                <a:cs typeface="Arial"/>
+              </a:defRPr>
+            </a:pPr>
+            <a:r>
+              <a:rPr sz="2025" b="1">
+                <a:solidFill>
+                  <a:srgbClr val="101820"/>
+                </a:solidFill>
+                <a:latin typeface="Arial"/>
+                <a:ea typeface="Arial"/>
+                <a:cs typeface="Arial"/>
+              </a:rPr>
+              <a:t>Positive only</a:t>
+            </a:r>
+          </a:p>
+        </p:txBody>
+      </p:sp>
+      <p:sp>
+        <p:nvSpPr>
+          <p:cNvPr id="14" name="">
+            <a:extLst xmlns:a="http://schemas.openxmlformats.org/drawingml/2006/main">
+              <a:ext uri="{FF2B5EF4-FFF2-40B4-BE49-F238E27FC236}">
+                <a16:creationId xmlns:a16="http://schemas.microsoft.com/office/drawing/2014/main" id="{E839D33A-5AB2-49E2-BD35-DAC5629E2C9F}"/>
+              </a:ext>
+            </a:extLst>
+          </p:cNvPr>
+          <p:cNvSpPr>
+            <a:spLocks xmlns:a="http://schemas.openxmlformats.org/drawingml/2006/main" noGrp="1"/>
+          </p:cNvSpPr>
+          <p:nvPr/>
+        </p:nvSpPr>
+        <p:spPr>
+          <a:xfrm xmlns:a="http://schemas.openxmlformats.org/drawingml/2006/main">
+            <a:off x="8953500" y="3067050"/>
+            <a:ext cx="2286000" cy="266700"/>
+          </a:xfrm>
+          <a:prstGeom xmlns:a="http://schemas.openxmlformats.org/drawingml/2006/main" prst="rect">
+            <a:avLst/>
+          </a:prstGeom>
+          <a:noFill xmlns:a="http://schemas.openxmlformats.org/drawingml/2006/main"/>
+          <a:ln xmlns:a="http://schemas.openxmlformats.org/drawingml/2006/main" w="0">
+            <a:noFill/>
+            <a:prstDash val="solid"/>
+          </a:ln>
+        </p:spPr>
+        <p:txBody>
+          <a:bodyPr xmlns:a="http://schemas.openxmlformats.org/drawingml/2006/main" anchor="t"/>
+          <a:lstStyle xmlns:a="http://schemas.openxmlformats.org/drawingml/2006/main"/>
+          <a:p xmlns:a="http://schemas.openxmlformats.org/drawingml/2006/main">
+            <a:pPr algn="l">
+              <a:buNone/>
+              <a:defRPr sz="1275" b="1">
+                <a:solidFill>
+                  <a:srgbClr val="3D8DFF"/>
+                </a:solidFill>
+                <a:latin typeface="Arial"/>
+                <a:ea typeface="Arial"/>
+                <a:cs typeface="Arial"/>
+              </a:defRPr>
+            </a:pPr>
+            <a:r>
+              <a:rPr sz="1275" b="1">
+                <a:solidFill>
+                  <a:srgbClr val="3D8DFF"/>
+                </a:solidFill>
+                <a:latin typeface="Arial"/>
+                <a:ea typeface="Arial"/>
+                <a:cs typeface="Arial"/>
+              </a:rPr>
+              <a:t>EXECUTION</a:t>
+            </a:r>
+          </a:p>
+        </p:txBody>
+      </p:sp>
+      <p:sp>
+        <p:nvSpPr>
+          <p:cNvPr id="15" name="">
+            <a:extLst xmlns:a="http://schemas.openxmlformats.org/drawingml/2006/main">
+              <a:ext uri="{FF2B5EF4-FFF2-40B4-BE49-F238E27FC236}">
+                <a16:creationId xmlns:a16="http://schemas.microsoft.com/office/drawing/2014/main" id="{AD376B60-6F16-4D24-AAF8-36D5C9BFBC2E}"/>
+              </a:ext>
+            </a:extLst>
+          </p:cNvPr>
+          <p:cNvSpPr>
+            <a:spLocks xmlns:a="http://schemas.openxmlformats.org/drawingml/2006/main" noGrp="1"/>
+          </p:cNvSpPr>
+          <p:nvPr/>
+        </p:nvSpPr>
+        <p:spPr>
+          <a:xfrm xmlns:a="http://schemas.openxmlformats.org/drawingml/2006/main">
+            <a:off x="8953500" y="3524250"/>
+            <a:ext cx="2286000" cy="1028700"/>
+          </a:xfrm>
+          <a:prstGeom xmlns:a="http://schemas.openxmlformats.org/drawingml/2006/main" prst="rect">
+            <a:avLst/>
+          </a:prstGeom>
+          <a:noFill xmlns:a="http://schemas.openxmlformats.org/drawingml/2006/main"/>
+          <a:ln xmlns:a="http://schemas.openxmlformats.org/drawingml/2006/main" w="0">
+            <a:noFill/>
+            <a:prstDash val="solid"/>
+          </a:ln>
+        </p:spPr>
+        <p:txBody>
+          <a:bodyPr xmlns:a="http://schemas.openxmlformats.org/drawingml/2006/main" anchor="t"/>
+          <a:lstStyle xmlns:a="http://schemas.openxmlformats.org/drawingml/2006/main"/>
+          <a:p xmlns:a="http://schemas.openxmlformats.org/drawingml/2006/main">
+            <a:pPr algn="l">
+              <a:buNone/>
+              <a:defRPr sz="2025" b="1">
+                <a:solidFill>
+                  <a:srgbClr val="101820"/>
+                </a:solidFill>
+                <a:latin typeface="Arial"/>
+                <a:ea typeface="Arial"/>
+                <a:cs typeface="Arial"/>
+              </a:defRPr>
+            </a:pPr>
+            <a:r>
+              <a:rPr sz="2025" b="1">
+                <a:solidFill>
+                  <a:srgbClr val="101820"/>
+                </a:solidFill>
+                <a:latin typeface="Arial"/>
+                <a:ea typeface="Arial"/>
+                <a:cs typeface="Arial"/>
+              </a:rPr>
+              <a:t>Next open</a:t>
+            </a:r>
+          </a:p>
+          <a:p xmlns:a="http://schemas.openxmlformats.org/drawingml/2006/main">
+            <a:pPr algn="l">
+              <a:buNone/>
+              <a:defRPr sz="2025" b="1">
+                <a:solidFill>
+                  <a:srgbClr val="101820"/>
+                </a:solidFill>
+                <a:latin typeface="Arial"/>
+                <a:ea typeface="Arial"/>
+                <a:cs typeface="Arial"/>
+              </a:defRPr>
+            </a:pPr>
+            <a:r>
+              <a:rPr sz="2025" b="1">
+                <a:solidFill>
+                  <a:srgbClr val="101820"/>
+                </a:solidFill>
+                <a:latin typeface="Arial"/>
+                <a:ea typeface="Arial"/>
+                <a:cs typeface="Arial"/>
+              </a:rPr>
+              <a:t>5 bps one-way</a:t>
+            </a:r>
+          </a:p>
+        </p:txBody>
+      </p:sp>
+      <p:sp>
+        <p:nvSpPr>
+          <p:cNvPr id="16" name="">
+            <a:extLst xmlns:a="http://schemas.openxmlformats.org/drawingml/2006/main">
+              <a:ext uri="{FF2B5EF4-FFF2-40B4-BE49-F238E27FC236}">
+                <a16:creationId xmlns:a16="http://schemas.microsoft.com/office/drawing/2014/main" id="{B7A3C9A6-4C13-47A7-A4A9-F8DE7D75F0C5}"/>
+              </a:ext>
+            </a:extLst>
+          </p:cNvPr>
+          <p:cNvSpPr>
+            <a:spLocks xmlns:a="http://schemas.openxmlformats.org/drawingml/2006/main" noGrp="1"/>
+          </p:cNvSpPr>
+          <p:nvPr/>
+        </p:nvSpPr>
+        <p:spPr>
+          <a:xfrm xmlns:a="http://schemas.openxmlformats.org/drawingml/2006/main">
+            <a:off x="666750" y="5010150"/>
+            <a:ext cx="10572750" cy="781050"/>
+          </a:xfrm>
+          <a:prstGeom xmlns:a="http://schemas.openxmlformats.org/drawingml/2006/main" prst="rect">
+            <a:avLst/>
+          </a:prstGeom>
+          <a:solidFill xmlns:a="http://schemas.openxmlformats.org/drawingml/2006/main">
+            <a:srgbClr val="EAF5FB"/>
+          </a:solidFill>
+          <a:ln xmlns:a="http://schemas.openxmlformats.org/drawingml/2006/main" w="9525">
+            <a:solidFill>
+              <a:srgbClr val="6DCBF4"/>
+            </a:solidFill>
+            <a:prstDash val="solid"/>
+          </a:ln>
+        </p:spPr>
+      </p:sp>
+      <p:sp>
+        <p:nvSpPr>
+          <p:cNvPr id="17" name="">
+            <a:extLst xmlns:a="http://schemas.openxmlformats.org/drawingml/2006/main">
+              <a:ext uri="{FF2B5EF4-FFF2-40B4-BE49-F238E27FC236}">
+                <a16:creationId xmlns:a16="http://schemas.microsoft.com/office/drawing/2014/main" id="{91F22369-1F45-4A63-B774-BEF94F9004C8}"/>
+              </a:ext>
+            </a:extLst>
+          </p:cNvPr>
+          <p:cNvSpPr>
+            <a:spLocks xmlns:a="http://schemas.openxmlformats.org/drawingml/2006/main" noGrp="1"/>
+          </p:cNvSpPr>
+          <p:nvPr/>
+        </p:nvSpPr>
+        <p:spPr>
+          <a:xfrm xmlns:a="http://schemas.openxmlformats.org/drawingml/2006/main">
+            <a:off x="952500" y="5219700"/>
+            <a:ext cx="10001250" cy="419100"/>
+          </a:xfrm>
+          <a:prstGeom xmlns:a="http://schemas.openxmlformats.org/drawingml/2006/main" prst="rect">
+            <a:avLst/>
+          </a:prstGeom>
+          <a:noFill xmlns:a="http://schemas.openxmlformats.org/drawingml/2006/main"/>
+          <a:ln xmlns:a="http://schemas.openxmlformats.org/drawingml/2006/main" w="0">
+            <a:noFill/>
+            <a:prstDash val="solid"/>
+          </a:ln>
+        </p:spPr>
+        <p:txBody>
+          <a:bodyPr xmlns:a="http://schemas.openxmlformats.org/drawingml/2006/main" anchor="t"/>
+          <a:lstStyle xmlns:a="http://schemas.openxmlformats.org/drawingml/2006/main"/>
+          <a:p xmlns:a="http://schemas.openxmlformats.org/drawingml/2006/main">
+            <a:pPr algn="ctr">
+              <a:buNone/>
+              <a:defRPr sz="1800" b="1">
+                <a:solidFill>
+                  <a:srgbClr val="101820"/>
+                </a:solidFill>
+                <a:latin typeface="Arial"/>
+                <a:ea typeface="Arial"/>
+                <a:cs typeface="Arial"/>
+              </a:defRPr>
+            </a:pPr>
+            <a:r>
+              <a:rPr sz="1800" b="1">
+                <a:solidFill>
+                  <a:srgbClr val="101820"/>
+                </a:solidFill>
+                <a:latin typeface="Arial"/>
+                <a:ea typeface="Arial"/>
+                <a:cs typeface="Arial"/>
+              </a:rPr>
+              <a:t>Stock fleets are static survivor-biased POCs; no point-in-time membership claim.</a:t>
+            </a:r>
+          </a:p>
+        </p:txBody>
+      </p:sp>
+    </p:spTree>
+    <p:extLst>
+      <p:ext uri="{BB962C8B-B14F-4D97-AF65-F5344CB8AC3E}">
+        <p14:creationId xmlns:p14="http://schemas.microsoft.com/office/powerpoint/2010/main" val="231651424"/>
+      </p:ext>
+    </p:extLst>
+  </p:cSld>
+</p:sld>
+</file>
+
+<file path=ppt/slides/slide27.xml><?xml version="1.0" encoding="utf-8"?>
+<p:sld xmlns:p="http://schemas.openxmlformats.org/presentationml/2006/main">
+  <p:cSld>
+    <p:bg>
+      <p:bgPr>
+        <a:solidFill xmlns:a="http://schemas.openxmlformats.org/drawingml/2006/main">
+          <a:srgbClr val="FFFFFF"/>
+        </a:solidFill>
+      </p:bgPr>
+    </p:bg>
+    <p:spTree>
+      <p:nvGrpSpPr>
+        <p:cNvPr id="1" name=""/>
+        <p:cNvGrpSpPr/>
+        <p:nvPr/>
+      </p:nvGrpSpPr>
+      <p:grpSpPr>
+        <a:xfrm xmlns:a="http://schemas.openxmlformats.org/drawingml/2006/main"/>
+      </p:grpSpPr>
+      <p:sp>
+        <p:nvSpPr>
+          <p:cNvPr id="13" name="">
+            <a:extLst xmlns:a="http://schemas.openxmlformats.org/drawingml/2006/main">
+              <a:ext uri="{FF2B5EF4-FFF2-40B4-BE49-F238E27FC236}">
+                <a16:creationId xmlns:a16="http://schemas.microsoft.com/office/drawing/2014/main" id="{E7AA0F3C-FA14-482C-9911-54A24769116A}"/>
+              </a:ext>
+            </a:extLst>
+          </p:cNvPr>
+          <p:cNvSpPr>
+            <a:spLocks xmlns:a="http://schemas.openxmlformats.org/drawingml/2006/main" noGrp="1"/>
+          </p:cNvSpPr>
+          <p:nvPr/>
+        </p:nvSpPr>
+        <p:spPr>
+          <a:xfrm xmlns:a="http://schemas.openxmlformats.org/drawingml/2006/main">
+            <a:off x="400050" y="228600"/>
+            <a:ext cx="2857500" cy="228600"/>
+          </a:xfrm>
+          <a:prstGeom xmlns:a="http://schemas.openxmlformats.org/drawingml/2006/main" prst="rect">
+            <a:avLst/>
+          </a:prstGeom>
+          <a:noFill xmlns:a="http://schemas.openxmlformats.org/drawingml/2006/main"/>
+          <a:ln xmlns:a="http://schemas.openxmlformats.org/drawingml/2006/main" w="0">
+            <a:noFill/>
+            <a:prstDash val="solid"/>
+          </a:ln>
+        </p:spPr>
+        <p:txBody>
+          <a:bodyPr xmlns:a="http://schemas.openxmlformats.org/drawingml/2006/main" anchor="t"/>
+          <a:lstStyle xmlns:a="http://schemas.openxmlformats.org/drawingml/2006/main"/>
+          <a:p xmlns:a="http://schemas.openxmlformats.org/drawingml/2006/main">
+            <a:pPr algn="l">
+              <a:buNone/>
+              <a:defRPr sz="1200" b="1">
+                <a:solidFill>
+                  <a:srgbClr val="3D8DFF"/>
+                </a:solidFill>
+                <a:latin typeface="Arial"/>
+                <a:ea typeface="Arial"/>
+                <a:cs typeface="Arial"/>
+              </a:defRPr>
+            </a:pPr>
+            <a:r>
+              <a:rPr sz="1200" b="1">
+                <a:solidFill>
+                  <a:srgbClr val="3D8DFF"/>
+                </a:solidFill>
+                <a:latin typeface="Arial"/>
+                <a:ea typeface="Arial"/>
+                <a:cs typeface="Arial"/>
+              </a:rPr>
+              <a:t>UNIVERSE TRANSPORT · SCORECARD</a:t>
+            </a:r>
+          </a:p>
+        </p:txBody>
+      </p:sp>
+      <p:sp>
+        <p:nvSpPr>
+          <p:cNvPr id="2" name="">
+            <a:extLst xmlns:a="http://schemas.openxmlformats.org/drawingml/2006/main">
+              <a:ext uri="{FF2B5EF4-FFF2-40B4-BE49-F238E27FC236}">
+                <a16:creationId xmlns:a16="http://schemas.microsoft.com/office/drawing/2014/main" id="{522D8FEC-18D3-4EAC-98CE-20AF9D03A3AC}"/>
+              </a:ext>
+            </a:extLst>
+          </p:cNvPr>
+          <p:cNvSpPr>
+            <a:spLocks xmlns:a="http://schemas.openxmlformats.org/drawingml/2006/main" noGrp="1"/>
+          </p:cNvSpPr>
+          <p:nvPr/>
+        </p:nvSpPr>
+        <p:spPr>
+          <a:xfrm xmlns:a="http://schemas.openxmlformats.org/drawingml/2006/main">
+            <a:off x="400050" y="476250"/>
+            <a:ext cx="11049000" cy="819150"/>
+          </a:xfrm>
+          <a:prstGeom xmlns:a="http://schemas.openxmlformats.org/drawingml/2006/main" prst="rect">
+            <a:avLst/>
+          </a:prstGeom>
+          <a:noFill xmlns:a="http://schemas.openxmlformats.org/drawingml/2006/main"/>
+          <a:ln xmlns:a="http://schemas.openxmlformats.org/drawingml/2006/main" w="0">
+            <a:noFill/>
+            <a:prstDash val="solid"/>
+          </a:ln>
+        </p:spPr>
+        <p:txBody>
+          <a:bodyPr xmlns:a="http://schemas.openxmlformats.org/drawingml/2006/main" anchor="t"/>
+          <a:lstStyle xmlns:a="http://schemas.openxmlformats.org/drawingml/2006/main"/>
+          <a:p xmlns:a="http://schemas.openxmlformats.org/drawingml/2006/main">
+            <a:pPr algn="l">
+              <a:buNone/>
+              <a:defRPr sz="2700" b="1">
+                <a:solidFill>
+                  <a:srgbClr val="101820"/>
+                </a:solidFill>
+                <a:latin typeface="Arial"/>
+                <a:ea typeface="Arial"/>
+                <a:cs typeface="Arial"/>
+              </a:defRPr>
+            </a:pPr>
+            <a:r>
+              <a:rPr sz="2700" b="1">
+                <a:solidFill>
+                  <a:srgbClr val="101820"/>
+                </a:solidFill>
+                <a:latin typeface="Arial"/>
+                <a:ea typeface="Arial"/>
+                <a:cs typeface="Arial"/>
+              </a:rPr>
+              <a:t>Return transport fails; drawdown protection often survives</a:t>
+            </a:r>
+          </a:p>
+        </p:txBody>
+      </p:sp>
+      <p:sp>
+        <p:nvSpPr>
+          <p:cNvPr id="3" name="">
+            <a:extLst xmlns:a="http://schemas.openxmlformats.org/drawingml/2006/main">
+              <a:ext uri="{FF2B5EF4-FFF2-40B4-BE49-F238E27FC236}">
+                <a16:creationId xmlns:a16="http://schemas.microsoft.com/office/drawing/2014/main" id="{21605544-2473-417D-B48F-9F8DF40D4FAF}"/>
+              </a:ext>
+            </a:extLst>
+          </p:cNvPr>
+          <p:cNvSpPr>
+            <a:spLocks xmlns:a="http://schemas.openxmlformats.org/drawingml/2006/main" noGrp="1"/>
+          </p:cNvSpPr>
+          <p:nvPr/>
+        </p:nvSpPr>
+        <p:spPr>
+          <a:xfrm xmlns:a="http://schemas.openxmlformats.org/drawingml/2006/main">
+            <a:off x="400050" y="1428750"/>
+            <a:ext cx="11391900" cy="0"/>
+          </a:xfrm>
+          <a:prstGeom xmlns:a="http://schemas.openxmlformats.org/drawingml/2006/main" prst="line">
+            <a:avLst/>
+          </a:prstGeom>
+          <a:noFill xmlns:a="http://schemas.openxmlformats.org/drawingml/2006/main"/>
+          <a:ln xmlns:a="http://schemas.openxmlformats.org/drawingml/2006/main" w="9525">
+            <a:solidFill>
+              <a:srgbClr val="B8BCC4"/>
+            </a:solidFill>
+            <a:prstDash val="solid"/>
+          </a:ln>
+        </p:spPr>
+      </p:sp>
+      <p:sp>
+        <p:nvSpPr>
+          <p:cNvPr id="4" name="">
+            <a:extLst xmlns:a="http://schemas.openxmlformats.org/drawingml/2006/main">
+              <a:ext uri="{FF2B5EF4-FFF2-40B4-BE49-F238E27FC236}">
+                <a16:creationId xmlns:a16="http://schemas.microsoft.com/office/drawing/2014/main" id="{7944BF93-B836-4831-89CE-852C703D91AD}"/>
+              </a:ext>
+            </a:extLst>
+          </p:cNvPr>
+          <p:cNvSpPr>
+            <a:spLocks xmlns:a="http://schemas.openxmlformats.org/drawingml/2006/main" noGrp="1"/>
+          </p:cNvSpPr>
+          <p:nvPr/>
+        </p:nvSpPr>
+        <p:spPr>
+          <a:xfrm xmlns:a="http://schemas.openxmlformats.org/drawingml/2006/main">
+            <a:off x="11163300" y="6362700"/>
+            <a:ext cx="609600" cy="228600"/>
+          </a:xfrm>
+          <a:prstGeom xmlns:a="http://schemas.openxmlformats.org/drawingml/2006/main" prst="rect">
+            <a:avLst/>
+          </a:prstGeom>
+          <a:noFill xmlns:a="http://schemas.openxmlformats.org/drawingml/2006/main"/>
+          <a:ln xmlns:a="http://schemas.openxmlformats.org/drawingml/2006/main" w="0">
+            <a:noFill/>
+            <a:prstDash val="solid"/>
+          </a:ln>
+        </p:spPr>
+        <p:txBody>
+          <a:bodyPr xmlns:a="http://schemas.openxmlformats.org/drawingml/2006/main" anchor="t"/>
+          <a:lstStyle xmlns:a="http://schemas.openxmlformats.org/drawingml/2006/main"/>
+          <a:p xmlns:a="http://schemas.openxmlformats.org/drawingml/2006/main">
+            <a:pPr algn="r">
+              <a:buNone/>
+              <a:defRPr sz="1200" b="0">
+                <a:solidFill>
+                  <a:srgbClr val="52616B"/>
+                </a:solidFill>
+                <a:latin typeface="Arial"/>
+                <a:ea typeface="Arial"/>
+                <a:cs typeface="Arial"/>
+              </a:defRPr>
+            </a:pPr>
+            <a:r>
+              <a:rPr sz="1200" b="0">
+                <a:solidFill>
+                  <a:srgbClr val="52616B"/>
+                </a:solidFill>
+                <a:latin typeface="Arial"/>
+                <a:ea typeface="Arial"/>
+                <a:cs typeface="Arial"/>
+              </a:rPr>
+              <a:t> 27</a:t>
+            </a:r>
+          </a:p>
+        </p:txBody>
+      </p:sp>
+      <p:sp>
+        <p:nvSpPr>
+          <p:cNvPr id="6" name="">
+            <a:extLst xmlns:a="http://schemas.openxmlformats.org/drawingml/2006/main">
+              <a:ext uri="{FF2B5EF4-FFF2-40B4-BE49-F238E27FC236}">
+                <a16:creationId xmlns:a16="http://schemas.microsoft.com/office/drawing/2014/main" id="{DBF73623-95B1-48A7-A168-959D4ACF9EF6}"/>
+              </a:ext>
+            </a:extLst>
+          </p:cNvPr>
+          <p:cNvSpPr>
+            <a:spLocks xmlns:a="http://schemas.openxmlformats.org/drawingml/2006/main" noGrp="1"/>
+          </p:cNvSpPr>
+          <p:nvPr/>
+        </p:nvSpPr>
+        <p:spPr>
+          <a:xfrm xmlns:a="http://schemas.openxmlformats.org/drawingml/2006/main">
+            <a:off x="8991600" y="1733550"/>
+            <a:ext cx="2724150" cy="3905250"/>
+          </a:xfrm>
+          <a:prstGeom xmlns:a="http://schemas.openxmlformats.org/drawingml/2006/main" prst="rect">
+            <a:avLst/>
+          </a:prstGeom>
+          <a:solidFill xmlns:a="http://schemas.openxmlformats.org/drawingml/2006/main">
+            <a:srgbClr val="EAF5FB"/>
+          </a:solidFill>
+          <a:ln xmlns:a="http://schemas.openxmlformats.org/drawingml/2006/main" w="9525">
+            <a:solidFill>
+              <a:srgbClr val="6DCBF4"/>
+            </a:solidFill>
+            <a:prstDash val="solid"/>
+          </a:ln>
+        </p:spPr>
+      </p:sp>
+      <p:sp>
+        <p:nvSpPr>
+          <p:cNvPr id="7" name="">
+            <a:extLst xmlns:a="http://schemas.openxmlformats.org/drawingml/2006/main">
+              <a:ext uri="{FF2B5EF4-FFF2-40B4-BE49-F238E27FC236}">
+                <a16:creationId xmlns:a16="http://schemas.microsoft.com/office/drawing/2014/main" id="{454D3BC9-AB19-4F57-985E-DDB05A7434C0}"/>
+              </a:ext>
+            </a:extLst>
+          </p:cNvPr>
+          <p:cNvSpPr>
+            <a:spLocks xmlns:a="http://schemas.openxmlformats.org/drawingml/2006/main" noGrp="1"/>
+          </p:cNvSpPr>
+          <p:nvPr/>
+        </p:nvSpPr>
+        <p:spPr>
+          <a:xfrm xmlns:a="http://schemas.openxmlformats.org/drawingml/2006/main">
+            <a:off x="9258300" y="2019300"/>
+            <a:ext cx="2095500" cy="247650"/>
+          </a:xfrm>
+          <a:prstGeom xmlns:a="http://schemas.openxmlformats.org/drawingml/2006/main" prst="rect">
+            <a:avLst/>
+          </a:prstGeom>
+          <a:noFill xmlns:a="http://schemas.openxmlformats.org/drawingml/2006/main"/>
+          <a:ln xmlns:a="http://schemas.openxmlformats.org/drawingml/2006/main" w="0">
+            <a:noFill/>
+            <a:prstDash val="solid"/>
+          </a:ln>
+        </p:spPr>
+        <p:txBody>
+          <a:bodyPr xmlns:a="http://schemas.openxmlformats.org/drawingml/2006/main" anchor="t"/>
+          <a:lstStyle xmlns:a="http://schemas.openxmlformats.org/drawingml/2006/main"/>
+          <a:p xmlns:a="http://schemas.openxmlformats.org/drawingml/2006/main">
+            <a:pPr algn="l">
+              <a:buNone/>
+              <a:defRPr sz="1275" b="1">
+                <a:solidFill>
+                  <a:srgbClr val="3D8DFF"/>
+                </a:solidFill>
+                <a:latin typeface="Arial"/>
+                <a:ea typeface="Arial"/>
+                <a:cs typeface="Arial"/>
+              </a:defRPr>
+            </a:pPr>
+            <a:r>
+              <a:rPr sz="1275" b="1">
+                <a:solidFill>
+                  <a:srgbClr val="3D8DFF"/>
+                </a:solidFill>
+                <a:latin typeface="Arial"/>
+                <a:ea typeface="Arial"/>
+                <a:cs typeface="Arial"/>
+              </a:rPr>
+              <a:t>TRANSPORT READOUT</a:t>
+            </a:r>
+          </a:p>
+        </p:txBody>
+      </p:sp>
+      <p:sp>
+        <p:nvSpPr>
+          <p:cNvPr id="8" name="">
+            <a:extLst xmlns:a="http://schemas.openxmlformats.org/drawingml/2006/main">
+              <a:ext uri="{FF2B5EF4-FFF2-40B4-BE49-F238E27FC236}">
+                <a16:creationId xmlns:a16="http://schemas.microsoft.com/office/drawing/2014/main" id="{50CF5D67-77D5-4062-92DB-E9771F376463}"/>
+              </a:ext>
+            </a:extLst>
+          </p:cNvPr>
+          <p:cNvSpPr>
+            <a:spLocks xmlns:a="http://schemas.openxmlformats.org/drawingml/2006/main" noGrp="1"/>
+          </p:cNvSpPr>
+          <p:nvPr/>
+        </p:nvSpPr>
+        <p:spPr>
+          <a:xfrm xmlns:a="http://schemas.openxmlformats.org/drawingml/2006/main">
+            <a:off x="9258300" y="2571750"/>
+            <a:ext cx="2095500" cy="552450"/>
+          </a:xfrm>
+          <a:prstGeom xmlns:a="http://schemas.openxmlformats.org/drawingml/2006/main" prst="rect">
+            <a:avLst/>
+          </a:prstGeom>
+          <a:noFill xmlns:a="http://schemas.openxmlformats.org/drawingml/2006/main"/>
+          <a:ln xmlns:a="http://schemas.openxmlformats.org/drawingml/2006/main" w="0">
+            <a:noFill/>
+            <a:prstDash val="solid"/>
+          </a:ln>
+        </p:spPr>
+        <p:txBody>
+          <a:bodyPr xmlns:a="http://schemas.openxmlformats.org/drawingml/2006/main" anchor="t"/>
+          <a:lstStyle xmlns:a="http://schemas.openxmlformats.org/drawingml/2006/main"/>
+          <a:p xmlns:a="http://schemas.openxmlformats.org/drawingml/2006/main">
+            <a:pPr algn="l">
+              <a:buNone/>
+              <a:defRPr sz="3000" b="1">
+                <a:solidFill>
+                  <a:srgbClr val="101820"/>
+                </a:solidFill>
+                <a:latin typeface="Arial"/>
+                <a:ea typeface="Arial"/>
+                <a:cs typeface="Arial"/>
+              </a:defRPr>
+            </a:pPr>
+            <a:r>
+              <a:rPr sz="3000" b="1">
+                <a:solidFill>
+                  <a:srgbClr val="101820"/>
+                </a:solidFill>
+                <a:latin typeface="Arial"/>
+                <a:ea typeface="Arial"/>
+                <a:cs typeface="Arial"/>
+              </a:rPr>
+              <a:t>1 / 11</a:t>
+            </a:r>
+          </a:p>
+        </p:txBody>
+      </p:sp>
+      <p:sp>
+        <p:nvSpPr>
+          <p:cNvPr id="9" name="">
+            <a:extLst xmlns:a="http://schemas.openxmlformats.org/drawingml/2006/main">
+              <a:ext uri="{FF2B5EF4-FFF2-40B4-BE49-F238E27FC236}">
+                <a16:creationId xmlns:a16="http://schemas.microsoft.com/office/drawing/2014/main" id="{7C0B5D7F-B17A-4AC9-835E-6E44FD9128EC}"/>
+              </a:ext>
+            </a:extLst>
+          </p:cNvPr>
+          <p:cNvSpPr>
+            <a:spLocks xmlns:a="http://schemas.openxmlformats.org/drawingml/2006/main" noGrp="1"/>
+          </p:cNvSpPr>
+          <p:nvPr/>
+        </p:nvSpPr>
+        <p:spPr>
+          <a:xfrm xmlns:a="http://schemas.openxmlformats.org/drawingml/2006/main">
+            <a:off x="9258300" y="3105150"/>
+            <a:ext cx="2095500" cy="400050"/>
+          </a:xfrm>
+          <a:prstGeom xmlns:a="http://schemas.openxmlformats.org/drawingml/2006/main" prst="rect">
+            <a:avLst/>
+          </a:prstGeom>
+          <a:noFill xmlns:a="http://schemas.openxmlformats.org/drawingml/2006/main"/>
+          <a:ln xmlns:a="http://schemas.openxmlformats.org/drawingml/2006/main" w="0">
+            <a:noFill/>
+            <a:prstDash val="solid"/>
+          </a:ln>
+        </p:spPr>
+        <p:txBody>
+          <a:bodyPr xmlns:a="http://schemas.openxmlformats.org/drawingml/2006/main" anchor="t"/>
+          <a:lstStyle xmlns:a="http://schemas.openxmlformats.org/drawingml/2006/main"/>
+          <a:p xmlns:a="http://schemas.openxmlformats.org/drawingml/2006/main">
+            <a:pPr algn="l">
+              <a:buNone/>
+              <a:defRPr sz="1650" b="0">
+                <a:solidFill>
+                  <a:srgbClr val="52616B"/>
+                </a:solidFill>
+                <a:latin typeface="Arial"/>
+                <a:ea typeface="Arial"/>
+                <a:cs typeface="Arial"/>
+              </a:defRPr>
+            </a:pPr>
+            <a:r>
+              <a:rPr sz="1650" b="0">
+                <a:solidFill>
+                  <a:srgbClr val="52616B"/>
+                </a:solidFill>
+                <a:latin typeface="Arial"/>
+                <a:ea typeface="Arial"/>
+                <a:cs typeface="Arial"/>
+              </a:rPr>
+              <a:t>stock sectors beat equal weight</a:t>
+            </a:r>
+          </a:p>
+        </p:txBody>
+      </p:sp>
+      <p:sp>
+        <p:nvSpPr>
+          <p:cNvPr id="10" name="">
+            <a:extLst xmlns:a="http://schemas.openxmlformats.org/drawingml/2006/main">
+              <a:ext uri="{FF2B5EF4-FFF2-40B4-BE49-F238E27FC236}">
+                <a16:creationId xmlns:a16="http://schemas.microsoft.com/office/drawing/2014/main" id="{DE7E78EB-BFD1-417B-B781-C8666F0A80F8}"/>
+              </a:ext>
+            </a:extLst>
+          </p:cNvPr>
+          <p:cNvSpPr>
+            <a:spLocks xmlns:a="http://schemas.openxmlformats.org/drawingml/2006/main" noGrp="1"/>
+          </p:cNvSpPr>
+          <p:nvPr/>
+        </p:nvSpPr>
+        <p:spPr>
+          <a:xfrm xmlns:a="http://schemas.openxmlformats.org/drawingml/2006/main">
+            <a:off x="9258300" y="3790950"/>
+            <a:ext cx="2095500" cy="552450"/>
+          </a:xfrm>
+          <a:prstGeom xmlns:a="http://schemas.openxmlformats.org/drawingml/2006/main" prst="rect">
+            <a:avLst/>
+          </a:prstGeom>
+          <a:noFill xmlns:a="http://schemas.openxmlformats.org/drawingml/2006/main"/>
+          <a:ln xmlns:a="http://schemas.openxmlformats.org/drawingml/2006/main" w="0">
+            <a:noFill/>
+            <a:prstDash val="solid"/>
+          </a:ln>
+        </p:spPr>
+        <p:txBody>
+          <a:bodyPr xmlns:a="http://schemas.openxmlformats.org/drawingml/2006/main" anchor="t"/>
+          <a:lstStyle xmlns:a="http://schemas.openxmlformats.org/drawingml/2006/main"/>
+          <a:p xmlns:a="http://schemas.openxmlformats.org/drawingml/2006/main">
+            <a:pPr algn="l">
+              <a:buNone/>
+              <a:defRPr sz="3000" b="1">
+                <a:solidFill>
+                  <a:srgbClr val="3D8DFF"/>
+                </a:solidFill>
+                <a:latin typeface="Arial"/>
+                <a:ea typeface="Arial"/>
+                <a:cs typeface="Arial"/>
+              </a:defRPr>
+            </a:pPr>
+            <a:r>
+              <a:rPr sz="3000" b="1">
+                <a:solidFill>
+                  <a:srgbClr val="3D8DFF"/>
+                </a:solidFill>
+                <a:latin typeface="Arial"/>
+                <a:ea typeface="Arial"/>
+                <a:cs typeface="Arial"/>
+              </a:rPr>
+              <a:t>-3.45 pp</a:t>
+            </a:r>
+          </a:p>
+        </p:txBody>
+      </p:sp>
+      <p:sp>
+        <p:nvSpPr>
+          <p:cNvPr id="11" name="">
+            <a:extLst xmlns:a="http://schemas.openxmlformats.org/drawingml/2006/main">
+              <a:ext uri="{FF2B5EF4-FFF2-40B4-BE49-F238E27FC236}">
+                <a16:creationId xmlns:a16="http://schemas.microsoft.com/office/drawing/2014/main" id="{5DFE562A-9915-489A-BC82-2F762B044604}"/>
+              </a:ext>
+            </a:extLst>
+          </p:cNvPr>
+          <p:cNvSpPr>
+            <a:spLocks xmlns:a="http://schemas.openxmlformats.org/drawingml/2006/main" noGrp="1"/>
+          </p:cNvSpPr>
+          <p:nvPr/>
+        </p:nvSpPr>
+        <p:spPr>
+          <a:xfrm xmlns:a="http://schemas.openxmlformats.org/drawingml/2006/main">
+            <a:off x="9258300" y="4324350"/>
+            <a:ext cx="2095500" cy="400050"/>
+          </a:xfrm>
+          <a:prstGeom xmlns:a="http://schemas.openxmlformats.org/drawingml/2006/main" prst="rect">
+            <a:avLst/>
+          </a:prstGeom>
+          <a:noFill xmlns:a="http://schemas.openxmlformats.org/drawingml/2006/main"/>
+          <a:ln xmlns:a="http://schemas.openxmlformats.org/drawingml/2006/main" w="0">
+            <a:noFill/>
+            <a:prstDash val="solid"/>
+          </a:ln>
+        </p:spPr>
+        <p:txBody>
+          <a:bodyPr xmlns:a="http://schemas.openxmlformats.org/drawingml/2006/main" anchor="t"/>
+          <a:lstStyle xmlns:a="http://schemas.openxmlformats.org/drawingml/2006/main"/>
+          <a:p xmlns:a="http://schemas.openxmlformats.org/drawingml/2006/main">
+            <a:pPr algn="l">
+              <a:buNone/>
+              <a:defRPr sz="1650" b="0">
+                <a:solidFill>
+                  <a:srgbClr val="52616B"/>
+                </a:solidFill>
+                <a:latin typeface="Arial"/>
+                <a:ea typeface="Arial"/>
+                <a:cs typeface="Arial"/>
+              </a:defRPr>
+            </a:pPr>
+            <a:r>
+              <a:rPr sz="1650" b="0">
+                <a:solidFill>
+                  <a:srgbClr val="52616B"/>
+                </a:solidFill>
+                <a:latin typeface="Arial"/>
+                <a:ea typeface="Arial"/>
+                <a:cs typeface="Arial"/>
+              </a:rPr>
+              <a:t>sector-ETF CAGR gap</a:t>
+            </a:r>
+          </a:p>
+        </p:txBody>
+      </p:sp>
+      <p:sp>
+        <p:nvSpPr>
+          <p:cNvPr id="12" name="">
+            <a:extLst xmlns:a="http://schemas.openxmlformats.org/drawingml/2006/main">
+              <a:ext uri="{FF2B5EF4-FFF2-40B4-BE49-F238E27FC236}">
+                <a16:creationId xmlns:a16="http://schemas.microsoft.com/office/drawing/2014/main" id="{9A127473-A846-4BDC-AD98-EA1A2A6F11AD}"/>
+              </a:ext>
+            </a:extLst>
+          </p:cNvPr>
+          <p:cNvSpPr>
+            <a:spLocks xmlns:a="http://schemas.openxmlformats.org/drawingml/2006/main" noGrp="1"/>
+          </p:cNvSpPr>
+          <p:nvPr/>
+        </p:nvSpPr>
+        <p:spPr>
+          <a:xfrm xmlns:a="http://schemas.openxmlformats.org/drawingml/2006/main">
+            <a:off x="9258300" y="4972050"/>
+            <a:ext cx="2095500" cy="381000"/>
+          </a:xfrm>
+          <a:prstGeom xmlns:a="http://schemas.openxmlformats.org/drawingml/2006/main" prst="rect">
+            <a:avLst/>
+          </a:prstGeom>
+          <a:noFill xmlns:a="http://schemas.openxmlformats.org/drawingml/2006/main"/>
+          <a:ln xmlns:a="http://schemas.openxmlformats.org/drawingml/2006/main" w="0">
+            <a:noFill/>
+            <a:prstDash val="solid"/>
+          </a:ln>
+        </p:spPr>
+        <p:txBody>
+          <a:bodyPr xmlns:a="http://schemas.openxmlformats.org/drawingml/2006/main" anchor="t"/>
+          <a:lstStyle xmlns:a="http://schemas.openxmlformats.org/drawingml/2006/main"/>
+          <a:p xmlns:a="http://schemas.openxmlformats.org/drawingml/2006/main">
+            <a:pPr algn="l">
+              <a:buNone/>
+              <a:defRPr sz="1950" b="1">
+                <a:solidFill>
+                  <a:srgbClr val="101820"/>
+                </a:solidFill>
+                <a:latin typeface="Arial"/>
+                <a:ea typeface="Arial"/>
+                <a:cs typeface="Arial"/>
+              </a:defRPr>
+            </a:pPr>
+            <a:r>
+              <a:rPr sz="1950" b="1">
+                <a:solidFill>
+                  <a:srgbClr val="101820"/>
+                </a:solidFill>
+                <a:latin typeface="Arial"/>
+                <a:ea typeface="Arial"/>
+                <a:cs typeface="Arial"/>
+              </a:rPr>
+              <a:t>6 / 11 shallower drawdown</a:t>
+            </a:r>
+          </a:p>
+        </p:txBody>
+      </p:sp>
+      <p:pic>
+        <p:nvPicPr>
+          <p:cNvPr id="26" name=""/>
+          <p:cNvPicPr>
+            <a:picLocks xmlns:a="http://schemas.openxmlformats.org/drawingml/2006/main" noChangeAspect="1"/>
+          </p:cNvPicPr>
+          <p:nvPr/>
+        </p:nvPicPr>
+        <p:blipFill>
+          <a:blip xmlns:r="http://schemas.openxmlformats.org/officeDocument/2006/relationships" xmlns:a="http://schemas.openxmlformats.org/drawingml/2006/main" r:embed="R7dda10e836344b63"/>
+          <a:stretch xmlns:a="http://schemas.openxmlformats.org/drawingml/2006/main"/>
+        </p:blipFill>
+        <p:spPr>
+          <a:xfrm xmlns:a="http://schemas.openxmlformats.org/drawingml/2006/main">
+            <a:off x="734786" y="1562100"/>
+            <a:ext cx="7674429" cy="4476750"/>
+          </a:xfrm>
+          <a:prstGeom xmlns:a="http://schemas.openxmlformats.org/drawingml/2006/main" prst="rect">
+            <a:avLst/>
+          </a:prstGeom>
+        </p:spPr>
+      </p:pic>
+    </p:spTree>
+    <p:extLst>
+      <p:ext uri="{BB962C8B-B14F-4D97-AF65-F5344CB8AC3E}">
+        <p14:creationId xmlns:p14="http://schemas.microsoft.com/office/powerpoint/2010/main" val="1063912481"/>
+      </p:ext>
+    </p:extLst>
+  </p:cSld>
+</p:sld>
+</file>
+
+<file path=ppt/slides/slide28.xml><?xml version="1.0" encoding="utf-8"?>
+<p:sld xmlns:p="http://schemas.openxmlformats.org/presentationml/2006/main">
+  <p:cSld>
+    <p:bg>
+      <p:bgPr>
+        <a:solidFill xmlns:a="http://schemas.openxmlformats.org/drawingml/2006/main">
+          <a:srgbClr val="FFFFFF"/>
+        </a:solidFill>
+      </p:bgPr>
+    </p:bg>
+    <p:spTree>
+      <p:nvGrpSpPr>
+        <p:cNvPr id="1" name=""/>
+        <p:cNvGrpSpPr/>
+        <p:nvPr/>
+      </p:nvGrpSpPr>
+      <p:grpSpPr>
+        <a:xfrm xmlns:a="http://schemas.openxmlformats.org/drawingml/2006/main"/>
+      </p:grpSpPr>
+      <p:sp>
+        <p:nvSpPr>
+          <p:cNvPr id="14" name="">
+            <a:extLst xmlns:a="http://schemas.openxmlformats.org/drawingml/2006/main">
+              <a:ext uri="{FF2B5EF4-FFF2-40B4-BE49-F238E27FC236}">
+                <a16:creationId xmlns:a16="http://schemas.microsoft.com/office/drawing/2014/main" id="{39B7BB28-C5CF-47BA-A918-FA17029EB44A}"/>
+              </a:ext>
+            </a:extLst>
+          </p:cNvPr>
+          <p:cNvSpPr>
+            <a:spLocks xmlns:a="http://schemas.openxmlformats.org/drawingml/2006/main" noGrp="1"/>
+          </p:cNvSpPr>
+          <p:nvPr/>
+        </p:nvSpPr>
+        <p:spPr>
+          <a:xfrm xmlns:a="http://schemas.openxmlformats.org/drawingml/2006/main">
+            <a:off x="400050" y="228600"/>
+            <a:ext cx="2857500" cy="228600"/>
+          </a:xfrm>
+          <a:prstGeom xmlns:a="http://schemas.openxmlformats.org/drawingml/2006/main" prst="rect">
+            <a:avLst/>
+          </a:prstGeom>
+          <a:noFill xmlns:a="http://schemas.openxmlformats.org/drawingml/2006/main"/>
+          <a:ln xmlns:a="http://schemas.openxmlformats.org/drawingml/2006/main" w="0">
+            <a:noFill/>
+            <a:prstDash val="solid"/>
+          </a:ln>
+        </p:spPr>
+        <p:txBody>
+          <a:bodyPr xmlns:a="http://schemas.openxmlformats.org/drawingml/2006/main" anchor="t"/>
+          <a:lstStyle xmlns:a="http://schemas.openxmlformats.org/drawingml/2006/main"/>
+          <a:p xmlns:a="http://schemas.openxmlformats.org/drawingml/2006/main">
+            <a:pPr algn="l">
+              <a:buNone/>
+              <a:defRPr sz="1200" b="1">
+                <a:solidFill>
+                  <a:srgbClr val="3D8DFF"/>
+                </a:solidFill>
+                <a:latin typeface="Arial"/>
+                <a:ea typeface="Arial"/>
+                <a:cs typeface="Arial"/>
+              </a:defRPr>
+            </a:pPr>
+            <a:r>
+              <a:rPr sz="1200" b="1">
+                <a:solidFill>
+                  <a:srgbClr val="3D8DFF"/>
+                </a:solidFill>
+                <a:latin typeface="Arial"/>
+                <a:ea typeface="Arial"/>
+                <a:cs typeface="Arial"/>
+              </a:rPr>
+              <a:t>UNIVERSE TRANSPORT · COMPONENT ATTRIBUTION</a:t>
+            </a:r>
+          </a:p>
+        </p:txBody>
+      </p:sp>
+      <p:sp>
+        <p:nvSpPr>
+          <p:cNvPr id="2" name="">
+            <a:extLst xmlns:a="http://schemas.openxmlformats.org/drawingml/2006/main">
+              <a:ext uri="{FF2B5EF4-FFF2-40B4-BE49-F238E27FC236}">
+                <a16:creationId xmlns:a16="http://schemas.microsoft.com/office/drawing/2014/main" id="{8C401559-67C5-4215-B579-93FC871FC00D}"/>
+              </a:ext>
+            </a:extLst>
+          </p:cNvPr>
+          <p:cNvSpPr>
+            <a:spLocks xmlns:a="http://schemas.openxmlformats.org/drawingml/2006/main" noGrp="1"/>
+          </p:cNvSpPr>
+          <p:nvPr/>
+        </p:nvSpPr>
+        <p:spPr>
+          <a:xfrm xmlns:a="http://schemas.openxmlformats.org/drawingml/2006/main">
+            <a:off x="400050" y="476250"/>
+            <a:ext cx="11049000" cy="819150"/>
+          </a:xfrm>
+          <a:prstGeom xmlns:a="http://schemas.openxmlformats.org/drawingml/2006/main" prst="rect">
+            <a:avLst/>
+          </a:prstGeom>
+          <a:noFill xmlns:a="http://schemas.openxmlformats.org/drawingml/2006/main"/>
+          <a:ln xmlns:a="http://schemas.openxmlformats.org/drawingml/2006/main" w="0">
+            <a:noFill/>
+            <a:prstDash val="solid"/>
+          </a:ln>
+        </p:spPr>
+        <p:txBody>
+          <a:bodyPr xmlns:a="http://schemas.openxmlformats.org/drawingml/2006/main" anchor="t"/>
+          <a:lstStyle xmlns:a="http://schemas.openxmlformats.org/drawingml/2006/main"/>
+          <a:p xmlns:a="http://schemas.openxmlformats.org/drawingml/2006/main">
+            <a:pPr algn="l">
+              <a:buNone/>
+              <a:defRPr sz="2700" b="1">
+                <a:solidFill>
+                  <a:srgbClr val="101820"/>
+                </a:solidFill>
+                <a:latin typeface="Arial"/>
+                <a:ea typeface="Arial"/>
+                <a:cs typeface="Arial"/>
+              </a:defRPr>
+            </a:pPr>
+            <a:r>
+              <a:rPr sz="2700" b="1">
+                <a:solidFill>
+                  <a:srgbClr val="101820"/>
+                </a:solidFill>
+                <a:latin typeface="Arial"/>
+                <a:ea typeface="Arial"/>
+                <a:cs typeface="Arial"/>
+              </a:rPr>
+              <a:t>The absolute gate buys defense with return</a:t>
+            </a:r>
+          </a:p>
+        </p:txBody>
+      </p:sp>
+      <p:sp>
+        <p:nvSpPr>
+          <p:cNvPr id="3" name="">
+            <a:extLst xmlns:a="http://schemas.openxmlformats.org/drawingml/2006/main">
+              <a:ext uri="{FF2B5EF4-FFF2-40B4-BE49-F238E27FC236}">
+                <a16:creationId xmlns:a16="http://schemas.microsoft.com/office/drawing/2014/main" id="{FE913BAC-F3B9-4338-8958-15CBEBB596BB}"/>
+              </a:ext>
+            </a:extLst>
+          </p:cNvPr>
+          <p:cNvSpPr>
+            <a:spLocks xmlns:a="http://schemas.openxmlformats.org/drawingml/2006/main" noGrp="1"/>
+          </p:cNvSpPr>
+          <p:nvPr/>
+        </p:nvSpPr>
+        <p:spPr>
+          <a:xfrm xmlns:a="http://schemas.openxmlformats.org/drawingml/2006/main">
+            <a:off x="400050" y="1428750"/>
+            <a:ext cx="11391900" cy="0"/>
+          </a:xfrm>
+          <a:prstGeom xmlns:a="http://schemas.openxmlformats.org/drawingml/2006/main" prst="line">
+            <a:avLst/>
+          </a:prstGeom>
+          <a:noFill xmlns:a="http://schemas.openxmlformats.org/drawingml/2006/main"/>
+          <a:ln xmlns:a="http://schemas.openxmlformats.org/drawingml/2006/main" w="9525">
+            <a:solidFill>
+              <a:srgbClr val="B8BCC4"/>
+            </a:solidFill>
+            <a:prstDash val="solid"/>
+          </a:ln>
+        </p:spPr>
+      </p:sp>
+      <p:sp>
+        <p:nvSpPr>
+          <p:cNvPr id="4" name="">
+            <a:extLst xmlns:a="http://schemas.openxmlformats.org/drawingml/2006/main">
+              <a:ext uri="{FF2B5EF4-FFF2-40B4-BE49-F238E27FC236}">
+                <a16:creationId xmlns:a16="http://schemas.microsoft.com/office/drawing/2014/main" id="{80D32FF2-05B5-4DF6-BBF4-B1464DC9B66A}"/>
+              </a:ext>
+            </a:extLst>
+          </p:cNvPr>
+          <p:cNvSpPr>
+            <a:spLocks xmlns:a="http://schemas.openxmlformats.org/drawingml/2006/main" noGrp="1"/>
+          </p:cNvSpPr>
+          <p:nvPr/>
+        </p:nvSpPr>
+        <p:spPr>
+          <a:xfrm xmlns:a="http://schemas.openxmlformats.org/drawingml/2006/main">
+            <a:off x="11163300" y="6362700"/>
+            <a:ext cx="609600" cy="228600"/>
+          </a:xfrm>
+          <a:prstGeom xmlns:a="http://schemas.openxmlformats.org/drawingml/2006/main" prst="rect">
+            <a:avLst/>
+          </a:prstGeom>
+          <a:noFill xmlns:a="http://schemas.openxmlformats.org/drawingml/2006/main"/>
+          <a:ln xmlns:a="http://schemas.openxmlformats.org/drawingml/2006/main" w="0">
+            <a:noFill/>
+            <a:prstDash val="solid"/>
+          </a:ln>
+        </p:spPr>
+        <p:txBody>
+          <a:bodyPr xmlns:a="http://schemas.openxmlformats.org/drawingml/2006/main" anchor="t"/>
+          <a:lstStyle xmlns:a="http://schemas.openxmlformats.org/drawingml/2006/main"/>
+          <a:p xmlns:a="http://schemas.openxmlformats.org/drawingml/2006/main">
+            <a:pPr algn="r">
+              <a:buNone/>
+              <a:defRPr sz="1200" b="0">
+                <a:solidFill>
+                  <a:srgbClr val="52616B"/>
+                </a:solidFill>
+                <a:latin typeface="Arial"/>
+                <a:ea typeface="Arial"/>
+                <a:cs typeface="Arial"/>
+              </a:defRPr>
+            </a:pPr>
+            <a:r>
+              <a:rPr sz="1200" b="0">
+                <a:solidFill>
+                  <a:srgbClr val="52616B"/>
+                </a:solidFill>
+                <a:latin typeface="Arial"/>
+                <a:ea typeface="Arial"/>
+                <a:cs typeface="Arial"/>
+              </a:rPr>
+              <a:t>  28</a:t>
+            </a:r>
+          </a:p>
+        </p:txBody>
+      </p:sp>
+      <p:sp>
+        <p:nvSpPr>
+          <p:cNvPr id="6" name="">
+            <a:extLst xmlns:a="http://schemas.openxmlformats.org/drawingml/2006/main">
+              <a:ext uri="{FF2B5EF4-FFF2-40B4-BE49-F238E27FC236}">
+                <a16:creationId xmlns:a16="http://schemas.microsoft.com/office/drawing/2014/main" id="{8B7E846F-BE01-42E8-9EBB-9EA3FC7567F0}"/>
+              </a:ext>
+            </a:extLst>
+          </p:cNvPr>
+          <p:cNvSpPr>
+            <a:spLocks xmlns:a="http://schemas.openxmlformats.org/drawingml/2006/main" noGrp="1"/>
+          </p:cNvSpPr>
+          <p:nvPr/>
+        </p:nvSpPr>
+        <p:spPr>
+          <a:xfrm xmlns:a="http://schemas.openxmlformats.org/drawingml/2006/main">
+            <a:off x="8153400" y="1695450"/>
+            <a:ext cx="3429000" cy="4057650"/>
+          </a:xfrm>
+          <a:prstGeom xmlns:a="http://schemas.openxmlformats.org/drawingml/2006/main" prst="rect">
+            <a:avLst/>
+          </a:prstGeom>
+          <a:solidFill xmlns:a="http://schemas.openxmlformats.org/drawingml/2006/main">
+            <a:srgbClr val="EAF5FB"/>
+          </a:solidFill>
+          <a:ln xmlns:a="http://schemas.openxmlformats.org/drawingml/2006/main" w="9525">
+            <a:solidFill>
+              <a:srgbClr val="6DCBF4"/>
+            </a:solidFill>
+            <a:prstDash val="solid"/>
+          </a:ln>
+        </p:spPr>
+      </p:sp>
+      <p:sp>
+        <p:nvSpPr>
+          <p:cNvPr id="7" name="">
+            <a:extLst xmlns:a="http://schemas.openxmlformats.org/drawingml/2006/main">
+              <a:ext uri="{FF2B5EF4-FFF2-40B4-BE49-F238E27FC236}">
+                <a16:creationId xmlns:a16="http://schemas.microsoft.com/office/drawing/2014/main" id="{7A48CFB1-8F2F-43AD-84B5-5B62F4FCE8D1}"/>
+              </a:ext>
+            </a:extLst>
+          </p:cNvPr>
+          <p:cNvSpPr>
+            <a:spLocks xmlns:a="http://schemas.openxmlformats.org/drawingml/2006/main" noGrp="1"/>
+          </p:cNvSpPr>
+          <p:nvPr/>
+        </p:nvSpPr>
+        <p:spPr>
+          <a:xfrm xmlns:a="http://schemas.openxmlformats.org/drawingml/2006/main">
+            <a:off x="8496300" y="2000250"/>
+            <a:ext cx="2476500" cy="247650"/>
+          </a:xfrm>
+          <a:prstGeom xmlns:a="http://schemas.openxmlformats.org/drawingml/2006/main" prst="rect">
+            <a:avLst/>
+          </a:prstGeom>
+          <a:noFill xmlns:a="http://schemas.openxmlformats.org/drawingml/2006/main"/>
+          <a:ln xmlns:a="http://schemas.openxmlformats.org/drawingml/2006/main" w="0">
+            <a:noFill/>
+            <a:prstDash val="solid"/>
+          </a:ln>
+        </p:spPr>
+        <p:txBody>
+          <a:bodyPr xmlns:a="http://schemas.openxmlformats.org/drawingml/2006/main" anchor="t"/>
+          <a:lstStyle xmlns:a="http://schemas.openxmlformats.org/drawingml/2006/main"/>
+          <a:p xmlns:a="http://schemas.openxmlformats.org/drawingml/2006/main">
+            <a:pPr algn="l">
+              <a:buNone/>
+              <a:defRPr sz="1275" b="1">
+                <a:solidFill>
+                  <a:srgbClr val="3D8DFF"/>
+                </a:solidFill>
+                <a:latin typeface="Arial"/>
+                <a:ea typeface="Arial"/>
+                <a:cs typeface="Arial"/>
+              </a:defRPr>
+            </a:pPr>
+            <a:r>
+              <a:rPr sz="1275" b="1">
+                <a:solidFill>
+                  <a:srgbClr val="3D8DFF"/>
+                </a:solidFill>
+                <a:latin typeface="Arial"/>
+                <a:ea typeface="Arial"/>
+                <a:cs typeface="Arial"/>
+              </a:rPr>
+              <a:t>ABSOLUTE GATE</a:t>
+            </a:r>
+          </a:p>
+        </p:txBody>
+      </p:sp>
+      <p:sp>
+        <p:nvSpPr>
+          <p:cNvPr id="8" name="">
+            <a:extLst xmlns:a="http://schemas.openxmlformats.org/drawingml/2006/main">
+              <a:ext uri="{FF2B5EF4-FFF2-40B4-BE49-F238E27FC236}">
+                <a16:creationId xmlns:a16="http://schemas.microsoft.com/office/drawing/2014/main" id="{DC731ED7-5F85-42CB-A69F-0889CEA3331A}"/>
+              </a:ext>
+            </a:extLst>
+          </p:cNvPr>
+          <p:cNvSpPr>
+            <a:spLocks xmlns:a="http://schemas.openxmlformats.org/drawingml/2006/main" noGrp="1"/>
+          </p:cNvSpPr>
+          <p:nvPr/>
+        </p:nvSpPr>
+        <p:spPr>
+          <a:xfrm xmlns:a="http://schemas.openxmlformats.org/drawingml/2006/main">
+            <a:off x="8496300" y="2533650"/>
+            <a:ext cx="2686050" cy="609600"/>
+          </a:xfrm>
+          <a:prstGeom xmlns:a="http://schemas.openxmlformats.org/drawingml/2006/main" prst="rect">
+            <a:avLst/>
+          </a:prstGeom>
+          <a:noFill xmlns:a="http://schemas.openxmlformats.org/drawingml/2006/main"/>
+          <a:ln xmlns:a="http://schemas.openxmlformats.org/drawingml/2006/main" w="0">
+            <a:noFill/>
+            <a:prstDash val="solid"/>
+          </a:ln>
+        </p:spPr>
+        <p:txBody>
+          <a:bodyPr xmlns:a="http://schemas.openxmlformats.org/drawingml/2006/main" anchor="t"/>
+          <a:lstStyle xmlns:a="http://schemas.openxmlformats.org/drawingml/2006/main"/>
+          <a:p xmlns:a="http://schemas.openxmlformats.org/drawingml/2006/main">
+            <a:pPr algn="l">
+              <a:buNone/>
+              <a:defRPr sz="3375" b="1">
+                <a:solidFill>
+                  <a:srgbClr val="3D8DFF"/>
+                </a:solidFill>
+                <a:latin typeface="Arial"/>
+                <a:ea typeface="Arial"/>
+                <a:cs typeface="Arial"/>
+              </a:defRPr>
+            </a:pPr>
+            <a:r>
+              <a:rPr sz="3375" b="1">
+                <a:solidFill>
+                  <a:srgbClr val="3D8DFF"/>
+                </a:solidFill>
+                <a:latin typeface="Arial"/>
+                <a:ea typeface="Arial"/>
+                <a:cs typeface="Arial"/>
+              </a:rPr>
+              <a:t>12 / 12</a:t>
+            </a:r>
+          </a:p>
+        </p:txBody>
+      </p:sp>
+      <p:sp>
+        <p:nvSpPr>
+          <p:cNvPr id="9" name="">
+            <a:extLst xmlns:a="http://schemas.openxmlformats.org/drawingml/2006/main">
+              <a:ext uri="{FF2B5EF4-FFF2-40B4-BE49-F238E27FC236}">
+                <a16:creationId xmlns:a16="http://schemas.microsoft.com/office/drawing/2014/main" id="{406DC0E8-33AD-4797-87D6-8B560493E789}"/>
+              </a:ext>
+            </a:extLst>
+          </p:cNvPr>
+          <p:cNvSpPr>
+            <a:spLocks xmlns:a="http://schemas.openxmlformats.org/drawingml/2006/main" noGrp="1"/>
+          </p:cNvSpPr>
+          <p:nvPr/>
+        </p:nvSpPr>
+        <p:spPr>
+          <a:xfrm xmlns:a="http://schemas.openxmlformats.org/drawingml/2006/main">
+            <a:off x="8496300" y="3105150"/>
+            <a:ext cx="2686050" cy="400050"/>
+          </a:xfrm>
+          <a:prstGeom xmlns:a="http://schemas.openxmlformats.org/drawingml/2006/main" prst="rect">
+            <a:avLst/>
+          </a:prstGeom>
+          <a:noFill xmlns:a="http://schemas.openxmlformats.org/drawingml/2006/main"/>
+          <a:ln xmlns:a="http://schemas.openxmlformats.org/drawingml/2006/main" w="0">
+            <a:noFill/>
+            <a:prstDash val="solid"/>
+          </a:ln>
+        </p:spPr>
+        <p:txBody>
+          <a:bodyPr xmlns:a="http://schemas.openxmlformats.org/drawingml/2006/main" anchor="t"/>
+          <a:lstStyle xmlns:a="http://schemas.openxmlformats.org/drawingml/2006/main"/>
+          <a:p xmlns:a="http://schemas.openxmlformats.org/drawingml/2006/main">
+            <a:pPr algn="l">
+              <a:buNone/>
+              <a:defRPr sz="1725" b="0">
+                <a:solidFill>
+                  <a:srgbClr val="52616B"/>
+                </a:solidFill>
+                <a:latin typeface="Arial"/>
+                <a:ea typeface="Arial"/>
+                <a:cs typeface="Arial"/>
+              </a:defRPr>
+            </a:pPr>
+            <a:r>
+              <a:rPr sz="1725" b="0">
+                <a:solidFill>
+                  <a:srgbClr val="52616B"/>
+                </a:solidFill>
+                <a:latin typeface="Arial"/>
+                <a:ea typeface="Arial"/>
+                <a:cs typeface="Arial"/>
+              </a:rPr>
+              <a:t>lower CAGR than relative-only</a:t>
+            </a:r>
+          </a:p>
+        </p:txBody>
+      </p:sp>
+      <p:sp>
+        <p:nvSpPr>
+          <p:cNvPr id="10" name="">
+            <a:extLst xmlns:a="http://schemas.openxmlformats.org/drawingml/2006/main">
+              <a:ext uri="{FF2B5EF4-FFF2-40B4-BE49-F238E27FC236}">
+                <a16:creationId xmlns:a16="http://schemas.microsoft.com/office/drawing/2014/main" id="{A0EB914A-A236-47F4-91E9-BA72FF10432A}"/>
+              </a:ext>
+            </a:extLst>
+          </p:cNvPr>
+          <p:cNvSpPr>
+            <a:spLocks xmlns:a="http://schemas.openxmlformats.org/drawingml/2006/main" noGrp="1"/>
+          </p:cNvSpPr>
+          <p:nvPr/>
+        </p:nvSpPr>
+        <p:spPr>
+          <a:xfrm xmlns:a="http://schemas.openxmlformats.org/drawingml/2006/main">
+            <a:off x="8496300" y="3714750"/>
+            <a:ext cx="2686050" cy="0"/>
+          </a:xfrm>
+          <a:prstGeom xmlns:a="http://schemas.openxmlformats.org/drawingml/2006/main" prst="line">
+            <a:avLst/>
+          </a:prstGeom>
+          <a:noFill xmlns:a="http://schemas.openxmlformats.org/drawingml/2006/main"/>
+          <a:ln xmlns:a="http://schemas.openxmlformats.org/drawingml/2006/main" w="19050">
+            <a:solidFill>
+              <a:srgbClr val="6DCBF4"/>
+            </a:solidFill>
+            <a:prstDash val="solid"/>
+          </a:ln>
+        </p:spPr>
+      </p:sp>
+      <p:sp>
+        <p:nvSpPr>
+          <p:cNvPr id="11" name="">
+            <a:extLst xmlns:a="http://schemas.openxmlformats.org/drawingml/2006/main">
+              <a:ext uri="{FF2B5EF4-FFF2-40B4-BE49-F238E27FC236}">
+                <a16:creationId xmlns:a16="http://schemas.microsoft.com/office/drawing/2014/main" id="{63C90848-627F-4872-9F08-0BCEBC58FC88}"/>
+              </a:ext>
+            </a:extLst>
+          </p:cNvPr>
+          <p:cNvSpPr>
+            <a:spLocks xmlns:a="http://schemas.openxmlformats.org/drawingml/2006/main" noGrp="1"/>
+          </p:cNvSpPr>
+          <p:nvPr/>
+        </p:nvSpPr>
+        <p:spPr>
+          <a:xfrm xmlns:a="http://schemas.openxmlformats.org/drawingml/2006/main">
+            <a:off x="8496300" y="3962400"/>
+            <a:ext cx="2686050" cy="323850"/>
+          </a:xfrm>
+          <a:prstGeom xmlns:a="http://schemas.openxmlformats.org/drawingml/2006/main" prst="rect">
+            <a:avLst/>
+          </a:prstGeom>
+          <a:noFill xmlns:a="http://schemas.openxmlformats.org/drawingml/2006/main"/>
+          <a:ln xmlns:a="http://schemas.openxmlformats.org/drawingml/2006/main" w="0">
+            <a:noFill/>
+            <a:prstDash val="solid"/>
+          </a:ln>
+        </p:spPr>
+        <p:txBody>
+          <a:bodyPr xmlns:a="http://schemas.openxmlformats.org/drawingml/2006/main" anchor="t"/>
+          <a:lstStyle xmlns:a="http://schemas.openxmlformats.org/drawingml/2006/main"/>
+          <a:p xmlns:a="http://schemas.openxmlformats.org/drawingml/2006/main">
+            <a:pPr algn="l">
+              <a:buNone/>
+              <a:defRPr sz="1575" b="1">
+                <a:solidFill>
+                  <a:srgbClr val="101820"/>
+                </a:solidFill>
+                <a:latin typeface="Arial"/>
+                <a:ea typeface="Arial"/>
+                <a:cs typeface="Arial"/>
+              </a:defRPr>
+            </a:pPr>
+            <a:r>
+              <a:rPr sz="1575" b="1">
+                <a:solidFill>
+                  <a:srgbClr val="101820"/>
+                </a:solidFill>
+                <a:latin typeface="Arial"/>
+                <a:ea typeface="Arial"/>
+                <a:cs typeface="Arial"/>
+              </a:rPr>
+              <a:t>9 / 12</a:t>
+            </a:r>
+          </a:p>
+        </p:txBody>
+      </p:sp>
+      <p:sp>
+        <p:nvSpPr>
+          <p:cNvPr id="12" name="">
+            <a:extLst xmlns:a="http://schemas.openxmlformats.org/drawingml/2006/main">
+              <a:ext uri="{FF2B5EF4-FFF2-40B4-BE49-F238E27FC236}">
+                <a16:creationId xmlns:a16="http://schemas.microsoft.com/office/drawing/2014/main" id="{70090FDC-931D-4B56-AD5D-C71AA6FC29F9}"/>
+              </a:ext>
+            </a:extLst>
+          </p:cNvPr>
+          <p:cNvSpPr>
+            <a:spLocks xmlns:a="http://schemas.openxmlformats.org/drawingml/2006/main" noGrp="1"/>
+          </p:cNvSpPr>
+          <p:nvPr/>
+        </p:nvSpPr>
+        <p:spPr>
+          <a:xfrm xmlns:a="http://schemas.openxmlformats.org/drawingml/2006/main">
+            <a:off x="8496300" y="4419600"/>
+            <a:ext cx="2686050" cy="1009650"/>
+          </a:xfrm>
+          <a:prstGeom xmlns:a="http://schemas.openxmlformats.org/drawingml/2006/main" prst="rect">
+            <a:avLst/>
+          </a:prstGeom>
+          <a:noFill xmlns:a="http://schemas.openxmlformats.org/drawingml/2006/main"/>
+          <a:ln xmlns:a="http://schemas.openxmlformats.org/drawingml/2006/main" w="0">
+            <a:noFill/>
+            <a:prstDash val="solid"/>
+          </a:ln>
+        </p:spPr>
+        <p:txBody>
+          <a:bodyPr xmlns:a="http://schemas.openxmlformats.org/drawingml/2006/main" anchor="t"/>
+          <a:lstStyle xmlns:a="http://schemas.openxmlformats.org/drawingml/2006/main"/>
+          <a:p xmlns:a="http://schemas.openxmlformats.org/drawingml/2006/main">
+            <a:pPr algn="l">
+              <a:buNone/>
+              <a:defRPr sz="1725" b="0">
+                <a:solidFill>
+                  <a:srgbClr val="52616B"/>
+                </a:solidFill>
+                <a:latin typeface="Arial"/>
+                <a:ea typeface="Arial"/>
+                <a:cs typeface="Arial"/>
+              </a:defRPr>
+            </a:pPr>
+            <a:r>
+              <a:rPr sz="1725" b="0">
+                <a:solidFill>
+                  <a:srgbClr val="52616B"/>
+                </a:solidFill>
+                <a:latin typeface="Arial"/>
+                <a:ea typeface="Arial"/>
+                <a:cs typeface="Arial"/>
+              </a:rPr>
+              <a:t>shallower drawdown</a:t>
+            </a:r>
+          </a:p>
+        </p:txBody>
+      </p:sp>
+      <p:sp>
+        <p:nvSpPr>
+          <p:cNvPr id="13" name="">
+            <a:extLst xmlns:a="http://schemas.openxmlformats.org/drawingml/2006/main">
+              <a:ext uri="{FF2B5EF4-FFF2-40B4-BE49-F238E27FC236}">
+                <a16:creationId xmlns:a16="http://schemas.microsoft.com/office/drawing/2014/main" id="{F166845D-8E26-4804-AAA3-D76C79B2D4FB}"/>
+              </a:ext>
+            </a:extLst>
+          </p:cNvPr>
+          <p:cNvSpPr>
+            <a:spLocks xmlns:a="http://schemas.openxmlformats.org/drawingml/2006/main" noGrp="1"/>
+          </p:cNvSpPr>
+          <p:nvPr/>
+        </p:nvSpPr>
+        <p:spPr>
+          <a:xfrm xmlns:a="http://schemas.openxmlformats.org/drawingml/2006/main">
+            <a:off x="1066800" y="5886450"/>
+            <a:ext cx="9620250" cy="323850"/>
+          </a:xfrm>
+          <a:prstGeom xmlns:a="http://schemas.openxmlformats.org/drawingml/2006/main" prst="rect">
+            <a:avLst/>
+          </a:prstGeom>
+          <a:noFill xmlns:a="http://schemas.openxmlformats.org/drawingml/2006/main"/>
+          <a:ln xmlns:a="http://schemas.openxmlformats.org/drawingml/2006/main" w="0">
+            <a:noFill/>
+            <a:prstDash val="solid"/>
+          </a:ln>
+        </p:spPr>
+        <p:txBody>
+          <a:bodyPr xmlns:a="http://schemas.openxmlformats.org/drawingml/2006/main" anchor="t"/>
+          <a:lstStyle xmlns:a="http://schemas.openxmlformats.org/drawingml/2006/main"/>
+          <a:p xmlns:a="http://schemas.openxmlformats.org/drawingml/2006/main">
+            <a:pPr algn="ctr">
+              <a:buNone/>
+              <a:defRPr sz="1800" b="1">
+                <a:solidFill>
+                  <a:srgbClr val="101820"/>
+                </a:solidFill>
+                <a:latin typeface="Arial"/>
+                <a:ea typeface="Arial"/>
+                <a:cs typeface="Arial"/>
+              </a:defRPr>
+            </a:pPr>
+            <a:r>
+              <a:rPr sz="1800" b="1">
+                <a:solidFill>
+                  <a:srgbClr val="101820"/>
+                </a:solidFill>
+                <a:latin typeface="Arial"/>
+                <a:ea typeface="Arial"/>
+                <a:cs typeface="Arial"/>
+              </a:rPr>
+              <a:t>Cash protection is economically active here—but it is not free.</a:t>
+            </a:r>
+          </a:p>
+        </p:txBody>
+      </p:sp>
+      <p:sp>
+        <p:nvSpPr>
+          <p:cNvPr id="16" name="">
+            <a:extLst xmlns:a="http://schemas.openxmlformats.org/drawingml/2006/main">
+              <a:ext uri="{FF2B5EF4-FFF2-40B4-BE49-F238E27FC236}">
+                <a16:creationId xmlns:a16="http://schemas.microsoft.com/office/drawing/2014/main" id="{CBB05286-4B59-4C91-A588-5CD09F062F89}"/>
+              </a:ext>
+            </a:extLst>
+          </p:cNvPr>
+          <p:cNvSpPr>
+            <a:spLocks xmlns:a="http://schemas.openxmlformats.org/drawingml/2006/main" noGrp="1"/>
+          </p:cNvSpPr>
+          <p:nvPr/>
+        </p:nvSpPr>
+        <p:spPr>
+          <a:xfrm xmlns:a="http://schemas.openxmlformats.org/drawingml/2006/main">
+            <a:off x="11144250" y="6324600"/>
+            <a:ext cx="628650" cy="266700"/>
+          </a:xfrm>
+          <a:prstGeom xmlns:a="http://schemas.openxmlformats.org/drawingml/2006/main" prst="rect">
+            <a:avLst/>
+          </a:prstGeom>
+          <a:noFill xmlns:a="http://schemas.openxmlformats.org/drawingml/2006/main"/>
+          <a:ln xmlns:a="http://schemas.openxmlformats.org/drawingml/2006/main" w="0">
+            <a:noFill/>
+            <a:prstDash val="solid"/>
+          </a:ln>
+        </p:spPr>
+        <p:txBody>
+          <a:bodyPr xmlns:a="http://schemas.openxmlformats.org/drawingml/2006/main" anchor="t"/>
+          <a:lstStyle xmlns:a="http://schemas.openxmlformats.org/drawingml/2006/main"/>
+          <a:p xmlns:a="http://schemas.openxmlformats.org/drawingml/2006/main">
+            <a:pPr algn="r">
+              <a:buNone/>
+              <a:defRPr sz="1200" b="0">
+                <a:solidFill>
+                  <a:srgbClr val="52616B"/>
+                </a:solidFill>
+                <a:latin typeface="Arial"/>
+                <a:ea typeface="Arial"/>
+                <a:cs typeface="Arial"/>
+              </a:defRPr>
+            </a:pPr>
+            <a:r>
+              <a:rPr sz="1200" b="0">
+                <a:solidFill>
+                  <a:srgbClr val="52616B"/>
+                </a:solidFill>
+                <a:latin typeface="Arial"/>
+                <a:ea typeface="Arial"/>
+                <a:cs typeface="Arial"/>
+              </a:rPr>
+              <a:t/>
+            </a:r>
+          </a:p>
+        </p:txBody>
+      </p:sp>
+      <p:pic>
+        <p:nvPicPr>
+          <p:cNvPr id="31" name=""/>
+          <p:cNvPicPr>
+            <a:picLocks xmlns:a="http://schemas.openxmlformats.org/drawingml/2006/main" noChangeAspect="1"/>
+          </p:cNvPicPr>
+          <p:nvPr/>
+        </p:nvPicPr>
+        <p:blipFill>
+          <a:blip xmlns:r="http://schemas.openxmlformats.org/officeDocument/2006/relationships" xmlns:a="http://schemas.openxmlformats.org/drawingml/2006/main" r:embed="Raaa4c7bcea1b4967"/>
+          <a:stretch xmlns:a="http://schemas.openxmlformats.org/drawingml/2006/main"/>
+        </p:blipFill>
+        <p:spPr>
+          <a:xfrm xmlns:a="http://schemas.openxmlformats.org/drawingml/2006/main">
+            <a:off x="818956" y="1754868"/>
+            <a:ext cx="6686939" cy="3900714"/>
+          </a:xfrm>
+          <a:prstGeom xmlns:a="http://schemas.openxmlformats.org/drawingml/2006/main" prst="rect">
+            <a:avLst/>
+          </a:prstGeom>
+        </p:spPr>
+      </p:pic>
+    </p:spTree>
+    <p:extLst>
+      <p:ext uri="{BB962C8B-B14F-4D97-AF65-F5344CB8AC3E}">
+        <p14:creationId xmlns:p14="http://schemas.microsoft.com/office/powerpoint/2010/main" val="1019663795"/>
+      </p:ext>
+    </p:extLst>
+  </p:cSld>
+</p:sld>
+</file>
+
+<file path=ppt/slides/slide29.xml><?xml version="1.0" encoding="utf-8"?>
+<p:sld xmlns:p="http://schemas.openxmlformats.org/presentationml/2006/main">
+  <p:cSld>
+    <p:bg>
+      <p:bgPr>
+        <a:solidFill xmlns:a="http://schemas.openxmlformats.org/drawingml/2006/main">
+          <a:srgbClr val="FFFFFF"/>
+        </a:solidFill>
+      </p:bgPr>
+    </p:bg>
+    <p:spTree>
+      <p:nvGrpSpPr>
+        <p:cNvPr id="1" name=""/>
+        <p:cNvGrpSpPr/>
+        <p:nvPr/>
+      </p:nvGrpSpPr>
+      <p:grpSpPr>
+        <a:xfrm xmlns:a="http://schemas.openxmlformats.org/drawingml/2006/main"/>
+      </p:grpSpPr>
+      <p:sp>
+        <p:nvSpPr>
+          <p:cNvPr id="16" name="">
+            <a:extLst xmlns:a="http://schemas.openxmlformats.org/drawingml/2006/main">
+              <a:ext uri="{FF2B5EF4-FFF2-40B4-BE49-F238E27FC236}">
+                <a16:creationId xmlns:a16="http://schemas.microsoft.com/office/drawing/2014/main" id="{D2DB7632-9321-4B0D-B49B-BAF52F1D5F3F}"/>
+              </a:ext>
+            </a:extLst>
+          </p:cNvPr>
+          <p:cNvSpPr>
+            <a:spLocks xmlns:a="http://schemas.openxmlformats.org/drawingml/2006/main" noGrp="1"/>
+          </p:cNvSpPr>
+          <p:nvPr/>
+        </p:nvSpPr>
+        <p:spPr>
+          <a:xfrm xmlns:a="http://schemas.openxmlformats.org/drawingml/2006/main">
+            <a:off x="400050" y="228600"/>
+            <a:ext cx="2857500" cy="228600"/>
+          </a:xfrm>
+          <a:prstGeom xmlns:a="http://schemas.openxmlformats.org/drawingml/2006/main" prst="rect">
+            <a:avLst/>
+          </a:prstGeom>
+          <a:noFill xmlns:a="http://schemas.openxmlformats.org/drawingml/2006/main"/>
+          <a:ln xmlns:a="http://schemas.openxmlformats.org/drawingml/2006/main" w="0">
+            <a:noFill/>
+            <a:prstDash val="solid"/>
+          </a:ln>
+        </p:spPr>
+        <p:txBody>
+          <a:bodyPr xmlns:a="http://schemas.openxmlformats.org/drawingml/2006/main" anchor="t"/>
+          <a:lstStyle xmlns:a="http://schemas.openxmlformats.org/drawingml/2006/main"/>
+          <a:p xmlns:a="http://schemas.openxmlformats.org/drawingml/2006/main">
+            <a:pPr algn="l">
+              <a:buNone/>
+              <a:defRPr sz="1200" b="1">
+                <a:solidFill>
+                  <a:srgbClr val="3D8DFF"/>
+                </a:solidFill>
+                <a:latin typeface="Arial"/>
+                <a:ea typeface="Arial"/>
+                <a:cs typeface="Arial"/>
+              </a:defRPr>
+            </a:pPr>
+            <a:r>
+              <a:rPr sz="1200" b="1">
+                <a:solidFill>
+                  <a:srgbClr val="3D8DFF"/>
+                </a:solidFill>
+                <a:latin typeface="Arial"/>
+                <a:ea typeface="Arial"/>
+                <a:cs typeface="Arial"/>
+              </a:rPr>
+              <a:t>UNIVERSE TRANSPORT · INTERPRETATION</a:t>
+            </a:r>
+          </a:p>
+        </p:txBody>
+      </p:sp>
+      <p:sp>
+        <p:nvSpPr>
+          <p:cNvPr id="2" name="">
+            <a:extLst xmlns:a="http://schemas.openxmlformats.org/drawingml/2006/main">
+              <a:ext uri="{FF2B5EF4-FFF2-40B4-BE49-F238E27FC236}">
+                <a16:creationId xmlns:a16="http://schemas.microsoft.com/office/drawing/2014/main" id="{4F6E0FE8-6C1B-4A13-9D2D-6E11399D4DD1}"/>
+              </a:ext>
+            </a:extLst>
+          </p:cNvPr>
+          <p:cNvSpPr>
+            <a:spLocks xmlns:a="http://schemas.openxmlformats.org/drawingml/2006/main" noGrp="1"/>
+          </p:cNvSpPr>
+          <p:nvPr/>
+        </p:nvSpPr>
+        <p:spPr>
+          <a:xfrm xmlns:a="http://schemas.openxmlformats.org/drawingml/2006/main">
+            <a:off x="400050" y="476250"/>
+            <a:ext cx="11049000" cy="819150"/>
+          </a:xfrm>
+          <a:prstGeom xmlns:a="http://schemas.openxmlformats.org/drawingml/2006/main" prst="rect">
+            <a:avLst/>
+          </a:prstGeom>
+          <a:noFill xmlns:a="http://schemas.openxmlformats.org/drawingml/2006/main"/>
+          <a:ln xmlns:a="http://schemas.openxmlformats.org/drawingml/2006/main" w="0">
+            <a:noFill/>
+            <a:prstDash val="solid"/>
+          </a:ln>
+        </p:spPr>
+        <p:txBody>
+          <a:bodyPr xmlns:a="http://schemas.openxmlformats.org/drawingml/2006/main" anchor="t"/>
+          <a:lstStyle xmlns:a="http://schemas.openxmlformats.org/drawingml/2006/main"/>
+          <a:p xmlns:a="http://schemas.openxmlformats.org/drawingml/2006/main">
+            <a:pPr algn="l">
+              <a:buNone/>
+              <a:defRPr sz="2700" b="1">
+                <a:solidFill>
+                  <a:srgbClr val="101820"/>
+                </a:solidFill>
+                <a:latin typeface="Arial"/>
+                <a:ea typeface="Arial"/>
+                <a:cs typeface="Arial"/>
+              </a:defRPr>
+            </a:pPr>
+            <a:r>
+              <a:rPr sz="2700" b="1">
+                <a:solidFill>
+                  <a:srgbClr val="101820"/>
+                </a:solidFill>
+                <a:latin typeface="Arial"/>
+                <a:ea typeface="Arial"/>
+                <a:cs typeface="Arial"/>
+              </a:rPr>
+              <a:t>Curated stock portfolios are experiments—not confirmation</a:t>
+            </a:r>
+          </a:p>
+        </p:txBody>
+      </p:sp>
+      <p:sp>
+        <p:nvSpPr>
+          <p:cNvPr id="3" name="">
+            <a:extLst xmlns:a="http://schemas.openxmlformats.org/drawingml/2006/main">
+              <a:ext uri="{FF2B5EF4-FFF2-40B4-BE49-F238E27FC236}">
+                <a16:creationId xmlns:a16="http://schemas.microsoft.com/office/drawing/2014/main" id="{0E0B56DB-4E40-4B87-BA34-B14274318353}"/>
+              </a:ext>
+            </a:extLst>
+          </p:cNvPr>
+          <p:cNvSpPr>
+            <a:spLocks xmlns:a="http://schemas.openxmlformats.org/drawingml/2006/main" noGrp="1"/>
+          </p:cNvSpPr>
+          <p:nvPr/>
+        </p:nvSpPr>
+        <p:spPr>
+          <a:xfrm xmlns:a="http://schemas.openxmlformats.org/drawingml/2006/main">
+            <a:off x="400050" y="1428750"/>
+            <a:ext cx="11391900" cy="0"/>
+          </a:xfrm>
+          <a:prstGeom xmlns:a="http://schemas.openxmlformats.org/drawingml/2006/main" prst="line">
+            <a:avLst/>
+          </a:prstGeom>
+          <a:noFill xmlns:a="http://schemas.openxmlformats.org/drawingml/2006/main"/>
+          <a:ln xmlns:a="http://schemas.openxmlformats.org/drawingml/2006/main" w="9525">
+            <a:solidFill>
+              <a:srgbClr val="B8BCC4"/>
+            </a:solidFill>
+            <a:prstDash val="solid"/>
+          </a:ln>
+        </p:spPr>
+      </p:sp>
+      <p:sp>
+        <p:nvSpPr>
+          <p:cNvPr id="4" name="">
+            <a:extLst xmlns:a="http://schemas.openxmlformats.org/drawingml/2006/main">
+              <a:ext uri="{FF2B5EF4-FFF2-40B4-BE49-F238E27FC236}">
+                <a16:creationId xmlns:a16="http://schemas.microsoft.com/office/drawing/2014/main" id="{609465AD-88DC-48BC-BDAC-EBEFA9C8F7B5}"/>
+              </a:ext>
+            </a:extLst>
+          </p:cNvPr>
+          <p:cNvSpPr>
+            <a:spLocks xmlns:a="http://schemas.openxmlformats.org/drawingml/2006/main" noGrp="1"/>
+          </p:cNvSpPr>
+          <p:nvPr/>
+        </p:nvSpPr>
+        <p:spPr>
+          <a:xfrm xmlns:a="http://schemas.openxmlformats.org/drawingml/2006/main">
+            <a:off x="11163300" y="6362700"/>
+            <a:ext cx="609600" cy="228600"/>
+          </a:xfrm>
+          <a:prstGeom xmlns:a="http://schemas.openxmlformats.org/drawingml/2006/main" prst="rect">
+            <a:avLst/>
+          </a:prstGeom>
+          <a:noFill xmlns:a="http://schemas.openxmlformats.org/drawingml/2006/main"/>
+          <a:ln xmlns:a="http://schemas.openxmlformats.org/drawingml/2006/main" w="0">
+            <a:noFill/>
+            <a:prstDash val="solid"/>
+          </a:ln>
+        </p:spPr>
+        <p:txBody>
+          <a:bodyPr xmlns:a="http://schemas.openxmlformats.org/drawingml/2006/main" anchor="t"/>
+          <a:lstStyle xmlns:a="http://schemas.openxmlformats.org/drawingml/2006/main"/>
+          <a:p xmlns:a="http://schemas.openxmlformats.org/drawingml/2006/main">
+            <a:pPr algn="r">
+              <a:buNone/>
+              <a:defRPr sz="1200" b="0">
+                <a:solidFill>
+                  <a:srgbClr val="52616B"/>
+                </a:solidFill>
+                <a:latin typeface="Arial"/>
+                <a:ea typeface="Arial"/>
+                <a:cs typeface="Arial"/>
+              </a:defRPr>
+            </a:pPr>
+            <a:r>
+              <a:rPr sz="1200" b="0">
+                <a:solidFill>
+                  <a:srgbClr val="52616B"/>
+                </a:solidFill>
+                <a:latin typeface="Arial"/>
+                <a:ea typeface="Arial"/>
+                <a:cs typeface="Arial"/>
+              </a:rPr>
+              <a:t>   29</a:t>
+            </a:r>
+          </a:p>
+        </p:txBody>
+      </p:sp>
+      <p:sp>
+        <p:nvSpPr>
+          <p:cNvPr id="5" name="">
+            <a:extLst xmlns:a="http://schemas.openxmlformats.org/drawingml/2006/main">
+              <a:ext uri="{FF2B5EF4-FFF2-40B4-BE49-F238E27FC236}">
+                <a16:creationId xmlns:a16="http://schemas.microsoft.com/office/drawing/2014/main" id="{CD393174-0A3C-4E18-A0E5-CFFEAB42B506}"/>
+              </a:ext>
+            </a:extLst>
+          </p:cNvPr>
+          <p:cNvSpPr>
+            <a:spLocks xmlns:a="http://schemas.openxmlformats.org/drawingml/2006/main" noGrp="1"/>
+          </p:cNvSpPr>
+          <p:nvPr/>
+        </p:nvSpPr>
+        <p:spPr>
+          <a:xfrm xmlns:a="http://schemas.openxmlformats.org/drawingml/2006/main">
+            <a:off x="666750" y="1752600"/>
+            <a:ext cx="10858500" cy="1028700"/>
+          </a:xfrm>
+          <a:prstGeom xmlns:a="http://schemas.openxmlformats.org/drawingml/2006/main" prst="rect">
+            <a:avLst/>
+          </a:prstGeom>
+          <a:solidFill xmlns:a="http://schemas.openxmlformats.org/drawingml/2006/main">
+            <a:srgbClr val="E6F2EC"/>
+          </a:solidFill>
+          <a:ln xmlns:a="http://schemas.openxmlformats.org/drawingml/2006/main" w="9525">
+            <a:solidFill>
+              <a:srgbClr val="2E7D5B"/>
+            </a:solidFill>
+            <a:prstDash val="solid"/>
+          </a:ln>
+        </p:spPr>
+      </p:sp>
+      <p:sp>
+        <p:nvSpPr>
+          <p:cNvPr id="6" name="">
+            <a:extLst xmlns:a="http://schemas.openxmlformats.org/drawingml/2006/main">
+              <a:ext uri="{FF2B5EF4-FFF2-40B4-BE49-F238E27FC236}">
+                <a16:creationId xmlns:a16="http://schemas.microsoft.com/office/drawing/2014/main" id="{802C9A30-9CD1-4907-B5B7-2F6BE57885E8}"/>
+              </a:ext>
+            </a:extLst>
+          </p:cNvPr>
+          <p:cNvSpPr>
+            <a:spLocks xmlns:a="http://schemas.openxmlformats.org/drawingml/2006/main" noGrp="1"/>
+          </p:cNvSpPr>
+          <p:nvPr/>
+        </p:nvSpPr>
+        <p:spPr>
+          <a:xfrm xmlns:a="http://schemas.openxmlformats.org/drawingml/2006/main">
+            <a:off x="952500" y="2000250"/>
+            <a:ext cx="2190750" cy="400050"/>
+          </a:xfrm>
+          <a:prstGeom xmlns:a="http://schemas.openxmlformats.org/drawingml/2006/main" prst="rect">
+            <a:avLst/>
+          </a:prstGeom>
+          <a:noFill xmlns:a="http://schemas.openxmlformats.org/drawingml/2006/main"/>
+          <a:ln xmlns:a="http://schemas.openxmlformats.org/drawingml/2006/main" w="0">
+            <a:noFill/>
+            <a:prstDash val="solid"/>
+          </a:ln>
+        </p:spPr>
+        <p:txBody>
+          <a:bodyPr xmlns:a="http://schemas.openxmlformats.org/drawingml/2006/main" anchor="t"/>
+          <a:lstStyle xmlns:a="http://schemas.openxmlformats.org/drawingml/2006/main"/>
+          <a:p xmlns:a="http://schemas.openxmlformats.org/drawingml/2006/main">
+            <a:pPr algn="l">
+              <a:buNone/>
+              <a:defRPr sz="2025" b="1">
+                <a:solidFill>
+                  <a:srgbClr val="2E7D5B"/>
+                </a:solidFill>
+                <a:latin typeface="Arial"/>
+                <a:ea typeface="Arial"/>
+                <a:cs typeface="Arial"/>
+              </a:defRPr>
+            </a:pPr>
+            <a:r>
+              <a:rPr sz="2025" b="1">
+                <a:solidFill>
+                  <a:srgbClr val="2E7D5B"/>
+                </a:solidFill>
+                <a:latin typeface="Arial"/>
+                <a:ea typeface="Arial"/>
+                <a:cs typeface="Arial"/>
+              </a:rPr>
+              <a:t>Mechanically valid</a:t>
+            </a:r>
+          </a:p>
+        </p:txBody>
+      </p:sp>
+      <p:sp>
+        <p:nvSpPr>
+          <p:cNvPr id="7" name="">
+            <a:extLst xmlns:a="http://schemas.openxmlformats.org/drawingml/2006/main">
+              <a:ext uri="{FF2B5EF4-FFF2-40B4-BE49-F238E27FC236}">
+                <a16:creationId xmlns:a16="http://schemas.microsoft.com/office/drawing/2014/main" id="{4C0B6826-C1CD-407B-B1BD-7E0FDA1C4296}"/>
+              </a:ext>
+            </a:extLst>
+          </p:cNvPr>
+          <p:cNvSpPr>
+            <a:spLocks xmlns:a="http://schemas.openxmlformats.org/drawingml/2006/main" noGrp="1"/>
+          </p:cNvSpPr>
+          <p:nvPr/>
+        </p:nvSpPr>
+        <p:spPr>
+          <a:xfrm xmlns:a="http://schemas.openxmlformats.org/drawingml/2006/main">
+            <a:off x="3276600" y="1943100"/>
+            <a:ext cx="7772400" cy="647700"/>
+          </a:xfrm>
+          <a:prstGeom xmlns:a="http://schemas.openxmlformats.org/drawingml/2006/main" prst="rect">
+            <a:avLst/>
+          </a:prstGeom>
+          <a:noFill xmlns:a="http://schemas.openxmlformats.org/drawingml/2006/main"/>
+          <a:ln xmlns:a="http://schemas.openxmlformats.org/drawingml/2006/main" w="0">
+            <a:noFill/>
+            <a:prstDash val="solid"/>
+          </a:ln>
+        </p:spPr>
+        <p:txBody>
+          <a:bodyPr xmlns:a="http://schemas.openxmlformats.org/drawingml/2006/main" anchor="t"/>
+          <a:lstStyle xmlns:a="http://schemas.openxmlformats.org/drawingml/2006/main"/>
+          <a:p xmlns:a="http://schemas.openxmlformats.org/drawingml/2006/main">
+            <a:pPr algn="l">
+              <a:buNone/>
+              <a:defRPr sz="1725" b="0">
+                <a:solidFill>
+                  <a:srgbClr val="101820"/>
+                </a:solidFill>
+                <a:latin typeface="Arial"/>
+                <a:ea typeface="Arial"/>
+                <a:cs typeface="Arial"/>
+              </a:defRPr>
+            </a:pPr>
+            <a:r>
+              <a:rPr sz="1725" b="0">
+                <a:solidFill>
+                  <a:srgbClr val="101820"/>
+                </a:solidFill>
+                <a:latin typeface="Arial"/>
+                <a:ea typeface="Arial"/>
+                <a:cs typeface="Arial"/>
+              </a:rPr>
+              <a:t>Rank-and-rotate mechanics can operate on any comparable liquid asset fleet.</a:t>
+            </a:r>
+          </a:p>
+        </p:txBody>
+      </p:sp>
+      <p:sp>
+        <p:nvSpPr>
+          <p:cNvPr id="8" name="">
+            <a:extLst xmlns:a="http://schemas.openxmlformats.org/drawingml/2006/main">
+              <a:ext uri="{FF2B5EF4-FFF2-40B4-BE49-F238E27FC236}">
+                <a16:creationId xmlns:a16="http://schemas.microsoft.com/office/drawing/2014/main" id="{3AFAF26A-2C8D-481A-8C17-B8A9A3967177}"/>
+              </a:ext>
+            </a:extLst>
+          </p:cNvPr>
+          <p:cNvSpPr>
+            <a:spLocks xmlns:a="http://schemas.openxmlformats.org/drawingml/2006/main" noGrp="1"/>
+          </p:cNvSpPr>
+          <p:nvPr/>
+        </p:nvSpPr>
+        <p:spPr>
+          <a:xfrm xmlns:a="http://schemas.openxmlformats.org/drawingml/2006/main">
+            <a:off x="666750" y="3048000"/>
+            <a:ext cx="10858500" cy="1028700"/>
+          </a:xfrm>
+          <a:prstGeom xmlns:a="http://schemas.openxmlformats.org/drawingml/2006/main" prst="rect">
+            <a:avLst/>
+          </a:prstGeom>
+          <a:solidFill xmlns:a="http://schemas.openxmlformats.org/drawingml/2006/main">
+            <a:srgbClr val="F7E7E2"/>
+          </a:solidFill>
+          <a:ln xmlns:a="http://schemas.openxmlformats.org/drawingml/2006/main" w="9525">
+            <a:solidFill>
+              <a:srgbClr val="C8553D"/>
+            </a:solidFill>
+            <a:prstDash val="solid"/>
+          </a:ln>
+        </p:spPr>
+      </p:sp>
+      <p:sp>
+        <p:nvSpPr>
+          <p:cNvPr id="9" name="">
+            <a:extLst xmlns:a="http://schemas.openxmlformats.org/drawingml/2006/main">
+              <a:ext uri="{FF2B5EF4-FFF2-40B4-BE49-F238E27FC236}">
+                <a16:creationId xmlns:a16="http://schemas.microsoft.com/office/drawing/2014/main" id="{DDE8FBE1-8020-4B7A-932E-FC73716C919B}"/>
+              </a:ext>
+            </a:extLst>
+          </p:cNvPr>
+          <p:cNvSpPr>
+            <a:spLocks xmlns:a="http://schemas.openxmlformats.org/drawingml/2006/main" noGrp="1"/>
+          </p:cNvSpPr>
+          <p:nvPr/>
+        </p:nvSpPr>
+        <p:spPr>
+          <a:xfrm xmlns:a="http://schemas.openxmlformats.org/drawingml/2006/main">
+            <a:off x="952500" y="3295650"/>
+            <a:ext cx="2190750" cy="400050"/>
+          </a:xfrm>
+          <a:prstGeom xmlns:a="http://schemas.openxmlformats.org/drawingml/2006/main" prst="rect">
+            <a:avLst/>
+          </a:prstGeom>
+          <a:noFill xmlns:a="http://schemas.openxmlformats.org/drawingml/2006/main"/>
+          <a:ln xmlns:a="http://schemas.openxmlformats.org/drawingml/2006/main" w="0">
+            <a:noFill/>
+            <a:prstDash val="solid"/>
+          </a:ln>
+        </p:spPr>
+        <p:txBody>
+          <a:bodyPr xmlns:a="http://schemas.openxmlformats.org/drawingml/2006/main" anchor="t"/>
+          <a:lstStyle xmlns:a="http://schemas.openxmlformats.org/drawingml/2006/main"/>
+          <a:p xmlns:a="http://schemas.openxmlformats.org/drawingml/2006/main">
+            <a:pPr algn="l">
+              <a:buNone/>
+              <a:defRPr sz="2025" b="1">
+                <a:solidFill>
+                  <a:srgbClr val="C8553D"/>
+                </a:solidFill>
+                <a:latin typeface="Arial"/>
+                <a:ea typeface="Arial"/>
+                <a:cs typeface="Arial"/>
+              </a:defRPr>
+            </a:pPr>
+            <a:r>
+              <a:rPr sz="2025" b="1">
+                <a:solidFill>
+                  <a:srgbClr val="C8553D"/>
+                </a:solidFill>
+                <a:latin typeface="Arial"/>
+                <a:ea typeface="Arial"/>
+                <a:cs typeface="Arial"/>
+              </a:rPr>
+              <a:t>Economically weak</a:t>
+            </a:r>
+          </a:p>
+        </p:txBody>
+      </p:sp>
+      <p:sp>
+        <p:nvSpPr>
+          <p:cNvPr id="10" name="">
+            <a:extLst xmlns:a="http://schemas.openxmlformats.org/drawingml/2006/main">
+              <a:ext uri="{FF2B5EF4-FFF2-40B4-BE49-F238E27FC236}">
+                <a16:creationId xmlns:a16="http://schemas.microsoft.com/office/drawing/2014/main" id="{E6DA919C-47F4-4345-87E2-1F6DF9D0EC90}"/>
+              </a:ext>
+            </a:extLst>
+          </p:cNvPr>
+          <p:cNvSpPr>
+            <a:spLocks xmlns:a="http://schemas.openxmlformats.org/drawingml/2006/main" noGrp="1"/>
+          </p:cNvSpPr>
+          <p:nvPr/>
+        </p:nvSpPr>
+        <p:spPr>
+          <a:xfrm xmlns:a="http://schemas.openxmlformats.org/drawingml/2006/main">
+            <a:off x="3276600" y="3238500"/>
+            <a:ext cx="7772400" cy="647700"/>
+          </a:xfrm>
+          <a:prstGeom xmlns:a="http://schemas.openxmlformats.org/drawingml/2006/main" prst="rect">
+            <a:avLst/>
+          </a:prstGeom>
+          <a:noFill xmlns:a="http://schemas.openxmlformats.org/drawingml/2006/main"/>
+          <a:ln xmlns:a="http://schemas.openxmlformats.org/drawingml/2006/main" w="0">
+            <a:noFill/>
+            <a:prstDash val="solid"/>
+          </a:ln>
+        </p:spPr>
+        <p:txBody>
+          <a:bodyPr xmlns:a="http://schemas.openxmlformats.org/drawingml/2006/main" anchor="t"/>
+          <a:lstStyle xmlns:a="http://schemas.openxmlformats.org/drawingml/2006/main"/>
+          <a:p xmlns:a="http://schemas.openxmlformats.org/drawingml/2006/main">
+            <a:pPr algn="l">
+              <a:buNone/>
+              <a:defRPr sz="1725" b="0">
+                <a:solidFill>
+                  <a:srgbClr val="101820"/>
+                </a:solidFill>
+                <a:latin typeface="Arial"/>
+                <a:ea typeface="Arial"/>
+                <a:cs typeface="Arial"/>
+              </a:defRPr>
+            </a:pPr>
+            <a:r>
+              <a:rPr sz="1725" b="0">
+                <a:solidFill>
+                  <a:srgbClr val="101820"/>
+                </a:solidFill>
+                <a:latin typeface="Arial"/>
+                <a:ea typeface="Arial"/>
+                <a:cs typeface="Arial"/>
+              </a:rPr>
+              <a:t>Ten of eleven sector baskets lagged their equal-weight ownership control on CAGR.</a:t>
+            </a:r>
+          </a:p>
+        </p:txBody>
+      </p:sp>
+      <p:sp>
+        <p:nvSpPr>
+          <p:cNvPr id="11" name="">
+            <a:extLst xmlns:a="http://schemas.openxmlformats.org/drawingml/2006/main">
+              <a:ext uri="{FF2B5EF4-FFF2-40B4-BE49-F238E27FC236}">
+                <a16:creationId xmlns:a16="http://schemas.microsoft.com/office/drawing/2014/main" id="{0879E259-AD91-4B41-8E67-E5334F74BAB8}"/>
+              </a:ext>
+            </a:extLst>
+          </p:cNvPr>
+          <p:cNvSpPr>
+            <a:spLocks xmlns:a="http://schemas.openxmlformats.org/drawingml/2006/main" noGrp="1"/>
+          </p:cNvSpPr>
+          <p:nvPr/>
+        </p:nvSpPr>
+        <p:spPr>
+          <a:xfrm xmlns:a="http://schemas.openxmlformats.org/drawingml/2006/main">
+            <a:off x="666750" y="4343400"/>
+            <a:ext cx="10858500" cy="1028700"/>
+          </a:xfrm>
+          <a:prstGeom xmlns:a="http://schemas.openxmlformats.org/drawingml/2006/main" prst="rect">
+            <a:avLst/>
+          </a:prstGeom>
+          <a:solidFill xmlns:a="http://schemas.openxmlformats.org/drawingml/2006/main">
+            <a:srgbClr val="EDEDED"/>
+          </a:solidFill>
+          <a:ln xmlns:a="http://schemas.openxmlformats.org/drawingml/2006/main" w="9525">
+            <a:solidFill>
+              <a:srgbClr val="52616B"/>
+            </a:solidFill>
+            <a:prstDash val="solid"/>
+          </a:ln>
+        </p:spPr>
+      </p:sp>
+      <p:sp>
+        <p:nvSpPr>
+          <p:cNvPr id="12" name="">
+            <a:extLst xmlns:a="http://schemas.openxmlformats.org/drawingml/2006/main">
+              <a:ext uri="{FF2B5EF4-FFF2-40B4-BE49-F238E27FC236}">
+                <a16:creationId xmlns:a16="http://schemas.microsoft.com/office/drawing/2014/main" id="{FE0E70E3-6874-4441-9FD1-1060221212D9}"/>
+              </a:ext>
+            </a:extLst>
+          </p:cNvPr>
+          <p:cNvSpPr>
+            <a:spLocks xmlns:a="http://schemas.openxmlformats.org/drawingml/2006/main" noGrp="1"/>
+          </p:cNvSpPr>
+          <p:nvPr/>
+        </p:nvSpPr>
+        <p:spPr>
+          <a:xfrm xmlns:a="http://schemas.openxmlformats.org/drawingml/2006/main">
+            <a:off x="952500" y="4591050"/>
+            <a:ext cx="2190750" cy="400050"/>
+          </a:xfrm>
+          <a:prstGeom xmlns:a="http://schemas.openxmlformats.org/drawingml/2006/main" prst="rect">
+            <a:avLst/>
+          </a:prstGeom>
+          <a:noFill xmlns:a="http://schemas.openxmlformats.org/drawingml/2006/main"/>
+          <a:ln xmlns:a="http://schemas.openxmlformats.org/drawingml/2006/main" w="0">
+            <a:noFill/>
+            <a:prstDash val="solid"/>
+          </a:ln>
+        </p:spPr>
+        <p:txBody>
+          <a:bodyPr xmlns:a="http://schemas.openxmlformats.org/drawingml/2006/main" anchor="t"/>
+          <a:lstStyle xmlns:a="http://schemas.openxmlformats.org/drawingml/2006/main"/>
+          <a:p xmlns:a="http://schemas.openxmlformats.org/drawingml/2006/main">
+            <a:pPr algn="l">
+              <a:buNone/>
+              <a:defRPr sz="2025" b="1">
+                <a:solidFill>
+                  <a:srgbClr val="52616B"/>
+                </a:solidFill>
+                <a:latin typeface="Arial"/>
+                <a:ea typeface="Arial"/>
+                <a:cs typeface="Arial"/>
+              </a:defRPr>
+            </a:pPr>
+            <a:r>
+              <a:rPr sz="2025" b="1">
+                <a:solidFill>
+                  <a:srgbClr val="52616B"/>
+                </a:solidFill>
+                <a:latin typeface="Arial"/>
+                <a:ea typeface="Arial"/>
+                <a:cs typeface="Arial"/>
+              </a:rPr>
+              <a:t>Evidence limit</a:t>
+            </a:r>
+          </a:p>
+        </p:txBody>
+      </p:sp>
+      <p:sp>
+        <p:nvSpPr>
+          <p:cNvPr id="13" name="">
+            <a:extLst xmlns:a="http://schemas.openxmlformats.org/drawingml/2006/main">
+              <a:ext uri="{FF2B5EF4-FFF2-40B4-BE49-F238E27FC236}">
+                <a16:creationId xmlns:a16="http://schemas.microsoft.com/office/drawing/2014/main" id="{7D88D2F7-BBA9-4B06-83BF-EF6C40360B55}"/>
+              </a:ext>
+            </a:extLst>
+          </p:cNvPr>
+          <p:cNvSpPr>
+            <a:spLocks xmlns:a="http://schemas.openxmlformats.org/drawingml/2006/main" noGrp="1"/>
+          </p:cNvSpPr>
+          <p:nvPr/>
+        </p:nvSpPr>
+        <p:spPr>
+          <a:xfrm xmlns:a="http://schemas.openxmlformats.org/drawingml/2006/main">
+            <a:off x="3276600" y="4533900"/>
+            <a:ext cx="7772400" cy="647700"/>
+          </a:xfrm>
+          <a:prstGeom xmlns:a="http://schemas.openxmlformats.org/drawingml/2006/main" prst="rect">
+            <a:avLst/>
+          </a:prstGeom>
+          <a:noFill xmlns:a="http://schemas.openxmlformats.org/drawingml/2006/main"/>
+          <a:ln xmlns:a="http://schemas.openxmlformats.org/drawingml/2006/main" w="0">
+            <a:noFill/>
+            <a:prstDash val="solid"/>
+          </a:ln>
+        </p:spPr>
+        <p:txBody>
+          <a:bodyPr xmlns:a="http://schemas.openxmlformats.org/drawingml/2006/main" anchor="t"/>
+          <a:lstStyle xmlns:a="http://schemas.openxmlformats.org/drawingml/2006/main"/>
+          <a:p xmlns:a="http://schemas.openxmlformats.org/drawingml/2006/main">
+            <a:pPr algn="l">
+              <a:buNone/>
+              <a:defRPr sz="1725" b="0">
+                <a:solidFill>
+                  <a:srgbClr val="101820"/>
+                </a:solidFill>
+                <a:latin typeface="Arial"/>
+                <a:ea typeface="Arial"/>
+                <a:cs typeface="Arial"/>
+              </a:defRPr>
+            </a:pPr>
+            <a:r>
+              <a:rPr sz="1725" b="0">
+                <a:solidFill>
+                  <a:srgbClr val="101820"/>
+                </a:solidFill>
+                <a:latin typeface="Arial"/>
+                <a:ea typeface="Arial"/>
+                <a:cs typeface="Arial"/>
+              </a:rPr>
+              <a:t>Surviving long-history stocks are not point-in-time membership and cannot establish ex-ante tradeability.</a:t>
+            </a:r>
+          </a:p>
+        </p:txBody>
+      </p:sp>
+      <p:sp>
+        <p:nvSpPr>
+          <p:cNvPr id="14" name="">
+            <a:extLst xmlns:a="http://schemas.openxmlformats.org/drawingml/2006/main">
+              <a:ext uri="{FF2B5EF4-FFF2-40B4-BE49-F238E27FC236}">
+                <a16:creationId xmlns:a16="http://schemas.microsoft.com/office/drawing/2014/main" id="{F7E3D076-54D1-4B3D-8F4A-D11630B25FFC}"/>
+              </a:ext>
+            </a:extLst>
+          </p:cNvPr>
+          <p:cNvSpPr>
+            <a:spLocks xmlns:a="http://schemas.openxmlformats.org/drawingml/2006/main" noGrp="1"/>
+          </p:cNvSpPr>
+          <p:nvPr/>
+        </p:nvSpPr>
+        <p:spPr>
+          <a:xfrm xmlns:a="http://schemas.openxmlformats.org/drawingml/2006/main">
+            <a:off x="2114550" y="5753100"/>
+            <a:ext cx="7962900" cy="495300"/>
+          </a:xfrm>
+          <a:prstGeom xmlns:a="http://schemas.openxmlformats.org/drawingml/2006/main" prst="rect">
+            <a:avLst/>
+          </a:prstGeom>
+          <a:solidFill xmlns:a="http://schemas.openxmlformats.org/drawingml/2006/main">
+            <a:srgbClr val="EAF5FB"/>
+          </a:solidFill>
+          <a:ln xmlns:a="http://schemas.openxmlformats.org/drawingml/2006/main" w="9525">
+            <a:solidFill>
+              <a:srgbClr val="6DCBF4"/>
+            </a:solidFill>
+            <a:prstDash val="solid"/>
+          </a:ln>
+        </p:spPr>
+      </p:sp>
+      <p:sp>
+        <p:nvSpPr>
+          <p:cNvPr id="15" name="">
+            <a:extLst xmlns:a="http://schemas.openxmlformats.org/drawingml/2006/main">
+              <a:ext uri="{FF2B5EF4-FFF2-40B4-BE49-F238E27FC236}">
+                <a16:creationId xmlns:a16="http://schemas.microsoft.com/office/drawing/2014/main" id="{FF7807EE-5E9A-4AC4-A3F2-FA1CED7A80A8}"/>
+              </a:ext>
+            </a:extLst>
+          </p:cNvPr>
+          <p:cNvSpPr>
+            <a:spLocks xmlns:a="http://schemas.openxmlformats.org/drawingml/2006/main" noGrp="1"/>
+          </p:cNvSpPr>
+          <p:nvPr/>
+        </p:nvSpPr>
+        <p:spPr>
+          <a:xfrm xmlns:a="http://schemas.openxmlformats.org/drawingml/2006/main">
+            <a:off x="2343150" y="5753100"/>
+            <a:ext cx="7505700" cy="457200"/>
+          </a:xfrm>
+          <a:prstGeom xmlns:a="http://schemas.openxmlformats.org/drawingml/2006/main" prst="rect">
+            <a:avLst/>
+          </a:prstGeom>
+          <a:noFill xmlns:a="http://schemas.openxmlformats.org/drawingml/2006/main"/>
+          <a:ln xmlns:a="http://schemas.openxmlformats.org/drawingml/2006/main" w="0">
+            <a:noFill/>
+            <a:prstDash val="solid"/>
+          </a:ln>
+        </p:spPr>
+        <p:txBody>
+          <a:bodyPr xmlns:a="http://schemas.openxmlformats.org/drawingml/2006/main" anchor="t"/>
+          <a:lstStyle xmlns:a="http://schemas.openxmlformats.org/drawingml/2006/main"/>
+          <a:p xmlns:a="http://schemas.openxmlformats.org/drawingml/2006/main">
+            <a:pPr algn="ctr">
+              <a:buNone/>
+              <a:defRPr sz="1350" b="1">
+                <a:solidFill>
+                  <a:srgbClr val="3D8DFF"/>
+                </a:solidFill>
+                <a:latin typeface="Arial"/>
+                <a:ea typeface="Arial"/>
+                <a:cs typeface="Arial"/>
+              </a:defRPr>
+            </a:pPr>
+            <a:r>
+              <a:rPr sz="1350" b="1">
+                <a:solidFill>
+                  <a:srgbClr val="3D8DFF"/>
+                </a:solidFill>
+                <a:latin typeface="Arial"/>
+                <a:ea typeface="Arial"/>
+                <a:cs typeface="Arial"/>
+              </a:rPr>
+              <a:t>The one green Technology cell is a clue, not permission to cherry-pick.</a:t>
             </a:r>
           </a:p>
         </p:txBody>
@@ -19283,6 +24046,768 @@
     <p:extLst>
       <p:ext uri="{BB962C8B-B14F-4D97-AF65-F5344CB8AC3E}">
         <p14:creationId xmlns:p14="http://schemas.microsoft.com/office/powerpoint/2010/main" val="484447276"/>
+      </p:ext>
+    </p:extLst>
+  </p:cSld>
+</p:sld>
+</file>
+
+<file path=ppt/slides/slide30.xml><?xml version="1.0" encoding="utf-8"?>
+<p:sld xmlns:p="http://schemas.openxmlformats.org/presentationml/2006/main">
+  <p:cSld>
+    <p:bg>
+      <p:bgPr>
+        <a:solidFill xmlns:a="http://schemas.openxmlformats.org/drawingml/2006/main">
+          <a:srgbClr val="FFFFFF"/>
+        </a:solidFill>
+      </p:bgPr>
+    </p:bg>
+    <p:spTree>
+      <p:nvGrpSpPr>
+        <p:cNvPr id="1" name=""/>
+        <p:cNvGrpSpPr/>
+        <p:nvPr/>
+      </p:nvGrpSpPr>
+      <p:grpSpPr>
+        <a:xfrm xmlns:a="http://schemas.openxmlformats.org/drawingml/2006/main"/>
+      </p:grpSpPr>
+      <p:sp>
+        <p:nvSpPr>
+          <p:cNvPr id="16" name="">
+            <a:extLst xmlns:a="http://schemas.openxmlformats.org/drawingml/2006/main">
+              <a:ext uri="{FF2B5EF4-FFF2-40B4-BE49-F238E27FC236}">
+                <a16:creationId xmlns:a16="http://schemas.microsoft.com/office/drawing/2014/main" id="{D2DB7632-9321-4B0D-B49B-BAF52F1D5F3F}"/>
+              </a:ext>
+            </a:extLst>
+          </p:cNvPr>
+          <p:cNvSpPr>
+            <a:spLocks xmlns:a="http://schemas.openxmlformats.org/drawingml/2006/main" noGrp="1"/>
+          </p:cNvSpPr>
+          <p:nvPr/>
+        </p:nvSpPr>
+        <p:spPr>
+          <a:xfrm xmlns:a="http://schemas.openxmlformats.org/drawingml/2006/main">
+            <a:off x="400050" y="228600"/>
+            <a:ext cx="2857500" cy="228600"/>
+          </a:xfrm>
+          <a:prstGeom xmlns:a="http://schemas.openxmlformats.org/drawingml/2006/main" prst="rect">
+            <a:avLst/>
+          </a:prstGeom>
+          <a:noFill xmlns:a="http://schemas.openxmlformats.org/drawingml/2006/main"/>
+          <a:ln xmlns:a="http://schemas.openxmlformats.org/drawingml/2006/main" w="0">
+            <a:noFill/>
+            <a:prstDash val="solid"/>
+          </a:ln>
+        </p:spPr>
+        <p:txBody>
+          <a:bodyPr xmlns:a="http://schemas.openxmlformats.org/drawingml/2006/main" anchor="t"/>
+          <a:lstStyle xmlns:a="http://schemas.openxmlformats.org/drawingml/2006/main"/>
+          <a:p xmlns:a="http://schemas.openxmlformats.org/drawingml/2006/main">
+            <a:pPr algn="l">
+              <a:buNone/>
+              <a:defRPr sz="1200" b="1">
+                <a:solidFill>
+                  <a:srgbClr val="3D8DFF"/>
+                </a:solidFill>
+                <a:latin typeface="Arial"/>
+                <a:ea typeface="Arial"/>
+                <a:cs typeface="Arial"/>
+              </a:defRPr>
+            </a:pPr>
+            <a:r>
+              <a:rPr sz="1200" b="1">
+                <a:solidFill>
+                  <a:srgbClr val="3D8DFF"/>
+                </a:solidFill>
+                <a:latin typeface="Arial"/>
+                <a:ea typeface="Arial"/>
+                <a:cs typeface="Arial"/>
+              </a:rPr>
+              <a:t>UNIVERSE TRANSPORT · DECISION BOUNDARY</a:t>
+            </a:r>
+          </a:p>
+        </p:txBody>
+      </p:sp>
+      <p:sp>
+        <p:nvSpPr>
+          <p:cNvPr id="2" name="">
+            <a:extLst xmlns:a="http://schemas.openxmlformats.org/drawingml/2006/main">
+              <a:ext uri="{FF2B5EF4-FFF2-40B4-BE49-F238E27FC236}">
+                <a16:creationId xmlns:a16="http://schemas.microsoft.com/office/drawing/2014/main" id="{4F6E0FE8-6C1B-4A13-9D2D-6E11399D4DD1}"/>
+              </a:ext>
+            </a:extLst>
+          </p:cNvPr>
+          <p:cNvSpPr>
+            <a:spLocks xmlns:a="http://schemas.openxmlformats.org/drawingml/2006/main" noGrp="1"/>
+          </p:cNvSpPr>
+          <p:nvPr/>
+        </p:nvSpPr>
+        <p:spPr>
+          <a:xfrm xmlns:a="http://schemas.openxmlformats.org/drawingml/2006/main">
+            <a:off x="400050" y="476250"/>
+            <a:ext cx="11049000" cy="819150"/>
+          </a:xfrm>
+          <a:prstGeom xmlns:a="http://schemas.openxmlformats.org/drawingml/2006/main" prst="rect">
+            <a:avLst/>
+          </a:prstGeom>
+          <a:noFill xmlns:a="http://schemas.openxmlformats.org/drawingml/2006/main"/>
+          <a:ln xmlns:a="http://schemas.openxmlformats.org/drawingml/2006/main" w="0">
+            <a:noFill/>
+            <a:prstDash val="solid"/>
+          </a:ln>
+        </p:spPr>
+        <p:txBody>
+          <a:bodyPr xmlns:a="http://schemas.openxmlformats.org/drawingml/2006/main" anchor="t"/>
+          <a:lstStyle xmlns:a="http://schemas.openxmlformats.org/drawingml/2006/main"/>
+          <a:p xmlns:a="http://schemas.openxmlformats.org/drawingml/2006/main">
+            <a:pPr algn="l">
+              <a:buNone/>
+              <a:defRPr sz="2700" b="1">
+                <a:solidFill>
+                  <a:srgbClr val="101820"/>
+                </a:solidFill>
+                <a:latin typeface="Arial"/>
+                <a:ea typeface="Arial"/>
+                <a:cs typeface="Arial"/>
+              </a:defRPr>
+            </a:pPr>
+            <a:r>
+              <a:rPr sz="2700" b="1">
+                <a:solidFill>
+                  <a:srgbClr val="101820"/>
+                </a:solidFill>
+                <a:latin typeface="Arial"/>
+                <a:ea typeface="Arial"/>
+                <a:cs typeface="Arial"/>
+              </a:rPr>
+              <a:t>The principle transports as risk shaping—not return edge</a:t>
+            </a:r>
+          </a:p>
+        </p:txBody>
+      </p:sp>
+      <p:sp>
+        <p:nvSpPr>
+          <p:cNvPr id="3" name="">
+            <a:extLst xmlns:a="http://schemas.openxmlformats.org/drawingml/2006/main">
+              <a:ext uri="{FF2B5EF4-FFF2-40B4-BE49-F238E27FC236}">
+                <a16:creationId xmlns:a16="http://schemas.microsoft.com/office/drawing/2014/main" id="{0E0B56DB-4E40-4B87-BA34-B14274318353}"/>
+              </a:ext>
+            </a:extLst>
+          </p:cNvPr>
+          <p:cNvSpPr>
+            <a:spLocks xmlns:a="http://schemas.openxmlformats.org/drawingml/2006/main" noGrp="1"/>
+          </p:cNvSpPr>
+          <p:nvPr/>
+        </p:nvSpPr>
+        <p:spPr>
+          <a:xfrm xmlns:a="http://schemas.openxmlformats.org/drawingml/2006/main">
+            <a:off x="400050" y="1428750"/>
+            <a:ext cx="11391900" cy="0"/>
+          </a:xfrm>
+          <a:prstGeom xmlns:a="http://schemas.openxmlformats.org/drawingml/2006/main" prst="line">
+            <a:avLst/>
+          </a:prstGeom>
+          <a:noFill xmlns:a="http://schemas.openxmlformats.org/drawingml/2006/main"/>
+          <a:ln xmlns:a="http://schemas.openxmlformats.org/drawingml/2006/main" w="9525">
+            <a:solidFill>
+              <a:srgbClr val="B8BCC4"/>
+            </a:solidFill>
+            <a:prstDash val="solid"/>
+          </a:ln>
+        </p:spPr>
+      </p:sp>
+      <p:sp>
+        <p:nvSpPr>
+          <p:cNvPr id="4" name="">
+            <a:extLst xmlns:a="http://schemas.openxmlformats.org/drawingml/2006/main">
+              <a:ext uri="{FF2B5EF4-FFF2-40B4-BE49-F238E27FC236}">
+                <a16:creationId xmlns:a16="http://schemas.microsoft.com/office/drawing/2014/main" id="{609465AD-88DC-48BC-BDAC-EBEFA9C8F7B5}"/>
+              </a:ext>
+            </a:extLst>
+          </p:cNvPr>
+          <p:cNvSpPr>
+            <a:spLocks xmlns:a="http://schemas.openxmlformats.org/drawingml/2006/main" noGrp="1"/>
+          </p:cNvSpPr>
+          <p:nvPr/>
+        </p:nvSpPr>
+        <p:spPr>
+          <a:xfrm xmlns:a="http://schemas.openxmlformats.org/drawingml/2006/main">
+            <a:off x="11163300" y="6362700"/>
+            <a:ext cx="609600" cy="228600"/>
+          </a:xfrm>
+          <a:prstGeom xmlns:a="http://schemas.openxmlformats.org/drawingml/2006/main" prst="rect">
+            <a:avLst/>
+          </a:prstGeom>
+          <a:noFill xmlns:a="http://schemas.openxmlformats.org/drawingml/2006/main"/>
+          <a:ln xmlns:a="http://schemas.openxmlformats.org/drawingml/2006/main" w="0">
+            <a:noFill/>
+            <a:prstDash val="solid"/>
+          </a:ln>
+        </p:spPr>
+        <p:txBody>
+          <a:bodyPr xmlns:a="http://schemas.openxmlformats.org/drawingml/2006/main" anchor="t"/>
+          <a:lstStyle xmlns:a="http://schemas.openxmlformats.org/drawingml/2006/main"/>
+          <a:p xmlns:a="http://schemas.openxmlformats.org/drawingml/2006/main">
+            <a:pPr algn="r">
+              <a:buNone/>
+              <a:defRPr sz="1200" b="0">
+                <a:solidFill>
+                  <a:srgbClr val="52616B"/>
+                </a:solidFill>
+                <a:latin typeface="Arial"/>
+                <a:ea typeface="Arial"/>
+                <a:cs typeface="Arial"/>
+              </a:defRPr>
+            </a:pPr>
+            <a:r>
+              <a:rPr sz="1200" b="0">
+                <a:solidFill>
+                  <a:srgbClr val="52616B"/>
+                </a:solidFill>
+                <a:latin typeface="Arial"/>
+                <a:ea typeface="Arial"/>
+                <a:cs typeface="Arial"/>
+              </a:rPr>
+              <a:t> 30</a:t>
+            </a:r>
+          </a:p>
+        </p:txBody>
+      </p:sp>
+      <p:sp>
+        <p:nvSpPr>
+          <p:cNvPr id="5" name="">
+            <a:extLst xmlns:a="http://schemas.openxmlformats.org/drawingml/2006/main">
+              <a:ext uri="{FF2B5EF4-FFF2-40B4-BE49-F238E27FC236}">
+                <a16:creationId xmlns:a16="http://schemas.microsoft.com/office/drawing/2014/main" id="{CD393174-0A3C-4E18-A0E5-CFFEAB42B506}"/>
+              </a:ext>
+            </a:extLst>
+          </p:cNvPr>
+          <p:cNvSpPr>
+            <a:spLocks xmlns:a="http://schemas.openxmlformats.org/drawingml/2006/main" noGrp="1"/>
+          </p:cNvSpPr>
+          <p:nvPr/>
+        </p:nvSpPr>
+        <p:spPr>
+          <a:xfrm xmlns:a="http://schemas.openxmlformats.org/drawingml/2006/main">
+            <a:off x="666750" y="1752600"/>
+            <a:ext cx="10858500" cy="1028700"/>
+          </a:xfrm>
+          <a:prstGeom xmlns:a="http://schemas.openxmlformats.org/drawingml/2006/main" prst="rect">
+            <a:avLst/>
+          </a:prstGeom>
+          <a:solidFill xmlns:a="http://schemas.openxmlformats.org/drawingml/2006/main">
+            <a:srgbClr val="E6F2EC"/>
+          </a:solidFill>
+          <a:ln xmlns:a="http://schemas.openxmlformats.org/drawingml/2006/main" w="9525">
+            <a:solidFill>
+              <a:srgbClr val="2E7D5B"/>
+            </a:solidFill>
+            <a:prstDash val="solid"/>
+          </a:ln>
+        </p:spPr>
+      </p:sp>
+      <p:sp>
+        <p:nvSpPr>
+          <p:cNvPr id="6" name="">
+            <a:extLst xmlns:a="http://schemas.openxmlformats.org/drawingml/2006/main">
+              <a:ext uri="{FF2B5EF4-FFF2-40B4-BE49-F238E27FC236}">
+                <a16:creationId xmlns:a16="http://schemas.microsoft.com/office/drawing/2014/main" id="{802C9A30-9CD1-4907-B5B7-2F6BE57885E8}"/>
+              </a:ext>
+            </a:extLst>
+          </p:cNvPr>
+          <p:cNvSpPr>
+            <a:spLocks xmlns:a="http://schemas.openxmlformats.org/drawingml/2006/main" noGrp="1"/>
+          </p:cNvSpPr>
+          <p:nvPr/>
+        </p:nvSpPr>
+        <p:spPr>
+          <a:xfrm xmlns:a="http://schemas.openxmlformats.org/drawingml/2006/main">
+            <a:off x="952500" y="2000250"/>
+            <a:ext cx="2190750" cy="400050"/>
+          </a:xfrm>
+          <a:prstGeom xmlns:a="http://schemas.openxmlformats.org/drawingml/2006/main" prst="rect">
+            <a:avLst/>
+          </a:prstGeom>
+          <a:noFill xmlns:a="http://schemas.openxmlformats.org/drawingml/2006/main"/>
+          <a:ln xmlns:a="http://schemas.openxmlformats.org/drawingml/2006/main" w="0">
+            <a:noFill/>
+            <a:prstDash val="solid"/>
+          </a:ln>
+        </p:spPr>
+        <p:txBody>
+          <a:bodyPr xmlns:a="http://schemas.openxmlformats.org/drawingml/2006/main" anchor="t"/>
+          <a:lstStyle xmlns:a="http://schemas.openxmlformats.org/drawingml/2006/main"/>
+          <a:p xmlns:a="http://schemas.openxmlformats.org/drawingml/2006/main">
+            <a:pPr algn="l">
+              <a:buNone/>
+              <a:defRPr sz="2025" b="1">
+                <a:solidFill>
+                  <a:srgbClr val="2E7D5B"/>
+                </a:solidFill>
+                <a:latin typeface="Arial"/>
+                <a:ea typeface="Arial"/>
+                <a:cs typeface="Arial"/>
+              </a:defRPr>
+            </a:pPr>
+            <a:r>
+              <a:rPr sz="2025" b="1">
+                <a:solidFill>
+                  <a:srgbClr val="2E7D5B"/>
+                </a:solidFill>
+                <a:latin typeface="Arial"/>
+                <a:ea typeface="Arial"/>
+                <a:cs typeface="Arial"/>
+              </a:rPr>
+              <a:t>Established</a:t>
+            </a:r>
+          </a:p>
+        </p:txBody>
+      </p:sp>
+      <p:sp>
+        <p:nvSpPr>
+          <p:cNvPr id="7" name="">
+            <a:extLst xmlns:a="http://schemas.openxmlformats.org/drawingml/2006/main">
+              <a:ext uri="{FF2B5EF4-FFF2-40B4-BE49-F238E27FC236}">
+                <a16:creationId xmlns:a16="http://schemas.microsoft.com/office/drawing/2014/main" id="{4C0B6826-C1CD-407B-B1BD-7E0FDA1C4296}"/>
+              </a:ext>
+            </a:extLst>
+          </p:cNvPr>
+          <p:cNvSpPr>
+            <a:spLocks xmlns:a="http://schemas.openxmlformats.org/drawingml/2006/main" noGrp="1"/>
+          </p:cNvSpPr>
+          <p:nvPr/>
+        </p:nvSpPr>
+        <p:spPr>
+          <a:xfrm xmlns:a="http://schemas.openxmlformats.org/drawingml/2006/main">
+            <a:off x="3276600" y="1943100"/>
+            <a:ext cx="7772400" cy="647700"/>
+          </a:xfrm>
+          <a:prstGeom xmlns:a="http://schemas.openxmlformats.org/drawingml/2006/main" prst="rect">
+            <a:avLst/>
+          </a:prstGeom>
+          <a:noFill xmlns:a="http://schemas.openxmlformats.org/drawingml/2006/main"/>
+          <a:ln xmlns:a="http://schemas.openxmlformats.org/drawingml/2006/main" w="0">
+            <a:noFill/>
+            <a:prstDash val="solid"/>
+          </a:ln>
+        </p:spPr>
+        <p:txBody>
+          <a:bodyPr xmlns:a="http://schemas.openxmlformats.org/drawingml/2006/main" anchor="t"/>
+          <a:lstStyle xmlns:a="http://schemas.openxmlformats.org/drawingml/2006/main"/>
+          <a:p xmlns:a="http://schemas.openxmlformats.org/drawingml/2006/main">
+            <a:pPr algn="l">
+              <a:buNone/>
+              <a:defRPr sz="1725" b="0">
+                <a:solidFill>
+                  <a:srgbClr val="101820"/>
+                </a:solidFill>
+                <a:latin typeface="Arial"/>
+                <a:ea typeface="Arial"/>
+                <a:cs typeface="Arial"/>
+              </a:defRPr>
+            </a:pPr>
+            <a:r>
+              <a:rPr sz="1725" b="0">
+                <a:solidFill>
+                  <a:srgbClr val="101820"/>
+                </a:solidFill>
+                <a:latin typeface="Arial"/>
+                <a:ea typeface="Arial"/>
+                <a:cs typeface="Arial"/>
+              </a:rPr>
+              <a:t>The same causal mechanics ran across twelve fleets; a defensive drawdown tradeoff appeared repeatedly.</a:t>
+            </a:r>
+          </a:p>
+        </p:txBody>
+      </p:sp>
+      <p:sp>
+        <p:nvSpPr>
+          <p:cNvPr id="8" name="">
+            <a:extLst xmlns:a="http://schemas.openxmlformats.org/drawingml/2006/main">
+              <a:ext uri="{FF2B5EF4-FFF2-40B4-BE49-F238E27FC236}">
+                <a16:creationId xmlns:a16="http://schemas.microsoft.com/office/drawing/2014/main" id="{3AFAF26A-2C8D-481A-8C17-B8A9A3967177}"/>
+              </a:ext>
+            </a:extLst>
+          </p:cNvPr>
+          <p:cNvSpPr>
+            <a:spLocks xmlns:a="http://schemas.openxmlformats.org/drawingml/2006/main" noGrp="1"/>
+          </p:cNvSpPr>
+          <p:nvPr/>
+        </p:nvSpPr>
+        <p:spPr>
+          <a:xfrm xmlns:a="http://schemas.openxmlformats.org/drawingml/2006/main">
+            <a:off x="666750" y="3048000"/>
+            <a:ext cx="10858500" cy="1028700"/>
+          </a:xfrm>
+          <a:prstGeom xmlns:a="http://schemas.openxmlformats.org/drawingml/2006/main" prst="rect">
+            <a:avLst/>
+          </a:prstGeom>
+          <a:solidFill xmlns:a="http://schemas.openxmlformats.org/drawingml/2006/main">
+            <a:srgbClr val="F7E7E2"/>
+          </a:solidFill>
+          <a:ln xmlns:a="http://schemas.openxmlformats.org/drawingml/2006/main" w="9525">
+            <a:solidFill>
+              <a:srgbClr val="C8553D"/>
+            </a:solidFill>
+            <a:prstDash val="solid"/>
+          </a:ln>
+        </p:spPr>
+      </p:sp>
+      <p:sp>
+        <p:nvSpPr>
+          <p:cNvPr id="9" name="">
+            <a:extLst xmlns:a="http://schemas.openxmlformats.org/drawingml/2006/main">
+              <a:ext uri="{FF2B5EF4-FFF2-40B4-BE49-F238E27FC236}">
+                <a16:creationId xmlns:a16="http://schemas.microsoft.com/office/drawing/2014/main" id="{DDE8FBE1-8020-4B7A-932E-FC73716C919B}"/>
+              </a:ext>
+            </a:extLst>
+          </p:cNvPr>
+          <p:cNvSpPr>
+            <a:spLocks xmlns:a="http://schemas.openxmlformats.org/drawingml/2006/main" noGrp="1"/>
+          </p:cNvSpPr>
+          <p:nvPr/>
+        </p:nvSpPr>
+        <p:spPr>
+          <a:xfrm xmlns:a="http://schemas.openxmlformats.org/drawingml/2006/main">
+            <a:off x="952500" y="3295650"/>
+            <a:ext cx="2190750" cy="400050"/>
+          </a:xfrm>
+          <a:prstGeom xmlns:a="http://schemas.openxmlformats.org/drawingml/2006/main" prst="rect">
+            <a:avLst/>
+          </a:prstGeom>
+          <a:noFill xmlns:a="http://schemas.openxmlformats.org/drawingml/2006/main"/>
+          <a:ln xmlns:a="http://schemas.openxmlformats.org/drawingml/2006/main" w="0">
+            <a:noFill/>
+            <a:prstDash val="solid"/>
+          </a:ln>
+        </p:spPr>
+        <p:txBody>
+          <a:bodyPr xmlns:a="http://schemas.openxmlformats.org/drawingml/2006/main" anchor="t"/>
+          <a:lstStyle xmlns:a="http://schemas.openxmlformats.org/drawingml/2006/main"/>
+          <a:p xmlns:a="http://schemas.openxmlformats.org/drawingml/2006/main">
+            <a:pPr algn="l">
+              <a:buNone/>
+              <a:defRPr sz="2025" b="1">
+                <a:solidFill>
+                  <a:srgbClr val="C8553D"/>
+                </a:solidFill>
+                <a:latin typeface="Arial"/>
+                <a:ea typeface="Arial"/>
+                <a:cs typeface="Arial"/>
+              </a:defRPr>
+            </a:pPr>
+            <a:r>
+              <a:rPr sz="2025" b="1">
+                <a:solidFill>
+                  <a:srgbClr val="C8553D"/>
+                </a:solidFill>
+                <a:latin typeface="Arial"/>
+                <a:ea typeface="Arial"/>
+                <a:cs typeface="Arial"/>
+              </a:rPr>
+              <a:t>Not established</a:t>
+            </a:r>
+          </a:p>
+        </p:txBody>
+      </p:sp>
+      <p:sp>
+        <p:nvSpPr>
+          <p:cNvPr id="10" name="">
+            <a:extLst xmlns:a="http://schemas.openxmlformats.org/drawingml/2006/main">
+              <a:ext uri="{FF2B5EF4-FFF2-40B4-BE49-F238E27FC236}">
+                <a16:creationId xmlns:a16="http://schemas.microsoft.com/office/drawing/2014/main" id="{E6DA919C-47F4-4345-87E2-1F6DF9D0EC90}"/>
+              </a:ext>
+            </a:extLst>
+          </p:cNvPr>
+          <p:cNvSpPr>
+            <a:spLocks xmlns:a="http://schemas.openxmlformats.org/drawingml/2006/main" noGrp="1"/>
+          </p:cNvSpPr>
+          <p:nvPr/>
+        </p:nvSpPr>
+        <p:spPr>
+          <a:xfrm xmlns:a="http://schemas.openxmlformats.org/drawingml/2006/main">
+            <a:off x="3276600" y="3238500"/>
+            <a:ext cx="7772400" cy="647700"/>
+          </a:xfrm>
+          <a:prstGeom xmlns:a="http://schemas.openxmlformats.org/drawingml/2006/main" prst="rect">
+            <a:avLst/>
+          </a:prstGeom>
+          <a:noFill xmlns:a="http://schemas.openxmlformats.org/drawingml/2006/main"/>
+          <a:ln xmlns:a="http://schemas.openxmlformats.org/drawingml/2006/main" w="0">
+            <a:noFill/>
+            <a:prstDash val="solid"/>
+          </a:ln>
+        </p:spPr>
+        <p:txBody>
+          <a:bodyPr xmlns:a="http://schemas.openxmlformats.org/drawingml/2006/main" anchor="t"/>
+          <a:lstStyle xmlns:a="http://schemas.openxmlformats.org/drawingml/2006/main"/>
+          <a:p xmlns:a="http://schemas.openxmlformats.org/drawingml/2006/main">
+            <a:pPr algn="l">
+              <a:buNone/>
+              <a:defRPr sz="1725" b="0">
+                <a:solidFill>
+                  <a:srgbClr val="101820"/>
+                </a:solidFill>
+                <a:latin typeface="Arial"/>
+                <a:ea typeface="Arial"/>
+                <a:cs typeface="Arial"/>
+              </a:defRPr>
+            </a:pPr>
+            <a:r>
+              <a:rPr sz="1725" b="0">
+                <a:solidFill>
+                  <a:srgbClr val="101820"/>
+                </a:solidFill>
+                <a:latin typeface="Arial"/>
+                <a:ea typeface="Arial"/>
+                <a:cs typeface="Arial"/>
+              </a:rPr>
+              <a:t>No broad CAGR advantage for ETFs or stocks, no Technology exception, and no forward evidence.</a:t>
+            </a:r>
+          </a:p>
+        </p:txBody>
+      </p:sp>
+      <p:sp>
+        <p:nvSpPr>
+          <p:cNvPr id="11" name="">
+            <a:extLst xmlns:a="http://schemas.openxmlformats.org/drawingml/2006/main">
+              <a:ext uri="{FF2B5EF4-FFF2-40B4-BE49-F238E27FC236}">
+                <a16:creationId xmlns:a16="http://schemas.microsoft.com/office/drawing/2014/main" id="{0879E259-AD91-4B41-8E67-E5334F74BAB8}"/>
+              </a:ext>
+            </a:extLst>
+          </p:cNvPr>
+          <p:cNvSpPr>
+            <a:spLocks xmlns:a="http://schemas.openxmlformats.org/drawingml/2006/main" noGrp="1"/>
+          </p:cNvSpPr>
+          <p:nvPr/>
+        </p:nvSpPr>
+        <p:spPr>
+          <a:xfrm xmlns:a="http://schemas.openxmlformats.org/drawingml/2006/main">
+            <a:off x="666750" y="4343400"/>
+            <a:ext cx="10858500" cy="1028700"/>
+          </a:xfrm>
+          <a:prstGeom xmlns:a="http://schemas.openxmlformats.org/drawingml/2006/main" prst="rect">
+            <a:avLst/>
+          </a:prstGeom>
+          <a:solidFill xmlns:a="http://schemas.openxmlformats.org/drawingml/2006/main">
+            <a:srgbClr val="EDEDED"/>
+          </a:solidFill>
+          <a:ln xmlns:a="http://schemas.openxmlformats.org/drawingml/2006/main" w="9525">
+            <a:solidFill>
+              <a:srgbClr val="52616B"/>
+            </a:solidFill>
+            <a:prstDash val="solid"/>
+          </a:ln>
+        </p:spPr>
+      </p:sp>
+      <p:sp>
+        <p:nvSpPr>
+          <p:cNvPr id="12" name="">
+            <a:extLst xmlns:a="http://schemas.openxmlformats.org/drawingml/2006/main">
+              <a:ext uri="{FF2B5EF4-FFF2-40B4-BE49-F238E27FC236}">
+                <a16:creationId xmlns:a16="http://schemas.microsoft.com/office/drawing/2014/main" id="{FE0E70E3-6874-4441-9FD1-1060221212D9}"/>
+              </a:ext>
+            </a:extLst>
+          </p:cNvPr>
+          <p:cNvSpPr>
+            <a:spLocks xmlns:a="http://schemas.openxmlformats.org/drawingml/2006/main" noGrp="1"/>
+          </p:cNvSpPr>
+          <p:nvPr/>
+        </p:nvSpPr>
+        <p:spPr>
+          <a:xfrm xmlns:a="http://schemas.openxmlformats.org/drawingml/2006/main">
+            <a:off x="952500" y="4591050"/>
+            <a:ext cx="2190750" cy="400050"/>
+          </a:xfrm>
+          <a:prstGeom xmlns:a="http://schemas.openxmlformats.org/drawingml/2006/main" prst="rect">
+            <a:avLst/>
+          </a:prstGeom>
+          <a:noFill xmlns:a="http://schemas.openxmlformats.org/drawingml/2006/main"/>
+          <a:ln xmlns:a="http://schemas.openxmlformats.org/drawingml/2006/main" w="0">
+            <a:noFill/>
+            <a:prstDash val="solid"/>
+          </a:ln>
+        </p:spPr>
+        <p:txBody>
+          <a:bodyPr xmlns:a="http://schemas.openxmlformats.org/drawingml/2006/main" anchor="t"/>
+          <a:lstStyle xmlns:a="http://schemas.openxmlformats.org/drawingml/2006/main"/>
+          <a:p xmlns:a="http://schemas.openxmlformats.org/drawingml/2006/main">
+            <a:pPr algn="l">
+              <a:buNone/>
+              <a:defRPr sz="2025" b="1">
+                <a:solidFill>
+                  <a:srgbClr val="52616B"/>
+                </a:solidFill>
+                <a:latin typeface="Arial"/>
+                <a:ea typeface="Arial"/>
+                <a:cs typeface="Arial"/>
+              </a:defRPr>
+            </a:pPr>
+            <a:r>
+              <a:rPr sz="2025" b="1">
+                <a:solidFill>
+                  <a:srgbClr val="52616B"/>
+                </a:solidFill>
+                <a:latin typeface="Arial"/>
+                <a:ea typeface="Arial"/>
+                <a:cs typeface="Arial"/>
+              </a:rPr>
+              <a:t>Next question</a:t>
+            </a:r>
+          </a:p>
+        </p:txBody>
+      </p:sp>
+      <p:sp>
+        <p:nvSpPr>
+          <p:cNvPr id="13" name="">
+            <a:extLst xmlns:a="http://schemas.openxmlformats.org/drawingml/2006/main">
+              <a:ext uri="{FF2B5EF4-FFF2-40B4-BE49-F238E27FC236}">
+                <a16:creationId xmlns:a16="http://schemas.microsoft.com/office/drawing/2014/main" id="{7D88D2F7-BBA9-4B06-83BF-EF6C40360B55}"/>
+              </a:ext>
+            </a:extLst>
+          </p:cNvPr>
+          <p:cNvSpPr>
+            <a:spLocks xmlns:a="http://schemas.openxmlformats.org/drawingml/2006/main" noGrp="1"/>
+          </p:cNvSpPr>
+          <p:nvPr/>
+        </p:nvSpPr>
+        <p:spPr>
+          <a:xfrm xmlns:a="http://schemas.openxmlformats.org/drawingml/2006/main">
+            <a:off x="3276600" y="4533900"/>
+            <a:ext cx="7772400" cy="647700"/>
+          </a:xfrm>
+          <a:prstGeom xmlns:a="http://schemas.openxmlformats.org/drawingml/2006/main" prst="rect">
+            <a:avLst/>
+          </a:prstGeom>
+          <a:noFill xmlns:a="http://schemas.openxmlformats.org/drawingml/2006/main"/>
+          <a:ln xmlns:a="http://schemas.openxmlformats.org/drawingml/2006/main" w="0">
+            <a:noFill/>
+            <a:prstDash val="solid"/>
+          </a:ln>
+        </p:spPr>
+        <p:txBody>
+          <a:bodyPr xmlns:a="http://schemas.openxmlformats.org/drawingml/2006/main" anchor="t"/>
+          <a:lstStyle xmlns:a="http://schemas.openxmlformats.org/drawingml/2006/main"/>
+          <a:p xmlns:a="http://schemas.openxmlformats.org/drawingml/2006/main">
+            <a:pPr algn="l">
+              <a:buNone/>
+              <a:defRPr sz="1725" b="0">
+                <a:solidFill>
+                  <a:srgbClr val="101820"/>
+                </a:solidFill>
+                <a:latin typeface="Arial"/>
+                <a:ea typeface="Arial"/>
+                <a:cs typeface="Arial"/>
+              </a:defRPr>
+            </a:pPr>
+            <a:r>
+              <a:rPr sz="1725" b="0">
+                <a:solidFill>
+                  <a:srgbClr val="101820"/>
+                </a:solidFill>
+                <a:latin typeface="Arial"/>
+                <a:ea typeface="Arial"/>
+                <a:cs typeface="Arial"/>
+              </a:rPr>
+              <a:t>Test cross-sector substitution with breadth-preserving top-N—or compare simpler risk controls.</a:t>
+            </a:r>
+          </a:p>
+        </p:txBody>
+      </p:sp>
+      <p:sp>
+        <p:nvSpPr>
+          <p:cNvPr id="14" name="">
+            <a:extLst xmlns:a="http://schemas.openxmlformats.org/drawingml/2006/main">
+              <a:ext uri="{FF2B5EF4-FFF2-40B4-BE49-F238E27FC236}">
+                <a16:creationId xmlns:a16="http://schemas.microsoft.com/office/drawing/2014/main" id="{F7E3D076-54D1-4B3D-8F4A-D11630B25FFC}"/>
+              </a:ext>
+            </a:extLst>
+          </p:cNvPr>
+          <p:cNvSpPr>
+            <a:spLocks xmlns:a="http://schemas.openxmlformats.org/drawingml/2006/main" noGrp="1"/>
+          </p:cNvSpPr>
+          <p:nvPr/>
+        </p:nvSpPr>
+        <p:spPr>
+          <a:xfrm xmlns:a="http://schemas.openxmlformats.org/drawingml/2006/main">
+            <a:off x="2114550" y="5753100"/>
+            <a:ext cx="7962900" cy="495300"/>
+          </a:xfrm>
+          <a:prstGeom xmlns:a="http://schemas.openxmlformats.org/drawingml/2006/main" prst="rect">
+            <a:avLst/>
+          </a:prstGeom>
+          <a:solidFill xmlns:a="http://schemas.openxmlformats.org/drawingml/2006/main">
+            <a:srgbClr val="EAF5FB"/>
+          </a:solidFill>
+          <a:ln xmlns:a="http://schemas.openxmlformats.org/drawingml/2006/main" w="9525">
+            <a:solidFill>
+              <a:srgbClr val="6DCBF4"/>
+            </a:solidFill>
+            <a:prstDash val="solid"/>
+          </a:ln>
+        </p:spPr>
+      </p:sp>
+      <p:sp>
+        <p:nvSpPr>
+          <p:cNvPr id="15" name="">
+            <a:extLst xmlns:a="http://schemas.openxmlformats.org/drawingml/2006/main">
+              <a:ext uri="{FF2B5EF4-FFF2-40B4-BE49-F238E27FC236}">
+                <a16:creationId xmlns:a16="http://schemas.microsoft.com/office/drawing/2014/main" id="{FF7807EE-5E9A-4AC4-A3F2-FA1CED7A80A8}"/>
+              </a:ext>
+            </a:extLst>
+          </p:cNvPr>
+          <p:cNvSpPr>
+            <a:spLocks xmlns:a="http://schemas.openxmlformats.org/drawingml/2006/main" noGrp="1"/>
+          </p:cNvSpPr>
+          <p:nvPr/>
+        </p:nvSpPr>
+        <p:spPr>
+          <a:xfrm xmlns:a="http://schemas.openxmlformats.org/drawingml/2006/main">
+            <a:off x="2343150" y="5753100"/>
+            <a:ext cx="7505700" cy="457200"/>
+          </a:xfrm>
+          <a:prstGeom xmlns:a="http://schemas.openxmlformats.org/drawingml/2006/main" prst="rect">
+            <a:avLst/>
+          </a:prstGeom>
+          <a:noFill xmlns:a="http://schemas.openxmlformats.org/drawingml/2006/main"/>
+          <a:ln xmlns:a="http://schemas.openxmlformats.org/drawingml/2006/main" w="0">
+            <a:noFill/>
+            <a:prstDash val="solid"/>
+          </a:ln>
+        </p:spPr>
+        <p:txBody>
+          <a:bodyPr xmlns:a="http://schemas.openxmlformats.org/drawingml/2006/main" anchor="t"/>
+          <a:lstStyle xmlns:a="http://schemas.openxmlformats.org/drawingml/2006/main"/>
+          <a:p xmlns:a="http://schemas.openxmlformats.org/drawingml/2006/main">
+            <a:pPr algn="ctr">
+              <a:buNone/>
+              <a:defRPr sz="1350" b="1">
+                <a:solidFill>
+                  <a:srgbClr val="3D8DFF"/>
+                </a:solidFill>
+                <a:latin typeface="Arial"/>
+                <a:ea typeface="Arial"/>
+                <a:cs typeface="Arial"/>
+              </a:defRPr>
+            </a:pPr>
+            <a:r>
+              <a:rPr sz="1350" b="1">
+                <a:solidFill>
+                  <a:srgbClr val="3D8DFF"/>
+                </a:solidFill>
+                <a:latin typeface="Arial"/>
+                <a:ea typeface="Arial"/>
+                <a:cs typeface="Arial"/>
+              </a:rPr>
+              <a:t>Huddle before opening either gate; do not search for a basket that turns green.</a:t>
+            </a:r>
+          </a:p>
+        </p:txBody>
+      </p:sp>
+    </p:spTree>
+    <p:extLst>
+      <p:ext uri="{BB962C8B-B14F-4D97-AF65-F5344CB8AC3E}">
+        <p14:creationId xmlns:p14="http://schemas.microsoft.com/office/powerpoint/2010/main" val="733918031"/>
       </p:ext>
     </p:extLst>
   </p:cSld>

--- a/literature_studies/presentations/gen5_lit_mom_03_1_dual_momentum_study.pptx
+++ b/literature_studies/presentations/gen5_lit_mom_03_1_dual_momentum_study.pptx
@@ -2,42 +2,48 @@
 <file path=ppt/presentation.xml><?xml version="1.0" encoding="utf-8"?>
 <p:presentation xmlns:p="http://schemas.openxmlformats.org/presentationml/2006/main">
   <p:sldMasterIdLst>
-    <p:sldMasterId xmlns:r="http://schemas.openxmlformats.org/officeDocument/2006/relationships" id="2147483648" r:id="Rb5e94ffe28194d38"/>
+    <p:sldMasterId xmlns:r="http://schemas.openxmlformats.org/officeDocument/2006/relationships" id="2147483648" r:id="R452aca07d3bd4ada"/>
   </p:sldMasterIdLst>
   <p:notesMasterIdLst>
-    <p:notesMasterId xmlns:r="http://schemas.openxmlformats.org/officeDocument/2006/relationships" r:id="R19394660097e453b"/>
+    <p:notesMasterId xmlns:r="http://schemas.openxmlformats.org/officeDocument/2006/relationships" r:id="R5398887062e34f81"/>
   </p:notesMasterIdLst>
   <p:sldIdLst>
-    <p:sldId xmlns:r="http://schemas.openxmlformats.org/officeDocument/2006/relationships" id="256" r:id="Rff16d336a36b4d07"/>
-    <p:sldId xmlns:r="http://schemas.openxmlformats.org/officeDocument/2006/relationships" id="257" r:id="R7e0bff10a1f443bc"/>
-    <p:sldId xmlns:r="http://schemas.openxmlformats.org/officeDocument/2006/relationships" id="258" r:id="R15f26f5cd1d049f3"/>
-    <p:sldId xmlns:r="http://schemas.openxmlformats.org/officeDocument/2006/relationships" id="259" r:id="R283d69e17d4844b6"/>
-    <p:sldId xmlns:r="http://schemas.openxmlformats.org/officeDocument/2006/relationships" id="260" r:id="R306f4e653e1c416d"/>
-    <p:sldId xmlns:r="http://schemas.openxmlformats.org/officeDocument/2006/relationships" id="261" r:id="Refd33f11af484a87"/>
-    <p:sldId xmlns:r="http://schemas.openxmlformats.org/officeDocument/2006/relationships" id="262" r:id="Ra5a11fca8c204178"/>
-    <p:sldId xmlns:r="http://schemas.openxmlformats.org/officeDocument/2006/relationships" id="263" r:id="Raf4f29be857f4a70"/>
-    <p:sldId xmlns:r="http://schemas.openxmlformats.org/officeDocument/2006/relationships" id="264" r:id="R559ecea52e774177"/>
-    <p:sldId xmlns:r="http://schemas.openxmlformats.org/officeDocument/2006/relationships" id="265" r:id="Rc501f1f2f3594e4a"/>
-    <p:sldId xmlns:r="http://schemas.openxmlformats.org/officeDocument/2006/relationships" id="266" r:id="R69418494d56540d0"/>
-    <p:sldId xmlns:r="http://schemas.openxmlformats.org/officeDocument/2006/relationships" id="267" r:id="R930f4354dc9a49d8"/>
-    <p:sldId xmlns:r="http://schemas.openxmlformats.org/officeDocument/2006/relationships" id="268" r:id="R973e7b16ca5144a9"/>
-    <p:sldId xmlns:r="http://schemas.openxmlformats.org/officeDocument/2006/relationships" id="269" r:id="Raff26dbb5a3d42d6"/>
-    <p:sldId xmlns:r="http://schemas.openxmlformats.org/officeDocument/2006/relationships" id="270" r:id="R6e98f1f05a01477f"/>
-    <p:sldId xmlns:r="http://schemas.openxmlformats.org/officeDocument/2006/relationships" id="271" r:id="R7a2d649341a8453a"/>
-    <p:sldId xmlns:r="http://schemas.openxmlformats.org/officeDocument/2006/relationships" id="272" r:id="R05d80ee482ad4a38"/>
-    <p:sldId xmlns:r="http://schemas.openxmlformats.org/officeDocument/2006/relationships" id="273" r:id="R69b1ae7d29014257"/>
-    <p:sldId xmlns:r="http://schemas.openxmlformats.org/officeDocument/2006/relationships" id="274" r:id="Ra981aad52a7c4bdd"/>
-    <p:sldId xmlns:r="http://schemas.openxmlformats.org/officeDocument/2006/relationships" id="275" r:id="Rb7d797d782ab43f1"/>
-    <p:sldId xmlns:r="http://schemas.openxmlformats.org/officeDocument/2006/relationships" id="276" r:id="R0b6d5e8ead504e71"/>
-    <p:sldId xmlns:r="http://schemas.openxmlformats.org/officeDocument/2006/relationships" id="277" r:id="Rec7a265a76424cf4"/>
-    <p:sldId xmlns:r="http://schemas.openxmlformats.org/officeDocument/2006/relationships" id="278" r:id="Rfa221f685c174be9"/>
-    <p:sldId xmlns:r="http://schemas.openxmlformats.org/officeDocument/2006/relationships" id="279" r:id="R6a0fa6d36ade48e2"/>
-    <p:sldId xmlns:r="http://schemas.openxmlformats.org/officeDocument/2006/relationships" id="280" r:id="R5a05494894cb43f7"/>
-    <p:sldId xmlns:r="http://schemas.openxmlformats.org/officeDocument/2006/relationships" id="281" r:id="R5e49ccab04054e27"/>
-    <p:sldId xmlns:r="http://schemas.openxmlformats.org/officeDocument/2006/relationships" id="282" r:id="Ra47cda2131bf46f8"/>
-    <p:sldId xmlns:r="http://schemas.openxmlformats.org/officeDocument/2006/relationships" id="283" r:id="Reb2f54dde43b4829"/>
-    <p:sldId xmlns:r="http://schemas.openxmlformats.org/officeDocument/2006/relationships" id="284" r:id="R3fb9934cd90a4a1e"/>
-    <p:sldId xmlns:r="http://schemas.openxmlformats.org/officeDocument/2006/relationships" id="285" r:id="R79896a76c1b94168"/>
+    <p:sldId xmlns:r="http://schemas.openxmlformats.org/officeDocument/2006/relationships" id="256" r:id="R34744291ae0c4ca5"/>
+    <p:sldId xmlns:r="http://schemas.openxmlformats.org/officeDocument/2006/relationships" id="257" r:id="Rd0c17c56c4454b68"/>
+    <p:sldId xmlns:r="http://schemas.openxmlformats.org/officeDocument/2006/relationships" id="258" r:id="R59fb01be733d4a01"/>
+    <p:sldId xmlns:r="http://schemas.openxmlformats.org/officeDocument/2006/relationships" id="259" r:id="Rd27a63f694524110"/>
+    <p:sldId xmlns:r="http://schemas.openxmlformats.org/officeDocument/2006/relationships" id="260" r:id="R5c31461b9fb3437a"/>
+    <p:sldId xmlns:r="http://schemas.openxmlformats.org/officeDocument/2006/relationships" id="261" r:id="Ra0d3e3cadcae4a20"/>
+    <p:sldId xmlns:r="http://schemas.openxmlformats.org/officeDocument/2006/relationships" id="262" r:id="R18feca65b22546cd"/>
+    <p:sldId xmlns:r="http://schemas.openxmlformats.org/officeDocument/2006/relationships" id="263" r:id="Rbb8f2409a0764b54"/>
+    <p:sldId xmlns:r="http://schemas.openxmlformats.org/officeDocument/2006/relationships" id="264" r:id="R5ef8e54a009c4958"/>
+    <p:sldId xmlns:r="http://schemas.openxmlformats.org/officeDocument/2006/relationships" id="265" r:id="Rd68f6f5e5d5b4b96"/>
+    <p:sldId xmlns:r="http://schemas.openxmlformats.org/officeDocument/2006/relationships" id="266" r:id="R66227e80039a4d12"/>
+    <p:sldId xmlns:r="http://schemas.openxmlformats.org/officeDocument/2006/relationships" id="267" r:id="R9915446f4dae4dfa"/>
+    <p:sldId xmlns:r="http://schemas.openxmlformats.org/officeDocument/2006/relationships" id="268" r:id="R27596bde4d3d4855"/>
+    <p:sldId xmlns:r="http://schemas.openxmlformats.org/officeDocument/2006/relationships" id="269" r:id="R7e63df874f234de4"/>
+    <p:sldId xmlns:r="http://schemas.openxmlformats.org/officeDocument/2006/relationships" id="270" r:id="Rdb51deb2678b4270"/>
+    <p:sldId xmlns:r="http://schemas.openxmlformats.org/officeDocument/2006/relationships" id="271" r:id="R40123121d6804d5b"/>
+    <p:sldId xmlns:r="http://schemas.openxmlformats.org/officeDocument/2006/relationships" id="272" r:id="R2be7ba6de8624284"/>
+    <p:sldId xmlns:r="http://schemas.openxmlformats.org/officeDocument/2006/relationships" id="273" r:id="R956277b4457244eb"/>
+    <p:sldId xmlns:r="http://schemas.openxmlformats.org/officeDocument/2006/relationships" id="274" r:id="Ra8c52c0e979a4d1b"/>
+    <p:sldId xmlns:r="http://schemas.openxmlformats.org/officeDocument/2006/relationships" id="275" r:id="R5bba197afb474c0b"/>
+    <p:sldId xmlns:r="http://schemas.openxmlformats.org/officeDocument/2006/relationships" id="276" r:id="R1e8b41d4f5df4b11"/>
+    <p:sldId xmlns:r="http://schemas.openxmlformats.org/officeDocument/2006/relationships" id="277" r:id="R3a5e1e98a46944cb"/>
+    <p:sldId xmlns:r="http://schemas.openxmlformats.org/officeDocument/2006/relationships" id="278" r:id="Refe9f88e7a674cda"/>
+    <p:sldId xmlns:r="http://schemas.openxmlformats.org/officeDocument/2006/relationships" id="279" r:id="Rd55825d4b71e4bed"/>
+    <p:sldId xmlns:r="http://schemas.openxmlformats.org/officeDocument/2006/relationships" id="280" r:id="R0383d1ecd3d248f5"/>
+    <p:sldId xmlns:r="http://schemas.openxmlformats.org/officeDocument/2006/relationships" id="281" r:id="Rdbad2402349f4c67"/>
+    <p:sldId xmlns:r="http://schemas.openxmlformats.org/officeDocument/2006/relationships" id="282" r:id="R16145194aca64807"/>
+    <p:sldId xmlns:r="http://schemas.openxmlformats.org/officeDocument/2006/relationships" id="283" r:id="R9221937ee04c4652"/>
+    <p:sldId xmlns:r="http://schemas.openxmlformats.org/officeDocument/2006/relationships" id="284" r:id="R8a5238db087f4a92"/>
+    <p:sldId xmlns:r="http://schemas.openxmlformats.org/officeDocument/2006/relationships" id="285" r:id="Rf71e4010f28d44ec"/>
+    <p:sldId xmlns:r="http://schemas.openxmlformats.org/officeDocument/2006/relationships" id="286" r:id="R72ccad4d2d6c4b87"/>
+    <p:sldId xmlns:r="http://schemas.openxmlformats.org/officeDocument/2006/relationships" id="287" r:id="Rfff5e6a928274002"/>
+    <p:sldId xmlns:r="http://schemas.openxmlformats.org/officeDocument/2006/relationships" id="288" r:id="Rab7bc5cc01d24027"/>
+    <p:sldId xmlns:r="http://schemas.openxmlformats.org/officeDocument/2006/relationships" id="289" r:id="Raeb83d4b13ea44cf"/>
+    <p:sldId xmlns:r="http://schemas.openxmlformats.org/officeDocument/2006/relationships" id="290" r:id="R8783f5640bff45e0"/>
+    <p:sldId xmlns:r="http://schemas.openxmlformats.org/officeDocument/2006/relationships" id="291" r:id="R7646cf8fa22d4ee7"/>
   </p:sldIdLst>
   <p:sldSz cx="12192000" cy="6858000"/>
   <p:notesSz cx="6858000" cy="9144000"/>
@@ -471,7 +477,7 @@
           <a:lstStyle xmlns:a="http://schemas.openxmlformats.org/drawingml/2006/main"/>
           <a:p xmlns:a="http://schemas.openxmlformats.org/drawingml/2006/main">
             <a:r>
-              <a:t>This deck now records the literature hypothesis, mechanics proof, retrospective nine-ETF replay, and descriptive transport POCs across a sector-ETF fleet and eleven static stock-sector fleets. The stock results are survivor-biased and the deck grants no forward authority.</a:t>
+              <a:t>This deck now records the literature hypothesis, mechanics proof, nine-ETF replay, universe-transport POCs, and the 88-stock cross-sector competition POC. The stock universe is static and survivor-biased; no inference, robustness, forward authority, or edge claim is granted.</a:t>
             </a:r>
           </a:p>
           <a:p xmlns:a="http://schemas.openxmlformats.org/drawingml/2006/main">
@@ -496,17 +502,17 @@
           </a:p>
           <a:p xmlns:a="http://schemas.openxmlformats.org/drawingml/2006/main">
             <a:r>
-              <a:t>- C:/Users/Franc/OneDrive/Documents/Francis/Peltata Project/Time-Series-Modeling-Gen5/literature_studies/docs/GEN5_LIT_MOM_03_2_UNIVERSE_TRANSPORT_RESULTS.md</a:t>
-            </a:r>
-          </a:p>
-          <a:p xmlns:a="http://schemas.openxmlformats.org/drawingml/2006/main">
-            <a:r>
-              <a:t>- C:/Users/Franc/OneDrive/Documents/Francis/Peltata Project/Time-Series-Modeling-Gen5/runs/research_workbench/literature_grounded/lit_mom_03_2_universe_transport_20260903/mom032_report.md</a:t>
-            </a:r>
-          </a:p>
-          <a:p xmlns:a="http://schemas.openxmlformats.org/drawingml/2006/main">
-            <a:r>
-              <a:t>- Codex task conversation, 2026-09-03 (operator approval and transport interpretation)</a:t>
+              <a:t>- C:/Users/Franc/OneDrive/Documents/Francis/Peltata Project/Time-Series-Modeling-Gen5/literature_studies/docs/GEN5_LIT_MOM_03_3_BROAD_STOCK_FLEET_RESULTS.md</a:t>
+            </a:r>
+          </a:p>
+          <a:p xmlns:a="http://schemas.openxmlformats.org/drawingml/2006/main">
+            <a:r>
+              <a:t>- C:/Users/Franc/OneDrive/Documents/Francis/Peltata Project/Time-Series-Modeling-Gen5/runs/research_workbench/literature_grounded/lit_mom_03_3_broad_stock_fleet_20260903/mom033_report.md</a:t>
+            </a:r>
+          </a:p>
+          <a:p xmlns:a="http://schemas.openxmlformats.org/drawingml/2006/main">
+            <a:r>
+              <a:t>- Codex task conversation, 2026-09-03 (operator approval and broad-fleet interpretation)</a:t>
             </a:r>
           </a:p>
           <a:p xmlns:a="http://schemas.openxmlformats.org/drawingml/2006/main">
@@ -3002,6 +3008,711 @@
           <a:p xmlns:a="http://schemas.openxmlformats.org/drawingml/2006/main">
             <a:r>
               <a:t>- Codex task conversation, 2026-09-03 (operator approval and transport interpretation)</a:t>
+            </a:r>
+          </a:p>
+          <a:p xmlns:a="http://schemas.openxmlformats.org/drawingml/2006/main">
+            <a:r>
+              <a:t>[/Sources]</a:t>
+            </a:r>
+          </a:p>
+        </p:txBody>
+      </p:sp>
+      <p:sp>
+        <p:nvSpPr>
+          <p:cNvPr id="4" name="Slide Number Placeholder 3"/>
+          <p:cNvSpPr>
+            <a:spLocks xmlns:a="http://schemas.openxmlformats.org/drawingml/2006/main" noGrp="1"/>
+          </p:cNvSpPr>
+          <p:nvPr>
+            <p:ph type="sldNum" idx="5"/>
+          </p:nvPr>
+        </p:nvSpPr>
+        <p:spPr/>
+        <p:txBody>
+          <a:bodyPr xmlns:a="http://schemas.openxmlformats.org/drawingml/2006/main"/>
+          <a:lstStyle xmlns:a="http://schemas.openxmlformats.org/drawingml/2006/main"/>
+          <a:p xmlns:a="http://schemas.openxmlformats.org/drawingml/2006/main"/>
+        </p:txBody>
+      </p:sp>
+    </p:spTree>
+  </p:cSld>
+  <p:clrMapOvr>
+    <a:masterClrMapping xmlns:a="http://schemas.openxmlformats.org/drawingml/2006/main"/>
+  </p:clrMapOvr>
+</p:notes>
+</file>
+
+<file path=ppt/notesSlides/notesSlide31.xml><?xml version="1.0" encoding="utf-8"?>
+<p:notes xmlns:p="http://schemas.openxmlformats.org/presentationml/2006/main">
+  <p:cSld>
+    <p:spTree>
+      <p:nvGrpSpPr>
+        <p:cNvPr id="1" name=""/>
+        <p:cNvGrpSpPr/>
+        <p:nvPr/>
+      </p:nvGrpSpPr>
+      <p:grpSpPr>
+        <a:xfrm xmlns:a="http://schemas.openxmlformats.org/drawingml/2006/main"/>
+      </p:grpSpPr>
+      <p:sp>
+        <p:nvSpPr>
+          <p:cNvPr id="2" name="Slide Image Placeholder 1"/>
+          <p:cNvSpPr>
+            <a:spLocks xmlns:a="http://schemas.openxmlformats.org/drawingml/2006/main" noGrp="1"/>
+          </p:cNvSpPr>
+          <p:nvPr>
+            <p:ph type="sldImg" idx="0"/>
+          </p:nvPr>
+        </p:nvSpPr>
+        <p:spPr/>
+      </p:sp>
+      <p:sp>
+        <p:nvSpPr>
+          <p:cNvPr id="3" name="Notes Placeholder 2"/>
+          <p:cNvSpPr>
+            <a:spLocks xmlns:a="http://schemas.openxmlformats.org/drawingml/2006/main" noGrp="1"/>
+          </p:cNvSpPr>
+          <p:nvPr>
+            <p:ph type="body" idx="1"/>
+          </p:nvPr>
+        </p:nvSpPr>
+        <p:spPr/>
+        <p:txBody>
+          <a:bodyPr xmlns:a="http://schemas.openxmlformats.org/drawingml/2006/main"/>
+          <a:lstStyle xmlns:a="http://schemas.openxmlformats.org/drawingml/2006/main"/>
+          <a:p xmlns:a="http://schemas.openxmlformats.org/drawingml/2006/main">
+            <a:r>
+              <a:t>LIT-MOM-03.3 changes the competition structure rather than curating a new winning basket. All 88 pre-existing atlas stocks compete together. Relative-only exceeds equal-weight 88 by 0.90 CAGR points, the first positive ranking-versus-fleet point estimate in this transport sequence.</a:t>
+            </a:r>
+          </a:p>
+          <a:p xmlns:a="http://schemas.openxmlformats.org/drawingml/2006/main">
+            <a:r>
+              <a:t/>
+            </a:r>
+          </a:p>
+          <a:p xmlns:a="http://schemas.openxmlformats.org/drawingml/2006/main">
+            <a:r>
+              <a:t>[Sources]</a:t>
+            </a:r>
+          </a:p>
+          <a:p xmlns:a="http://schemas.openxmlformats.org/drawingml/2006/main">
+            <a:r>
+              <a:t>- C:/Users/Franc/OneDrive/Documents/Francis/Peltata Project/Time-Series-Modeling-Gen5/runs/research_workbench/literature_grounded/lit_mom_03_3_broad_stock_fleet_20260903/mom033_report.md</a:t>
+            </a:r>
+          </a:p>
+          <a:p xmlns:a="http://schemas.openxmlformats.org/drawingml/2006/main">
+            <a:r>
+              <a:t>- C:/Users/Franc/OneDrive/Documents/Francis/Peltata Project/Time-Series-Modeling-Gen5/runs/research_workbench/literature_grounded/lit_mom_03_3_broad_stock_fleet_20260903/mom033_broad_fleet_summary.csv</a:t>
+            </a:r>
+          </a:p>
+          <a:p xmlns:a="http://schemas.openxmlformats.org/drawingml/2006/main">
+            <a:r>
+              <a:t>- C:/Users/Franc/OneDrive/Documents/Francis/Peltata Project/Time-Series-Modeling-Gen5/runs/research_workbench/literature_grounded/lit_mom_03_3_broad_stock_fleet_20260903/mom033_portfolio_metrics.csv</a:t>
+            </a:r>
+          </a:p>
+          <a:p xmlns:a="http://schemas.openxmlformats.org/drawingml/2006/main">
+            <a:r>
+              <a:t>- C:/Users/Franc/OneDrive/Documents/Francis/Peltata Project/Time-Series-Modeling-Gen5/runs/research_workbench/literature_grounded/lit_mom_03_3_broad_stock_fleet_20260903/mom033_universe_registry.csv</a:t>
+            </a:r>
+          </a:p>
+          <a:p xmlns:a="http://schemas.openxmlformats.org/drawingml/2006/main">
+            <a:r>
+              <a:t>- C:/Users/Franc/OneDrive/Documents/Francis/Peltata Project/Time-Series-Modeling-Gen5/literature_studies/R/gen5_lit_mom_03_3_broad_stock_fleet.R</a:t>
+            </a:r>
+          </a:p>
+          <a:p xmlns:a="http://schemas.openxmlformats.org/drawingml/2006/main">
+            <a:r>
+              <a:t>- C:/Users/Franc/OneDrive/Documents/Francis/Peltata Project/Time-Series-Modeling-Gen5/literature_studies/scripts/run_gen5_lit_mom_03_3_broad_stock_fleet.R</a:t>
+            </a:r>
+          </a:p>
+          <a:p xmlns:a="http://schemas.openxmlformats.org/drawingml/2006/main">
+            <a:r>
+              <a:t>- Codex task conversation, 2026-09-03 (operator approval and broad-fleet interpretation)</a:t>
+            </a:r>
+          </a:p>
+          <a:p xmlns:a="http://schemas.openxmlformats.org/drawingml/2006/main">
+            <a:r>
+              <a:t>[/Sources]</a:t>
+            </a:r>
+          </a:p>
+        </p:txBody>
+      </p:sp>
+      <p:sp>
+        <p:nvSpPr>
+          <p:cNvPr id="4" name="Slide Number Placeholder 3"/>
+          <p:cNvSpPr>
+            <a:spLocks xmlns:a="http://schemas.openxmlformats.org/drawingml/2006/main" noGrp="1"/>
+          </p:cNvSpPr>
+          <p:nvPr>
+            <p:ph type="sldNum" idx="5"/>
+          </p:nvPr>
+        </p:nvSpPr>
+        <p:spPr/>
+        <p:txBody>
+          <a:bodyPr xmlns:a="http://schemas.openxmlformats.org/drawingml/2006/main"/>
+          <a:lstStyle xmlns:a="http://schemas.openxmlformats.org/drawingml/2006/main"/>
+          <a:p xmlns:a="http://schemas.openxmlformats.org/drawingml/2006/main"/>
+        </p:txBody>
+      </p:sp>
+    </p:spTree>
+  </p:cSld>
+  <p:clrMapOvr>
+    <a:masterClrMapping xmlns:a="http://schemas.openxmlformats.org/drawingml/2006/main"/>
+  </p:clrMapOvr>
+</p:notes>
+</file>
+
+<file path=ppt/notesSlides/notesSlide32.xml><?xml version="1.0" encoding="utf-8"?>
+<p:notes xmlns:p="http://schemas.openxmlformats.org/presentationml/2006/main">
+  <p:cSld>
+    <p:spTree>
+      <p:nvGrpSpPr>
+        <p:cNvPr id="1" name=""/>
+        <p:cNvGrpSpPr/>
+        <p:nvPr/>
+      </p:nvGrpSpPr>
+      <p:grpSpPr>
+        <a:xfrm xmlns:a="http://schemas.openxmlformats.org/drawingml/2006/main"/>
+      </p:grpSpPr>
+      <p:sp>
+        <p:nvSpPr>
+          <p:cNvPr id="2" name="Slide Image Placeholder 1"/>
+          <p:cNvSpPr>
+            <a:spLocks xmlns:a="http://schemas.openxmlformats.org/drawingml/2006/main" noGrp="1"/>
+          </p:cNvSpPr>
+          <p:nvPr>
+            <p:ph type="sldImg" idx="0"/>
+          </p:nvPr>
+        </p:nvSpPr>
+        <p:spPr/>
+      </p:sp>
+      <p:sp>
+        <p:nvSpPr>
+          <p:cNvPr id="3" name="Notes Placeholder 2"/>
+          <p:cNvSpPr>
+            <a:spLocks xmlns:a="http://schemas.openxmlformats.org/drawingml/2006/main" noGrp="1"/>
+          </p:cNvSpPr>
+          <p:nvPr>
+            <p:ph type="body" idx="1"/>
+          </p:nvPr>
+        </p:nvSpPr>
+        <p:spPr/>
+        <p:txBody>
+          <a:bodyPr xmlns:a="http://schemas.openxmlformats.org/drawingml/2006/main"/>
+          <a:lstStyle xmlns:a="http://schemas.openxmlformats.org/drawingml/2006/main"/>
+          <a:p xmlns:a="http://schemas.openxmlformats.org/drawingml/2006/main">
+            <a:r>
+              <a:t>The source selects three of nine names in each sleeve. Multiplying that one-third fraction by 88 and freezing 29 preserves selection breadth without opening a top-N search. Signals, timing, allocation, costs, and controls are otherwise unchanged.</a:t>
+            </a:r>
+          </a:p>
+          <a:p xmlns:a="http://schemas.openxmlformats.org/drawingml/2006/main">
+            <a:r>
+              <a:t/>
+            </a:r>
+          </a:p>
+          <a:p xmlns:a="http://schemas.openxmlformats.org/drawingml/2006/main">
+            <a:r>
+              <a:t>[Sources]</a:t>
+            </a:r>
+          </a:p>
+          <a:p xmlns:a="http://schemas.openxmlformats.org/drawingml/2006/main">
+            <a:r>
+              <a:t>- C:/Users/Franc/OneDrive/Documents/Francis/Peltata Project/Time-Series-Modeling-Gen5/runs/research_workbench/literature_grounded/lit_mom_03_3_broad_stock_fleet_20260903/mom033_report.md</a:t>
+            </a:r>
+          </a:p>
+          <a:p xmlns:a="http://schemas.openxmlformats.org/drawingml/2006/main">
+            <a:r>
+              <a:t>- C:/Users/Franc/OneDrive/Documents/Francis/Peltata Project/Time-Series-Modeling-Gen5/runs/research_workbench/literature_grounded/lit_mom_03_3_broad_stock_fleet_20260903/mom033_broad_fleet_summary.csv</a:t>
+            </a:r>
+          </a:p>
+          <a:p xmlns:a="http://schemas.openxmlformats.org/drawingml/2006/main">
+            <a:r>
+              <a:t>- C:/Users/Franc/OneDrive/Documents/Francis/Peltata Project/Time-Series-Modeling-Gen5/runs/research_workbench/literature_grounded/lit_mom_03_3_broad_stock_fleet_20260903/mom033_universe_registry.csv</a:t>
+            </a:r>
+          </a:p>
+          <a:p xmlns:a="http://schemas.openxmlformats.org/drawingml/2006/main">
+            <a:r>
+              <a:t>- C:/Users/Franc/OneDrive/Documents/Francis/Peltata Project/Time-Series-Modeling-Gen5/operator_hypothesis_lab/registries/return_geometry_wide_atlas.csv</a:t>
+            </a:r>
+          </a:p>
+          <a:p xmlns:a="http://schemas.openxmlformats.org/drawingml/2006/main">
+            <a:r>
+              <a:t>- C:/Users/Franc/OneDrive/Documents/Francis/Peltata Project/Time-Series-Modeling-Gen5/literature_studies/R/gen5_lit_mom_03_3_broad_stock_fleet.R</a:t>
+            </a:r>
+          </a:p>
+          <a:p xmlns:a="http://schemas.openxmlformats.org/drawingml/2006/main">
+            <a:r>
+              <a:t>- C:/Users/Franc/OneDrive/Documents/Francis/Peltata Project/Time-Series-Modeling-Gen5/literature_studies/scripts/run_gen5_lit_mom_03_3_broad_stock_fleet.R</a:t>
+            </a:r>
+          </a:p>
+          <a:p xmlns:a="http://schemas.openxmlformats.org/drawingml/2006/main">
+            <a:r>
+              <a:t>- Codex task conversation, 2026-09-03 (operator approval and broad-fleet interpretation)</a:t>
+            </a:r>
+          </a:p>
+          <a:p xmlns:a="http://schemas.openxmlformats.org/drawingml/2006/main">
+            <a:r>
+              <a:t>[/Sources]</a:t>
+            </a:r>
+          </a:p>
+        </p:txBody>
+      </p:sp>
+      <p:sp>
+        <p:nvSpPr>
+          <p:cNvPr id="4" name="Slide Number Placeholder 3"/>
+          <p:cNvSpPr>
+            <a:spLocks xmlns:a="http://schemas.openxmlformats.org/drawingml/2006/main" noGrp="1"/>
+          </p:cNvSpPr>
+          <p:nvPr>
+            <p:ph type="sldNum" idx="5"/>
+          </p:nvPr>
+        </p:nvSpPr>
+        <p:spPr/>
+        <p:txBody>
+          <a:bodyPr xmlns:a="http://schemas.openxmlformats.org/drawingml/2006/main"/>
+          <a:lstStyle xmlns:a="http://schemas.openxmlformats.org/drawingml/2006/main"/>
+          <a:p xmlns:a="http://schemas.openxmlformats.org/drawingml/2006/main"/>
+        </p:txBody>
+      </p:sp>
+    </p:spTree>
+  </p:cSld>
+  <p:clrMapOvr>
+    <a:masterClrMapping xmlns:a="http://schemas.openxmlformats.org/drawingml/2006/main"/>
+  </p:clrMapOvr>
+</p:notes>
+</file>
+
+<file path=ppt/notesSlides/notesSlide33.xml><?xml version="1.0" encoding="utf-8"?>
+<p:notes xmlns:p="http://schemas.openxmlformats.org/presentationml/2006/main">
+  <p:cSld>
+    <p:spTree>
+      <p:nvGrpSpPr>
+        <p:cNvPr id="1" name=""/>
+        <p:cNvGrpSpPr/>
+        <p:nvPr/>
+      </p:nvGrpSpPr>
+      <p:grpSpPr>
+        <a:xfrm xmlns:a="http://schemas.openxmlformats.org/drawingml/2006/main"/>
+      </p:grpSpPr>
+      <p:sp>
+        <p:nvSpPr>
+          <p:cNvPr id="2" name="Slide Image Placeholder 1"/>
+          <p:cNvSpPr>
+            <a:spLocks xmlns:a="http://schemas.openxmlformats.org/drawingml/2006/main" noGrp="1"/>
+          </p:cNvSpPr>
+          <p:nvPr>
+            <p:ph type="sldImg" idx="0"/>
+          </p:nvPr>
+        </p:nvSpPr>
+        <p:spPr/>
+      </p:sp>
+      <p:sp>
+        <p:nvSpPr>
+          <p:cNvPr id="3" name="Notes Placeholder 2"/>
+          <p:cNvSpPr>
+            <a:spLocks xmlns:a="http://schemas.openxmlformats.org/drawingml/2006/main" noGrp="1"/>
+          </p:cNvSpPr>
+          <p:nvPr>
+            <p:ph type="body" idx="1"/>
+          </p:nvPr>
+        </p:nvSpPr>
+        <p:spPr/>
+        <p:txBody>
+          <a:bodyPr xmlns:a="http://schemas.openxmlformats.org/drawingml/2006/main"/>
+          <a:lstStyle xmlns:a="http://schemas.openxmlformats.org/drawingml/2006/main"/>
+          <a:p xmlns:a="http://schemas.openxmlformats.org/drawingml/2006/main">
+            <a:r>
+              <a:t>Relative-only rotation finishes ahead of equal-weight ownership of all 88 stocks and SPY. The source dual-momentum path trails both relative-only and equal-weight near the end because the positive-return gate moves some capital to cash during recoveries.</a:t>
+            </a:r>
+          </a:p>
+          <a:p xmlns:a="http://schemas.openxmlformats.org/drawingml/2006/main">
+            <a:r>
+              <a:t/>
+            </a:r>
+          </a:p>
+          <a:p xmlns:a="http://schemas.openxmlformats.org/drawingml/2006/main">
+            <a:r>
+              <a:t>[Sources]</a:t>
+            </a:r>
+          </a:p>
+          <a:p xmlns:a="http://schemas.openxmlformats.org/drawingml/2006/main">
+            <a:r>
+              <a:t>- C:/Users/Franc/OneDrive/Documents/Francis/Peltata Project/Time-Series-Modeling-Gen5/runs/research_workbench/literature_grounded/lit_mom_03_3_broad_stock_fleet_20260903/mom033_report.md</a:t>
+            </a:r>
+          </a:p>
+          <a:p xmlns:a="http://schemas.openxmlformats.org/drawingml/2006/main">
+            <a:r>
+              <a:t>- C:/Users/Franc/OneDrive/Documents/Francis/Peltata Project/Time-Series-Modeling-Gen5/runs/research_workbench/literature_grounded/lit_mom_03_3_broad_stock_fleet_20260903/mom033_broad_fleet_summary.csv</a:t>
+            </a:r>
+          </a:p>
+          <a:p xmlns:a="http://schemas.openxmlformats.org/drawingml/2006/main">
+            <a:r>
+              <a:t>- C:/Users/Franc/OneDrive/Documents/Francis/Peltata Project/Time-Series-Modeling-Gen5/runs/research_workbench/literature_grounded/lit_mom_03_3_broad_stock_fleet_20260903/mom033_portfolio_metrics.csv</a:t>
+            </a:r>
+          </a:p>
+          <a:p xmlns:a="http://schemas.openxmlformats.org/drawingml/2006/main">
+            <a:r>
+              <a:t>- C:/Users/Franc/OneDrive/Documents/Francis/Peltata Project/Time-Series-Modeling-Gen5/runs/research_workbench/literature_grounded/lit_mom_03_3_broad_stock_fleet_20260903/visuals/mom033_growth_of_one.png</a:t>
+            </a:r>
+          </a:p>
+          <a:p xmlns:a="http://schemas.openxmlformats.org/drawingml/2006/main">
+            <a:r>
+              <a:t>- Codex task conversation, 2026-09-03 (operator approval and broad-fleet interpretation)</a:t>
+            </a:r>
+          </a:p>
+          <a:p xmlns:a="http://schemas.openxmlformats.org/drawingml/2006/main">
+            <a:r>
+              <a:t>[/Sources]</a:t>
+            </a:r>
+          </a:p>
+        </p:txBody>
+      </p:sp>
+      <p:sp>
+        <p:nvSpPr>
+          <p:cNvPr id="4" name="Slide Number Placeholder 3"/>
+          <p:cNvSpPr>
+            <a:spLocks xmlns:a="http://schemas.openxmlformats.org/drawingml/2006/main" noGrp="1"/>
+          </p:cNvSpPr>
+          <p:nvPr>
+            <p:ph type="sldNum" idx="5"/>
+          </p:nvPr>
+        </p:nvSpPr>
+        <p:spPr/>
+        <p:txBody>
+          <a:bodyPr xmlns:a="http://schemas.openxmlformats.org/drawingml/2006/main"/>
+          <a:lstStyle xmlns:a="http://schemas.openxmlformats.org/drawingml/2006/main"/>
+          <a:p xmlns:a="http://schemas.openxmlformats.org/drawingml/2006/main"/>
+        </p:txBody>
+      </p:sp>
+    </p:spTree>
+  </p:cSld>
+  <p:clrMapOvr>
+    <a:masterClrMapping xmlns:a="http://schemas.openxmlformats.org/drawingml/2006/main"/>
+  </p:clrMapOvr>
+</p:notes>
+</file>
+
+<file path=ppt/notesSlides/notesSlide34.xml><?xml version="1.0" encoding="utf-8"?>
+<p:notes xmlns:p="http://schemas.openxmlformats.org/presentationml/2006/main">
+  <p:cSld>
+    <p:spTree>
+      <p:nvGrpSpPr>
+        <p:cNvPr id="1" name=""/>
+        <p:cNvGrpSpPr/>
+        <p:nvPr/>
+      </p:nvGrpSpPr>
+      <p:grpSpPr>
+        <a:xfrm xmlns:a="http://schemas.openxmlformats.org/drawingml/2006/main"/>
+      </p:grpSpPr>
+      <p:sp>
+        <p:nvSpPr>
+          <p:cNvPr id="2" name="Slide Image Placeholder 1"/>
+          <p:cNvSpPr>
+            <a:spLocks xmlns:a="http://schemas.openxmlformats.org/drawingml/2006/main" noGrp="1"/>
+          </p:cNvSpPr>
+          <p:nvPr>
+            <p:ph type="sldImg" idx="0"/>
+          </p:nvPr>
+        </p:nvSpPr>
+        <p:spPr/>
+      </p:sp>
+      <p:sp>
+        <p:nvSpPr>
+          <p:cNvPr id="3" name="Notes Placeholder 2"/>
+          <p:cNvSpPr>
+            <a:spLocks xmlns:a="http://schemas.openxmlformats.org/drawingml/2006/main" noGrp="1"/>
+          </p:cNvSpPr>
+          <p:nvPr>
+            <p:ph type="body" idx="1"/>
+          </p:nvPr>
+        </p:nvSpPr>
+        <p:spPr/>
+        <p:txBody>
+          <a:bodyPr xmlns:a="http://schemas.openxmlformats.org/drawingml/2006/main"/>
+          <a:lstStyle xmlns:a="http://schemas.openxmlformats.org/drawingml/2006/main"/>
+          <a:p xmlns:a="http://schemas.openxmlformats.org/drawingml/2006/main">
+            <a:r>
+              <a:t>The key attribution is relative-only versus equal-weight 88: ranking adds 0.90 CAGR points descriptively. Source versus relative-only isolates the positive-return gate: it costs 1.26 CAGR points while improving maximum drawdown by 3.74 points. The full source rule therefore ends 0.35 points below equal weight despite the ranking clue.</a:t>
+            </a:r>
+          </a:p>
+          <a:p xmlns:a="http://schemas.openxmlformats.org/drawingml/2006/main">
+            <a:r>
+              <a:t/>
+            </a:r>
+          </a:p>
+          <a:p xmlns:a="http://schemas.openxmlformats.org/drawingml/2006/main">
+            <a:r>
+              <a:t>[Sources]</a:t>
+            </a:r>
+          </a:p>
+          <a:p xmlns:a="http://schemas.openxmlformats.org/drawingml/2006/main">
+            <a:r>
+              <a:t>- C:/Users/Franc/OneDrive/Documents/Francis/Peltata Project/Time-Series-Modeling-Gen5/runs/research_workbench/literature_grounded/lit_mom_03_3_broad_stock_fleet_20260903/mom033_report.md</a:t>
+            </a:r>
+          </a:p>
+          <a:p xmlns:a="http://schemas.openxmlformats.org/drawingml/2006/main">
+            <a:r>
+              <a:t>- C:/Users/Franc/OneDrive/Documents/Francis/Peltata Project/Time-Series-Modeling-Gen5/runs/research_workbench/literature_grounded/lit_mom_03_3_broad_stock_fleet_20260903/mom033_broad_fleet_summary.csv</a:t>
+            </a:r>
+          </a:p>
+          <a:p xmlns:a="http://schemas.openxmlformats.org/drawingml/2006/main">
+            <a:r>
+              <a:t>- C:/Users/Franc/OneDrive/Documents/Francis/Peltata Project/Time-Series-Modeling-Gen5/runs/research_workbench/literature_grounded/lit_mom_03_3_broad_stock_fleet_20260903/mom033_portfolio_metrics.csv</a:t>
+            </a:r>
+          </a:p>
+          <a:p xmlns:a="http://schemas.openxmlformats.org/drawingml/2006/main">
+            <a:r>
+              <a:t>- C:/Users/Franc/OneDrive/Documents/Francis/Peltata Project/Time-Series-Modeling-Gen5/runs/research_workbench/literature_grounded/lit_mom_03_3_broad_stock_fleet_20260903/visuals/mom033_control_metrics.png</a:t>
+            </a:r>
+          </a:p>
+          <a:p xmlns:a="http://schemas.openxmlformats.org/drawingml/2006/main">
+            <a:r>
+              <a:t>- Codex task conversation, 2026-09-03 (operator approval and broad-fleet interpretation)</a:t>
+            </a:r>
+          </a:p>
+          <a:p xmlns:a="http://schemas.openxmlformats.org/drawingml/2006/main">
+            <a:r>
+              <a:t>[/Sources]</a:t>
+            </a:r>
+          </a:p>
+        </p:txBody>
+      </p:sp>
+      <p:sp>
+        <p:nvSpPr>
+          <p:cNvPr id="4" name="Slide Number Placeholder 3"/>
+          <p:cNvSpPr>
+            <a:spLocks xmlns:a="http://schemas.openxmlformats.org/drawingml/2006/main" noGrp="1"/>
+          </p:cNvSpPr>
+          <p:nvPr>
+            <p:ph type="sldNum" idx="5"/>
+          </p:nvPr>
+        </p:nvSpPr>
+        <p:spPr/>
+        <p:txBody>
+          <a:bodyPr xmlns:a="http://schemas.openxmlformats.org/drawingml/2006/main"/>
+          <a:lstStyle xmlns:a="http://schemas.openxmlformats.org/drawingml/2006/main"/>
+          <a:p xmlns:a="http://schemas.openxmlformats.org/drawingml/2006/main"/>
+        </p:txBody>
+      </p:sp>
+    </p:spTree>
+  </p:cSld>
+  <p:clrMapOvr>
+    <a:masterClrMapping xmlns:a="http://schemas.openxmlformats.org/drawingml/2006/main"/>
+  </p:clrMapOvr>
+</p:notes>
+</file>
+
+<file path=ppt/notesSlides/notesSlide35.xml><?xml version="1.0" encoding="utf-8"?>
+<p:notes xmlns:p="http://schemas.openxmlformats.org/presentationml/2006/main">
+  <p:cSld>
+    <p:spTree>
+      <p:nvGrpSpPr>
+        <p:cNvPr id="1" name=""/>
+        <p:cNvGrpSpPr/>
+        <p:nvPr/>
+      </p:nvGrpSpPr>
+      <p:grpSpPr>
+        <a:xfrm xmlns:a="http://schemas.openxmlformats.org/drawingml/2006/main"/>
+      </p:grpSpPr>
+      <p:sp>
+        <p:nvSpPr>
+          <p:cNvPr id="2" name="Slide Image Placeholder 1"/>
+          <p:cNvSpPr>
+            <a:spLocks xmlns:a="http://schemas.openxmlformats.org/drawingml/2006/main" noGrp="1"/>
+          </p:cNvSpPr>
+          <p:nvPr>
+            <p:ph type="sldImg" idx="0"/>
+          </p:nvPr>
+        </p:nvSpPr>
+        <p:spPr/>
+      </p:sp>
+      <p:sp>
+        <p:nvSpPr>
+          <p:cNvPr id="3" name="Notes Placeholder 2"/>
+          <p:cNvSpPr>
+            <a:spLocks xmlns:a="http://schemas.openxmlformats.org/drawingml/2006/main" noGrp="1"/>
+          </p:cNvSpPr>
+          <p:nvPr>
+            <p:ph type="body" idx="1"/>
+          </p:nvPr>
+        </p:nvSpPr>
+        <p:spPr/>
+        <p:txBody>
+          <a:bodyPr xmlns:a="http://schemas.openxmlformats.org/drawingml/2006/main"/>
+          <a:lstStyle xmlns:a="http://schemas.openxmlformats.org/drawingml/2006/main"/>
+          <a:p xmlns:a="http://schemas.openxmlformats.org/drawingml/2006/main">
+            <a:r>
+              <a:t>The fixed-date snapshots are evenly spaced rather than outcome-selected. Information Technology has the highest average source weight at 12.88%, but the largest weekly weight in any sector is 27.59%, so the result is not a permanently concentrated Technology portfolio in disguise.</a:t>
+            </a:r>
+          </a:p>
+          <a:p xmlns:a="http://schemas.openxmlformats.org/drawingml/2006/main">
+            <a:r>
+              <a:t/>
+            </a:r>
+          </a:p>
+          <a:p xmlns:a="http://schemas.openxmlformats.org/drawingml/2006/main">
+            <a:r>
+              <a:t>[Sources]</a:t>
+            </a:r>
+          </a:p>
+          <a:p xmlns:a="http://schemas.openxmlformats.org/drawingml/2006/main">
+            <a:r>
+              <a:t>- C:/Users/Franc/OneDrive/Documents/Francis/Peltata Project/Time-Series-Modeling-Gen5/runs/research_workbench/literature_grounded/lit_mom_03_3_broad_stock_fleet_20260903/mom033_report.md</a:t>
+            </a:r>
+          </a:p>
+          <a:p xmlns:a="http://schemas.openxmlformats.org/drawingml/2006/main">
+            <a:r>
+              <a:t>- C:/Users/Franc/OneDrive/Documents/Francis/Peltata Project/Time-Series-Modeling-Gen5/runs/research_workbench/literature_grounded/lit_mom_03_3_broad_stock_fleet_20260903/mom033_broad_fleet_summary.csv</a:t>
+            </a:r>
+          </a:p>
+          <a:p xmlns:a="http://schemas.openxmlformats.org/drawingml/2006/main">
+            <a:r>
+              <a:t>- C:/Users/Franc/OneDrive/Documents/Francis/Peltata Project/Time-Series-Modeling-Gen5/runs/research_workbench/literature_grounded/lit_mom_03_3_broad_stock_fleet_20260903/mom033_sector_allocation_tape.csv</a:t>
+            </a:r>
+          </a:p>
+          <a:p xmlns:a="http://schemas.openxmlformats.org/drawingml/2006/main">
+            <a:r>
+              <a:t>- C:/Users/Franc/OneDrive/Documents/Francis/Peltata Project/Time-Series-Modeling-Gen5/runs/research_workbench/literature_grounded/lit_mom_03_3_broad_stock_fleet_20260903/mom033_universe_registry.csv</a:t>
+            </a:r>
+          </a:p>
+          <a:p xmlns:a="http://schemas.openxmlformats.org/drawingml/2006/main">
+            <a:r>
+              <a:t>- C:/Users/Franc/OneDrive/Documents/Francis/Peltata Project/Time-Series-Modeling-Gen5/runs/research_workbench/literature_grounded/lit_mom_03_3_broad_stock_fleet_20260903/visuals/mom033_sector_allocation_snapshots.png</a:t>
+            </a:r>
+          </a:p>
+          <a:p xmlns:a="http://schemas.openxmlformats.org/drawingml/2006/main">
+            <a:r>
+              <a:t>- Codex task conversation, 2026-09-03 (operator approval and broad-fleet interpretation)</a:t>
+            </a:r>
+          </a:p>
+          <a:p xmlns:a="http://schemas.openxmlformats.org/drawingml/2006/main">
+            <a:r>
+              <a:t>[/Sources]</a:t>
+            </a:r>
+          </a:p>
+        </p:txBody>
+      </p:sp>
+      <p:sp>
+        <p:nvSpPr>
+          <p:cNvPr id="4" name="Slide Number Placeholder 3"/>
+          <p:cNvSpPr>
+            <a:spLocks xmlns:a="http://schemas.openxmlformats.org/drawingml/2006/main" noGrp="1"/>
+          </p:cNvSpPr>
+          <p:nvPr>
+            <p:ph type="sldNum" idx="5"/>
+          </p:nvPr>
+        </p:nvSpPr>
+        <p:spPr/>
+        <p:txBody>
+          <a:bodyPr xmlns:a="http://schemas.openxmlformats.org/drawingml/2006/main"/>
+          <a:lstStyle xmlns:a="http://schemas.openxmlformats.org/drawingml/2006/main"/>
+          <a:p xmlns:a="http://schemas.openxmlformats.org/drawingml/2006/main"/>
+        </p:txBody>
+      </p:sp>
+    </p:spTree>
+  </p:cSld>
+  <p:clrMapOvr>
+    <a:masterClrMapping xmlns:a="http://schemas.openxmlformats.org/drawingml/2006/main"/>
+  </p:clrMapOvr>
+</p:notes>
+</file>
+
+<file path=ppt/notesSlides/notesSlide36.xml><?xml version="1.0" encoding="utf-8"?>
+<p:notes xmlns:p="http://schemas.openxmlformats.org/presentationml/2006/main">
+  <p:cSld>
+    <p:spTree>
+      <p:nvGrpSpPr>
+        <p:cNvPr id="1" name=""/>
+        <p:cNvGrpSpPr/>
+        <p:nvPr/>
+      </p:nvGrpSpPr>
+      <p:grpSpPr>
+        <a:xfrm xmlns:a="http://schemas.openxmlformats.org/drawingml/2006/main"/>
+      </p:grpSpPr>
+      <p:sp>
+        <p:nvSpPr>
+          <p:cNvPr id="2" name="Slide Image Placeholder 1"/>
+          <p:cNvSpPr>
+            <a:spLocks xmlns:a="http://schemas.openxmlformats.org/drawingml/2006/main" noGrp="1"/>
+          </p:cNvSpPr>
+          <p:nvPr>
+            <p:ph type="sldImg" idx="0"/>
+          </p:nvPr>
+        </p:nvSpPr>
+        <p:spPr/>
+      </p:sp>
+      <p:sp>
+        <p:nvSpPr>
+          <p:cNvPr id="3" name="Notes Placeholder 2"/>
+          <p:cNvSpPr>
+            <a:spLocks xmlns:a="http://schemas.openxmlformats.org/drawingml/2006/main" noGrp="1"/>
+          </p:cNvSpPr>
+          <p:nvPr>
+            <p:ph type="body" idx="1"/>
+          </p:nvPr>
+        </p:nvSpPr>
+        <p:spPr/>
+        <p:txBody>
+          <a:bodyPr xmlns:a="http://schemas.openxmlformats.org/drawingml/2006/main"/>
+          <a:lstStyle xmlns:a="http://schemas.openxmlformats.org/drawingml/2006/main"/>
+          <a:p xmlns:a="http://schemas.openxmlformats.org/drawingml/2006/main">
+            <a:r>
+              <a:t>The broad competition structure is promising enough to preserve as a research clue. It is not mathematically defensible as an edge because the atlas is static and survivor-biased and the same retrospective sample informed the question. A point-in-time universe is the cleanest next evidence upgrade; the absolute gate remains a separately named risk control.</a:t>
+            </a:r>
+          </a:p>
+          <a:p xmlns:a="http://schemas.openxmlformats.org/drawingml/2006/main">
+            <a:r>
+              <a:t/>
+            </a:r>
+          </a:p>
+          <a:p xmlns:a="http://schemas.openxmlformats.org/drawingml/2006/main">
+            <a:r>
+              <a:t>[Sources]</a:t>
+            </a:r>
+          </a:p>
+          <a:p xmlns:a="http://schemas.openxmlformats.org/drawingml/2006/main">
+            <a:r>
+              <a:t>- C:/Users/Franc/OneDrive/Documents/Francis/Peltata Project/Time-Series-Modeling-Gen5/runs/research_workbench/literature_grounded/lit_mom_03_3_broad_stock_fleet_20260903/mom033_report.md</a:t>
+            </a:r>
+          </a:p>
+          <a:p xmlns:a="http://schemas.openxmlformats.org/drawingml/2006/main">
+            <a:r>
+              <a:t>- C:/Users/Franc/OneDrive/Documents/Francis/Peltata Project/Time-Series-Modeling-Gen5/runs/research_workbench/literature_grounded/lit_mom_03_3_broad_stock_fleet_20260903/mom033_broad_fleet_summary.csv</a:t>
+            </a:r>
+          </a:p>
+          <a:p xmlns:a="http://schemas.openxmlformats.org/drawingml/2006/main">
+            <a:r>
+              <a:t>- C:/Users/Franc/OneDrive/Documents/Francis/Peltata Project/Time-Series-Modeling-Gen5/runs/research_workbench/literature_grounded/lit_mom_03_3_broad_stock_fleet_20260903/mom033_portfolio_metrics.csv</a:t>
+            </a:r>
+          </a:p>
+          <a:p xmlns:a="http://schemas.openxmlformats.org/drawingml/2006/main">
+            <a:r>
+              <a:t>- C:/Users/Franc/OneDrive/Documents/Francis/Peltata Project/Time-Series-Modeling-Gen5/runs/research_workbench/literature_grounded/lit_mom_03_3_broad_stock_fleet_20260903/mom033_universe_registry.csv</a:t>
+            </a:r>
+          </a:p>
+          <a:p xmlns:a="http://schemas.openxmlformats.org/drawingml/2006/main">
+            <a:r>
+              <a:t>- C:/Users/Franc/OneDrive/Documents/Francis/Peltata Project/Time-Series-Modeling-Gen5/operator_hypothesis_lab/registries/return_geometry_wide_atlas.csv</a:t>
+            </a:r>
+          </a:p>
+          <a:p xmlns:a="http://schemas.openxmlformats.org/drawingml/2006/main">
+            <a:r>
+              <a:t>- C:/Users/Franc/OneDrive/Documents/Francis/Peltata Project/Time-Series-Modeling-Gen5/literature_studies/docs/GEN5_LIT_MOM_03_3_BROAD_STOCK_FLEET_RESULTS.md</a:t>
+            </a:r>
+          </a:p>
+          <a:p xmlns:a="http://schemas.openxmlformats.org/drawingml/2006/main">
+            <a:r>
+              <a:t>- C:/Users/Franc/OneDrive/Documents/Francis/Peltata Project/Time-Series-Modeling-Gen5/literature_studies/R/gen5_lit_mom_03_3_broad_stock_fleet.R</a:t>
+            </a:r>
+          </a:p>
+          <a:p xmlns:a="http://schemas.openxmlformats.org/drawingml/2006/main">
+            <a:r>
+              <a:t>- C:/Users/Franc/OneDrive/Documents/Francis/Peltata Project/Time-Series-Modeling-Gen5/literature_studies/scripts/run_gen5_lit_mom_03_3_broad_stock_fleet.R</a:t>
+            </a:r>
+          </a:p>
+          <a:p xmlns:a="http://schemas.openxmlformats.org/drawingml/2006/main">
+            <a:r>
+              <a:t>- Codex task conversation, 2026-09-03 (operator approval and broad-fleet interpretation)</a:t>
             </a:r>
           </a:p>
           <a:p xmlns:a="http://schemas.openxmlformats.org/drawingml/2006/main">
@@ -3684,7 +4395,7 @@
   </p:cSld>
   <p:clrMap bg1="lt1" tx1="dk1" bg2="lt2" tx2="dk2" accent1="accent1" accent2="accent2" accent3="accent3" accent4="accent4" accent5="accent5" accent6="accent6" hlink="hlink" folHlink="folHlink"/>
   <p:sldLayoutIdLst>
-    <p:sldLayoutId xmlns:r="http://schemas.openxmlformats.org/officeDocument/2006/relationships" id="2147483649" r:id="Red431e6d64d54af7"/>
+    <p:sldLayoutId xmlns:r="http://schemas.openxmlformats.org/officeDocument/2006/relationships" id="2147483649" r:id="Re999ea682af6491e"/>
   </p:sldLayoutIdLst>
   <p:txStyles>
     <p:titleStyle>
@@ -4714,7 +5425,7 @@
                 <a:ea typeface="Arial"/>
                 <a:cs typeface="Arial"/>
               </a:rPr>
-              <a:t>Descriptive transport POCs</a:t>
+              <a:t>Broad-fleet ranking POC</a:t>
             </a:r>
           </a:p>
           <a:p xmlns:a="http://schemas.openxmlformats.org/drawingml/2006/main">
@@ -8492,8 +9203,8 @@
         </p:nvSpPr>
         <p:spPr>
           <a:xfrm xmlns:a="http://schemas.openxmlformats.org/drawingml/2006/main">
-            <a:off x="11315700" y="6362700"/>
-            <a:ext cx="457200" cy="228600"/>
+            <a:off x="11163300" y="6362700"/>
+            <a:ext cx="609600" cy="228600"/>
           </a:xfrm>
           <a:prstGeom xmlns:a="http://schemas.openxmlformats.org/drawingml/2006/main" prst="rect">
             <a:avLst/>
@@ -11518,7 +12229,7 @@
           <p:nvPr/>
         </p:nvPicPr>
         <p:blipFill>
-          <a:blip xmlns:r="http://schemas.openxmlformats.org/officeDocument/2006/relationships" xmlns:a="http://schemas.openxmlformats.org/drawingml/2006/main" r:embed="R140b277587264f00"/>
+          <a:blip xmlns:r="http://schemas.openxmlformats.org/officeDocument/2006/relationships" xmlns:a="http://schemas.openxmlformats.org/drawingml/2006/main" r:embed="R6d50b0c5f7354144"/>
           <a:stretch xmlns:a="http://schemas.openxmlformats.org/drawingml/2006/main"/>
         </p:blipFill>
         <p:spPr>
@@ -12282,7 +12993,7 @@
           <p:nvPr/>
         </p:nvPicPr>
         <p:blipFill>
-          <a:blip xmlns:r="http://schemas.openxmlformats.org/officeDocument/2006/relationships" xmlns:a="http://schemas.openxmlformats.org/drawingml/2006/main" r:embed="R0c45ba86dc7e4f4c"/>
+          <a:blip xmlns:r="http://schemas.openxmlformats.org/officeDocument/2006/relationships" xmlns:a="http://schemas.openxmlformats.org/drawingml/2006/main" r:embed="Rcda86434732247ab"/>
           <a:stretch xmlns:a="http://schemas.openxmlformats.org/drawingml/2006/main"/>
         </p:blipFill>
         <p:spPr>
@@ -13247,8 +13958,8 @@
         </p:nvSpPr>
         <p:spPr>
           <a:xfrm xmlns:a="http://schemas.openxmlformats.org/drawingml/2006/main">
-            <a:off x="11010900" y="6324600"/>
-            <a:ext cx="762000" cy="266700"/>
+            <a:off x="11163300" y="6362700"/>
+            <a:ext cx="609600" cy="228600"/>
           </a:xfrm>
           <a:prstGeom xmlns:a="http://schemas.openxmlformats.org/drawingml/2006/main" prst="rect">
             <a:avLst/>
@@ -15274,7 +15985,7 @@
           <p:nvPr/>
         </p:nvPicPr>
         <p:blipFill>
-          <a:blip xmlns:r="http://schemas.openxmlformats.org/officeDocument/2006/relationships" xmlns:a="http://schemas.openxmlformats.org/drawingml/2006/main" r:embed="R2f43510b0ca94b09"/>
+          <a:blip xmlns:r="http://schemas.openxmlformats.org/officeDocument/2006/relationships" xmlns:a="http://schemas.openxmlformats.org/drawingml/2006/main" r:embed="R7ab2a931d07644a8"/>
           <a:stretch xmlns:a="http://schemas.openxmlformats.org/drawingml/2006/main"/>
         </p:blipFill>
         <p:spPr>
@@ -15477,8 +16188,8 @@
         </p:nvSpPr>
         <p:spPr>
           <a:xfrm xmlns:a="http://schemas.openxmlformats.org/drawingml/2006/main">
-            <a:off x="11010900" y="6324600"/>
-            <a:ext cx="762000" cy="266700"/>
+            <a:off x="11163300" y="6362700"/>
+            <a:ext cx="609600" cy="228600"/>
           </a:xfrm>
           <a:prstGeom xmlns:a="http://schemas.openxmlformats.org/drawingml/2006/main" prst="rect">
             <a:avLst/>
@@ -16776,7 +17487,7 @@
           <p:nvPr/>
         </p:nvPicPr>
         <p:blipFill>
-          <a:blip xmlns:r="http://schemas.openxmlformats.org/officeDocument/2006/relationships" xmlns:a="http://schemas.openxmlformats.org/drawingml/2006/main" r:embed="Rf58f8bc329064bf7"/>
+          <a:blip xmlns:r="http://schemas.openxmlformats.org/officeDocument/2006/relationships" xmlns:a="http://schemas.openxmlformats.org/drawingml/2006/main" r:embed="Rbaa181e91f924d68"/>
           <a:stretch xmlns:a="http://schemas.openxmlformats.org/drawingml/2006/main"/>
         </p:blipFill>
         <p:spPr>
@@ -18394,7 +19105,7 @@
                 <a:ea typeface="Arial"/>
                 <a:cs typeface="Arial"/>
               </a:rPr>
-              <a:t>UNIVERSE TRANSPORT · DESCRIPTIVE POC</a:t>
+              <a:t>LIT-MOM-03.2</a:t>
             </a:r>
           </a:p>
         </p:txBody>
@@ -19276,7 +19987,7 @@
                 <a:ea typeface="Arial"/>
                 <a:cs typeface="Arial"/>
               </a:rPr>
-              <a:t>UNIVERSE TRANSPORT · FROZEN CONTRACT</a:t>
+              <a:t>LIT-MOM-03.2</a:t>
             </a:r>
           </a:p>
         </p:txBody>
@@ -20270,7 +20981,7 @@
                 <a:ea typeface="Arial"/>
                 <a:cs typeface="Arial"/>
               </a:rPr>
-              <a:t>UNIVERSE TRANSPORT · SCORECARD</a:t>
+              <a:t>LIT-MOM-03.2</a:t>
             </a:r>
           </a:p>
         </p:txBody>
@@ -20804,7 +21515,7 @@
           <p:nvPr/>
         </p:nvPicPr>
         <p:blipFill>
-          <a:blip xmlns:r="http://schemas.openxmlformats.org/officeDocument/2006/relationships" xmlns:a="http://schemas.openxmlformats.org/drawingml/2006/main" r:embed="R7dda10e836344b63"/>
+          <a:blip xmlns:r="http://schemas.openxmlformats.org/officeDocument/2006/relationships" xmlns:a="http://schemas.openxmlformats.org/drawingml/2006/main" r:embed="R82398b99a28a4b0b"/>
           <a:stretch xmlns:a="http://schemas.openxmlformats.org/drawingml/2006/main"/>
         </p:blipFill>
         <p:spPr>
@@ -20898,7 +21609,7 @@
                 <a:ea typeface="Arial"/>
                 <a:cs typeface="Arial"/>
               </a:rPr>
-              <a:t>UNIVERSE TRANSPORT · COMPONENT ATTRIBUTION</a:t>
+              <a:t>LIT-MOM-03.2</a:t>
             </a:r>
           </a:p>
         </p:txBody>
@@ -21520,7 +22231,7 @@
           <p:nvPr/>
         </p:nvPicPr>
         <p:blipFill>
-          <a:blip xmlns:r="http://schemas.openxmlformats.org/officeDocument/2006/relationships" xmlns:a="http://schemas.openxmlformats.org/drawingml/2006/main" r:embed="Raaa4c7bcea1b4967"/>
+          <a:blip xmlns:r="http://schemas.openxmlformats.org/officeDocument/2006/relationships" xmlns:a="http://schemas.openxmlformats.org/drawingml/2006/main" r:embed="Rcef268d6b20648f9"/>
           <a:stretch xmlns:a="http://schemas.openxmlformats.org/drawingml/2006/main"/>
         </p:blipFill>
         <p:spPr>
@@ -21614,7 +22325,7 @@
                 <a:ea typeface="Arial"/>
                 <a:cs typeface="Arial"/>
               </a:rPr>
-              <a:t>UNIVERSE TRANSPORT · INTERPRETATION</a:t>
+              <a:t>LIT-MOM-03.2</a:t>
             </a:r>
           </a:p>
         </p:txBody>
@@ -24123,7 +24834,7 @@
                 <a:ea typeface="Arial"/>
                 <a:cs typeface="Arial"/>
               </a:rPr>
-              <a:t>UNIVERSE TRANSPORT · DECISION BOUNDARY</a:t>
+              <a:t>LIT-MOM-03.2</a:t>
             </a:r>
           </a:p>
         </p:txBody>
@@ -24800,6 +25511,4776 @@
                 <a:cs typeface="Arial"/>
               </a:rPr>
               <a:t>Huddle before opening either gate; do not search for a basket that turns green.</a:t>
+            </a:r>
+          </a:p>
+        </p:txBody>
+      </p:sp>
+    </p:spTree>
+    <p:extLst>
+      <p:ext uri="{BB962C8B-B14F-4D97-AF65-F5344CB8AC3E}">
+        <p14:creationId xmlns:p14="http://schemas.microsoft.com/office/powerpoint/2010/main" val="733918031"/>
+      </p:ext>
+    </p:extLst>
+  </p:cSld>
+</p:sld>
+</file>
+
+<file path=ppt/slides/slide31.xml><?xml version="1.0" encoding="utf-8"?>
+<p:sld xmlns:p="http://schemas.openxmlformats.org/presentationml/2006/main">
+  <p:cSld>
+    <p:bg>
+      <p:bgPr>
+        <a:solidFill xmlns:a="http://schemas.openxmlformats.org/drawingml/2006/main">
+          <a:srgbClr val="FFFFFF"/>
+        </a:solidFill>
+      </p:bgPr>
+    </p:bg>
+    <p:spTree>
+      <p:nvGrpSpPr>
+        <p:cNvPr id="1" name=""/>
+        <p:cNvGrpSpPr/>
+        <p:nvPr/>
+      </p:nvGrpSpPr>
+      <p:grpSpPr>
+        <a:xfrm xmlns:a="http://schemas.openxmlformats.org/drawingml/2006/main"/>
+      </p:grpSpPr>
+      <p:sp>
+        <p:nvSpPr>
+          <p:cNvPr id="16" name="">
+            <a:extLst xmlns:a="http://schemas.openxmlformats.org/drawingml/2006/main">
+              <a:ext uri="{FF2B5EF4-FFF2-40B4-BE49-F238E27FC236}">
+                <a16:creationId xmlns:a16="http://schemas.microsoft.com/office/drawing/2014/main" id="{0643D917-60C1-49B6-A04E-D85D24522DCE}"/>
+              </a:ext>
+            </a:extLst>
+          </p:cNvPr>
+          <p:cNvSpPr>
+            <a:spLocks xmlns:a="http://schemas.openxmlformats.org/drawingml/2006/main" noGrp="1"/>
+          </p:cNvSpPr>
+          <p:nvPr/>
+        </p:nvSpPr>
+        <p:spPr>
+          <a:xfrm xmlns:a="http://schemas.openxmlformats.org/drawingml/2006/main">
+            <a:off x="400050" y="228600"/>
+            <a:ext cx="2857500" cy="228600"/>
+          </a:xfrm>
+          <a:prstGeom xmlns:a="http://schemas.openxmlformats.org/drawingml/2006/main" prst="rect">
+            <a:avLst/>
+          </a:prstGeom>
+          <a:noFill xmlns:a="http://schemas.openxmlformats.org/drawingml/2006/main"/>
+          <a:ln xmlns:a="http://schemas.openxmlformats.org/drawingml/2006/main" w="0">
+            <a:noFill/>
+            <a:prstDash val="solid"/>
+          </a:ln>
+        </p:spPr>
+        <p:txBody>
+          <a:bodyPr xmlns:a="http://schemas.openxmlformats.org/drawingml/2006/main" anchor="t"/>
+          <a:lstStyle xmlns:a="http://schemas.openxmlformats.org/drawingml/2006/main"/>
+          <a:p xmlns:a="http://schemas.openxmlformats.org/drawingml/2006/main">
+            <a:pPr algn="l">
+              <a:buNone/>
+              <a:defRPr sz="1200" b="1">
+                <a:solidFill>
+                  <a:srgbClr val="3D8DFF"/>
+                </a:solidFill>
+                <a:latin typeface="Arial"/>
+                <a:ea typeface="Arial"/>
+                <a:cs typeface="Arial"/>
+              </a:defRPr>
+            </a:pPr>
+            <a:r>
+              <a:rPr sz="1200" b="1">
+                <a:solidFill>
+                  <a:srgbClr val="3D8DFF"/>
+                </a:solidFill>
+                <a:latin typeface="Arial"/>
+                <a:ea typeface="Arial"/>
+                <a:cs typeface="Arial"/>
+              </a:rPr>
+              <a:t>LIT-MOM-03.3</a:t>
+            </a:r>
+          </a:p>
+        </p:txBody>
+      </p:sp>
+      <p:sp>
+        <p:nvSpPr>
+          <p:cNvPr id="2" name="">
+            <a:extLst xmlns:a="http://schemas.openxmlformats.org/drawingml/2006/main">
+              <a:ext uri="{FF2B5EF4-FFF2-40B4-BE49-F238E27FC236}">
+                <a16:creationId xmlns:a16="http://schemas.microsoft.com/office/drawing/2014/main" id="{3F51F0D8-19C8-434E-90A3-9CD80434373E}"/>
+              </a:ext>
+            </a:extLst>
+          </p:cNvPr>
+          <p:cNvSpPr>
+            <a:spLocks xmlns:a="http://schemas.openxmlformats.org/drawingml/2006/main" noGrp="1"/>
+          </p:cNvSpPr>
+          <p:nvPr/>
+        </p:nvSpPr>
+        <p:spPr>
+          <a:xfrm xmlns:a="http://schemas.openxmlformats.org/drawingml/2006/main">
+            <a:off x="400050" y="476250"/>
+            <a:ext cx="11049000" cy="819150"/>
+          </a:xfrm>
+          <a:prstGeom xmlns:a="http://schemas.openxmlformats.org/drawingml/2006/main" prst="rect">
+            <a:avLst/>
+          </a:prstGeom>
+          <a:noFill xmlns:a="http://schemas.openxmlformats.org/drawingml/2006/main"/>
+          <a:ln xmlns:a="http://schemas.openxmlformats.org/drawingml/2006/main" w="0">
+            <a:noFill/>
+            <a:prstDash val="solid"/>
+          </a:ln>
+        </p:spPr>
+        <p:txBody>
+          <a:bodyPr xmlns:a="http://schemas.openxmlformats.org/drawingml/2006/main" anchor="t"/>
+          <a:lstStyle xmlns:a="http://schemas.openxmlformats.org/drawingml/2006/main"/>
+          <a:p xmlns:a="http://schemas.openxmlformats.org/drawingml/2006/main">
+            <a:pPr algn="l">
+              <a:buNone/>
+              <a:defRPr sz="2700" b="1">
+                <a:solidFill>
+                  <a:srgbClr val="101820"/>
+                </a:solidFill>
+                <a:latin typeface="Arial"/>
+                <a:ea typeface="Arial"/>
+                <a:cs typeface="Arial"/>
+              </a:defRPr>
+            </a:pPr>
+            <a:r>
+              <a:rPr sz="2700" b="1">
+                <a:solidFill>
+                  <a:srgbClr val="101820"/>
+                </a:solidFill>
+                <a:latin typeface="Arial"/>
+                <a:ea typeface="Arial"/>
+                <a:cs typeface="Arial"/>
+              </a:rPr>
+              <a:t>One broad contest changes the descriptive shape</a:t>
+            </a:r>
+          </a:p>
+        </p:txBody>
+      </p:sp>
+      <p:sp>
+        <p:nvSpPr>
+          <p:cNvPr id="3" name="">
+            <a:extLst xmlns:a="http://schemas.openxmlformats.org/drawingml/2006/main">
+              <a:ext uri="{FF2B5EF4-FFF2-40B4-BE49-F238E27FC236}">
+                <a16:creationId xmlns:a16="http://schemas.microsoft.com/office/drawing/2014/main" id="{9C82D8E5-4706-4E1C-8A9C-3CB6FFDCDE1D}"/>
+              </a:ext>
+            </a:extLst>
+          </p:cNvPr>
+          <p:cNvSpPr>
+            <a:spLocks xmlns:a="http://schemas.openxmlformats.org/drawingml/2006/main" noGrp="1"/>
+          </p:cNvSpPr>
+          <p:nvPr/>
+        </p:nvSpPr>
+        <p:spPr>
+          <a:xfrm xmlns:a="http://schemas.openxmlformats.org/drawingml/2006/main">
+            <a:off x="400050" y="1428750"/>
+            <a:ext cx="11391900" cy="0"/>
+          </a:xfrm>
+          <a:prstGeom xmlns:a="http://schemas.openxmlformats.org/drawingml/2006/main" prst="line">
+            <a:avLst/>
+          </a:prstGeom>
+          <a:noFill xmlns:a="http://schemas.openxmlformats.org/drawingml/2006/main"/>
+          <a:ln xmlns:a="http://schemas.openxmlformats.org/drawingml/2006/main" w="9525">
+            <a:solidFill>
+              <a:srgbClr val="B8BCC4"/>
+            </a:solidFill>
+            <a:prstDash val="solid"/>
+          </a:ln>
+        </p:spPr>
+      </p:sp>
+      <p:sp>
+        <p:nvSpPr>
+          <p:cNvPr id="4" name="">
+            <a:extLst xmlns:a="http://schemas.openxmlformats.org/drawingml/2006/main">
+              <a:ext uri="{FF2B5EF4-FFF2-40B4-BE49-F238E27FC236}">
+                <a16:creationId xmlns:a16="http://schemas.microsoft.com/office/drawing/2014/main" id="{8452295D-1E22-4BA1-B87C-35FC318DE242}"/>
+              </a:ext>
+            </a:extLst>
+          </p:cNvPr>
+          <p:cNvSpPr>
+            <a:spLocks xmlns:a="http://schemas.openxmlformats.org/drawingml/2006/main" noGrp="1"/>
+          </p:cNvSpPr>
+          <p:nvPr/>
+        </p:nvSpPr>
+        <p:spPr>
+          <a:xfrm xmlns:a="http://schemas.openxmlformats.org/drawingml/2006/main">
+            <a:off x="11163300" y="6362700"/>
+            <a:ext cx="609600" cy="228600"/>
+          </a:xfrm>
+          <a:prstGeom xmlns:a="http://schemas.openxmlformats.org/drawingml/2006/main" prst="rect">
+            <a:avLst/>
+          </a:prstGeom>
+          <a:noFill xmlns:a="http://schemas.openxmlformats.org/drawingml/2006/main"/>
+          <a:ln xmlns:a="http://schemas.openxmlformats.org/drawingml/2006/main" w="0">
+            <a:noFill/>
+            <a:prstDash val="solid"/>
+          </a:ln>
+        </p:spPr>
+        <p:txBody>
+          <a:bodyPr xmlns:a="http://schemas.openxmlformats.org/drawingml/2006/main" anchor="t"/>
+          <a:lstStyle xmlns:a="http://schemas.openxmlformats.org/drawingml/2006/main"/>
+          <a:p xmlns:a="http://schemas.openxmlformats.org/drawingml/2006/main">
+            <a:pPr algn="r">
+              <a:buNone/>
+              <a:defRPr sz="1200" b="0">
+                <a:solidFill>
+                  <a:srgbClr val="52616B"/>
+                </a:solidFill>
+                <a:latin typeface="Arial"/>
+                <a:ea typeface="Arial"/>
+                <a:cs typeface="Arial"/>
+              </a:defRPr>
+            </a:pPr>
+            <a:r>
+              <a:rPr sz="1200" b="0">
+                <a:solidFill>
+                  <a:srgbClr val="52616B"/>
+                </a:solidFill>
+                <a:latin typeface="Arial"/>
+                <a:ea typeface="Arial"/>
+                <a:cs typeface="Arial"/>
+              </a:rPr>
+              <a:t>31</a:t>
+            </a:r>
+          </a:p>
+        </p:txBody>
+      </p:sp>
+      <p:sp>
+        <p:nvSpPr>
+          <p:cNvPr id="5" name="">
+            <a:extLst xmlns:a="http://schemas.openxmlformats.org/drawingml/2006/main">
+              <a:ext uri="{FF2B5EF4-FFF2-40B4-BE49-F238E27FC236}">
+                <a16:creationId xmlns:a16="http://schemas.microsoft.com/office/drawing/2014/main" id="{EA84F263-DCB7-4ECF-AC3C-B71C047C289B}"/>
+              </a:ext>
+            </a:extLst>
+          </p:cNvPr>
+          <p:cNvSpPr>
+            <a:spLocks xmlns:a="http://schemas.openxmlformats.org/drawingml/2006/main" noGrp="1"/>
+          </p:cNvSpPr>
+          <p:nvPr/>
+        </p:nvSpPr>
+        <p:spPr>
+          <a:xfrm xmlns:a="http://schemas.openxmlformats.org/drawingml/2006/main">
+            <a:off x="628650" y="1790700"/>
+            <a:ext cx="4953000" cy="3257550"/>
+          </a:xfrm>
+          <a:prstGeom xmlns:a="http://schemas.openxmlformats.org/drawingml/2006/main" prst="rect">
+            <a:avLst/>
+          </a:prstGeom>
+          <a:solidFill xmlns:a="http://schemas.openxmlformats.org/drawingml/2006/main">
+            <a:srgbClr val="E6F2EC"/>
+          </a:solidFill>
+          <a:ln xmlns:a="http://schemas.openxmlformats.org/drawingml/2006/main" w="9525">
+            <a:solidFill>
+              <a:srgbClr val="2E7D5B"/>
+            </a:solidFill>
+            <a:prstDash val="solid"/>
+          </a:ln>
+        </p:spPr>
+      </p:sp>
+      <p:sp>
+        <p:nvSpPr>
+          <p:cNvPr id="6" name="">
+            <a:extLst xmlns:a="http://schemas.openxmlformats.org/drawingml/2006/main">
+              <a:ext uri="{FF2B5EF4-FFF2-40B4-BE49-F238E27FC236}">
+                <a16:creationId xmlns:a16="http://schemas.microsoft.com/office/drawing/2014/main" id="{2535A567-86A3-447F-ABF8-3D7CC1CFCEE3}"/>
+              </a:ext>
+            </a:extLst>
+          </p:cNvPr>
+          <p:cNvSpPr>
+            <a:spLocks xmlns:a="http://schemas.openxmlformats.org/drawingml/2006/main" noGrp="1"/>
+          </p:cNvSpPr>
+          <p:nvPr/>
+        </p:nvSpPr>
+        <p:spPr>
+          <a:xfrm xmlns:a="http://schemas.openxmlformats.org/drawingml/2006/main">
+            <a:off x="971550" y="2114550"/>
+            <a:ext cx="3238500" cy="247650"/>
+          </a:xfrm>
+          <a:prstGeom xmlns:a="http://schemas.openxmlformats.org/drawingml/2006/main" prst="rect">
+            <a:avLst/>
+          </a:prstGeom>
+          <a:noFill xmlns:a="http://schemas.openxmlformats.org/drawingml/2006/main"/>
+          <a:ln xmlns:a="http://schemas.openxmlformats.org/drawingml/2006/main" w="0">
+            <a:noFill/>
+            <a:prstDash val="solid"/>
+          </a:ln>
+        </p:spPr>
+        <p:txBody>
+          <a:bodyPr xmlns:a="http://schemas.openxmlformats.org/drawingml/2006/main" anchor="t"/>
+          <a:lstStyle xmlns:a="http://schemas.openxmlformats.org/drawingml/2006/main"/>
+          <a:p xmlns:a="http://schemas.openxmlformats.org/drawingml/2006/main">
+            <a:pPr algn="l">
+              <a:buNone/>
+              <a:defRPr sz="1275" b="1">
+                <a:solidFill>
+                  <a:srgbClr val="2E7D5B"/>
+                </a:solidFill>
+                <a:latin typeface="Arial"/>
+                <a:ea typeface="Arial"/>
+                <a:cs typeface="Arial"/>
+              </a:defRPr>
+            </a:pPr>
+            <a:r>
+              <a:rPr sz="1275" b="1">
+                <a:solidFill>
+                  <a:srgbClr val="2E7D5B"/>
+                </a:solidFill>
+                <a:latin typeface="Arial"/>
+                <a:ea typeface="Arial"/>
+                <a:cs typeface="Arial"/>
+              </a:rPr>
+              <a:t>FROZEN BREADTH</a:t>
+            </a:r>
+          </a:p>
+        </p:txBody>
+      </p:sp>
+      <p:sp>
+        <p:nvSpPr>
+          <p:cNvPr id="7" name="">
+            <a:extLst xmlns:a="http://schemas.openxmlformats.org/drawingml/2006/main">
+              <a:ext uri="{FF2B5EF4-FFF2-40B4-BE49-F238E27FC236}">
+                <a16:creationId xmlns:a16="http://schemas.microsoft.com/office/drawing/2014/main" id="{B0EF5351-B0F9-4A7A-9512-D9DE9A581079}"/>
+              </a:ext>
+            </a:extLst>
+          </p:cNvPr>
+          <p:cNvSpPr>
+            <a:spLocks xmlns:a="http://schemas.openxmlformats.org/drawingml/2006/main" noGrp="1"/>
+          </p:cNvSpPr>
+          <p:nvPr/>
+        </p:nvSpPr>
+        <p:spPr>
+          <a:xfrm xmlns:a="http://schemas.openxmlformats.org/drawingml/2006/main">
+            <a:off x="971550" y="2667000"/>
+            <a:ext cx="1809750" cy="876300"/>
+          </a:xfrm>
+          <a:prstGeom xmlns:a="http://schemas.openxmlformats.org/drawingml/2006/main" prst="rect">
+            <a:avLst/>
+          </a:prstGeom>
+          <a:noFill xmlns:a="http://schemas.openxmlformats.org/drawingml/2006/main"/>
+          <a:ln xmlns:a="http://schemas.openxmlformats.org/drawingml/2006/main" w="0">
+            <a:noFill/>
+            <a:prstDash val="solid"/>
+          </a:ln>
+        </p:spPr>
+        <p:txBody>
+          <a:bodyPr xmlns:a="http://schemas.openxmlformats.org/drawingml/2006/main" anchor="t"/>
+          <a:lstStyle xmlns:a="http://schemas.openxmlformats.org/drawingml/2006/main"/>
+          <a:p xmlns:a="http://schemas.openxmlformats.org/drawingml/2006/main">
+            <a:pPr algn="l">
+              <a:buNone/>
+              <a:defRPr sz="5100" b="1">
+                <a:solidFill>
+                  <a:srgbClr val="2E7D5B"/>
+                </a:solidFill>
+                <a:latin typeface="Arial"/>
+                <a:ea typeface="Arial"/>
+                <a:cs typeface="Arial"/>
+              </a:defRPr>
+            </a:pPr>
+            <a:r>
+              <a:rPr sz="5100" b="1">
+                <a:solidFill>
+                  <a:srgbClr val="2E7D5B"/>
+                </a:solidFill>
+                <a:latin typeface="Arial"/>
+                <a:ea typeface="Arial"/>
+                <a:cs typeface="Arial"/>
+              </a:rPr>
+              <a:t>88</a:t>
+            </a:r>
+          </a:p>
+        </p:txBody>
+      </p:sp>
+      <p:sp>
+        <p:nvSpPr>
+          <p:cNvPr id="8" name="">
+            <a:extLst xmlns:a="http://schemas.openxmlformats.org/drawingml/2006/main">
+              <a:ext uri="{FF2B5EF4-FFF2-40B4-BE49-F238E27FC236}">
+                <a16:creationId xmlns:a16="http://schemas.microsoft.com/office/drawing/2014/main" id="{845D259F-CD58-4A41-8E58-6185E679F682}"/>
+              </a:ext>
+            </a:extLst>
+          </p:cNvPr>
+          <p:cNvSpPr>
+            <a:spLocks xmlns:a="http://schemas.openxmlformats.org/drawingml/2006/main" noGrp="1"/>
+          </p:cNvSpPr>
+          <p:nvPr/>
+        </p:nvSpPr>
+        <p:spPr>
+          <a:xfrm xmlns:a="http://schemas.openxmlformats.org/drawingml/2006/main">
+            <a:off x="2800350" y="2914650"/>
+            <a:ext cx="2324100" cy="457200"/>
+          </a:xfrm>
+          <a:prstGeom xmlns:a="http://schemas.openxmlformats.org/drawingml/2006/main" prst="rect">
+            <a:avLst/>
+          </a:prstGeom>
+          <a:noFill xmlns:a="http://schemas.openxmlformats.org/drawingml/2006/main"/>
+          <a:ln xmlns:a="http://schemas.openxmlformats.org/drawingml/2006/main" w="0">
+            <a:noFill/>
+            <a:prstDash val="solid"/>
+          </a:ln>
+        </p:spPr>
+        <p:txBody>
+          <a:bodyPr xmlns:a="http://schemas.openxmlformats.org/drawingml/2006/main" anchor="t"/>
+          <a:lstStyle xmlns:a="http://schemas.openxmlformats.org/drawingml/2006/main"/>
+          <a:p xmlns:a="http://schemas.openxmlformats.org/drawingml/2006/main">
+            <a:pPr algn="l">
+              <a:buNone/>
+              <a:defRPr sz="2100" b="1">
+                <a:solidFill>
+                  <a:srgbClr val="101820"/>
+                </a:solidFill>
+                <a:latin typeface="Arial"/>
+                <a:ea typeface="Arial"/>
+                <a:cs typeface="Arial"/>
+              </a:defRPr>
+            </a:pPr>
+            <a:r>
+              <a:rPr sz="2100" b="1">
+                <a:solidFill>
+                  <a:srgbClr val="101820"/>
+                </a:solidFill>
+                <a:latin typeface="Arial"/>
+                <a:ea typeface="Arial"/>
+                <a:cs typeface="Arial"/>
+              </a:rPr>
+              <a:t>stocks compete together</a:t>
+            </a:r>
+          </a:p>
+        </p:txBody>
+      </p:sp>
+      <p:sp>
+        <p:nvSpPr>
+          <p:cNvPr id="9" name="">
+            <a:extLst xmlns:a="http://schemas.openxmlformats.org/drawingml/2006/main">
+              <a:ext uri="{FF2B5EF4-FFF2-40B4-BE49-F238E27FC236}">
+                <a16:creationId xmlns:a16="http://schemas.microsoft.com/office/drawing/2014/main" id="{2B561A00-F2ED-46FB-9D93-63A3E1AD5803}"/>
+              </a:ext>
+            </a:extLst>
+          </p:cNvPr>
+          <p:cNvSpPr>
+            <a:spLocks xmlns:a="http://schemas.openxmlformats.org/drawingml/2006/main" noGrp="1"/>
+          </p:cNvSpPr>
+          <p:nvPr/>
+        </p:nvSpPr>
+        <p:spPr>
+          <a:xfrm xmlns:a="http://schemas.openxmlformats.org/drawingml/2006/main">
+            <a:off x="971550" y="3810000"/>
+            <a:ext cx="4000500" cy="933450"/>
+          </a:xfrm>
+          <a:prstGeom xmlns:a="http://schemas.openxmlformats.org/drawingml/2006/main" prst="rect">
+            <a:avLst/>
+          </a:prstGeom>
+          <a:noFill xmlns:a="http://schemas.openxmlformats.org/drawingml/2006/main"/>
+          <a:ln xmlns:a="http://schemas.openxmlformats.org/drawingml/2006/main" w="0">
+            <a:noFill/>
+            <a:prstDash val="solid"/>
+          </a:ln>
+        </p:spPr>
+        <p:txBody>
+          <a:bodyPr xmlns:a="http://schemas.openxmlformats.org/drawingml/2006/main" anchor="t"/>
+          <a:lstStyle xmlns:a="http://schemas.openxmlformats.org/drawingml/2006/main"/>
+          <a:p xmlns:a="http://schemas.openxmlformats.org/drawingml/2006/main">
+            <a:pPr algn="l">
+              <a:buNone/>
+              <a:defRPr sz="1800" b="0">
+                <a:solidFill>
+                  <a:srgbClr val="52616B"/>
+                </a:solidFill>
+                <a:latin typeface="Arial"/>
+                <a:ea typeface="Arial"/>
+                <a:cs typeface="Arial"/>
+              </a:defRPr>
+            </a:pPr>
+            <a:r>
+              <a:rPr sz="1800" b="0">
+                <a:solidFill>
+                  <a:srgbClr val="52616B"/>
+                </a:solidFill>
+                <a:latin typeface="Arial"/>
+                <a:ea typeface="Arial"/>
+                <a:cs typeface="Arial"/>
+              </a:rPr>
+              <a:t>11 sectors · 8 names each</a:t>
+            </a:r>
+          </a:p>
+          <a:p xmlns:a="http://schemas.openxmlformats.org/drawingml/2006/main">
+            <a:pPr algn="l">
+              <a:buNone/>
+              <a:defRPr sz="1800" b="0">
+                <a:solidFill>
+                  <a:srgbClr val="52616B"/>
+                </a:solidFill>
+                <a:latin typeface="Arial"/>
+                <a:ea typeface="Arial"/>
+                <a:cs typeface="Arial"/>
+              </a:defRPr>
+            </a:pPr>
+            <a:r>
+              <a:rPr sz="1800" b="0">
+                <a:solidFill>
+                  <a:srgbClr val="52616B"/>
+                </a:solidFill>
+                <a:latin typeface="Arial"/>
+                <a:ea typeface="Arial"/>
+                <a:cs typeface="Arial"/>
+              </a:rPr>
+              <a:t>29 selected per sleeve</a:t>
+            </a:r>
+          </a:p>
+          <a:p xmlns:a="http://schemas.openxmlformats.org/drawingml/2006/main">
+            <a:pPr algn="l">
+              <a:buNone/>
+              <a:defRPr sz="1800" b="0">
+                <a:solidFill>
+                  <a:srgbClr val="52616B"/>
+                </a:solidFill>
+                <a:latin typeface="Arial"/>
+                <a:ea typeface="Arial"/>
+                <a:cs typeface="Arial"/>
+              </a:defRPr>
+            </a:pPr>
+            <a:r>
+              <a:rPr sz="1800" b="0">
+                <a:solidFill>
+                  <a:srgbClr val="52616B"/>
+                </a:solidFill>
+                <a:latin typeface="Arial"/>
+                <a:ea typeface="Arial"/>
+                <a:cs typeface="Arial"/>
+              </a:rPr>
+              <a:t>507 causal intervals</a:t>
+            </a:r>
+          </a:p>
+        </p:txBody>
+      </p:sp>
+      <p:sp>
+        <p:nvSpPr>
+          <p:cNvPr id="10" name="">
+            <a:extLst xmlns:a="http://schemas.openxmlformats.org/drawingml/2006/main">
+              <a:ext uri="{FF2B5EF4-FFF2-40B4-BE49-F238E27FC236}">
+                <a16:creationId xmlns:a16="http://schemas.microsoft.com/office/drawing/2014/main" id="{D80FDF2D-786A-4D34-8C53-03F5531FEFAA}"/>
+              </a:ext>
+            </a:extLst>
+          </p:cNvPr>
+          <p:cNvSpPr>
+            <a:spLocks xmlns:a="http://schemas.openxmlformats.org/drawingml/2006/main" noGrp="1"/>
+          </p:cNvSpPr>
+          <p:nvPr/>
+        </p:nvSpPr>
+        <p:spPr>
+          <a:xfrm xmlns:a="http://schemas.openxmlformats.org/drawingml/2006/main">
+            <a:off x="6191250" y="1790700"/>
+            <a:ext cx="4953000" cy="3257550"/>
+          </a:xfrm>
+          <a:prstGeom xmlns:a="http://schemas.openxmlformats.org/drawingml/2006/main" prst="rect">
+            <a:avLst/>
+          </a:prstGeom>
+          <a:solidFill xmlns:a="http://schemas.openxmlformats.org/drawingml/2006/main">
+            <a:srgbClr val="F7E7E2"/>
+          </a:solidFill>
+          <a:ln xmlns:a="http://schemas.openxmlformats.org/drawingml/2006/main" w="9525">
+            <a:solidFill>
+              <a:srgbClr val="C8553D"/>
+            </a:solidFill>
+            <a:prstDash val="solid"/>
+          </a:ln>
+        </p:spPr>
+      </p:sp>
+      <p:sp>
+        <p:nvSpPr>
+          <p:cNvPr id="11" name="">
+            <a:extLst xmlns:a="http://schemas.openxmlformats.org/drawingml/2006/main">
+              <a:ext uri="{FF2B5EF4-FFF2-40B4-BE49-F238E27FC236}">
+                <a16:creationId xmlns:a16="http://schemas.microsoft.com/office/drawing/2014/main" id="{E4150C52-9BF1-4205-AAE7-8463BBDA6FD9}"/>
+              </a:ext>
+            </a:extLst>
+          </p:cNvPr>
+          <p:cNvSpPr>
+            <a:spLocks xmlns:a="http://schemas.openxmlformats.org/drawingml/2006/main" noGrp="1"/>
+          </p:cNvSpPr>
+          <p:nvPr/>
+        </p:nvSpPr>
+        <p:spPr>
+          <a:xfrm xmlns:a="http://schemas.openxmlformats.org/drawingml/2006/main">
+            <a:off x="6534150" y="2114550"/>
+            <a:ext cx="3714750" cy="247650"/>
+          </a:xfrm>
+          <a:prstGeom xmlns:a="http://schemas.openxmlformats.org/drawingml/2006/main" prst="rect">
+            <a:avLst/>
+          </a:prstGeom>
+          <a:noFill xmlns:a="http://schemas.openxmlformats.org/drawingml/2006/main"/>
+          <a:ln xmlns:a="http://schemas.openxmlformats.org/drawingml/2006/main" w="0">
+            <a:noFill/>
+            <a:prstDash val="solid"/>
+          </a:ln>
+        </p:spPr>
+        <p:txBody>
+          <a:bodyPr xmlns:a="http://schemas.openxmlformats.org/drawingml/2006/main" anchor="t"/>
+          <a:lstStyle xmlns:a="http://schemas.openxmlformats.org/drawingml/2006/main"/>
+          <a:p xmlns:a="http://schemas.openxmlformats.org/drawingml/2006/main">
+            <a:pPr algn="l">
+              <a:buNone/>
+              <a:defRPr sz="1275" b="1">
+                <a:solidFill>
+                  <a:srgbClr val="C8553D"/>
+                </a:solidFill>
+                <a:latin typeface="Arial"/>
+                <a:ea typeface="Arial"/>
+                <a:cs typeface="Arial"/>
+              </a:defRPr>
+            </a:pPr>
+            <a:r>
+              <a:rPr sz="1275" b="1">
+                <a:solidFill>
+                  <a:srgbClr val="C8553D"/>
+                </a:solidFill>
+                <a:latin typeface="Arial"/>
+                <a:ea typeface="Arial"/>
+                <a:cs typeface="Arial"/>
+              </a:rPr>
+              <a:t>RANKING CLUE</a:t>
+            </a:r>
+          </a:p>
+        </p:txBody>
+      </p:sp>
+      <p:sp>
+        <p:nvSpPr>
+          <p:cNvPr id="12" name="">
+            <a:extLst xmlns:a="http://schemas.openxmlformats.org/drawingml/2006/main">
+              <a:ext uri="{FF2B5EF4-FFF2-40B4-BE49-F238E27FC236}">
+                <a16:creationId xmlns:a16="http://schemas.microsoft.com/office/drawing/2014/main" id="{0606DC9E-2BF6-4A3D-8AA4-5B9D11332D44}"/>
+              </a:ext>
+            </a:extLst>
+          </p:cNvPr>
+          <p:cNvSpPr>
+            <a:spLocks xmlns:a="http://schemas.openxmlformats.org/drawingml/2006/main" noGrp="1"/>
+          </p:cNvSpPr>
+          <p:nvPr/>
+        </p:nvSpPr>
+        <p:spPr>
+          <a:xfrm xmlns:a="http://schemas.openxmlformats.org/drawingml/2006/main">
+            <a:off x="6534150" y="2724150"/>
+            <a:ext cx="4000500" cy="704850"/>
+          </a:xfrm>
+          <a:prstGeom xmlns:a="http://schemas.openxmlformats.org/drawingml/2006/main" prst="rect">
+            <a:avLst/>
+          </a:prstGeom>
+          <a:noFill xmlns:a="http://schemas.openxmlformats.org/drawingml/2006/main"/>
+          <a:ln xmlns:a="http://schemas.openxmlformats.org/drawingml/2006/main" w="0">
+            <a:noFill/>
+            <a:prstDash val="solid"/>
+          </a:ln>
+        </p:spPr>
+        <p:txBody>
+          <a:bodyPr xmlns:a="http://schemas.openxmlformats.org/drawingml/2006/main" anchor="t"/>
+          <a:lstStyle xmlns:a="http://schemas.openxmlformats.org/drawingml/2006/main"/>
+          <a:p xmlns:a="http://schemas.openxmlformats.org/drawingml/2006/main">
+            <a:pPr algn="l">
+              <a:buNone/>
+              <a:defRPr sz="4050" b="1">
+                <a:solidFill>
+                  <a:srgbClr val="C8553D"/>
+                </a:solidFill>
+                <a:latin typeface="Arial"/>
+                <a:ea typeface="Arial"/>
+                <a:cs typeface="Arial"/>
+              </a:defRPr>
+            </a:pPr>
+            <a:r>
+              <a:rPr sz="4050" b="1">
+                <a:solidFill>
+                  <a:srgbClr val="C8553D"/>
+                </a:solidFill>
+                <a:latin typeface="Arial"/>
+                <a:ea typeface="Arial"/>
+                <a:cs typeface="Arial"/>
+              </a:rPr>
+              <a:t>+0.90 pp</a:t>
+            </a:r>
+          </a:p>
+        </p:txBody>
+      </p:sp>
+      <p:sp>
+        <p:nvSpPr>
+          <p:cNvPr id="13" name="">
+            <a:extLst xmlns:a="http://schemas.openxmlformats.org/drawingml/2006/main">
+              <a:ext uri="{FF2B5EF4-FFF2-40B4-BE49-F238E27FC236}">
+                <a16:creationId xmlns:a16="http://schemas.microsoft.com/office/drawing/2014/main" id="{03283D39-FBEA-479D-88E1-46F1F4C330B5}"/>
+              </a:ext>
+            </a:extLst>
+          </p:cNvPr>
+          <p:cNvSpPr>
+            <a:spLocks xmlns:a="http://schemas.openxmlformats.org/drawingml/2006/main" noGrp="1"/>
+          </p:cNvSpPr>
+          <p:nvPr/>
+        </p:nvSpPr>
+        <p:spPr>
+          <a:xfrm xmlns:a="http://schemas.openxmlformats.org/drawingml/2006/main">
+            <a:off x="6534150" y="3429000"/>
+            <a:ext cx="4000500" cy="457200"/>
+          </a:xfrm>
+          <a:prstGeom xmlns:a="http://schemas.openxmlformats.org/drawingml/2006/main" prst="rect">
+            <a:avLst/>
+          </a:prstGeom>
+          <a:noFill xmlns:a="http://schemas.openxmlformats.org/drawingml/2006/main"/>
+          <a:ln xmlns:a="http://schemas.openxmlformats.org/drawingml/2006/main" w="0">
+            <a:noFill/>
+            <a:prstDash val="solid"/>
+          </a:ln>
+        </p:spPr>
+        <p:txBody>
+          <a:bodyPr xmlns:a="http://schemas.openxmlformats.org/drawingml/2006/main" anchor="t"/>
+          <a:lstStyle xmlns:a="http://schemas.openxmlformats.org/drawingml/2006/main"/>
+          <a:p xmlns:a="http://schemas.openxmlformats.org/drawingml/2006/main">
+            <a:pPr algn="l">
+              <a:buNone/>
+              <a:defRPr sz="2175" b="1">
+                <a:solidFill>
+                  <a:srgbClr val="101820"/>
+                </a:solidFill>
+                <a:latin typeface="Arial"/>
+                <a:ea typeface="Arial"/>
+                <a:cs typeface="Arial"/>
+              </a:defRPr>
+            </a:pPr>
+            <a:r>
+              <a:rPr sz="2175" b="1">
+                <a:solidFill>
+                  <a:srgbClr val="101820"/>
+                </a:solidFill>
+                <a:latin typeface="Arial"/>
+                <a:ea typeface="Arial"/>
+                <a:cs typeface="Arial"/>
+              </a:rPr>
+              <a:t>CAGR lift vs equal-weight 88</a:t>
+            </a:r>
+          </a:p>
+        </p:txBody>
+      </p:sp>
+      <p:sp>
+        <p:nvSpPr>
+          <p:cNvPr id="14" name="">
+            <a:extLst xmlns:a="http://schemas.openxmlformats.org/drawingml/2006/main">
+              <a:ext uri="{FF2B5EF4-FFF2-40B4-BE49-F238E27FC236}">
+                <a16:creationId xmlns:a16="http://schemas.microsoft.com/office/drawing/2014/main" id="{DB7B3C09-EAFE-41D8-880B-D0BE56096F33}"/>
+              </a:ext>
+            </a:extLst>
+          </p:cNvPr>
+          <p:cNvSpPr>
+            <a:spLocks xmlns:a="http://schemas.openxmlformats.org/drawingml/2006/main" noGrp="1"/>
+          </p:cNvSpPr>
+          <p:nvPr/>
+        </p:nvSpPr>
+        <p:spPr>
+          <a:xfrm xmlns:a="http://schemas.openxmlformats.org/drawingml/2006/main">
+            <a:off x="6534150" y="4000500"/>
+            <a:ext cx="4000500" cy="876300"/>
+          </a:xfrm>
+          <a:prstGeom xmlns:a="http://schemas.openxmlformats.org/drawingml/2006/main" prst="rect">
+            <a:avLst/>
+          </a:prstGeom>
+          <a:noFill xmlns:a="http://schemas.openxmlformats.org/drawingml/2006/main"/>
+          <a:ln xmlns:a="http://schemas.openxmlformats.org/drawingml/2006/main" w="0">
+            <a:noFill/>
+            <a:prstDash val="solid"/>
+          </a:ln>
+        </p:spPr>
+        <p:txBody>
+          <a:bodyPr xmlns:a="http://schemas.openxmlformats.org/drawingml/2006/main" anchor="t"/>
+          <a:lstStyle xmlns:a="http://schemas.openxmlformats.org/drawingml/2006/main"/>
+          <a:p xmlns:a="http://schemas.openxmlformats.org/drawingml/2006/main">
+            <a:pPr algn="l">
+              <a:buNone/>
+              <a:defRPr sz="1500" b="0">
+                <a:solidFill>
+                  <a:srgbClr val="52616B"/>
+                </a:solidFill>
+                <a:latin typeface="Arial"/>
+                <a:ea typeface="Arial"/>
+                <a:cs typeface="Arial"/>
+              </a:defRPr>
+            </a:pPr>
+            <a:r>
+              <a:rPr sz="1500" b="0">
+                <a:solidFill>
+                  <a:srgbClr val="52616B"/>
+                </a:solidFill>
+                <a:latin typeface="Arial"/>
+                <a:ea typeface="Arial"/>
+                <a:cs typeface="Arial"/>
+              </a:rPr>
+              <a:t>17.95% vs 17.04%</a:t>
+            </a:r>
+          </a:p>
+          <a:p xmlns:a="http://schemas.openxmlformats.org/drawingml/2006/main">
+            <a:pPr algn="l">
+              <a:buNone/>
+              <a:defRPr sz="1500" b="0">
+                <a:solidFill>
+                  <a:srgbClr val="52616B"/>
+                </a:solidFill>
+                <a:latin typeface="Arial"/>
+                <a:ea typeface="Arial"/>
+                <a:cs typeface="Arial"/>
+              </a:defRPr>
+            </a:pPr>
+            <a:r>
+              <a:rPr sz="1500" b="0">
+                <a:solidFill>
+                  <a:srgbClr val="52616B"/>
+                </a:solidFill>
+                <a:latin typeface="Arial"/>
+                <a:ea typeface="Arial"/>
+                <a:cs typeface="Arial"/>
+              </a:rPr>
+              <a:t>Descriptive, not promoted</a:t>
+            </a:r>
+          </a:p>
+        </p:txBody>
+      </p:sp>
+      <p:sp>
+        <p:nvSpPr>
+          <p:cNvPr id="15" name="">
+            <a:extLst xmlns:a="http://schemas.openxmlformats.org/drawingml/2006/main">
+              <a:ext uri="{FF2B5EF4-FFF2-40B4-BE49-F238E27FC236}">
+                <a16:creationId xmlns:a16="http://schemas.microsoft.com/office/drawing/2014/main" id="{0DF58B95-FF34-44E3-BD69-0887709C26B4}"/>
+              </a:ext>
+            </a:extLst>
+          </p:cNvPr>
+          <p:cNvSpPr>
+            <a:spLocks xmlns:a="http://schemas.openxmlformats.org/drawingml/2006/main" noGrp="1"/>
+          </p:cNvSpPr>
+          <p:nvPr/>
+        </p:nvSpPr>
+        <p:spPr>
+          <a:xfrm xmlns:a="http://schemas.openxmlformats.org/drawingml/2006/main">
+            <a:off x="2133600" y="5505450"/>
+            <a:ext cx="7924800" cy="381000"/>
+          </a:xfrm>
+          <a:prstGeom xmlns:a="http://schemas.openxmlformats.org/drawingml/2006/main" prst="rect">
+            <a:avLst/>
+          </a:prstGeom>
+          <a:noFill xmlns:a="http://schemas.openxmlformats.org/drawingml/2006/main"/>
+          <a:ln xmlns:a="http://schemas.openxmlformats.org/drawingml/2006/main" w="0">
+            <a:noFill/>
+            <a:prstDash val="solid"/>
+          </a:ln>
+        </p:spPr>
+        <p:txBody>
+          <a:bodyPr xmlns:a="http://schemas.openxmlformats.org/drawingml/2006/main" anchor="t"/>
+          <a:lstStyle xmlns:a="http://schemas.openxmlformats.org/drawingml/2006/main"/>
+          <a:p xmlns:a="http://schemas.openxmlformats.org/drawingml/2006/main">
+            <a:pPr algn="ctr">
+              <a:buNone/>
+              <a:defRPr sz="2175" b="1">
+                <a:solidFill>
+                  <a:srgbClr val="101820"/>
+                </a:solidFill>
+                <a:latin typeface="Arial"/>
+                <a:ea typeface="Arial"/>
+                <a:cs typeface="Arial"/>
+              </a:defRPr>
+            </a:pPr>
+            <a:r>
+              <a:rPr sz="2175" b="1">
+                <a:solidFill>
+                  <a:srgbClr val="101820"/>
+                </a:solidFill>
+                <a:latin typeface="Arial"/>
+                <a:ea typeface="Arial"/>
+                <a:cs typeface="Arial"/>
+              </a:rPr>
+              <a:t>Cross-sector substitution helps ranking—but not the complete source rule.</a:t>
+            </a:r>
+          </a:p>
+        </p:txBody>
+      </p:sp>
+    </p:spTree>
+    <p:extLst>
+      <p:ext uri="{BB962C8B-B14F-4D97-AF65-F5344CB8AC3E}">
+        <p14:creationId xmlns:p14="http://schemas.microsoft.com/office/powerpoint/2010/main" val="1503881080"/>
+      </p:ext>
+    </p:extLst>
+  </p:cSld>
+</p:sld>
+</file>
+
+<file path=ppt/slides/slide32.xml><?xml version="1.0" encoding="utf-8"?>
+<p:sld xmlns:p="http://schemas.openxmlformats.org/presentationml/2006/main">
+  <p:cSld>
+    <p:bg>
+      <p:bgPr>
+        <a:solidFill xmlns:a="http://schemas.openxmlformats.org/drawingml/2006/main">
+          <a:srgbClr val="FFFFFF"/>
+        </a:solidFill>
+      </p:bgPr>
+    </p:bg>
+    <p:spTree>
+      <p:nvGrpSpPr>
+        <p:cNvPr id="1" name=""/>
+        <p:cNvGrpSpPr/>
+        <p:nvPr/>
+      </p:nvGrpSpPr>
+      <p:grpSpPr>
+        <a:xfrm xmlns:a="http://schemas.openxmlformats.org/drawingml/2006/main"/>
+      </p:grpSpPr>
+      <p:sp>
+        <p:nvSpPr>
+          <p:cNvPr id="18" name="">
+            <a:extLst xmlns:a="http://schemas.openxmlformats.org/drawingml/2006/main">
+              <a:ext uri="{FF2B5EF4-FFF2-40B4-BE49-F238E27FC236}">
+                <a16:creationId xmlns:a16="http://schemas.microsoft.com/office/drawing/2014/main" id="{86AB4CD6-A066-4BA6-83E2-7BED7686F042}"/>
+              </a:ext>
+            </a:extLst>
+          </p:cNvPr>
+          <p:cNvSpPr>
+            <a:spLocks xmlns:a="http://schemas.openxmlformats.org/drawingml/2006/main" noGrp="1"/>
+          </p:cNvSpPr>
+          <p:nvPr/>
+        </p:nvSpPr>
+        <p:spPr>
+          <a:xfrm xmlns:a="http://schemas.openxmlformats.org/drawingml/2006/main">
+            <a:off x="400050" y="228600"/>
+            <a:ext cx="2857500" cy="228600"/>
+          </a:xfrm>
+          <a:prstGeom xmlns:a="http://schemas.openxmlformats.org/drawingml/2006/main" prst="rect">
+            <a:avLst/>
+          </a:prstGeom>
+          <a:noFill xmlns:a="http://schemas.openxmlformats.org/drawingml/2006/main"/>
+          <a:ln xmlns:a="http://schemas.openxmlformats.org/drawingml/2006/main" w="0">
+            <a:noFill/>
+            <a:prstDash val="solid"/>
+          </a:ln>
+        </p:spPr>
+        <p:txBody>
+          <a:bodyPr xmlns:a="http://schemas.openxmlformats.org/drawingml/2006/main" anchor="t"/>
+          <a:lstStyle xmlns:a="http://schemas.openxmlformats.org/drawingml/2006/main"/>
+          <a:p xmlns:a="http://schemas.openxmlformats.org/drawingml/2006/main">
+            <a:pPr algn="l">
+              <a:buNone/>
+              <a:defRPr sz="1200" b="1">
+                <a:solidFill>
+                  <a:srgbClr val="3D8DFF"/>
+                </a:solidFill>
+                <a:latin typeface="Arial"/>
+                <a:ea typeface="Arial"/>
+                <a:cs typeface="Arial"/>
+              </a:defRPr>
+            </a:pPr>
+            <a:r>
+              <a:rPr sz="1200" b="1">
+                <a:solidFill>
+                  <a:srgbClr val="3D8DFF"/>
+                </a:solidFill>
+                <a:latin typeface="Arial"/>
+                <a:ea typeface="Arial"/>
+                <a:cs typeface="Arial"/>
+              </a:rPr>
+              <a:t>LIT-MOM-03.3</a:t>
+            </a:r>
+          </a:p>
+        </p:txBody>
+      </p:sp>
+      <p:sp>
+        <p:nvSpPr>
+          <p:cNvPr id="2" name="slide-9-title">
+            <a:extLst xmlns:a="http://schemas.openxmlformats.org/drawingml/2006/main">
+              <a:ext uri="{FF2B5EF4-FFF2-40B4-BE49-F238E27FC236}">
+                <a16:creationId xmlns:a16="http://schemas.microsoft.com/office/drawing/2014/main" id="{204441B9-2B0E-4029-B489-A1293A42A74D}"/>
+              </a:ext>
+            </a:extLst>
+          </p:cNvPr>
+          <p:cNvSpPr>
+            <a:spLocks xmlns:a="http://schemas.openxmlformats.org/drawingml/2006/main" noGrp="1"/>
+          </p:cNvSpPr>
+          <p:nvPr/>
+        </p:nvSpPr>
+        <p:spPr>
+          <a:xfrm xmlns:a="http://schemas.openxmlformats.org/drawingml/2006/main">
+            <a:off x="400050" y="476250"/>
+            <a:ext cx="11049000" cy="819150"/>
+          </a:xfrm>
+          <a:prstGeom xmlns:a="http://schemas.openxmlformats.org/drawingml/2006/main" prst="rect">
+            <a:avLst/>
+          </a:prstGeom>
+          <a:noFill xmlns:a="http://schemas.openxmlformats.org/drawingml/2006/main"/>
+          <a:ln xmlns:a="http://schemas.openxmlformats.org/drawingml/2006/main" w="0">
+            <a:noFill/>
+            <a:prstDash val="solid"/>
+          </a:ln>
+        </p:spPr>
+        <p:txBody>
+          <a:bodyPr xmlns:a="http://schemas.openxmlformats.org/drawingml/2006/main" anchor="t"/>
+          <a:lstStyle xmlns:a="http://schemas.openxmlformats.org/drawingml/2006/main"/>
+          <a:p xmlns:a="http://schemas.openxmlformats.org/drawingml/2006/main">
+            <a:pPr algn="l">
+              <a:buNone/>
+              <a:defRPr sz="2700" b="1">
+                <a:solidFill>
+                  <a:srgbClr val="101820"/>
+                </a:solidFill>
+                <a:latin typeface="Arial"/>
+                <a:ea typeface="Arial"/>
+                <a:cs typeface="Arial"/>
+              </a:defRPr>
+            </a:pPr>
+            <a:r>
+              <a:rPr sz="2700" b="1">
+                <a:solidFill>
+                  <a:srgbClr val="101820"/>
+                </a:solidFill>
+                <a:latin typeface="Arial"/>
+                <a:ea typeface="Arial"/>
+                <a:cs typeface="Arial"/>
+              </a:rPr>
+              <a:t>Breadth scales; the source mechanics do not change</a:t>
+            </a:r>
+          </a:p>
+        </p:txBody>
+      </p:sp>
+      <p:sp>
+        <p:nvSpPr>
+          <p:cNvPr id="3" name="">
+            <a:extLst xmlns:a="http://schemas.openxmlformats.org/drawingml/2006/main">
+              <a:ext uri="{FF2B5EF4-FFF2-40B4-BE49-F238E27FC236}">
+                <a16:creationId xmlns:a16="http://schemas.microsoft.com/office/drawing/2014/main" id="{9C4A5C3A-384E-47D6-952B-25278B045246}"/>
+              </a:ext>
+            </a:extLst>
+          </p:cNvPr>
+          <p:cNvSpPr>
+            <a:spLocks xmlns:a="http://schemas.openxmlformats.org/drawingml/2006/main" noGrp="1"/>
+          </p:cNvSpPr>
+          <p:nvPr/>
+        </p:nvSpPr>
+        <p:spPr>
+          <a:xfrm xmlns:a="http://schemas.openxmlformats.org/drawingml/2006/main">
+            <a:off x="400050" y="1428750"/>
+            <a:ext cx="11391900" cy="0"/>
+          </a:xfrm>
+          <a:prstGeom xmlns:a="http://schemas.openxmlformats.org/drawingml/2006/main" prst="line">
+            <a:avLst/>
+          </a:prstGeom>
+          <a:noFill xmlns:a="http://schemas.openxmlformats.org/drawingml/2006/main"/>
+          <a:ln xmlns:a="http://schemas.openxmlformats.org/drawingml/2006/main" w="9525">
+            <a:solidFill>
+              <a:srgbClr val="B8BCC4"/>
+            </a:solidFill>
+            <a:prstDash val="solid"/>
+          </a:ln>
+        </p:spPr>
+      </p:sp>
+      <p:sp>
+        <p:nvSpPr>
+          <p:cNvPr id="4" name="slide-9-number">
+            <a:extLst xmlns:a="http://schemas.openxmlformats.org/drawingml/2006/main">
+              <a:ext uri="{FF2B5EF4-FFF2-40B4-BE49-F238E27FC236}">
+                <a16:creationId xmlns:a16="http://schemas.microsoft.com/office/drawing/2014/main" id="{5EBD817D-F347-40A2-BECC-BF81DCE7FD7B}"/>
+              </a:ext>
+            </a:extLst>
+          </p:cNvPr>
+          <p:cNvSpPr>
+            <a:spLocks xmlns:a="http://schemas.openxmlformats.org/drawingml/2006/main" noGrp="1"/>
+          </p:cNvSpPr>
+          <p:nvPr/>
+        </p:nvSpPr>
+        <p:spPr>
+          <a:xfrm xmlns:a="http://schemas.openxmlformats.org/drawingml/2006/main">
+            <a:off x="11163300" y="6362700"/>
+            <a:ext cx="609600" cy="228600"/>
+          </a:xfrm>
+          <a:prstGeom xmlns:a="http://schemas.openxmlformats.org/drawingml/2006/main" prst="rect">
+            <a:avLst/>
+          </a:prstGeom>
+          <a:noFill xmlns:a="http://schemas.openxmlformats.org/drawingml/2006/main"/>
+          <a:ln xmlns:a="http://schemas.openxmlformats.org/drawingml/2006/main" w="0">
+            <a:noFill/>
+            <a:prstDash val="solid"/>
+          </a:ln>
+        </p:spPr>
+        <p:txBody>
+          <a:bodyPr xmlns:a="http://schemas.openxmlformats.org/drawingml/2006/main" anchor="t"/>
+          <a:lstStyle xmlns:a="http://schemas.openxmlformats.org/drawingml/2006/main"/>
+          <a:p xmlns:a="http://schemas.openxmlformats.org/drawingml/2006/main">
+            <a:pPr algn="r">
+              <a:buNone/>
+              <a:defRPr sz="1200" b="0">
+                <a:solidFill>
+                  <a:srgbClr val="52616B"/>
+                </a:solidFill>
+                <a:latin typeface="Arial"/>
+                <a:ea typeface="Arial"/>
+                <a:cs typeface="Arial"/>
+              </a:defRPr>
+            </a:pPr>
+            <a:r>
+              <a:rPr sz="1200" b="0">
+                <a:solidFill>
+                  <a:srgbClr val="52616B"/>
+                </a:solidFill>
+                <a:latin typeface="Arial"/>
+                <a:ea typeface="Arial"/>
+                <a:cs typeface="Arial"/>
+              </a:rPr>
+              <a:t> 32</a:t>
+            </a:r>
+          </a:p>
+        </p:txBody>
+      </p:sp>
+      <p:sp>
+        <p:nvSpPr>
+          <p:cNvPr id="5" name="">
+            <a:extLst xmlns:a="http://schemas.openxmlformats.org/drawingml/2006/main">
+              <a:ext uri="{FF2B5EF4-FFF2-40B4-BE49-F238E27FC236}">
+                <a16:creationId xmlns:a16="http://schemas.microsoft.com/office/drawing/2014/main" id="{CE16435F-A773-4C41-B1F9-65A53A461560}"/>
+              </a:ext>
+            </a:extLst>
+          </p:cNvPr>
+          <p:cNvSpPr>
+            <a:spLocks xmlns:a="http://schemas.openxmlformats.org/drawingml/2006/main" noGrp="1"/>
+          </p:cNvSpPr>
+          <p:nvPr/>
+        </p:nvSpPr>
+        <p:spPr>
+          <a:xfrm xmlns:a="http://schemas.openxmlformats.org/drawingml/2006/main">
+            <a:off x="609600" y="1657350"/>
+            <a:ext cx="1714500" cy="247650"/>
+          </a:xfrm>
+          <a:prstGeom xmlns:a="http://schemas.openxmlformats.org/drawingml/2006/main" prst="rect">
+            <a:avLst/>
+          </a:prstGeom>
+          <a:noFill xmlns:a="http://schemas.openxmlformats.org/drawingml/2006/main"/>
+          <a:ln xmlns:a="http://schemas.openxmlformats.org/drawingml/2006/main" w="0">
+            <a:noFill/>
+            <a:prstDash val="solid"/>
+          </a:ln>
+        </p:spPr>
+        <p:txBody>
+          <a:bodyPr xmlns:a="http://schemas.openxmlformats.org/drawingml/2006/main" anchor="t"/>
+          <a:lstStyle xmlns:a="http://schemas.openxmlformats.org/drawingml/2006/main"/>
+          <a:p xmlns:a="http://schemas.openxmlformats.org/drawingml/2006/main">
+            <a:pPr algn="l">
+              <a:buNone/>
+              <a:defRPr sz="1275" b="1">
+                <a:solidFill>
+                  <a:srgbClr val="3D8DFF"/>
+                </a:solidFill>
+                <a:latin typeface="Arial"/>
+                <a:ea typeface="Arial"/>
+                <a:cs typeface="Arial"/>
+              </a:defRPr>
+            </a:pPr>
+            <a:r>
+              <a:rPr sz="1275" b="1">
+                <a:solidFill>
+                  <a:srgbClr val="3D8DFF"/>
+                </a:solidFill>
+                <a:latin typeface="Arial"/>
+                <a:ea typeface="Arial"/>
+                <a:cs typeface="Arial"/>
+              </a:rPr>
+              <a:t>UNIVERSE</a:t>
+            </a:r>
+          </a:p>
+        </p:txBody>
+      </p:sp>
+      <p:sp>
+        <p:nvSpPr>
+          <p:cNvPr id="6" name="">
+            <a:extLst xmlns:a="http://schemas.openxmlformats.org/drawingml/2006/main">
+              <a:ext uri="{FF2B5EF4-FFF2-40B4-BE49-F238E27FC236}">
+                <a16:creationId xmlns:a16="http://schemas.microsoft.com/office/drawing/2014/main" id="{DA51A465-7554-45A3-89FC-97D4DC096775}"/>
+              </a:ext>
+            </a:extLst>
+          </p:cNvPr>
+          <p:cNvSpPr>
+            <a:spLocks xmlns:a="http://schemas.openxmlformats.org/drawingml/2006/main" noGrp="1"/>
+          </p:cNvSpPr>
+          <p:nvPr/>
+        </p:nvSpPr>
+        <p:spPr>
+          <a:xfrm xmlns:a="http://schemas.openxmlformats.org/drawingml/2006/main">
+            <a:off x="609600" y="2019300"/>
+            <a:ext cx="10953750" cy="400050"/>
+          </a:xfrm>
+          <a:prstGeom xmlns:a="http://schemas.openxmlformats.org/drawingml/2006/main" prst="rect">
+            <a:avLst/>
+          </a:prstGeom>
+          <a:noFill xmlns:a="http://schemas.openxmlformats.org/drawingml/2006/main"/>
+          <a:ln xmlns:a="http://schemas.openxmlformats.org/drawingml/2006/main" w="0">
+            <a:noFill/>
+            <a:prstDash val="solid"/>
+          </a:ln>
+        </p:spPr>
+        <p:txBody>
+          <a:bodyPr xmlns:a="http://schemas.openxmlformats.org/drawingml/2006/main" anchor="t"/>
+          <a:lstStyle xmlns:a="http://schemas.openxmlformats.org/drawingml/2006/main"/>
+          <a:p xmlns:a="http://schemas.openxmlformats.org/drawingml/2006/main">
+            <a:pPr algn="l">
+              <a:buNone/>
+              <a:defRPr sz="2025" b="1">
+                <a:solidFill>
+                  <a:srgbClr val="101820"/>
+                </a:solidFill>
+                <a:latin typeface="Arial"/>
+                <a:ea typeface="Arial"/>
+                <a:cs typeface="Arial"/>
+              </a:defRPr>
+            </a:pPr>
+            <a:r>
+              <a:rPr sz="2025" b="1">
+                <a:solidFill>
+                  <a:srgbClr val="101820"/>
+                </a:solidFill>
+                <a:latin typeface="Arial"/>
+                <a:ea typeface="Arial"/>
+                <a:cs typeface="Arial"/>
+              </a:rPr>
+              <a:t>One static 88-stock fleet · eleven sectors · eight names each</a:t>
+            </a:r>
+          </a:p>
+        </p:txBody>
+      </p:sp>
+      <p:sp>
+        <p:nvSpPr>
+          <p:cNvPr id="7" name="">
+            <a:extLst xmlns:a="http://schemas.openxmlformats.org/drawingml/2006/main">
+              <a:ext uri="{FF2B5EF4-FFF2-40B4-BE49-F238E27FC236}">
+                <a16:creationId xmlns:a16="http://schemas.microsoft.com/office/drawing/2014/main" id="{8A9F2320-DB88-4F35-8CC6-DB00FC1B05DE}"/>
+              </a:ext>
+            </a:extLst>
+          </p:cNvPr>
+          <p:cNvSpPr>
+            <a:spLocks xmlns:a="http://schemas.openxmlformats.org/drawingml/2006/main" noGrp="1"/>
+          </p:cNvSpPr>
+          <p:nvPr/>
+        </p:nvSpPr>
+        <p:spPr>
+          <a:xfrm xmlns:a="http://schemas.openxmlformats.org/drawingml/2006/main">
+            <a:off x="609600" y="2647950"/>
+            <a:ext cx="10953750" cy="0"/>
+          </a:xfrm>
+          <a:prstGeom xmlns:a="http://schemas.openxmlformats.org/drawingml/2006/main" prst="line">
+            <a:avLst/>
+          </a:prstGeom>
+          <a:noFill xmlns:a="http://schemas.openxmlformats.org/drawingml/2006/main"/>
+          <a:ln xmlns:a="http://schemas.openxmlformats.org/drawingml/2006/main" w="9525">
+            <a:solidFill>
+              <a:srgbClr val="B8BCC4"/>
+            </a:solidFill>
+            <a:prstDash val="solid"/>
+          </a:ln>
+        </p:spPr>
+      </p:sp>
+      <p:sp>
+        <p:nvSpPr>
+          <p:cNvPr id="8" name="">
+            <a:extLst xmlns:a="http://schemas.openxmlformats.org/drawingml/2006/main">
+              <a:ext uri="{FF2B5EF4-FFF2-40B4-BE49-F238E27FC236}">
+                <a16:creationId xmlns:a16="http://schemas.microsoft.com/office/drawing/2014/main" id="{1F61F531-F8BA-48C3-B110-1E615831EA34}"/>
+              </a:ext>
+            </a:extLst>
+          </p:cNvPr>
+          <p:cNvSpPr>
+            <a:spLocks xmlns:a="http://schemas.openxmlformats.org/drawingml/2006/main" noGrp="1"/>
+          </p:cNvSpPr>
+          <p:nvPr/>
+        </p:nvSpPr>
+        <p:spPr>
+          <a:xfrm xmlns:a="http://schemas.openxmlformats.org/drawingml/2006/main">
+            <a:off x="666750" y="3067050"/>
+            <a:ext cx="2286000" cy="266700"/>
+          </a:xfrm>
+          <a:prstGeom xmlns:a="http://schemas.openxmlformats.org/drawingml/2006/main" prst="rect">
+            <a:avLst/>
+          </a:prstGeom>
+          <a:noFill xmlns:a="http://schemas.openxmlformats.org/drawingml/2006/main"/>
+          <a:ln xmlns:a="http://schemas.openxmlformats.org/drawingml/2006/main" w="0">
+            <a:noFill/>
+            <a:prstDash val="solid"/>
+          </a:ln>
+        </p:spPr>
+        <p:txBody>
+          <a:bodyPr xmlns:a="http://schemas.openxmlformats.org/drawingml/2006/main" anchor="t"/>
+          <a:lstStyle xmlns:a="http://schemas.openxmlformats.org/drawingml/2006/main"/>
+          <a:p xmlns:a="http://schemas.openxmlformats.org/drawingml/2006/main">
+            <a:pPr algn="l">
+              <a:buNone/>
+              <a:defRPr sz="1275" b="1">
+                <a:solidFill>
+                  <a:srgbClr val="3D8DFF"/>
+                </a:solidFill>
+                <a:latin typeface="Arial"/>
+                <a:ea typeface="Arial"/>
+                <a:cs typeface="Arial"/>
+              </a:defRPr>
+            </a:pPr>
+            <a:r>
+              <a:rPr sz="1275" b="1">
+                <a:solidFill>
+                  <a:srgbClr val="3D8DFF"/>
+                </a:solidFill>
+                <a:latin typeface="Arial"/>
+                <a:ea typeface="Arial"/>
+                <a:cs typeface="Arial"/>
+              </a:rPr>
+              <a:t>BREADTH</a:t>
+            </a:r>
+          </a:p>
+        </p:txBody>
+      </p:sp>
+      <p:sp>
+        <p:nvSpPr>
+          <p:cNvPr id="9" name="">
+            <a:extLst xmlns:a="http://schemas.openxmlformats.org/drawingml/2006/main">
+              <a:ext uri="{FF2B5EF4-FFF2-40B4-BE49-F238E27FC236}">
+                <a16:creationId xmlns:a16="http://schemas.microsoft.com/office/drawing/2014/main" id="{47A3F430-BD14-424C-8A98-AA2A7B48047A}"/>
+              </a:ext>
+            </a:extLst>
+          </p:cNvPr>
+          <p:cNvSpPr>
+            <a:spLocks xmlns:a="http://schemas.openxmlformats.org/drawingml/2006/main" noGrp="1"/>
+          </p:cNvSpPr>
+          <p:nvPr/>
+        </p:nvSpPr>
+        <p:spPr>
+          <a:xfrm xmlns:a="http://schemas.openxmlformats.org/drawingml/2006/main">
+            <a:off x="666750" y="3524250"/>
+            <a:ext cx="2286000" cy="1028700"/>
+          </a:xfrm>
+          <a:prstGeom xmlns:a="http://schemas.openxmlformats.org/drawingml/2006/main" prst="rect">
+            <a:avLst/>
+          </a:prstGeom>
+          <a:noFill xmlns:a="http://schemas.openxmlformats.org/drawingml/2006/main"/>
+          <a:ln xmlns:a="http://schemas.openxmlformats.org/drawingml/2006/main" w="0">
+            <a:noFill/>
+            <a:prstDash val="solid"/>
+          </a:ln>
+        </p:spPr>
+        <p:txBody>
+          <a:bodyPr xmlns:a="http://schemas.openxmlformats.org/drawingml/2006/main" anchor="t"/>
+          <a:lstStyle xmlns:a="http://schemas.openxmlformats.org/drawingml/2006/main"/>
+          <a:p xmlns:a="http://schemas.openxmlformats.org/drawingml/2006/main">
+            <a:pPr algn="l">
+              <a:buNone/>
+              <a:defRPr sz="2025" b="1">
+                <a:solidFill>
+                  <a:srgbClr val="101820"/>
+                </a:solidFill>
+                <a:latin typeface="Arial"/>
+                <a:ea typeface="Arial"/>
+                <a:cs typeface="Arial"/>
+              </a:defRPr>
+            </a:pPr>
+            <a:r>
+              <a:rPr sz="2025" b="1">
+                <a:solidFill>
+                  <a:srgbClr val="101820"/>
+                </a:solidFill>
+                <a:latin typeface="Arial"/>
+                <a:ea typeface="Arial"/>
+                <a:cs typeface="Arial"/>
+              </a:rPr>
+              <a:t>29 of 88</a:t>
+            </a:r>
+          </a:p>
+          <a:p xmlns:a="http://schemas.openxmlformats.org/drawingml/2006/main">
+            <a:pPr algn="l">
+              <a:buNone/>
+              <a:defRPr sz="2025" b="1">
+                <a:solidFill>
+                  <a:srgbClr val="101820"/>
+                </a:solidFill>
+                <a:latin typeface="Arial"/>
+                <a:ea typeface="Arial"/>
+                <a:cs typeface="Arial"/>
+              </a:defRPr>
+            </a:pPr>
+            <a:r>
+              <a:rPr sz="2025" b="1">
+                <a:solidFill>
+                  <a:srgbClr val="101820"/>
+                </a:solidFill>
+                <a:latin typeface="Arial"/>
+                <a:ea typeface="Arial"/>
+                <a:cs typeface="Arial"/>
+              </a:rPr>
+              <a:t>per sleeve</a:t>
+            </a:r>
+          </a:p>
+        </p:txBody>
+      </p:sp>
+      <p:sp>
+        <p:nvSpPr>
+          <p:cNvPr id="10" name="">
+            <a:extLst xmlns:a="http://schemas.openxmlformats.org/drawingml/2006/main">
+              <a:ext uri="{FF2B5EF4-FFF2-40B4-BE49-F238E27FC236}">
+                <a16:creationId xmlns:a16="http://schemas.microsoft.com/office/drawing/2014/main" id="{7B4B8567-8507-4AD7-A8F3-B7C8821C4E8E}"/>
+              </a:ext>
+            </a:extLst>
+          </p:cNvPr>
+          <p:cNvSpPr>
+            <a:spLocks xmlns:a="http://schemas.openxmlformats.org/drawingml/2006/main" noGrp="1"/>
+          </p:cNvSpPr>
+          <p:nvPr/>
+        </p:nvSpPr>
+        <p:spPr>
+          <a:xfrm xmlns:a="http://schemas.openxmlformats.org/drawingml/2006/main">
+            <a:off x="3429000" y="3067050"/>
+            <a:ext cx="2286000" cy="266700"/>
+          </a:xfrm>
+          <a:prstGeom xmlns:a="http://schemas.openxmlformats.org/drawingml/2006/main" prst="rect">
+            <a:avLst/>
+          </a:prstGeom>
+          <a:noFill xmlns:a="http://schemas.openxmlformats.org/drawingml/2006/main"/>
+          <a:ln xmlns:a="http://schemas.openxmlformats.org/drawingml/2006/main" w="0">
+            <a:noFill/>
+            <a:prstDash val="solid"/>
+          </a:ln>
+        </p:spPr>
+        <p:txBody>
+          <a:bodyPr xmlns:a="http://schemas.openxmlformats.org/drawingml/2006/main" anchor="t"/>
+          <a:lstStyle xmlns:a="http://schemas.openxmlformats.org/drawingml/2006/main"/>
+          <a:p xmlns:a="http://schemas.openxmlformats.org/drawingml/2006/main">
+            <a:pPr algn="l">
+              <a:buNone/>
+              <a:defRPr sz="1275" b="1">
+                <a:solidFill>
+                  <a:srgbClr val="3D8DFF"/>
+                </a:solidFill>
+                <a:latin typeface="Arial"/>
+                <a:ea typeface="Arial"/>
+                <a:cs typeface="Arial"/>
+              </a:defRPr>
+            </a:pPr>
+            <a:r>
+              <a:rPr sz="1275" b="1">
+                <a:solidFill>
+                  <a:srgbClr val="3D8DFF"/>
+                </a:solidFill>
+                <a:latin typeface="Arial"/>
+                <a:ea typeface="Arial"/>
+                <a:cs typeface="Arial"/>
+              </a:rPr>
+              <a:t>SIGNAL</a:t>
+            </a:r>
+          </a:p>
+        </p:txBody>
+      </p:sp>
+      <p:sp>
+        <p:nvSpPr>
+          <p:cNvPr id="11" name="">
+            <a:extLst xmlns:a="http://schemas.openxmlformats.org/drawingml/2006/main">
+              <a:ext uri="{FF2B5EF4-FFF2-40B4-BE49-F238E27FC236}">
+                <a16:creationId xmlns:a16="http://schemas.microsoft.com/office/drawing/2014/main" id="{EE99CB67-3B4D-4239-96EC-C5AE0846EE8A}"/>
+              </a:ext>
+            </a:extLst>
+          </p:cNvPr>
+          <p:cNvSpPr>
+            <a:spLocks xmlns:a="http://schemas.openxmlformats.org/drawingml/2006/main" noGrp="1"/>
+          </p:cNvSpPr>
+          <p:nvPr/>
+        </p:nvSpPr>
+        <p:spPr>
+          <a:xfrm xmlns:a="http://schemas.openxmlformats.org/drawingml/2006/main">
+            <a:off x="3429000" y="3524250"/>
+            <a:ext cx="2286000" cy="1028700"/>
+          </a:xfrm>
+          <a:prstGeom xmlns:a="http://schemas.openxmlformats.org/drawingml/2006/main" prst="rect">
+            <a:avLst/>
+          </a:prstGeom>
+          <a:noFill xmlns:a="http://schemas.openxmlformats.org/drawingml/2006/main"/>
+          <a:ln xmlns:a="http://schemas.openxmlformats.org/drawingml/2006/main" w="0">
+            <a:noFill/>
+            <a:prstDash val="solid"/>
+          </a:ln>
+        </p:spPr>
+        <p:txBody>
+          <a:bodyPr xmlns:a="http://schemas.openxmlformats.org/drawingml/2006/main" anchor="t"/>
+          <a:lstStyle xmlns:a="http://schemas.openxmlformats.org/drawingml/2006/main"/>
+          <a:p xmlns:a="http://schemas.openxmlformats.org/drawingml/2006/main">
+            <a:pPr algn="l">
+              <a:buNone/>
+              <a:defRPr sz="2025" b="1">
+                <a:solidFill>
+                  <a:srgbClr val="101820"/>
+                </a:solidFill>
+                <a:latin typeface="Arial"/>
+                <a:ea typeface="Arial"/>
+                <a:cs typeface="Arial"/>
+              </a:defRPr>
+            </a:pPr>
+            <a:r>
+              <a:rPr sz="2025" b="1">
+                <a:solidFill>
+                  <a:srgbClr val="101820"/>
+                </a:solidFill>
+                <a:latin typeface="Arial"/>
+                <a:ea typeface="Arial"/>
+                <a:cs typeface="Arial"/>
+              </a:rPr>
+              <a:t>Wednesday close</a:t>
+            </a:r>
+          </a:p>
+          <a:p xmlns:a="http://schemas.openxmlformats.org/drawingml/2006/main">
+            <a:pPr algn="l">
+              <a:buNone/>
+              <a:defRPr sz="2025" b="1">
+                <a:solidFill>
+                  <a:srgbClr val="101820"/>
+                </a:solidFill>
+                <a:latin typeface="Arial"/>
+                <a:ea typeface="Arial"/>
+                <a:cs typeface="Arial"/>
+              </a:defRPr>
+            </a:pPr>
+            <a:r>
+              <a:rPr sz="2025" b="1">
+                <a:solidFill>
+                  <a:srgbClr val="101820"/>
+                </a:solidFill>
+                <a:latin typeface="Arial"/>
+                <a:ea typeface="Arial"/>
+                <a:cs typeface="Arial"/>
+              </a:rPr>
+              <a:t>10- &amp; 25-week ROC</a:t>
+            </a:r>
+          </a:p>
+        </p:txBody>
+      </p:sp>
+      <p:sp>
+        <p:nvSpPr>
+          <p:cNvPr id="12" name="">
+            <a:extLst xmlns:a="http://schemas.openxmlformats.org/drawingml/2006/main">
+              <a:ext uri="{FF2B5EF4-FFF2-40B4-BE49-F238E27FC236}">
+                <a16:creationId xmlns:a16="http://schemas.microsoft.com/office/drawing/2014/main" id="{E2336303-E925-419F-BA88-E200EA9CDF26}"/>
+              </a:ext>
+            </a:extLst>
+          </p:cNvPr>
+          <p:cNvSpPr>
+            <a:spLocks xmlns:a="http://schemas.openxmlformats.org/drawingml/2006/main" noGrp="1"/>
+          </p:cNvSpPr>
+          <p:nvPr/>
+        </p:nvSpPr>
+        <p:spPr>
+          <a:xfrm xmlns:a="http://schemas.openxmlformats.org/drawingml/2006/main">
+            <a:off x="6191250" y="3067050"/>
+            <a:ext cx="2286000" cy="266700"/>
+          </a:xfrm>
+          <a:prstGeom xmlns:a="http://schemas.openxmlformats.org/drawingml/2006/main" prst="rect">
+            <a:avLst/>
+          </a:prstGeom>
+          <a:noFill xmlns:a="http://schemas.openxmlformats.org/drawingml/2006/main"/>
+          <a:ln xmlns:a="http://schemas.openxmlformats.org/drawingml/2006/main" w="0">
+            <a:noFill/>
+            <a:prstDash val="solid"/>
+          </a:ln>
+        </p:spPr>
+        <p:txBody>
+          <a:bodyPr xmlns:a="http://schemas.openxmlformats.org/drawingml/2006/main" anchor="t"/>
+          <a:lstStyle xmlns:a="http://schemas.openxmlformats.org/drawingml/2006/main"/>
+          <a:p xmlns:a="http://schemas.openxmlformats.org/drawingml/2006/main">
+            <a:pPr algn="l">
+              <a:buNone/>
+              <a:defRPr sz="1275" b="1">
+                <a:solidFill>
+                  <a:srgbClr val="3D8DFF"/>
+                </a:solidFill>
+                <a:latin typeface="Arial"/>
+                <a:ea typeface="Arial"/>
+                <a:cs typeface="Arial"/>
+              </a:defRPr>
+            </a:pPr>
+            <a:r>
+              <a:rPr sz="1275" b="1">
+                <a:solidFill>
+                  <a:srgbClr val="3D8DFF"/>
+                </a:solidFill>
+                <a:latin typeface="Arial"/>
+                <a:ea typeface="Arial"/>
+                <a:cs typeface="Arial"/>
+              </a:rPr>
+              <a:t>PERMISSION</a:t>
+            </a:r>
+          </a:p>
+        </p:txBody>
+      </p:sp>
+      <p:sp>
+        <p:nvSpPr>
+          <p:cNvPr id="13" name="">
+            <a:extLst xmlns:a="http://schemas.openxmlformats.org/drawingml/2006/main">
+              <a:ext uri="{FF2B5EF4-FFF2-40B4-BE49-F238E27FC236}">
+                <a16:creationId xmlns:a16="http://schemas.microsoft.com/office/drawing/2014/main" id="{E87F69DB-3722-4584-ACD7-5794C8CC09D7}"/>
+              </a:ext>
+            </a:extLst>
+          </p:cNvPr>
+          <p:cNvSpPr>
+            <a:spLocks xmlns:a="http://schemas.openxmlformats.org/drawingml/2006/main" noGrp="1"/>
+          </p:cNvSpPr>
+          <p:nvPr/>
+        </p:nvSpPr>
+        <p:spPr>
+          <a:xfrm xmlns:a="http://schemas.openxmlformats.org/drawingml/2006/main">
+            <a:off x="6191250" y="3524250"/>
+            <a:ext cx="2286000" cy="1028700"/>
+          </a:xfrm>
+          <a:prstGeom xmlns:a="http://schemas.openxmlformats.org/drawingml/2006/main" prst="rect">
+            <a:avLst/>
+          </a:prstGeom>
+          <a:noFill xmlns:a="http://schemas.openxmlformats.org/drawingml/2006/main"/>
+          <a:ln xmlns:a="http://schemas.openxmlformats.org/drawingml/2006/main" w="0">
+            <a:noFill/>
+            <a:prstDash val="solid"/>
+          </a:ln>
+        </p:spPr>
+        <p:txBody>
+          <a:bodyPr xmlns:a="http://schemas.openxmlformats.org/drawingml/2006/main" anchor="t"/>
+          <a:lstStyle xmlns:a="http://schemas.openxmlformats.org/drawingml/2006/main"/>
+          <a:p xmlns:a="http://schemas.openxmlformats.org/drawingml/2006/main">
+            <a:pPr algn="l">
+              <a:buNone/>
+              <a:defRPr sz="2025" b="1">
+                <a:solidFill>
+                  <a:srgbClr val="101820"/>
+                </a:solidFill>
+                <a:latin typeface="Arial"/>
+                <a:ea typeface="Arial"/>
+                <a:cs typeface="Arial"/>
+              </a:defRPr>
+            </a:pPr>
+            <a:r>
+              <a:rPr sz="2025" b="1">
+                <a:solidFill>
+                  <a:srgbClr val="101820"/>
+                </a:solidFill>
+                <a:latin typeface="Arial"/>
+                <a:ea typeface="Arial"/>
+                <a:cs typeface="Arial"/>
+              </a:rPr>
+              <a:t>Positive only</a:t>
+            </a:r>
+          </a:p>
+          <a:p xmlns:a="http://schemas.openxmlformats.org/drawingml/2006/main">
+            <a:pPr algn="l">
+              <a:buNone/>
+              <a:defRPr sz="2025" b="1">
+                <a:solidFill>
+                  <a:srgbClr val="101820"/>
+                </a:solidFill>
+                <a:latin typeface="Arial"/>
+                <a:ea typeface="Arial"/>
+                <a:cs typeface="Arial"/>
+              </a:defRPr>
+            </a:pPr>
+            <a:r>
+              <a:rPr sz="2025" b="1">
+                <a:solidFill>
+                  <a:srgbClr val="101820"/>
+                </a:solidFill>
+                <a:latin typeface="Arial"/>
+                <a:ea typeface="Arial"/>
+                <a:cs typeface="Arial"/>
+              </a:rPr>
+              <a:t>failed slots to cash</a:t>
+            </a:r>
+          </a:p>
+        </p:txBody>
+      </p:sp>
+      <p:sp>
+        <p:nvSpPr>
+          <p:cNvPr id="14" name="">
+            <a:extLst xmlns:a="http://schemas.openxmlformats.org/drawingml/2006/main">
+              <a:ext uri="{FF2B5EF4-FFF2-40B4-BE49-F238E27FC236}">
+                <a16:creationId xmlns:a16="http://schemas.microsoft.com/office/drawing/2014/main" id="{E839D33A-5AB2-49E2-BD35-DAC5629E2C9F}"/>
+              </a:ext>
+            </a:extLst>
+          </p:cNvPr>
+          <p:cNvSpPr>
+            <a:spLocks xmlns:a="http://schemas.openxmlformats.org/drawingml/2006/main" noGrp="1"/>
+          </p:cNvSpPr>
+          <p:nvPr/>
+        </p:nvSpPr>
+        <p:spPr>
+          <a:xfrm xmlns:a="http://schemas.openxmlformats.org/drawingml/2006/main">
+            <a:off x="8953500" y="3067050"/>
+            <a:ext cx="2286000" cy="266700"/>
+          </a:xfrm>
+          <a:prstGeom xmlns:a="http://schemas.openxmlformats.org/drawingml/2006/main" prst="rect">
+            <a:avLst/>
+          </a:prstGeom>
+          <a:noFill xmlns:a="http://schemas.openxmlformats.org/drawingml/2006/main"/>
+          <a:ln xmlns:a="http://schemas.openxmlformats.org/drawingml/2006/main" w="0">
+            <a:noFill/>
+            <a:prstDash val="solid"/>
+          </a:ln>
+        </p:spPr>
+        <p:txBody>
+          <a:bodyPr xmlns:a="http://schemas.openxmlformats.org/drawingml/2006/main" anchor="t"/>
+          <a:lstStyle xmlns:a="http://schemas.openxmlformats.org/drawingml/2006/main"/>
+          <a:p xmlns:a="http://schemas.openxmlformats.org/drawingml/2006/main">
+            <a:pPr algn="l">
+              <a:buNone/>
+              <a:defRPr sz="1275" b="1">
+                <a:solidFill>
+                  <a:srgbClr val="3D8DFF"/>
+                </a:solidFill>
+                <a:latin typeface="Arial"/>
+                <a:ea typeface="Arial"/>
+                <a:cs typeface="Arial"/>
+              </a:defRPr>
+            </a:pPr>
+            <a:r>
+              <a:rPr sz="1275" b="1">
+                <a:solidFill>
+                  <a:srgbClr val="3D8DFF"/>
+                </a:solidFill>
+                <a:latin typeface="Arial"/>
+                <a:ea typeface="Arial"/>
+                <a:cs typeface="Arial"/>
+              </a:rPr>
+              <a:t>EXECUTION</a:t>
+            </a:r>
+          </a:p>
+        </p:txBody>
+      </p:sp>
+      <p:sp>
+        <p:nvSpPr>
+          <p:cNvPr id="15" name="">
+            <a:extLst xmlns:a="http://schemas.openxmlformats.org/drawingml/2006/main">
+              <a:ext uri="{FF2B5EF4-FFF2-40B4-BE49-F238E27FC236}">
+                <a16:creationId xmlns:a16="http://schemas.microsoft.com/office/drawing/2014/main" id="{AD376B60-6F16-4D24-AAF8-36D5C9BFBC2E}"/>
+              </a:ext>
+            </a:extLst>
+          </p:cNvPr>
+          <p:cNvSpPr>
+            <a:spLocks xmlns:a="http://schemas.openxmlformats.org/drawingml/2006/main" noGrp="1"/>
+          </p:cNvSpPr>
+          <p:nvPr/>
+        </p:nvSpPr>
+        <p:spPr>
+          <a:xfrm xmlns:a="http://schemas.openxmlformats.org/drawingml/2006/main">
+            <a:off x="8953500" y="3524250"/>
+            <a:ext cx="2286000" cy="1028700"/>
+          </a:xfrm>
+          <a:prstGeom xmlns:a="http://schemas.openxmlformats.org/drawingml/2006/main" prst="rect">
+            <a:avLst/>
+          </a:prstGeom>
+          <a:noFill xmlns:a="http://schemas.openxmlformats.org/drawingml/2006/main"/>
+          <a:ln xmlns:a="http://schemas.openxmlformats.org/drawingml/2006/main" w="0">
+            <a:noFill/>
+            <a:prstDash val="solid"/>
+          </a:ln>
+        </p:spPr>
+        <p:txBody>
+          <a:bodyPr xmlns:a="http://schemas.openxmlformats.org/drawingml/2006/main" anchor="t"/>
+          <a:lstStyle xmlns:a="http://schemas.openxmlformats.org/drawingml/2006/main"/>
+          <a:p xmlns:a="http://schemas.openxmlformats.org/drawingml/2006/main">
+            <a:pPr algn="l">
+              <a:buNone/>
+              <a:defRPr sz="2025" b="1">
+                <a:solidFill>
+                  <a:srgbClr val="101820"/>
+                </a:solidFill>
+                <a:latin typeface="Arial"/>
+                <a:ea typeface="Arial"/>
+                <a:cs typeface="Arial"/>
+              </a:defRPr>
+            </a:pPr>
+            <a:r>
+              <a:rPr sz="2025" b="1">
+                <a:solidFill>
+                  <a:srgbClr val="101820"/>
+                </a:solidFill>
+                <a:latin typeface="Arial"/>
+                <a:ea typeface="Arial"/>
+                <a:cs typeface="Arial"/>
+              </a:rPr>
+              <a:t>Next open</a:t>
+            </a:r>
+          </a:p>
+          <a:p xmlns:a="http://schemas.openxmlformats.org/drawingml/2006/main">
+            <a:pPr algn="l">
+              <a:buNone/>
+              <a:defRPr sz="2025" b="1">
+                <a:solidFill>
+                  <a:srgbClr val="101820"/>
+                </a:solidFill>
+                <a:latin typeface="Arial"/>
+                <a:ea typeface="Arial"/>
+                <a:cs typeface="Arial"/>
+              </a:defRPr>
+            </a:pPr>
+            <a:r>
+              <a:rPr sz="2025" b="1">
+                <a:solidFill>
+                  <a:srgbClr val="101820"/>
+                </a:solidFill>
+                <a:latin typeface="Arial"/>
+                <a:ea typeface="Arial"/>
+                <a:cs typeface="Arial"/>
+              </a:rPr>
+              <a:t>5 bps one-way</a:t>
+            </a:r>
+          </a:p>
+        </p:txBody>
+      </p:sp>
+      <p:sp>
+        <p:nvSpPr>
+          <p:cNvPr id="16" name="">
+            <a:extLst xmlns:a="http://schemas.openxmlformats.org/drawingml/2006/main">
+              <a:ext uri="{FF2B5EF4-FFF2-40B4-BE49-F238E27FC236}">
+                <a16:creationId xmlns:a16="http://schemas.microsoft.com/office/drawing/2014/main" id="{B7A3C9A6-4C13-47A7-A4A9-F8DE7D75F0C5}"/>
+              </a:ext>
+            </a:extLst>
+          </p:cNvPr>
+          <p:cNvSpPr>
+            <a:spLocks xmlns:a="http://schemas.openxmlformats.org/drawingml/2006/main" noGrp="1"/>
+          </p:cNvSpPr>
+          <p:nvPr/>
+        </p:nvSpPr>
+        <p:spPr>
+          <a:xfrm xmlns:a="http://schemas.openxmlformats.org/drawingml/2006/main">
+            <a:off x="666750" y="5010150"/>
+            <a:ext cx="10572750" cy="781050"/>
+          </a:xfrm>
+          <a:prstGeom xmlns:a="http://schemas.openxmlformats.org/drawingml/2006/main" prst="rect">
+            <a:avLst/>
+          </a:prstGeom>
+          <a:solidFill xmlns:a="http://schemas.openxmlformats.org/drawingml/2006/main">
+            <a:srgbClr val="EAF5FB"/>
+          </a:solidFill>
+          <a:ln xmlns:a="http://schemas.openxmlformats.org/drawingml/2006/main" w="9525">
+            <a:solidFill>
+              <a:srgbClr val="6DCBF4"/>
+            </a:solidFill>
+            <a:prstDash val="solid"/>
+          </a:ln>
+        </p:spPr>
+      </p:sp>
+      <p:sp>
+        <p:nvSpPr>
+          <p:cNvPr id="17" name="">
+            <a:extLst xmlns:a="http://schemas.openxmlformats.org/drawingml/2006/main">
+              <a:ext uri="{FF2B5EF4-FFF2-40B4-BE49-F238E27FC236}">
+                <a16:creationId xmlns:a16="http://schemas.microsoft.com/office/drawing/2014/main" id="{91F22369-1F45-4A63-B774-BEF94F9004C8}"/>
+              </a:ext>
+            </a:extLst>
+          </p:cNvPr>
+          <p:cNvSpPr>
+            <a:spLocks xmlns:a="http://schemas.openxmlformats.org/drawingml/2006/main" noGrp="1"/>
+          </p:cNvSpPr>
+          <p:nvPr/>
+        </p:nvSpPr>
+        <p:spPr>
+          <a:xfrm xmlns:a="http://schemas.openxmlformats.org/drawingml/2006/main">
+            <a:off x="952500" y="5219700"/>
+            <a:ext cx="10001250" cy="419100"/>
+          </a:xfrm>
+          <a:prstGeom xmlns:a="http://schemas.openxmlformats.org/drawingml/2006/main" prst="rect">
+            <a:avLst/>
+          </a:prstGeom>
+          <a:noFill xmlns:a="http://schemas.openxmlformats.org/drawingml/2006/main"/>
+          <a:ln xmlns:a="http://schemas.openxmlformats.org/drawingml/2006/main" w="0">
+            <a:noFill/>
+            <a:prstDash val="solid"/>
+          </a:ln>
+        </p:spPr>
+        <p:txBody>
+          <a:bodyPr xmlns:a="http://schemas.openxmlformats.org/drawingml/2006/main" anchor="t"/>
+          <a:lstStyle xmlns:a="http://schemas.openxmlformats.org/drawingml/2006/main"/>
+          <a:p xmlns:a="http://schemas.openxmlformats.org/drawingml/2006/main">
+            <a:pPr algn="ctr">
+              <a:buNone/>
+              <a:defRPr sz="1800" b="1">
+                <a:solidFill>
+                  <a:srgbClr val="101820"/>
+                </a:solidFill>
+                <a:latin typeface="Arial"/>
+                <a:ea typeface="Arial"/>
+                <a:cs typeface="Arial"/>
+              </a:defRPr>
+            </a:pPr>
+            <a:r>
+              <a:rPr sz="1800" b="1">
+                <a:solidFill>
+                  <a:srgbClr val="101820"/>
+                </a:solidFill>
+                <a:latin typeface="Arial"/>
+                <a:ea typeface="Arial"/>
+                <a:cs typeface="Arial"/>
+              </a:rPr>
+              <a:t>Top-N preserves the source one-third fraction; it was frozen before outcomes, not searched.</a:t>
+            </a:r>
+          </a:p>
+        </p:txBody>
+      </p:sp>
+    </p:spTree>
+    <p:extLst>
+      <p:ext uri="{BB962C8B-B14F-4D97-AF65-F5344CB8AC3E}">
+        <p14:creationId xmlns:p14="http://schemas.microsoft.com/office/powerpoint/2010/main" val="231651424"/>
+      </p:ext>
+    </p:extLst>
+  </p:cSld>
+</p:sld>
+</file>
+
+<file path=ppt/slides/slide33.xml><?xml version="1.0" encoding="utf-8"?>
+<p:sld xmlns:p="http://schemas.openxmlformats.org/presentationml/2006/main">
+  <p:cSld>
+    <p:bg>
+      <p:bgPr>
+        <a:solidFill xmlns:a="http://schemas.openxmlformats.org/drawingml/2006/main">
+          <a:srgbClr val="FFFFFF"/>
+        </a:solidFill>
+      </p:bgPr>
+    </p:bg>
+    <p:spTree>
+      <p:nvGrpSpPr>
+        <p:cNvPr id="1" name=""/>
+        <p:cNvGrpSpPr/>
+        <p:nvPr/>
+      </p:nvGrpSpPr>
+      <p:grpSpPr>
+        <a:xfrm xmlns:a="http://schemas.openxmlformats.org/drawingml/2006/main"/>
+      </p:grpSpPr>
+      <p:sp>
+        <p:nvSpPr>
+          <p:cNvPr id="13" name="">
+            <a:extLst xmlns:a="http://schemas.openxmlformats.org/drawingml/2006/main">
+              <a:ext uri="{FF2B5EF4-FFF2-40B4-BE49-F238E27FC236}">
+                <a16:creationId xmlns:a16="http://schemas.microsoft.com/office/drawing/2014/main" id="{E7AA0F3C-FA14-482C-9911-54A24769116A}"/>
+              </a:ext>
+            </a:extLst>
+          </p:cNvPr>
+          <p:cNvSpPr>
+            <a:spLocks xmlns:a="http://schemas.openxmlformats.org/drawingml/2006/main" noGrp="1"/>
+          </p:cNvSpPr>
+          <p:nvPr/>
+        </p:nvSpPr>
+        <p:spPr>
+          <a:xfrm xmlns:a="http://schemas.openxmlformats.org/drawingml/2006/main">
+            <a:off x="400050" y="228600"/>
+            <a:ext cx="2857500" cy="228600"/>
+          </a:xfrm>
+          <a:prstGeom xmlns:a="http://schemas.openxmlformats.org/drawingml/2006/main" prst="rect">
+            <a:avLst/>
+          </a:prstGeom>
+          <a:noFill xmlns:a="http://schemas.openxmlformats.org/drawingml/2006/main"/>
+          <a:ln xmlns:a="http://schemas.openxmlformats.org/drawingml/2006/main" w="0">
+            <a:noFill/>
+            <a:prstDash val="solid"/>
+          </a:ln>
+        </p:spPr>
+        <p:txBody>
+          <a:bodyPr xmlns:a="http://schemas.openxmlformats.org/drawingml/2006/main" anchor="t"/>
+          <a:lstStyle xmlns:a="http://schemas.openxmlformats.org/drawingml/2006/main"/>
+          <a:p xmlns:a="http://schemas.openxmlformats.org/drawingml/2006/main">
+            <a:pPr algn="l">
+              <a:buNone/>
+              <a:defRPr sz="1200" b="1">
+                <a:solidFill>
+                  <a:srgbClr val="3D8DFF"/>
+                </a:solidFill>
+                <a:latin typeface="Arial"/>
+                <a:ea typeface="Arial"/>
+                <a:cs typeface="Arial"/>
+              </a:defRPr>
+            </a:pPr>
+            <a:r>
+              <a:rPr sz="1200" b="1">
+                <a:solidFill>
+                  <a:srgbClr val="3D8DFF"/>
+                </a:solidFill>
+                <a:latin typeface="Arial"/>
+                <a:ea typeface="Arial"/>
+                <a:cs typeface="Arial"/>
+              </a:rPr>
+              <a:t>LIT-MOM-03.3</a:t>
+            </a:r>
+          </a:p>
+        </p:txBody>
+      </p:sp>
+      <p:sp>
+        <p:nvSpPr>
+          <p:cNvPr id="2" name="">
+            <a:extLst xmlns:a="http://schemas.openxmlformats.org/drawingml/2006/main">
+              <a:ext uri="{FF2B5EF4-FFF2-40B4-BE49-F238E27FC236}">
+                <a16:creationId xmlns:a16="http://schemas.microsoft.com/office/drawing/2014/main" id="{522D8FEC-18D3-4EAC-98CE-20AF9D03A3AC}"/>
+              </a:ext>
+            </a:extLst>
+          </p:cNvPr>
+          <p:cNvSpPr>
+            <a:spLocks xmlns:a="http://schemas.openxmlformats.org/drawingml/2006/main" noGrp="1"/>
+          </p:cNvSpPr>
+          <p:nvPr/>
+        </p:nvSpPr>
+        <p:spPr>
+          <a:xfrm xmlns:a="http://schemas.openxmlformats.org/drawingml/2006/main">
+            <a:off x="400050" y="476250"/>
+            <a:ext cx="11049000" cy="819150"/>
+          </a:xfrm>
+          <a:prstGeom xmlns:a="http://schemas.openxmlformats.org/drawingml/2006/main" prst="rect">
+            <a:avLst/>
+          </a:prstGeom>
+          <a:noFill xmlns:a="http://schemas.openxmlformats.org/drawingml/2006/main"/>
+          <a:ln xmlns:a="http://schemas.openxmlformats.org/drawingml/2006/main" w="0">
+            <a:noFill/>
+            <a:prstDash val="solid"/>
+          </a:ln>
+        </p:spPr>
+        <p:txBody>
+          <a:bodyPr xmlns:a="http://schemas.openxmlformats.org/drawingml/2006/main" anchor="t"/>
+          <a:lstStyle xmlns:a="http://schemas.openxmlformats.org/drawingml/2006/main"/>
+          <a:p xmlns:a="http://schemas.openxmlformats.org/drawingml/2006/main">
+            <a:pPr algn="l">
+              <a:buNone/>
+              <a:defRPr sz="2700" b="1">
+                <a:solidFill>
+                  <a:srgbClr val="101820"/>
+                </a:solidFill>
+                <a:latin typeface="Arial"/>
+                <a:ea typeface="Arial"/>
+                <a:cs typeface="Arial"/>
+              </a:defRPr>
+            </a:pPr>
+            <a:r>
+              <a:rPr sz="2700" b="1">
+                <a:solidFill>
+                  <a:srgbClr val="101820"/>
+                </a:solidFill>
+                <a:latin typeface="Arial"/>
+                <a:ea typeface="Arial"/>
+                <a:cs typeface="Arial"/>
+              </a:rPr>
+              <a:t>Cross-sector ranking helps; the cash gate gives it back</a:t>
+            </a:r>
+          </a:p>
+        </p:txBody>
+      </p:sp>
+      <p:sp>
+        <p:nvSpPr>
+          <p:cNvPr id="3" name="">
+            <a:extLst xmlns:a="http://schemas.openxmlformats.org/drawingml/2006/main">
+              <a:ext uri="{FF2B5EF4-FFF2-40B4-BE49-F238E27FC236}">
+                <a16:creationId xmlns:a16="http://schemas.microsoft.com/office/drawing/2014/main" id="{21605544-2473-417D-B48F-9F8DF40D4FAF}"/>
+              </a:ext>
+            </a:extLst>
+          </p:cNvPr>
+          <p:cNvSpPr>
+            <a:spLocks xmlns:a="http://schemas.openxmlformats.org/drawingml/2006/main" noGrp="1"/>
+          </p:cNvSpPr>
+          <p:nvPr/>
+        </p:nvSpPr>
+        <p:spPr>
+          <a:xfrm xmlns:a="http://schemas.openxmlformats.org/drawingml/2006/main">
+            <a:off x="400050" y="1428750"/>
+            <a:ext cx="11391900" cy="0"/>
+          </a:xfrm>
+          <a:prstGeom xmlns:a="http://schemas.openxmlformats.org/drawingml/2006/main" prst="line">
+            <a:avLst/>
+          </a:prstGeom>
+          <a:noFill xmlns:a="http://schemas.openxmlformats.org/drawingml/2006/main"/>
+          <a:ln xmlns:a="http://schemas.openxmlformats.org/drawingml/2006/main" w="9525">
+            <a:solidFill>
+              <a:srgbClr val="B8BCC4"/>
+            </a:solidFill>
+            <a:prstDash val="solid"/>
+          </a:ln>
+        </p:spPr>
+      </p:sp>
+      <p:sp>
+        <p:nvSpPr>
+          <p:cNvPr id="4" name="">
+            <a:extLst xmlns:a="http://schemas.openxmlformats.org/drawingml/2006/main">
+              <a:ext uri="{FF2B5EF4-FFF2-40B4-BE49-F238E27FC236}">
+                <a16:creationId xmlns:a16="http://schemas.microsoft.com/office/drawing/2014/main" id="{7944BF93-B836-4831-89CE-852C703D91AD}"/>
+              </a:ext>
+            </a:extLst>
+          </p:cNvPr>
+          <p:cNvSpPr>
+            <a:spLocks xmlns:a="http://schemas.openxmlformats.org/drawingml/2006/main" noGrp="1"/>
+          </p:cNvSpPr>
+          <p:nvPr/>
+        </p:nvSpPr>
+        <p:spPr>
+          <a:xfrm xmlns:a="http://schemas.openxmlformats.org/drawingml/2006/main">
+            <a:off x="11163300" y="6362700"/>
+            <a:ext cx="609600" cy="228600"/>
+          </a:xfrm>
+          <a:prstGeom xmlns:a="http://schemas.openxmlformats.org/drawingml/2006/main" prst="rect">
+            <a:avLst/>
+          </a:prstGeom>
+          <a:noFill xmlns:a="http://schemas.openxmlformats.org/drawingml/2006/main"/>
+          <a:ln xmlns:a="http://schemas.openxmlformats.org/drawingml/2006/main" w="0">
+            <a:noFill/>
+            <a:prstDash val="solid"/>
+          </a:ln>
+        </p:spPr>
+        <p:txBody>
+          <a:bodyPr xmlns:a="http://schemas.openxmlformats.org/drawingml/2006/main" anchor="t"/>
+          <a:lstStyle xmlns:a="http://schemas.openxmlformats.org/drawingml/2006/main"/>
+          <a:p xmlns:a="http://schemas.openxmlformats.org/drawingml/2006/main">
+            <a:pPr algn="r">
+              <a:buNone/>
+              <a:defRPr sz="1200" b="0">
+                <a:solidFill>
+                  <a:srgbClr val="52616B"/>
+                </a:solidFill>
+                <a:latin typeface="Arial"/>
+                <a:ea typeface="Arial"/>
+                <a:cs typeface="Arial"/>
+              </a:defRPr>
+            </a:pPr>
+            <a:r>
+              <a:rPr sz="1200" b="0">
+                <a:solidFill>
+                  <a:srgbClr val="52616B"/>
+                </a:solidFill>
+                <a:latin typeface="Arial"/>
+                <a:ea typeface="Arial"/>
+                <a:cs typeface="Arial"/>
+              </a:rPr>
+              <a:t>33</a:t>
+            </a:r>
+          </a:p>
+        </p:txBody>
+      </p:sp>
+      <p:sp>
+        <p:nvSpPr>
+          <p:cNvPr id="6" name="">
+            <a:extLst xmlns:a="http://schemas.openxmlformats.org/drawingml/2006/main">
+              <a:ext uri="{FF2B5EF4-FFF2-40B4-BE49-F238E27FC236}">
+                <a16:creationId xmlns:a16="http://schemas.microsoft.com/office/drawing/2014/main" id="{DBF73623-95B1-48A7-A168-959D4ACF9EF6}"/>
+              </a:ext>
+            </a:extLst>
+          </p:cNvPr>
+          <p:cNvSpPr>
+            <a:spLocks xmlns:a="http://schemas.openxmlformats.org/drawingml/2006/main" noGrp="1"/>
+          </p:cNvSpPr>
+          <p:nvPr/>
+        </p:nvSpPr>
+        <p:spPr>
+          <a:xfrm xmlns:a="http://schemas.openxmlformats.org/drawingml/2006/main">
+            <a:off x="8991600" y="1733550"/>
+            <a:ext cx="2724150" cy="3905250"/>
+          </a:xfrm>
+          <a:prstGeom xmlns:a="http://schemas.openxmlformats.org/drawingml/2006/main" prst="rect">
+            <a:avLst/>
+          </a:prstGeom>
+          <a:solidFill xmlns:a="http://schemas.openxmlformats.org/drawingml/2006/main">
+            <a:srgbClr val="EAF5FB"/>
+          </a:solidFill>
+          <a:ln xmlns:a="http://schemas.openxmlformats.org/drawingml/2006/main" w="9525">
+            <a:solidFill>
+              <a:srgbClr val="6DCBF4"/>
+            </a:solidFill>
+            <a:prstDash val="solid"/>
+          </a:ln>
+        </p:spPr>
+      </p:sp>
+      <p:sp>
+        <p:nvSpPr>
+          <p:cNvPr id="7" name="">
+            <a:extLst xmlns:a="http://schemas.openxmlformats.org/drawingml/2006/main">
+              <a:ext uri="{FF2B5EF4-FFF2-40B4-BE49-F238E27FC236}">
+                <a16:creationId xmlns:a16="http://schemas.microsoft.com/office/drawing/2014/main" id="{454D3BC9-AB19-4F57-985E-DDB05A7434C0}"/>
+              </a:ext>
+            </a:extLst>
+          </p:cNvPr>
+          <p:cNvSpPr>
+            <a:spLocks xmlns:a="http://schemas.openxmlformats.org/drawingml/2006/main" noGrp="1"/>
+          </p:cNvSpPr>
+          <p:nvPr/>
+        </p:nvSpPr>
+        <p:spPr>
+          <a:xfrm xmlns:a="http://schemas.openxmlformats.org/drawingml/2006/main">
+            <a:off x="9258300" y="2019300"/>
+            <a:ext cx="2095500" cy="247650"/>
+          </a:xfrm>
+          <a:prstGeom xmlns:a="http://schemas.openxmlformats.org/drawingml/2006/main" prst="rect">
+            <a:avLst/>
+          </a:prstGeom>
+          <a:noFill xmlns:a="http://schemas.openxmlformats.org/drawingml/2006/main"/>
+          <a:ln xmlns:a="http://schemas.openxmlformats.org/drawingml/2006/main" w="0">
+            <a:noFill/>
+            <a:prstDash val="solid"/>
+          </a:ln>
+        </p:spPr>
+        <p:txBody>
+          <a:bodyPr xmlns:a="http://schemas.openxmlformats.org/drawingml/2006/main" anchor="t"/>
+          <a:lstStyle xmlns:a="http://schemas.openxmlformats.org/drawingml/2006/main"/>
+          <a:p xmlns:a="http://schemas.openxmlformats.org/drawingml/2006/main">
+            <a:pPr algn="l">
+              <a:buNone/>
+              <a:defRPr sz="1275" b="1">
+                <a:solidFill>
+                  <a:srgbClr val="3D8DFF"/>
+                </a:solidFill>
+                <a:latin typeface="Arial"/>
+                <a:ea typeface="Arial"/>
+                <a:cs typeface="Arial"/>
+              </a:defRPr>
+            </a:pPr>
+            <a:r>
+              <a:rPr sz="1275" b="1">
+                <a:solidFill>
+                  <a:srgbClr val="3D8DFF"/>
+                </a:solidFill>
+                <a:latin typeface="Arial"/>
+                <a:ea typeface="Arial"/>
+                <a:cs typeface="Arial"/>
+              </a:rPr>
+              <a:t>RELATIVE RANKING</a:t>
+            </a:r>
+          </a:p>
+        </p:txBody>
+      </p:sp>
+      <p:sp>
+        <p:nvSpPr>
+          <p:cNvPr id="8" name="">
+            <a:extLst xmlns:a="http://schemas.openxmlformats.org/drawingml/2006/main">
+              <a:ext uri="{FF2B5EF4-FFF2-40B4-BE49-F238E27FC236}">
+                <a16:creationId xmlns:a16="http://schemas.microsoft.com/office/drawing/2014/main" id="{50CF5D67-77D5-4062-92DB-E9771F376463}"/>
+              </a:ext>
+            </a:extLst>
+          </p:cNvPr>
+          <p:cNvSpPr>
+            <a:spLocks xmlns:a="http://schemas.openxmlformats.org/drawingml/2006/main" noGrp="1"/>
+          </p:cNvSpPr>
+          <p:nvPr/>
+        </p:nvSpPr>
+        <p:spPr>
+          <a:xfrm xmlns:a="http://schemas.openxmlformats.org/drawingml/2006/main">
+            <a:off x="9258300" y="2571750"/>
+            <a:ext cx="2095500" cy="552450"/>
+          </a:xfrm>
+          <a:prstGeom xmlns:a="http://schemas.openxmlformats.org/drawingml/2006/main" prst="rect">
+            <a:avLst/>
+          </a:prstGeom>
+          <a:noFill xmlns:a="http://schemas.openxmlformats.org/drawingml/2006/main"/>
+          <a:ln xmlns:a="http://schemas.openxmlformats.org/drawingml/2006/main" w="0">
+            <a:noFill/>
+            <a:prstDash val="solid"/>
+          </a:ln>
+        </p:spPr>
+        <p:txBody>
+          <a:bodyPr xmlns:a="http://schemas.openxmlformats.org/drawingml/2006/main" anchor="t"/>
+          <a:lstStyle xmlns:a="http://schemas.openxmlformats.org/drawingml/2006/main"/>
+          <a:p xmlns:a="http://schemas.openxmlformats.org/drawingml/2006/main">
+            <a:pPr algn="l">
+              <a:buNone/>
+              <a:defRPr sz="3000" b="1">
+                <a:solidFill>
+                  <a:srgbClr val="101820"/>
+                </a:solidFill>
+                <a:latin typeface="Arial"/>
+                <a:ea typeface="Arial"/>
+                <a:cs typeface="Arial"/>
+              </a:defRPr>
+            </a:pPr>
+            <a:r>
+              <a:rPr sz="3000" b="1">
+                <a:solidFill>
+                  <a:srgbClr val="101820"/>
+                </a:solidFill>
+                <a:latin typeface="Arial"/>
+                <a:ea typeface="Arial"/>
+                <a:cs typeface="Arial"/>
+              </a:rPr>
+              <a:t>17.95%</a:t>
+            </a:r>
+          </a:p>
+        </p:txBody>
+      </p:sp>
+      <p:sp>
+        <p:nvSpPr>
+          <p:cNvPr id="9" name="">
+            <a:extLst xmlns:a="http://schemas.openxmlformats.org/drawingml/2006/main">
+              <a:ext uri="{FF2B5EF4-FFF2-40B4-BE49-F238E27FC236}">
+                <a16:creationId xmlns:a16="http://schemas.microsoft.com/office/drawing/2014/main" id="{7C0B5D7F-B17A-4AC9-835E-6E44FD9128EC}"/>
+              </a:ext>
+            </a:extLst>
+          </p:cNvPr>
+          <p:cNvSpPr>
+            <a:spLocks xmlns:a="http://schemas.openxmlformats.org/drawingml/2006/main" noGrp="1"/>
+          </p:cNvSpPr>
+          <p:nvPr/>
+        </p:nvSpPr>
+        <p:spPr>
+          <a:xfrm xmlns:a="http://schemas.openxmlformats.org/drawingml/2006/main">
+            <a:off x="9258300" y="3105150"/>
+            <a:ext cx="2095500" cy="400050"/>
+          </a:xfrm>
+          <a:prstGeom xmlns:a="http://schemas.openxmlformats.org/drawingml/2006/main" prst="rect">
+            <a:avLst/>
+          </a:prstGeom>
+          <a:noFill xmlns:a="http://schemas.openxmlformats.org/drawingml/2006/main"/>
+          <a:ln xmlns:a="http://schemas.openxmlformats.org/drawingml/2006/main" w="0">
+            <a:noFill/>
+            <a:prstDash val="solid"/>
+          </a:ln>
+        </p:spPr>
+        <p:txBody>
+          <a:bodyPr xmlns:a="http://schemas.openxmlformats.org/drawingml/2006/main" anchor="t"/>
+          <a:lstStyle xmlns:a="http://schemas.openxmlformats.org/drawingml/2006/main"/>
+          <a:p xmlns:a="http://schemas.openxmlformats.org/drawingml/2006/main">
+            <a:pPr algn="l">
+              <a:buNone/>
+              <a:defRPr sz="1650" b="0">
+                <a:solidFill>
+                  <a:srgbClr val="52616B"/>
+                </a:solidFill>
+                <a:latin typeface="Arial"/>
+                <a:ea typeface="Arial"/>
+                <a:cs typeface="Arial"/>
+              </a:defRPr>
+            </a:pPr>
+            <a:r>
+              <a:rPr sz="1650" b="0">
+                <a:solidFill>
+                  <a:srgbClr val="52616B"/>
+                </a:solidFill>
+                <a:latin typeface="Arial"/>
+                <a:ea typeface="Arial"/>
+                <a:cs typeface="Arial"/>
+              </a:rPr>
+              <a:t>net CAGR</a:t>
+            </a:r>
+          </a:p>
+        </p:txBody>
+      </p:sp>
+      <p:sp>
+        <p:nvSpPr>
+          <p:cNvPr id="10" name="">
+            <a:extLst xmlns:a="http://schemas.openxmlformats.org/drawingml/2006/main">
+              <a:ext uri="{FF2B5EF4-FFF2-40B4-BE49-F238E27FC236}">
+                <a16:creationId xmlns:a16="http://schemas.microsoft.com/office/drawing/2014/main" id="{DE7E78EB-BFD1-417B-B781-C8666F0A80F8}"/>
+              </a:ext>
+            </a:extLst>
+          </p:cNvPr>
+          <p:cNvSpPr>
+            <a:spLocks xmlns:a="http://schemas.openxmlformats.org/drawingml/2006/main" noGrp="1"/>
+          </p:cNvSpPr>
+          <p:nvPr/>
+        </p:nvSpPr>
+        <p:spPr>
+          <a:xfrm xmlns:a="http://schemas.openxmlformats.org/drawingml/2006/main">
+            <a:off x="9258300" y="3790950"/>
+            <a:ext cx="2095500" cy="552450"/>
+          </a:xfrm>
+          <a:prstGeom xmlns:a="http://schemas.openxmlformats.org/drawingml/2006/main" prst="rect">
+            <a:avLst/>
+          </a:prstGeom>
+          <a:noFill xmlns:a="http://schemas.openxmlformats.org/drawingml/2006/main"/>
+          <a:ln xmlns:a="http://schemas.openxmlformats.org/drawingml/2006/main" w="0">
+            <a:noFill/>
+            <a:prstDash val="solid"/>
+          </a:ln>
+        </p:spPr>
+        <p:txBody>
+          <a:bodyPr xmlns:a="http://schemas.openxmlformats.org/drawingml/2006/main" anchor="t"/>
+          <a:lstStyle xmlns:a="http://schemas.openxmlformats.org/drawingml/2006/main"/>
+          <a:p xmlns:a="http://schemas.openxmlformats.org/drawingml/2006/main">
+            <a:pPr algn="l">
+              <a:buNone/>
+              <a:defRPr sz="3000" b="1">
+                <a:solidFill>
+                  <a:srgbClr val="3D8DFF"/>
+                </a:solidFill>
+                <a:latin typeface="Arial"/>
+                <a:ea typeface="Arial"/>
+                <a:cs typeface="Arial"/>
+              </a:defRPr>
+            </a:pPr>
+            <a:r>
+              <a:rPr sz="3000" b="1">
+                <a:solidFill>
+                  <a:srgbClr val="3D8DFF"/>
+                </a:solidFill>
+                <a:latin typeface="Arial"/>
+                <a:ea typeface="Arial"/>
+                <a:cs typeface="Arial"/>
+              </a:rPr>
+              <a:t>+0.90 pp</a:t>
+            </a:r>
+          </a:p>
+        </p:txBody>
+      </p:sp>
+      <p:sp>
+        <p:nvSpPr>
+          <p:cNvPr id="11" name="">
+            <a:extLst xmlns:a="http://schemas.openxmlformats.org/drawingml/2006/main">
+              <a:ext uri="{FF2B5EF4-FFF2-40B4-BE49-F238E27FC236}">
+                <a16:creationId xmlns:a16="http://schemas.microsoft.com/office/drawing/2014/main" id="{5DFE562A-9915-489A-BC82-2F762B044604}"/>
+              </a:ext>
+            </a:extLst>
+          </p:cNvPr>
+          <p:cNvSpPr>
+            <a:spLocks xmlns:a="http://schemas.openxmlformats.org/drawingml/2006/main" noGrp="1"/>
+          </p:cNvSpPr>
+          <p:nvPr/>
+        </p:nvSpPr>
+        <p:spPr>
+          <a:xfrm xmlns:a="http://schemas.openxmlformats.org/drawingml/2006/main">
+            <a:off x="9258300" y="4324350"/>
+            <a:ext cx="2095500" cy="400050"/>
+          </a:xfrm>
+          <a:prstGeom xmlns:a="http://schemas.openxmlformats.org/drawingml/2006/main" prst="rect">
+            <a:avLst/>
+          </a:prstGeom>
+          <a:noFill xmlns:a="http://schemas.openxmlformats.org/drawingml/2006/main"/>
+          <a:ln xmlns:a="http://schemas.openxmlformats.org/drawingml/2006/main" w="0">
+            <a:noFill/>
+            <a:prstDash val="solid"/>
+          </a:ln>
+        </p:spPr>
+        <p:txBody>
+          <a:bodyPr xmlns:a="http://schemas.openxmlformats.org/drawingml/2006/main" anchor="t"/>
+          <a:lstStyle xmlns:a="http://schemas.openxmlformats.org/drawingml/2006/main"/>
+          <a:p xmlns:a="http://schemas.openxmlformats.org/drawingml/2006/main">
+            <a:pPr algn="l">
+              <a:buNone/>
+              <a:defRPr sz="1650" b="0">
+                <a:solidFill>
+                  <a:srgbClr val="52616B"/>
+                </a:solidFill>
+                <a:latin typeface="Arial"/>
+                <a:ea typeface="Arial"/>
+                <a:cs typeface="Arial"/>
+              </a:defRPr>
+            </a:pPr>
+            <a:r>
+              <a:rPr sz="1650" b="0">
+                <a:solidFill>
+                  <a:srgbClr val="52616B"/>
+                </a:solidFill>
+                <a:latin typeface="Arial"/>
+                <a:ea typeface="Arial"/>
+                <a:cs typeface="Arial"/>
+              </a:rPr>
+              <a:t>vs equal-weight 88</a:t>
+            </a:r>
+          </a:p>
+        </p:txBody>
+      </p:sp>
+      <p:sp>
+        <p:nvSpPr>
+          <p:cNvPr id="12" name="">
+            <a:extLst xmlns:a="http://schemas.openxmlformats.org/drawingml/2006/main">
+              <a:ext uri="{FF2B5EF4-FFF2-40B4-BE49-F238E27FC236}">
+                <a16:creationId xmlns:a16="http://schemas.microsoft.com/office/drawing/2014/main" id="{9A127473-A846-4BDC-AD98-EA1A2A6F11AD}"/>
+              </a:ext>
+            </a:extLst>
+          </p:cNvPr>
+          <p:cNvSpPr>
+            <a:spLocks xmlns:a="http://schemas.openxmlformats.org/drawingml/2006/main" noGrp="1"/>
+          </p:cNvSpPr>
+          <p:nvPr/>
+        </p:nvSpPr>
+        <p:spPr>
+          <a:xfrm xmlns:a="http://schemas.openxmlformats.org/drawingml/2006/main">
+            <a:off x="9258300" y="4972050"/>
+            <a:ext cx="2095500" cy="381000"/>
+          </a:xfrm>
+          <a:prstGeom xmlns:a="http://schemas.openxmlformats.org/drawingml/2006/main" prst="rect">
+            <a:avLst/>
+          </a:prstGeom>
+          <a:noFill xmlns:a="http://schemas.openxmlformats.org/drawingml/2006/main"/>
+          <a:ln xmlns:a="http://schemas.openxmlformats.org/drawingml/2006/main" w="0">
+            <a:noFill/>
+            <a:prstDash val="solid"/>
+          </a:ln>
+        </p:spPr>
+        <p:txBody>
+          <a:bodyPr xmlns:a="http://schemas.openxmlformats.org/drawingml/2006/main" anchor="t"/>
+          <a:lstStyle xmlns:a="http://schemas.openxmlformats.org/drawingml/2006/main"/>
+          <a:p xmlns:a="http://schemas.openxmlformats.org/drawingml/2006/main">
+            <a:pPr algn="l">
+              <a:buNone/>
+              <a:defRPr sz="1950" b="1">
+                <a:solidFill>
+                  <a:srgbClr val="101820"/>
+                </a:solidFill>
+                <a:latin typeface="Arial"/>
+                <a:ea typeface="Arial"/>
+                <a:cs typeface="Arial"/>
+              </a:defRPr>
+            </a:pPr>
+            <a:r>
+              <a:rPr sz="1950" b="1">
+                <a:solidFill>
+                  <a:srgbClr val="101820"/>
+                </a:solidFill>
+                <a:latin typeface="Arial"/>
+                <a:ea typeface="Arial"/>
+                <a:cs typeface="Arial"/>
+              </a:rPr>
+              <a:t>4.97× ending wealth</a:t>
+            </a:r>
+          </a:p>
+        </p:txBody>
+      </p:sp>
+      <p:pic>
+        <p:nvPicPr>
+          <p:cNvPr id="26" name=""/>
+          <p:cNvPicPr>
+            <a:picLocks xmlns:a="http://schemas.openxmlformats.org/drawingml/2006/main" noChangeAspect="1"/>
+          </p:cNvPicPr>
+          <p:nvPr/>
+        </p:nvPicPr>
+        <p:blipFill>
+          <a:blip xmlns:r="http://schemas.openxmlformats.org/officeDocument/2006/relationships" xmlns:a="http://schemas.openxmlformats.org/drawingml/2006/main" r:embed="R7960e741a292475f"/>
+          <a:stretch xmlns:a="http://schemas.openxmlformats.org/drawingml/2006/main"/>
+        </p:blipFill>
+        <p:spPr>
+          <a:xfrm xmlns:a="http://schemas.openxmlformats.org/drawingml/2006/main">
+            <a:off x="734786" y="1562100"/>
+            <a:ext cx="7674429" cy="4476750"/>
+          </a:xfrm>
+          <a:prstGeom xmlns:a="http://schemas.openxmlformats.org/drawingml/2006/main" prst="rect">
+            <a:avLst/>
+          </a:prstGeom>
+        </p:spPr>
+      </p:pic>
+    </p:spTree>
+    <p:extLst>
+      <p:ext uri="{BB962C8B-B14F-4D97-AF65-F5344CB8AC3E}">
+        <p14:creationId xmlns:p14="http://schemas.microsoft.com/office/powerpoint/2010/main" val="1063912481"/>
+      </p:ext>
+    </p:extLst>
+  </p:cSld>
+</p:sld>
+</file>
+
+<file path=ppt/slides/slide34.xml><?xml version="1.0" encoding="utf-8"?>
+<p:sld xmlns:p="http://schemas.openxmlformats.org/presentationml/2006/main">
+  <p:cSld>
+    <p:bg>
+      <p:bgPr>
+        <a:solidFill xmlns:a="http://schemas.openxmlformats.org/drawingml/2006/main">
+          <a:srgbClr val="FFFFFF"/>
+        </a:solidFill>
+      </p:bgPr>
+    </p:bg>
+    <p:spTree>
+      <p:nvGrpSpPr>
+        <p:cNvPr id="1" name=""/>
+        <p:cNvGrpSpPr/>
+        <p:nvPr/>
+      </p:nvGrpSpPr>
+      <p:grpSpPr>
+        <a:xfrm xmlns:a="http://schemas.openxmlformats.org/drawingml/2006/main"/>
+      </p:grpSpPr>
+      <p:sp>
+        <p:nvSpPr>
+          <p:cNvPr id="14" name="">
+            <a:extLst xmlns:a="http://schemas.openxmlformats.org/drawingml/2006/main">
+              <a:ext uri="{FF2B5EF4-FFF2-40B4-BE49-F238E27FC236}">
+                <a16:creationId xmlns:a16="http://schemas.microsoft.com/office/drawing/2014/main" id="{39B7BB28-C5CF-47BA-A918-FA17029EB44A}"/>
+              </a:ext>
+            </a:extLst>
+          </p:cNvPr>
+          <p:cNvSpPr>
+            <a:spLocks xmlns:a="http://schemas.openxmlformats.org/drawingml/2006/main" noGrp="1"/>
+          </p:cNvSpPr>
+          <p:nvPr/>
+        </p:nvSpPr>
+        <p:spPr>
+          <a:xfrm xmlns:a="http://schemas.openxmlformats.org/drawingml/2006/main">
+            <a:off x="400050" y="228600"/>
+            <a:ext cx="2857500" cy="228600"/>
+          </a:xfrm>
+          <a:prstGeom xmlns:a="http://schemas.openxmlformats.org/drawingml/2006/main" prst="rect">
+            <a:avLst/>
+          </a:prstGeom>
+          <a:noFill xmlns:a="http://schemas.openxmlformats.org/drawingml/2006/main"/>
+          <a:ln xmlns:a="http://schemas.openxmlformats.org/drawingml/2006/main" w="0">
+            <a:noFill/>
+            <a:prstDash val="solid"/>
+          </a:ln>
+        </p:spPr>
+        <p:txBody>
+          <a:bodyPr xmlns:a="http://schemas.openxmlformats.org/drawingml/2006/main" anchor="t"/>
+          <a:lstStyle xmlns:a="http://schemas.openxmlformats.org/drawingml/2006/main"/>
+          <a:p xmlns:a="http://schemas.openxmlformats.org/drawingml/2006/main">
+            <a:pPr algn="l">
+              <a:buNone/>
+              <a:defRPr sz="1200" b="1">
+                <a:solidFill>
+                  <a:srgbClr val="3D8DFF"/>
+                </a:solidFill>
+                <a:latin typeface="Arial"/>
+                <a:ea typeface="Arial"/>
+                <a:cs typeface="Arial"/>
+              </a:defRPr>
+            </a:pPr>
+            <a:r>
+              <a:rPr sz="1200" b="1">
+                <a:solidFill>
+                  <a:srgbClr val="3D8DFF"/>
+                </a:solidFill>
+                <a:latin typeface="Arial"/>
+                <a:ea typeface="Arial"/>
+                <a:cs typeface="Arial"/>
+              </a:rPr>
+              <a:t>LIT-MOM-03.3</a:t>
+            </a:r>
+          </a:p>
+        </p:txBody>
+      </p:sp>
+      <p:sp>
+        <p:nvSpPr>
+          <p:cNvPr id="2" name="">
+            <a:extLst xmlns:a="http://schemas.openxmlformats.org/drawingml/2006/main">
+              <a:ext uri="{FF2B5EF4-FFF2-40B4-BE49-F238E27FC236}">
+                <a16:creationId xmlns:a16="http://schemas.microsoft.com/office/drawing/2014/main" id="{8C401559-67C5-4215-B579-93FC871FC00D}"/>
+              </a:ext>
+            </a:extLst>
+          </p:cNvPr>
+          <p:cNvSpPr>
+            <a:spLocks xmlns:a="http://schemas.openxmlformats.org/drawingml/2006/main" noGrp="1"/>
+          </p:cNvSpPr>
+          <p:nvPr/>
+        </p:nvSpPr>
+        <p:spPr>
+          <a:xfrm xmlns:a="http://schemas.openxmlformats.org/drawingml/2006/main">
+            <a:off x="400050" y="476250"/>
+            <a:ext cx="11049000" cy="819150"/>
+          </a:xfrm>
+          <a:prstGeom xmlns:a="http://schemas.openxmlformats.org/drawingml/2006/main" prst="rect">
+            <a:avLst/>
+          </a:prstGeom>
+          <a:noFill xmlns:a="http://schemas.openxmlformats.org/drawingml/2006/main"/>
+          <a:ln xmlns:a="http://schemas.openxmlformats.org/drawingml/2006/main" w="0">
+            <a:noFill/>
+            <a:prstDash val="solid"/>
+          </a:ln>
+        </p:spPr>
+        <p:txBody>
+          <a:bodyPr xmlns:a="http://schemas.openxmlformats.org/drawingml/2006/main" anchor="t"/>
+          <a:lstStyle xmlns:a="http://schemas.openxmlformats.org/drawingml/2006/main"/>
+          <a:p xmlns:a="http://schemas.openxmlformats.org/drawingml/2006/main">
+            <a:pPr algn="l">
+              <a:buNone/>
+              <a:defRPr sz="2700" b="1">
+                <a:solidFill>
+                  <a:srgbClr val="101820"/>
+                </a:solidFill>
+                <a:latin typeface="Arial"/>
+                <a:ea typeface="Arial"/>
+                <a:cs typeface="Arial"/>
+              </a:defRPr>
+            </a:pPr>
+            <a:r>
+              <a:rPr sz="2700" b="1">
+                <a:solidFill>
+                  <a:srgbClr val="101820"/>
+                </a:solidFill>
+                <a:latin typeface="Arial"/>
+                <a:ea typeface="Arial"/>
+                <a:cs typeface="Arial"/>
+              </a:rPr>
+              <a:t>The full rule trades away return for a smaller drawdown</a:t>
+            </a:r>
+          </a:p>
+        </p:txBody>
+      </p:sp>
+      <p:sp>
+        <p:nvSpPr>
+          <p:cNvPr id="3" name="">
+            <a:extLst xmlns:a="http://schemas.openxmlformats.org/drawingml/2006/main">
+              <a:ext uri="{FF2B5EF4-FFF2-40B4-BE49-F238E27FC236}">
+                <a16:creationId xmlns:a16="http://schemas.microsoft.com/office/drawing/2014/main" id="{FE913BAC-F3B9-4338-8958-15CBEBB596BB}"/>
+              </a:ext>
+            </a:extLst>
+          </p:cNvPr>
+          <p:cNvSpPr>
+            <a:spLocks xmlns:a="http://schemas.openxmlformats.org/drawingml/2006/main" noGrp="1"/>
+          </p:cNvSpPr>
+          <p:nvPr/>
+        </p:nvSpPr>
+        <p:spPr>
+          <a:xfrm xmlns:a="http://schemas.openxmlformats.org/drawingml/2006/main">
+            <a:off x="400050" y="1428750"/>
+            <a:ext cx="11391900" cy="0"/>
+          </a:xfrm>
+          <a:prstGeom xmlns:a="http://schemas.openxmlformats.org/drawingml/2006/main" prst="line">
+            <a:avLst/>
+          </a:prstGeom>
+          <a:noFill xmlns:a="http://schemas.openxmlformats.org/drawingml/2006/main"/>
+          <a:ln xmlns:a="http://schemas.openxmlformats.org/drawingml/2006/main" w="9525">
+            <a:solidFill>
+              <a:srgbClr val="B8BCC4"/>
+            </a:solidFill>
+            <a:prstDash val="solid"/>
+          </a:ln>
+        </p:spPr>
+      </p:sp>
+      <p:sp>
+        <p:nvSpPr>
+          <p:cNvPr id="4" name="">
+            <a:extLst xmlns:a="http://schemas.openxmlformats.org/drawingml/2006/main">
+              <a:ext uri="{FF2B5EF4-FFF2-40B4-BE49-F238E27FC236}">
+                <a16:creationId xmlns:a16="http://schemas.microsoft.com/office/drawing/2014/main" id="{80D32FF2-05B5-4DF6-BBF4-B1464DC9B66A}"/>
+              </a:ext>
+            </a:extLst>
+          </p:cNvPr>
+          <p:cNvSpPr>
+            <a:spLocks xmlns:a="http://schemas.openxmlformats.org/drawingml/2006/main" noGrp="1"/>
+          </p:cNvSpPr>
+          <p:nvPr/>
+        </p:nvSpPr>
+        <p:spPr>
+          <a:xfrm xmlns:a="http://schemas.openxmlformats.org/drawingml/2006/main">
+            <a:off x="11163300" y="6362700"/>
+            <a:ext cx="609600" cy="228600"/>
+          </a:xfrm>
+          <a:prstGeom xmlns:a="http://schemas.openxmlformats.org/drawingml/2006/main" prst="rect">
+            <a:avLst/>
+          </a:prstGeom>
+          <a:noFill xmlns:a="http://schemas.openxmlformats.org/drawingml/2006/main"/>
+          <a:ln xmlns:a="http://schemas.openxmlformats.org/drawingml/2006/main" w="0">
+            <a:noFill/>
+            <a:prstDash val="solid"/>
+          </a:ln>
+        </p:spPr>
+        <p:txBody>
+          <a:bodyPr xmlns:a="http://schemas.openxmlformats.org/drawingml/2006/main" anchor="t"/>
+          <a:lstStyle xmlns:a="http://schemas.openxmlformats.org/drawingml/2006/main"/>
+          <a:p xmlns:a="http://schemas.openxmlformats.org/drawingml/2006/main">
+            <a:pPr algn="r">
+              <a:buNone/>
+              <a:defRPr sz="1200" b="0">
+                <a:solidFill>
+                  <a:srgbClr val="52616B"/>
+                </a:solidFill>
+                <a:latin typeface="Arial"/>
+                <a:ea typeface="Arial"/>
+                <a:cs typeface="Arial"/>
+              </a:defRPr>
+            </a:pPr>
+            <a:r>
+              <a:rPr sz="1200" b="0">
+                <a:solidFill>
+                  <a:srgbClr val="52616B"/>
+                </a:solidFill>
+                <a:latin typeface="Arial"/>
+                <a:ea typeface="Arial"/>
+                <a:cs typeface="Arial"/>
+              </a:rPr>
+              <a:t> 34</a:t>
+            </a:r>
+          </a:p>
+        </p:txBody>
+      </p:sp>
+      <p:sp>
+        <p:nvSpPr>
+          <p:cNvPr id="6" name="">
+            <a:extLst xmlns:a="http://schemas.openxmlformats.org/drawingml/2006/main">
+              <a:ext uri="{FF2B5EF4-FFF2-40B4-BE49-F238E27FC236}">
+                <a16:creationId xmlns:a16="http://schemas.microsoft.com/office/drawing/2014/main" id="{8B7E846F-BE01-42E8-9EBB-9EA3FC7567F0}"/>
+              </a:ext>
+            </a:extLst>
+          </p:cNvPr>
+          <p:cNvSpPr>
+            <a:spLocks xmlns:a="http://schemas.openxmlformats.org/drawingml/2006/main" noGrp="1"/>
+          </p:cNvSpPr>
+          <p:nvPr/>
+        </p:nvSpPr>
+        <p:spPr>
+          <a:xfrm xmlns:a="http://schemas.openxmlformats.org/drawingml/2006/main">
+            <a:off x="8153400" y="1695450"/>
+            <a:ext cx="3429000" cy="4057650"/>
+          </a:xfrm>
+          <a:prstGeom xmlns:a="http://schemas.openxmlformats.org/drawingml/2006/main" prst="rect">
+            <a:avLst/>
+          </a:prstGeom>
+          <a:solidFill xmlns:a="http://schemas.openxmlformats.org/drawingml/2006/main">
+            <a:srgbClr val="EAF5FB"/>
+          </a:solidFill>
+          <a:ln xmlns:a="http://schemas.openxmlformats.org/drawingml/2006/main" w="9525">
+            <a:solidFill>
+              <a:srgbClr val="6DCBF4"/>
+            </a:solidFill>
+            <a:prstDash val="solid"/>
+          </a:ln>
+        </p:spPr>
+      </p:sp>
+      <p:sp>
+        <p:nvSpPr>
+          <p:cNvPr id="7" name="">
+            <a:extLst xmlns:a="http://schemas.openxmlformats.org/drawingml/2006/main">
+              <a:ext uri="{FF2B5EF4-FFF2-40B4-BE49-F238E27FC236}">
+                <a16:creationId xmlns:a16="http://schemas.microsoft.com/office/drawing/2014/main" id="{7A48CFB1-8F2F-43AD-84B5-5B62F4FCE8D1}"/>
+              </a:ext>
+            </a:extLst>
+          </p:cNvPr>
+          <p:cNvSpPr>
+            <a:spLocks xmlns:a="http://schemas.openxmlformats.org/drawingml/2006/main" noGrp="1"/>
+          </p:cNvSpPr>
+          <p:nvPr/>
+        </p:nvSpPr>
+        <p:spPr>
+          <a:xfrm xmlns:a="http://schemas.openxmlformats.org/drawingml/2006/main">
+            <a:off x="8496300" y="2000250"/>
+            <a:ext cx="2476500" cy="247650"/>
+          </a:xfrm>
+          <a:prstGeom xmlns:a="http://schemas.openxmlformats.org/drawingml/2006/main" prst="rect">
+            <a:avLst/>
+          </a:prstGeom>
+          <a:noFill xmlns:a="http://schemas.openxmlformats.org/drawingml/2006/main"/>
+          <a:ln xmlns:a="http://schemas.openxmlformats.org/drawingml/2006/main" w="0">
+            <a:noFill/>
+            <a:prstDash val="solid"/>
+          </a:ln>
+        </p:spPr>
+        <p:txBody>
+          <a:bodyPr xmlns:a="http://schemas.openxmlformats.org/drawingml/2006/main" anchor="t"/>
+          <a:lstStyle xmlns:a="http://schemas.openxmlformats.org/drawingml/2006/main"/>
+          <a:p xmlns:a="http://schemas.openxmlformats.org/drawingml/2006/main">
+            <a:pPr algn="l">
+              <a:buNone/>
+              <a:defRPr sz="1275" b="1">
+                <a:solidFill>
+                  <a:srgbClr val="3D8DFF"/>
+                </a:solidFill>
+                <a:latin typeface="Arial"/>
+                <a:ea typeface="Arial"/>
+                <a:cs typeface="Arial"/>
+              </a:defRPr>
+            </a:pPr>
+            <a:r>
+              <a:rPr sz="1275" b="1">
+                <a:solidFill>
+                  <a:srgbClr val="3D8DFF"/>
+                </a:solidFill>
+                <a:latin typeface="Arial"/>
+                <a:ea typeface="Arial"/>
+                <a:cs typeface="Arial"/>
+              </a:rPr>
+              <a:t>ABSOLUTE GATE</a:t>
+            </a:r>
+          </a:p>
+        </p:txBody>
+      </p:sp>
+      <p:sp>
+        <p:nvSpPr>
+          <p:cNvPr id="8" name="">
+            <a:extLst xmlns:a="http://schemas.openxmlformats.org/drawingml/2006/main">
+              <a:ext uri="{FF2B5EF4-FFF2-40B4-BE49-F238E27FC236}">
+                <a16:creationId xmlns:a16="http://schemas.microsoft.com/office/drawing/2014/main" id="{DC731ED7-5F85-42CB-A69F-0889CEA3331A}"/>
+              </a:ext>
+            </a:extLst>
+          </p:cNvPr>
+          <p:cNvSpPr>
+            <a:spLocks xmlns:a="http://schemas.openxmlformats.org/drawingml/2006/main" noGrp="1"/>
+          </p:cNvSpPr>
+          <p:nvPr/>
+        </p:nvSpPr>
+        <p:spPr>
+          <a:xfrm xmlns:a="http://schemas.openxmlformats.org/drawingml/2006/main">
+            <a:off x="8496300" y="2533650"/>
+            <a:ext cx="2686050" cy="609600"/>
+          </a:xfrm>
+          <a:prstGeom xmlns:a="http://schemas.openxmlformats.org/drawingml/2006/main" prst="rect">
+            <a:avLst/>
+          </a:prstGeom>
+          <a:noFill xmlns:a="http://schemas.openxmlformats.org/drawingml/2006/main"/>
+          <a:ln xmlns:a="http://schemas.openxmlformats.org/drawingml/2006/main" w="0">
+            <a:noFill/>
+            <a:prstDash val="solid"/>
+          </a:ln>
+        </p:spPr>
+        <p:txBody>
+          <a:bodyPr xmlns:a="http://schemas.openxmlformats.org/drawingml/2006/main" anchor="t"/>
+          <a:lstStyle xmlns:a="http://schemas.openxmlformats.org/drawingml/2006/main"/>
+          <a:p xmlns:a="http://schemas.openxmlformats.org/drawingml/2006/main">
+            <a:pPr algn="l">
+              <a:buNone/>
+              <a:defRPr sz="3375" b="1">
+                <a:solidFill>
+                  <a:srgbClr val="3D8DFF"/>
+                </a:solidFill>
+                <a:latin typeface="Arial"/>
+                <a:ea typeface="Arial"/>
+                <a:cs typeface="Arial"/>
+              </a:defRPr>
+            </a:pPr>
+            <a:r>
+              <a:rPr sz="3375" b="1">
+                <a:solidFill>
+                  <a:srgbClr val="3D8DFF"/>
+                </a:solidFill>
+                <a:latin typeface="Arial"/>
+                <a:ea typeface="Arial"/>
+                <a:cs typeface="Arial"/>
+              </a:rPr>
+              <a:t>-1.26 pp</a:t>
+            </a:r>
+          </a:p>
+        </p:txBody>
+      </p:sp>
+      <p:sp>
+        <p:nvSpPr>
+          <p:cNvPr id="9" name="">
+            <a:extLst xmlns:a="http://schemas.openxmlformats.org/drawingml/2006/main">
+              <a:ext uri="{FF2B5EF4-FFF2-40B4-BE49-F238E27FC236}">
+                <a16:creationId xmlns:a16="http://schemas.microsoft.com/office/drawing/2014/main" id="{406DC0E8-33AD-4797-87D6-8B560493E789}"/>
+              </a:ext>
+            </a:extLst>
+          </p:cNvPr>
+          <p:cNvSpPr>
+            <a:spLocks xmlns:a="http://schemas.openxmlformats.org/drawingml/2006/main" noGrp="1"/>
+          </p:cNvSpPr>
+          <p:nvPr/>
+        </p:nvSpPr>
+        <p:spPr>
+          <a:xfrm xmlns:a="http://schemas.openxmlformats.org/drawingml/2006/main">
+            <a:off x="8496300" y="3105150"/>
+            <a:ext cx="2686050" cy="400050"/>
+          </a:xfrm>
+          <a:prstGeom xmlns:a="http://schemas.openxmlformats.org/drawingml/2006/main" prst="rect">
+            <a:avLst/>
+          </a:prstGeom>
+          <a:noFill xmlns:a="http://schemas.openxmlformats.org/drawingml/2006/main"/>
+          <a:ln xmlns:a="http://schemas.openxmlformats.org/drawingml/2006/main" w="0">
+            <a:noFill/>
+            <a:prstDash val="solid"/>
+          </a:ln>
+        </p:spPr>
+        <p:txBody>
+          <a:bodyPr xmlns:a="http://schemas.openxmlformats.org/drawingml/2006/main" anchor="t"/>
+          <a:lstStyle xmlns:a="http://schemas.openxmlformats.org/drawingml/2006/main"/>
+          <a:p xmlns:a="http://schemas.openxmlformats.org/drawingml/2006/main">
+            <a:pPr algn="l">
+              <a:buNone/>
+              <a:defRPr sz="1725" b="0">
+                <a:solidFill>
+                  <a:srgbClr val="52616B"/>
+                </a:solidFill>
+                <a:latin typeface="Arial"/>
+                <a:ea typeface="Arial"/>
+                <a:cs typeface="Arial"/>
+              </a:defRPr>
+            </a:pPr>
+            <a:r>
+              <a:rPr sz="1725" b="0">
+                <a:solidFill>
+                  <a:srgbClr val="52616B"/>
+                </a:solidFill>
+                <a:latin typeface="Arial"/>
+                <a:ea typeface="Arial"/>
+                <a:cs typeface="Arial"/>
+              </a:rPr>
+              <a:t>CAGR vs relative-only</a:t>
+            </a:r>
+          </a:p>
+        </p:txBody>
+      </p:sp>
+      <p:sp>
+        <p:nvSpPr>
+          <p:cNvPr id="10" name="">
+            <a:extLst xmlns:a="http://schemas.openxmlformats.org/drawingml/2006/main">
+              <a:ext uri="{FF2B5EF4-FFF2-40B4-BE49-F238E27FC236}">
+                <a16:creationId xmlns:a16="http://schemas.microsoft.com/office/drawing/2014/main" id="{A0EB914A-A236-47F4-91E9-BA72FF10432A}"/>
+              </a:ext>
+            </a:extLst>
+          </p:cNvPr>
+          <p:cNvSpPr>
+            <a:spLocks xmlns:a="http://schemas.openxmlformats.org/drawingml/2006/main" noGrp="1"/>
+          </p:cNvSpPr>
+          <p:nvPr/>
+        </p:nvSpPr>
+        <p:spPr>
+          <a:xfrm xmlns:a="http://schemas.openxmlformats.org/drawingml/2006/main">
+            <a:off x="8496300" y="3714750"/>
+            <a:ext cx="2686050" cy="0"/>
+          </a:xfrm>
+          <a:prstGeom xmlns:a="http://schemas.openxmlformats.org/drawingml/2006/main" prst="line">
+            <a:avLst/>
+          </a:prstGeom>
+          <a:noFill xmlns:a="http://schemas.openxmlformats.org/drawingml/2006/main"/>
+          <a:ln xmlns:a="http://schemas.openxmlformats.org/drawingml/2006/main" w="19050">
+            <a:solidFill>
+              <a:srgbClr val="6DCBF4"/>
+            </a:solidFill>
+            <a:prstDash val="solid"/>
+          </a:ln>
+        </p:spPr>
+      </p:sp>
+      <p:sp>
+        <p:nvSpPr>
+          <p:cNvPr id="11" name="">
+            <a:extLst xmlns:a="http://schemas.openxmlformats.org/drawingml/2006/main">
+              <a:ext uri="{FF2B5EF4-FFF2-40B4-BE49-F238E27FC236}">
+                <a16:creationId xmlns:a16="http://schemas.microsoft.com/office/drawing/2014/main" id="{63C90848-627F-4872-9F08-0BCEBC58FC88}"/>
+              </a:ext>
+            </a:extLst>
+          </p:cNvPr>
+          <p:cNvSpPr>
+            <a:spLocks xmlns:a="http://schemas.openxmlformats.org/drawingml/2006/main" noGrp="1"/>
+          </p:cNvSpPr>
+          <p:nvPr/>
+        </p:nvSpPr>
+        <p:spPr>
+          <a:xfrm xmlns:a="http://schemas.openxmlformats.org/drawingml/2006/main">
+            <a:off x="8496300" y="3962400"/>
+            <a:ext cx="2686050" cy="323850"/>
+          </a:xfrm>
+          <a:prstGeom xmlns:a="http://schemas.openxmlformats.org/drawingml/2006/main" prst="rect">
+            <a:avLst/>
+          </a:prstGeom>
+          <a:noFill xmlns:a="http://schemas.openxmlformats.org/drawingml/2006/main"/>
+          <a:ln xmlns:a="http://schemas.openxmlformats.org/drawingml/2006/main" w="0">
+            <a:noFill/>
+            <a:prstDash val="solid"/>
+          </a:ln>
+        </p:spPr>
+        <p:txBody>
+          <a:bodyPr xmlns:a="http://schemas.openxmlformats.org/drawingml/2006/main" anchor="t"/>
+          <a:lstStyle xmlns:a="http://schemas.openxmlformats.org/drawingml/2006/main"/>
+          <a:p xmlns:a="http://schemas.openxmlformats.org/drawingml/2006/main">
+            <a:pPr algn="l">
+              <a:buNone/>
+              <a:defRPr sz="1575" b="1">
+                <a:solidFill>
+                  <a:srgbClr val="101820"/>
+                </a:solidFill>
+                <a:latin typeface="Arial"/>
+                <a:ea typeface="Arial"/>
+                <a:cs typeface="Arial"/>
+              </a:defRPr>
+            </a:pPr>
+            <a:r>
+              <a:rPr sz="1575" b="1">
+                <a:solidFill>
+                  <a:srgbClr val="101820"/>
+                </a:solidFill>
+                <a:latin typeface="Arial"/>
+                <a:ea typeface="Arial"/>
+                <a:cs typeface="Arial"/>
+              </a:rPr>
+              <a:t>+3.74 pp</a:t>
+            </a:r>
+          </a:p>
+        </p:txBody>
+      </p:sp>
+      <p:sp>
+        <p:nvSpPr>
+          <p:cNvPr id="12" name="">
+            <a:extLst xmlns:a="http://schemas.openxmlformats.org/drawingml/2006/main">
+              <a:ext uri="{FF2B5EF4-FFF2-40B4-BE49-F238E27FC236}">
+                <a16:creationId xmlns:a16="http://schemas.microsoft.com/office/drawing/2014/main" id="{70090FDC-931D-4B56-AD5D-C71AA6FC29F9}"/>
+              </a:ext>
+            </a:extLst>
+          </p:cNvPr>
+          <p:cNvSpPr>
+            <a:spLocks xmlns:a="http://schemas.openxmlformats.org/drawingml/2006/main" noGrp="1"/>
+          </p:cNvSpPr>
+          <p:nvPr/>
+        </p:nvSpPr>
+        <p:spPr>
+          <a:xfrm xmlns:a="http://schemas.openxmlformats.org/drawingml/2006/main">
+            <a:off x="8496300" y="4419600"/>
+            <a:ext cx="2686050" cy="1009650"/>
+          </a:xfrm>
+          <a:prstGeom xmlns:a="http://schemas.openxmlformats.org/drawingml/2006/main" prst="rect">
+            <a:avLst/>
+          </a:prstGeom>
+          <a:noFill xmlns:a="http://schemas.openxmlformats.org/drawingml/2006/main"/>
+          <a:ln xmlns:a="http://schemas.openxmlformats.org/drawingml/2006/main" w="0">
+            <a:noFill/>
+            <a:prstDash val="solid"/>
+          </a:ln>
+        </p:spPr>
+        <p:txBody>
+          <a:bodyPr xmlns:a="http://schemas.openxmlformats.org/drawingml/2006/main" anchor="t"/>
+          <a:lstStyle xmlns:a="http://schemas.openxmlformats.org/drawingml/2006/main"/>
+          <a:p xmlns:a="http://schemas.openxmlformats.org/drawingml/2006/main">
+            <a:pPr algn="l">
+              <a:buNone/>
+              <a:defRPr sz="1725" b="0">
+                <a:solidFill>
+                  <a:srgbClr val="52616B"/>
+                </a:solidFill>
+                <a:latin typeface="Arial"/>
+                <a:ea typeface="Arial"/>
+                <a:cs typeface="Arial"/>
+              </a:defRPr>
+            </a:pPr>
+            <a:r>
+              <a:rPr sz="1725" b="0">
+                <a:solidFill>
+                  <a:srgbClr val="52616B"/>
+                </a:solidFill>
+                <a:latin typeface="Arial"/>
+                <a:ea typeface="Arial"/>
+                <a:cs typeface="Arial"/>
+              </a:rPr>
+              <a:t>drawdown improvement</a:t>
+            </a:r>
+          </a:p>
+          <a:p xmlns:a="http://schemas.openxmlformats.org/drawingml/2006/main">
+            <a:pPr algn="l">
+              <a:buNone/>
+              <a:defRPr sz="1725" b="0">
+                <a:solidFill>
+                  <a:srgbClr val="52616B"/>
+                </a:solidFill>
+                <a:latin typeface="Arial"/>
+                <a:ea typeface="Arial"/>
+                <a:cs typeface="Arial"/>
+              </a:defRPr>
+            </a:pPr>
+            <a:r>
+              <a:rPr sz="1725" b="0">
+                <a:solidFill>
+                  <a:srgbClr val="52616B"/>
+                </a:solidFill>
+                <a:latin typeface="Arial"/>
+                <a:ea typeface="Arial"/>
+                <a:cs typeface="Arial"/>
+              </a:rPr>
+              <a:t>-24.83% vs -28.57%</a:t>
+            </a:r>
+          </a:p>
+        </p:txBody>
+      </p:sp>
+      <p:sp>
+        <p:nvSpPr>
+          <p:cNvPr id="13" name="">
+            <a:extLst xmlns:a="http://schemas.openxmlformats.org/drawingml/2006/main">
+              <a:ext uri="{FF2B5EF4-FFF2-40B4-BE49-F238E27FC236}">
+                <a16:creationId xmlns:a16="http://schemas.microsoft.com/office/drawing/2014/main" id="{F166845D-8E26-4804-AAA3-D76C79B2D4FB}"/>
+              </a:ext>
+            </a:extLst>
+          </p:cNvPr>
+          <p:cNvSpPr>
+            <a:spLocks xmlns:a="http://schemas.openxmlformats.org/drawingml/2006/main" noGrp="1"/>
+          </p:cNvSpPr>
+          <p:nvPr/>
+        </p:nvSpPr>
+        <p:spPr>
+          <a:xfrm xmlns:a="http://schemas.openxmlformats.org/drawingml/2006/main">
+            <a:off x="1066800" y="5886450"/>
+            <a:ext cx="9620250" cy="323850"/>
+          </a:xfrm>
+          <a:prstGeom xmlns:a="http://schemas.openxmlformats.org/drawingml/2006/main" prst="rect">
+            <a:avLst/>
+          </a:prstGeom>
+          <a:noFill xmlns:a="http://schemas.openxmlformats.org/drawingml/2006/main"/>
+          <a:ln xmlns:a="http://schemas.openxmlformats.org/drawingml/2006/main" w="0">
+            <a:noFill/>
+            <a:prstDash val="solid"/>
+          </a:ln>
+        </p:spPr>
+        <p:txBody>
+          <a:bodyPr xmlns:a="http://schemas.openxmlformats.org/drawingml/2006/main" anchor="t"/>
+          <a:lstStyle xmlns:a="http://schemas.openxmlformats.org/drawingml/2006/main"/>
+          <a:p xmlns:a="http://schemas.openxmlformats.org/drawingml/2006/main">
+            <a:pPr algn="ctr">
+              <a:buNone/>
+              <a:defRPr sz="1800" b="1">
+                <a:solidFill>
+                  <a:srgbClr val="101820"/>
+                </a:solidFill>
+                <a:latin typeface="Arial"/>
+                <a:ea typeface="Arial"/>
+                <a:cs typeface="Arial"/>
+              </a:defRPr>
+            </a:pPr>
+            <a:r>
+              <a:rPr sz="1800" b="1">
+                <a:solidFill>
+                  <a:srgbClr val="101820"/>
+                </a:solidFill>
+                <a:latin typeface="Arial"/>
+                <a:ea typeface="Arial"/>
+                <a:cs typeface="Arial"/>
+              </a:rPr>
+              <a:t>Ranking and the cash gate point in opposite directions.</a:t>
+            </a:r>
+          </a:p>
+        </p:txBody>
+      </p:sp>
+      <p:sp>
+        <p:nvSpPr>
+          <p:cNvPr id="16" name="">
+            <a:extLst xmlns:a="http://schemas.openxmlformats.org/drawingml/2006/main">
+              <a:ext uri="{FF2B5EF4-FFF2-40B4-BE49-F238E27FC236}">
+                <a16:creationId xmlns:a16="http://schemas.microsoft.com/office/drawing/2014/main" id="{CBB05286-4B59-4C91-A588-5CD09F062F89}"/>
+              </a:ext>
+            </a:extLst>
+          </p:cNvPr>
+          <p:cNvSpPr>
+            <a:spLocks xmlns:a="http://schemas.openxmlformats.org/drawingml/2006/main" noGrp="1"/>
+          </p:cNvSpPr>
+          <p:nvPr/>
+        </p:nvSpPr>
+        <p:spPr>
+          <a:xfrm xmlns:a="http://schemas.openxmlformats.org/drawingml/2006/main">
+            <a:off x="11144250" y="6324600"/>
+            <a:ext cx="628650" cy="266700"/>
+          </a:xfrm>
+          <a:prstGeom xmlns:a="http://schemas.openxmlformats.org/drawingml/2006/main" prst="rect">
+            <a:avLst/>
+          </a:prstGeom>
+          <a:noFill xmlns:a="http://schemas.openxmlformats.org/drawingml/2006/main"/>
+          <a:ln xmlns:a="http://schemas.openxmlformats.org/drawingml/2006/main" w="0">
+            <a:noFill/>
+            <a:prstDash val="solid"/>
+          </a:ln>
+        </p:spPr>
+        <p:txBody>
+          <a:bodyPr xmlns:a="http://schemas.openxmlformats.org/drawingml/2006/main" anchor="t"/>
+          <a:lstStyle xmlns:a="http://schemas.openxmlformats.org/drawingml/2006/main"/>
+          <a:p xmlns:a="http://schemas.openxmlformats.org/drawingml/2006/main">
+            <a:pPr algn="r">
+              <a:buNone/>
+              <a:defRPr sz="1200" b="0">
+                <a:solidFill>
+                  <a:srgbClr val="52616B"/>
+                </a:solidFill>
+                <a:latin typeface="Arial"/>
+                <a:ea typeface="Arial"/>
+                <a:cs typeface="Arial"/>
+              </a:defRPr>
+            </a:pPr>
+            <a:r>
+              <a:rPr sz="1200" b="0">
+                <a:solidFill>
+                  <a:srgbClr val="52616B"/>
+                </a:solidFill>
+                <a:latin typeface="Arial"/>
+                <a:ea typeface="Arial"/>
+                <a:cs typeface="Arial"/>
+              </a:rPr>
+              <a:t/>
+            </a:r>
+          </a:p>
+        </p:txBody>
+      </p:sp>
+      <p:pic>
+        <p:nvPicPr>
+          <p:cNvPr id="31" name=""/>
+          <p:cNvPicPr>
+            <a:picLocks xmlns:a="http://schemas.openxmlformats.org/drawingml/2006/main" noChangeAspect="1"/>
+          </p:cNvPicPr>
+          <p:nvPr/>
+        </p:nvPicPr>
+        <p:blipFill>
+          <a:blip xmlns:r="http://schemas.openxmlformats.org/officeDocument/2006/relationships" xmlns:a="http://schemas.openxmlformats.org/drawingml/2006/main" r:embed="Rd36ceaac19e04f80"/>
+          <a:stretch xmlns:a="http://schemas.openxmlformats.org/drawingml/2006/main"/>
+        </p:blipFill>
+        <p:spPr>
+          <a:xfrm xmlns:a="http://schemas.openxmlformats.org/drawingml/2006/main">
+            <a:off x="818956" y="1754868"/>
+            <a:ext cx="6686939" cy="3900714"/>
+          </a:xfrm>
+          <a:prstGeom xmlns:a="http://schemas.openxmlformats.org/drawingml/2006/main" prst="rect">
+            <a:avLst/>
+          </a:prstGeom>
+        </p:spPr>
+      </p:pic>
+    </p:spTree>
+    <p:extLst>
+      <p:ext uri="{BB962C8B-B14F-4D97-AF65-F5344CB8AC3E}">
+        <p14:creationId xmlns:p14="http://schemas.microsoft.com/office/powerpoint/2010/main" val="1019663795"/>
+      </p:ext>
+    </p:extLst>
+  </p:cSld>
+</p:sld>
+</file>
+
+<file path=ppt/slides/slide35.xml><?xml version="1.0" encoding="utf-8"?>
+<p:sld xmlns:p="http://schemas.openxmlformats.org/presentationml/2006/main">
+  <p:cSld>
+    <p:bg>
+      <p:bgPr>
+        <a:solidFill xmlns:a="http://schemas.openxmlformats.org/drawingml/2006/main">
+          <a:srgbClr val="FFFFFF"/>
+        </a:solidFill>
+      </p:bgPr>
+    </p:bg>
+    <p:spTree>
+      <p:nvGrpSpPr>
+        <p:cNvPr id="1" name=""/>
+        <p:cNvGrpSpPr/>
+        <p:nvPr/>
+      </p:nvGrpSpPr>
+      <p:grpSpPr>
+        <a:xfrm xmlns:a="http://schemas.openxmlformats.org/drawingml/2006/main"/>
+      </p:grpSpPr>
+      <p:sp>
+        <p:nvSpPr>
+          <p:cNvPr id="14" name="">
+            <a:extLst xmlns:a="http://schemas.openxmlformats.org/drawingml/2006/main">
+              <a:ext uri="{FF2B5EF4-FFF2-40B4-BE49-F238E27FC236}">
+                <a16:creationId xmlns:a16="http://schemas.microsoft.com/office/drawing/2014/main" id="{39B7BB28-C5CF-47BA-A918-FA17029EB44A}"/>
+              </a:ext>
+            </a:extLst>
+          </p:cNvPr>
+          <p:cNvSpPr>
+            <a:spLocks xmlns:a="http://schemas.openxmlformats.org/drawingml/2006/main" noGrp="1"/>
+          </p:cNvSpPr>
+          <p:nvPr/>
+        </p:nvSpPr>
+        <p:spPr>
+          <a:xfrm xmlns:a="http://schemas.openxmlformats.org/drawingml/2006/main">
+            <a:off x="400050" y="228600"/>
+            <a:ext cx="2857500" cy="228600"/>
+          </a:xfrm>
+          <a:prstGeom xmlns:a="http://schemas.openxmlformats.org/drawingml/2006/main" prst="rect">
+            <a:avLst/>
+          </a:prstGeom>
+          <a:noFill xmlns:a="http://schemas.openxmlformats.org/drawingml/2006/main"/>
+          <a:ln xmlns:a="http://schemas.openxmlformats.org/drawingml/2006/main" w="0">
+            <a:noFill/>
+            <a:prstDash val="solid"/>
+          </a:ln>
+        </p:spPr>
+        <p:txBody>
+          <a:bodyPr xmlns:a="http://schemas.openxmlformats.org/drawingml/2006/main" anchor="t"/>
+          <a:lstStyle xmlns:a="http://schemas.openxmlformats.org/drawingml/2006/main"/>
+          <a:p xmlns:a="http://schemas.openxmlformats.org/drawingml/2006/main">
+            <a:pPr algn="l">
+              <a:buNone/>
+              <a:defRPr sz="1200" b="1">
+                <a:solidFill>
+                  <a:srgbClr val="3D8DFF"/>
+                </a:solidFill>
+                <a:latin typeface="Arial"/>
+                <a:ea typeface="Arial"/>
+                <a:cs typeface="Arial"/>
+              </a:defRPr>
+            </a:pPr>
+            <a:r>
+              <a:rPr sz="1200" b="1">
+                <a:solidFill>
+                  <a:srgbClr val="3D8DFF"/>
+                </a:solidFill>
+                <a:latin typeface="Arial"/>
+                <a:ea typeface="Arial"/>
+                <a:cs typeface="Arial"/>
+              </a:rPr>
+              <a:t>LIT-MOM-03.3</a:t>
+            </a:r>
+          </a:p>
+        </p:txBody>
+      </p:sp>
+      <p:sp>
+        <p:nvSpPr>
+          <p:cNvPr id="2" name="">
+            <a:extLst xmlns:a="http://schemas.openxmlformats.org/drawingml/2006/main">
+              <a:ext uri="{FF2B5EF4-FFF2-40B4-BE49-F238E27FC236}">
+                <a16:creationId xmlns:a16="http://schemas.microsoft.com/office/drawing/2014/main" id="{8C401559-67C5-4215-B579-93FC871FC00D}"/>
+              </a:ext>
+            </a:extLst>
+          </p:cNvPr>
+          <p:cNvSpPr>
+            <a:spLocks xmlns:a="http://schemas.openxmlformats.org/drawingml/2006/main" noGrp="1"/>
+          </p:cNvSpPr>
+          <p:nvPr/>
+        </p:nvSpPr>
+        <p:spPr>
+          <a:xfrm xmlns:a="http://schemas.openxmlformats.org/drawingml/2006/main">
+            <a:off x="400050" y="476250"/>
+            <a:ext cx="11049000" cy="819150"/>
+          </a:xfrm>
+          <a:prstGeom xmlns:a="http://schemas.openxmlformats.org/drawingml/2006/main" prst="rect">
+            <a:avLst/>
+          </a:prstGeom>
+          <a:noFill xmlns:a="http://schemas.openxmlformats.org/drawingml/2006/main"/>
+          <a:ln xmlns:a="http://schemas.openxmlformats.org/drawingml/2006/main" w="0">
+            <a:noFill/>
+            <a:prstDash val="solid"/>
+          </a:ln>
+        </p:spPr>
+        <p:txBody>
+          <a:bodyPr xmlns:a="http://schemas.openxmlformats.org/drawingml/2006/main" anchor="t"/>
+          <a:lstStyle xmlns:a="http://schemas.openxmlformats.org/drawingml/2006/main"/>
+          <a:p xmlns:a="http://schemas.openxmlformats.org/drawingml/2006/main">
+            <a:pPr algn="l">
+              <a:buNone/>
+              <a:defRPr sz="2700" b="1">
+                <a:solidFill>
+                  <a:srgbClr val="101820"/>
+                </a:solidFill>
+                <a:latin typeface="Arial"/>
+                <a:ea typeface="Arial"/>
+                <a:cs typeface="Arial"/>
+              </a:defRPr>
+            </a:pPr>
+            <a:r>
+              <a:rPr sz="2700" b="1">
+                <a:solidFill>
+                  <a:srgbClr val="101820"/>
+                </a:solidFill>
+                <a:latin typeface="Arial"/>
+                <a:ea typeface="Arial"/>
+                <a:cs typeface="Arial"/>
+              </a:rPr>
+              <a:t>One broad contest reallocates capital across sectors</a:t>
+            </a:r>
+          </a:p>
+        </p:txBody>
+      </p:sp>
+      <p:sp>
+        <p:nvSpPr>
+          <p:cNvPr id="3" name="">
+            <a:extLst xmlns:a="http://schemas.openxmlformats.org/drawingml/2006/main">
+              <a:ext uri="{FF2B5EF4-FFF2-40B4-BE49-F238E27FC236}">
+                <a16:creationId xmlns:a16="http://schemas.microsoft.com/office/drawing/2014/main" id="{FE913BAC-F3B9-4338-8958-15CBEBB596BB}"/>
+              </a:ext>
+            </a:extLst>
+          </p:cNvPr>
+          <p:cNvSpPr>
+            <a:spLocks xmlns:a="http://schemas.openxmlformats.org/drawingml/2006/main" noGrp="1"/>
+          </p:cNvSpPr>
+          <p:nvPr/>
+        </p:nvSpPr>
+        <p:spPr>
+          <a:xfrm xmlns:a="http://schemas.openxmlformats.org/drawingml/2006/main">
+            <a:off x="400050" y="1428750"/>
+            <a:ext cx="11391900" cy="0"/>
+          </a:xfrm>
+          <a:prstGeom xmlns:a="http://schemas.openxmlformats.org/drawingml/2006/main" prst="line">
+            <a:avLst/>
+          </a:prstGeom>
+          <a:noFill xmlns:a="http://schemas.openxmlformats.org/drawingml/2006/main"/>
+          <a:ln xmlns:a="http://schemas.openxmlformats.org/drawingml/2006/main" w="9525">
+            <a:solidFill>
+              <a:srgbClr val="B8BCC4"/>
+            </a:solidFill>
+            <a:prstDash val="solid"/>
+          </a:ln>
+        </p:spPr>
+      </p:sp>
+      <p:sp>
+        <p:nvSpPr>
+          <p:cNvPr id="4" name="">
+            <a:extLst xmlns:a="http://schemas.openxmlformats.org/drawingml/2006/main">
+              <a:ext uri="{FF2B5EF4-FFF2-40B4-BE49-F238E27FC236}">
+                <a16:creationId xmlns:a16="http://schemas.microsoft.com/office/drawing/2014/main" id="{80D32FF2-05B5-4DF6-BBF4-B1464DC9B66A}"/>
+              </a:ext>
+            </a:extLst>
+          </p:cNvPr>
+          <p:cNvSpPr>
+            <a:spLocks xmlns:a="http://schemas.openxmlformats.org/drawingml/2006/main" noGrp="1"/>
+          </p:cNvSpPr>
+          <p:nvPr/>
+        </p:nvSpPr>
+        <p:spPr>
+          <a:xfrm xmlns:a="http://schemas.openxmlformats.org/drawingml/2006/main">
+            <a:off x="11163300" y="6362700"/>
+            <a:ext cx="609600" cy="228600"/>
+          </a:xfrm>
+          <a:prstGeom xmlns:a="http://schemas.openxmlformats.org/drawingml/2006/main" prst="rect">
+            <a:avLst/>
+          </a:prstGeom>
+          <a:noFill xmlns:a="http://schemas.openxmlformats.org/drawingml/2006/main"/>
+          <a:ln xmlns:a="http://schemas.openxmlformats.org/drawingml/2006/main" w="0">
+            <a:noFill/>
+            <a:prstDash val="solid"/>
+          </a:ln>
+        </p:spPr>
+        <p:txBody>
+          <a:bodyPr xmlns:a="http://schemas.openxmlformats.org/drawingml/2006/main" anchor="t"/>
+          <a:lstStyle xmlns:a="http://schemas.openxmlformats.org/drawingml/2006/main"/>
+          <a:p xmlns:a="http://schemas.openxmlformats.org/drawingml/2006/main">
+            <a:pPr algn="r">
+              <a:buNone/>
+              <a:defRPr sz="1200" b="0">
+                <a:solidFill>
+                  <a:srgbClr val="52616B"/>
+                </a:solidFill>
+                <a:latin typeface="Arial"/>
+                <a:ea typeface="Arial"/>
+                <a:cs typeface="Arial"/>
+              </a:defRPr>
+            </a:pPr>
+            <a:r>
+              <a:rPr sz="1200" b="0">
+                <a:solidFill>
+                  <a:srgbClr val="52616B"/>
+                </a:solidFill>
+                <a:latin typeface="Arial"/>
+                <a:ea typeface="Arial"/>
+                <a:cs typeface="Arial"/>
+              </a:rPr>
+              <a:t>35</a:t>
+            </a:r>
+          </a:p>
+        </p:txBody>
+      </p:sp>
+      <p:sp>
+        <p:nvSpPr>
+          <p:cNvPr id="6" name="">
+            <a:extLst xmlns:a="http://schemas.openxmlformats.org/drawingml/2006/main">
+              <a:ext uri="{FF2B5EF4-FFF2-40B4-BE49-F238E27FC236}">
+                <a16:creationId xmlns:a16="http://schemas.microsoft.com/office/drawing/2014/main" id="{8B7E846F-BE01-42E8-9EBB-9EA3FC7567F0}"/>
+              </a:ext>
+            </a:extLst>
+          </p:cNvPr>
+          <p:cNvSpPr>
+            <a:spLocks xmlns:a="http://schemas.openxmlformats.org/drawingml/2006/main" noGrp="1"/>
+          </p:cNvSpPr>
+          <p:nvPr/>
+        </p:nvSpPr>
+        <p:spPr>
+          <a:xfrm xmlns:a="http://schemas.openxmlformats.org/drawingml/2006/main">
+            <a:off x="8153400" y="1695450"/>
+            <a:ext cx="3429000" cy="4057650"/>
+          </a:xfrm>
+          <a:prstGeom xmlns:a="http://schemas.openxmlformats.org/drawingml/2006/main" prst="rect">
+            <a:avLst/>
+          </a:prstGeom>
+          <a:solidFill xmlns:a="http://schemas.openxmlformats.org/drawingml/2006/main">
+            <a:srgbClr val="EAF5FB"/>
+          </a:solidFill>
+          <a:ln xmlns:a="http://schemas.openxmlformats.org/drawingml/2006/main" w="9525">
+            <a:solidFill>
+              <a:srgbClr val="6DCBF4"/>
+            </a:solidFill>
+            <a:prstDash val="solid"/>
+          </a:ln>
+        </p:spPr>
+      </p:sp>
+      <p:sp>
+        <p:nvSpPr>
+          <p:cNvPr id="7" name="">
+            <a:extLst xmlns:a="http://schemas.openxmlformats.org/drawingml/2006/main">
+              <a:ext uri="{FF2B5EF4-FFF2-40B4-BE49-F238E27FC236}">
+                <a16:creationId xmlns:a16="http://schemas.microsoft.com/office/drawing/2014/main" id="{7A48CFB1-8F2F-43AD-84B5-5B62F4FCE8D1}"/>
+              </a:ext>
+            </a:extLst>
+          </p:cNvPr>
+          <p:cNvSpPr>
+            <a:spLocks xmlns:a="http://schemas.openxmlformats.org/drawingml/2006/main" noGrp="1"/>
+          </p:cNvSpPr>
+          <p:nvPr/>
+        </p:nvSpPr>
+        <p:spPr>
+          <a:xfrm xmlns:a="http://schemas.openxmlformats.org/drawingml/2006/main">
+            <a:off x="8496300" y="2000250"/>
+            <a:ext cx="2476500" cy="247650"/>
+          </a:xfrm>
+          <a:prstGeom xmlns:a="http://schemas.openxmlformats.org/drawingml/2006/main" prst="rect">
+            <a:avLst/>
+          </a:prstGeom>
+          <a:noFill xmlns:a="http://schemas.openxmlformats.org/drawingml/2006/main"/>
+          <a:ln xmlns:a="http://schemas.openxmlformats.org/drawingml/2006/main" w="0">
+            <a:noFill/>
+            <a:prstDash val="solid"/>
+          </a:ln>
+        </p:spPr>
+        <p:txBody>
+          <a:bodyPr xmlns:a="http://schemas.openxmlformats.org/drawingml/2006/main" anchor="t"/>
+          <a:lstStyle xmlns:a="http://schemas.openxmlformats.org/drawingml/2006/main"/>
+          <a:p xmlns:a="http://schemas.openxmlformats.org/drawingml/2006/main">
+            <a:pPr algn="l">
+              <a:buNone/>
+              <a:defRPr sz="1275" b="1">
+                <a:solidFill>
+                  <a:srgbClr val="3D8DFF"/>
+                </a:solidFill>
+                <a:latin typeface="Arial"/>
+                <a:ea typeface="Arial"/>
+                <a:cs typeface="Arial"/>
+              </a:defRPr>
+            </a:pPr>
+            <a:r>
+              <a:rPr sz="1275" b="1">
+                <a:solidFill>
+                  <a:srgbClr val="3D8DFF"/>
+                </a:solidFill>
+                <a:latin typeface="Arial"/>
+                <a:ea typeface="Arial"/>
+                <a:cs typeface="Arial"/>
+              </a:rPr>
+              <a:t>CROSS-SECTOR</a:t>
+            </a:r>
+          </a:p>
+        </p:txBody>
+      </p:sp>
+      <p:sp>
+        <p:nvSpPr>
+          <p:cNvPr id="8" name="">
+            <a:extLst xmlns:a="http://schemas.openxmlformats.org/drawingml/2006/main">
+              <a:ext uri="{FF2B5EF4-FFF2-40B4-BE49-F238E27FC236}">
+                <a16:creationId xmlns:a16="http://schemas.microsoft.com/office/drawing/2014/main" id="{DC731ED7-5F85-42CB-A69F-0889CEA3331A}"/>
+              </a:ext>
+            </a:extLst>
+          </p:cNvPr>
+          <p:cNvSpPr>
+            <a:spLocks xmlns:a="http://schemas.openxmlformats.org/drawingml/2006/main" noGrp="1"/>
+          </p:cNvSpPr>
+          <p:nvPr/>
+        </p:nvSpPr>
+        <p:spPr>
+          <a:xfrm xmlns:a="http://schemas.openxmlformats.org/drawingml/2006/main">
+            <a:off x="8496300" y="2533650"/>
+            <a:ext cx="2686050" cy="609600"/>
+          </a:xfrm>
+          <a:prstGeom xmlns:a="http://schemas.openxmlformats.org/drawingml/2006/main" prst="rect">
+            <a:avLst/>
+          </a:prstGeom>
+          <a:noFill xmlns:a="http://schemas.openxmlformats.org/drawingml/2006/main"/>
+          <a:ln xmlns:a="http://schemas.openxmlformats.org/drawingml/2006/main" w="0">
+            <a:noFill/>
+            <a:prstDash val="solid"/>
+          </a:ln>
+        </p:spPr>
+        <p:txBody>
+          <a:bodyPr xmlns:a="http://schemas.openxmlformats.org/drawingml/2006/main" anchor="t"/>
+          <a:lstStyle xmlns:a="http://schemas.openxmlformats.org/drawingml/2006/main"/>
+          <a:p xmlns:a="http://schemas.openxmlformats.org/drawingml/2006/main">
+            <a:pPr algn="l">
+              <a:buNone/>
+              <a:defRPr sz="3375" b="1">
+                <a:solidFill>
+                  <a:srgbClr val="3D8DFF"/>
+                </a:solidFill>
+                <a:latin typeface="Arial"/>
+                <a:ea typeface="Arial"/>
+                <a:cs typeface="Arial"/>
+              </a:defRPr>
+            </a:pPr>
+            <a:r>
+              <a:rPr sz="3375" b="1">
+                <a:solidFill>
+                  <a:srgbClr val="3D8DFF"/>
+                </a:solidFill>
+                <a:latin typeface="Arial"/>
+                <a:ea typeface="Arial"/>
+                <a:cs typeface="Arial"/>
+              </a:rPr>
+              <a:t>11 sectors</a:t>
+            </a:r>
+          </a:p>
+        </p:txBody>
+      </p:sp>
+      <p:sp>
+        <p:nvSpPr>
+          <p:cNvPr id="9" name="">
+            <a:extLst xmlns:a="http://schemas.openxmlformats.org/drawingml/2006/main">
+              <a:ext uri="{FF2B5EF4-FFF2-40B4-BE49-F238E27FC236}">
+                <a16:creationId xmlns:a16="http://schemas.microsoft.com/office/drawing/2014/main" id="{406DC0E8-33AD-4797-87D6-8B560493E789}"/>
+              </a:ext>
+            </a:extLst>
+          </p:cNvPr>
+          <p:cNvSpPr>
+            <a:spLocks xmlns:a="http://schemas.openxmlformats.org/drawingml/2006/main" noGrp="1"/>
+          </p:cNvSpPr>
+          <p:nvPr/>
+        </p:nvSpPr>
+        <p:spPr>
+          <a:xfrm xmlns:a="http://schemas.openxmlformats.org/drawingml/2006/main">
+            <a:off x="8496300" y="3105150"/>
+            <a:ext cx="2686050" cy="400050"/>
+          </a:xfrm>
+          <a:prstGeom xmlns:a="http://schemas.openxmlformats.org/drawingml/2006/main" prst="rect">
+            <a:avLst/>
+          </a:prstGeom>
+          <a:noFill xmlns:a="http://schemas.openxmlformats.org/drawingml/2006/main"/>
+          <a:ln xmlns:a="http://schemas.openxmlformats.org/drawingml/2006/main" w="0">
+            <a:noFill/>
+            <a:prstDash val="solid"/>
+          </a:ln>
+        </p:spPr>
+        <p:txBody>
+          <a:bodyPr xmlns:a="http://schemas.openxmlformats.org/drawingml/2006/main" anchor="t"/>
+          <a:lstStyle xmlns:a="http://schemas.openxmlformats.org/drawingml/2006/main"/>
+          <a:p xmlns:a="http://schemas.openxmlformats.org/drawingml/2006/main">
+            <a:pPr algn="l">
+              <a:buNone/>
+              <a:defRPr sz="1725" b="0">
+                <a:solidFill>
+                  <a:srgbClr val="52616B"/>
+                </a:solidFill>
+                <a:latin typeface="Arial"/>
+                <a:ea typeface="Arial"/>
+                <a:cs typeface="Arial"/>
+              </a:defRPr>
+            </a:pPr>
+            <a:r>
+              <a:rPr sz="1725" b="0">
+                <a:solidFill>
+                  <a:srgbClr val="52616B"/>
+                </a:solidFill>
+                <a:latin typeface="Arial"/>
+                <a:ea typeface="Arial"/>
+                <a:cs typeface="Arial"/>
+              </a:rPr>
+              <a:t>compete together</a:t>
+            </a:r>
+          </a:p>
+        </p:txBody>
+      </p:sp>
+      <p:sp>
+        <p:nvSpPr>
+          <p:cNvPr id="10" name="">
+            <a:extLst xmlns:a="http://schemas.openxmlformats.org/drawingml/2006/main">
+              <a:ext uri="{FF2B5EF4-FFF2-40B4-BE49-F238E27FC236}">
+                <a16:creationId xmlns:a16="http://schemas.microsoft.com/office/drawing/2014/main" id="{A0EB914A-A236-47F4-91E9-BA72FF10432A}"/>
+              </a:ext>
+            </a:extLst>
+          </p:cNvPr>
+          <p:cNvSpPr>
+            <a:spLocks xmlns:a="http://schemas.openxmlformats.org/drawingml/2006/main" noGrp="1"/>
+          </p:cNvSpPr>
+          <p:nvPr/>
+        </p:nvSpPr>
+        <p:spPr>
+          <a:xfrm xmlns:a="http://schemas.openxmlformats.org/drawingml/2006/main">
+            <a:off x="8496300" y="3714750"/>
+            <a:ext cx="2686050" cy="0"/>
+          </a:xfrm>
+          <a:prstGeom xmlns:a="http://schemas.openxmlformats.org/drawingml/2006/main" prst="line">
+            <a:avLst/>
+          </a:prstGeom>
+          <a:noFill xmlns:a="http://schemas.openxmlformats.org/drawingml/2006/main"/>
+          <a:ln xmlns:a="http://schemas.openxmlformats.org/drawingml/2006/main" w="19050">
+            <a:solidFill>
+              <a:srgbClr val="6DCBF4"/>
+            </a:solidFill>
+            <a:prstDash val="solid"/>
+          </a:ln>
+        </p:spPr>
+      </p:sp>
+      <p:sp>
+        <p:nvSpPr>
+          <p:cNvPr id="11" name="">
+            <a:extLst xmlns:a="http://schemas.openxmlformats.org/drawingml/2006/main">
+              <a:ext uri="{FF2B5EF4-FFF2-40B4-BE49-F238E27FC236}">
+                <a16:creationId xmlns:a16="http://schemas.microsoft.com/office/drawing/2014/main" id="{63C90848-627F-4872-9F08-0BCEBC58FC88}"/>
+              </a:ext>
+            </a:extLst>
+          </p:cNvPr>
+          <p:cNvSpPr>
+            <a:spLocks xmlns:a="http://schemas.openxmlformats.org/drawingml/2006/main" noGrp="1"/>
+          </p:cNvSpPr>
+          <p:nvPr/>
+        </p:nvSpPr>
+        <p:spPr>
+          <a:xfrm xmlns:a="http://schemas.openxmlformats.org/drawingml/2006/main">
+            <a:off x="8496300" y="3962400"/>
+            <a:ext cx="2686050" cy="323850"/>
+          </a:xfrm>
+          <a:prstGeom xmlns:a="http://schemas.openxmlformats.org/drawingml/2006/main" prst="rect">
+            <a:avLst/>
+          </a:prstGeom>
+          <a:noFill xmlns:a="http://schemas.openxmlformats.org/drawingml/2006/main"/>
+          <a:ln xmlns:a="http://schemas.openxmlformats.org/drawingml/2006/main" w="0">
+            <a:noFill/>
+            <a:prstDash val="solid"/>
+          </a:ln>
+        </p:spPr>
+        <p:txBody>
+          <a:bodyPr xmlns:a="http://schemas.openxmlformats.org/drawingml/2006/main" anchor="t"/>
+          <a:lstStyle xmlns:a="http://schemas.openxmlformats.org/drawingml/2006/main"/>
+          <a:p xmlns:a="http://schemas.openxmlformats.org/drawingml/2006/main">
+            <a:pPr algn="l">
+              <a:buNone/>
+              <a:defRPr sz="1575" b="1">
+                <a:solidFill>
+                  <a:srgbClr val="101820"/>
+                </a:solidFill>
+                <a:latin typeface="Arial"/>
+                <a:ea typeface="Arial"/>
+                <a:cs typeface="Arial"/>
+              </a:defRPr>
+            </a:pPr>
+            <a:r>
+              <a:rPr sz="1575" b="1">
+                <a:solidFill>
+                  <a:srgbClr val="101820"/>
+                </a:solidFill>
+                <a:latin typeface="Arial"/>
+                <a:ea typeface="Arial"/>
+                <a:cs typeface="Arial"/>
+              </a:rPr>
+              <a:t>12.88% average</a:t>
+            </a:r>
+          </a:p>
+        </p:txBody>
+      </p:sp>
+      <p:sp>
+        <p:nvSpPr>
+          <p:cNvPr id="12" name="">
+            <a:extLst xmlns:a="http://schemas.openxmlformats.org/drawingml/2006/main">
+              <a:ext uri="{FF2B5EF4-FFF2-40B4-BE49-F238E27FC236}">
+                <a16:creationId xmlns:a16="http://schemas.microsoft.com/office/drawing/2014/main" id="{70090FDC-931D-4B56-AD5D-C71AA6FC29F9}"/>
+              </a:ext>
+            </a:extLst>
+          </p:cNvPr>
+          <p:cNvSpPr>
+            <a:spLocks xmlns:a="http://schemas.openxmlformats.org/drawingml/2006/main" noGrp="1"/>
+          </p:cNvSpPr>
+          <p:nvPr/>
+        </p:nvSpPr>
+        <p:spPr>
+          <a:xfrm xmlns:a="http://schemas.openxmlformats.org/drawingml/2006/main">
+            <a:off x="8496300" y="4419600"/>
+            <a:ext cx="2686050" cy="1009650"/>
+          </a:xfrm>
+          <a:prstGeom xmlns:a="http://schemas.openxmlformats.org/drawingml/2006/main" prst="rect">
+            <a:avLst/>
+          </a:prstGeom>
+          <a:noFill xmlns:a="http://schemas.openxmlformats.org/drawingml/2006/main"/>
+          <a:ln xmlns:a="http://schemas.openxmlformats.org/drawingml/2006/main" w="0">
+            <a:noFill/>
+            <a:prstDash val="solid"/>
+          </a:ln>
+        </p:spPr>
+        <p:txBody>
+          <a:bodyPr xmlns:a="http://schemas.openxmlformats.org/drawingml/2006/main" anchor="t"/>
+          <a:lstStyle xmlns:a="http://schemas.openxmlformats.org/drawingml/2006/main"/>
+          <a:p xmlns:a="http://schemas.openxmlformats.org/drawingml/2006/main">
+            <a:pPr algn="l">
+              <a:buNone/>
+              <a:defRPr sz="1725" b="0">
+                <a:solidFill>
+                  <a:srgbClr val="52616B"/>
+                </a:solidFill>
+                <a:latin typeface="Arial"/>
+                <a:ea typeface="Arial"/>
+                <a:cs typeface="Arial"/>
+              </a:defRPr>
+            </a:pPr>
+            <a:r>
+              <a:rPr sz="1725" b="0">
+                <a:solidFill>
+                  <a:srgbClr val="52616B"/>
+                </a:solidFill>
+                <a:latin typeface="Arial"/>
+                <a:ea typeface="Arial"/>
+                <a:cs typeface="Arial"/>
+              </a:rPr>
+              <a:t>Technology weight</a:t>
+            </a:r>
+          </a:p>
+          <a:p xmlns:a="http://schemas.openxmlformats.org/drawingml/2006/main">
+            <a:pPr algn="l">
+              <a:buNone/>
+              <a:defRPr sz="1725" b="0">
+                <a:solidFill>
+                  <a:srgbClr val="52616B"/>
+                </a:solidFill>
+                <a:latin typeface="Arial"/>
+                <a:ea typeface="Arial"/>
+                <a:cs typeface="Arial"/>
+              </a:defRPr>
+            </a:pPr>
+            <a:r>
+              <a:rPr sz="1725" b="0">
+                <a:solidFill>
+                  <a:srgbClr val="52616B"/>
+                </a:solidFill>
+                <a:latin typeface="Arial"/>
+                <a:ea typeface="Arial"/>
+                <a:cs typeface="Arial"/>
+              </a:rPr>
+              <a:t>27.59% max any sector</a:t>
+            </a:r>
+          </a:p>
+        </p:txBody>
+      </p:sp>
+      <p:sp>
+        <p:nvSpPr>
+          <p:cNvPr id="13" name="">
+            <a:extLst xmlns:a="http://schemas.openxmlformats.org/drawingml/2006/main">
+              <a:ext uri="{FF2B5EF4-FFF2-40B4-BE49-F238E27FC236}">
+                <a16:creationId xmlns:a16="http://schemas.microsoft.com/office/drawing/2014/main" id="{F166845D-8E26-4804-AAA3-D76C79B2D4FB}"/>
+              </a:ext>
+            </a:extLst>
+          </p:cNvPr>
+          <p:cNvSpPr>
+            <a:spLocks xmlns:a="http://schemas.openxmlformats.org/drawingml/2006/main" noGrp="1"/>
+          </p:cNvSpPr>
+          <p:nvPr/>
+        </p:nvSpPr>
+        <p:spPr>
+          <a:xfrm xmlns:a="http://schemas.openxmlformats.org/drawingml/2006/main">
+            <a:off x="1066800" y="5886450"/>
+            <a:ext cx="9620250" cy="323850"/>
+          </a:xfrm>
+          <a:prstGeom xmlns:a="http://schemas.openxmlformats.org/drawingml/2006/main" prst="rect">
+            <a:avLst/>
+          </a:prstGeom>
+          <a:noFill xmlns:a="http://schemas.openxmlformats.org/drawingml/2006/main"/>
+          <a:ln xmlns:a="http://schemas.openxmlformats.org/drawingml/2006/main" w="0">
+            <a:noFill/>
+            <a:prstDash val="solid"/>
+          </a:ln>
+        </p:spPr>
+        <p:txBody>
+          <a:bodyPr xmlns:a="http://schemas.openxmlformats.org/drawingml/2006/main" anchor="t"/>
+          <a:lstStyle xmlns:a="http://schemas.openxmlformats.org/drawingml/2006/main"/>
+          <a:p xmlns:a="http://schemas.openxmlformats.org/drawingml/2006/main">
+            <a:pPr algn="ctr">
+              <a:buNone/>
+              <a:defRPr sz="1800" b="1">
+                <a:solidFill>
+                  <a:srgbClr val="101820"/>
+                </a:solidFill>
+                <a:latin typeface="Arial"/>
+                <a:ea typeface="Arial"/>
+                <a:cs typeface="Arial"/>
+              </a:defRPr>
+            </a:pPr>
+            <a:r>
+              <a:rPr sz="1800" b="1">
+                <a:solidFill>
+                  <a:srgbClr val="101820"/>
+                </a:solidFill>
+                <a:latin typeface="Arial"/>
+                <a:ea typeface="Arial"/>
+                <a:cs typeface="Arial"/>
+              </a:rPr>
+              <a:t>The portfolio rotates across sectors; no sector holds a fixed quota.</a:t>
+            </a:r>
+          </a:p>
+        </p:txBody>
+      </p:sp>
+      <p:sp>
+        <p:nvSpPr>
+          <p:cNvPr id="16" name="">
+            <a:extLst xmlns:a="http://schemas.openxmlformats.org/drawingml/2006/main">
+              <a:ext uri="{FF2B5EF4-FFF2-40B4-BE49-F238E27FC236}">
+                <a16:creationId xmlns:a16="http://schemas.microsoft.com/office/drawing/2014/main" id="{CBB05286-4B59-4C91-A588-5CD09F062F89}"/>
+              </a:ext>
+            </a:extLst>
+          </p:cNvPr>
+          <p:cNvSpPr>
+            <a:spLocks xmlns:a="http://schemas.openxmlformats.org/drawingml/2006/main" noGrp="1"/>
+          </p:cNvSpPr>
+          <p:nvPr/>
+        </p:nvSpPr>
+        <p:spPr>
+          <a:xfrm xmlns:a="http://schemas.openxmlformats.org/drawingml/2006/main">
+            <a:off x="11144250" y="6324600"/>
+            <a:ext cx="628650" cy="266700"/>
+          </a:xfrm>
+          <a:prstGeom xmlns:a="http://schemas.openxmlformats.org/drawingml/2006/main" prst="rect">
+            <a:avLst/>
+          </a:prstGeom>
+          <a:noFill xmlns:a="http://schemas.openxmlformats.org/drawingml/2006/main"/>
+          <a:ln xmlns:a="http://schemas.openxmlformats.org/drawingml/2006/main" w="0">
+            <a:noFill/>
+            <a:prstDash val="solid"/>
+          </a:ln>
+        </p:spPr>
+        <p:txBody>
+          <a:bodyPr xmlns:a="http://schemas.openxmlformats.org/drawingml/2006/main" anchor="t"/>
+          <a:lstStyle xmlns:a="http://schemas.openxmlformats.org/drawingml/2006/main"/>
+          <a:p xmlns:a="http://schemas.openxmlformats.org/drawingml/2006/main">
+            <a:pPr algn="r">
+              <a:buNone/>
+              <a:defRPr sz="1200" b="0">
+                <a:solidFill>
+                  <a:srgbClr val="52616B"/>
+                </a:solidFill>
+                <a:latin typeface="Arial"/>
+                <a:ea typeface="Arial"/>
+                <a:cs typeface="Arial"/>
+              </a:defRPr>
+            </a:pPr>
+            <a:r>
+              <a:rPr sz="1200" b="0">
+                <a:solidFill>
+                  <a:srgbClr val="52616B"/>
+                </a:solidFill>
+                <a:latin typeface="Arial"/>
+                <a:ea typeface="Arial"/>
+                <a:cs typeface="Arial"/>
+              </a:rPr>
+              <a:t/>
+            </a:r>
+          </a:p>
+        </p:txBody>
+      </p:sp>
+      <p:pic>
+        <p:nvPicPr>
+          <p:cNvPr id="31" name=""/>
+          <p:cNvPicPr>
+            <a:picLocks xmlns:a="http://schemas.openxmlformats.org/drawingml/2006/main" noChangeAspect="1"/>
+          </p:cNvPicPr>
+          <p:nvPr/>
+        </p:nvPicPr>
+        <p:blipFill>
+          <a:blip xmlns:r="http://schemas.openxmlformats.org/officeDocument/2006/relationships" xmlns:a="http://schemas.openxmlformats.org/drawingml/2006/main" r:embed="Rd626146f6f894db6"/>
+          <a:stretch xmlns:a="http://schemas.openxmlformats.org/drawingml/2006/main"/>
+        </p:blipFill>
+        <p:spPr>
+          <a:xfrm xmlns:a="http://schemas.openxmlformats.org/drawingml/2006/main">
+            <a:off x="651782" y="1657350"/>
+            <a:ext cx="7021286" cy="4095750"/>
+          </a:xfrm>
+          <a:prstGeom xmlns:a="http://schemas.openxmlformats.org/drawingml/2006/main" prst="rect">
+            <a:avLst/>
+          </a:prstGeom>
+        </p:spPr>
+      </p:pic>
+    </p:spTree>
+    <p:extLst>
+      <p:ext uri="{BB962C8B-B14F-4D97-AF65-F5344CB8AC3E}">
+        <p14:creationId xmlns:p14="http://schemas.microsoft.com/office/powerpoint/2010/main" val="1019663795"/>
+      </p:ext>
+    </p:extLst>
+  </p:cSld>
+</p:sld>
+</file>
+
+<file path=ppt/slides/slide36.xml><?xml version="1.0" encoding="utf-8"?>
+<p:sld xmlns:p="http://schemas.openxmlformats.org/presentationml/2006/main">
+  <p:cSld>
+    <p:bg>
+      <p:bgPr>
+        <a:solidFill xmlns:a="http://schemas.openxmlformats.org/drawingml/2006/main">
+          <a:srgbClr val="FFFFFF"/>
+        </a:solidFill>
+      </p:bgPr>
+    </p:bg>
+    <p:spTree>
+      <p:nvGrpSpPr>
+        <p:cNvPr id="1" name=""/>
+        <p:cNvGrpSpPr/>
+        <p:nvPr/>
+      </p:nvGrpSpPr>
+      <p:grpSpPr>
+        <a:xfrm xmlns:a="http://schemas.openxmlformats.org/drawingml/2006/main"/>
+      </p:grpSpPr>
+      <p:sp>
+        <p:nvSpPr>
+          <p:cNvPr id="16" name="">
+            <a:extLst xmlns:a="http://schemas.openxmlformats.org/drawingml/2006/main">
+              <a:ext uri="{FF2B5EF4-FFF2-40B4-BE49-F238E27FC236}">
+                <a16:creationId xmlns:a16="http://schemas.microsoft.com/office/drawing/2014/main" id="{D2DB7632-9321-4B0D-B49B-BAF52F1D5F3F}"/>
+              </a:ext>
+            </a:extLst>
+          </p:cNvPr>
+          <p:cNvSpPr>
+            <a:spLocks xmlns:a="http://schemas.openxmlformats.org/drawingml/2006/main" noGrp="1"/>
+          </p:cNvSpPr>
+          <p:nvPr/>
+        </p:nvSpPr>
+        <p:spPr>
+          <a:xfrm xmlns:a="http://schemas.openxmlformats.org/drawingml/2006/main">
+            <a:off x="400050" y="228600"/>
+            <a:ext cx="2857500" cy="228600"/>
+          </a:xfrm>
+          <a:prstGeom xmlns:a="http://schemas.openxmlformats.org/drawingml/2006/main" prst="rect">
+            <a:avLst/>
+          </a:prstGeom>
+          <a:noFill xmlns:a="http://schemas.openxmlformats.org/drawingml/2006/main"/>
+          <a:ln xmlns:a="http://schemas.openxmlformats.org/drawingml/2006/main" w="0">
+            <a:noFill/>
+            <a:prstDash val="solid"/>
+          </a:ln>
+        </p:spPr>
+        <p:txBody>
+          <a:bodyPr xmlns:a="http://schemas.openxmlformats.org/drawingml/2006/main" anchor="t"/>
+          <a:lstStyle xmlns:a="http://schemas.openxmlformats.org/drawingml/2006/main"/>
+          <a:p xmlns:a="http://schemas.openxmlformats.org/drawingml/2006/main">
+            <a:pPr algn="l">
+              <a:buNone/>
+              <a:defRPr sz="1200" b="1">
+                <a:solidFill>
+                  <a:srgbClr val="3D8DFF"/>
+                </a:solidFill>
+                <a:latin typeface="Arial"/>
+                <a:ea typeface="Arial"/>
+                <a:cs typeface="Arial"/>
+              </a:defRPr>
+            </a:pPr>
+            <a:r>
+              <a:rPr sz="1200" b="1">
+                <a:solidFill>
+                  <a:srgbClr val="3D8DFF"/>
+                </a:solidFill>
+                <a:latin typeface="Arial"/>
+                <a:ea typeface="Arial"/>
+                <a:cs typeface="Arial"/>
+              </a:rPr>
+              <a:t>LIT-MOM-03.3</a:t>
+            </a:r>
+          </a:p>
+        </p:txBody>
+      </p:sp>
+      <p:sp>
+        <p:nvSpPr>
+          <p:cNvPr id="2" name="">
+            <a:extLst xmlns:a="http://schemas.openxmlformats.org/drawingml/2006/main">
+              <a:ext uri="{FF2B5EF4-FFF2-40B4-BE49-F238E27FC236}">
+                <a16:creationId xmlns:a16="http://schemas.microsoft.com/office/drawing/2014/main" id="{4F6E0FE8-6C1B-4A13-9D2D-6E11399D4DD1}"/>
+              </a:ext>
+            </a:extLst>
+          </p:cNvPr>
+          <p:cNvSpPr>
+            <a:spLocks xmlns:a="http://schemas.openxmlformats.org/drawingml/2006/main" noGrp="1"/>
+          </p:cNvSpPr>
+          <p:nvPr/>
+        </p:nvSpPr>
+        <p:spPr>
+          <a:xfrm xmlns:a="http://schemas.openxmlformats.org/drawingml/2006/main">
+            <a:off x="400050" y="476250"/>
+            <a:ext cx="11049000" cy="819150"/>
+          </a:xfrm>
+          <a:prstGeom xmlns:a="http://schemas.openxmlformats.org/drawingml/2006/main" prst="rect">
+            <a:avLst/>
+          </a:prstGeom>
+          <a:noFill xmlns:a="http://schemas.openxmlformats.org/drawingml/2006/main"/>
+          <a:ln xmlns:a="http://schemas.openxmlformats.org/drawingml/2006/main" w="0">
+            <a:noFill/>
+            <a:prstDash val="solid"/>
+          </a:ln>
+        </p:spPr>
+        <p:txBody>
+          <a:bodyPr xmlns:a="http://schemas.openxmlformats.org/drawingml/2006/main" anchor="t"/>
+          <a:lstStyle xmlns:a="http://schemas.openxmlformats.org/drawingml/2006/main"/>
+          <a:p xmlns:a="http://schemas.openxmlformats.org/drawingml/2006/main">
+            <a:pPr algn="l">
+              <a:buNone/>
+              <a:defRPr sz="2700" b="1">
+                <a:solidFill>
+                  <a:srgbClr val="101820"/>
+                </a:solidFill>
+                <a:latin typeface="Arial"/>
+                <a:ea typeface="Arial"/>
+                <a:cs typeface="Arial"/>
+              </a:defRPr>
+            </a:pPr>
+            <a:r>
+              <a:rPr sz="2700" b="1">
+                <a:solidFill>
+                  <a:srgbClr val="101820"/>
+                </a:solidFill>
+                <a:latin typeface="Arial"/>
+                <a:ea typeface="Arial"/>
+                <a:cs typeface="Arial"/>
+              </a:rPr>
+              <a:t>A ranking clue survives—but the universe cannot support promotion</a:t>
+            </a:r>
+          </a:p>
+        </p:txBody>
+      </p:sp>
+      <p:sp>
+        <p:nvSpPr>
+          <p:cNvPr id="3" name="">
+            <a:extLst xmlns:a="http://schemas.openxmlformats.org/drawingml/2006/main">
+              <a:ext uri="{FF2B5EF4-FFF2-40B4-BE49-F238E27FC236}">
+                <a16:creationId xmlns:a16="http://schemas.microsoft.com/office/drawing/2014/main" id="{0E0B56DB-4E40-4B87-BA34-B14274318353}"/>
+              </a:ext>
+            </a:extLst>
+          </p:cNvPr>
+          <p:cNvSpPr>
+            <a:spLocks xmlns:a="http://schemas.openxmlformats.org/drawingml/2006/main" noGrp="1"/>
+          </p:cNvSpPr>
+          <p:nvPr/>
+        </p:nvSpPr>
+        <p:spPr>
+          <a:xfrm xmlns:a="http://schemas.openxmlformats.org/drawingml/2006/main">
+            <a:off x="400050" y="1428750"/>
+            <a:ext cx="11391900" cy="0"/>
+          </a:xfrm>
+          <a:prstGeom xmlns:a="http://schemas.openxmlformats.org/drawingml/2006/main" prst="line">
+            <a:avLst/>
+          </a:prstGeom>
+          <a:noFill xmlns:a="http://schemas.openxmlformats.org/drawingml/2006/main"/>
+          <a:ln xmlns:a="http://schemas.openxmlformats.org/drawingml/2006/main" w="9525">
+            <a:solidFill>
+              <a:srgbClr val="B8BCC4"/>
+            </a:solidFill>
+            <a:prstDash val="solid"/>
+          </a:ln>
+        </p:spPr>
+      </p:sp>
+      <p:sp>
+        <p:nvSpPr>
+          <p:cNvPr id="4" name="">
+            <a:extLst xmlns:a="http://schemas.openxmlformats.org/drawingml/2006/main">
+              <a:ext uri="{FF2B5EF4-FFF2-40B4-BE49-F238E27FC236}">
+                <a16:creationId xmlns:a16="http://schemas.microsoft.com/office/drawing/2014/main" id="{609465AD-88DC-48BC-BDAC-EBEFA9C8F7B5}"/>
+              </a:ext>
+            </a:extLst>
+          </p:cNvPr>
+          <p:cNvSpPr>
+            <a:spLocks xmlns:a="http://schemas.openxmlformats.org/drawingml/2006/main" noGrp="1"/>
+          </p:cNvSpPr>
+          <p:nvPr/>
+        </p:nvSpPr>
+        <p:spPr>
+          <a:xfrm xmlns:a="http://schemas.openxmlformats.org/drawingml/2006/main">
+            <a:off x="11163300" y="6362700"/>
+            <a:ext cx="609600" cy="228600"/>
+          </a:xfrm>
+          <a:prstGeom xmlns:a="http://schemas.openxmlformats.org/drawingml/2006/main" prst="rect">
+            <a:avLst/>
+          </a:prstGeom>
+          <a:noFill xmlns:a="http://schemas.openxmlformats.org/drawingml/2006/main"/>
+          <a:ln xmlns:a="http://schemas.openxmlformats.org/drawingml/2006/main" w="0">
+            <a:noFill/>
+            <a:prstDash val="solid"/>
+          </a:ln>
+        </p:spPr>
+        <p:txBody>
+          <a:bodyPr xmlns:a="http://schemas.openxmlformats.org/drawingml/2006/main" anchor="t"/>
+          <a:lstStyle xmlns:a="http://schemas.openxmlformats.org/drawingml/2006/main"/>
+          <a:p xmlns:a="http://schemas.openxmlformats.org/drawingml/2006/main">
+            <a:pPr algn="r">
+              <a:buNone/>
+              <a:defRPr sz="1200" b="0">
+                <a:solidFill>
+                  <a:srgbClr val="52616B"/>
+                </a:solidFill>
+                <a:latin typeface="Arial"/>
+                <a:ea typeface="Arial"/>
+                <a:cs typeface="Arial"/>
+              </a:defRPr>
+            </a:pPr>
+            <a:r>
+              <a:rPr sz="1200" b="0">
+                <a:solidFill>
+                  <a:srgbClr val="52616B"/>
+                </a:solidFill>
+                <a:latin typeface="Arial"/>
+                <a:ea typeface="Arial"/>
+                <a:cs typeface="Arial"/>
+              </a:rPr>
+              <a:t> 36</a:t>
+            </a:r>
+          </a:p>
+        </p:txBody>
+      </p:sp>
+      <p:sp>
+        <p:nvSpPr>
+          <p:cNvPr id="5" name="">
+            <a:extLst xmlns:a="http://schemas.openxmlformats.org/drawingml/2006/main">
+              <a:ext uri="{FF2B5EF4-FFF2-40B4-BE49-F238E27FC236}">
+                <a16:creationId xmlns:a16="http://schemas.microsoft.com/office/drawing/2014/main" id="{CD393174-0A3C-4E18-A0E5-CFFEAB42B506}"/>
+              </a:ext>
+            </a:extLst>
+          </p:cNvPr>
+          <p:cNvSpPr>
+            <a:spLocks xmlns:a="http://schemas.openxmlformats.org/drawingml/2006/main" noGrp="1"/>
+          </p:cNvSpPr>
+          <p:nvPr/>
+        </p:nvSpPr>
+        <p:spPr>
+          <a:xfrm xmlns:a="http://schemas.openxmlformats.org/drawingml/2006/main">
+            <a:off x="666750" y="1752600"/>
+            <a:ext cx="10858500" cy="1028700"/>
+          </a:xfrm>
+          <a:prstGeom xmlns:a="http://schemas.openxmlformats.org/drawingml/2006/main" prst="rect">
+            <a:avLst/>
+          </a:prstGeom>
+          <a:solidFill xmlns:a="http://schemas.openxmlformats.org/drawingml/2006/main">
+            <a:srgbClr val="E6F2EC"/>
+          </a:solidFill>
+          <a:ln xmlns:a="http://schemas.openxmlformats.org/drawingml/2006/main" w="9525">
+            <a:solidFill>
+              <a:srgbClr val="2E7D5B"/>
+            </a:solidFill>
+            <a:prstDash val="solid"/>
+          </a:ln>
+        </p:spPr>
+      </p:sp>
+      <p:sp>
+        <p:nvSpPr>
+          <p:cNvPr id="6" name="">
+            <a:extLst xmlns:a="http://schemas.openxmlformats.org/drawingml/2006/main">
+              <a:ext uri="{FF2B5EF4-FFF2-40B4-BE49-F238E27FC236}">
+                <a16:creationId xmlns:a16="http://schemas.microsoft.com/office/drawing/2014/main" id="{802C9A30-9CD1-4907-B5B7-2F6BE57885E8}"/>
+              </a:ext>
+            </a:extLst>
+          </p:cNvPr>
+          <p:cNvSpPr>
+            <a:spLocks xmlns:a="http://schemas.openxmlformats.org/drawingml/2006/main" noGrp="1"/>
+          </p:cNvSpPr>
+          <p:nvPr/>
+        </p:nvSpPr>
+        <p:spPr>
+          <a:xfrm xmlns:a="http://schemas.openxmlformats.org/drawingml/2006/main">
+            <a:off x="952500" y="2000250"/>
+            <a:ext cx="2190750" cy="400050"/>
+          </a:xfrm>
+          <a:prstGeom xmlns:a="http://schemas.openxmlformats.org/drawingml/2006/main" prst="rect">
+            <a:avLst/>
+          </a:prstGeom>
+          <a:noFill xmlns:a="http://schemas.openxmlformats.org/drawingml/2006/main"/>
+          <a:ln xmlns:a="http://schemas.openxmlformats.org/drawingml/2006/main" w="0">
+            <a:noFill/>
+            <a:prstDash val="solid"/>
+          </a:ln>
+        </p:spPr>
+        <p:txBody>
+          <a:bodyPr xmlns:a="http://schemas.openxmlformats.org/drawingml/2006/main" anchor="t"/>
+          <a:lstStyle xmlns:a="http://schemas.openxmlformats.org/drawingml/2006/main"/>
+          <a:p xmlns:a="http://schemas.openxmlformats.org/drawingml/2006/main">
+            <a:pPr algn="l">
+              <a:buNone/>
+              <a:defRPr sz="2025" b="1">
+                <a:solidFill>
+                  <a:srgbClr val="2E7D5B"/>
+                </a:solidFill>
+                <a:latin typeface="Arial"/>
+                <a:ea typeface="Arial"/>
+                <a:cs typeface="Arial"/>
+              </a:defRPr>
+            </a:pPr>
+            <a:r>
+              <a:rPr sz="2025" b="1">
+                <a:solidFill>
+                  <a:srgbClr val="2E7D5B"/>
+                </a:solidFill>
+                <a:latin typeface="Arial"/>
+                <a:ea typeface="Arial"/>
+                <a:cs typeface="Arial"/>
+              </a:rPr>
+              <a:t>Established</a:t>
+            </a:r>
+          </a:p>
+        </p:txBody>
+      </p:sp>
+      <p:sp>
+        <p:nvSpPr>
+          <p:cNvPr id="7" name="">
+            <a:extLst xmlns:a="http://schemas.openxmlformats.org/drawingml/2006/main">
+              <a:ext uri="{FF2B5EF4-FFF2-40B4-BE49-F238E27FC236}">
+                <a16:creationId xmlns:a16="http://schemas.microsoft.com/office/drawing/2014/main" id="{4C0B6826-C1CD-407B-B1BD-7E0FDA1C4296}"/>
+              </a:ext>
+            </a:extLst>
+          </p:cNvPr>
+          <p:cNvSpPr>
+            <a:spLocks xmlns:a="http://schemas.openxmlformats.org/drawingml/2006/main" noGrp="1"/>
+          </p:cNvSpPr>
+          <p:nvPr/>
+        </p:nvSpPr>
+        <p:spPr>
+          <a:xfrm xmlns:a="http://schemas.openxmlformats.org/drawingml/2006/main">
+            <a:off x="3276600" y="1943100"/>
+            <a:ext cx="7772400" cy="647700"/>
+          </a:xfrm>
+          <a:prstGeom xmlns:a="http://schemas.openxmlformats.org/drawingml/2006/main" prst="rect">
+            <a:avLst/>
+          </a:prstGeom>
+          <a:noFill xmlns:a="http://schemas.openxmlformats.org/drawingml/2006/main"/>
+          <a:ln xmlns:a="http://schemas.openxmlformats.org/drawingml/2006/main" w="0">
+            <a:noFill/>
+            <a:prstDash val="solid"/>
+          </a:ln>
+        </p:spPr>
+        <p:txBody>
+          <a:bodyPr xmlns:a="http://schemas.openxmlformats.org/drawingml/2006/main" anchor="t"/>
+          <a:lstStyle xmlns:a="http://schemas.openxmlformats.org/drawingml/2006/main"/>
+          <a:p xmlns:a="http://schemas.openxmlformats.org/drawingml/2006/main">
+            <a:pPr algn="l">
+              <a:buNone/>
+              <a:defRPr sz="1725" b="0">
+                <a:solidFill>
+                  <a:srgbClr val="101820"/>
+                </a:solidFill>
+                <a:latin typeface="Arial"/>
+                <a:ea typeface="Arial"/>
+                <a:cs typeface="Arial"/>
+              </a:defRPr>
+            </a:pPr>
+            <a:r>
+              <a:rPr sz="1725" b="0">
+                <a:solidFill>
+                  <a:srgbClr val="101820"/>
+                </a:solidFill>
+                <a:latin typeface="Arial"/>
+                <a:ea typeface="Arial"/>
+                <a:cs typeface="Arial"/>
+              </a:rPr>
+              <a:t>Relative-only beat equal-weight 88 by 0.90 CAGR points in the frozen 29-of-88 POC.</a:t>
+            </a:r>
+          </a:p>
+        </p:txBody>
+      </p:sp>
+      <p:sp>
+        <p:nvSpPr>
+          <p:cNvPr id="8" name="">
+            <a:extLst xmlns:a="http://schemas.openxmlformats.org/drawingml/2006/main">
+              <a:ext uri="{FF2B5EF4-FFF2-40B4-BE49-F238E27FC236}">
+                <a16:creationId xmlns:a16="http://schemas.microsoft.com/office/drawing/2014/main" id="{3AFAF26A-2C8D-481A-8C17-B8A9A3967177}"/>
+              </a:ext>
+            </a:extLst>
+          </p:cNvPr>
+          <p:cNvSpPr>
+            <a:spLocks xmlns:a="http://schemas.openxmlformats.org/drawingml/2006/main" noGrp="1"/>
+          </p:cNvSpPr>
+          <p:nvPr/>
+        </p:nvSpPr>
+        <p:spPr>
+          <a:xfrm xmlns:a="http://schemas.openxmlformats.org/drawingml/2006/main">
+            <a:off x="666750" y="3048000"/>
+            <a:ext cx="10858500" cy="1028700"/>
+          </a:xfrm>
+          <a:prstGeom xmlns:a="http://schemas.openxmlformats.org/drawingml/2006/main" prst="rect">
+            <a:avLst/>
+          </a:prstGeom>
+          <a:solidFill xmlns:a="http://schemas.openxmlformats.org/drawingml/2006/main">
+            <a:srgbClr val="F7E7E2"/>
+          </a:solidFill>
+          <a:ln xmlns:a="http://schemas.openxmlformats.org/drawingml/2006/main" w="9525">
+            <a:solidFill>
+              <a:srgbClr val="C8553D"/>
+            </a:solidFill>
+            <a:prstDash val="solid"/>
+          </a:ln>
+        </p:spPr>
+      </p:sp>
+      <p:sp>
+        <p:nvSpPr>
+          <p:cNvPr id="9" name="">
+            <a:extLst xmlns:a="http://schemas.openxmlformats.org/drawingml/2006/main">
+              <a:ext uri="{FF2B5EF4-FFF2-40B4-BE49-F238E27FC236}">
+                <a16:creationId xmlns:a16="http://schemas.microsoft.com/office/drawing/2014/main" id="{DDE8FBE1-8020-4B7A-932E-FC73716C919B}"/>
+              </a:ext>
+            </a:extLst>
+          </p:cNvPr>
+          <p:cNvSpPr>
+            <a:spLocks xmlns:a="http://schemas.openxmlformats.org/drawingml/2006/main" noGrp="1"/>
+          </p:cNvSpPr>
+          <p:nvPr/>
+        </p:nvSpPr>
+        <p:spPr>
+          <a:xfrm xmlns:a="http://schemas.openxmlformats.org/drawingml/2006/main">
+            <a:off x="952500" y="3295650"/>
+            <a:ext cx="2190750" cy="400050"/>
+          </a:xfrm>
+          <a:prstGeom xmlns:a="http://schemas.openxmlformats.org/drawingml/2006/main" prst="rect">
+            <a:avLst/>
+          </a:prstGeom>
+          <a:noFill xmlns:a="http://schemas.openxmlformats.org/drawingml/2006/main"/>
+          <a:ln xmlns:a="http://schemas.openxmlformats.org/drawingml/2006/main" w="0">
+            <a:noFill/>
+            <a:prstDash val="solid"/>
+          </a:ln>
+        </p:spPr>
+        <p:txBody>
+          <a:bodyPr xmlns:a="http://schemas.openxmlformats.org/drawingml/2006/main" anchor="t"/>
+          <a:lstStyle xmlns:a="http://schemas.openxmlformats.org/drawingml/2006/main"/>
+          <a:p xmlns:a="http://schemas.openxmlformats.org/drawingml/2006/main">
+            <a:pPr algn="l">
+              <a:buNone/>
+              <a:defRPr sz="2025" b="1">
+                <a:solidFill>
+                  <a:srgbClr val="C8553D"/>
+                </a:solidFill>
+                <a:latin typeface="Arial"/>
+                <a:ea typeface="Arial"/>
+                <a:cs typeface="Arial"/>
+              </a:defRPr>
+            </a:pPr>
+            <a:r>
+              <a:rPr sz="2025" b="1">
+                <a:solidFill>
+                  <a:srgbClr val="C8553D"/>
+                </a:solidFill>
+                <a:latin typeface="Arial"/>
+                <a:ea typeface="Arial"/>
+                <a:cs typeface="Arial"/>
+              </a:rPr>
+              <a:t>Not established</a:t>
+            </a:r>
+          </a:p>
+        </p:txBody>
+      </p:sp>
+      <p:sp>
+        <p:nvSpPr>
+          <p:cNvPr id="10" name="">
+            <a:extLst xmlns:a="http://schemas.openxmlformats.org/drawingml/2006/main">
+              <a:ext uri="{FF2B5EF4-FFF2-40B4-BE49-F238E27FC236}">
+                <a16:creationId xmlns:a16="http://schemas.microsoft.com/office/drawing/2014/main" id="{E6DA919C-47F4-4345-87E2-1F6DF9D0EC90}"/>
+              </a:ext>
+            </a:extLst>
+          </p:cNvPr>
+          <p:cNvSpPr>
+            <a:spLocks xmlns:a="http://schemas.openxmlformats.org/drawingml/2006/main" noGrp="1"/>
+          </p:cNvSpPr>
+          <p:nvPr/>
+        </p:nvSpPr>
+        <p:spPr>
+          <a:xfrm xmlns:a="http://schemas.openxmlformats.org/drawingml/2006/main">
+            <a:off x="3276600" y="3238500"/>
+            <a:ext cx="7772400" cy="647700"/>
+          </a:xfrm>
+          <a:prstGeom xmlns:a="http://schemas.openxmlformats.org/drawingml/2006/main" prst="rect">
+            <a:avLst/>
+          </a:prstGeom>
+          <a:noFill xmlns:a="http://schemas.openxmlformats.org/drawingml/2006/main"/>
+          <a:ln xmlns:a="http://schemas.openxmlformats.org/drawingml/2006/main" w="0">
+            <a:noFill/>
+            <a:prstDash val="solid"/>
+          </a:ln>
+        </p:spPr>
+        <p:txBody>
+          <a:bodyPr xmlns:a="http://schemas.openxmlformats.org/drawingml/2006/main" anchor="t"/>
+          <a:lstStyle xmlns:a="http://schemas.openxmlformats.org/drawingml/2006/main"/>
+          <a:p xmlns:a="http://schemas.openxmlformats.org/drawingml/2006/main">
+            <a:pPr algn="l">
+              <a:buNone/>
+              <a:defRPr sz="1725" b="0">
+                <a:solidFill>
+                  <a:srgbClr val="101820"/>
+                </a:solidFill>
+                <a:latin typeface="Arial"/>
+                <a:ea typeface="Arial"/>
+                <a:cs typeface="Arial"/>
+              </a:defRPr>
+            </a:pPr>
+            <a:r>
+              <a:rPr sz="1725" b="0">
+                <a:solidFill>
+                  <a:srgbClr val="101820"/>
+                </a:solidFill>
+                <a:latin typeface="Arial"/>
+                <a:ea typeface="Arial"/>
+                <a:cs typeface="Arial"/>
+              </a:rPr>
+              <a:t>Static survivor-biased membership, no inference or robustness, and the full source rule did not beat equal weight.</a:t>
+            </a:r>
+          </a:p>
+        </p:txBody>
+      </p:sp>
+      <p:sp>
+        <p:nvSpPr>
+          <p:cNvPr id="11" name="">
+            <a:extLst xmlns:a="http://schemas.openxmlformats.org/drawingml/2006/main">
+              <a:ext uri="{FF2B5EF4-FFF2-40B4-BE49-F238E27FC236}">
+                <a16:creationId xmlns:a16="http://schemas.microsoft.com/office/drawing/2014/main" id="{0879E259-AD91-4B41-8E67-E5334F74BAB8}"/>
+              </a:ext>
+            </a:extLst>
+          </p:cNvPr>
+          <p:cNvSpPr>
+            <a:spLocks xmlns:a="http://schemas.openxmlformats.org/drawingml/2006/main" noGrp="1"/>
+          </p:cNvSpPr>
+          <p:nvPr/>
+        </p:nvSpPr>
+        <p:spPr>
+          <a:xfrm xmlns:a="http://schemas.openxmlformats.org/drawingml/2006/main">
+            <a:off x="666750" y="4343400"/>
+            <a:ext cx="10858500" cy="1028700"/>
+          </a:xfrm>
+          <a:prstGeom xmlns:a="http://schemas.openxmlformats.org/drawingml/2006/main" prst="rect">
+            <a:avLst/>
+          </a:prstGeom>
+          <a:solidFill xmlns:a="http://schemas.openxmlformats.org/drawingml/2006/main">
+            <a:srgbClr val="EDEDED"/>
+          </a:solidFill>
+          <a:ln xmlns:a="http://schemas.openxmlformats.org/drawingml/2006/main" w="9525">
+            <a:solidFill>
+              <a:srgbClr val="52616B"/>
+            </a:solidFill>
+            <a:prstDash val="solid"/>
+          </a:ln>
+        </p:spPr>
+      </p:sp>
+      <p:sp>
+        <p:nvSpPr>
+          <p:cNvPr id="12" name="">
+            <a:extLst xmlns:a="http://schemas.openxmlformats.org/drawingml/2006/main">
+              <a:ext uri="{FF2B5EF4-FFF2-40B4-BE49-F238E27FC236}">
+                <a16:creationId xmlns:a16="http://schemas.microsoft.com/office/drawing/2014/main" id="{FE0E70E3-6874-4441-9FD1-1060221212D9}"/>
+              </a:ext>
+            </a:extLst>
+          </p:cNvPr>
+          <p:cNvSpPr>
+            <a:spLocks xmlns:a="http://schemas.openxmlformats.org/drawingml/2006/main" noGrp="1"/>
+          </p:cNvSpPr>
+          <p:nvPr/>
+        </p:nvSpPr>
+        <p:spPr>
+          <a:xfrm xmlns:a="http://schemas.openxmlformats.org/drawingml/2006/main">
+            <a:off x="952500" y="4591050"/>
+            <a:ext cx="2190750" cy="400050"/>
+          </a:xfrm>
+          <a:prstGeom xmlns:a="http://schemas.openxmlformats.org/drawingml/2006/main" prst="rect">
+            <a:avLst/>
+          </a:prstGeom>
+          <a:noFill xmlns:a="http://schemas.openxmlformats.org/drawingml/2006/main"/>
+          <a:ln xmlns:a="http://schemas.openxmlformats.org/drawingml/2006/main" w="0">
+            <a:noFill/>
+            <a:prstDash val="solid"/>
+          </a:ln>
+        </p:spPr>
+        <p:txBody>
+          <a:bodyPr xmlns:a="http://schemas.openxmlformats.org/drawingml/2006/main" anchor="t"/>
+          <a:lstStyle xmlns:a="http://schemas.openxmlformats.org/drawingml/2006/main"/>
+          <a:p xmlns:a="http://schemas.openxmlformats.org/drawingml/2006/main">
+            <a:pPr algn="l">
+              <a:buNone/>
+              <a:defRPr sz="2025" b="1">
+                <a:solidFill>
+                  <a:srgbClr val="52616B"/>
+                </a:solidFill>
+                <a:latin typeface="Arial"/>
+                <a:ea typeface="Arial"/>
+                <a:cs typeface="Arial"/>
+              </a:defRPr>
+            </a:pPr>
+            <a:r>
+              <a:rPr sz="2025" b="1">
+                <a:solidFill>
+                  <a:srgbClr val="52616B"/>
+                </a:solidFill>
+                <a:latin typeface="Arial"/>
+                <a:ea typeface="Arial"/>
+                <a:cs typeface="Arial"/>
+              </a:rPr>
+              <a:t>Next question</a:t>
+            </a:r>
+          </a:p>
+        </p:txBody>
+      </p:sp>
+      <p:sp>
+        <p:nvSpPr>
+          <p:cNvPr id="13" name="">
+            <a:extLst xmlns:a="http://schemas.openxmlformats.org/drawingml/2006/main">
+              <a:ext uri="{FF2B5EF4-FFF2-40B4-BE49-F238E27FC236}">
+                <a16:creationId xmlns:a16="http://schemas.microsoft.com/office/drawing/2014/main" id="{7D88D2F7-BBA9-4B06-83BF-EF6C40360B55}"/>
+              </a:ext>
+            </a:extLst>
+          </p:cNvPr>
+          <p:cNvSpPr>
+            <a:spLocks xmlns:a="http://schemas.openxmlformats.org/drawingml/2006/main" noGrp="1"/>
+          </p:cNvSpPr>
+          <p:nvPr/>
+        </p:nvSpPr>
+        <p:spPr>
+          <a:xfrm xmlns:a="http://schemas.openxmlformats.org/drawingml/2006/main">
+            <a:off x="3276600" y="4533900"/>
+            <a:ext cx="7772400" cy="647700"/>
+          </a:xfrm>
+          <a:prstGeom xmlns:a="http://schemas.openxmlformats.org/drawingml/2006/main" prst="rect">
+            <a:avLst/>
+          </a:prstGeom>
+          <a:noFill xmlns:a="http://schemas.openxmlformats.org/drawingml/2006/main"/>
+          <a:ln xmlns:a="http://schemas.openxmlformats.org/drawingml/2006/main" w="0">
+            <a:noFill/>
+            <a:prstDash val="solid"/>
+          </a:ln>
+        </p:spPr>
+        <p:txBody>
+          <a:bodyPr xmlns:a="http://schemas.openxmlformats.org/drawingml/2006/main" anchor="t"/>
+          <a:lstStyle xmlns:a="http://schemas.openxmlformats.org/drawingml/2006/main"/>
+          <a:p xmlns:a="http://schemas.openxmlformats.org/drawingml/2006/main">
+            <a:pPr algn="l">
+              <a:buNone/>
+              <a:defRPr sz="1725" b="0">
+                <a:solidFill>
+                  <a:srgbClr val="101820"/>
+                </a:solidFill>
+                <a:latin typeface="Arial"/>
+                <a:ea typeface="Arial"/>
+                <a:cs typeface="Arial"/>
+              </a:defRPr>
+            </a:pPr>
+            <a:r>
+              <a:rPr sz="1725" b="0">
+                <a:solidFill>
+                  <a:srgbClr val="101820"/>
+                </a:solidFill>
+                <a:latin typeface="Arial"/>
+                <a:ea typeface="Arial"/>
+                <a:cs typeface="Arial"/>
+              </a:rPr>
+              <a:t>Repair universe bias with point-in-time membership before tuning horizons, breadth, or gates.</a:t>
+            </a:r>
+          </a:p>
+        </p:txBody>
+      </p:sp>
+      <p:sp>
+        <p:nvSpPr>
+          <p:cNvPr id="14" name="">
+            <a:extLst xmlns:a="http://schemas.openxmlformats.org/drawingml/2006/main">
+              <a:ext uri="{FF2B5EF4-FFF2-40B4-BE49-F238E27FC236}">
+                <a16:creationId xmlns:a16="http://schemas.microsoft.com/office/drawing/2014/main" id="{F7E3D076-54D1-4B3D-8F4A-D11630B25FFC}"/>
+              </a:ext>
+            </a:extLst>
+          </p:cNvPr>
+          <p:cNvSpPr>
+            <a:spLocks xmlns:a="http://schemas.openxmlformats.org/drawingml/2006/main" noGrp="1"/>
+          </p:cNvSpPr>
+          <p:nvPr/>
+        </p:nvSpPr>
+        <p:spPr>
+          <a:xfrm xmlns:a="http://schemas.openxmlformats.org/drawingml/2006/main">
+            <a:off x="2114550" y="5753100"/>
+            <a:ext cx="7962900" cy="495300"/>
+          </a:xfrm>
+          <a:prstGeom xmlns:a="http://schemas.openxmlformats.org/drawingml/2006/main" prst="rect">
+            <a:avLst/>
+          </a:prstGeom>
+          <a:solidFill xmlns:a="http://schemas.openxmlformats.org/drawingml/2006/main">
+            <a:srgbClr val="EAF5FB"/>
+          </a:solidFill>
+          <a:ln xmlns:a="http://schemas.openxmlformats.org/drawingml/2006/main" w="9525">
+            <a:solidFill>
+              <a:srgbClr val="6DCBF4"/>
+            </a:solidFill>
+            <a:prstDash val="solid"/>
+          </a:ln>
+        </p:spPr>
+      </p:sp>
+      <p:sp>
+        <p:nvSpPr>
+          <p:cNvPr id="15" name="">
+            <a:extLst xmlns:a="http://schemas.openxmlformats.org/drawingml/2006/main">
+              <a:ext uri="{FF2B5EF4-FFF2-40B4-BE49-F238E27FC236}">
+                <a16:creationId xmlns:a16="http://schemas.microsoft.com/office/drawing/2014/main" id="{FF7807EE-5E9A-4AC4-A3F2-FA1CED7A80A8}"/>
+              </a:ext>
+            </a:extLst>
+          </p:cNvPr>
+          <p:cNvSpPr>
+            <a:spLocks xmlns:a="http://schemas.openxmlformats.org/drawingml/2006/main" noGrp="1"/>
+          </p:cNvSpPr>
+          <p:nvPr/>
+        </p:nvSpPr>
+        <p:spPr>
+          <a:xfrm xmlns:a="http://schemas.openxmlformats.org/drawingml/2006/main">
+            <a:off x="2343150" y="5753100"/>
+            <a:ext cx="7505700" cy="457200"/>
+          </a:xfrm>
+          <a:prstGeom xmlns:a="http://schemas.openxmlformats.org/drawingml/2006/main" prst="rect">
+            <a:avLst/>
+          </a:prstGeom>
+          <a:noFill xmlns:a="http://schemas.openxmlformats.org/drawingml/2006/main"/>
+          <a:ln xmlns:a="http://schemas.openxmlformats.org/drawingml/2006/main" w="0">
+            <a:noFill/>
+            <a:prstDash val="solid"/>
+          </a:ln>
+        </p:spPr>
+        <p:txBody>
+          <a:bodyPr xmlns:a="http://schemas.openxmlformats.org/drawingml/2006/main" anchor="t"/>
+          <a:lstStyle xmlns:a="http://schemas.openxmlformats.org/drawingml/2006/main"/>
+          <a:p xmlns:a="http://schemas.openxmlformats.org/drawingml/2006/main">
+            <a:pPr algn="ctr">
+              <a:buNone/>
+              <a:defRPr sz="1350" b="1">
+                <a:solidFill>
+                  <a:srgbClr val="3D8DFF"/>
+                </a:solidFill>
+                <a:latin typeface="Arial"/>
+                <a:ea typeface="Arial"/>
+                <a:cs typeface="Arial"/>
+              </a:defRPr>
+            </a:pPr>
+            <a:r>
+              <a:rPr sz="1350" b="1">
+                <a:solidFill>
+                  <a:srgbClr val="3D8DFF"/>
+                </a:solidFill>
+                <a:latin typeface="Arial"/>
+                <a:ea typeface="Arial"/>
+                <a:cs typeface="Arial"/>
+              </a:rPr>
+              <a:t>Preserve the clue; do not promote or optimize it yet.</a:t>
             </a:r>
           </a:p>
         </p:txBody>

--- a/literature_studies/presentations/gen5_lit_mom_03_1_dual_momentum_study.pptx
+++ b/literature_studies/presentations/gen5_lit_mom_03_1_dual_momentum_study.pptx
@@ -2,48 +2,55 @@
 <file path=ppt/presentation.xml><?xml version="1.0" encoding="utf-8"?>
 <p:presentation xmlns:p="http://schemas.openxmlformats.org/presentationml/2006/main">
   <p:sldMasterIdLst>
-    <p:sldMasterId xmlns:r="http://schemas.openxmlformats.org/officeDocument/2006/relationships" id="2147483648" r:id="R452aca07d3bd4ada"/>
+    <p:sldMasterId xmlns:r="http://schemas.openxmlformats.org/officeDocument/2006/relationships" id="2147483648" r:id="R41ca7235177e4dbf"/>
   </p:sldMasterIdLst>
   <p:notesMasterIdLst>
-    <p:notesMasterId xmlns:r="http://schemas.openxmlformats.org/officeDocument/2006/relationships" r:id="R5398887062e34f81"/>
+    <p:notesMasterId xmlns:r="http://schemas.openxmlformats.org/officeDocument/2006/relationships" r:id="Rc3f7dae3fda6427b"/>
   </p:notesMasterIdLst>
   <p:sldIdLst>
-    <p:sldId xmlns:r="http://schemas.openxmlformats.org/officeDocument/2006/relationships" id="256" r:id="R34744291ae0c4ca5"/>
-    <p:sldId xmlns:r="http://schemas.openxmlformats.org/officeDocument/2006/relationships" id="257" r:id="Rd0c17c56c4454b68"/>
-    <p:sldId xmlns:r="http://schemas.openxmlformats.org/officeDocument/2006/relationships" id="258" r:id="R59fb01be733d4a01"/>
-    <p:sldId xmlns:r="http://schemas.openxmlformats.org/officeDocument/2006/relationships" id="259" r:id="Rd27a63f694524110"/>
-    <p:sldId xmlns:r="http://schemas.openxmlformats.org/officeDocument/2006/relationships" id="260" r:id="R5c31461b9fb3437a"/>
-    <p:sldId xmlns:r="http://schemas.openxmlformats.org/officeDocument/2006/relationships" id="261" r:id="Ra0d3e3cadcae4a20"/>
-    <p:sldId xmlns:r="http://schemas.openxmlformats.org/officeDocument/2006/relationships" id="262" r:id="R18feca65b22546cd"/>
-    <p:sldId xmlns:r="http://schemas.openxmlformats.org/officeDocument/2006/relationships" id="263" r:id="Rbb8f2409a0764b54"/>
-    <p:sldId xmlns:r="http://schemas.openxmlformats.org/officeDocument/2006/relationships" id="264" r:id="R5ef8e54a009c4958"/>
-    <p:sldId xmlns:r="http://schemas.openxmlformats.org/officeDocument/2006/relationships" id="265" r:id="Rd68f6f5e5d5b4b96"/>
-    <p:sldId xmlns:r="http://schemas.openxmlformats.org/officeDocument/2006/relationships" id="266" r:id="R66227e80039a4d12"/>
-    <p:sldId xmlns:r="http://schemas.openxmlformats.org/officeDocument/2006/relationships" id="267" r:id="R9915446f4dae4dfa"/>
-    <p:sldId xmlns:r="http://schemas.openxmlformats.org/officeDocument/2006/relationships" id="268" r:id="R27596bde4d3d4855"/>
-    <p:sldId xmlns:r="http://schemas.openxmlformats.org/officeDocument/2006/relationships" id="269" r:id="R7e63df874f234de4"/>
-    <p:sldId xmlns:r="http://schemas.openxmlformats.org/officeDocument/2006/relationships" id="270" r:id="Rdb51deb2678b4270"/>
-    <p:sldId xmlns:r="http://schemas.openxmlformats.org/officeDocument/2006/relationships" id="271" r:id="R40123121d6804d5b"/>
-    <p:sldId xmlns:r="http://schemas.openxmlformats.org/officeDocument/2006/relationships" id="272" r:id="R2be7ba6de8624284"/>
-    <p:sldId xmlns:r="http://schemas.openxmlformats.org/officeDocument/2006/relationships" id="273" r:id="R956277b4457244eb"/>
-    <p:sldId xmlns:r="http://schemas.openxmlformats.org/officeDocument/2006/relationships" id="274" r:id="Ra8c52c0e979a4d1b"/>
-    <p:sldId xmlns:r="http://schemas.openxmlformats.org/officeDocument/2006/relationships" id="275" r:id="R5bba197afb474c0b"/>
-    <p:sldId xmlns:r="http://schemas.openxmlformats.org/officeDocument/2006/relationships" id="276" r:id="R1e8b41d4f5df4b11"/>
-    <p:sldId xmlns:r="http://schemas.openxmlformats.org/officeDocument/2006/relationships" id="277" r:id="R3a5e1e98a46944cb"/>
-    <p:sldId xmlns:r="http://schemas.openxmlformats.org/officeDocument/2006/relationships" id="278" r:id="Refe9f88e7a674cda"/>
-    <p:sldId xmlns:r="http://schemas.openxmlformats.org/officeDocument/2006/relationships" id="279" r:id="Rd55825d4b71e4bed"/>
-    <p:sldId xmlns:r="http://schemas.openxmlformats.org/officeDocument/2006/relationships" id="280" r:id="R0383d1ecd3d248f5"/>
-    <p:sldId xmlns:r="http://schemas.openxmlformats.org/officeDocument/2006/relationships" id="281" r:id="Rdbad2402349f4c67"/>
-    <p:sldId xmlns:r="http://schemas.openxmlformats.org/officeDocument/2006/relationships" id="282" r:id="R16145194aca64807"/>
-    <p:sldId xmlns:r="http://schemas.openxmlformats.org/officeDocument/2006/relationships" id="283" r:id="R9221937ee04c4652"/>
-    <p:sldId xmlns:r="http://schemas.openxmlformats.org/officeDocument/2006/relationships" id="284" r:id="R8a5238db087f4a92"/>
-    <p:sldId xmlns:r="http://schemas.openxmlformats.org/officeDocument/2006/relationships" id="285" r:id="Rf71e4010f28d44ec"/>
-    <p:sldId xmlns:r="http://schemas.openxmlformats.org/officeDocument/2006/relationships" id="286" r:id="R72ccad4d2d6c4b87"/>
-    <p:sldId xmlns:r="http://schemas.openxmlformats.org/officeDocument/2006/relationships" id="287" r:id="Rfff5e6a928274002"/>
-    <p:sldId xmlns:r="http://schemas.openxmlformats.org/officeDocument/2006/relationships" id="288" r:id="Rab7bc5cc01d24027"/>
-    <p:sldId xmlns:r="http://schemas.openxmlformats.org/officeDocument/2006/relationships" id="289" r:id="Raeb83d4b13ea44cf"/>
-    <p:sldId xmlns:r="http://schemas.openxmlformats.org/officeDocument/2006/relationships" id="290" r:id="R8783f5640bff45e0"/>
-    <p:sldId xmlns:r="http://schemas.openxmlformats.org/officeDocument/2006/relationships" id="291" r:id="R7646cf8fa22d4ee7"/>
+    <p:sldId xmlns:r="http://schemas.openxmlformats.org/officeDocument/2006/relationships" id="256" r:id="Rfc2921734e754284"/>
+    <p:sldId xmlns:r="http://schemas.openxmlformats.org/officeDocument/2006/relationships" id="257" r:id="R4a0786dfbaca49e5"/>
+    <p:sldId xmlns:r="http://schemas.openxmlformats.org/officeDocument/2006/relationships" id="258" r:id="R41b8085fa0a94ca1"/>
+    <p:sldId xmlns:r="http://schemas.openxmlformats.org/officeDocument/2006/relationships" id="259" r:id="R178cba16dd9744b4"/>
+    <p:sldId xmlns:r="http://schemas.openxmlformats.org/officeDocument/2006/relationships" id="260" r:id="R3dc2fbdbda9a48a0"/>
+    <p:sldId xmlns:r="http://schemas.openxmlformats.org/officeDocument/2006/relationships" id="261" r:id="R63e3eec23c8d416d"/>
+    <p:sldId xmlns:r="http://schemas.openxmlformats.org/officeDocument/2006/relationships" id="262" r:id="Rc8f9f502008c43c7"/>
+    <p:sldId xmlns:r="http://schemas.openxmlformats.org/officeDocument/2006/relationships" id="263" r:id="R96615fced4e84653"/>
+    <p:sldId xmlns:r="http://schemas.openxmlformats.org/officeDocument/2006/relationships" id="264" r:id="R9fc121023204413d"/>
+    <p:sldId xmlns:r="http://schemas.openxmlformats.org/officeDocument/2006/relationships" id="265" r:id="R8486f6aa0ea741cf"/>
+    <p:sldId xmlns:r="http://schemas.openxmlformats.org/officeDocument/2006/relationships" id="266" r:id="Rb6d52ab7526c4a87"/>
+    <p:sldId xmlns:r="http://schemas.openxmlformats.org/officeDocument/2006/relationships" id="267" r:id="R0b28552be9e14558"/>
+    <p:sldId xmlns:r="http://schemas.openxmlformats.org/officeDocument/2006/relationships" id="268" r:id="Rff2a08f596094c80"/>
+    <p:sldId xmlns:r="http://schemas.openxmlformats.org/officeDocument/2006/relationships" id="269" r:id="Rb97e194024364061"/>
+    <p:sldId xmlns:r="http://schemas.openxmlformats.org/officeDocument/2006/relationships" id="270" r:id="R935af9bd6ad64dbe"/>
+    <p:sldId xmlns:r="http://schemas.openxmlformats.org/officeDocument/2006/relationships" id="271" r:id="Reb4f47c018524354"/>
+    <p:sldId xmlns:r="http://schemas.openxmlformats.org/officeDocument/2006/relationships" id="272" r:id="Rcf1a297434764fa3"/>
+    <p:sldId xmlns:r="http://schemas.openxmlformats.org/officeDocument/2006/relationships" id="273" r:id="Rb2454e3742d540dd"/>
+    <p:sldId xmlns:r="http://schemas.openxmlformats.org/officeDocument/2006/relationships" id="274" r:id="R372ad848dae94b47"/>
+    <p:sldId xmlns:r="http://schemas.openxmlformats.org/officeDocument/2006/relationships" id="275" r:id="R06d8a65e44974695"/>
+    <p:sldId xmlns:r="http://schemas.openxmlformats.org/officeDocument/2006/relationships" id="276" r:id="Rc841336c9c874146"/>
+    <p:sldId xmlns:r="http://schemas.openxmlformats.org/officeDocument/2006/relationships" id="277" r:id="Rf25d9741c0ee4202"/>
+    <p:sldId xmlns:r="http://schemas.openxmlformats.org/officeDocument/2006/relationships" id="278" r:id="R56e5c71a3a144c3c"/>
+    <p:sldId xmlns:r="http://schemas.openxmlformats.org/officeDocument/2006/relationships" id="279" r:id="R5fdb1c8783294310"/>
+    <p:sldId xmlns:r="http://schemas.openxmlformats.org/officeDocument/2006/relationships" id="280" r:id="Rd59660b546914259"/>
+    <p:sldId xmlns:r="http://schemas.openxmlformats.org/officeDocument/2006/relationships" id="281" r:id="R4c6cc4bee8bc4c8b"/>
+    <p:sldId xmlns:r="http://schemas.openxmlformats.org/officeDocument/2006/relationships" id="282" r:id="R5fca1cb82c8145ed"/>
+    <p:sldId xmlns:r="http://schemas.openxmlformats.org/officeDocument/2006/relationships" id="283" r:id="R0b0ed2d822584612"/>
+    <p:sldId xmlns:r="http://schemas.openxmlformats.org/officeDocument/2006/relationships" id="284" r:id="Rd576916ee21c45ef"/>
+    <p:sldId xmlns:r="http://schemas.openxmlformats.org/officeDocument/2006/relationships" id="285" r:id="Rb3fe38e45da14311"/>
+    <p:sldId xmlns:r="http://schemas.openxmlformats.org/officeDocument/2006/relationships" id="286" r:id="R1996396270594807"/>
+    <p:sldId xmlns:r="http://schemas.openxmlformats.org/officeDocument/2006/relationships" id="287" r:id="Rf142cc0e42684c8e"/>
+    <p:sldId xmlns:r="http://schemas.openxmlformats.org/officeDocument/2006/relationships" id="288" r:id="R79e35de11d864949"/>
+    <p:sldId xmlns:r="http://schemas.openxmlformats.org/officeDocument/2006/relationships" id="289" r:id="R7683bdd030964750"/>
+    <p:sldId xmlns:r="http://schemas.openxmlformats.org/officeDocument/2006/relationships" id="290" r:id="R2b77d38e685742f9"/>
+    <p:sldId xmlns:r="http://schemas.openxmlformats.org/officeDocument/2006/relationships" id="291" r:id="Re63a44f4241842ab"/>
+    <p:sldId xmlns:r="http://schemas.openxmlformats.org/officeDocument/2006/relationships" id="292" r:id="R78f6a73bfab844db"/>
+    <p:sldId xmlns:r="http://schemas.openxmlformats.org/officeDocument/2006/relationships" id="293" r:id="R455168c688f1480d"/>
+    <p:sldId xmlns:r="http://schemas.openxmlformats.org/officeDocument/2006/relationships" id="294" r:id="R1e164d00177041fe"/>
+    <p:sldId xmlns:r="http://schemas.openxmlformats.org/officeDocument/2006/relationships" id="295" r:id="Refc9c655437e4a44"/>
+    <p:sldId xmlns:r="http://schemas.openxmlformats.org/officeDocument/2006/relationships" id="296" r:id="R777017749f5f449a"/>
+    <p:sldId xmlns:r="http://schemas.openxmlformats.org/officeDocument/2006/relationships" id="297" r:id="R8e695419ec4a46be"/>
+    <p:sldId xmlns:r="http://schemas.openxmlformats.org/officeDocument/2006/relationships" id="298" r:id="R45a753b33af447b7"/>
   </p:sldIdLst>
   <p:sldSz cx="12192000" cy="6858000"/>
   <p:notesSz cx="6858000" cy="9144000"/>
@@ -477,7 +484,7 @@
           <a:lstStyle xmlns:a="http://schemas.openxmlformats.org/drawingml/2006/main"/>
           <a:p xmlns:a="http://schemas.openxmlformats.org/drawingml/2006/main">
             <a:r>
-              <a:t>This deck now records the literature hypothesis, mechanics proof, nine-ETF replay, universe-transport POCs, and the 88-stock cross-sector competition POC. The stock universe is static and survivor-biased; no inference, robustness, forward authority, or edge claim is granted.</a:t>
+              <a:t>This deck records the literature hypothesis, mechanics proof, ETF replay, universe-transport POCs, and the 481-stock ex-ante cohort replay. The latest replay passes its frozen admission gates but does not preserve a material ranking advantage; the exact stock implementation stops.</a:t>
             </a:r>
           </a:p>
           <a:p xmlns:a="http://schemas.openxmlformats.org/drawingml/2006/main">
@@ -497,22 +504,17 @@
           </a:p>
           <a:p xmlns:a="http://schemas.openxmlformats.org/drawingml/2006/main">
             <a:r>
-              <a:t>- https://quantpedia.com/active-dual-momentum-gtaa-strategy/</a:t>
-            </a:r>
-          </a:p>
-          <a:p xmlns:a="http://schemas.openxmlformats.org/drawingml/2006/main">
-            <a:r>
-              <a:t>- C:/Users/Franc/OneDrive/Documents/Francis/Peltata Project/Time-Series-Modeling-Gen5/literature_studies/docs/GEN5_LIT_MOM_03_3_BROAD_STOCK_FLEET_RESULTS.md</a:t>
-            </a:r>
-          </a:p>
-          <a:p xmlns:a="http://schemas.openxmlformats.org/drawingml/2006/main">
-            <a:r>
-              <a:t>- C:/Users/Franc/OneDrive/Documents/Francis/Peltata Project/Time-Series-Modeling-Gen5/runs/research_workbench/literature_grounded/lit_mom_03_3_broad_stock_fleet_20260903/mom033_report.md</a:t>
-            </a:r>
-          </a:p>
-          <a:p xmlns:a="http://schemas.openxmlformats.org/drawingml/2006/main">
-            <a:r>
-              <a:t>- Codex task conversation, 2026-09-03 (operator approval and broad-fleet interpretation)</a:t>
+              <a:t>- C:/Users/Franc/OneDrive/Documents/Francis/Peltata Project/Time-Series-Modeling-Gen5/literature_studies/docs/GEN5_LIT_MOM_03_4_DEFENSIBLE_UNIVERSE_RESULTS.md</a:t>
+            </a:r>
+          </a:p>
+          <a:p xmlns:a="http://schemas.openxmlformats.org/drawingml/2006/main">
+            <a:r>
+              <a:t>- C:/Users/Franc/OneDrive/Documents/Francis/Peltata Project/Time-Series-Modeling-Gen5/runs/research_workbench/literature_grounded/lit_mom_03_4_defensible_universe_20260903/mom034_report.md</a:t>
+            </a:r>
+          </a:p>
+          <a:p xmlns:a="http://schemas.openxmlformats.org/drawingml/2006/main">
+            <a:r>
+              <a:t>- Codex task conversation, 2026-09-03 (defensible-universe approval, result interpretation, and conventional-core huddle)</a:t>
             </a:r>
           </a:p>
           <a:p xmlns:a="http://schemas.openxmlformats.org/drawingml/2006/main">
@@ -3747,6 +3749,366 @@
 </p:notes>
 </file>
 
+<file path=ppt/notesSlides/notesSlide37.xml><?xml version="1.0" encoding="utf-8"?>
+<p:notes xmlns:p="http://schemas.openxmlformats.org/presentationml/2006/main">
+  <p:cSld>
+    <p:spTree>
+      <p:nvGrpSpPr>
+        <p:cNvPr id="1" name=""/>
+        <p:cNvGrpSpPr/>
+        <p:nvPr/>
+      </p:nvGrpSpPr>
+      <p:grpSpPr>
+        <a:xfrm xmlns:a="http://schemas.openxmlformats.org/drawingml/2006/main"/>
+      </p:grpSpPr>
+      <p:sp>
+        <p:nvSpPr>
+          <p:cNvPr id="2" name="Slide Image Placeholder 1"/>
+          <p:cNvSpPr>
+            <a:spLocks xmlns:a="http://schemas.openxmlformats.org/drawingml/2006/main" noGrp="1"/>
+          </p:cNvSpPr>
+          <p:nvPr>
+            <p:ph type="sldImg" idx="0"/>
+          </p:nvPr>
+        </p:nvSpPr>
+        <p:spPr/>
+      </p:sp>
+      <p:sp>
+        <p:nvSpPr>
+          <p:cNvPr id="3" name="Notes Placeholder 2"/>
+          <p:cNvSpPr>
+            <a:spLocks xmlns:a="http://schemas.openxmlformats.org/drawingml/2006/main" noGrp="1"/>
+          </p:cNvSpPr>
+          <p:nvPr>
+            <p:ph type="body" idx="1"/>
+          </p:nvPr>
+        </p:nvSpPr>
+        <p:spPr/>
+        <p:txBody>
+          <a:bodyPr xmlns:a="http://schemas.openxmlformats.org/drawingml/2006/main"/>
+          <a:lstStyle xmlns:a="http://schemas.openxmlformats.org/drawingml/2006/main"/>
+          <a:p xmlns:a="http://schemas.openxmlformats.org/drawingml/2006/main">
+            <a:r>
+              <a:t>The 481-stock cohort comes from a pre-evaluation Form N-PORT holdings snapshot and a previously frozen identity registry. Later acquisitions, renames, failures, and other disappearances remain in the evidence rather than being silently removed. This is a fixed deployment cohort, not a rolling historical S&amp;P 500 membership panel.</a:t>
+            </a:r>
+          </a:p>
+          <a:p xmlns:a="http://schemas.openxmlformats.org/drawingml/2006/main">
+            <a:r>
+              <a:t/>
+            </a:r>
+          </a:p>
+          <a:p xmlns:a="http://schemas.openxmlformats.org/drawingml/2006/main">
+            <a:r>
+              <a:t>[Sources]</a:t>
+            </a:r>
+          </a:p>
+          <a:p xmlns:a="http://schemas.openxmlformats.org/drawingml/2006/main">
+            <a:r>
+              <a:t>- C:/Users/Franc/OneDrive/Documents/Francis/Peltata Project/Time-Series-Modeling-Gen5/runs/research_workbench/operator_hypothesis_lab/hyp_mom_04_1_deployment_universe_train_20260811/hyp_mom_04_1_frozen_registry.csv</a:t>
+            </a:r>
+          </a:p>
+          <a:p xmlns:a="http://schemas.openxmlformats.org/drawingml/2006/main">
+            <a:r>
+              <a:t>- C:/Users/Franc/OneDrive/Documents/Francis/Peltata Project/Time-Series-Modeling-Gen5/operator_hypothesis_lab/docs/HYP_MOM_04_1_DEPLOYMENT_UNIVERSE_DATA_AUDIT_CONTRACT.md</a:t>
+            </a:r>
+          </a:p>
+          <a:p xmlns:a="http://schemas.openxmlformats.org/drawingml/2006/main">
+            <a:r>
+              <a:t>- C:/Users/Franc/OneDrive/Documents/Francis/Peltata Project/Time-Series-Modeling-Gen5/literature_studies/docs/GEN5_LIT_MOM_03_4_DEFENSIBLE_UNIVERSE_CONTRACT.md</a:t>
+            </a:r>
+          </a:p>
+          <a:p xmlns:a="http://schemas.openxmlformats.org/drawingml/2006/main">
+            <a:r>
+              <a:t>- C:/Users/Franc/OneDrive/Documents/Francis/Peltata Project/Time-Series-Modeling-Gen5/runs/research_workbench/literature_grounded/lit_mom_03_4_defensible_universe_20260903/mom034_report.md</a:t>
+            </a:r>
+          </a:p>
+          <a:p xmlns:a="http://schemas.openxmlformats.org/drawingml/2006/main">
+            <a:r>
+              <a:t>- C:/Users/Franc/OneDrive/Documents/Francis/Peltata Project/Time-Series-Modeling-Gen5/runs/research_workbench/literature_grounded/lit_mom_03_4_defensible_universe_20260903/mom034_terminal_events.csv</a:t>
+            </a:r>
+          </a:p>
+          <a:p xmlns:a="http://schemas.openxmlformats.org/drawingml/2006/main">
+            <a:r>
+              <a:t>- Codex task conversation, 2026-09-03 (defensible-universe approval, result interpretation, and conventional-core huddle)</a:t>
+            </a:r>
+          </a:p>
+          <a:p xmlns:a="http://schemas.openxmlformats.org/drawingml/2006/main">
+            <a:r>
+              <a:t>[/Sources]</a:t>
+            </a:r>
+          </a:p>
+        </p:txBody>
+      </p:sp>
+      <p:sp>
+        <p:nvSpPr>
+          <p:cNvPr id="4" name="Slide Number Placeholder 3"/>
+          <p:cNvSpPr>
+            <a:spLocks xmlns:a="http://schemas.openxmlformats.org/drawingml/2006/main" noGrp="1"/>
+          </p:cNvSpPr>
+          <p:nvPr>
+            <p:ph type="sldNum" idx="5"/>
+          </p:nvPr>
+        </p:nvSpPr>
+        <p:spPr/>
+        <p:txBody>
+          <a:bodyPr xmlns:a="http://schemas.openxmlformats.org/drawingml/2006/main"/>
+          <a:lstStyle xmlns:a="http://schemas.openxmlformats.org/drawingml/2006/main"/>
+          <a:p xmlns:a="http://schemas.openxmlformats.org/drawingml/2006/main"/>
+        </p:txBody>
+      </p:sp>
+    </p:spTree>
+  </p:cSld>
+  <p:clrMapOvr>
+    <a:masterClrMapping xmlns:a="http://schemas.openxmlformats.org/drawingml/2006/main"/>
+  </p:clrMapOvr>
+</p:notes>
+</file>
+
+<file path=ppt/notesSlides/notesSlide38.xml><?xml version="1.0" encoding="utf-8"?>
+<p:notes xmlns:p="http://schemas.openxmlformats.org/presentationml/2006/main">
+  <p:cSld>
+    <p:spTree>
+      <p:nvGrpSpPr>
+        <p:cNvPr id="1" name=""/>
+        <p:cNvGrpSpPr/>
+        <p:nvPr/>
+      </p:nvGrpSpPr>
+      <p:grpSpPr>
+        <a:xfrm xmlns:a="http://schemas.openxmlformats.org/drawingml/2006/main"/>
+      </p:grpSpPr>
+      <p:sp>
+        <p:nvSpPr>
+          <p:cNvPr id="2" name="Slide Image Placeholder 1"/>
+          <p:cNvSpPr>
+            <a:spLocks xmlns:a="http://schemas.openxmlformats.org/drawingml/2006/main" noGrp="1"/>
+          </p:cNvSpPr>
+          <p:nvPr>
+            <p:ph type="sldImg" idx="0"/>
+          </p:nvPr>
+        </p:nvSpPr>
+        <p:spPr/>
+      </p:sp>
+      <p:sp>
+        <p:nvSpPr>
+          <p:cNvPr id="3" name="Notes Placeholder 2"/>
+          <p:cNvSpPr>
+            <a:spLocks xmlns:a="http://schemas.openxmlformats.org/drawingml/2006/main" noGrp="1"/>
+          </p:cNvSpPr>
+          <p:nvPr>
+            <p:ph type="body" idx="1"/>
+          </p:nvPr>
+        </p:nvSpPr>
+        <p:spPr/>
+        <p:txBody>
+          <a:bodyPr xmlns:a="http://schemas.openxmlformats.org/drawingml/2006/main"/>
+          <a:lstStyle xmlns:a="http://schemas.openxmlformats.org/drawingml/2006/main"/>
+          <a:p xmlns:a="http://schemas.openxmlformats.org/drawingml/2006/main">
+            <a:r>
+              <a:t>The source mechanics remain fixed: two sleeves, 10- and 25-week rates of change, a positive-return permission gate, weekly Wednesday decisions, next-session-open execution, and five basis points one-way. One-third selection becomes a causal, dynamic floor of the scoreable cohort and opens at 160 of 481.</a:t>
+            </a:r>
+          </a:p>
+          <a:p xmlns:a="http://schemas.openxmlformats.org/drawingml/2006/main">
+            <a:r>
+              <a:t/>
+            </a:r>
+          </a:p>
+          <a:p xmlns:a="http://schemas.openxmlformats.org/drawingml/2006/main">
+            <a:r>
+              <a:t>[Sources]</a:t>
+            </a:r>
+          </a:p>
+          <a:p xmlns:a="http://schemas.openxmlformats.org/drawingml/2006/main">
+            <a:r>
+              <a:t>- C:/Users/Franc/OneDrive/Documents/Francis/Peltata Project/Time-Series-Modeling-Gen5/literature_studies/docs/GEN5_LIT_MOM_03_4_DEFENSIBLE_UNIVERSE_CONTRACT.md</a:t>
+            </a:r>
+          </a:p>
+          <a:p xmlns:a="http://schemas.openxmlformats.org/drawingml/2006/main">
+            <a:r>
+              <a:t>- C:/Users/Franc/OneDrive/Documents/Francis/Peltata Project/Time-Series-Modeling-Gen5/runs/research_workbench/literature_grounded/lit_mom_03_4_defensible_universe_20260903/mom034_report.md</a:t>
+            </a:r>
+          </a:p>
+          <a:p xmlns:a="http://schemas.openxmlformats.org/drawingml/2006/main">
+            <a:r>
+              <a:t>- C:/Users/Franc/OneDrive/Documents/Francis/Peltata Project/Time-Series-Modeling-Gen5/runs/research_workbench/literature_grounded/lit_mom_03_4_defensible_universe_20260903/mom034_admission_gates.csv</a:t>
+            </a:r>
+          </a:p>
+          <a:p xmlns:a="http://schemas.openxmlformats.org/drawingml/2006/main">
+            <a:r>
+              <a:t>- C:/Users/Franc/OneDrive/Documents/Francis/Peltata Project/Time-Series-Modeling-Gen5/runs/research_workbench/operator_hypothesis_lab/hyp_mom_04_1_deployment_universe_train_20260811/hyp_mom_04_1_frozen_registry.csv</a:t>
+            </a:r>
+          </a:p>
+          <a:p xmlns:a="http://schemas.openxmlformats.org/drawingml/2006/main">
+            <a:r>
+              <a:t>- C:/Users/Franc/OneDrive/Documents/Francis/Peltata Project/Time-Series-Modeling-Gen5/literature_studies/R/gen5_lit_mom_03_4_defensible_universe.R</a:t>
+            </a:r>
+          </a:p>
+          <a:p xmlns:a="http://schemas.openxmlformats.org/drawingml/2006/main">
+            <a:r>
+              <a:t>- C:/Users/Franc/OneDrive/Documents/Francis/Peltata Project/Time-Series-Modeling-Gen5/literature_studies/scripts/run_gen5_lit_mom_03_4_defensible_universe.R</a:t>
+            </a:r>
+          </a:p>
+          <a:p xmlns:a="http://schemas.openxmlformats.org/drawingml/2006/main">
+            <a:r>
+              <a:t>- Codex task conversation, 2026-09-03 (defensible-universe approval, result interpretation, and conventional-core huddle)</a:t>
+            </a:r>
+          </a:p>
+          <a:p xmlns:a="http://schemas.openxmlformats.org/drawingml/2006/main">
+            <a:r>
+              <a:t>[/Sources]</a:t>
+            </a:r>
+          </a:p>
+        </p:txBody>
+      </p:sp>
+      <p:sp>
+        <p:nvSpPr>
+          <p:cNvPr id="4" name="Slide Number Placeholder 3"/>
+          <p:cNvSpPr>
+            <a:spLocks xmlns:a="http://schemas.openxmlformats.org/drawingml/2006/main" noGrp="1"/>
+          </p:cNvSpPr>
+          <p:nvPr>
+            <p:ph type="sldNum" idx="5"/>
+          </p:nvPr>
+        </p:nvSpPr>
+        <p:spPr/>
+        <p:txBody>
+          <a:bodyPr xmlns:a="http://schemas.openxmlformats.org/drawingml/2006/main"/>
+          <a:lstStyle xmlns:a="http://schemas.openxmlformats.org/drawingml/2006/main"/>
+          <a:p xmlns:a="http://schemas.openxmlformats.org/drawingml/2006/main"/>
+        </p:txBody>
+      </p:sp>
+    </p:spTree>
+  </p:cSld>
+  <p:clrMapOvr>
+    <a:masterClrMapping xmlns:a="http://schemas.openxmlformats.org/drawingml/2006/main"/>
+  </p:clrMapOvr>
+</p:notes>
+</file>
+
+<file path=ppt/notesSlides/notesSlide39.xml><?xml version="1.0" encoding="utf-8"?>
+<p:notes xmlns:p="http://schemas.openxmlformats.org/presentationml/2006/main">
+  <p:cSld>
+    <p:spTree>
+      <p:nvGrpSpPr>
+        <p:cNvPr id="1" name=""/>
+        <p:cNvGrpSpPr/>
+        <p:nvPr/>
+      </p:nvGrpSpPr>
+      <p:grpSpPr>
+        <a:xfrm xmlns:a="http://schemas.openxmlformats.org/drawingml/2006/main"/>
+      </p:grpSpPr>
+      <p:sp>
+        <p:nvSpPr>
+          <p:cNvPr id="2" name="Slide Image Placeholder 1"/>
+          <p:cNvSpPr>
+            <a:spLocks xmlns:a="http://schemas.openxmlformats.org/drawingml/2006/main" noGrp="1"/>
+          </p:cNvSpPr>
+          <p:nvPr>
+            <p:ph type="sldImg" idx="0"/>
+          </p:nvPr>
+        </p:nvSpPr>
+        <p:spPr/>
+      </p:sp>
+      <p:sp>
+        <p:nvSpPr>
+          <p:cNvPr id="3" name="Notes Placeholder 2"/>
+          <p:cNvSpPr>
+            <a:spLocks xmlns:a="http://schemas.openxmlformats.org/drawingml/2006/main" noGrp="1"/>
+          </p:cNvSpPr>
+          <p:nvPr>
+            <p:ph type="body" idx="1"/>
+          </p:nvPr>
+        </p:nvSpPr>
+        <p:spPr/>
+        <p:txBody>
+          <a:bodyPr xmlns:a="http://schemas.openxmlformats.org/drawingml/2006/main"/>
+          <a:lstStyle xmlns:a="http://schemas.openxmlformats.org/drawingml/2006/main"/>
+          <a:p xmlns:a="http://schemas.openxmlformats.org/drawingml/2006/main">
+            <a:r>
+              <a:t>All breadth gates pass after the bounded refresh. The cohort starts with 481 scoreable stocks, has a median of 454, and never falls below 437. The raw workbench health remains WARN because genuine post-2020 disappearances cannot cover the requested endpoint; terminal-aware replay keeps those identities rather than deleting them.</a:t>
+            </a:r>
+          </a:p>
+          <a:p xmlns:a="http://schemas.openxmlformats.org/drawingml/2006/main">
+            <a:r>
+              <a:t/>
+            </a:r>
+          </a:p>
+          <a:p xmlns:a="http://schemas.openxmlformats.org/drawingml/2006/main">
+            <a:r>
+              <a:t>[Sources]</a:t>
+            </a:r>
+          </a:p>
+          <a:p xmlns:a="http://schemas.openxmlformats.org/drawingml/2006/main">
+            <a:r>
+              <a:t>- C:/Users/Franc/OneDrive/Documents/Francis/Peltata Project/Time-Series-Modeling-Gen5/runs/research_workbench/literature_grounded/lit_mom_03_4_defensible_universe_20260903/mom034_report.md</a:t>
+            </a:r>
+          </a:p>
+          <a:p xmlns:a="http://schemas.openxmlformats.org/drawingml/2006/main">
+            <a:r>
+              <a:t>- C:/Users/Franc/OneDrive/Documents/Francis/Peltata Project/Time-Series-Modeling-Gen5/runs/research_workbench/literature_grounded/lit_mom_03_4_defensible_universe_20260903/mom034_scoreable_breadth.csv</a:t>
+            </a:r>
+          </a:p>
+          <a:p xmlns:a="http://schemas.openxmlformats.org/drawingml/2006/main">
+            <a:r>
+              <a:t>- C:/Users/Franc/OneDrive/Documents/Francis/Peltata Project/Time-Series-Modeling-Gen5/runs/research_workbench/literature_grounded/lit_mom_03_4_defensible_universe_20260903/mom034_workbench_query_health.csv</a:t>
+            </a:r>
+          </a:p>
+          <a:p xmlns:a="http://schemas.openxmlformats.org/drawingml/2006/main">
+            <a:r>
+              <a:t>- C:/Users/Franc/OneDrive/Documents/Francis/Peltata Project/Time-Series-Modeling-Gen5/runs/research_workbench/literature_grounded/lit_mom_03_4_defensible_universe_20260903/mom034_admission_gates.csv</a:t>
+            </a:r>
+          </a:p>
+          <a:p xmlns:a="http://schemas.openxmlformats.org/drawingml/2006/main">
+            <a:r>
+              <a:t>- C:/Users/Franc/OneDrive/Documents/Francis/Peltata Project/Time-Series-Modeling-Gen5/runs/research_workbench/literature_grounded/lit_mom_03_4_defensible_universe_20260903/mom034_terminal_events.csv</a:t>
+            </a:r>
+          </a:p>
+          <a:p xmlns:a="http://schemas.openxmlformats.org/drawingml/2006/main">
+            <a:r>
+              <a:t>- C:/Users/Franc/OneDrive/Documents/Francis/Peltata Project/Time-Series-Modeling-Gen5/runs/research_workbench/literature_grounded/lit_mom_03_4_defensible_universe_20260903/mom034_terminal_proxy_summary.csv</a:t>
+            </a:r>
+          </a:p>
+          <a:p xmlns:a="http://schemas.openxmlformats.org/drawingml/2006/main">
+            <a:r>
+              <a:t>- C:/Users/Franc/OneDrive/Documents/Francis/Peltata Project/Time-Series-Modeling-Gen5/runs/research_workbench/literature_grounded/lit_mom_03_4_defensible_universe_20260903/visuals/mom034_scoreable_breadth.png</a:t>
+            </a:r>
+          </a:p>
+          <a:p xmlns:a="http://schemas.openxmlformats.org/drawingml/2006/main">
+            <a:r>
+              <a:t>- Codex task conversation, 2026-09-03 (defensible-universe approval, result interpretation, and conventional-core huddle)</a:t>
+            </a:r>
+          </a:p>
+          <a:p xmlns:a="http://schemas.openxmlformats.org/drawingml/2006/main">
+            <a:r>
+              <a:t>[/Sources]</a:t>
+            </a:r>
+          </a:p>
+        </p:txBody>
+      </p:sp>
+      <p:sp>
+        <p:nvSpPr>
+          <p:cNvPr id="4" name="Slide Number Placeholder 3"/>
+          <p:cNvSpPr>
+            <a:spLocks xmlns:a="http://schemas.openxmlformats.org/drawingml/2006/main" noGrp="1"/>
+          </p:cNvSpPr>
+          <p:nvPr>
+            <p:ph type="sldNum" idx="5"/>
+          </p:nvPr>
+        </p:nvSpPr>
+        <p:spPr/>
+        <p:txBody>
+          <a:bodyPr xmlns:a="http://schemas.openxmlformats.org/drawingml/2006/main"/>
+          <a:lstStyle xmlns:a="http://schemas.openxmlformats.org/drawingml/2006/main"/>
+          <a:p xmlns:a="http://schemas.openxmlformats.org/drawingml/2006/main"/>
+        </p:txBody>
+      </p:sp>
+    </p:spTree>
+  </p:cSld>
+  <p:clrMapOvr>
+    <a:masterClrMapping xmlns:a="http://schemas.openxmlformats.org/drawingml/2006/main"/>
+  </p:clrMapOvr>
+</p:notes>
+</file>
+
 <file path=ppt/notesSlides/notesSlide4.xml><?xml version="1.0" encoding="utf-8"?>
 <p:notes xmlns:p="http://schemas.openxmlformats.org/presentationml/2006/main">
   <p:cSld>
@@ -3818,6 +4180,491 @@
           <a:p xmlns:a="http://schemas.openxmlformats.org/drawingml/2006/main">
             <a:r>
               <a:t>- Codex task conversation, 2026-09-02 (operator/assistant momentum interpretation huddle)</a:t>
+            </a:r>
+          </a:p>
+          <a:p xmlns:a="http://schemas.openxmlformats.org/drawingml/2006/main">
+            <a:r>
+              <a:t>[/Sources]</a:t>
+            </a:r>
+          </a:p>
+        </p:txBody>
+      </p:sp>
+      <p:sp>
+        <p:nvSpPr>
+          <p:cNvPr id="4" name="Slide Number Placeholder 3"/>
+          <p:cNvSpPr>
+            <a:spLocks xmlns:a="http://schemas.openxmlformats.org/drawingml/2006/main" noGrp="1"/>
+          </p:cNvSpPr>
+          <p:nvPr>
+            <p:ph type="sldNum" idx="5"/>
+          </p:nvPr>
+        </p:nvSpPr>
+        <p:spPr/>
+        <p:txBody>
+          <a:bodyPr xmlns:a="http://schemas.openxmlformats.org/drawingml/2006/main"/>
+          <a:lstStyle xmlns:a="http://schemas.openxmlformats.org/drawingml/2006/main"/>
+          <a:p xmlns:a="http://schemas.openxmlformats.org/drawingml/2006/main"/>
+        </p:txBody>
+      </p:sp>
+    </p:spTree>
+  </p:cSld>
+  <p:clrMapOvr>
+    <a:masterClrMapping xmlns:a="http://schemas.openxmlformats.org/drawingml/2006/main"/>
+  </p:clrMapOvr>
+</p:notes>
+</file>
+
+<file path=ppt/notesSlides/notesSlide40.xml><?xml version="1.0" encoding="utf-8"?>
+<p:notes xmlns:p="http://schemas.openxmlformats.org/presentationml/2006/main">
+  <p:cSld>
+    <p:spTree>
+      <p:nvGrpSpPr>
+        <p:cNvPr id="1" name=""/>
+        <p:cNvGrpSpPr/>
+        <p:nvPr/>
+      </p:nvGrpSpPr>
+      <p:grpSpPr>
+        <a:xfrm xmlns:a="http://schemas.openxmlformats.org/drawingml/2006/main"/>
+      </p:grpSpPr>
+      <p:sp>
+        <p:nvSpPr>
+          <p:cNvPr id="2" name="Slide Image Placeholder 1"/>
+          <p:cNvSpPr>
+            <a:spLocks xmlns:a="http://schemas.openxmlformats.org/drawingml/2006/main" noGrp="1"/>
+          </p:cNvSpPr>
+          <p:nvPr>
+            <p:ph type="sldImg" idx="0"/>
+          </p:nvPr>
+        </p:nvSpPr>
+        <p:spPr/>
+      </p:sp>
+      <p:sp>
+        <p:nvSpPr>
+          <p:cNvPr id="3" name="Notes Placeholder 2"/>
+          <p:cNvSpPr>
+            <a:spLocks xmlns:a="http://schemas.openxmlformats.org/drawingml/2006/main" noGrp="1"/>
+          </p:cNvSpPr>
+          <p:nvPr>
+            <p:ph type="body" idx="1"/>
+          </p:nvPr>
+        </p:nvSpPr>
+        <p:spPr/>
+        <p:txBody>
+          <a:bodyPr xmlns:a="http://schemas.openxmlformats.org/drawingml/2006/main"/>
+          <a:lstStyle xmlns:a="http://schemas.openxmlformats.org/drawingml/2006/main"/>
+          <a:p xmlns:a="http://schemas.openxmlformats.org/drawingml/2006/main">
+            <a:r>
+              <a:t>Relative-only ranking earns 10.80% net CAGR versus 10.66% for equal-weight ownership of the same ex-ante cohort: a 0.14-point difference. That is far smaller than the prior 0.90-point static-atlas clue and is not a persuasive economic promotion signal. SPY leads return at 12.80% but also has the deepest drawdown.</a:t>
+            </a:r>
+          </a:p>
+          <a:p xmlns:a="http://schemas.openxmlformats.org/drawingml/2006/main">
+            <a:r>
+              <a:t/>
+            </a:r>
+          </a:p>
+          <a:p xmlns:a="http://schemas.openxmlformats.org/drawingml/2006/main">
+            <a:r>
+              <a:t>[Sources]</a:t>
+            </a:r>
+          </a:p>
+          <a:p xmlns:a="http://schemas.openxmlformats.org/drawingml/2006/main">
+            <a:r>
+              <a:t>- C:/Users/Franc/OneDrive/Documents/Francis/Peltata Project/Time-Series-Modeling-Gen5/runs/research_workbench/literature_grounded/lit_mom_03_4_defensible_universe_20260903/mom034_report.md</a:t>
+            </a:r>
+          </a:p>
+          <a:p xmlns:a="http://schemas.openxmlformats.org/drawingml/2006/main">
+            <a:r>
+              <a:t>- C:/Users/Franc/OneDrive/Documents/Francis/Peltata Project/Time-Series-Modeling-Gen5/runs/research_workbench/literature_grounded/lit_mom_03_4_defensible_universe_20260903/mom034_summary.csv</a:t>
+            </a:r>
+          </a:p>
+          <a:p xmlns:a="http://schemas.openxmlformats.org/drawingml/2006/main">
+            <a:r>
+              <a:t>- C:/Users/Franc/OneDrive/Documents/Francis/Peltata Project/Time-Series-Modeling-Gen5/runs/research_workbench/literature_grounded/lit_mom_03_4_defensible_universe_20260903/mom034_portfolio_metrics.csv</a:t>
+            </a:r>
+          </a:p>
+          <a:p xmlns:a="http://schemas.openxmlformats.org/drawingml/2006/main">
+            <a:r>
+              <a:t>- C:/Users/Franc/OneDrive/Documents/Francis/Peltata Project/Time-Series-Modeling-Gen5/runs/research_workbench/literature_grounded/lit_mom_03_4_defensible_universe_20260903/mom034_admission_gates.csv</a:t>
+            </a:r>
+          </a:p>
+          <a:p xmlns:a="http://schemas.openxmlformats.org/drawingml/2006/main">
+            <a:r>
+              <a:t>- C:/Users/Franc/OneDrive/Documents/Francis/Peltata Project/Time-Series-Modeling-Gen5/runs/research_workbench/literature_grounded/lit_mom_03_4_defensible_universe_20260903/visuals/mom034_growth_of_one.png</a:t>
+            </a:r>
+          </a:p>
+          <a:p xmlns:a="http://schemas.openxmlformats.org/drawingml/2006/main">
+            <a:r>
+              <a:t>- Codex task conversation, 2026-09-03 (defensible-universe approval, result interpretation, and conventional-core huddle)</a:t>
+            </a:r>
+          </a:p>
+          <a:p xmlns:a="http://schemas.openxmlformats.org/drawingml/2006/main">
+            <a:r>
+              <a:t>[/Sources]</a:t>
+            </a:r>
+          </a:p>
+        </p:txBody>
+      </p:sp>
+      <p:sp>
+        <p:nvSpPr>
+          <p:cNvPr id="4" name="Slide Number Placeholder 3"/>
+          <p:cNvSpPr>
+            <a:spLocks xmlns:a="http://schemas.openxmlformats.org/drawingml/2006/main" noGrp="1"/>
+          </p:cNvSpPr>
+          <p:nvPr>
+            <p:ph type="sldNum" idx="5"/>
+          </p:nvPr>
+        </p:nvSpPr>
+        <p:spPr/>
+        <p:txBody>
+          <a:bodyPr xmlns:a="http://schemas.openxmlformats.org/drawingml/2006/main"/>
+          <a:lstStyle xmlns:a="http://schemas.openxmlformats.org/drawingml/2006/main"/>
+          <a:p xmlns:a="http://schemas.openxmlformats.org/drawingml/2006/main"/>
+        </p:txBody>
+      </p:sp>
+    </p:spTree>
+  </p:cSld>
+  <p:clrMapOvr>
+    <a:masterClrMapping xmlns:a="http://schemas.openxmlformats.org/drawingml/2006/main"/>
+  </p:clrMapOvr>
+</p:notes>
+</file>
+
+<file path=ppt/notesSlides/notesSlide41.xml><?xml version="1.0" encoding="utf-8"?>
+<p:notes xmlns:p="http://schemas.openxmlformats.org/presentationml/2006/main">
+  <p:cSld>
+    <p:spTree>
+      <p:nvGrpSpPr>
+        <p:cNvPr id="1" name=""/>
+        <p:cNvGrpSpPr/>
+        <p:nvPr/>
+      </p:nvGrpSpPr>
+      <p:grpSpPr>
+        <a:xfrm xmlns:a="http://schemas.openxmlformats.org/drawingml/2006/main"/>
+      </p:grpSpPr>
+      <p:sp>
+        <p:nvSpPr>
+          <p:cNvPr id="2" name="Slide Image Placeholder 1"/>
+          <p:cNvSpPr>
+            <a:spLocks xmlns:a="http://schemas.openxmlformats.org/drawingml/2006/main" noGrp="1"/>
+          </p:cNvSpPr>
+          <p:nvPr>
+            <p:ph type="sldImg" idx="0"/>
+          </p:nvPr>
+        </p:nvSpPr>
+        <p:spPr/>
+      </p:sp>
+      <p:sp>
+        <p:nvSpPr>
+          <p:cNvPr id="3" name="Notes Placeholder 2"/>
+          <p:cNvSpPr>
+            <a:spLocks xmlns:a="http://schemas.openxmlformats.org/drawingml/2006/main" noGrp="1"/>
+          </p:cNvSpPr>
+          <p:nvPr>
+            <p:ph type="body" idx="1"/>
+          </p:nvPr>
+        </p:nvSpPr>
+        <p:spPr/>
+        <p:txBody>
+          <a:bodyPr xmlns:a="http://schemas.openxmlformats.org/drawingml/2006/main"/>
+          <a:lstStyle xmlns:a="http://schemas.openxmlformats.org/drawingml/2006/main"/>
+          <a:p xmlns:a="http://schemas.openxmlformats.org/drawingml/2006/main">
+            <a:r>
+              <a:t>Source minus relative-only isolates the absolute-momentum permission gate. It costs 1.41 CAGR points and improves maximum drawdown by only 0.05 points. The full source rule also trails equal-weight 481 by 1.27 CAGR points. In this cohort and period, the gate is not earning its complexity.</a:t>
+            </a:r>
+          </a:p>
+          <a:p xmlns:a="http://schemas.openxmlformats.org/drawingml/2006/main">
+            <a:r>
+              <a:t/>
+            </a:r>
+          </a:p>
+          <a:p xmlns:a="http://schemas.openxmlformats.org/drawingml/2006/main">
+            <a:r>
+              <a:t>[Sources]</a:t>
+            </a:r>
+          </a:p>
+          <a:p xmlns:a="http://schemas.openxmlformats.org/drawingml/2006/main">
+            <a:r>
+              <a:t>- C:/Users/Franc/OneDrive/Documents/Francis/Peltata Project/Time-Series-Modeling-Gen5/runs/research_workbench/literature_grounded/lit_mom_03_4_defensible_universe_20260903/mom034_report.md</a:t>
+            </a:r>
+          </a:p>
+          <a:p xmlns:a="http://schemas.openxmlformats.org/drawingml/2006/main">
+            <a:r>
+              <a:t>- C:/Users/Franc/OneDrive/Documents/Francis/Peltata Project/Time-Series-Modeling-Gen5/runs/research_workbench/literature_grounded/lit_mom_03_4_defensible_universe_20260903/mom034_summary.csv</a:t>
+            </a:r>
+          </a:p>
+          <a:p xmlns:a="http://schemas.openxmlformats.org/drawingml/2006/main">
+            <a:r>
+              <a:t>- C:/Users/Franc/OneDrive/Documents/Francis/Peltata Project/Time-Series-Modeling-Gen5/runs/research_workbench/literature_grounded/lit_mom_03_4_defensible_universe_20260903/mom034_portfolio_metrics.csv</a:t>
+            </a:r>
+          </a:p>
+          <a:p xmlns:a="http://schemas.openxmlformats.org/drawingml/2006/main">
+            <a:r>
+              <a:t>- C:/Users/Franc/OneDrive/Documents/Francis/Peltata Project/Time-Series-Modeling-Gen5/runs/research_workbench/literature_grounded/lit_mom_03_4_defensible_universe_20260903/mom034_admission_gates.csv</a:t>
+            </a:r>
+          </a:p>
+          <a:p xmlns:a="http://schemas.openxmlformats.org/drawingml/2006/main">
+            <a:r>
+              <a:t>- C:/Users/Franc/OneDrive/Documents/Francis/Peltata Project/Time-Series-Modeling-Gen5/runs/research_workbench/literature_grounded/lit_mom_03_4_defensible_universe_20260903/visuals/mom034_control_metrics.png</a:t>
+            </a:r>
+          </a:p>
+          <a:p xmlns:a="http://schemas.openxmlformats.org/drawingml/2006/main">
+            <a:r>
+              <a:t>- Codex task conversation, 2026-09-03 (defensible-universe approval, result interpretation, and conventional-core huddle)</a:t>
+            </a:r>
+          </a:p>
+          <a:p xmlns:a="http://schemas.openxmlformats.org/drawingml/2006/main">
+            <a:r>
+              <a:t>[/Sources]</a:t>
+            </a:r>
+          </a:p>
+        </p:txBody>
+      </p:sp>
+      <p:sp>
+        <p:nvSpPr>
+          <p:cNvPr id="4" name="Slide Number Placeholder 3"/>
+          <p:cNvSpPr>
+            <a:spLocks xmlns:a="http://schemas.openxmlformats.org/drawingml/2006/main" noGrp="1"/>
+          </p:cNvSpPr>
+          <p:nvPr>
+            <p:ph type="sldNum" idx="5"/>
+          </p:nvPr>
+        </p:nvSpPr>
+        <p:spPr/>
+        <p:txBody>
+          <a:bodyPr xmlns:a="http://schemas.openxmlformats.org/drawingml/2006/main"/>
+          <a:lstStyle xmlns:a="http://schemas.openxmlformats.org/drawingml/2006/main"/>
+          <a:p xmlns:a="http://schemas.openxmlformats.org/drawingml/2006/main"/>
+        </p:txBody>
+      </p:sp>
+    </p:spTree>
+  </p:cSld>
+  <p:clrMapOvr>
+    <a:masterClrMapping xmlns:a="http://schemas.openxmlformats.org/drawingml/2006/main"/>
+  </p:clrMapOvr>
+</p:notes>
+</file>
+
+<file path=ppt/notesSlides/notesSlide42.xml><?xml version="1.0" encoding="utf-8"?>
+<p:notes xmlns:p="http://schemas.openxmlformats.org/presentationml/2006/main">
+  <p:cSld>
+    <p:spTree>
+      <p:nvGrpSpPr>
+        <p:cNvPr id="1" name=""/>
+        <p:cNvGrpSpPr/>
+        <p:nvPr/>
+      </p:nvGrpSpPr>
+      <p:grpSpPr>
+        <a:xfrm xmlns:a="http://schemas.openxmlformats.org/drawingml/2006/main"/>
+      </p:grpSpPr>
+      <p:sp>
+        <p:nvSpPr>
+          <p:cNvPr id="2" name="Slide Image Placeholder 1"/>
+          <p:cNvSpPr>
+            <a:spLocks xmlns:a="http://schemas.openxmlformats.org/drawingml/2006/main" noGrp="1"/>
+          </p:cNvSpPr>
+          <p:nvPr>
+            <p:ph type="sldImg" idx="0"/>
+          </p:nvPr>
+        </p:nvSpPr>
+        <p:spPr/>
+      </p:sp>
+      <p:sp>
+        <p:nvSpPr>
+          <p:cNvPr id="3" name="Notes Placeholder 2"/>
+          <p:cNvSpPr>
+            <a:spLocks xmlns:a="http://schemas.openxmlformats.org/drawingml/2006/main" noGrp="1"/>
+          </p:cNvSpPr>
+          <p:nvPr>
+            <p:ph type="body" idx="1"/>
+          </p:nvPr>
+        </p:nvSpPr>
+        <p:spPr/>
+        <p:txBody>
+          <a:bodyPr xmlns:a="http://schemas.openxmlformats.org/drawingml/2006/main"/>
+          <a:lstStyle xmlns:a="http://schemas.openxmlformats.org/drawingml/2006/main"/>
+          <a:p xmlns:a="http://schemas.openxmlformats.org/drawingml/2006/main">
+            <a:r>
+              <a:t>The replay earns admission, so the negative result is interpretable. It does not promote an edge. The exact broad-stock implementation stops without a robustness or forward gate. The general dual-momentum principle remains conceptually distinct and may be studied elsewhere only under a new frozen hypothesis.</a:t>
+            </a:r>
+          </a:p>
+          <a:p xmlns:a="http://schemas.openxmlformats.org/drawingml/2006/main">
+            <a:r>
+              <a:t/>
+            </a:r>
+          </a:p>
+          <a:p xmlns:a="http://schemas.openxmlformats.org/drawingml/2006/main">
+            <a:r>
+              <a:t>[Sources]</a:t>
+            </a:r>
+          </a:p>
+          <a:p xmlns:a="http://schemas.openxmlformats.org/drawingml/2006/main">
+            <a:r>
+              <a:t>- C:/Users/Franc/OneDrive/Documents/Francis/Peltata Project/Time-Series-Modeling-Gen5/literature_studies/docs/GEN5_LIT_MOM_03_4_DEFENSIBLE_UNIVERSE_CONTRACT.md</a:t>
+            </a:r>
+          </a:p>
+          <a:p xmlns:a="http://schemas.openxmlformats.org/drawingml/2006/main">
+            <a:r>
+              <a:t>- C:/Users/Franc/OneDrive/Documents/Francis/Peltata Project/Time-Series-Modeling-Gen5/literature_studies/docs/GEN5_LIT_MOM_03_4_DEFENSIBLE_UNIVERSE_RESULTS.md</a:t>
+            </a:r>
+          </a:p>
+          <a:p xmlns:a="http://schemas.openxmlformats.org/drawingml/2006/main">
+            <a:r>
+              <a:t>- C:/Users/Franc/OneDrive/Documents/Francis/Peltata Project/Time-Series-Modeling-Gen5/runs/research_workbench/literature_grounded/lit_mom_03_4_defensible_universe_20260903/mom034_report.md</a:t>
+            </a:r>
+          </a:p>
+          <a:p xmlns:a="http://schemas.openxmlformats.org/drawingml/2006/main">
+            <a:r>
+              <a:t>- C:/Users/Franc/OneDrive/Documents/Francis/Peltata Project/Time-Series-Modeling-Gen5/runs/research_workbench/literature_grounded/lit_mom_03_4_defensible_universe_20260903/mom034_summary.csv</a:t>
+            </a:r>
+          </a:p>
+          <a:p xmlns:a="http://schemas.openxmlformats.org/drawingml/2006/main">
+            <a:r>
+              <a:t>- C:/Users/Franc/OneDrive/Documents/Francis/Peltata Project/Time-Series-Modeling-Gen5/runs/research_workbench/literature_grounded/lit_mom_03_4_defensible_universe_20260903/mom034_portfolio_metrics.csv</a:t>
+            </a:r>
+          </a:p>
+          <a:p xmlns:a="http://schemas.openxmlformats.org/drawingml/2006/main">
+            <a:r>
+              <a:t>- C:/Users/Franc/OneDrive/Documents/Francis/Peltata Project/Time-Series-Modeling-Gen5/runs/research_workbench/literature_grounded/lit_mom_03_4_defensible_universe_20260903/mom034_admission_gates.csv</a:t>
+            </a:r>
+          </a:p>
+          <a:p xmlns:a="http://schemas.openxmlformats.org/drawingml/2006/main">
+            <a:r>
+              <a:t>- C:/Users/Franc/OneDrive/Documents/Francis/Peltata Project/Time-Series-Modeling-Gen5/runs/research_workbench/operator_hypothesis_lab/hyp_mom_04_1_deployment_universe_train_20260811/hyp_mom_04_1_frozen_registry.csv</a:t>
+            </a:r>
+          </a:p>
+          <a:p xmlns:a="http://schemas.openxmlformats.org/drawingml/2006/main">
+            <a:r>
+              <a:t>- C:/Users/Franc/OneDrive/Documents/Francis/Peltata Project/Time-Series-Modeling-Gen5/literature_studies/R/gen5_lit_mom_03_4_defensible_universe.R</a:t>
+            </a:r>
+          </a:p>
+          <a:p xmlns:a="http://schemas.openxmlformats.org/drawingml/2006/main">
+            <a:r>
+              <a:t>- C:/Users/Franc/OneDrive/Documents/Francis/Peltata Project/Time-Series-Modeling-Gen5/literature_studies/scripts/run_gen5_lit_mom_03_4_defensible_universe.R</a:t>
+            </a:r>
+          </a:p>
+          <a:p xmlns:a="http://schemas.openxmlformats.org/drawingml/2006/main">
+            <a:r>
+              <a:t>- Codex task conversation, 2026-09-03 (defensible-universe approval, result interpretation, and conventional-core huddle)</a:t>
+            </a:r>
+          </a:p>
+          <a:p xmlns:a="http://schemas.openxmlformats.org/drawingml/2006/main">
+            <a:r>
+              <a:t>[/Sources]</a:t>
+            </a:r>
+          </a:p>
+        </p:txBody>
+      </p:sp>
+      <p:sp>
+        <p:nvSpPr>
+          <p:cNvPr id="4" name="Slide Number Placeholder 3"/>
+          <p:cNvSpPr>
+            <a:spLocks xmlns:a="http://schemas.openxmlformats.org/drawingml/2006/main" noGrp="1"/>
+          </p:cNvSpPr>
+          <p:nvPr>
+            <p:ph type="sldNum" idx="5"/>
+          </p:nvPr>
+        </p:nvSpPr>
+        <p:spPr/>
+        <p:txBody>
+          <a:bodyPr xmlns:a="http://schemas.openxmlformats.org/drawingml/2006/main"/>
+          <a:lstStyle xmlns:a="http://schemas.openxmlformats.org/drawingml/2006/main"/>
+          <a:p xmlns:a="http://schemas.openxmlformats.org/drawingml/2006/main"/>
+        </p:txBody>
+      </p:sp>
+    </p:spTree>
+  </p:cSld>
+  <p:clrMapOvr>
+    <a:masterClrMapping xmlns:a="http://schemas.openxmlformats.org/drawingml/2006/main"/>
+  </p:clrMapOvr>
+</p:notes>
+</file>
+
+<file path=ppt/notesSlides/notesSlide43.xml><?xml version="1.0" encoding="utf-8"?>
+<p:notes xmlns:p="http://schemas.openxmlformats.org/presentationml/2006/main">
+  <p:cSld>
+    <p:spTree>
+      <p:nvGrpSpPr>
+        <p:cNvPr id="1" name=""/>
+        <p:cNvGrpSpPr/>
+        <p:nvPr/>
+      </p:nvGrpSpPr>
+      <p:grpSpPr>
+        <a:xfrm xmlns:a="http://schemas.openxmlformats.org/drawingml/2006/main"/>
+      </p:grpSpPr>
+      <p:sp>
+        <p:nvSpPr>
+          <p:cNvPr id="2" name="Slide Image Placeholder 1"/>
+          <p:cNvSpPr>
+            <a:spLocks xmlns:a="http://schemas.openxmlformats.org/drawingml/2006/main" noGrp="1"/>
+          </p:cNvSpPr>
+          <p:nvPr>
+            <p:ph type="sldImg" idx="0"/>
+          </p:nvPr>
+        </p:nvSpPr>
+        <p:spPr/>
+      </p:sp>
+      <p:sp>
+        <p:nvSpPr>
+          <p:cNvPr id="3" name="Notes Placeholder 2"/>
+          <p:cNvSpPr>
+            <a:spLocks xmlns:a="http://schemas.openxmlformats.org/drawingml/2006/main" noGrp="1"/>
+          </p:cNvSpPr>
+          <p:nvPr>
+            <p:ph type="body" idx="1"/>
+          </p:nvPr>
+        </p:nvSpPr>
+        <p:spPr/>
+        <p:txBody>
+          <a:bodyPr xmlns:a="http://schemas.openxmlformats.org/drawingml/2006/main"/>
+          <a:lstStyle xmlns:a="http://schemas.openxmlformats.org/drawingml/2006/main"/>
+          <a:p xmlns:a="http://schemas.openxmlformats.org/drawingml/2006/main">
+            <a:r>
+              <a:t>This is a non-personalized architecture bookmark, not an allocation recommendation. A conventional core can combine a safety reserve with a diversified, low-cost stock/bond allocation matched to the operator's horizon and ability to tolerate losses. Experimental algorithms belong in a separately capped sleeve until forward evidence exists. Diversification reduces risk but does not prevent losses, and every investment carries risk.</a:t>
+            </a:r>
+          </a:p>
+          <a:p xmlns:a="http://schemas.openxmlformats.org/drawingml/2006/main">
+            <a:r>
+              <a:t/>
+            </a:r>
+          </a:p>
+          <a:p xmlns:a="http://schemas.openxmlformats.org/drawingml/2006/main">
+            <a:r>
+              <a:t>[Sources]</a:t>
+            </a:r>
+          </a:p>
+          <a:p xmlns:a="http://schemas.openxmlformats.org/drawingml/2006/main">
+            <a:r>
+              <a:t>- https://www.investor.gov/introduction-investing/getting-started/asset-allocation</a:t>
+            </a:r>
+          </a:p>
+          <a:p xmlns:a="http://schemas.openxmlformats.org/drawingml/2006/main">
+            <a:r>
+              <a:t>- https://www.investor.gov/introduction-investing/investing-basics/investment-products/mutual-funds-and-exchange-traded-4</a:t>
+            </a:r>
+          </a:p>
+          <a:p xmlns:a="http://schemas.openxmlformats.org/drawingml/2006/main">
+            <a:r>
+              <a:t>- https://www.investor.gov/introduction-investing/investing-basics/save-and-invest/diversify-your-investments</a:t>
+            </a:r>
+          </a:p>
+          <a:p xmlns:a="http://schemas.openxmlformats.org/drawingml/2006/main">
+            <a:r>
+              <a:t>- https://www.investor.gov/introduction-investing</a:t>
+            </a:r>
+          </a:p>
+          <a:p xmlns:a="http://schemas.openxmlformats.org/drawingml/2006/main">
+            <a:r>
+              <a:t>- https://www.investor.gov/introduction-investing/general-resources/news-alerts/alerts-bulletins/investor-bulletins/mutual-fund-and-etf-fees-and-expenses-investor-bulletin</a:t>
+            </a:r>
+          </a:p>
+          <a:p xmlns:a="http://schemas.openxmlformats.org/drawingml/2006/main">
+            <a:r>
+              <a:t>- https://www.treasurydirect.gov/marketable-securities/buying-a-marketable-security/</a:t>
+            </a:r>
+          </a:p>
+          <a:p xmlns:a="http://schemas.openxmlformats.org/drawingml/2006/main">
+            <a:r>
+              <a:t>- Codex task conversation, 2026-09-03 (defensible-universe approval, result interpretation, and conventional-core huddle)</a:t>
             </a:r>
           </a:p>
           <a:p xmlns:a="http://schemas.openxmlformats.org/drawingml/2006/main">
@@ -4395,7 +5242,7 @@
   </p:cSld>
   <p:clrMap bg1="lt1" tx1="dk1" bg2="lt2" tx2="dk2" accent1="accent1" accent2="accent2" accent3="accent3" accent4="accent4" accent5="accent5" accent6="accent6" hlink="hlink" folHlink="folHlink"/>
   <p:sldLayoutIdLst>
-    <p:sldLayoutId xmlns:r="http://schemas.openxmlformats.org/officeDocument/2006/relationships" id="2147483649" r:id="Re999ea682af6491e"/>
+    <p:sldLayoutId xmlns:r="http://schemas.openxmlformats.org/officeDocument/2006/relationships" id="2147483649" r:id="Ra482559f6f1a47f3"/>
   </p:sldLayoutIdLst>
   <p:txStyles>
     <p:titleStyle>
@@ -5425,7 +6272,7 @@
                 <a:ea typeface="Arial"/>
                 <a:cs typeface="Arial"/>
               </a:rPr>
-              <a:t>Broad-fleet ranking POC</a:t>
+              <a:t>Defensible-universe replay</a:t>
             </a:r>
           </a:p>
           <a:p xmlns:a="http://schemas.openxmlformats.org/drawingml/2006/main">
@@ -5449,7 +6296,7 @@
                 <a:ea typeface="Arial"/>
                 <a:cs typeface="Arial"/>
               </a:rPr>
-              <a:t>No edge claim</a:t>
+              <a:t>STOP · no edge claim</a:t>
             </a:r>
           </a:p>
         </p:txBody>
@@ -12229,7 +13076,7 @@
           <p:nvPr/>
         </p:nvPicPr>
         <p:blipFill>
-          <a:blip xmlns:r="http://schemas.openxmlformats.org/officeDocument/2006/relationships" xmlns:a="http://schemas.openxmlformats.org/drawingml/2006/main" r:embed="R6d50b0c5f7354144"/>
+          <a:blip xmlns:r="http://schemas.openxmlformats.org/officeDocument/2006/relationships" xmlns:a="http://schemas.openxmlformats.org/drawingml/2006/main" r:embed="R99b76a7388c34f14"/>
           <a:stretch xmlns:a="http://schemas.openxmlformats.org/drawingml/2006/main"/>
         </p:blipFill>
         <p:spPr>
@@ -12993,7 +13840,7 @@
           <p:nvPr/>
         </p:nvPicPr>
         <p:blipFill>
-          <a:blip xmlns:r="http://schemas.openxmlformats.org/officeDocument/2006/relationships" xmlns:a="http://schemas.openxmlformats.org/drawingml/2006/main" r:embed="Rcda86434732247ab"/>
+          <a:blip xmlns:r="http://schemas.openxmlformats.org/officeDocument/2006/relationships" xmlns:a="http://schemas.openxmlformats.org/drawingml/2006/main" r:embed="Rdffe6d66861f4323"/>
           <a:stretch xmlns:a="http://schemas.openxmlformats.org/drawingml/2006/main"/>
         </p:blipFill>
         <p:spPr>
@@ -15985,7 +16832,7 @@
           <p:nvPr/>
         </p:nvPicPr>
         <p:blipFill>
-          <a:blip xmlns:r="http://schemas.openxmlformats.org/officeDocument/2006/relationships" xmlns:a="http://schemas.openxmlformats.org/drawingml/2006/main" r:embed="R7ab2a931d07644a8"/>
+          <a:blip xmlns:r="http://schemas.openxmlformats.org/officeDocument/2006/relationships" xmlns:a="http://schemas.openxmlformats.org/drawingml/2006/main" r:embed="Rbcabc297682a4ea4"/>
           <a:stretch xmlns:a="http://schemas.openxmlformats.org/drawingml/2006/main"/>
         </p:blipFill>
         <p:spPr>
@@ -17487,7 +18334,7 @@
           <p:nvPr/>
         </p:nvPicPr>
         <p:blipFill>
-          <a:blip xmlns:r="http://schemas.openxmlformats.org/officeDocument/2006/relationships" xmlns:a="http://schemas.openxmlformats.org/drawingml/2006/main" r:embed="Rbaa181e91f924d68"/>
+          <a:blip xmlns:r="http://schemas.openxmlformats.org/officeDocument/2006/relationships" xmlns:a="http://schemas.openxmlformats.org/drawingml/2006/main" r:embed="R9d006928d3f64118"/>
           <a:stretch xmlns:a="http://schemas.openxmlformats.org/drawingml/2006/main"/>
         </p:blipFill>
         <p:spPr>
@@ -21515,7 +22362,7 @@
           <p:nvPr/>
         </p:nvPicPr>
         <p:blipFill>
-          <a:blip xmlns:r="http://schemas.openxmlformats.org/officeDocument/2006/relationships" xmlns:a="http://schemas.openxmlformats.org/drawingml/2006/main" r:embed="R82398b99a28a4b0b"/>
+          <a:blip xmlns:r="http://schemas.openxmlformats.org/officeDocument/2006/relationships" xmlns:a="http://schemas.openxmlformats.org/drawingml/2006/main" r:embed="R667f4f59093e4ea1"/>
           <a:stretch xmlns:a="http://schemas.openxmlformats.org/drawingml/2006/main"/>
         </p:blipFill>
         <p:spPr>
@@ -22231,7 +23078,7 @@
           <p:nvPr/>
         </p:nvPicPr>
         <p:blipFill>
-          <a:blip xmlns:r="http://schemas.openxmlformats.org/officeDocument/2006/relationships" xmlns:a="http://schemas.openxmlformats.org/drawingml/2006/main" r:embed="Rcef268d6b20648f9"/>
+          <a:blip xmlns:r="http://schemas.openxmlformats.org/officeDocument/2006/relationships" xmlns:a="http://schemas.openxmlformats.org/drawingml/2006/main" r:embed="R85ce72a31c744648"/>
           <a:stretch xmlns:a="http://schemas.openxmlformats.org/drawingml/2006/main"/>
         </p:blipFill>
         <p:spPr>
@@ -28030,7 +28877,7 @@
           <p:nvPr/>
         </p:nvPicPr>
         <p:blipFill>
-          <a:blip xmlns:r="http://schemas.openxmlformats.org/officeDocument/2006/relationships" xmlns:a="http://schemas.openxmlformats.org/drawingml/2006/main" r:embed="R7960e741a292475f"/>
+          <a:blip xmlns:r="http://schemas.openxmlformats.org/officeDocument/2006/relationships" xmlns:a="http://schemas.openxmlformats.org/drawingml/2006/main" r:embed="Rc96448ec89c24cc8"/>
           <a:stretch xmlns:a="http://schemas.openxmlformats.org/drawingml/2006/main"/>
         </p:blipFill>
         <p:spPr>
@@ -28770,7 +29617,7 @@
           <p:nvPr/>
         </p:nvPicPr>
         <p:blipFill>
-          <a:blip xmlns:r="http://schemas.openxmlformats.org/officeDocument/2006/relationships" xmlns:a="http://schemas.openxmlformats.org/drawingml/2006/main" r:embed="Rd36ceaac19e04f80"/>
+          <a:blip xmlns:r="http://schemas.openxmlformats.org/officeDocument/2006/relationships" xmlns:a="http://schemas.openxmlformats.org/drawingml/2006/main" r:embed="R7184cb4af7854a52"/>
           <a:stretch xmlns:a="http://schemas.openxmlformats.org/drawingml/2006/main"/>
         </p:blipFill>
         <p:spPr>
@@ -29510,7 +30357,7 @@
           <p:nvPr/>
         </p:nvPicPr>
         <p:blipFill>
-          <a:blip xmlns:r="http://schemas.openxmlformats.org/officeDocument/2006/relationships" xmlns:a="http://schemas.openxmlformats.org/drawingml/2006/main" r:embed="Rd626146f6f894db6"/>
+          <a:blip xmlns:r="http://schemas.openxmlformats.org/officeDocument/2006/relationships" xmlns:a="http://schemas.openxmlformats.org/drawingml/2006/main" r:embed="Rc7edd5086c774b2d"/>
           <a:stretch xmlns:a="http://schemas.openxmlformats.org/drawingml/2006/main"/>
         </p:blipFill>
         <p:spPr>
@@ -30295,6 +31142,2558 @@
 </p:sld>
 </file>
 
+<file path=ppt/slides/slide37.xml><?xml version="1.0" encoding="utf-8"?>
+<p:sld xmlns:p="http://schemas.openxmlformats.org/presentationml/2006/main">
+  <p:cSld>
+    <p:bg>
+      <p:bgPr>
+        <a:solidFill xmlns:a="http://schemas.openxmlformats.org/drawingml/2006/main">
+          <a:srgbClr val="FFFFFF"/>
+        </a:solidFill>
+      </p:bgPr>
+    </p:bg>
+    <p:spTree>
+      <p:nvGrpSpPr>
+        <p:cNvPr id="1" name=""/>
+        <p:cNvGrpSpPr/>
+        <p:nvPr/>
+      </p:nvGrpSpPr>
+      <p:grpSpPr>
+        <a:xfrm xmlns:a="http://schemas.openxmlformats.org/drawingml/2006/main"/>
+      </p:grpSpPr>
+      <p:sp>
+        <p:nvSpPr>
+          <p:cNvPr id="16" name="">
+            <a:extLst xmlns:a="http://schemas.openxmlformats.org/drawingml/2006/main">
+              <a:ext uri="{FF2B5EF4-FFF2-40B4-BE49-F238E27FC236}">
+                <a16:creationId xmlns:a16="http://schemas.microsoft.com/office/drawing/2014/main" id="{0643D917-60C1-49B6-A04E-D85D24522DCE}"/>
+              </a:ext>
+            </a:extLst>
+          </p:cNvPr>
+          <p:cNvSpPr>
+            <a:spLocks xmlns:a="http://schemas.openxmlformats.org/drawingml/2006/main" noGrp="1"/>
+          </p:cNvSpPr>
+          <p:nvPr/>
+        </p:nvSpPr>
+        <p:spPr>
+          <a:xfrm xmlns:a="http://schemas.openxmlformats.org/drawingml/2006/main">
+            <a:off x="400050" y="228600"/>
+            <a:ext cx="2857500" cy="228600"/>
+          </a:xfrm>
+          <a:prstGeom xmlns:a="http://schemas.openxmlformats.org/drawingml/2006/main" prst="rect">
+            <a:avLst/>
+          </a:prstGeom>
+          <a:noFill xmlns:a="http://schemas.openxmlformats.org/drawingml/2006/main"/>
+          <a:ln xmlns:a="http://schemas.openxmlformats.org/drawingml/2006/main" w="0">
+            <a:noFill/>
+            <a:prstDash val="solid"/>
+          </a:ln>
+        </p:spPr>
+        <p:txBody>
+          <a:bodyPr xmlns:a="http://schemas.openxmlformats.org/drawingml/2006/main" anchor="t"/>
+          <a:lstStyle xmlns:a="http://schemas.openxmlformats.org/drawingml/2006/main"/>
+          <a:p xmlns:a="http://schemas.openxmlformats.org/drawingml/2006/main">
+            <a:pPr algn="l">
+              <a:buNone/>
+              <a:defRPr sz="1200" b="1">
+                <a:solidFill>
+                  <a:srgbClr val="3D8DFF"/>
+                </a:solidFill>
+                <a:latin typeface="Arial"/>
+                <a:ea typeface="Arial"/>
+                <a:cs typeface="Arial"/>
+              </a:defRPr>
+            </a:pPr>
+            <a:r>
+              <a:rPr sz="1200" b="1">
+                <a:solidFill>
+                  <a:srgbClr val="3D8DFF"/>
+                </a:solidFill>
+                <a:latin typeface="Arial"/>
+                <a:ea typeface="Arial"/>
+                <a:cs typeface="Arial"/>
+              </a:rPr>
+              <a:t>LIT-MOM-03.4</a:t>
+            </a:r>
+          </a:p>
+        </p:txBody>
+      </p:sp>
+      <p:sp>
+        <p:nvSpPr>
+          <p:cNvPr id="2" name="">
+            <a:extLst xmlns:a="http://schemas.openxmlformats.org/drawingml/2006/main">
+              <a:ext uri="{FF2B5EF4-FFF2-40B4-BE49-F238E27FC236}">
+                <a16:creationId xmlns:a16="http://schemas.microsoft.com/office/drawing/2014/main" id="{3F51F0D8-19C8-434E-90A3-9CD80434373E}"/>
+              </a:ext>
+            </a:extLst>
+          </p:cNvPr>
+          <p:cNvSpPr>
+            <a:spLocks xmlns:a="http://schemas.openxmlformats.org/drawingml/2006/main" noGrp="1"/>
+          </p:cNvSpPr>
+          <p:nvPr/>
+        </p:nvSpPr>
+        <p:spPr>
+          <a:xfrm xmlns:a="http://schemas.openxmlformats.org/drawingml/2006/main">
+            <a:off x="400050" y="476250"/>
+            <a:ext cx="11049000" cy="819150"/>
+          </a:xfrm>
+          <a:prstGeom xmlns:a="http://schemas.openxmlformats.org/drawingml/2006/main" prst="rect">
+            <a:avLst/>
+          </a:prstGeom>
+          <a:noFill xmlns:a="http://schemas.openxmlformats.org/drawingml/2006/main"/>
+          <a:ln xmlns:a="http://schemas.openxmlformats.org/drawingml/2006/main" w="0">
+            <a:noFill/>
+            <a:prstDash val="solid"/>
+          </a:ln>
+        </p:spPr>
+        <p:txBody>
+          <a:bodyPr xmlns:a="http://schemas.openxmlformats.org/drawingml/2006/main" anchor="t"/>
+          <a:lstStyle xmlns:a="http://schemas.openxmlformats.org/drawingml/2006/main"/>
+          <a:p xmlns:a="http://schemas.openxmlformats.org/drawingml/2006/main">
+            <a:pPr algn="l">
+              <a:buNone/>
+              <a:defRPr sz="2700" b="1">
+                <a:solidFill>
+                  <a:srgbClr val="101820"/>
+                </a:solidFill>
+                <a:latin typeface="Arial"/>
+                <a:ea typeface="Arial"/>
+                <a:cs typeface="Arial"/>
+              </a:defRPr>
+            </a:pPr>
+            <a:r>
+              <a:rPr sz="2700" b="1">
+                <a:solidFill>
+                  <a:srgbClr val="101820"/>
+                </a:solidFill>
+                <a:latin typeface="Arial"/>
+                <a:ea typeface="Arial"/>
+                <a:cs typeface="Arial"/>
+              </a:rPr>
+              <a:t>A defensible universe must keep the stocks that disappeared</a:t>
+            </a:r>
+          </a:p>
+        </p:txBody>
+      </p:sp>
+      <p:sp>
+        <p:nvSpPr>
+          <p:cNvPr id="3" name="">
+            <a:extLst xmlns:a="http://schemas.openxmlformats.org/drawingml/2006/main">
+              <a:ext uri="{FF2B5EF4-FFF2-40B4-BE49-F238E27FC236}">
+                <a16:creationId xmlns:a16="http://schemas.microsoft.com/office/drawing/2014/main" id="{9C82D8E5-4706-4E1C-8A9C-3CB6FFDCDE1D}"/>
+              </a:ext>
+            </a:extLst>
+          </p:cNvPr>
+          <p:cNvSpPr>
+            <a:spLocks xmlns:a="http://schemas.openxmlformats.org/drawingml/2006/main" noGrp="1"/>
+          </p:cNvSpPr>
+          <p:nvPr/>
+        </p:nvSpPr>
+        <p:spPr>
+          <a:xfrm xmlns:a="http://schemas.openxmlformats.org/drawingml/2006/main">
+            <a:off x="400050" y="1428750"/>
+            <a:ext cx="11391900" cy="0"/>
+          </a:xfrm>
+          <a:prstGeom xmlns:a="http://schemas.openxmlformats.org/drawingml/2006/main" prst="line">
+            <a:avLst/>
+          </a:prstGeom>
+          <a:noFill xmlns:a="http://schemas.openxmlformats.org/drawingml/2006/main"/>
+          <a:ln xmlns:a="http://schemas.openxmlformats.org/drawingml/2006/main" w="9525">
+            <a:solidFill>
+              <a:srgbClr val="B8BCC4"/>
+            </a:solidFill>
+            <a:prstDash val="solid"/>
+          </a:ln>
+        </p:spPr>
+      </p:sp>
+      <p:sp>
+        <p:nvSpPr>
+          <p:cNvPr id="4" name="">
+            <a:extLst xmlns:a="http://schemas.openxmlformats.org/drawingml/2006/main">
+              <a:ext uri="{FF2B5EF4-FFF2-40B4-BE49-F238E27FC236}">
+                <a16:creationId xmlns:a16="http://schemas.microsoft.com/office/drawing/2014/main" id="{8452295D-1E22-4BA1-B87C-35FC318DE242}"/>
+              </a:ext>
+            </a:extLst>
+          </p:cNvPr>
+          <p:cNvSpPr>
+            <a:spLocks xmlns:a="http://schemas.openxmlformats.org/drawingml/2006/main" noGrp="1"/>
+          </p:cNvSpPr>
+          <p:nvPr/>
+        </p:nvSpPr>
+        <p:spPr>
+          <a:xfrm xmlns:a="http://schemas.openxmlformats.org/drawingml/2006/main">
+            <a:off x="11163300" y="6362700"/>
+            <a:ext cx="609600" cy="228600"/>
+          </a:xfrm>
+          <a:prstGeom xmlns:a="http://schemas.openxmlformats.org/drawingml/2006/main" prst="rect">
+            <a:avLst/>
+          </a:prstGeom>
+          <a:noFill xmlns:a="http://schemas.openxmlformats.org/drawingml/2006/main"/>
+          <a:ln xmlns:a="http://schemas.openxmlformats.org/drawingml/2006/main" w="0">
+            <a:noFill/>
+            <a:prstDash val="solid"/>
+          </a:ln>
+        </p:spPr>
+        <p:txBody>
+          <a:bodyPr xmlns:a="http://schemas.openxmlformats.org/drawingml/2006/main" anchor="t"/>
+          <a:lstStyle xmlns:a="http://schemas.openxmlformats.org/drawingml/2006/main"/>
+          <a:p xmlns:a="http://schemas.openxmlformats.org/drawingml/2006/main">
+            <a:pPr algn="r">
+              <a:buNone/>
+              <a:defRPr sz="1200" b="0">
+                <a:solidFill>
+                  <a:srgbClr val="52616B"/>
+                </a:solidFill>
+                <a:latin typeface="Arial"/>
+                <a:ea typeface="Arial"/>
+                <a:cs typeface="Arial"/>
+              </a:defRPr>
+            </a:pPr>
+            <a:r>
+              <a:rPr sz="1200" b="0">
+                <a:solidFill>
+                  <a:srgbClr val="52616B"/>
+                </a:solidFill>
+                <a:latin typeface="Arial"/>
+                <a:ea typeface="Arial"/>
+                <a:cs typeface="Arial"/>
+              </a:rPr>
+              <a:t>37</a:t>
+            </a:r>
+          </a:p>
+        </p:txBody>
+      </p:sp>
+      <p:sp>
+        <p:nvSpPr>
+          <p:cNvPr id="5" name="">
+            <a:extLst xmlns:a="http://schemas.openxmlformats.org/drawingml/2006/main">
+              <a:ext uri="{FF2B5EF4-FFF2-40B4-BE49-F238E27FC236}">
+                <a16:creationId xmlns:a16="http://schemas.microsoft.com/office/drawing/2014/main" id="{EA84F263-DCB7-4ECF-AC3C-B71C047C289B}"/>
+              </a:ext>
+            </a:extLst>
+          </p:cNvPr>
+          <p:cNvSpPr>
+            <a:spLocks xmlns:a="http://schemas.openxmlformats.org/drawingml/2006/main" noGrp="1"/>
+          </p:cNvSpPr>
+          <p:nvPr/>
+        </p:nvSpPr>
+        <p:spPr>
+          <a:xfrm xmlns:a="http://schemas.openxmlformats.org/drawingml/2006/main">
+            <a:off x="628650" y="1790700"/>
+            <a:ext cx="4953000" cy="3257550"/>
+          </a:xfrm>
+          <a:prstGeom xmlns:a="http://schemas.openxmlformats.org/drawingml/2006/main" prst="rect">
+            <a:avLst/>
+          </a:prstGeom>
+          <a:solidFill xmlns:a="http://schemas.openxmlformats.org/drawingml/2006/main">
+            <a:srgbClr val="E6F2EC"/>
+          </a:solidFill>
+          <a:ln xmlns:a="http://schemas.openxmlformats.org/drawingml/2006/main" w="9525">
+            <a:solidFill>
+              <a:srgbClr val="2E7D5B"/>
+            </a:solidFill>
+            <a:prstDash val="solid"/>
+          </a:ln>
+        </p:spPr>
+      </p:sp>
+      <p:sp>
+        <p:nvSpPr>
+          <p:cNvPr id="6" name="">
+            <a:extLst xmlns:a="http://schemas.openxmlformats.org/drawingml/2006/main">
+              <a:ext uri="{FF2B5EF4-FFF2-40B4-BE49-F238E27FC236}">
+                <a16:creationId xmlns:a16="http://schemas.microsoft.com/office/drawing/2014/main" id="{2535A567-86A3-447F-ABF8-3D7CC1CFCEE3}"/>
+              </a:ext>
+            </a:extLst>
+          </p:cNvPr>
+          <p:cNvSpPr>
+            <a:spLocks xmlns:a="http://schemas.openxmlformats.org/drawingml/2006/main" noGrp="1"/>
+          </p:cNvSpPr>
+          <p:nvPr/>
+        </p:nvSpPr>
+        <p:spPr>
+          <a:xfrm xmlns:a="http://schemas.openxmlformats.org/drawingml/2006/main">
+            <a:off x="971550" y="2114550"/>
+            <a:ext cx="3238500" cy="247650"/>
+          </a:xfrm>
+          <a:prstGeom xmlns:a="http://schemas.openxmlformats.org/drawingml/2006/main" prst="rect">
+            <a:avLst/>
+          </a:prstGeom>
+          <a:noFill xmlns:a="http://schemas.openxmlformats.org/drawingml/2006/main"/>
+          <a:ln xmlns:a="http://schemas.openxmlformats.org/drawingml/2006/main" w="0">
+            <a:noFill/>
+            <a:prstDash val="solid"/>
+          </a:ln>
+        </p:spPr>
+        <p:txBody>
+          <a:bodyPr xmlns:a="http://schemas.openxmlformats.org/drawingml/2006/main" anchor="t"/>
+          <a:lstStyle xmlns:a="http://schemas.openxmlformats.org/drawingml/2006/main"/>
+          <a:p xmlns:a="http://schemas.openxmlformats.org/drawingml/2006/main">
+            <a:pPr algn="l">
+              <a:buNone/>
+              <a:defRPr sz="1275" b="1">
+                <a:solidFill>
+                  <a:srgbClr val="2E7D5B"/>
+                </a:solidFill>
+                <a:latin typeface="Arial"/>
+                <a:ea typeface="Arial"/>
+                <a:cs typeface="Arial"/>
+              </a:defRPr>
+            </a:pPr>
+            <a:r>
+              <a:rPr sz="1275" b="1">
+                <a:solidFill>
+                  <a:srgbClr val="2E7D5B"/>
+                </a:solidFill>
+                <a:latin typeface="Arial"/>
+                <a:ea typeface="Arial"/>
+                <a:cs typeface="Arial"/>
+              </a:rPr>
+              <a:t>FROZEN COHORT</a:t>
+            </a:r>
+          </a:p>
+        </p:txBody>
+      </p:sp>
+      <p:sp>
+        <p:nvSpPr>
+          <p:cNvPr id="7" name="">
+            <a:extLst xmlns:a="http://schemas.openxmlformats.org/drawingml/2006/main">
+              <a:ext uri="{FF2B5EF4-FFF2-40B4-BE49-F238E27FC236}">
+                <a16:creationId xmlns:a16="http://schemas.microsoft.com/office/drawing/2014/main" id="{B0EF5351-B0F9-4A7A-9512-D9DE9A581079}"/>
+              </a:ext>
+            </a:extLst>
+          </p:cNvPr>
+          <p:cNvSpPr>
+            <a:spLocks xmlns:a="http://schemas.openxmlformats.org/drawingml/2006/main" noGrp="1"/>
+          </p:cNvSpPr>
+          <p:nvPr/>
+        </p:nvSpPr>
+        <p:spPr>
+          <a:xfrm xmlns:a="http://schemas.openxmlformats.org/drawingml/2006/main">
+            <a:off x="971550" y="2667000"/>
+            <a:ext cx="1809750" cy="876300"/>
+          </a:xfrm>
+          <a:prstGeom xmlns:a="http://schemas.openxmlformats.org/drawingml/2006/main" prst="rect">
+            <a:avLst/>
+          </a:prstGeom>
+          <a:noFill xmlns:a="http://schemas.openxmlformats.org/drawingml/2006/main"/>
+          <a:ln xmlns:a="http://schemas.openxmlformats.org/drawingml/2006/main" w="0">
+            <a:noFill/>
+            <a:prstDash val="solid"/>
+          </a:ln>
+        </p:spPr>
+        <p:txBody>
+          <a:bodyPr xmlns:a="http://schemas.openxmlformats.org/drawingml/2006/main" anchor="t"/>
+          <a:lstStyle xmlns:a="http://schemas.openxmlformats.org/drawingml/2006/main"/>
+          <a:p xmlns:a="http://schemas.openxmlformats.org/drawingml/2006/main">
+            <a:pPr algn="l">
+              <a:buNone/>
+              <a:defRPr sz="5100" b="1">
+                <a:solidFill>
+                  <a:srgbClr val="2E7D5B"/>
+                </a:solidFill>
+                <a:latin typeface="Arial"/>
+                <a:ea typeface="Arial"/>
+                <a:cs typeface="Arial"/>
+              </a:defRPr>
+            </a:pPr>
+            <a:r>
+              <a:rPr sz="5100" b="1">
+                <a:solidFill>
+                  <a:srgbClr val="2E7D5B"/>
+                </a:solidFill>
+                <a:latin typeface="Arial"/>
+                <a:ea typeface="Arial"/>
+                <a:cs typeface="Arial"/>
+              </a:rPr>
+              <a:t>481</a:t>
+            </a:r>
+          </a:p>
+        </p:txBody>
+      </p:sp>
+      <p:sp>
+        <p:nvSpPr>
+          <p:cNvPr id="8" name="">
+            <a:extLst xmlns:a="http://schemas.openxmlformats.org/drawingml/2006/main">
+              <a:ext uri="{FF2B5EF4-FFF2-40B4-BE49-F238E27FC236}">
+                <a16:creationId xmlns:a16="http://schemas.microsoft.com/office/drawing/2014/main" id="{845D259F-CD58-4A41-8E58-6185E679F682}"/>
+              </a:ext>
+            </a:extLst>
+          </p:cNvPr>
+          <p:cNvSpPr>
+            <a:spLocks xmlns:a="http://schemas.openxmlformats.org/drawingml/2006/main" noGrp="1"/>
+          </p:cNvSpPr>
+          <p:nvPr/>
+        </p:nvSpPr>
+        <p:spPr>
+          <a:xfrm xmlns:a="http://schemas.openxmlformats.org/drawingml/2006/main">
+            <a:off x="2800350" y="2914650"/>
+            <a:ext cx="2324100" cy="457200"/>
+          </a:xfrm>
+          <a:prstGeom xmlns:a="http://schemas.openxmlformats.org/drawingml/2006/main" prst="rect">
+            <a:avLst/>
+          </a:prstGeom>
+          <a:noFill xmlns:a="http://schemas.openxmlformats.org/drawingml/2006/main"/>
+          <a:ln xmlns:a="http://schemas.openxmlformats.org/drawingml/2006/main" w="0">
+            <a:noFill/>
+            <a:prstDash val="solid"/>
+          </a:ln>
+        </p:spPr>
+        <p:txBody>
+          <a:bodyPr xmlns:a="http://schemas.openxmlformats.org/drawingml/2006/main" anchor="t"/>
+          <a:lstStyle xmlns:a="http://schemas.openxmlformats.org/drawingml/2006/main"/>
+          <a:p xmlns:a="http://schemas.openxmlformats.org/drawingml/2006/main">
+            <a:pPr algn="l">
+              <a:buNone/>
+              <a:defRPr sz="2100" b="1">
+                <a:solidFill>
+                  <a:srgbClr val="101820"/>
+                </a:solidFill>
+                <a:latin typeface="Arial"/>
+                <a:ea typeface="Arial"/>
+                <a:cs typeface="Arial"/>
+              </a:defRPr>
+            </a:pPr>
+            <a:r>
+              <a:rPr sz="2100" b="1">
+                <a:solidFill>
+                  <a:srgbClr val="101820"/>
+                </a:solidFill>
+                <a:latin typeface="Arial"/>
+                <a:ea typeface="Arial"/>
+                <a:cs typeface="Arial"/>
+              </a:rPr>
+              <a:t>stocks known before test</a:t>
+            </a:r>
+          </a:p>
+        </p:txBody>
+      </p:sp>
+      <p:sp>
+        <p:nvSpPr>
+          <p:cNvPr id="9" name="">
+            <a:extLst xmlns:a="http://schemas.openxmlformats.org/drawingml/2006/main">
+              <a:ext uri="{FF2B5EF4-FFF2-40B4-BE49-F238E27FC236}">
+                <a16:creationId xmlns:a16="http://schemas.microsoft.com/office/drawing/2014/main" id="{2B561A00-F2ED-46FB-9D93-63A3E1AD5803}"/>
+              </a:ext>
+            </a:extLst>
+          </p:cNvPr>
+          <p:cNvSpPr>
+            <a:spLocks xmlns:a="http://schemas.openxmlformats.org/drawingml/2006/main" noGrp="1"/>
+          </p:cNvSpPr>
+          <p:nvPr/>
+        </p:nvSpPr>
+        <p:spPr>
+          <a:xfrm xmlns:a="http://schemas.openxmlformats.org/drawingml/2006/main">
+            <a:off x="971550" y="3810000"/>
+            <a:ext cx="4000500" cy="933450"/>
+          </a:xfrm>
+          <a:prstGeom xmlns:a="http://schemas.openxmlformats.org/drawingml/2006/main" prst="rect">
+            <a:avLst/>
+          </a:prstGeom>
+          <a:noFill xmlns:a="http://schemas.openxmlformats.org/drawingml/2006/main"/>
+          <a:ln xmlns:a="http://schemas.openxmlformats.org/drawingml/2006/main" w="0">
+            <a:noFill/>
+            <a:prstDash val="solid"/>
+          </a:ln>
+        </p:spPr>
+        <p:txBody>
+          <a:bodyPr xmlns:a="http://schemas.openxmlformats.org/drawingml/2006/main" anchor="t"/>
+          <a:lstStyle xmlns:a="http://schemas.openxmlformats.org/drawingml/2006/main"/>
+          <a:p xmlns:a="http://schemas.openxmlformats.org/drawingml/2006/main">
+            <a:pPr algn="l">
+              <a:buNone/>
+              <a:defRPr sz="1800" b="0">
+                <a:solidFill>
+                  <a:srgbClr val="52616B"/>
+                </a:solidFill>
+                <a:latin typeface="Arial"/>
+                <a:ea typeface="Arial"/>
+                <a:cs typeface="Arial"/>
+              </a:defRPr>
+            </a:pPr>
+            <a:r>
+              <a:rPr sz="1800" b="0">
+                <a:solidFill>
+                  <a:srgbClr val="52616B"/>
+                </a:solidFill>
+                <a:latin typeface="Arial"/>
+                <a:ea typeface="Arial"/>
+                <a:cs typeface="Arial"/>
+              </a:rPr>
+              <a:t>S&amp;P 500 holdings · 2020-09-30</a:t>
+            </a:r>
+          </a:p>
+          <a:p xmlns:a="http://schemas.openxmlformats.org/drawingml/2006/main">
+            <a:pPr algn="l">
+              <a:buNone/>
+              <a:defRPr sz="1800" b="0">
+                <a:solidFill>
+                  <a:srgbClr val="52616B"/>
+                </a:solidFill>
+                <a:latin typeface="Arial"/>
+                <a:ea typeface="Arial"/>
+                <a:cs typeface="Arial"/>
+              </a:defRPr>
+            </a:pPr>
+            <a:r>
+              <a:rPr sz="1800" b="0">
+                <a:solidFill>
+                  <a:srgbClr val="52616B"/>
+                </a:solidFill>
+                <a:latin typeface="Arial"/>
+                <a:ea typeface="Arial"/>
+                <a:cs typeface="Arial"/>
+              </a:rPr>
+              <a:t>11 contemporaneous sectors</a:t>
+            </a:r>
+          </a:p>
+          <a:p xmlns:a="http://schemas.openxmlformats.org/drawingml/2006/main">
+            <a:pPr algn="l">
+              <a:buNone/>
+              <a:defRPr sz="1800" b="0">
+                <a:solidFill>
+                  <a:srgbClr val="52616B"/>
+                </a:solidFill>
+                <a:latin typeface="Arial"/>
+                <a:ea typeface="Arial"/>
+                <a:cs typeface="Arial"/>
+              </a:defRPr>
+            </a:pPr>
+            <a:r>
+              <a:rPr sz="1800" b="0">
+                <a:solidFill>
+                  <a:srgbClr val="52616B"/>
+                </a:solidFill>
+                <a:latin typeface="Arial"/>
+                <a:ea typeface="Arial"/>
+                <a:cs typeface="Arial"/>
+              </a:rPr>
+              <a:t>Evaluation begins in 2021</a:t>
+            </a:r>
+          </a:p>
+        </p:txBody>
+      </p:sp>
+      <p:sp>
+        <p:nvSpPr>
+          <p:cNvPr id="10" name="">
+            <a:extLst xmlns:a="http://schemas.openxmlformats.org/drawingml/2006/main">
+              <a:ext uri="{FF2B5EF4-FFF2-40B4-BE49-F238E27FC236}">
+                <a16:creationId xmlns:a16="http://schemas.microsoft.com/office/drawing/2014/main" id="{D80FDF2D-786A-4D34-8C53-03F5531FEFAA}"/>
+              </a:ext>
+            </a:extLst>
+          </p:cNvPr>
+          <p:cNvSpPr>
+            <a:spLocks xmlns:a="http://schemas.openxmlformats.org/drawingml/2006/main" noGrp="1"/>
+          </p:cNvSpPr>
+          <p:nvPr/>
+        </p:nvSpPr>
+        <p:spPr>
+          <a:xfrm xmlns:a="http://schemas.openxmlformats.org/drawingml/2006/main">
+            <a:off x="6191250" y="1790700"/>
+            <a:ext cx="4953000" cy="3257550"/>
+          </a:xfrm>
+          <a:prstGeom xmlns:a="http://schemas.openxmlformats.org/drawingml/2006/main" prst="rect">
+            <a:avLst/>
+          </a:prstGeom>
+          <a:solidFill xmlns:a="http://schemas.openxmlformats.org/drawingml/2006/main">
+            <a:srgbClr val="F7E7E2"/>
+          </a:solidFill>
+          <a:ln xmlns:a="http://schemas.openxmlformats.org/drawingml/2006/main" w="9525">
+            <a:solidFill>
+              <a:srgbClr val="C8553D"/>
+            </a:solidFill>
+            <a:prstDash val="solid"/>
+          </a:ln>
+        </p:spPr>
+      </p:sp>
+      <p:sp>
+        <p:nvSpPr>
+          <p:cNvPr id="11" name="">
+            <a:extLst xmlns:a="http://schemas.openxmlformats.org/drawingml/2006/main">
+              <a:ext uri="{FF2B5EF4-FFF2-40B4-BE49-F238E27FC236}">
+                <a16:creationId xmlns:a16="http://schemas.microsoft.com/office/drawing/2014/main" id="{E4150C52-9BF1-4205-AAE7-8463BBDA6FD9}"/>
+              </a:ext>
+            </a:extLst>
+          </p:cNvPr>
+          <p:cNvSpPr>
+            <a:spLocks xmlns:a="http://schemas.openxmlformats.org/drawingml/2006/main" noGrp="1"/>
+          </p:cNvSpPr>
+          <p:nvPr/>
+        </p:nvSpPr>
+        <p:spPr>
+          <a:xfrm xmlns:a="http://schemas.openxmlformats.org/drawingml/2006/main">
+            <a:off x="6534150" y="2114550"/>
+            <a:ext cx="3714750" cy="247650"/>
+          </a:xfrm>
+          <a:prstGeom xmlns:a="http://schemas.openxmlformats.org/drawingml/2006/main" prst="rect">
+            <a:avLst/>
+          </a:prstGeom>
+          <a:noFill xmlns:a="http://schemas.openxmlformats.org/drawingml/2006/main"/>
+          <a:ln xmlns:a="http://schemas.openxmlformats.org/drawingml/2006/main" w="0">
+            <a:noFill/>
+            <a:prstDash val="solid"/>
+          </a:ln>
+        </p:spPr>
+        <p:txBody>
+          <a:bodyPr xmlns:a="http://schemas.openxmlformats.org/drawingml/2006/main" anchor="t"/>
+          <a:lstStyle xmlns:a="http://schemas.openxmlformats.org/drawingml/2006/main"/>
+          <a:p xmlns:a="http://schemas.openxmlformats.org/drawingml/2006/main">
+            <a:pPr algn="l">
+              <a:buNone/>
+              <a:defRPr sz="1275" b="1">
+                <a:solidFill>
+                  <a:srgbClr val="C8553D"/>
+                </a:solidFill>
+                <a:latin typeface="Arial"/>
+                <a:ea typeface="Arial"/>
+                <a:cs typeface="Arial"/>
+              </a:defRPr>
+            </a:pPr>
+            <a:r>
+              <a:rPr sz="1275" b="1">
+                <a:solidFill>
+                  <a:srgbClr val="C8553D"/>
+                </a:solidFill>
+                <a:latin typeface="Arial"/>
+                <a:ea typeface="Arial"/>
+                <a:cs typeface="Arial"/>
+              </a:rPr>
+              <a:t>IDENTITY RISK</a:t>
+            </a:r>
+          </a:p>
+        </p:txBody>
+      </p:sp>
+      <p:sp>
+        <p:nvSpPr>
+          <p:cNvPr id="12" name="">
+            <a:extLst xmlns:a="http://schemas.openxmlformats.org/drawingml/2006/main">
+              <a:ext uri="{FF2B5EF4-FFF2-40B4-BE49-F238E27FC236}">
+                <a16:creationId xmlns:a16="http://schemas.microsoft.com/office/drawing/2014/main" id="{0606DC9E-2BF6-4A3D-8AA4-5B9D11332D44}"/>
+              </a:ext>
+            </a:extLst>
+          </p:cNvPr>
+          <p:cNvSpPr>
+            <a:spLocks xmlns:a="http://schemas.openxmlformats.org/drawingml/2006/main" noGrp="1"/>
+          </p:cNvSpPr>
+          <p:nvPr/>
+        </p:nvSpPr>
+        <p:spPr>
+          <a:xfrm xmlns:a="http://schemas.openxmlformats.org/drawingml/2006/main">
+            <a:off x="6534150" y="2724150"/>
+            <a:ext cx="4000500" cy="704850"/>
+          </a:xfrm>
+          <a:prstGeom xmlns:a="http://schemas.openxmlformats.org/drawingml/2006/main" prst="rect">
+            <a:avLst/>
+          </a:prstGeom>
+          <a:noFill xmlns:a="http://schemas.openxmlformats.org/drawingml/2006/main"/>
+          <a:ln xmlns:a="http://schemas.openxmlformats.org/drawingml/2006/main" w="0">
+            <a:noFill/>
+            <a:prstDash val="solid"/>
+          </a:ln>
+        </p:spPr>
+        <p:txBody>
+          <a:bodyPr xmlns:a="http://schemas.openxmlformats.org/drawingml/2006/main" anchor="t"/>
+          <a:lstStyle xmlns:a="http://schemas.openxmlformats.org/drawingml/2006/main"/>
+          <a:p xmlns:a="http://schemas.openxmlformats.org/drawingml/2006/main">
+            <a:pPr algn="l">
+              <a:buNone/>
+              <a:defRPr sz="4050" b="1">
+                <a:solidFill>
+                  <a:srgbClr val="C8553D"/>
+                </a:solidFill>
+                <a:latin typeface="Arial"/>
+                <a:ea typeface="Arial"/>
+                <a:cs typeface="Arial"/>
+              </a:defRPr>
+            </a:pPr>
+            <a:r>
+              <a:rPr sz="4050" b="1">
+                <a:solidFill>
+                  <a:srgbClr val="C8553D"/>
+                </a:solidFill>
+                <a:latin typeface="Arial"/>
+                <a:ea typeface="Arial"/>
+                <a:cs typeface="Arial"/>
+              </a:rPr>
+              <a:t>REAL</a:t>
+            </a:r>
+          </a:p>
+        </p:txBody>
+      </p:sp>
+      <p:sp>
+        <p:nvSpPr>
+          <p:cNvPr id="13" name="">
+            <a:extLst xmlns:a="http://schemas.openxmlformats.org/drawingml/2006/main">
+              <a:ext uri="{FF2B5EF4-FFF2-40B4-BE49-F238E27FC236}">
+                <a16:creationId xmlns:a16="http://schemas.microsoft.com/office/drawing/2014/main" id="{03283D39-FBEA-479D-88E1-46F1F4C330B5}"/>
+              </a:ext>
+            </a:extLst>
+          </p:cNvPr>
+          <p:cNvSpPr>
+            <a:spLocks xmlns:a="http://schemas.openxmlformats.org/drawingml/2006/main" noGrp="1"/>
+          </p:cNvSpPr>
+          <p:nvPr/>
+        </p:nvSpPr>
+        <p:spPr>
+          <a:xfrm xmlns:a="http://schemas.openxmlformats.org/drawingml/2006/main">
+            <a:off x="6534150" y="3429000"/>
+            <a:ext cx="4000500" cy="457200"/>
+          </a:xfrm>
+          <a:prstGeom xmlns:a="http://schemas.openxmlformats.org/drawingml/2006/main" prst="rect">
+            <a:avLst/>
+          </a:prstGeom>
+          <a:noFill xmlns:a="http://schemas.openxmlformats.org/drawingml/2006/main"/>
+          <a:ln xmlns:a="http://schemas.openxmlformats.org/drawingml/2006/main" w="0">
+            <a:noFill/>
+            <a:prstDash val="solid"/>
+          </a:ln>
+        </p:spPr>
+        <p:txBody>
+          <a:bodyPr xmlns:a="http://schemas.openxmlformats.org/drawingml/2006/main" anchor="t"/>
+          <a:lstStyle xmlns:a="http://schemas.openxmlformats.org/drawingml/2006/main"/>
+          <a:p xmlns:a="http://schemas.openxmlformats.org/drawingml/2006/main">
+            <a:pPr algn="l">
+              <a:buNone/>
+              <a:defRPr sz="2175" b="1">
+                <a:solidFill>
+                  <a:srgbClr val="101820"/>
+                </a:solidFill>
+                <a:latin typeface="Arial"/>
+                <a:ea typeface="Arial"/>
+                <a:cs typeface="Arial"/>
+              </a:defRPr>
+            </a:pPr>
+            <a:r>
+              <a:rPr sz="2175" b="1">
+                <a:solidFill>
+                  <a:srgbClr val="101820"/>
+                </a:solidFill>
+                <a:latin typeface="Arial"/>
+                <a:ea typeface="Arial"/>
+                <a:cs typeface="Arial"/>
+              </a:rPr>
+              <a:t>departures stay in evidence</a:t>
+            </a:r>
+          </a:p>
+        </p:txBody>
+      </p:sp>
+      <p:sp>
+        <p:nvSpPr>
+          <p:cNvPr id="14" name="">
+            <a:extLst xmlns:a="http://schemas.openxmlformats.org/drawingml/2006/main">
+              <a:ext uri="{FF2B5EF4-FFF2-40B4-BE49-F238E27FC236}">
+                <a16:creationId xmlns:a16="http://schemas.microsoft.com/office/drawing/2014/main" id="{DB7B3C09-EAFE-41D8-880B-D0BE56096F33}"/>
+              </a:ext>
+            </a:extLst>
+          </p:cNvPr>
+          <p:cNvSpPr>
+            <a:spLocks xmlns:a="http://schemas.openxmlformats.org/drawingml/2006/main" noGrp="1"/>
+          </p:cNvSpPr>
+          <p:nvPr/>
+        </p:nvSpPr>
+        <p:spPr>
+          <a:xfrm xmlns:a="http://schemas.openxmlformats.org/drawingml/2006/main">
+            <a:off x="6534150" y="4000500"/>
+            <a:ext cx="4000500" cy="876300"/>
+          </a:xfrm>
+          <a:prstGeom xmlns:a="http://schemas.openxmlformats.org/drawingml/2006/main" prst="rect">
+            <a:avLst/>
+          </a:prstGeom>
+          <a:noFill xmlns:a="http://schemas.openxmlformats.org/drawingml/2006/main"/>
+          <a:ln xmlns:a="http://schemas.openxmlformats.org/drawingml/2006/main" w="0">
+            <a:noFill/>
+            <a:prstDash val="solid"/>
+          </a:ln>
+        </p:spPr>
+        <p:txBody>
+          <a:bodyPr xmlns:a="http://schemas.openxmlformats.org/drawingml/2006/main" anchor="t"/>
+          <a:lstStyle xmlns:a="http://schemas.openxmlformats.org/drawingml/2006/main"/>
+          <a:p xmlns:a="http://schemas.openxmlformats.org/drawingml/2006/main">
+            <a:pPr algn="l">
+              <a:buNone/>
+              <a:defRPr sz="1500" b="0">
+                <a:solidFill>
+                  <a:srgbClr val="52616B"/>
+                </a:solidFill>
+                <a:latin typeface="Arial"/>
+                <a:ea typeface="Arial"/>
+                <a:cs typeface="Arial"/>
+              </a:defRPr>
+            </a:pPr>
+            <a:r>
+              <a:rPr sz="1500" b="0">
+                <a:solidFill>
+                  <a:srgbClr val="52616B"/>
+                </a:solidFill>
+                <a:latin typeface="Arial"/>
+                <a:ea typeface="Arial"/>
+                <a:cs typeface="Arial"/>
+              </a:rPr>
+              <a:t>No survivor backfill</a:t>
+            </a:r>
+          </a:p>
+          <a:p xmlns:a="http://schemas.openxmlformats.org/drawingml/2006/main">
+            <a:pPr algn="l">
+              <a:buNone/>
+              <a:defRPr sz="1500" b="0">
+                <a:solidFill>
+                  <a:srgbClr val="52616B"/>
+                </a:solidFill>
+                <a:latin typeface="Arial"/>
+                <a:ea typeface="Arial"/>
+                <a:cs typeface="Arial"/>
+              </a:defRPr>
+            </a:pPr>
+            <a:r>
+              <a:rPr sz="1500" b="0">
+                <a:solidFill>
+                  <a:srgbClr val="52616B"/>
+                </a:solidFill>
+                <a:latin typeface="Arial"/>
+                <a:ea typeface="Arial"/>
+                <a:cs typeface="Arial"/>
+              </a:rPr>
+              <a:t>No inferred membership</a:t>
+            </a:r>
+          </a:p>
+          <a:p xmlns:a="http://schemas.openxmlformats.org/drawingml/2006/main">
+            <a:pPr algn="l">
+              <a:buNone/>
+              <a:defRPr sz="1500" b="0">
+                <a:solidFill>
+                  <a:srgbClr val="52616B"/>
+                </a:solidFill>
+                <a:latin typeface="Arial"/>
+                <a:ea typeface="Arial"/>
+                <a:cs typeface="Arial"/>
+              </a:defRPr>
+            </a:pPr>
+            <a:r>
+              <a:rPr sz="1500" b="0">
+                <a:solidFill>
+                  <a:srgbClr val="52616B"/>
+                </a:solidFill>
+                <a:latin typeface="Arial"/>
+                <a:ea typeface="Arial"/>
+                <a:cs typeface="Arial"/>
+              </a:rPr>
+              <a:t>Terminal values bounded</a:t>
+            </a:r>
+          </a:p>
+        </p:txBody>
+      </p:sp>
+      <p:sp>
+        <p:nvSpPr>
+          <p:cNvPr id="15" name="">
+            <a:extLst xmlns:a="http://schemas.openxmlformats.org/drawingml/2006/main">
+              <a:ext uri="{FF2B5EF4-FFF2-40B4-BE49-F238E27FC236}">
+                <a16:creationId xmlns:a16="http://schemas.microsoft.com/office/drawing/2014/main" id="{0DF58B95-FF34-44E3-BD69-0887709C26B4}"/>
+              </a:ext>
+            </a:extLst>
+          </p:cNvPr>
+          <p:cNvSpPr>
+            <a:spLocks xmlns:a="http://schemas.openxmlformats.org/drawingml/2006/main" noGrp="1"/>
+          </p:cNvSpPr>
+          <p:nvPr/>
+        </p:nvSpPr>
+        <p:spPr>
+          <a:xfrm xmlns:a="http://schemas.openxmlformats.org/drawingml/2006/main">
+            <a:off x="2133600" y="5505450"/>
+            <a:ext cx="7924800" cy="381000"/>
+          </a:xfrm>
+          <a:prstGeom xmlns:a="http://schemas.openxmlformats.org/drawingml/2006/main" prst="rect">
+            <a:avLst/>
+          </a:prstGeom>
+          <a:noFill xmlns:a="http://schemas.openxmlformats.org/drawingml/2006/main"/>
+          <a:ln xmlns:a="http://schemas.openxmlformats.org/drawingml/2006/main" w="0">
+            <a:noFill/>
+            <a:prstDash val="solid"/>
+          </a:ln>
+        </p:spPr>
+        <p:txBody>
+          <a:bodyPr xmlns:a="http://schemas.openxmlformats.org/drawingml/2006/main" anchor="t"/>
+          <a:lstStyle xmlns:a="http://schemas.openxmlformats.org/drawingml/2006/main"/>
+          <a:p xmlns:a="http://schemas.openxmlformats.org/drawingml/2006/main">
+            <a:pPr algn="ctr">
+              <a:buNone/>
+              <a:defRPr sz="2175" b="1">
+                <a:solidFill>
+                  <a:srgbClr val="101820"/>
+                </a:solidFill>
+                <a:latin typeface="Arial"/>
+                <a:ea typeface="Arial"/>
+                <a:cs typeface="Arial"/>
+              </a:defRPr>
+            </a:pPr>
+            <a:r>
+              <a:rPr sz="2175" b="1">
+                <a:solidFill>
+                  <a:srgbClr val="101820"/>
+                </a:solidFill>
+                <a:latin typeface="Arial"/>
+                <a:ea typeface="Arial"/>
+                <a:cs typeface="Arial"/>
+              </a:rPr>
+              <a:t>This is an ex-ante, auditable cohort—not a present-day winners list.</a:t>
+            </a:r>
+          </a:p>
+        </p:txBody>
+      </p:sp>
+    </p:spTree>
+    <p:extLst>
+      <p:ext uri="{BB962C8B-B14F-4D97-AF65-F5344CB8AC3E}">
+        <p14:creationId xmlns:p14="http://schemas.microsoft.com/office/powerpoint/2010/main" val="1503881080"/>
+      </p:ext>
+    </p:extLst>
+  </p:cSld>
+</p:sld>
+</file>
+
+<file path=ppt/slides/slide38.xml><?xml version="1.0" encoding="utf-8"?>
+<p:sld xmlns:p="http://schemas.openxmlformats.org/presentationml/2006/main">
+  <p:cSld>
+    <p:bg>
+      <p:bgPr>
+        <a:solidFill xmlns:a="http://schemas.openxmlformats.org/drawingml/2006/main">
+          <a:srgbClr val="FFFFFF"/>
+        </a:solidFill>
+      </p:bgPr>
+    </p:bg>
+    <p:spTree>
+      <p:nvGrpSpPr>
+        <p:cNvPr id="1" name=""/>
+        <p:cNvGrpSpPr/>
+        <p:nvPr/>
+      </p:nvGrpSpPr>
+      <p:grpSpPr>
+        <a:xfrm xmlns:a="http://schemas.openxmlformats.org/drawingml/2006/main"/>
+      </p:grpSpPr>
+      <p:sp>
+        <p:nvSpPr>
+          <p:cNvPr id="18" name="">
+            <a:extLst xmlns:a="http://schemas.openxmlformats.org/drawingml/2006/main">
+              <a:ext uri="{FF2B5EF4-FFF2-40B4-BE49-F238E27FC236}">
+                <a16:creationId xmlns:a16="http://schemas.microsoft.com/office/drawing/2014/main" id="{86AB4CD6-A066-4BA6-83E2-7BED7686F042}"/>
+              </a:ext>
+            </a:extLst>
+          </p:cNvPr>
+          <p:cNvSpPr>
+            <a:spLocks xmlns:a="http://schemas.openxmlformats.org/drawingml/2006/main" noGrp="1"/>
+          </p:cNvSpPr>
+          <p:nvPr/>
+        </p:nvSpPr>
+        <p:spPr>
+          <a:xfrm xmlns:a="http://schemas.openxmlformats.org/drawingml/2006/main">
+            <a:off x="400050" y="228600"/>
+            <a:ext cx="2857500" cy="228600"/>
+          </a:xfrm>
+          <a:prstGeom xmlns:a="http://schemas.openxmlformats.org/drawingml/2006/main" prst="rect">
+            <a:avLst/>
+          </a:prstGeom>
+          <a:noFill xmlns:a="http://schemas.openxmlformats.org/drawingml/2006/main"/>
+          <a:ln xmlns:a="http://schemas.openxmlformats.org/drawingml/2006/main" w="0">
+            <a:noFill/>
+            <a:prstDash val="solid"/>
+          </a:ln>
+        </p:spPr>
+        <p:txBody>
+          <a:bodyPr xmlns:a="http://schemas.openxmlformats.org/drawingml/2006/main" anchor="t"/>
+          <a:lstStyle xmlns:a="http://schemas.openxmlformats.org/drawingml/2006/main"/>
+          <a:p xmlns:a="http://schemas.openxmlformats.org/drawingml/2006/main">
+            <a:pPr algn="l">
+              <a:buNone/>
+              <a:defRPr sz="1200" b="1">
+                <a:solidFill>
+                  <a:srgbClr val="3D8DFF"/>
+                </a:solidFill>
+                <a:latin typeface="Arial"/>
+                <a:ea typeface="Arial"/>
+                <a:cs typeface="Arial"/>
+              </a:defRPr>
+            </a:pPr>
+            <a:r>
+              <a:rPr sz="1200" b="1">
+                <a:solidFill>
+                  <a:srgbClr val="3D8DFF"/>
+                </a:solidFill>
+                <a:latin typeface="Arial"/>
+                <a:ea typeface="Arial"/>
+                <a:cs typeface="Arial"/>
+              </a:rPr>
+              <a:t>LIT-MOM-03.4</a:t>
+            </a:r>
+          </a:p>
+        </p:txBody>
+      </p:sp>
+      <p:sp>
+        <p:nvSpPr>
+          <p:cNvPr id="2" name="slide-9-title">
+            <a:extLst xmlns:a="http://schemas.openxmlformats.org/drawingml/2006/main">
+              <a:ext uri="{FF2B5EF4-FFF2-40B4-BE49-F238E27FC236}">
+                <a16:creationId xmlns:a16="http://schemas.microsoft.com/office/drawing/2014/main" id="{204441B9-2B0E-4029-B489-A1293A42A74D}"/>
+              </a:ext>
+            </a:extLst>
+          </p:cNvPr>
+          <p:cNvSpPr>
+            <a:spLocks xmlns:a="http://schemas.openxmlformats.org/drawingml/2006/main" noGrp="1"/>
+          </p:cNvSpPr>
+          <p:nvPr/>
+        </p:nvSpPr>
+        <p:spPr>
+          <a:xfrm xmlns:a="http://schemas.openxmlformats.org/drawingml/2006/main">
+            <a:off x="400050" y="476250"/>
+            <a:ext cx="11049000" cy="819150"/>
+          </a:xfrm>
+          <a:prstGeom xmlns:a="http://schemas.openxmlformats.org/drawingml/2006/main" prst="rect">
+            <a:avLst/>
+          </a:prstGeom>
+          <a:noFill xmlns:a="http://schemas.openxmlformats.org/drawingml/2006/main"/>
+          <a:ln xmlns:a="http://schemas.openxmlformats.org/drawingml/2006/main" w="0">
+            <a:noFill/>
+            <a:prstDash val="solid"/>
+          </a:ln>
+        </p:spPr>
+        <p:txBody>
+          <a:bodyPr xmlns:a="http://schemas.openxmlformats.org/drawingml/2006/main" anchor="t"/>
+          <a:lstStyle xmlns:a="http://schemas.openxmlformats.org/drawingml/2006/main"/>
+          <a:p xmlns:a="http://schemas.openxmlformats.org/drawingml/2006/main">
+            <a:pPr algn="l">
+              <a:buNone/>
+              <a:defRPr sz="2700" b="1">
+                <a:solidFill>
+                  <a:srgbClr val="101820"/>
+                </a:solidFill>
+                <a:latin typeface="Arial"/>
+                <a:ea typeface="Arial"/>
+                <a:cs typeface="Arial"/>
+              </a:defRPr>
+            </a:pPr>
+            <a:r>
+              <a:rPr sz="2700" b="1">
+                <a:solidFill>
+                  <a:srgbClr val="101820"/>
+                </a:solidFill>
+                <a:latin typeface="Arial"/>
+                <a:ea typeface="Arial"/>
+                <a:cs typeface="Arial"/>
+              </a:rPr>
+              <a:t>The replay freezes every consequential choice before outcomes</a:t>
+            </a:r>
+          </a:p>
+        </p:txBody>
+      </p:sp>
+      <p:sp>
+        <p:nvSpPr>
+          <p:cNvPr id="3" name="">
+            <a:extLst xmlns:a="http://schemas.openxmlformats.org/drawingml/2006/main">
+              <a:ext uri="{FF2B5EF4-FFF2-40B4-BE49-F238E27FC236}">
+                <a16:creationId xmlns:a16="http://schemas.microsoft.com/office/drawing/2014/main" id="{9C4A5C3A-384E-47D6-952B-25278B045246}"/>
+              </a:ext>
+            </a:extLst>
+          </p:cNvPr>
+          <p:cNvSpPr>
+            <a:spLocks xmlns:a="http://schemas.openxmlformats.org/drawingml/2006/main" noGrp="1"/>
+          </p:cNvSpPr>
+          <p:nvPr/>
+        </p:nvSpPr>
+        <p:spPr>
+          <a:xfrm xmlns:a="http://schemas.openxmlformats.org/drawingml/2006/main">
+            <a:off x="400050" y="1428750"/>
+            <a:ext cx="11391900" cy="0"/>
+          </a:xfrm>
+          <a:prstGeom xmlns:a="http://schemas.openxmlformats.org/drawingml/2006/main" prst="line">
+            <a:avLst/>
+          </a:prstGeom>
+          <a:noFill xmlns:a="http://schemas.openxmlformats.org/drawingml/2006/main"/>
+          <a:ln xmlns:a="http://schemas.openxmlformats.org/drawingml/2006/main" w="9525">
+            <a:solidFill>
+              <a:srgbClr val="B8BCC4"/>
+            </a:solidFill>
+            <a:prstDash val="solid"/>
+          </a:ln>
+        </p:spPr>
+      </p:sp>
+      <p:sp>
+        <p:nvSpPr>
+          <p:cNvPr id="4" name="slide-9-number">
+            <a:extLst xmlns:a="http://schemas.openxmlformats.org/drawingml/2006/main">
+              <a:ext uri="{FF2B5EF4-FFF2-40B4-BE49-F238E27FC236}">
+                <a16:creationId xmlns:a16="http://schemas.microsoft.com/office/drawing/2014/main" id="{5EBD817D-F347-40A2-BECC-BF81DCE7FD7B}"/>
+              </a:ext>
+            </a:extLst>
+          </p:cNvPr>
+          <p:cNvSpPr>
+            <a:spLocks xmlns:a="http://schemas.openxmlformats.org/drawingml/2006/main" noGrp="1"/>
+          </p:cNvSpPr>
+          <p:nvPr/>
+        </p:nvSpPr>
+        <p:spPr>
+          <a:xfrm xmlns:a="http://schemas.openxmlformats.org/drawingml/2006/main">
+            <a:off x="11163300" y="6362700"/>
+            <a:ext cx="609600" cy="228600"/>
+          </a:xfrm>
+          <a:prstGeom xmlns:a="http://schemas.openxmlformats.org/drawingml/2006/main" prst="rect">
+            <a:avLst/>
+          </a:prstGeom>
+          <a:noFill xmlns:a="http://schemas.openxmlformats.org/drawingml/2006/main"/>
+          <a:ln xmlns:a="http://schemas.openxmlformats.org/drawingml/2006/main" w="0">
+            <a:noFill/>
+            <a:prstDash val="solid"/>
+          </a:ln>
+        </p:spPr>
+        <p:txBody>
+          <a:bodyPr xmlns:a="http://schemas.openxmlformats.org/drawingml/2006/main" anchor="t"/>
+          <a:lstStyle xmlns:a="http://schemas.openxmlformats.org/drawingml/2006/main"/>
+          <a:p xmlns:a="http://schemas.openxmlformats.org/drawingml/2006/main">
+            <a:pPr algn="r">
+              <a:buNone/>
+              <a:defRPr sz="1200" b="0">
+                <a:solidFill>
+                  <a:srgbClr val="52616B"/>
+                </a:solidFill>
+                <a:latin typeface="Arial"/>
+                <a:ea typeface="Arial"/>
+                <a:cs typeface="Arial"/>
+              </a:defRPr>
+            </a:pPr>
+            <a:r>
+              <a:rPr sz="1200" b="0">
+                <a:solidFill>
+                  <a:srgbClr val="52616B"/>
+                </a:solidFill>
+                <a:latin typeface="Arial"/>
+                <a:ea typeface="Arial"/>
+                <a:cs typeface="Arial"/>
+              </a:rPr>
+              <a:t>38</a:t>
+            </a:r>
+          </a:p>
+        </p:txBody>
+      </p:sp>
+      <p:sp>
+        <p:nvSpPr>
+          <p:cNvPr id="5" name="">
+            <a:extLst xmlns:a="http://schemas.openxmlformats.org/drawingml/2006/main">
+              <a:ext uri="{FF2B5EF4-FFF2-40B4-BE49-F238E27FC236}">
+                <a16:creationId xmlns:a16="http://schemas.microsoft.com/office/drawing/2014/main" id="{CE16435F-A773-4C41-B1F9-65A53A461560}"/>
+              </a:ext>
+            </a:extLst>
+          </p:cNvPr>
+          <p:cNvSpPr>
+            <a:spLocks xmlns:a="http://schemas.openxmlformats.org/drawingml/2006/main" noGrp="1"/>
+          </p:cNvSpPr>
+          <p:nvPr/>
+        </p:nvSpPr>
+        <p:spPr>
+          <a:xfrm xmlns:a="http://schemas.openxmlformats.org/drawingml/2006/main">
+            <a:off x="609600" y="1657350"/>
+            <a:ext cx="1714500" cy="247650"/>
+          </a:xfrm>
+          <a:prstGeom xmlns:a="http://schemas.openxmlformats.org/drawingml/2006/main" prst="rect">
+            <a:avLst/>
+          </a:prstGeom>
+          <a:noFill xmlns:a="http://schemas.openxmlformats.org/drawingml/2006/main"/>
+          <a:ln xmlns:a="http://schemas.openxmlformats.org/drawingml/2006/main" w="0">
+            <a:noFill/>
+            <a:prstDash val="solid"/>
+          </a:ln>
+        </p:spPr>
+        <p:txBody>
+          <a:bodyPr xmlns:a="http://schemas.openxmlformats.org/drawingml/2006/main" anchor="t"/>
+          <a:lstStyle xmlns:a="http://schemas.openxmlformats.org/drawingml/2006/main"/>
+          <a:p xmlns:a="http://schemas.openxmlformats.org/drawingml/2006/main">
+            <a:pPr algn="l">
+              <a:buNone/>
+              <a:defRPr sz="1275" b="1">
+                <a:solidFill>
+                  <a:srgbClr val="3D8DFF"/>
+                </a:solidFill>
+                <a:latin typeface="Arial"/>
+                <a:ea typeface="Arial"/>
+                <a:cs typeface="Arial"/>
+              </a:defRPr>
+            </a:pPr>
+            <a:r>
+              <a:rPr sz="1275" b="1">
+                <a:solidFill>
+                  <a:srgbClr val="3D8DFF"/>
+                </a:solidFill>
+                <a:latin typeface="Arial"/>
+                <a:ea typeface="Arial"/>
+                <a:cs typeface="Arial"/>
+              </a:rPr>
+              <a:t>UNIVERSE</a:t>
+            </a:r>
+          </a:p>
+        </p:txBody>
+      </p:sp>
+      <p:sp>
+        <p:nvSpPr>
+          <p:cNvPr id="6" name="">
+            <a:extLst xmlns:a="http://schemas.openxmlformats.org/drawingml/2006/main">
+              <a:ext uri="{FF2B5EF4-FFF2-40B4-BE49-F238E27FC236}">
+                <a16:creationId xmlns:a16="http://schemas.microsoft.com/office/drawing/2014/main" id="{DA51A465-7554-45A3-89FC-97D4DC096775}"/>
+              </a:ext>
+            </a:extLst>
+          </p:cNvPr>
+          <p:cNvSpPr>
+            <a:spLocks xmlns:a="http://schemas.openxmlformats.org/drawingml/2006/main" noGrp="1"/>
+          </p:cNvSpPr>
+          <p:nvPr/>
+        </p:nvSpPr>
+        <p:spPr>
+          <a:xfrm xmlns:a="http://schemas.openxmlformats.org/drawingml/2006/main">
+            <a:off x="609600" y="2019300"/>
+            <a:ext cx="10953750" cy="400050"/>
+          </a:xfrm>
+          <a:prstGeom xmlns:a="http://schemas.openxmlformats.org/drawingml/2006/main" prst="rect">
+            <a:avLst/>
+          </a:prstGeom>
+          <a:noFill xmlns:a="http://schemas.openxmlformats.org/drawingml/2006/main"/>
+          <a:ln xmlns:a="http://schemas.openxmlformats.org/drawingml/2006/main" w="0">
+            <a:noFill/>
+            <a:prstDash val="solid"/>
+          </a:ln>
+        </p:spPr>
+        <p:txBody>
+          <a:bodyPr xmlns:a="http://schemas.openxmlformats.org/drawingml/2006/main" anchor="t"/>
+          <a:lstStyle xmlns:a="http://schemas.openxmlformats.org/drawingml/2006/main"/>
+          <a:p xmlns:a="http://schemas.openxmlformats.org/drawingml/2006/main">
+            <a:pPr algn="l">
+              <a:buNone/>
+              <a:defRPr sz="2025" b="1">
+                <a:solidFill>
+                  <a:srgbClr val="101820"/>
+                </a:solidFill>
+                <a:latin typeface="Arial"/>
+                <a:ea typeface="Arial"/>
+                <a:cs typeface="Arial"/>
+              </a:defRPr>
+            </a:pPr>
+            <a:r>
+              <a:rPr sz="2025" b="1">
+                <a:solidFill>
+                  <a:srgbClr val="101820"/>
+                </a:solidFill>
+                <a:latin typeface="Arial"/>
+                <a:ea typeface="Arial"/>
+                <a:cs typeface="Arial"/>
+              </a:rPr>
+              <a:t>481 stocks from a 2020-09-30 SEC holdings filing</a:t>
+            </a:r>
+          </a:p>
+        </p:txBody>
+      </p:sp>
+      <p:sp>
+        <p:nvSpPr>
+          <p:cNvPr id="7" name="">
+            <a:extLst xmlns:a="http://schemas.openxmlformats.org/drawingml/2006/main">
+              <a:ext uri="{FF2B5EF4-FFF2-40B4-BE49-F238E27FC236}">
+                <a16:creationId xmlns:a16="http://schemas.microsoft.com/office/drawing/2014/main" id="{8A9F2320-DB88-4F35-8CC6-DB00FC1B05DE}"/>
+              </a:ext>
+            </a:extLst>
+          </p:cNvPr>
+          <p:cNvSpPr>
+            <a:spLocks xmlns:a="http://schemas.openxmlformats.org/drawingml/2006/main" noGrp="1"/>
+          </p:cNvSpPr>
+          <p:nvPr/>
+        </p:nvSpPr>
+        <p:spPr>
+          <a:xfrm xmlns:a="http://schemas.openxmlformats.org/drawingml/2006/main">
+            <a:off x="609600" y="2647950"/>
+            <a:ext cx="10953750" cy="0"/>
+          </a:xfrm>
+          <a:prstGeom xmlns:a="http://schemas.openxmlformats.org/drawingml/2006/main" prst="line">
+            <a:avLst/>
+          </a:prstGeom>
+          <a:noFill xmlns:a="http://schemas.openxmlformats.org/drawingml/2006/main"/>
+          <a:ln xmlns:a="http://schemas.openxmlformats.org/drawingml/2006/main" w="9525">
+            <a:solidFill>
+              <a:srgbClr val="B8BCC4"/>
+            </a:solidFill>
+            <a:prstDash val="solid"/>
+          </a:ln>
+        </p:spPr>
+      </p:sp>
+      <p:sp>
+        <p:nvSpPr>
+          <p:cNvPr id="8" name="">
+            <a:extLst xmlns:a="http://schemas.openxmlformats.org/drawingml/2006/main">
+              <a:ext uri="{FF2B5EF4-FFF2-40B4-BE49-F238E27FC236}">
+                <a16:creationId xmlns:a16="http://schemas.microsoft.com/office/drawing/2014/main" id="{1F61F531-F8BA-48C3-B110-1E615831EA34}"/>
+              </a:ext>
+            </a:extLst>
+          </p:cNvPr>
+          <p:cNvSpPr>
+            <a:spLocks xmlns:a="http://schemas.openxmlformats.org/drawingml/2006/main" noGrp="1"/>
+          </p:cNvSpPr>
+          <p:nvPr/>
+        </p:nvSpPr>
+        <p:spPr>
+          <a:xfrm xmlns:a="http://schemas.openxmlformats.org/drawingml/2006/main">
+            <a:off x="666750" y="3067050"/>
+            <a:ext cx="2286000" cy="266700"/>
+          </a:xfrm>
+          <a:prstGeom xmlns:a="http://schemas.openxmlformats.org/drawingml/2006/main" prst="rect">
+            <a:avLst/>
+          </a:prstGeom>
+          <a:noFill xmlns:a="http://schemas.openxmlformats.org/drawingml/2006/main"/>
+          <a:ln xmlns:a="http://schemas.openxmlformats.org/drawingml/2006/main" w="0">
+            <a:noFill/>
+            <a:prstDash val="solid"/>
+          </a:ln>
+        </p:spPr>
+        <p:txBody>
+          <a:bodyPr xmlns:a="http://schemas.openxmlformats.org/drawingml/2006/main" anchor="t"/>
+          <a:lstStyle xmlns:a="http://schemas.openxmlformats.org/drawingml/2006/main"/>
+          <a:p xmlns:a="http://schemas.openxmlformats.org/drawingml/2006/main">
+            <a:pPr algn="l">
+              <a:buNone/>
+              <a:defRPr sz="1275" b="1">
+                <a:solidFill>
+                  <a:srgbClr val="3D8DFF"/>
+                </a:solidFill>
+                <a:latin typeface="Arial"/>
+                <a:ea typeface="Arial"/>
+                <a:cs typeface="Arial"/>
+              </a:defRPr>
+            </a:pPr>
+            <a:r>
+              <a:rPr sz="1275" b="1">
+                <a:solidFill>
+                  <a:srgbClr val="3D8DFF"/>
+                </a:solidFill>
+                <a:latin typeface="Arial"/>
+                <a:ea typeface="Arial"/>
+                <a:cs typeface="Arial"/>
+              </a:rPr>
+              <a:t>BREADTH</a:t>
+            </a:r>
+          </a:p>
+        </p:txBody>
+      </p:sp>
+      <p:sp>
+        <p:nvSpPr>
+          <p:cNvPr id="9" name="">
+            <a:extLst xmlns:a="http://schemas.openxmlformats.org/drawingml/2006/main">
+              <a:ext uri="{FF2B5EF4-FFF2-40B4-BE49-F238E27FC236}">
+                <a16:creationId xmlns:a16="http://schemas.microsoft.com/office/drawing/2014/main" id="{47A3F430-BD14-424C-8A98-AA2A7B48047A}"/>
+              </a:ext>
+            </a:extLst>
+          </p:cNvPr>
+          <p:cNvSpPr>
+            <a:spLocks xmlns:a="http://schemas.openxmlformats.org/drawingml/2006/main" noGrp="1"/>
+          </p:cNvSpPr>
+          <p:nvPr/>
+        </p:nvSpPr>
+        <p:spPr>
+          <a:xfrm xmlns:a="http://schemas.openxmlformats.org/drawingml/2006/main">
+            <a:off x="666750" y="3524250"/>
+            <a:ext cx="2286000" cy="1028700"/>
+          </a:xfrm>
+          <a:prstGeom xmlns:a="http://schemas.openxmlformats.org/drawingml/2006/main" prst="rect">
+            <a:avLst/>
+          </a:prstGeom>
+          <a:noFill xmlns:a="http://schemas.openxmlformats.org/drawingml/2006/main"/>
+          <a:ln xmlns:a="http://schemas.openxmlformats.org/drawingml/2006/main" w="0">
+            <a:noFill/>
+            <a:prstDash val="solid"/>
+          </a:ln>
+        </p:spPr>
+        <p:txBody>
+          <a:bodyPr xmlns:a="http://schemas.openxmlformats.org/drawingml/2006/main" anchor="t"/>
+          <a:lstStyle xmlns:a="http://schemas.openxmlformats.org/drawingml/2006/main"/>
+          <a:p xmlns:a="http://schemas.openxmlformats.org/drawingml/2006/main">
+            <a:pPr algn="l">
+              <a:buNone/>
+              <a:defRPr sz="2025" b="1">
+                <a:solidFill>
+                  <a:srgbClr val="101820"/>
+                </a:solidFill>
+                <a:latin typeface="Arial"/>
+                <a:ea typeface="Arial"/>
+                <a:cs typeface="Arial"/>
+              </a:defRPr>
+            </a:pPr>
+            <a:r>
+              <a:rPr sz="2025" b="1">
+                <a:solidFill>
+                  <a:srgbClr val="101820"/>
+                </a:solidFill>
+                <a:latin typeface="Arial"/>
+                <a:ea typeface="Arial"/>
+                <a:cs typeface="Arial"/>
+              </a:rPr>
+              <a:t>Top 160</a:t>
+            </a:r>
+          </a:p>
+          <a:p xmlns:a="http://schemas.openxmlformats.org/drawingml/2006/main">
+            <a:pPr algn="l">
+              <a:buNone/>
+              <a:defRPr sz="2025" b="1">
+                <a:solidFill>
+                  <a:srgbClr val="101820"/>
+                </a:solidFill>
+                <a:latin typeface="Arial"/>
+                <a:ea typeface="Arial"/>
+                <a:cs typeface="Arial"/>
+              </a:defRPr>
+            </a:pPr>
+            <a:r>
+              <a:rPr sz="2025" b="1">
+                <a:solidFill>
+                  <a:srgbClr val="101820"/>
+                </a:solidFill>
+                <a:latin typeface="Arial"/>
+                <a:ea typeface="Arial"/>
+                <a:cs typeface="Arial"/>
+              </a:rPr>
+              <a:t>one-third</a:t>
+            </a:r>
+          </a:p>
+        </p:txBody>
+      </p:sp>
+      <p:sp>
+        <p:nvSpPr>
+          <p:cNvPr id="10" name="">
+            <a:extLst xmlns:a="http://schemas.openxmlformats.org/drawingml/2006/main">
+              <a:ext uri="{FF2B5EF4-FFF2-40B4-BE49-F238E27FC236}">
+                <a16:creationId xmlns:a16="http://schemas.microsoft.com/office/drawing/2014/main" id="{7B4B8567-8507-4AD7-A8F3-B7C8821C4E8E}"/>
+              </a:ext>
+            </a:extLst>
+          </p:cNvPr>
+          <p:cNvSpPr>
+            <a:spLocks xmlns:a="http://schemas.openxmlformats.org/drawingml/2006/main" noGrp="1"/>
+          </p:cNvSpPr>
+          <p:nvPr/>
+        </p:nvSpPr>
+        <p:spPr>
+          <a:xfrm xmlns:a="http://schemas.openxmlformats.org/drawingml/2006/main">
+            <a:off x="3429000" y="3067050"/>
+            <a:ext cx="2286000" cy="266700"/>
+          </a:xfrm>
+          <a:prstGeom xmlns:a="http://schemas.openxmlformats.org/drawingml/2006/main" prst="rect">
+            <a:avLst/>
+          </a:prstGeom>
+          <a:noFill xmlns:a="http://schemas.openxmlformats.org/drawingml/2006/main"/>
+          <a:ln xmlns:a="http://schemas.openxmlformats.org/drawingml/2006/main" w="0">
+            <a:noFill/>
+            <a:prstDash val="solid"/>
+          </a:ln>
+        </p:spPr>
+        <p:txBody>
+          <a:bodyPr xmlns:a="http://schemas.openxmlformats.org/drawingml/2006/main" anchor="t"/>
+          <a:lstStyle xmlns:a="http://schemas.openxmlformats.org/drawingml/2006/main"/>
+          <a:p xmlns:a="http://schemas.openxmlformats.org/drawingml/2006/main">
+            <a:pPr algn="l">
+              <a:buNone/>
+              <a:defRPr sz="1275" b="1">
+                <a:solidFill>
+                  <a:srgbClr val="3D8DFF"/>
+                </a:solidFill>
+                <a:latin typeface="Arial"/>
+                <a:ea typeface="Arial"/>
+                <a:cs typeface="Arial"/>
+              </a:defRPr>
+            </a:pPr>
+            <a:r>
+              <a:rPr sz="1275" b="1">
+                <a:solidFill>
+                  <a:srgbClr val="3D8DFF"/>
+                </a:solidFill>
+                <a:latin typeface="Arial"/>
+                <a:ea typeface="Arial"/>
+                <a:cs typeface="Arial"/>
+              </a:rPr>
+              <a:t>SIGNAL</a:t>
+            </a:r>
+          </a:p>
+        </p:txBody>
+      </p:sp>
+      <p:sp>
+        <p:nvSpPr>
+          <p:cNvPr id="11" name="">
+            <a:extLst xmlns:a="http://schemas.openxmlformats.org/drawingml/2006/main">
+              <a:ext uri="{FF2B5EF4-FFF2-40B4-BE49-F238E27FC236}">
+                <a16:creationId xmlns:a16="http://schemas.microsoft.com/office/drawing/2014/main" id="{EE99CB67-3B4D-4239-96EC-C5AE0846EE8A}"/>
+              </a:ext>
+            </a:extLst>
+          </p:cNvPr>
+          <p:cNvSpPr>
+            <a:spLocks xmlns:a="http://schemas.openxmlformats.org/drawingml/2006/main" noGrp="1"/>
+          </p:cNvSpPr>
+          <p:nvPr/>
+        </p:nvSpPr>
+        <p:spPr>
+          <a:xfrm xmlns:a="http://schemas.openxmlformats.org/drawingml/2006/main">
+            <a:off x="3429000" y="3524250"/>
+            <a:ext cx="2286000" cy="1028700"/>
+          </a:xfrm>
+          <a:prstGeom xmlns:a="http://schemas.openxmlformats.org/drawingml/2006/main" prst="rect">
+            <a:avLst/>
+          </a:prstGeom>
+          <a:noFill xmlns:a="http://schemas.openxmlformats.org/drawingml/2006/main"/>
+          <a:ln xmlns:a="http://schemas.openxmlformats.org/drawingml/2006/main" w="0">
+            <a:noFill/>
+            <a:prstDash val="solid"/>
+          </a:ln>
+        </p:spPr>
+        <p:txBody>
+          <a:bodyPr xmlns:a="http://schemas.openxmlformats.org/drawingml/2006/main" anchor="t"/>
+          <a:lstStyle xmlns:a="http://schemas.openxmlformats.org/drawingml/2006/main"/>
+          <a:p xmlns:a="http://schemas.openxmlformats.org/drawingml/2006/main">
+            <a:pPr algn="l">
+              <a:buNone/>
+              <a:defRPr sz="2025" b="1">
+                <a:solidFill>
+                  <a:srgbClr val="101820"/>
+                </a:solidFill>
+                <a:latin typeface="Arial"/>
+                <a:ea typeface="Arial"/>
+                <a:cs typeface="Arial"/>
+              </a:defRPr>
+            </a:pPr>
+            <a:r>
+              <a:rPr sz="2025" b="1">
+                <a:solidFill>
+                  <a:srgbClr val="101820"/>
+                </a:solidFill>
+                <a:latin typeface="Arial"/>
+                <a:ea typeface="Arial"/>
+                <a:cs typeface="Arial"/>
+              </a:rPr>
+              <a:t>Wednesday close</a:t>
+            </a:r>
+          </a:p>
+          <a:p xmlns:a="http://schemas.openxmlformats.org/drawingml/2006/main">
+            <a:pPr algn="l">
+              <a:buNone/>
+              <a:defRPr sz="2025" b="1">
+                <a:solidFill>
+                  <a:srgbClr val="101820"/>
+                </a:solidFill>
+                <a:latin typeface="Arial"/>
+                <a:ea typeface="Arial"/>
+                <a:cs typeface="Arial"/>
+              </a:defRPr>
+            </a:pPr>
+            <a:r>
+              <a:rPr sz="2025" b="1">
+                <a:solidFill>
+                  <a:srgbClr val="101820"/>
+                </a:solidFill>
+                <a:latin typeface="Arial"/>
+                <a:ea typeface="Arial"/>
+                <a:cs typeface="Arial"/>
+              </a:rPr>
+              <a:t>10- &amp; 25-week ROC</a:t>
+            </a:r>
+          </a:p>
+        </p:txBody>
+      </p:sp>
+      <p:sp>
+        <p:nvSpPr>
+          <p:cNvPr id="12" name="">
+            <a:extLst xmlns:a="http://schemas.openxmlformats.org/drawingml/2006/main">
+              <a:ext uri="{FF2B5EF4-FFF2-40B4-BE49-F238E27FC236}">
+                <a16:creationId xmlns:a16="http://schemas.microsoft.com/office/drawing/2014/main" id="{E2336303-E925-419F-BA88-E200EA9CDF26}"/>
+              </a:ext>
+            </a:extLst>
+          </p:cNvPr>
+          <p:cNvSpPr>
+            <a:spLocks xmlns:a="http://schemas.openxmlformats.org/drawingml/2006/main" noGrp="1"/>
+          </p:cNvSpPr>
+          <p:nvPr/>
+        </p:nvSpPr>
+        <p:spPr>
+          <a:xfrm xmlns:a="http://schemas.openxmlformats.org/drawingml/2006/main">
+            <a:off x="6191250" y="3067050"/>
+            <a:ext cx="2286000" cy="266700"/>
+          </a:xfrm>
+          <a:prstGeom xmlns:a="http://schemas.openxmlformats.org/drawingml/2006/main" prst="rect">
+            <a:avLst/>
+          </a:prstGeom>
+          <a:noFill xmlns:a="http://schemas.openxmlformats.org/drawingml/2006/main"/>
+          <a:ln xmlns:a="http://schemas.openxmlformats.org/drawingml/2006/main" w="0">
+            <a:noFill/>
+            <a:prstDash val="solid"/>
+          </a:ln>
+        </p:spPr>
+        <p:txBody>
+          <a:bodyPr xmlns:a="http://schemas.openxmlformats.org/drawingml/2006/main" anchor="t"/>
+          <a:lstStyle xmlns:a="http://schemas.openxmlformats.org/drawingml/2006/main"/>
+          <a:p xmlns:a="http://schemas.openxmlformats.org/drawingml/2006/main">
+            <a:pPr algn="l">
+              <a:buNone/>
+              <a:defRPr sz="1275" b="1">
+                <a:solidFill>
+                  <a:srgbClr val="3D8DFF"/>
+                </a:solidFill>
+                <a:latin typeface="Arial"/>
+                <a:ea typeface="Arial"/>
+                <a:cs typeface="Arial"/>
+              </a:defRPr>
+            </a:pPr>
+            <a:r>
+              <a:rPr sz="1275" b="1">
+                <a:solidFill>
+                  <a:srgbClr val="3D8DFF"/>
+                </a:solidFill>
+                <a:latin typeface="Arial"/>
+                <a:ea typeface="Arial"/>
+                <a:cs typeface="Arial"/>
+              </a:rPr>
+              <a:t>PERMISSION</a:t>
+            </a:r>
+          </a:p>
+        </p:txBody>
+      </p:sp>
+      <p:sp>
+        <p:nvSpPr>
+          <p:cNvPr id="13" name="">
+            <a:extLst xmlns:a="http://schemas.openxmlformats.org/drawingml/2006/main">
+              <a:ext uri="{FF2B5EF4-FFF2-40B4-BE49-F238E27FC236}">
+                <a16:creationId xmlns:a16="http://schemas.microsoft.com/office/drawing/2014/main" id="{E87F69DB-3722-4584-ACD7-5794C8CC09D7}"/>
+              </a:ext>
+            </a:extLst>
+          </p:cNvPr>
+          <p:cNvSpPr>
+            <a:spLocks xmlns:a="http://schemas.openxmlformats.org/drawingml/2006/main" noGrp="1"/>
+          </p:cNvSpPr>
+          <p:nvPr/>
+        </p:nvSpPr>
+        <p:spPr>
+          <a:xfrm xmlns:a="http://schemas.openxmlformats.org/drawingml/2006/main">
+            <a:off x="6191250" y="3524250"/>
+            <a:ext cx="2286000" cy="1028700"/>
+          </a:xfrm>
+          <a:prstGeom xmlns:a="http://schemas.openxmlformats.org/drawingml/2006/main" prst="rect">
+            <a:avLst/>
+          </a:prstGeom>
+          <a:noFill xmlns:a="http://schemas.openxmlformats.org/drawingml/2006/main"/>
+          <a:ln xmlns:a="http://schemas.openxmlformats.org/drawingml/2006/main" w="0">
+            <a:noFill/>
+            <a:prstDash val="solid"/>
+          </a:ln>
+        </p:spPr>
+        <p:txBody>
+          <a:bodyPr xmlns:a="http://schemas.openxmlformats.org/drawingml/2006/main" anchor="t"/>
+          <a:lstStyle xmlns:a="http://schemas.openxmlformats.org/drawingml/2006/main"/>
+          <a:p xmlns:a="http://schemas.openxmlformats.org/drawingml/2006/main">
+            <a:pPr algn="l">
+              <a:buNone/>
+              <a:defRPr sz="2025" b="1">
+                <a:solidFill>
+                  <a:srgbClr val="101820"/>
+                </a:solidFill>
+                <a:latin typeface="Arial"/>
+                <a:ea typeface="Arial"/>
+                <a:cs typeface="Arial"/>
+              </a:defRPr>
+            </a:pPr>
+            <a:r>
+              <a:rPr sz="2025" b="1">
+                <a:solidFill>
+                  <a:srgbClr val="101820"/>
+                </a:solidFill>
+                <a:latin typeface="Arial"/>
+                <a:ea typeface="Arial"/>
+                <a:cs typeface="Arial"/>
+              </a:rPr>
+              <a:t>Positive only</a:t>
+            </a:r>
+          </a:p>
+          <a:p xmlns:a="http://schemas.openxmlformats.org/drawingml/2006/main">
+            <a:pPr algn="l">
+              <a:buNone/>
+              <a:defRPr sz="2025" b="1">
+                <a:solidFill>
+                  <a:srgbClr val="101820"/>
+                </a:solidFill>
+                <a:latin typeface="Arial"/>
+                <a:ea typeface="Arial"/>
+                <a:cs typeface="Arial"/>
+              </a:defRPr>
+            </a:pPr>
+            <a:r>
+              <a:rPr sz="2025" b="1">
+                <a:solidFill>
+                  <a:srgbClr val="101820"/>
+                </a:solidFill>
+                <a:latin typeface="Arial"/>
+                <a:ea typeface="Arial"/>
+                <a:cs typeface="Arial"/>
+              </a:rPr>
+              <a:t>failed slots to cash</a:t>
+            </a:r>
+          </a:p>
+        </p:txBody>
+      </p:sp>
+      <p:sp>
+        <p:nvSpPr>
+          <p:cNvPr id="14" name="">
+            <a:extLst xmlns:a="http://schemas.openxmlformats.org/drawingml/2006/main">
+              <a:ext uri="{FF2B5EF4-FFF2-40B4-BE49-F238E27FC236}">
+                <a16:creationId xmlns:a16="http://schemas.microsoft.com/office/drawing/2014/main" id="{E839D33A-5AB2-49E2-BD35-DAC5629E2C9F}"/>
+              </a:ext>
+            </a:extLst>
+          </p:cNvPr>
+          <p:cNvSpPr>
+            <a:spLocks xmlns:a="http://schemas.openxmlformats.org/drawingml/2006/main" noGrp="1"/>
+          </p:cNvSpPr>
+          <p:nvPr/>
+        </p:nvSpPr>
+        <p:spPr>
+          <a:xfrm xmlns:a="http://schemas.openxmlformats.org/drawingml/2006/main">
+            <a:off x="8953500" y="3067050"/>
+            <a:ext cx="2286000" cy="266700"/>
+          </a:xfrm>
+          <a:prstGeom xmlns:a="http://schemas.openxmlformats.org/drawingml/2006/main" prst="rect">
+            <a:avLst/>
+          </a:prstGeom>
+          <a:noFill xmlns:a="http://schemas.openxmlformats.org/drawingml/2006/main"/>
+          <a:ln xmlns:a="http://schemas.openxmlformats.org/drawingml/2006/main" w="0">
+            <a:noFill/>
+            <a:prstDash val="solid"/>
+          </a:ln>
+        </p:spPr>
+        <p:txBody>
+          <a:bodyPr xmlns:a="http://schemas.openxmlformats.org/drawingml/2006/main" anchor="t"/>
+          <a:lstStyle xmlns:a="http://schemas.openxmlformats.org/drawingml/2006/main"/>
+          <a:p xmlns:a="http://schemas.openxmlformats.org/drawingml/2006/main">
+            <a:pPr algn="l">
+              <a:buNone/>
+              <a:defRPr sz="1275" b="1">
+                <a:solidFill>
+                  <a:srgbClr val="3D8DFF"/>
+                </a:solidFill>
+                <a:latin typeface="Arial"/>
+                <a:ea typeface="Arial"/>
+                <a:cs typeface="Arial"/>
+              </a:defRPr>
+            </a:pPr>
+            <a:r>
+              <a:rPr sz="1275" b="1">
+                <a:solidFill>
+                  <a:srgbClr val="3D8DFF"/>
+                </a:solidFill>
+                <a:latin typeface="Arial"/>
+                <a:ea typeface="Arial"/>
+                <a:cs typeface="Arial"/>
+              </a:rPr>
+              <a:t>EXECUTION</a:t>
+            </a:r>
+          </a:p>
+        </p:txBody>
+      </p:sp>
+      <p:sp>
+        <p:nvSpPr>
+          <p:cNvPr id="15" name="">
+            <a:extLst xmlns:a="http://schemas.openxmlformats.org/drawingml/2006/main">
+              <a:ext uri="{FF2B5EF4-FFF2-40B4-BE49-F238E27FC236}">
+                <a16:creationId xmlns:a16="http://schemas.microsoft.com/office/drawing/2014/main" id="{AD376B60-6F16-4D24-AAF8-36D5C9BFBC2E}"/>
+              </a:ext>
+            </a:extLst>
+          </p:cNvPr>
+          <p:cNvSpPr>
+            <a:spLocks xmlns:a="http://schemas.openxmlformats.org/drawingml/2006/main" noGrp="1"/>
+          </p:cNvSpPr>
+          <p:nvPr/>
+        </p:nvSpPr>
+        <p:spPr>
+          <a:xfrm xmlns:a="http://schemas.openxmlformats.org/drawingml/2006/main">
+            <a:off x="8953500" y="3524250"/>
+            <a:ext cx="2286000" cy="1028700"/>
+          </a:xfrm>
+          <a:prstGeom xmlns:a="http://schemas.openxmlformats.org/drawingml/2006/main" prst="rect">
+            <a:avLst/>
+          </a:prstGeom>
+          <a:noFill xmlns:a="http://schemas.openxmlformats.org/drawingml/2006/main"/>
+          <a:ln xmlns:a="http://schemas.openxmlformats.org/drawingml/2006/main" w="0">
+            <a:noFill/>
+            <a:prstDash val="solid"/>
+          </a:ln>
+        </p:spPr>
+        <p:txBody>
+          <a:bodyPr xmlns:a="http://schemas.openxmlformats.org/drawingml/2006/main" anchor="t"/>
+          <a:lstStyle xmlns:a="http://schemas.openxmlformats.org/drawingml/2006/main"/>
+          <a:p xmlns:a="http://schemas.openxmlformats.org/drawingml/2006/main">
+            <a:pPr algn="l">
+              <a:buNone/>
+              <a:defRPr sz="2025" b="1">
+                <a:solidFill>
+                  <a:srgbClr val="101820"/>
+                </a:solidFill>
+                <a:latin typeface="Arial"/>
+                <a:ea typeface="Arial"/>
+                <a:cs typeface="Arial"/>
+              </a:defRPr>
+            </a:pPr>
+            <a:r>
+              <a:rPr sz="2025" b="1">
+                <a:solidFill>
+                  <a:srgbClr val="101820"/>
+                </a:solidFill>
+                <a:latin typeface="Arial"/>
+                <a:ea typeface="Arial"/>
+                <a:cs typeface="Arial"/>
+              </a:rPr>
+              <a:t>Next open</a:t>
+            </a:r>
+          </a:p>
+          <a:p xmlns:a="http://schemas.openxmlformats.org/drawingml/2006/main">
+            <a:pPr algn="l">
+              <a:buNone/>
+              <a:defRPr sz="2025" b="1">
+                <a:solidFill>
+                  <a:srgbClr val="101820"/>
+                </a:solidFill>
+                <a:latin typeface="Arial"/>
+                <a:ea typeface="Arial"/>
+                <a:cs typeface="Arial"/>
+              </a:defRPr>
+            </a:pPr>
+            <a:r>
+              <a:rPr sz="2025" b="1">
+                <a:solidFill>
+                  <a:srgbClr val="101820"/>
+                </a:solidFill>
+                <a:latin typeface="Arial"/>
+                <a:ea typeface="Arial"/>
+                <a:cs typeface="Arial"/>
+              </a:rPr>
+              <a:t>5 bps one-way</a:t>
+            </a:r>
+          </a:p>
+        </p:txBody>
+      </p:sp>
+      <p:sp>
+        <p:nvSpPr>
+          <p:cNvPr id="16" name="">
+            <a:extLst xmlns:a="http://schemas.openxmlformats.org/drawingml/2006/main">
+              <a:ext uri="{FF2B5EF4-FFF2-40B4-BE49-F238E27FC236}">
+                <a16:creationId xmlns:a16="http://schemas.microsoft.com/office/drawing/2014/main" id="{B7A3C9A6-4C13-47A7-A4A9-F8DE7D75F0C5}"/>
+              </a:ext>
+            </a:extLst>
+          </p:cNvPr>
+          <p:cNvSpPr>
+            <a:spLocks xmlns:a="http://schemas.openxmlformats.org/drawingml/2006/main" noGrp="1"/>
+          </p:cNvSpPr>
+          <p:nvPr/>
+        </p:nvSpPr>
+        <p:spPr>
+          <a:xfrm xmlns:a="http://schemas.openxmlformats.org/drawingml/2006/main">
+            <a:off x="666750" y="5010150"/>
+            <a:ext cx="10572750" cy="781050"/>
+          </a:xfrm>
+          <a:prstGeom xmlns:a="http://schemas.openxmlformats.org/drawingml/2006/main" prst="rect">
+            <a:avLst/>
+          </a:prstGeom>
+          <a:solidFill xmlns:a="http://schemas.openxmlformats.org/drawingml/2006/main">
+            <a:srgbClr val="EAF5FB"/>
+          </a:solidFill>
+          <a:ln xmlns:a="http://schemas.openxmlformats.org/drawingml/2006/main" w="9525">
+            <a:solidFill>
+              <a:srgbClr val="6DCBF4"/>
+            </a:solidFill>
+            <a:prstDash val="solid"/>
+          </a:ln>
+        </p:spPr>
+      </p:sp>
+      <p:sp>
+        <p:nvSpPr>
+          <p:cNvPr id="17" name="">
+            <a:extLst xmlns:a="http://schemas.openxmlformats.org/drawingml/2006/main">
+              <a:ext uri="{FF2B5EF4-FFF2-40B4-BE49-F238E27FC236}">
+                <a16:creationId xmlns:a16="http://schemas.microsoft.com/office/drawing/2014/main" id="{91F22369-1F45-4A63-B774-BEF94F9004C8}"/>
+              </a:ext>
+            </a:extLst>
+          </p:cNvPr>
+          <p:cNvSpPr>
+            <a:spLocks xmlns:a="http://schemas.openxmlformats.org/drawingml/2006/main" noGrp="1"/>
+          </p:cNvSpPr>
+          <p:nvPr/>
+        </p:nvSpPr>
+        <p:spPr>
+          <a:xfrm xmlns:a="http://schemas.openxmlformats.org/drawingml/2006/main">
+            <a:off x="952500" y="5219700"/>
+            <a:ext cx="10001250" cy="419100"/>
+          </a:xfrm>
+          <a:prstGeom xmlns:a="http://schemas.openxmlformats.org/drawingml/2006/main" prst="rect">
+            <a:avLst/>
+          </a:prstGeom>
+          <a:noFill xmlns:a="http://schemas.openxmlformats.org/drawingml/2006/main"/>
+          <a:ln xmlns:a="http://schemas.openxmlformats.org/drawingml/2006/main" w="0">
+            <a:noFill/>
+            <a:prstDash val="solid"/>
+          </a:ln>
+        </p:spPr>
+        <p:txBody>
+          <a:bodyPr xmlns:a="http://schemas.openxmlformats.org/drawingml/2006/main" anchor="t"/>
+          <a:lstStyle xmlns:a="http://schemas.openxmlformats.org/drawingml/2006/main"/>
+          <a:p xmlns:a="http://schemas.openxmlformats.org/drawingml/2006/main">
+            <a:pPr algn="ctr">
+              <a:buNone/>
+              <a:defRPr sz="1800" b="1">
+                <a:solidFill>
+                  <a:srgbClr val="101820"/>
+                </a:solidFill>
+                <a:latin typeface="Arial"/>
+                <a:ea typeface="Arial"/>
+                <a:cs typeface="Arial"/>
+              </a:defRPr>
+            </a:pPr>
+            <a:r>
+              <a:rPr sz="1800" b="1">
+                <a:solidFill>
+                  <a:srgbClr val="101820"/>
+                </a:solidFill>
+                <a:latin typeface="Arial"/>
+                <a:ea typeface="Arial"/>
+                <a:cs typeface="Arial"/>
+              </a:rPr>
+              <a:t>No horizon, breadth, gate, or universe search; missing next opens remain cash.</a:t>
+            </a:r>
+          </a:p>
+        </p:txBody>
+      </p:sp>
+    </p:spTree>
+    <p:extLst>
+      <p:ext uri="{BB962C8B-B14F-4D97-AF65-F5344CB8AC3E}">
+        <p14:creationId xmlns:p14="http://schemas.microsoft.com/office/powerpoint/2010/main" val="231651424"/>
+      </p:ext>
+    </p:extLst>
+  </p:cSld>
+</p:sld>
+</file>
+
+<file path=ppt/slides/slide39.xml><?xml version="1.0" encoding="utf-8"?>
+<p:sld xmlns:p="http://schemas.openxmlformats.org/presentationml/2006/main">
+  <p:cSld>
+    <p:bg>
+      <p:bgPr>
+        <a:solidFill xmlns:a="http://schemas.openxmlformats.org/drawingml/2006/main">
+          <a:srgbClr val="FFFFFF"/>
+        </a:solidFill>
+      </p:bgPr>
+    </p:bg>
+    <p:spTree>
+      <p:nvGrpSpPr>
+        <p:cNvPr id="1" name=""/>
+        <p:cNvGrpSpPr/>
+        <p:nvPr/>
+      </p:nvGrpSpPr>
+      <p:grpSpPr>
+        <a:xfrm xmlns:a="http://schemas.openxmlformats.org/drawingml/2006/main"/>
+      </p:grpSpPr>
+      <p:sp>
+        <p:nvSpPr>
+          <p:cNvPr id="13" name="">
+            <a:extLst xmlns:a="http://schemas.openxmlformats.org/drawingml/2006/main">
+              <a:ext uri="{FF2B5EF4-FFF2-40B4-BE49-F238E27FC236}">
+                <a16:creationId xmlns:a16="http://schemas.microsoft.com/office/drawing/2014/main" id="{E7AA0F3C-FA14-482C-9911-54A24769116A}"/>
+              </a:ext>
+            </a:extLst>
+          </p:cNvPr>
+          <p:cNvSpPr>
+            <a:spLocks xmlns:a="http://schemas.openxmlformats.org/drawingml/2006/main" noGrp="1"/>
+          </p:cNvSpPr>
+          <p:nvPr/>
+        </p:nvSpPr>
+        <p:spPr>
+          <a:xfrm xmlns:a="http://schemas.openxmlformats.org/drawingml/2006/main">
+            <a:off x="400050" y="228600"/>
+            <a:ext cx="2857500" cy="228600"/>
+          </a:xfrm>
+          <a:prstGeom xmlns:a="http://schemas.openxmlformats.org/drawingml/2006/main" prst="rect">
+            <a:avLst/>
+          </a:prstGeom>
+          <a:noFill xmlns:a="http://schemas.openxmlformats.org/drawingml/2006/main"/>
+          <a:ln xmlns:a="http://schemas.openxmlformats.org/drawingml/2006/main" w="0">
+            <a:noFill/>
+            <a:prstDash val="solid"/>
+          </a:ln>
+        </p:spPr>
+        <p:txBody>
+          <a:bodyPr xmlns:a="http://schemas.openxmlformats.org/drawingml/2006/main" anchor="t"/>
+          <a:lstStyle xmlns:a="http://schemas.openxmlformats.org/drawingml/2006/main"/>
+          <a:p xmlns:a="http://schemas.openxmlformats.org/drawingml/2006/main">
+            <a:pPr algn="l">
+              <a:buNone/>
+              <a:defRPr sz="1200" b="1">
+                <a:solidFill>
+                  <a:srgbClr val="3D8DFF"/>
+                </a:solidFill>
+                <a:latin typeface="Arial"/>
+                <a:ea typeface="Arial"/>
+                <a:cs typeface="Arial"/>
+              </a:defRPr>
+            </a:pPr>
+            <a:r>
+              <a:rPr sz="1200" b="1">
+                <a:solidFill>
+                  <a:srgbClr val="3D8DFF"/>
+                </a:solidFill>
+                <a:latin typeface="Arial"/>
+                <a:ea typeface="Arial"/>
+                <a:cs typeface="Arial"/>
+              </a:rPr>
+              <a:t>LIT-MOM-03.4</a:t>
+            </a:r>
+          </a:p>
+        </p:txBody>
+      </p:sp>
+      <p:sp>
+        <p:nvSpPr>
+          <p:cNvPr id="2" name="">
+            <a:extLst xmlns:a="http://schemas.openxmlformats.org/drawingml/2006/main">
+              <a:ext uri="{FF2B5EF4-FFF2-40B4-BE49-F238E27FC236}">
+                <a16:creationId xmlns:a16="http://schemas.microsoft.com/office/drawing/2014/main" id="{522D8FEC-18D3-4EAC-98CE-20AF9D03A3AC}"/>
+              </a:ext>
+            </a:extLst>
+          </p:cNvPr>
+          <p:cNvSpPr>
+            <a:spLocks xmlns:a="http://schemas.openxmlformats.org/drawingml/2006/main" noGrp="1"/>
+          </p:cNvSpPr>
+          <p:nvPr/>
+        </p:nvSpPr>
+        <p:spPr>
+          <a:xfrm xmlns:a="http://schemas.openxmlformats.org/drawingml/2006/main">
+            <a:off x="400050" y="476250"/>
+            <a:ext cx="11049000" cy="819150"/>
+          </a:xfrm>
+          <a:prstGeom xmlns:a="http://schemas.openxmlformats.org/drawingml/2006/main" prst="rect">
+            <a:avLst/>
+          </a:prstGeom>
+          <a:noFill xmlns:a="http://schemas.openxmlformats.org/drawingml/2006/main"/>
+          <a:ln xmlns:a="http://schemas.openxmlformats.org/drawingml/2006/main" w="0">
+            <a:noFill/>
+            <a:prstDash val="solid"/>
+          </a:ln>
+        </p:spPr>
+        <p:txBody>
+          <a:bodyPr xmlns:a="http://schemas.openxmlformats.org/drawingml/2006/main" anchor="t"/>
+          <a:lstStyle xmlns:a="http://schemas.openxmlformats.org/drawingml/2006/main"/>
+          <a:p xmlns:a="http://schemas.openxmlformats.org/drawingml/2006/main">
+            <a:pPr algn="l">
+              <a:buNone/>
+              <a:defRPr sz="2700" b="1">
+                <a:solidFill>
+                  <a:srgbClr val="101820"/>
+                </a:solidFill>
+                <a:latin typeface="Arial"/>
+                <a:ea typeface="Arial"/>
+                <a:cs typeface="Arial"/>
+              </a:defRPr>
+            </a:pPr>
+            <a:r>
+              <a:rPr sz="2700" b="1">
+                <a:solidFill>
+                  <a:srgbClr val="101820"/>
+                </a:solidFill>
+                <a:latin typeface="Arial"/>
+                <a:ea typeface="Arial"/>
+                <a:cs typeface="Arial"/>
+              </a:rPr>
+              <a:t>The ex-ante cohort stays broad despite real disappearances</a:t>
+            </a:r>
+          </a:p>
+        </p:txBody>
+      </p:sp>
+      <p:sp>
+        <p:nvSpPr>
+          <p:cNvPr id="3" name="">
+            <a:extLst xmlns:a="http://schemas.openxmlformats.org/drawingml/2006/main">
+              <a:ext uri="{FF2B5EF4-FFF2-40B4-BE49-F238E27FC236}">
+                <a16:creationId xmlns:a16="http://schemas.microsoft.com/office/drawing/2014/main" id="{21605544-2473-417D-B48F-9F8DF40D4FAF}"/>
+              </a:ext>
+            </a:extLst>
+          </p:cNvPr>
+          <p:cNvSpPr>
+            <a:spLocks xmlns:a="http://schemas.openxmlformats.org/drawingml/2006/main" noGrp="1"/>
+          </p:cNvSpPr>
+          <p:nvPr/>
+        </p:nvSpPr>
+        <p:spPr>
+          <a:xfrm xmlns:a="http://schemas.openxmlformats.org/drawingml/2006/main">
+            <a:off x="400050" y="1428750"/>
+            <a:ext cx="11391900" cy="0"/>
+          </a:xfrm>
+          <a:prstGeom xmlns:a="http://schemas.openxmlformats.org/drawingml/2006/main" prst="line">
+            <a:avLst/>
+          </a:prstGeom>
+          <a:noFill xmlns:a="http://schemas.openxmlformats.org/drawingml/2006/main"/>
+          <a:ln xmlns:a="http://schemas.openxmlformats.org/drawingml/2006/main" w="9525">
+            <a:solidFill>
+              <a:srgbClr val="B8BCC4"/>
+            </a:solidFill>
+            <a:prstDash val="solid"/>
+          </a:ln>
+        </p:spPr>
+      </p:sp>
+      <p:sp>
+        <p:nvSpPr>
+          <p:cNvPr id="4" name="">
+            <a:extLst xmlns:a="http://schemas.openxmlformats.org/drawingml/2006/main">
+              <a:ext uri="{FF2B5EF4-FFF2-40B4-BE49-F238E27FC236}">
+                <a16:creationId xmlns:a16="http://schemas.microsoft.com/office/drawing/2014/main" id="{7944BF93-B836-4831-89CE-852C703D91AD}"/>
+              </a:ext>
+            </a:extLst>
+          </p:cNvPr>
+          <p:cNvSpPr>
+            <a:spLocks xmlns:a="http://schemas.openxmlformats.org/drawingml/2006/main" noGrp="1"/>
+          </p:cNvSpPr>
+          <p:nvPr/>
+        </p:nvSpPr>
+        <p:spPr>
+          <a:xfrm xmlns:a="http://schemas.openxmlformats.org/drawingml/2006/main">
+            <a:off x="11163300" y="6362700"/>
+            <a:ext cx="609600" cy="228600"/>
+          </a:xfrm>
+          <a:prstGeom xmlns:a="http://schemas.openxmlformats.org/drawingml/2006/main" prst="rect">
+            <a:avLst/>
+          </a:prstGeom>
+          <a:noFill xmlns:a="http://schemas.openxmlformats.org/drawingml/2006/main"/>
+          <a:ln xmlns:a="http://schemas.openxmlformats.org/drawingml/2006/main" w="0">
+            <a:noFill/>
+            <a:prstDash val="solid"/>
+          </a:ln>
+        </p:spPr>
+        <p:txBody>
+          <a:bodyPr xmlns:a="http://schemas.openxmlformats.org/drawingml/2006/main" anchor="t"/>
+          <a:lstStyle xmlns:a="http://schemas.openxmlformats.org/drawingml/2006/main"/>
+          <a:p xmlns:a="http://schemas.openxmlformats.org/drawingml/2006/main">
+            <a:pPr algn="r">
+              <a:buNone/>
+              <a:defRPr sz="1200" b="0">
+                <a:solidFill>
+                  <a:srgbClr val="52616B"/>
+                </a:solidFill>
+                <a:latin typeface="Arial"/>
+                <a:ea typeface="Arial"/>
+                <a:cs typeface="Arial"/>
+              </a:defRPr>
+            </a:pPr>
+            <a:r>
+              <a:rPr sz="1200" b="0">
+                <a:solidFill>
+                  <a:srgbClr val="52616B"/>
+                </a:solidFill>
+                <a:latin typeface="Arial"/>
+                <a:ea typeface="Arial"/>
+                <a:cs typeface="Arial"/>
+              </a:rPr>
+              <a:t>39</a:t>
+            </a:r>
+          </a:p>
+        </p:txBody>
+      </p:sp>
+      <p:sp>
+        <p:nvSpPr>
+          <p:cNvPr id="6" name="">
+            <a:extLst xmlns:a="http://schemas.openxmlformats.org/drawingml/2006/main">
+              <a:ext uri="{FF2B5EF4-FFF2-40B4-BE49-F238E27FC236}">
+                <a16:creationId xmlns:a16="http://schemas.microsoft.com/office/drawing/2014/main" id="{DBF73623-95B1-48A7-A168-959D4ACF9EF6}"/>
+              </a:ext>
+            </a:extLst>
+          </p:cNvPr>
+          <p:cNvSpPr>
+            <a:spLocks xmlns:a="http://schemas.openxmlformats.org/drawingml/2006/main" noGrp="1"/>
+          </p:cNvSpPr>
+          <p:nvPr/>
+        </p:nvSpPr>
+        <p:spPr>
+          <a:xfrm xmlns:a="http://schemas.openxmlformats.org/drawingml/2006/main">
+            <a:off x="8991600" y="1733550"/>
+            <a:ext cx="2724150" cy="3905250"/>
+          </a:xfrm>
+          <a:prstGeom xmlns:a="http://schemas.openxmlformats.org/drawingml/2006/main" prst="rect">
+            <a:avLst/>
+          </a:prstGeom>
+          <a:solidFill xmlns:a="http://schemas.openxmlformats.org/drawingml/2006/main">
+            <a:srgbClr val="EAF5FB"/>
+          </a:solidFill>
+          <a:ln xmlns:a="http://schemas.openxmlformats.org/drawingml/2006/main" w="9525">
+            <a:solidFill>
+              <a:srgbClr val="6DCBF4"/>
+            </a:solidFill>
+            <a:prstDash val="solid"/>
+          </a:ln>
+        </p:spPr>
+      </p:sp>
+      <p:sp>
+        <p:nvSpPr>
+          <p:cNvPr id="7" name="">
+            <a:extLst xmlns:a="http://schemas.openxmlformats.org/drawingml/2006/main">
+              <a:ext uri="{FF2B5EF4-FFF2-40B4-BE49-F238E27FC236}">
+                <a16:creationId xmlns:a16="http://schemas.microsoft.com/office/drawing/2014/main" id="{454D3BC9-AB19-4F57-985E-DDB05A7434C0}"/>
+              </a:ext>
+            </a:extLst>
+          </p:cNvPr>
+          <p:cNvSpPr>
+            <a:spLocks xmlns:a="http://schemas.openxmlformats.org/drawingml/2006/main" noGrp="1"/>
+          </p:cNvSpPr>
+          <p:nvPr/>
+        </p:nvSpPr>
+        <p:spPr>
+          <a:xfrm xmlns:a="http://schemas.openxmlformats.org/drawingml/2006/main">
+            <a:off x="9258300" y="2019300"/>
+            <a:ext cx="2095500" cy="247650"/>
+          </a:xfrm>
+          <a:prstGeom xmlns:a="http://schemas.openxmlformats.org/drawingml/2006/main" prst="rect">
+            <a:avLst/>
+          </a:prstGeom>
+          <a:noFill xmlns:a="http://schemas.openxmlformats.org/drawingml/2006/main"/>
+          <a:ln xmlns:a="http://schemas.openxmlformats.org/drawingml/2006/main" w="0">
+            <a:noFill/>
+            <a:prstDash val="solid"/>
+          </a:ln>
+        </p:spPr>
+        <p:txBody>
+          <a:bodyPr xmlns:a="http://schemas.openxmlformats.org/drawingml/2006/main" anchor="t"/>
+          <a:lstStyle xmlns:a="http://schemas.openxmlformats.org/drawingml/2006/main"/>
+          <a:p xmlns:a="http://schemas.openxmlformats.org/drawingml/2006/main">
+            <a:pPr algn="l">
+              <a:buNone/>
+              <a:defRPr sz="1275" b="1">
+                <a:solidFill>
+                  <a:srgbClr val="3D8DFF"/>
+                </a:solidFill>
+                <a:latin typeface="Arial"/>
+                <a:ea typeface="Arial"/>
+                <a:cs typeface="Arial"/>
+              </a:defRPr>
+            </a:pPr>
+            <a:r>
+              <a:rPr sz="1275" b="1">
+                <a:solidFill>
+                  <a:srgbClr val="3D8DFF"/>
+                </a:solidFill>
+                <a:latin typeface="Arial"/>
+                <a:ea typeface="Arial"/>
+                <a:cs typeface="Arial"/>
+              </a:rPr>
+              <a:t>SCOREABLE BREADTH</a:t>
+            </a:r>
+          </a:p>
+        </p:txBody>
+      </p:sp>
+      <p:sp>
+        <p:nvSpPr>
+          <p:cNvPr id="8" name="">
+            <a:extLst xmlns:a="http://schemas.openxmlformats.org/drawingml/2006/main">
+              <a:ext uri="{FF2B5EF4-FFF2-40B4-BE49-F238E27FC236}">
+                <a16:creationId xmlns:a16="http://schemas.microsoft.com/office/drawing/2014/main" id="{50CF5D67-77D5-4062-92DB-E9771F376463}"/>
+              </a:ext>
+            </a:extLst>
+          </p:cNvPr>
+          <p:cNvSpPr>
+            <a:spLocks xmlns:a="http://schemas.openxmlformats.org/drawingml/2006/main" noGrp="1"/>
+          </p:cNvSpPr>
+          <p:nvPr/>
+        </p:nvSpPr>
+        <p:spPr>
+          <a:xfrm xmlns:a="http://schemas.openxmlformats.org/drawingml/2006/main">
+            <a:off x="9258300" y="2571750"/>
+            <a:ext cx="2095500" cy="552450"/>
+          </a:xfrm>
+          <a:prstGeom xmlns:a="http://schemas.openxmlformats.org/drawingml/2006/main" prst="rect">
+            <a:avLst/>
+          </a:prstGeom>
+          <a:noFill xmlns:a="http://schemas.openxmlformats.org/drawingml/2006/main"/>
+          <a:ln xmlns:a="http://schemas.openxmlformats.org/drawingml/2006/main" w="0">
+            <a:noFill/>
+            <a:prstDash val="solid"/>
+          </a:ln>
+        </p:spPr>
+        <p:txBody>
+          <a:bodyPr xmlns:a="http://schemas.openxmlformats.org/drawingml/2006/main" anchor="t"/>
+          <a:lstStyle xmlns:a="http://schemas.openxmlformats.org/drawingml/2006/main"/>
+          <a:p xmlns:a="http://schemas.openxmlformats.org/drawingml/2006/main">
+            <a:pPr algn="l">
+              <a:buNone/>
+              <a:defRPr sz="3000" b="1">
+                <a:solidFill>
+                  <a:srgbClr val="101820"/>
+                </a:solidFill>
+                <a:latin typeface="Arial"/>
+                <a:ea typeface="Arial"/>
+                <a:cs typeface="Arial"/>
+              </a:defRPr>
+            </a:pPr>
+            <a:r>
+              <a:rPr sz="3000" b="1">
+                <a:solidFill>
+                  <a:srgbClr val="101820"/>
+                </a:solidFill>
+                <a:latin typeface="Arial"/>
+                <a:ea typeface="Arial"/>
+                <a:cs typeface="Arial"/>
+              </a:rPr>
+              <a:t>481</a:t>
+            </a:r>
+          </a:p>
+        </p:txBody>
+      </p:sp>
+      <p:sp>
+        <p:nvSpPr>
+          <p:cNvPr id="9" name="">
+            <a:extLst xmlns:a="http://schemas.openxmlformats.org/drawingml/2006/main">
+              <a:ext uri="{FF2B5EF4-FFF2-40B4-BE49-F238E27FC236}">
+                <a16:creationId xmlns:a16="http://schemas.microsoft.com/office/drawing/2014/main" id="{7C0B5D7F-B17A-4AC9-835E-6E44FD9128EC}"/>
+              </a:ext>
+            </a:extLst>
+          </p:cNvPr>
+          <p:cNvSpPr>
+            <a:spLocks xmlns:a="http://schemas.openxmlformats.org/drawingml/2006/main" noGrp="1"/>
+          </p:cNvSpPr>
+          <p:nvPr/>
+        </p:nvSpPr>
+        <p:spPr>
+          <a:xfrm xmlns:a="http://schemas.openxmlformats.org/drawingml/2006/main">
+            <a:off x="9258300" y="3105150"/>
+            <a:ext cx="2095500" cy="400050"/>
+          </a:xfrm>
+          <a:prstGeom xmlns:a="http://schemas.openxmlformats.org/drawingml/2006/main" prst="rect">
+            <a:avLst/>
+          </a:prstGeom>
+          <a:noFill xmlns:a="http://schemas.openxmlformats.org/drawingml/2006/main"/>
+          <a:ln xmlns:a="http://schemas.openxmlformats.org/drawingml/2006/main" w="0">
+            <a:noFill/>
+            <a:prstDash val="solid"/>
+          </a:ln>
+        </p:spPr>
+        <p:txBody>
+          <a:bodyPr xmlns:a="http://schemas.openxmlformats.org/drawingml/2006/main" anchor="t"/>
+          <a:lstStyle xmlns:a="http://schemas.openxmlformats.org/drawingml/2006/main"/>
+          <a:p xmlns:a="http://schemas.openxmlformats.org/drawingml/2006/main">
+            <a:pPr algn="l">
+              <a:buNone/>
+              <a:defRPr sz="1650" b="0">
+                <a:solidFill>
+                  <a:srgbClr val="52616B"/>
+                </a:solidFill>
+                <a:latin typeface="Arial"/>
+                <a:ea typeface="Arial"/>
+                <a:cs typeface="Arial"/>
+              </a:defRPr>
+            </a:pPr>
+            <a:r>
+              <a:rPr sz="1650" b="0">
+                <a:solidFill>
+                  <a:srgbClr val="52616B"/>
+                </a:solidFill>
+                <a:latin typeface="Arial"/>
+                <a:ea typeface="Arial"/>
+                <a:cs typeface="Arial"/>
+              </a:rPr>
+              <a:t>initial</a:t>
+            </a:r>
+          </a:p>
+        </p:txBody>
+      </p:sp>
+      <p:sp>
+        <p:nvSpPr>
+          <p:cNvPr id="10" name="">
+            <a:extLst xmlns:a="http://schemas.openxmlformats.org/drawingml/2006/main">
+              <a:ext uri="{FF2B5EF4-FFF2-40B4-BE49-F238E27FC236}">
+                <a16:creationId xmlns:a16="http://schemas.microsoft.com/office/drawing/2014/main" id="{DE7E78EB-BFD1-417B-B781-C8666F0A80F8}"/>
+              </a:ext>
+            </a:extLst>
+          </p:cNvPr>
+          <p:cNvSpPr>
+            <a:spLocks xmlns:a="http://schemas.openxmlformats.org/drawingml/2006/main" noGrp="1"/>
+          </p:cNvSpPr>
+          <p:nvPr/>
+        </p:nvSpPr>
+        <p:spPr>
+          <a:xfrm xmlns:a="http://schemas.openxmlformats.org/drawingml/2006/main">
+            <a:off x="9258300" y="3790950"/>
+            <a:ext cx="2095500" cy="552450"/>
+          </a:xfrm>
+          <a:prstGeom xmlns:a="http://schemas.openxmlformats.org/drawingml/2006/main" prst="rect">
+            <a:avLst/>
+          </a:prstGeom>
+          <a:noFill xmlns:a="http://schemas.openxmlformats.org/drawingml/2006/main"/>
+          <a:ln xmlns:a="http://schemas.openxmlformats.org/drawingml/2006/main" w="0">
+            <a:noFill/>
+            <a:prstDash val="solid"/>
+          </a:ln>
+        </p:spPr>
+        <p:txBody>
+          <a:bodyPr xmlns:a="http://schemas.openxmlformats.org/drawingml/2006/main" anchor="t"/>
+          <a:lstStyle xmlns:a="http://schemas.openxmlformats.org/drawingml/2006/main"/>
+          <a:p xmlns:a="http://schemas.openxmlformats.org/drawingml/2006/main">
+            <a:pPr algn="l">
+              <a:buNone/>
+              <a:defRPr sz="3000" b="1">
+                <a:solidFill>
+                  <a:srgbClr val="3D8DFF"/>
+                </a:solidFill>
+                <a:latin typeface="Arial"/>
+                <a:ea typeface="Arial"/>
+                <a:cs typeface="Arial"/>
+              </a:defRPr>
+            </a:pPr>
+            <a:r>
+              <a:rPr sz="3000" b="1">
+                <a:solidFill>
+                  <a:srgbClr val="3D8DFF"/>
+                </a:solidFill>
+                <a:latin typeface="Arial"/>
+                <a:ea typeface="Arial"/>
+                <a:cs typeface="Arial"/>
+              </a:rPr>
+              <a:t>454</a:t>
+            </a:r>
+          </a:p>
+        </p:txBody>
+      </p:sp>
+      <p:sp>
+        <p:nvSpPr>
+          <p:cNvPr id="11" name="">
+            <a:extLst xmlns:a="http://schemas.openxmlformats.org/drawingml/2006/main">
+              <a:ext uri="{FF2B5EF4-FFF2-40B4-BE49-F238E27FC236}">
+                <a16:creationId xmlns:a16="http://schemas.microsoft.com/office/drawing/2014/main" id="{5DFE562A-9915-489A-BC82-2F762B044604}"/>
+              </a:ext>
+            </a:extLst>
+          </p:cNvPr>
+          <p:cNvSpPr>
+            <a:spLocks xmlns:a="http://schemas.openxmlformats.org/drawingml/2006/main" noGrp="1"/>
+          </p:cNvSpPr>
+          <p:nvPr/>
+        </p:nvSpPr>
+        <p:spPr>
+          <a:xfrm xmlns:a="http://schemas.openxmlformats.org/drawingml/2006/main">
+            <a:off x="9258300" y="4324350"/>
+            <a:ext cx="2095500" cy="400050"/>
+          </a:xfrm>
+          <a:prstGeom xmlns:a="http://schemas.openxmlformats.org/drawingml/2006/main" prst="rect">
+            <a:avLst/>
+          </a:prstGeom>
+          <a:noFill xmlns:a="http://schemas.openxmlformats.org/drawingml/2006/main"/>
+          <a:ln xmlns:a="http://schemas.openxmlformats.org/drawingml/2006/main" w="0">
+            <a:noFill/>
+            <a:prstDash val="solid"/>
+          </a:ln>
+        </p:spPr>
+        <p:txBody>
+          <a:bodyPr xmlns:a="http://schemas.openxmlformats.org/drawingml/2006/main" anchor="t"/>
+          <a:lstStyle xmlns:a="http://schemas.openxmlformats.org/drawingml/2006/main"/>
+          <a:p xmlns:a="http://schemas.openxmlformats.org/drawingml/2006/main">
+            <a:pPr algn="l">
+              <a:buNone/>
+              <a:defRPr sz="1650" b="0">
+                <a:solidFill>
+                  <a:srgbClr val="52616B"/>
+                </a:solidFill>
+                <a:latin typeface="Arial"/>
+                <a:ea typeface="Arial"/>
+                <a:cs typeface="Arial"/>
+              </a:defRPr>
+            </a:pPr>
+            <a:r>
+              <a:rPr sz="1650" b="0">
+                <a:solidFill>
+                  <a:srgbClr val="52616B"/>
+                </a:solidFill>
+                <a:latin typeface="Arial"/>
+                <a:ea typeface="Arial"/>
+                <a:cs typeface="Arial"/>
+              </a:rPr>
+              <a:t>median</a:t>
+            </a:r>
+          </a:p>
+        </p:txBody>
+      </p:sp>
+      <p:sp>
+        <p:nvSpPr>
+          <p:cNvPr id="12" name="">
+            <a:extLst xmlns:a="http://schemas.openxmlformats.org/drawingml/2006/main">
+              <a:ext uri="{FF2B5EF4-FFF2-40B4-BE49-F238E27FC236}">
+                <a16:creationId xmlns:a16="http://schemas.microsoft.com/office/drawing/2014/main" id="{9A127473-A846-4BDC-AD98-EA1A2A6F11AD}"/>
+              </a:ext>
+            </a:extLst>
+          </p:cNvPr>
+          <p:cNvSpPr>
+            <a:spLocks xmlns:a="http://schemas.openxmlformats.org/drawingml/2006/main" noGrp="1"/>
+          </p:cNvSpPr>
+          <p:nvPr/>
+        </p:nvSpPr>
+        <p:spPr>
+          <a:xfrm xmlns:a="http://schemas.openxmlformats.org/drawingml/2006/main">
+            <a:off x="9258300" y="4972050"/>
+            <a:ext cx="2095500" cy="381000"/>
+          </a:xfrm>
+          <a:prstGeom xmlns:a="http://schemas.openxmlformats.org/drawingml/2006/main" prst="rect">
+            <a:avLst/>
+          </a:prstGeom>
+          <a:noFill xmlns:a="http://schemas.openxmlformats.org/drawingml/2006/main"/>
+          <a:ln xmlns:a="http://schemas.openxmlformats.org/drawingml/2006/main" w="0">
+            <a:noFill/>
+            <a:prstDash val="solid"/>
+          </a:ln>
+        </p:spPr>
+        <p:txBody>
+          <a:bodyPr xmlns:a="http://schemas.openxmlformats.org/drawingml/2006/main" anchor="t"/>
+          <a:lstStyle xmlns:a="http://schemas.openxmlformats.org/drawingml/2006/main"/>
+          <a:p xmlns:a="http://schemas.openxmlformats.org/drawingml/2006/main">
+            <a:pPr algn="l">
+              <a:buNone/>
+              <a:defRPr sz="1950" b="1">
+                <a:solidFill>
+                  <a:srgbClr val="101820"/>
+                </a:solidFill>
+                <a:latin typeface="Arial"/>
+                <a:ea typeface="Arial"/>
+                <a:cs typeface="Arial"/>
+              </a:defRPr>
+            </a:pPr>
+            <a:r>
+              <a:rPr sz="1950" b="1">
+                <a:solidFill>
+                  <a:srgbClr val="101820"/>
+                </a:solidFill>
+                <a:latin typeface="Arial"/>
+                <a:ea typeface="Arial"/>
+                <a:cs typeface="Arial"/>
+              </a:rPr>
+              <a:t>437 minimum</a:t>
+            </a:r>
+          </a:p>
+        </p:txBody>
+      </p:sp>
+      <p:pic>
+        <p:nvPicPr>
+          <p:cNvPr id="26" name=""/>
+          <p:cNvPicPr>
+            <a:picLocks xmlns:a="http://schemas.openxmlformats.org/drawingml/2006/main" noChangeAspect="1"/>
+          </p:cNvPicPr>
+          <p:nvPr/>
+        </p:nvPicPr>
+        <p:blipFill>
+          <a:blip xmlns:r="http://schemas.openxmlformats.org/officeDocument/2006/relationships" xmlns:a="http://schemas.openxmlformats.org/drawingml/2006/main" r:embed="R4142895916e14234"/>
+          <a:stretch xmlns:a="http://schemas.openxmlformats.org/drawingml/2006/main"/>
+        </p:blipFill>
+        <p:spPr>
+          <a:xfrm xmlns:a="http://schemas.openxmlformats.org/drawingml/2006/main">
+            <a:off x="734786" y="1562100"/>
+            <a:ext cx="7674429" cy="4476750"/>
+          </a:xfrm>
+          <a:prstGeom xmlns:a="http://schemas.openxmlformats.org/drawingml/2006/main" prst="rect">
+            <a:avLst/>
+          </a:prstGeom>
+        </p:spPr>
+      </p:pic>
+    </p:spTree>
+    <p:extLst>
+      <p:ext uri="{BB962C8B-B14F-4D97-AF65-F5344CB8AC3E}">
+        <p14:creationId xmlns:p14="http://schemas.microsoft.com/office/powerpoint/2010/main" val="1063912481"/>
+      </p:ext>
+    </p:extLst>
+  </p:cSld>
+</p:sld>
+</file>
+
 <file path=ppt/slides/slide4.xml><?xml version="1.0" encoding="utf-8"?>
 <p:sld xmlns:p="http://schemas.openxmlformats.org/presentationml/2006/main">
   <p:cSld>
@@ -31132,6 +34531,3042 @@
     <p:extLst>
       <p:ext uri="{BB962C8B-B14F-4D97-AF65-F5344CB8AC3E}">
         <p14:creationId xmlns:p14="http://schemas.microsoft.com/office/powerpoint/2010/main" val="1129191711"/>
+      </p:ext>
+    </p:extLst>
+  </p:cSld>
+</p:sld>
+</file>
+
+<file path=ppt/slides/slide40.xml><?xml version="1.0" encoding="utf-8"?>
+<p:sld xmlns:p="http://schemas.openxmlformats.org/presentationml/2006/main">
+  <p:cSld>
+    <p:bg>
+      <p:bgPr>
+        <a:solidFill xmlns:a="http://schemas.openxmlformats.org/drawingml/2006/main">
+          <a:srgbClr val="FFFFFF"/>
+        </a:solidFill>
+      </p:bgPr>
+    </p:bg>
+    <p:spTree>
+      <p:nvGrpSpPr>
+        <p:cNvPr id="1" name=""/>
+        <p:cNvGrpSpPr/>
+        <p:nvPr/>
+      </p:nvGrpSpPr>
+      <p:grpSpPr>
+        <a:xfrm xmlns:a="http://schemas.openxmlformats.org/drawingml/2006/main"/>
+      </p:grpSpPr>
+      <p:sp>
+        <p:nvSpPr>
+          <p:cNvPr id="13" name="">
+            <a:extLst xmlns:a="http://schemas.openxmlformats.org/drawingml/2006/main">
+              <a:ext uri="{FF2B5EF4-FFF2-40B4-BE49-F238E27FC236}">
+                <a16:creationId xmlns:a16="http://schemas.microsoft.com/office/drawing/2014/main" id="{E7AA0F3C-FA14-482C-9911-54A24769116A}"/>
+              </a:ext>
+            </a:extLst>
+          </p:cNvPr>
+          <p:cNvSpPr>
+            <a:spLocks xmlns:a="http://schemas.openxmlformats.org/drawingml/2006/main" noGrp="1"/>
+          </p:cNvSpPr>
+          <p:nvPr/>
+        </p:nvSpPr>
+        <p:spPr>
+          <a:xfrm xmlns:a="http://schemas.openxmlformats.org/drawingml/2006/main">
+            <a:off x="400050" y="228600"/>
+            <a:ext cx="2857500" cy="228600"/>
+          </a:xfrm>
+          <a:prstGeom xmlns:a="http://schemas.openxmlformats.org/drawingml/2006/main" prst="rect">
+            <a:avLst/>
+          </a:prstGeom>
+          <a:noFill xmlns:a="http://schemas.openxmlformats.org/drawingml/2006/main"/>
+          <a:ln xmlns:a="http://schemas.openxmlformats.org/drawingml/2006/main" w="0">
+            <a:noFill/>
+            <a:prstDash val="solid"/>
+          </a:ln>
+        </p:spPr>
+        <p:txBody>
+          <a:bodyPr xmlns:a="http://schemas.openxmlformats.org/drawingml/2006/main" anchor="t"/>
+          <a:lstStyle xmlns:a="http://schemas.openxmlformats.org/drawingml/2006/main"/>
+          <a:p xmlns:a="http://schemas.openxmlformats.org/drawingml/2006/main">
+            <a:pPr algn="l">
+              <a:buNone/>
+              <a:defRPr sz="1200" b="1">
+                <a:solidFill>
+                  <a:srgbClr val="3D8DFF"/>
+                </a:solidFill>
+                <a:latin typeface="Arial"/>
+                <a:ea typeface="Arial"/>
+                <a:cs typeface="Arial"/>
+              </a:defRPr>
+            </a:pPr>
+            <a:r>
+              <a:rPr sz="1200" b="1">
+                <a:solidFill>
+                  <a:srgbClr val="3D8DFF"/>
+                </a:solidFill>
+                <a:latin typeface="Arial"/>
+                <a:ea typeface="Arial"/>
+                <a:cs typeface="Arial"/>
+              </a:rPr>
+              <a:t>LIT-MOM-03.4</a:t>
+            </a:r>
+          </a:p>
+        </p:txBody>
+      </p:sp>
+      <p:sp>
+        <p:nvSpPr>
+          <p:cNvPr id="2" name="">
+            <a:extLst xmlns:a="http://schemas.openxmlformats.org/drawingml/2006/main">
+              <a:ext uri="{FF2B5EF4-FFF2-40B4-BE49-F238E27FC236}">
+                <a16:creationId xmlns:a16="http://schemas.microsoft.com/office/drawing/2014/main" id="{522D8FEC-18D3-4EAC-98CE-20AF9D03A3AC}"/>
+              </a:ext>
+            </a:extLst>
+          </p:cNvPr>
+          <p:cNvSpPr>
+            <a:spLocks xmlns:a="http://schemas.openxmlformats.org/drawingml/2006/main" noGrp="1"/>
+          </p:cNvSpPr>
+          <p:nvPr/>
+        </p:nvSpPr>
+        <p:spPr>
+          <a:xfrm xmlns:a="http://schemas.openxmlformats.org/drawingml/2006/main">
+            <a:off x="400050" y="476250"/>
+            <a:ext cx="11049000" cy="819150"/>
+          </a:xfrm>
+          <a:prstGeom xmlns:a="http://schemas.openxmlformats.org/drawingml/2006/main" prst="rect">
+            <a:avLst/>
+          </a:prstGeom>
+          <a:noFill xmlns:a="http://schemas.openxmlformats.org/drawingml/2006/main"/>
+          <a:ln xmlns:a="http://schemas.openxmlformats.org/drawingml/2006/main" w="0">
+            <a:noFill/>
+            <a:prstDash val="solid"/>
+          </a:ln>
+        </p:spPr>
+        <p:txBody>
+          <a:bodyPr xmlns:a="http://schemas.openxmlformats.org/drawingml/2006/main" anchor="t"/>
+          <a:lstStyle xmlns:a="http://schemas.openxmlformats.org/drawingml/2006/main"/>
+          <a:p xmlns:a="http://schemas.openxmlformats.org/drawingml/2006/main">
+            <a:pPr algn="l">
+              <a:buNone/>
+              <a:defRPr sz="2700" b="1">
+                <a:solidFill>
+                  <a:srgbClr val="101820"/>
+                </a:solidFill>
+                <a:latin typeface="Arial"/>
+                <a:ea typeface="Arial"/>
+                <a:cs typeface="Arial"/>
+              </a:defRPr>
+            </a:pPr>
+            <a:r>
+              <a:rPr sz="2700" b="1">
+                <a:solidFill>
+                  <a:srgbClr val="101820"/>
+                </a:solidFill>
+                <a:latin typeface="Arial"/>
+                <a:ea typeface="Arial"/>
+                <a:cs typeface="Arial"/>
+              </a:rPr>
+              <a:t>The ranking advantage shrinks to almost zero</a:t>
+            </a:r>
+          </a:p>
+        </p:txBody>
+      </p:sp>
+      <p:sp>
+        <p:nvSpPr>
+          <p:cNvPr id="3" name="">
+            <a:extLst xmlns:a="http://schemas.openxmlformats.org/drawingml/2006/main">
+              <a:ext uri="{FF2B5EF4-FFF2-40B4-BE49-F238E27FC236}">
+                <a16:creationId xmlns:a16="http://schemas.microsoft.com/office/drawing/2014/main" id="{21605544-2473-417D-B48F-9F8DF40D4FAF}"/>
+              </a:ext>
+            </a:extLst>
+          </p:cNvPr>
+          <p:cNvSpPr>
+            <a:spLocks xmlns:a="http://schemas.openxmlformats.org/drawingml/2006/main" noGrp="1"/>
+          </p:cNvSpPr>
+          <p:nvPr/>
+        </p:nvSpPr>
+        <p:spPr>
+          <a:xfrm xmlns:a="http://schemas.openxmlformats.org/drawingml/2006/main">
+            <a:off x="400050" y="1428750"/>
+            <a:ext cx="11391900" cy="0"/>
+          </a:xfrm>
+          <a:prstGeom xmlns:a="http://schemas.openxmlformats.org/drawingml/2006/main" prst="line">
+            <a:avLst/>
+          </a:prstGeom>
+          <a:noFill xmlns:a="http://schemas.openxmlformats.org/drawingml/2006/main"/>
+          <a:ln xmlns:a="http://schemas.openxmlformats.org/drawingml/2006/main" w="9525">
+            <a:solidFill>
+              <a:srgbClr val="B8BCC4"/>
+            </a:solidFill>
+            <a:prstDash val="solid"/>
+          </a:ln>
+        </p:spPr>
+      </p:sp>
+      <p:sp>
+        <p:nvSpPr>
+          <p:cNvPr id="4" name="">
+            <a:extLst xmlns:a="http://schemas.openxmlformats.org/drawingml/2006/main">
+              <a:ext uri="{FF2B5EF4-FFF2-40B4-BE49-F238E27FC236}">
+                <a16:creationId xmlns:a16="http://schemas.microsoft.com/office/drawing/2014/main" id="{7944BF93-B836-4831-89CE-852C703D91AD}"/>
+              </a:ext>
+            </a:extLst>
+          </p:cNvPr>
+          <p:cNvSpPr>
+            <a:spLocks xmlns:a="http://schemas.openxmlformats.org/drawingml/2006/main" noGrp="1"/>
+          </p:cNvSpPr>
+          <p:nvPr/>
+        </p:nvSpPr>
+        <p:spPr>
+          <a:xfrm xmlns:a="http://schemas.openxmlformats.org/drawingml/2006/main">
+            <a:off x="11163300" y="6362700"/>
+            <a:ext cx="609600" cy="228600"/>
+          </a:xfrm>
+          <a:prstGeom xmlns:a="http://schemas.openxmlformats.org/drawingml/2006/main" prst="rect">
+            <a:avLst/>
+          </a:prstGeom>
+          <a:noFill xmlns:a="http://schemas.openxmlformats.org/drawingml/2006/main"/>
+          <a:ln xmlns:a="http://schemas.openxmlformats.org/drawingml/2006/main" w="0">
+            <a:noFill/>
+            <a:prstDash val="solid"/>
+          </a:ln>
+        </p:spPr>
+        <p:txBody>
+          <a:bodyPr xmlns:a="http://schemas.openxmlformats.org/drawingml/2006/main" anchor="t"/>
+          <a:lstStyle xmlns:a="http://schemas.openxmlformats.org/drawingml/2006/main"/>
+          <a:p xmlns:a="http://schemas.openxmlformats.org/drawingml/2006/main">
+            <a:pPr algn="r">
+              <a:buNone/>
+              <a:defRPr sz="1200" b="0">
+                <a:solidFill>
+                  <a:srgbClr val="52616B"/>
+                </a:solidFill>
+                <a:latin typeface="Arial"/>
+                <a:ea typeface="Arial"/>
+                <a:cs typeface="Arial"/>
+              </a:defRPr>
+            </a:pPr>
+            <a:r>
+              <a:rPr sz="1200" b="0">
+                <a:solidFill>
+                  <a:srgbClr val="52616B"/>
+                </a:solidFill>
+                <a:latin typeface="Arial"/>
+                <a:ea typeface="Arial"/>
+                <a:cs typeface="Arial"/>
+              </a:rPr>
+              <a:t>40</a:t>
+            </a:r>
+          </a:p>
+        </p:txBody>
+      </p:sp>
+      <p:sp>
+        <p:nvSpPr>
+          <p:cNvPr id="6" name="">
+            <a:extLst xmlns:a="http://schemas.openxmlformats.org/drawingml/2006/main">
+              <a:ext uri="{FF2B5EF4-FFF2-40B4-BE49-F238E27FC236}">
+                <a16:creationId xmlns:a16="http://schemas.microsoft.com/office/drawing/2014/main" id="{DBF73623-95B1-48A7-A168-959D4ACF9EF6}"/>
+              </a:ext>
+            </a:extLst>
+          </p:cNvPr>
+          <p:cNvSpPr>
+            <a:spLocks xmlns:a="http://schemas.openxmlformats.org/drawingml/2006/main" noGrp="1"/>
+          </p:cNvSpPr>
+          <p:nvPr/>
+        </p:nvSpPr>
+        <p:spPr>
+          <a:xfrm xmlns:a="http://schemas.openxmlformats.org/drawingml/2006/main">
+            <a:off x="8991600" y="1733550"/>
+            <a:ext cx="2724150" cy="3905250"/>
+          </a:xfrm>
+          <a:prstGeom xmlns:a="http://schemas.openxmlformats.org/drawingml/2006/main" prst="rect">
+            <a:avLst/>
+          </a:prstGeom>
+          <a:solidFill xmlns:a="http://schemas.openxmlformats.org/drawingml/2006/main">
+            <a:srgbClr val="EAF5FB"/>
+          </a:solidFill>
+          <a:ln xmlns:a="http://schemas.openxmlformats.org/drawingml/2006/main" w="9525">
+            <a:solidFill>
+              <a:srgbClr val="6DCBF4"/>
+            </a:solidFill>
+            <a:prstDash val="solid"/>
+          </a:ln>
+        </p:spPr>
+      </p:sp>
+      <p:sp>
+        <p:nvSpPr>
+          <p:cNvPr id="7" name="">
+            <a:extLst xmlns:a="http://schemas.openxmlformats.org/drawingml/2006/main">
+              <a:ext uri="{FF2B5EF4-FFF2-40B4-BE49-F238E27FC236}">
+                <a16:creationId xmlns:a16="http://schemas.microsoft.com/office/drawing/2014/main" id="{454D3BC9-AB19-4F57-985E-DDB05A7434C0}"/>
+              </a:ext>
+            </a:extLst>
+          </p:cNvPr>
+          <p:cNvSpPr>
+            <a:spLocks xmlns:a="http://schemas.openxmlformats.org/drawingml/2006/main" noGrp="1"/>
+          </p:cNvSpPr>
+          <p:nvPr/>
+        </p:nvSpPr>
+        <p:spPr>
+          <a:xfrm xmlns:a="http://schemas.openxmlformats.org/drawingml/2006/main">
+            <a:off x="9258300" y="2019300"/>
+            <a:ext cx="2095500" cy="247650"/>
+          </a:xfrm>
+          <a:prstGeom xmlns:a="http://schemas.openxmlformats.org/drawingml/2006/main" prst="rect">
+            <a:avLst/>
+          </a:prstGeom>
+          <a:noFill xmlns:a="http://schemas.openxmlformats.org/drawingml/2006/main"/>
+          <a:ln xmlns:a="http://schemas.openxmlformats.org/drawingml/2006/main" w="0">
+            <a:noFill/>
+            <a:prstDash val="solid"/>
+          </a:ln>
+        </p:spPr>
+        <p:txBody>
+          <a:bodyPr xmlns:a="http://schemas.openxmlformats.org/drawingml/2006/main" anchor="t"/>
+          <a:lstStyle xmlns:a="http://schemas.openxmlformats.org/drawingml/2006/main"/>
+          <a:p xmlns:a="http://schemas.openxmlformats.org/drawingml/2006/main">
+            <a:pPr algn="l">
+              <a:buNone/>
+              <a:defRPr sz="1275" b="1">
+                <a:solidFill>
+                  <a:srgbClr val="3D8DFF"/>
+                </a:solidFill>
+                <a:latin typeface="Arial"/>
+                <a:ea typeface="Arial"/>
+                <a:cs typeface="Arial"/>
+              </a:defRPr>
+            </a:pPr>
+            <a:r>
+              <a:rPr sz="1275" b="1">
+                <a:solidFill>
+                  <a:srgbClr val="3D8DFF"/>
+                </a:solidFill>
+                <a:latin typeface="Arial"/>
+                <a:ea typeface="Arial"/>
+                <a:cs typeface="Arial"/>
+              </a:rPr>
+              <a:t>RELATIVE RANKING</a:t>
+            </a:r>
+          </a:p>
+        </p:txBody>
+      </p:sp>
+      <p:sp>
+        <p:nvSpPr>
+          <p:cNvPr id="8" name="">
+            <a:extLst xmlns:a="http://schemas.openxmlformats.org/drawingml/2006/main">
+              <a:ext uri="{FF2B5EF4-FFF2-40B4-BE49-F238E27FC236}">
+                <a16:creationId xmlns:a16="http://schemas.microsoft.com/office/drawing/2014/main" id="{50CF5D67-77D5-4062-92DB-E9771F376463}"/>
+              </a:ext>
+            </a:extLst>
+          </p:cNvPr>
+          <p:cNvSpPr>
+            <a:spLocks xmlns:a="http://schemas.openxmlformats.org/drawingml/2006/main" noGrp="1"/>
+          </p:cNvSpPr>
+          <p:nvPr/>
+        </p:nvSpPr>
+        <p:spPr>
+          <a:xfrm xmlns:a="http://schemas.openxmlformats.org/drawingml/2006/main">
+            <a:off x="9258300" y="2571750"/>
+            <a:ext cx="2095500" cy="552450"/>
+          </a:xfrm>
+          <a:prstGeom xmlns:a="http://schemas.openxmlformats.org/drawingml/2006/main" prst="rect">
+            <a:avLst/>
+          </a:prstGeom>
+          <a:noFill xmlns:a="http://schemas.openxmlformats.org/drawingml/2006/main"/>
+          <a:ln xmlns:a="http://schemas.openxmlformats.org/drawingml/2006/main" w="0">
+            <a:noFill/>
+            <a:prstDash val="solid"/>
+          </a:ln>
+        </p:spPr>
+        <p:txBody>
+          <a:bodyPr xmlns:a="http://schemas.openxmlformats.org/drawingml/2006/main" anchor="t"/>
+          <a:lstStyle xmlns:a="http://schemas.openxmlformats.org/drawingml/2006/main"/>
+          <a:p xmlns:a="http://schemas.openxmlformats.org/drawingml/2006/main">
+            <a:pPr algn="l">
+              <a:buNone/>
+              <a:defRPr sz="3000" b="1">
+                <a:solidFill>
+                  <a:srgbClr val="101820"/>
+                </a:solidFill>
+                <a:latin typeface="Arial"/>
+                <a:ea typeface="Arial"/>
+                <a:cs typeface="Arial"/>
+              </a:defRPr>
+            </a:pPr>
+            <a:r>
+              <a:rPr sz="3000" b="1">
+                <a:solidFill>
+                  <a:srgbClr val="101820"/>
+                </a:solidFill>
+                <a:latin typeface="Arial"/>
+                <a:ea typeface="Arial"/>
+                <a:cs typeface="Arial"/>
+              </a:rPr>
+              <a:t>10.80%</a:t>
+            </a:r>
+          </a:p>
+        </p:txBody>
+      </p:sp>
+      <p:sp>
+        <p:nvSpPr>
+          <p:cNvPr id="9" name="">
+            <a:extLst xmlns:a="http://schemas.openxmlformats.org/drawingml/2006/main">
+              <a:ext uri="{FF2B5EF4-FFF2-40B4-BE49-F238E27FC236}">
+                <a16:creationId xmlns:a16="http://schemas.microsoft.com/office/drawing/2014/main" id="{7C0B5D7F-B17A-4AC9-835E-6E44FD9128EC}"/>
+              </a:ext>
+            </a:extLst>
+          </p:cNvPr>
+          <p:cNvSpPr>
+            <a:spLocks xmlns:a="http://schemas.openxmlformats.org/drawingml/2006/main" noGrp="1"/>
+          </p:cNvSpPr>
+          <p:nvPr/>
+        </p:nvSpPr>
+        <p:spPr>
+          <a:xfrm xmlns:a="http://schemas.openxmlformats.org/drawingml/2006/main">
+            <a:off x="9258300" y="3105150"/>
+            <a:ext cx="2095500" cy="400050"/>
+          </a:xfrm>
+          <a:prstGeom xmlns:a="http://schemas.openxmlformats.org/drawingml/2006/main" prst="rect">
+            <a:avLst/>
+          </a:prstGeom>
+          <a:noFill xmlns:a="http://schemas.openxmlformats.org/drawingml/2006/main"/>
+          <a:ln xmlns:a="http://schemas.openxmlformats.org/drawingml/2006/main" w="0">
+            <a:noFill/>
+            <a:prstDash val="solid"/>
+          </a:ln>
+        </p:spPr>
+        <p:txBody>
+          <a:bodyPr xmlns:a="http://schemas.openxmlformats.org/drawingml/2006/main" anchor="t"/>
+          <a:lstStyle xmlns:a="http://schemas.openxmlformats.org/drawingml/2006/main"/>
+          <a:p xmlns:a="http://schemas.openxmlformats.org/drawingml/2006/main">
+            <a:pPr algn="l">
+              <a:buNone/>
+              <a:defRPr sz="1650" b="0">
+                <a:solidFill>
+                  <a:srgbClr val="52616B"/>
+                </a:solidFill>
+                <a:latin typeface="Arial"/>
+                <a:ea typeface="Arial"/>
+                <a:cs typeface="Arial"/>
+              </a:defRPr>
+            </a:pPr>
+            <a:r>
+              <a:rPr sz="1650" b="0">
+                <a:solidFill>
+                  <a:srgbClr val="52616B"/>
+                </a:solidFill>
+                <a:latin typeface="Arial"/>
+                <a:ea typeface="Arial"/>
+                <a:cs typeface="Arial"/>
+              </a:rPr>
+              <a:t>net CAGR</a:t>
+            </a:r>
+          </a:p>
+        </p:txBody>
+      </p:sp>
+      <p:sp>
+        <p:nvSpPr>
+          <p:cNvPr id="10" name="">
+            <a:extLst xmlns:a="http://schemas.openxmlformats.org/drawingml/2006/main">
+              <a:ext uri="{FF2B5EF4-FFF2-40B4-BE49-F238E27FC236}">
+                <a16:creationId xmlns:a16="http://schemas.microsoft.com/office/drawing/2014/main" id="{DE7E78EB-BFD1-417B-B781-C8666F0A80F8}"/>
+              </a:ext>
+            </a:extLst>
+          </p:cNvPr>
+          <p:cNvSpPr>
+            <a:spLocks xmlns:a="http://schemas.openxmlformats.org/drawingml/2006/main" noGrp="1"/>
+          </p:cNvSpPr>
+          <p:nvPr/>
+        </p:nvSpPr>
+        <p:spPr>
+          <a:xfrm xmlns:a="http://schemas.openxmlformats.org/drawingml/2006/main">
+            <a:off x="9258300" y="3790950"/>
+            <a:ext cx="2095500" cy="552450"/>
+          </a:xfrm>
+          <a:prstGeom xmlns:a="http://schemas.openxmlformats.org/drawingml/2006/main" prst="rect">
+            <a:avLst/>
+          </a:prstGeom>
+          <a:noFill xmlns:a="http://schemas.openxmlformats.org/drawingml/2006/main"/>
+          <a:ln xmlns:a="http://schemas.openxmlformats.org/drawingml/2006/main" w="0">
+            <a:noFill/>
+            <a:prstDash val="solid"/>
+          </a:ln>
+        </p:spPr>
+        <p:txBody>
+          <a:bodyPr xmlns:a="http://schemas.openxmlformats.org/drawingml/2006/main" anchor="t"/>
+          <a:lstStyle xmlns:a="http://schemas.openxmlformats.org/drawingml/2006/main"/>
+          <a:p xmlns:a="http://schemas.openxmlformats.org/drawingml/2006/main">
+            <a:pPr algn="l">
+              <a:buNone/>
+              <a:defRPr sz="3000" b="1">
+                <a:solidFill>
+                  <a:srgbClr val="3D8DFF"/>
+                </a:solidFill>
+                <a:latin typeface="Arial"/>
+                <a:ea typeface="Arial"/>
+                <a:cs typeface="Arial"/>
+              </a:defRPr>
+            </a:pPr>
+            <a:r>
+              <a:rPr sz="3000" b="1">
+                <a:solidFill>
+                  <a:srgbClr val="3D8DFF"/>
+                </a:solidFill>
+                <a:latin typeface="Arial"/>
+                <a:ea typeface="Arial"/>
+                <a:cs typeface="Arial"/>
+              </a:rPr>
+              <a:t>+0.14 pp</a:t>
+            </a:r>
+          </a:p>
+        </p:txBody>
+      </p:sp>
+      <p:sp>
+        <p:nvSpPr>
+          <p:cNvPr id="11" name="">
+            <a:extLst xmlns:a="http://schemas.openxmlformats.org/drawingml/2006/main">
+              <a:ext uri="{FF2B5EF4-FFF2-40B4-BE49-F238E27FC236}">
+                <a16:creationId xmlns:a16="http://schemas.microsoft.com/office/drawing/2014/main" id="{5DFE562A-9915-489A-BC82-2F762B044604}"/>
+              </a:ext>
+            </a:extLst>
+          </p:cNvPr>
+          <p:cNvSpPr>
+            <a:spLocks xmlns:a="http://schemas.openxmlformats.org/drawingml/2006/main" noGrp="1"/>
+          </p:cNvSpPr>
+          <p:nvPr/>
+        </p:nvSpPr>
+        <p:spPr>
+          <a:xfrm xmlns:a="http://schemas.openxmlformats.org/drawingml/2006/main">
+            <a:off x="9258300" y="4324350"/>
+            <a:ext cx="2095500" cy="400050"/>
+          </a:xfrm>
+          <a:prstGeom xmlns:a="http://schemas.openxmlformats.org/drawingml/2006/main" prst="rect">
+            <a:avLst/>
+          </a:prstGeom>
+          <a:noFill xmlns:a="http://schemas.openxmlformats.org/drawingml/2006/main"/>
+          <a:ln xmlns:a="http://schemas.openxmlformats.org/drawingml/2006/main" w="0">
+            <a:noFill/>
+            <a:prstDash val="solid"/>
+          </a:ln>
+        </p:spPr>
+        <p:txBody>
+          <a:bodyPr xmlns:a="http://schemas.openxmlformats.org/drawingml/2006/main" anchor="t"/>
+          <a:lstStyle xmlns:a="http://schemas.openxmlformats.org/drawingml/2006/main"/>
+          <a:p xmlns:a="http://schemas.openxmlformats.org/drawingml/2006/main">
+            <a:pPr algn="l">
+              <a:buNone/>
+              <a:defRPr sz="1650" b="0">
+                <a:solidFill>
+                  <a:srgbClr val="52616B"/>
+                </a:solidFill>
+                <a:latin typeface="Arial"/>
+                <a:ea typeface="Arial"/>
+                <a:cs typeface="Arial"/>
+              </a:defRPr>
+            </a:pPr>
+            <a:r>
+              <a:rPr sz="1650" b="0">
+                <a:solidFill>
+                  <a:srgbClr val="52616B"/>
+                </a:solidFill>
+                <a:latin typeface="Arial"/>
+                <a:ea typeface="Arial"/>
+                <a:cs typeface="Arial"/>
+              </a:rPr>
+              <a:t>vs equal-weight 481</a:t>
+            </a:r>
+          </a:p>
+        </p:txBody>
+      </p:sp>
+      <p:sp>
+        <p:nvSpPr>
+          <p:cNvPr id="12" name="">
+            <a:extLst xmlns:a="http://schemas.openxmlformats.org/drawingml/2006/main">
+              <a:ext uri="{FF2B5EF4-FFF2-40B4-BE49-F238E27FC236}">
+                <a16:creationId xmlns:a16="http://schemas.microsoft.com/office/drawing/2014/main" id="{9A127473-A846-4BDC-AD98-EA1A2A6F11AD}"/>
+              </a:ext>
+            </a:extLst>
+          </p:cNvPr>
+          <p:cNvSpPr>
+            <a:spLocks xmlns:a="http://schemas.openxmlformats.org/drawingml/2006/main" noGrp="1"/>
+          </p:cNvSpPr>
+          <p:nvPr/>
+        </p:nvSpPr>
+        <p:spPr>
+          <a:xfrm xmlns:a="http://schemas.openxmlformats.org/drawingml/2006/main">
+            <a:off x="9258300" y="4972050"/>
+            <a:ext cx="2095500" cy="381000"/>
+          </a:xfrm>
+          <a:prstGeom xmlns:a="http://schemas.openxmlformats.org/drawingml/2006/main" prst="rect">
+            <a:avLst/>
+          </a:prstGeom>
+          <a:noFill xmlns:a="http://schemas.openxmlformats.org/drawingml/2006/main"/>
+          <a:ln xmlns:a="http://schemas.openxmlformats.org/drawingml/2006/main" w="0">
+            <a:noFill/>
+            <a:prstDash val="solid"/>
+          </a:ln>
+        </p:spPr>
+        <p:txBody>
+          <a:bodyPr xmlns:a="http://schemas.openxmlformats.org/drawingml/2006/main" anchor="t"/>
+          <a:lstStyle xmlns:a="http://schemas.openxmlformats.org/drawingml/2006/main"/>
+          <a:p xmlns:a="http://schemas.openxmlformats.org/drawingml/2006/main">
+            <a:pPr algn="l">
+              <a:buNone/>
+              <a:defRPr sz="1950" b="1">
+                <a:solidFill>
+                  <a:srgbClr val="101820"/>
+                </a:solidFill>
+                <a:latin typeface="Arial"/>
+                <a:ea typeface="Arial"/>
+                <a:cs typeface="Arial"/>
+              </a:defRPr>
+            </a:pPr>
+            <a:r>
+              <a:rPr sz="1950" b="1">
+                <a:solidFill>
+                  <a:srgbClr val="101820"/>
+                </a:solidFill>
+                <a:latin typeface="Arial"/>
+                <a:ea typeface="Arial"/>
+                <a:cs typeface="Arial"/>
+              </a:rPr>
+              <a:t>1.70× ending wealth</a:t>
+            </a:r>
+          </a:p>
+        </p:txBody>
+      </p:sp>
+      <p:pic>
+        <p:nvPicPr>
+          <p:cNvPr id="26" name=""/>
+          <p:cNvPicPr>
+            <a:picLocks xmlns:a="http://schemas.openxmlformats.org/drawingml/2006/main" noChangeAspect="1"/>
+          </p:cNvPicPr>
+          <p:nvPr/>
+        </p:nvPicPr>
+        <p:blipFill>
+          <a:blip xmlns:r="http://schemas.openxmlformats.org/officeDocument/2006/relationships" xmlns:a="http://schemas.openxmlformats.org/drawingml/2006/main" r:embed="R9ed118cdfe624eaa"/>
+          <a:stretch xmlns:a="http://schemas.openxmlformats.org/drawingml/2006/main"/>
+        </p:blipFill>
+        <p:spPr>
+          <a:xfrm xmlns:a="http://schemas.openxmlformats.org/drawingml/2006/main">
+            <a:off x="734786" y="1562100"/>
+            <a:ext cx="7674429" cy="4476750"/>
+          </a:xfrm>
+          <a:prstGeom xmlns:a="http://schemas.openxmlformats.org/drawingml/2006/main" prst="rect">
+            <a:avLst/>
+          </a:prstGeom>
+        </p:spPr>
+      </p:pic>
+    </p:spTree>
+    <p:extLst>
+      <p:ext uri="{BB962C8B-B14F-4D97-AF65-F5344CB8AC3E}">
+        <p14:creationId xmlns:p14="http://schemas.microsoft.com/office/powerpoint/2010/main" val="1063912481"/>
+      </p:ext>
+    </p:extLst>
+  </p:cSld>
+</p:sld>
+</file>
+
+<file path=ppt/slides/slide41.xml><?xml version="1.0" encoding="utf-8"?>
+<p:sld xmlns:p="http://schemas.openxmlformats.org/presentationml/2006/main">
+  <p:cSld>
+    <p:bg>
+      <p:bgPr>
+        <a:solidFill xmlns:a="http://schemas.openxmlformats.org/drawingml/2006/main">
+          <a:srgbClr val="FFFFFF"/>
+        </a:solidFill>
+      </p:bgPr>
+    </p:bg>
+    <p:spTree>
+      <p:nvGrpSpPr>
+        <p:cNvPr id="1" name=""/>
+        <p:cNvGrpSpPr/>
+        <p:nvPr/>
+      </p:nvGrpSpPr>
+      <p:grpSpPr>
+        <a:xfrm xmlns:a="http://schemas.openxmlformats.org/drawingml/2006/main"/>
+      </p:grpSpPr>
+      <p:sp>
+        <p:nvSpPr>
+          <p:cNvPr id="14" name="">
+            <a:extLst xmlns:a="http://schemas.openxmlformats.org/drawingml/2006/main">
+              <a:ext uri="{FF2B5EF4-FFF2-40B4-BE49-F238E27FC236}">
+                <a16:creationId xmlns:a16="http://schemas.microsoft.com/office/drawing/2014/main" id="{39B7BB28-C5CF-47BA-A918-FA17029EB44A}"/>
+              </a:ext>
+            </a:extLst>
+          </p:cNvPr>
+          <p:cNvSpPr>
+            <a:spLocks xmlns:a="http://schemas.openxmlformats.org/drawingml/2006/main" noGrp="1"/>
+          </p:cNvSpPr>
+          <p:nvPr/>
+        </p:nvSpPr>
+        <p:spPr>
+          <a:xfrm xmlns:a="http://schemas.openxmlformats.org/drawingml/2006/main">
+            <a:off x="400050" y="228600"/>
+            <a:ext cx="2857500" cy="228600"/>
+          </a:xfrm>
+          <a:prstGeom xmlns:a="http://schemas.openxmlformats.org/drawingml/2006/main" prst="rect">
+            <a:avLst/>
+          </a:prstGeom>
+          <a:noFill xmlns:a="http://schemas.openxmlformats.org/drawingml/2006/main"/>
+          <a:ln xmlns:a="http://schemas.openxmlformats.org/drawingml/2006/main" w="0">
+            <a:noFill/>
+            <a:prstDash val="solid"/>
+          </a:ln>
+        </p:spPr>
+        <p:txBody>
+          <a:bodyPr xmlns:a="http://schemas.openxmlformats.org/drawingml/2006/main" anchor="t"/>
+          <a:lstStyle xmlns:a="http://schemas.openxmlformats.org/drawingml/2006/main"/>
+          <a:p xmlns:a="http://schemas.openxmlformats.org/drawingml/2006/main">
+            <a:pPr algn="l">
+              <a:buNone/>
+              <a:defRPr sz="1200" b="1">
+                <a:solidFill>
+                  <a:srgbClr val="3D8DFF"/>
+                </a:solidFill>
+                <a:latin typeface="Arial"/>
+                <a:ea typeface="Arial"/>
+                <a:cs typeface="Arial"/>
+              </a:defRPr>
+            </a:pPr>
+            <a:r>
+              <a:rPr sz="1200" b="1">
+                <a:solidFill>
+                  <a:srgbClr val="3D8DFF"/>
+                </a:solidFill>
+                <a:latin typeface="Arial"/>
+                <a:ea typeface="Arial"/>
+                <a:cs typeface="Arial"/>
+              </a:rPr>
+              <a:t>LIT-MOM-03.4</a:t>
+            </a:r>
+          </a:p>
+        </p:txBody>
+      </p:sp>
+      <p:sp>
+        <p:nvSpPr>
+          <p:cNvPr id="2" name="">
+            <a:extLst xmlns:a="http://schemas.openxmlformats.org/drawingml/2006/main">
+              <a:ext uri="{FF2B5EF4-FFF2-40B4-BE49-F238E27FC236}">
+                <a16:creationId xmlns:a16="http://schemas.microsoft.com/office/drawing/2014/main" id="{8C401559-67C5-4215-B579-93FC871FC00D}"/>
+              </a:ext>
+            </a:extLst>
+          </p:cNvPr>
+          <p:cNvSpPr>
+            <a:spLocks xmlns:a="http://schemas.openxmlformats.org/drawingml/2006/main" noGrp="1"/>
+          </p:cNvSpPr>
+          <p:nvPr/>
+        </p:nvSpPr>
+        <p:spPr>
+          <a:xfrm xmlns:a="http://schemas.openxmlformats.org/drawingml/2006/main">
+            <a:off x="400050" y="476250"/>
+            <a:ext cx="11049000" cy="819150"/>
+          </a:xfrm>
+          <a:prstGeom xmlns:a="http://schemas.openxmlformats.org/drawingml/2006/main" prst="rect">
+            <a:avLst/>
+          </a:prstGeom>
+          <a:noFill xmlns:a="http://schemas.openxmlformats.org/drawingml/2006/main"/>
+          <a:ln xmlns:a="http://schemas.openxmlformats.org/drawingml/2006/main" w="0">
+            <a:noFill/>
+            <a:prstDash val="solid"/>
+          </a:ln>
+        </p:spPr>
+        <p:txBody>
+          <a:bodyPr xmlns:a="http://schemas.openxmlformats.org/drawingml/2006/main" anchor="t"/>
+          <a:lstStyle xmlns:a="http://schemas.openxmlformats.org/drawingml/2006/main"/>
+          <a:p xmlns:a="http://schemas.openxmlformats.org/drawingml/2006/main">
+            <a:pPr algn="l">
+              <a:buNone/>
+              <a:defRPr sz="2700" b="1">
+                <a:solidFill>
+                  <a:srgbClr val="101820"/>
+                </a:solidFill>
+                <a:latin typeface="Arial"/>
+                <a:ea typeface="Arial"/>
+                <a:cs typeface="Arial"/>
+              </a:defRPr>
+            </a:pPr>
+            <a:r>
+              <a:rPr sz="2700" b="1">
+                <a:solidFill>
+                  <a:srgbClr val="101820"/>
+                </a:solidFill>
+                <a:latin typeface="Arial"/>
+                <a:ea typeface="Arial"/>
+                <a:cs typeface="Arial"/>
+              </a:rPr>
+              <a:t>The cash gate costs return without buying meaningful protection</a:t>
+            </a:r>
+          </a:p>
+        </p:txBody>
+      </p:sp>
+      <p:sp>
+        <p:nvSpPr>
+          <p:cNvPr id="3" name="">
+            <a:extLst xmlns:a="http://schemas.openxmlformats.org/drawingml/2006/main">
+              <a:ext uri="{FF2B5EF4-FFF2-40B4-BE49-F238E27FC236}">
+                <a16:creationId xmlns:a16="http://schemas.microsoft.com/office/drawing/2014/main" id="{FE913BAC-F3B9-4338-8958-15CBEBB596BB}"/>
+              </a:ext>
+            </a:extLst>
+          </p:cNvPr>
+          <p:cNvSpPr>
+            <a:spLocks xmlns:a="http://schemas.openxmlformats.org/drawingml/2006/main" noGrp="1"/>
+          </p:cNvSpPr>
+          <p:nvPr/>
+        </p:nvSpPr>
+        <p:spPr>
+          <a:xfrm xmlns:a="http://schemas.openxmlformats.org/drawingml/2006/main">
+            <a:off x="400050" y="1428750"/>
+            <a:ext cx="11391900" cy="0"/>
+          </a:xfrm>
+          <a:prstGeom xmlns:a="http://schemas.openxmlformats.org/drawingml/2006/main" prst="line">
+            <a:avLst/>
+          </a:prstGeom>
+          <a:noFill xmlns:a="http://schemas.openxmlformats.org/drawingml/2006/main"/>
+          <a:ln xmlns:a="http://schemas.openxmlformats.org/drawingml/2006/main" w="9525">
+            <a:solidFill>
+              <a:srgbClr val="B8BCC4"/>
+            </a:solidFill>
+            <a:prstDash val="solid"/>
+          </a:ln>
+        </p:spPr>
+      </p:sp>
+      <p:sp>
+        <p:nvSpPr>
+          <p:cNvPr id="4" name="">
+            <a:extLst xmlns:a="http://schemas.openxmlformats.org/drawingml/2006/main">
+              <a:ext uri="{FF2B5EF4-FFF2-40B4-BE49-F238E27FC236}">
+                <a16:creationId xmlns:a16="http://schemas.microsoft.com/office/drawing/2014/main" id="{80D32FF2-05B5-4DF6-BBF4-B1464DC9B66A}"/>
+              </a:ext>
+            </a:extLst>
+          </p:cNvPr>
+          <p:cNvSpPr>
+            <a:spLocks xmlns:a="http://schemas.openxmlformats.org/drawingml/2006/main" noGrp="1"/>
+          </p:cNvSpPr>
+          <p:nvPr/>
+        </p:nvSpPr>
+        <p:spPr>
+          <a:xfrm xmlns:a="http://schemas.openxmlformats.org/drawingml/2006/main">
+            <a:off x="11163300" y="6362700"/>
+            <a:ext cx="609600" cy="228600"/>
+          </a:xfrm>
+          <a:prstGeom xmlns:a="http://schemas.openxmlformats.org/drawingml/2006/main" prst="rect">
+            <a:avLst/>
+          </a:prstGeom>
+          <a:noFill xmlns:a="http://schemas.openxmlformats.org/drawingml/2006/main"/>
+          <a:ln xmlns:a="http://schemas.openxmlformats.org/drawingml/2006/main" w="0">
+            <a:noFill/>
+            <a:prstDash val="solid"/>
+          </a:ln>
+        </p:spPr>
+        <p:txBody>
+          <a:bodyPr xmlns:a="http://schemas.openxmlformats.org/drawingml/2006/main" anchor="t"/>
+          <a:lstStyle xmlns:a="http://schemas.openxmlformats.org/drawingml/2006/main"/>
+          <a:p xmlns:a="http://schemas.openxmlformats.org/drawingml/2006/main">
+            <a:pPr algn="r">
+              <a:buNone/>
+              <a:defRPr sz="1200" b="0">
+                <a:solidFill>
+                  <a:srgbClr val="52616B"/>
+                </a:solidFill>
+                <a:latin typeface="Arial"/>
+                <a:ea typeface="Arial"/>
+                <a:cs typeface="Arial"/>
+              </a:defRPr>
+            </a:pPr>
+            <a:r>
+              <a:rPr sz="1200" b="0">
+                <a:solidFill>
+                  <a:srgbClr val="52616B"/>
+                </a:solidFill>
+                <a:latin typeface="Arial"/>
+                <a:ea typeface="Arial"/>
+                <a:cs typeface="Arial"/>
+              </a:rPr>
+              <a:t>41</a:t>
+            </a:r>
+          </a:p>
+        </p:txBody>
+      </p:sp>
+      <p:sp>
+        <p:nvSpPr>
+          <p:cNvPr id="6" name="">
+            <a:extLst xmlns:a="http://schemas.openxmlformats.org/drawingml/2006/main">
+              <a:ext uri="{FF2B5EF4-FFF2-40B4-BE49-F238E27FC236}">
+                <a16:creationId xmlns:a16="http://schemas.microsoft.com/office/drawing/2014/main" id="{8B7E846F-BE01-42E8-9EBB-9EA3FC7567F0}"/>
+              </a:ext>
+            </a:extLst>
+          </p:cNvPr>
+          <p:cNvSpPr>
+            <a:spLocks xmlns:a="http://schemas.openxmlformats.org/drawingml/2006/main" noGrp="1"/>
+          </p:cNvSpPr>
+          <p:nvPr/>
+        </p:nvSpPr>
+        <p:spPr>
+          <a:xfrm xmlns:a="http://schemas.openxmlformats.org/drawingml/2006/main">
+            <a:off x="8153400" y="1695450"/>
+            <a:ext cx="3429000" cy="4057650"/>
+          </a:xfrm>
+          <a:prstGeom xmlns:a="http://schemas.openxmlformats.org/drawingml/2006/main" prst="rect">
+            <a:avLst/>
+          </a:prstGeom>
+          <a:solidFill xmlns:a="http://schemas.openxmlformats.org/drawingml/2006/main">
+            <a:srgbClr val="EAF5FB"/>
+          </a:solidFill>
+          <a:ln xmlns:a="http://schemas.openxmlformats.org/drawingml/2006/main" w="9525">
+            <a:solidFill>
+              <a:srgbClr val="6DCBF4"/>
+            </a:solidFill>
+            <a:prstDash val="solid"/>
+          </a:ln>
+        </p:spPr>
+      </p:sp>
+      <p:sp>
+        <p:nvSpPr>
+          <p:cNvPr id="7" name="">
+            <a:extLst xmlns:a="http://schemas.openxmlformats.org/drawingml/2006/main">
+              <a:ext uri="{FF2B5EF4-FFF2-40B4-BE49-F238E27FC236}">
+                <a16:creationId xmlns:a16="http://schemas.microsoft.com/office/drawing/2014/main" id="{7A48CFB1-8F2F-43AD-84B5-5B62F4FCE8D1}"/>
+              </a:ext>
+            </a:extLst>
+          </p:cNvPr>
+          <p:cNvSpPr>
+            <a:spLocks xmlns:a="http://schemas.openxmlformats.org/drawingml/2006/main" noGrp="1"/>
+          </p:cNvSpPr>
+          <p:nvPr/>
+        </p:nvSpPr>
+        <p:spPr>
+          <a:xfrm xmlns:a="http://schemas.openxmlformats.org/drawingml/2006/main">
+            <a:off x="8496300" y="2000250"/>
+            <a:ext cx="2476500" cy="247650"/>
+          </a:xfrm>
+          <a:prstGeom xmlns:a="http://schemas.openxmlformats.org/drawingml/2006/main" prst="rect">
+            <a:avLst/>
+          </a:prstGeom>
+          <a:noFill xmlns:a="http://schemas.openxmlformats.org/drawingml/2006/main"/>
+          <a:ln xmlns:a="http://schemas.openxmlformats.org/drawingml/2006/main" w="0">
+            <a:noFill/>
+            <a:prstDash val="solid"/>
+          </a:ln>
+        </p:spPr>
+        <p:txBody>
+          <a:bodyPr xmlns:a="http://schemas.openxmlformats.org/drawingml/2006/main" anchor="t"/>
+          <a:lstStyle xmlns:a="http://schemas.openxmlformats.org/drawingml/2006/main"/>
+          <a:p xmlns:a="http://schemas.openxmlformats.org/drawingml/2006/main">
+            <a:pPr algn="l">
+              <a:buNone/>
+              <a:defRPr sz="1275" b="1">
+                <a:solidFill>
+                  <a:srgbClr val="3D8DFF"/>
+                </a:solidFill>
+                <a:latin typeface="Arial"/>
+                <a:ea typeface="Arial"/>
+                <a:cs typeface="Arial"/>
+              </a:defRPr>
+            </a:pPr>
+            <a:r>
+              <a:rPr sz="1275" b="1">
+                <a:solidFill>
+                  <a:srgbClr val="3D8DFF"/>
+                </a:solidFill>
+                <a:latin typeface="Arial"/>
+                <a:ea typeface="Arial"/>
+                <a:cs typeface="Arial"/>
+              </a:rPr>
+              <a:t>ABSOLUTE GATE</a:t>
+            </a:r>
+          </a:p>
+        </p:txBody>
+      </p:sp>
+      <p:sp>
+        <p:nvSpPr>
+          <p:cNvPr id="8" name="">
+            <a:extLst xmlns:a="http://schemas.openxmlformats.org/drawingml/2006/main">
+              <a:ext uri="{FF2B5EF4-FFF2-40B4-BE49-F238E27FC236}">
+                <a16:creationId xmlns:a16="http://schemas.microsoft.com/office/drawing/2014/main" id="{DC731ED7-5F85-42CB-A69F-0889CEA3331A}"/>
+              </a:ext>
+            </a:extLst>
+          </p:cNvPr>
+          <p:cNvSpPr>
+            <a:spLocks xmlns:a="http://schemas.openxmlformats.org/drawingml/2006/main" noGrp="1"/>
+          </p:cNvSpPr>
+          <p:nvPr/>
+        </p:nvSpPr>
+        <p:spPr>
+          <a:xfrm xmlns:a="http://schemas.openxmlformats.org/drawingml/2006/main">
+            <a:off x="8496300" y="2533650"/>
+            <a:ext cx="2686050" cy="609600"/>
+          </a:xfrm>
+          <a:prstGeom xmlns:a="http://schemas.openxmlformats.org/drawingml/2006/main" prst="rect">
+            <a:avLst/>
+          </a:prstGeom>
+          <a:noFill xmlns:a="http://schemas.openxmlformats.org/drawingml/2006/main"/>
+          <a:ln xmlns:a="http://schemas.openxmlformats.org/drawingml/2006/main" w="0">
+            <a:noFill/>
+            <a:prstDash val="solid"/>
+          </a:ln>
+        </p:spPr>
+        <p:txBody>
+          <a:bodyPr xmlns:a="http://schemas.openxmlformats.org/drawingml/2006/main" anchor="t"/>
+          <a:lstStyle xmlns:a="http://schemas.openxmlformats.org/drawingml/2006/main"/>
+          <a:p xmlns:a="http://schemas.openxmlformats.org/drawingml/2006/main">
+            <a:pPr algn="l">
+              <a:buNone/>
+              <a:defRPr sz="3375" b="1">
+                <a:solidFill>
+                  <a:srgbClr val="3D8DFF"/>
+                </a:solidFill>
+                <a:latin typeface="Arial"/>
+                <a:ea typeface="Arial"/>
+                <a:cs typeface="Arial"/>
+              </a:defRPr>
+            </a:pPr>
+            <a:r>
+              <a:rPr sz="3375" b="1">
+                <a:solidFill>
+                  <a:srgbClr val="3D8DFF"/>
+                </a:solidFill>
+                <a:latin typeface="Arial"/>
+                <a:ea typeface="Arial"/>
+                <a:cs typeface="Arial"/>
+              </a:rPr>
+              <a:t>-1.41 pp</a:t>
+            </a:r>
+          </a:p>
+        </p:txBody>
+      </p:sp>
+      <p:sp>
+        <p:nvSpPr>
+          <p:cNvPr id="9" name="">
+            <a:extLst xmlns:a="http://schemas.openxmlformats.org/drawingml/2006/main">
+              <a:ext uri="{FF2B5EF4-FFF2-40B4-BE49-F238E27FC236}">
+                <a16:creationId xmlns:a16="http://schemas.microsoft.com/office/drawing/2014/main" id="{406DC0E8-33AD-4797-87D6-8B560493E789}"/>
+              </a:ext>
+            </a:extLst>
+          </p:cNvPr>
+          <p:cNvSpPr>
+            <a:spLocks xmlns:a="http://schemas.openxmlformats.org/drawingml/2006/main" noGrp="1"/>
+          </p:cNvSpPr>
+          <p:nvPr/>
+        </p:nvSpPr>
+        <p:spPr>
+          <a:xfrm xmlns:a="http://schemas.openxmlformats.org/drawingml/2006/main">
+            <a:off x="8496300" y="3105150"/>
+            <a:ext cx="2686050" cy="400050"/>
+          </a:xfrm>
+          <a:prstGeom xmlns:a="http://schemas.openxmlformats.org/drawingml/2006/main" prst="rect">
+            <a:avLst/>
+          </a:prstGeom>
+          <a:noFill xmlns:a="http://schemas.openxmlformats.org/drawingml/2006/main"/>
+          <a:ln xmlns:a="http://schemas.openxmlformats.org/drawingml/2006/main" w="0">
+            <a:noFill/>
+            <a:prstDash val="solid"/>
+          </a:ln>
+        </p:spPr>
+        <p:txBody>
+          <a:bodyPr xmlns:a="http://schemas.openxmlformats.org/drawingml/2006/main" anchor="t"/>
+          <a:lstStyle xmlns:a="http://schemas.openxmlformats.org/drawingml/2006/main"/>
+          <a:p xmlns:a="http://schemas.openxmlformats.org/drawingml/2006/main">
+            <a:pPr algn="l">
+              <a:buNone/>
+              <a:defRPr sz="1725" b="0">
+                <a:solidFill>
+                  <a:srgbClr val="52616B"/>
+                </a:solidFill>
+                <a:latin typeface="Arial"/>
+                <a:ea typeface="Arial"/>
+                <a:cs typeface="Arial"/>
+              </a:defRPr>
+            </a:pPr>
+            <a:r>
+              <a:rPr sz="1725" b="0">
+                <a:solidFill>
+                  <a:srgbClr val="52616B"/>
+                </a:solidFill>
+                <a:latin typeface="Arial"/>
+                <a:ea typeface="Arial"/>
+                <a:cs typeface="Arial"/>
+              </a:rPr>
+              <a:t>CAGR vs relative-only</a:t>
+            </a:r>
+          </a:p>
+        </p:txBody>
+      </p:sp>
+      <p:sp>
+        <p:nvSpPr>
+          <p:cNvPr id="10" name="">
+            <a:extLst xmlns:a="http://schemas.openxmlformats.org/drawingml/2006/main">
+              <a:ext uri="{FF2B5EF4-FFF2-40B4-BE49-F238E27FC236}">
+                <a16:creationId xmlns:a16="http://schemas.microsoft.com/office/drawing/2014/main" id="{A0EB914A-A236-47F4-91E9-BA72FF10432A}"/>
+              </a:ext>
+            </a:extLst>
+          </p:cNvPr>
+          <p:cNvSpPr>
+            <a:spLocks xmlns:a="http://schemas.openxmlformats.org/drawingml/2006/main" noGrp="1"/>
+          </p:cNvSpPr>
+          <p:nvPr/>
+        </p:nvSpPr>
+        <p:spPr>
+          <a:xfrm xmlns:a="http://schemas.openxmlformats.org/drawingml/2006/main">
+            <a:off x="8496300" y="3714750"/>
+            <a:ext cx="2686050" cy="0"/>
+          </a:xfrm>
+          <a:prstGeom xmlns:a="http://schemas.openxmlformats.org/drawingml/2006/main" prst="line">
+            <a:avLst/>
+          </a:prstGeom>
+          <a:noFill xmlns:a="http://schemas.openxmlformats.org/drawingml/2006/main"/>
+          <a:ln xmlns:a="http://schemas.openxmlformats.org/drawingml/2006/main" w="19050">
+            <a:solidFill>
+              <a:srgbClr val="6DCBF4"/>
+            </a:solidFill>
+            <a:prstDash val="solid"/>
+          </a:ln>
+        </p:spPr>
+      </p:sp>
+      <p:sp>
+        <p:nvSpPr>
+          <p:cNvPr id="11" name="">
+            <a:extLst xmlns:a="http://schemas.openxmlformats.org/drawingml/2006/main">
+              <a:ext uri="{FF2B5EF4-FFF2-40B4-BE49-F238E27FC236}">
+                <a16:creationId xmlns:a16="http://schemas.microsoft.com/office/drawing/2014/main" id="{63C90848-627F-4872-9F08-0BCEBC58FC88}"/>
+              </a:ext>
+            </a:extLst>
+          </p:cNvPr>
+          <p:cNvSpPr>
+            <a:spLocks xmlns:a="http://schemas.openxmlformats.org/drawingml/2006/main" noGrp="1"/>
+          </p:cNvSpPr>
+          <p:nvPr/>
+        </p:nvSpPr>
+        <p:spPr>
+          <a:xfrm xmlns:a="http://schemas.openxmlformats.org/drawingml/2006/main">
+            <a:off x="8496300" y="3962400"/>
+            <a:ext cx="2686050" cy="323850"/>
+          </a:xfrm>
+          <a:prstGeom xmlns:a="http://schemas.openxmlformats.org/drawingml/2006/main" prst="rect">
+            <a:avLst/>
+          </a:prstGeom>
+          <a:noFill xmlns:a="http://schemas.openxmlformats.org/drawingml/2006/main"/>
+          <a:ln xmlns:a="http://schemas.openxmlformats.org/drawingml/2006/main" w="0">
+            <a:noFill/>
+            <a:prstDash val="solid"/>
+          </a:ln>
+        </p:spPr>
+        <p:txBody>
+          <a:bodyPr xmlns:a="http://schemas.openxmlformats.org/drawingml/2006/main" anchor="t"/>
+          <a:lstStyle xmlns:a="http://schemas.openxmlformats.org/drawingml/2006/main"/>
+          <a:p xmlns:a="http://schemas.openxmlformats.org/drawingml/2006/main">
+            <a:pPr algn="l">
+              <a:buNone/>
+              <a:defRPr sz="1575" b="1">
+                <a:solidFill>
+                  <a:srgbClr val="101820"/>
+                </a:solidFill>
+                <a:latin typeface="Arial"/>
+                <a:ea typeface="Arial"/>
+                <a:cs typeface="Arial"/>
+              </a:defRPr>
+            </a:pPr>
+            <a:r>
+              <a:rPr sz="1575" b="1">
+                <a:solidFill>
+                  <a:srgbClr val="101820"/>
+                </a:solidFill>
+                <a:latin typeface="Arial"/>
+                <a:ea typeface="Arial"/>
+                <a:cs typeface="Arial"/>
+              </a:rPr>
+              <a:t>+0.05 pp</a:t>
+            </a:r>
+          </a:p>
+        </p:txBody>
+      </p:sp>
+      <p:sp>
+        <p:nvSpPr>
+          <p:cNvPr id="12" name="">
+            <a:extLst xmlns:a="http://schemas.openxmlformats.org/drawingml/2006/main">
+              <a:ext uri="{FF2B5EF4-FFF2-40B4-BE49-F238E27FC236}">
+                <a16:creationId xmlns:a16="http://schemas.microsoft.com/office/drawing/2014/main" id="{70090FDC-931D-4B56-AD5D-C71AA6FC29F9}"/>
+              </a:ext>
+            </a:extLst>
+          </p:cNvPr>
+          <p:cNvSpPr>
+            <a:spLocks xmlns:a="http://schemas.openxmlformats.org/drawingml/2006/main" noGrp="1"/>
+          </p:cNvSpPr>
+          <p:nvPr/>
+        </p:nvSpPr>
+        <p:spPr>
+          <a:xfrm xmlns:a="http://schemas.openxmlformats.org/drawingml/2006/main">
+            <a:off x="8496300" y="4419600"/>
+            <a:ext cx="2686050" cy="1009650"/>
+          </a:xfrm>
+          <a:prstGeom xmlns:a="http://schemas.openxmlformats.org/drawingml/2006/main" prst="rect">
+            <a:avLst/>
+          </a:prstGeom>
+          <a:noFill xmlns:a="http://schemas.openxmlformats.org/drawingml/2006/main"/>
+          <a:ln xmlns:a="http://schemas.openxmlformats.org/drawingml/2006/main" w="0">
+            <a:noFill/>
+            <a:prstDash val="solid"/>
+          </a:ln>
+        </p:spPr>
+        <p:txBody>
+          <a:bodyPr xmlns:a="http://schemas.openxmlformats.org/drawingml/2006/main" anchor="t"/>
+          <a:lstStyle xmlns:a="http://schemas.openxmlformats.org/drawingml/2006/main"/>
+          <a:p xmlns:a="http://schemas.openxmlformats.org/drawingml/2006/main">
+            <a:pPr algn="l">
+              <a:buNone/>
+              <a:defRPr sz="1725" b="0">
+                <a:solidFill>
+                  <a:srgbClr val="52616B"/>
+                </a:solidFill>
+                <a:latin typeface="Arial"/>
+                <a:ea typeface="Arial"/>
+                <a:cs typeface="Arial"/>
+              </a:defRPr>
+            </a:pPr>
+            <a:r>
+              <a:rPr sz="1725" b="0">
+                <a:solidFill>
+                  <a:srgbClr val="52616B"/>
+                </a:solidFill>
+                <a:latin typeface="Arial"/>
+                <a:ea typeface="Arial"/>
+                <a:cs typeface="Arial"/>
+              </a:rPr>
+              <a:t>drawdown improvement</a:t>
+            </a:r>
+          </a:p>
+          <a:p xmlns:a="http://schemas.openxmlformats.org/drawingml/2006/main">
+            <a:pPr algn="l">
+              <a:buNone/>
+              <a:defRPr sz="1725" b="0">
+                <a:solidFill>
+                  <a:srgbClr val="52616B"/>
+                </a:solidFill>
+                <a:latin typeface="Arial"/>
+                <a:ea typeface="Arial"/>
+                <a:cs typeface="Arial"/>
+              </a:defRPr>
+            </a:pPr>
+            <a:r>
+              <a:rPr sz="1725" b="0">
+                <a:solidFill>
+                  <a:srgbClr val="52616B"/>
+                </a:solidFill>
+                <a:latin typeface="Arial"/>
+                <a:ea typeface="Arial"/>
+                <a:cs typeface="Arial"/>
+              </a:rPr>
+              <a:t>-20.62% vs -20.67%</a:t>
+            </a:r>
+          </a:p>
+        </p:txBody>
+      </p:sp>
+      <p:sp>
+        <p:nvSpPr>
+          <p:cNvPr id="13" name="">
+            <a:extLst xmlns:a="http://schemas.openxmlformats.org/drawingml/2006/main">
+              <a:ext uri="{FF2B5EF4-FFF2-40B4-BE49-F238E27FC236}">
+                <a16:creationId xmlns:a16="http://schemas.microsoft.com/office/drawing/2014/main" id="{F166845D-8E26-4804-AAA3-D76C79B2D4FB}"/>
+              </a:ext>
+            </a:extLst>
+          </p:cNvPr>
+          <p:cNvSpPr>
+            <a:spLocks xmlns:a="http://schemas.openxmlformats.org/drawingml/2006/main" noGrp="1"/>
+          </p:cNvSpPr>
+          <p:nvPr/>
+        </p:nvSpPr>
+        <p:spPr>
+          <a:xfrm xmlns:a="http://schemas.openxmlformats.org/drawingml/2006/main">
+            <a:off x="1066800" y="5886450"/>
+            <a:ext cx="9620250" cy="323850"/>
+          </a:xfrm>
+          <a:prstGeom xmlns:a="http://schemas.openxmlformats.org/drawingml/2006/main" prst="rect">
+            <a:avLst/>
+          </a:prstGeom>
+          <a:noFill xmlns:a="http://schemas.openxmlformats.org/drawingml/2006/main"/>
+          <a:ln xmlns:a="http://schemas.openxmlformats.org/drawingml/2006/main" w="0">
+            <a:noFill/>
+            <a:prstDash val="solid"/>
+          </a:ln>
+        </p:spPr>
+        <p:txBody>
+          <a:bodyPr xmlns:a="http://schemas.openxmlformats.org/drawingml/2006/main" anchor="t"/>
+          <a:lstStyle xmlns:a="http://schemas.openxmlformats.org/drawingml/2006/main"/>
+          <a:p xmlns:a="http://schemas.openxmlformats.org/drawingml/2006/main">
+            <a:pPr algn="ctr">
+              <a:buNone/>
+              <a:defRPr sz="1800" b="1">
+                <a:solidFill>
+                  <a:srgbClr val="101820"/>
+                </a:solidFill>
+                <a:latin typeface="Arial"/>
+                <a:ea typeface="Arial"/>
+                <a:cs typeface="Arial"/>
+              </a:defRPr>
+            </a:pPr>
+            <a:r>
+              <a:rPr sz="1800" b="1">
+                <a:solidFill>
+                  <a:srgbClr val="101820"/>
+                </a:solidFill>
+                <a:latin typeface="Arial"/>
+                <a:ea typeface="Arial"/>
+                <a:cs typeface="Arial"/>
+              </a:rPr>
+              <a:t>The cash gate gave up return for almost no added drawdown relief.</a:t>
+            </a:r>
+          </a:p>
+        </p:txBody>
+      </p:sp>
+      <p:sp>
+        <p:nvSpPr>
+          <p:cNvPr id="16" name="">
+            <a:extLst xmlns:a="http://schemas.openxmlformats.org/drawingml/2006/main">
+              <a:ext uri="{FF2B5EF4-FFF2-40B4-BE49-F238E27FC236}">
+                <a16:creationId xmlns:a16="http://schemas.microsoft.com/office/drawing/2014/main" id="{CBB05286-4B59-4C91-A588-5CD09F062F89}"/>
+              </a:ext>
+            </a:extLst>
+          </p:cNvPr>
+          <p:cNvSpPr>
+            <a:spLocks xmlns:a="http://schemas.openxmlformats.org/drawingml/2006/main" noGrp="1"/>
+          </p:cNvSpPr>
+          <p:nvPr/>
+        </p:nvSpPr>
+        <p:spPr>
+          <a:xfrm xmlns:a="http://schemas.openxmlformats.org/drawingml/2006/main">
+            <a:off x="11144250" y="6324600"/>
+            <a:ext cx="628650" cy="266700"/>
+          </a:xfrm>
+          <a:prstGeom xmlns:a="http://schemas.openxmlformats.org/drawingml/2006/main" prst="rect">
+            <a:avLst/>
+          </a:prstGeom>
+          <a:noFill xmlns:a="http://schemas.openxmlformats.org/drawingml/2006/main"/>
+          <a:ln xmlns:a="http://schemas.openxmlformats.org/drawingml/2006/main" w="0">
+            <a:noFill/>
+            <a:prstDash val="solid"/>
+          </a:ln>
+        </p:spPr>
+        <p:txBody>
+          <a:bodyPr xmlns:a="http://schemas.openxmlformats.org/drawingml/2006/main" anchor="t"/>
+          <a:lstStyle xmlns:a="http://schemas.openxmlformats.org/drawingml/2006/main"/>
+          <a:p xmlns:a="http://schemas.openxmlformats.org/drawingml/2006/main">
+            <a:pPr algn="r">
+              <a:buNone/>
+              <a:defRPr sz="1200" b="0">
+                <a:solidFill>
+                  <a:srgbClr val="52616B"/>
+                </a:solidFill>
+                <a:latin typeface="Arial"/>
+                <a:ea typeface="Arial"/>
+                <a:cs typeface="Arial"/>
+              </a:defRPr>
+            </a:pPr>
+            <a:r>
+              <a:rPr sz="1200" b="0">
+                <a:solidFill>
+                  <a:srgbClr val="52616B"/>
+                </a:solidFill>
+                <a:latin typeface="Arial"/>
+                <a:ea typeface="Arial"/>
+                <a:cs typeface="Arial"/>
+              </a:rPr>
+              <a:t/>
+            </a:r>
+          </a:p>
+        </p:txBody>
+      </p:sp>
+      <p:pic>
+        <p:nvPicPr>
+          <p:cNvPr id="31" name=""/>
+          <p:cNvPicPr>
+            <a:picLocks xmlns:a="http://schemas.openxmlformats.org/drawingml/2006/main" noChangeAspect="1"/>
+          </p:cNvPicPr>
+          <p:nvPr/>
+        </p:nvPicPr>
+        <p:blipFill>
+          <a:blip xmlns:r="http://schemas.openxmlformats.org/officeDocument/2006/relationships" xmlns:a="http://schemas.openxmlformats.org/drawingml/2006/main" r:embed="Rf83c0eeb3c6a4c82"/>
+          <a:stretch xmlns:a="http://schemas.openxmlformats.org/drawingml/2006/main"/>
+        </p:blipFill>
+        <p:spPr>
+          <a:xfrm xmlns:a="http://schemas.openxmlformats.org/drawingml/2006/main">
+            <a:off x="818956" y="1754868"/>
+            <a:ext cx="6686938" cy="3900714"/>
+          </a:xfrm>
+          <a:prstGeom xmlns:a="http://schemas.openxmlformats.org/drawingml/2006/main" prst="rect">
+            <a:avLst/>
+          </a:prstGeom>
+        </p:spPr>
+      </p:pic>
+    </p:spTree>
+    <p:extLst>
+      <p:ext uri="{BB962C8B-B14F-4D97-AF65-F5344CB8AC3E}">
+        <p14:creationId xmlns:p14="http://schemas.microsoft.com/office/powerpoint/2010/main" val="1019663795"/>
+      </p:ext>
+    </p:extLst>
+  </p:cSld>
+</p:sld>
+</file>
+
+<file path=ppt/slides/slide42.xml><?xml version="1.0" encoding="utf-8"?>
+<p:sld xmlns:p="http://schemas.openxmlformats.org/presentationml/2006/main">
+  <p:cSld>
+    <p:bg>
+      <p:bgPr>
+        <a:solidFill xmlns:a="http://schemas.openxmlformats.org/drawingml/2006/main">
+          <a:srgbClr val="FFFFFF"/>
+        </a:solidFill>
+      </p:bgPr>
+    </p:bg>
+    <p:spTree>
+      <p:nvGrpSpPr>
+        <p:cNvPr id="1" name=""/>
+        <p:cNvGrpSpPr/>
+        <p:nvPr/>
+      </p:nvGrpSpPr>
+      <p:grpSpPr>
+        <a:xfrm xmlns:a="http://schemas.openxmlformats.org/drawingml/2006/main"/>
+      </p:grpSpPr>
+      <p:sp>
+        <p:nvSpPr>
+          <p:cNvPr id="16" name="">
+            <a:extLst xmlns:a="http://schemas.openxmlformats.org/drawingml/2006/main">
+              <a:ext uri="{FF2B5EF4-FFF2-40B4-BE49-F238E27FC236}">
+                <a16:creationId xmlns:a16="http://schemas.microsoft.com/office/drawing/2014/main" id="{D2DB7632-9321-4B0D-B49B-BAF52F1D5F3F}"/>
+              </a:ext>
+            </a:extLst>
+          </p:cNvPr>
+          <p:cNvSpPr>
+            <a:spLocks xmlns:a="http://schemas.openxmlformats.org/drawingml/2006/main" noGrp="1"/>
+          </p:cNvSpPr>
+          <p:nvPr/>
+        </p:nvSpPr>
+        <p:spPr>
+          <a:xfrm xmlns:a="http://schemas.openxmlformats.org/drawingml/2006/main">
+            <a:off x="400050" y="228600"/>
+            <a:ext cx="2857500" cy="228600"/>
+          </a:xfrm>
+          <a:prstGeom xmlns:a="http://schemas.openxmlformats.org/drawingml/2006/main" prst="rect">
+            <a:avLst/>
+          </a:prstGeom>
+          <a:noFill xmlns:a="http://schemas.openxmlformats.org/drawingml/2006/main"/>
+          <a:ln xmlns:a="http://schemas.openxmlformats.org/drawingml/2006/main" w="0">
+            <a:noFill/>
+            <a:prstDash val="solid"/>
+          </a:ln>
+        </p:spPr>
+        <p:txBody>
+          <a:bodyPr xmlns:a="http://schemas.openxmlformats.org/drawingml/2006/main" anchor="t"/>
+          <a:lstStyle xmlns:a="http://schemas.openxmlformats.org/drawingml/2006/main"/>
+          <a:p xmlns:a="http://schemas.openxmlformats.org/drawingml/2006/main">
+            <a:pPr algn="l">
+              <a:buNone/>
+              <a:defRPr sz="1200" b="1">
+                <a:solidFill>
+                  <a:srgbClr val="3D8DFF"/>
+                </a:solidFill>
+                <a:latin typeface="Arial"/>
+                <a:ea typeface="Arial"/>
+                <a:cs typeface="Arial"/>
+              </a:defRPr>
+            </a:pPr>
+            <a:r>
+              <a:rPr sz="1200" b="1">
+                <a:solidFill>
+                  <a:srgbClr val="3D8DFF"/>
+                </a:solidFill>
+                <a:latin typeface="Arial"/>
+                <a:ea typeface="Arial"/>
+                <a:cs typeface="Arial"/>
+              </a:rPr>
+              <a:t>LIT-MOM-03.4</a:t>
+            </a:r>
+          </a:p>
+        </p:txBody>
+      </p:sp>
+      <p:sp>
+        <p:nvSpPr>
+          <p:cNvPr id="2" name="">
+            <a:extLst xmlns:a="http://schemas.openxmlformats.org/drawingml/2006/main">
+              <a:ext uri="{FF2B5EF4-FFF2-40B4-BE49-F238E27FC236}">
+                <a16:creationId xmlns:a16="http://schemas.microsoft.com/office/drawing/2014/main" id="{4F6E0FE8-6C1B-4A13-9D2D-6E11399D4DD1}"/>
+              </a:ext>
+            </a:extLst>
+          </p:cNvPr>
+          <p:cNvSpPr>
+            <a:spLocks xmlns:a="http://schemas.openxmlformats.org/drawingml/2006/main" noGrp="1"/>
+          </p:cNvSpPr>
+          <p:nvPr/>
+        </p:nvSpPr>
+        <p:spPr>
+          <a:xfrm xmlns:a="http://schemas.openxmlformats.org/drawingml/2006/main">
+            <a:off x="400050" y="476250"/>
+            <a:ext cx="11049000" cy="819150"/>
+          </a:xfrm>
+          <a:prstGeom xmlns:a="http://schemas.openxmlformats.org/drawingml/2006/main" prst="rect">
+            <a:avLst/>
+          </a:prstGeom>
+          <a:noFill xmlns:a="http://schemas.openxmlformats.org/drawingml/2006/main"/>
+          <a:ln xmlns:a="http://schemas.openxmlformats.org/drawingml/2006/main" w="0">
+            <a:noFill/>
+            <a:prstDash val="solid"/>
+          </a:ln>
+        </p:spPr>
+        <p:txBody>
+          <a:bodyPr xmlns:a="http://schemas.openxmlformats.org/drawingml/2006/main" anchor="t"/>
+          <a:lstStyle xmlns:a="http://schemas.openxmlformats.org/drawingml/2006/main"/>
+          <a:p xmlns:a="http://schemas.openxmlformats.org/drawingml/2006/main">
+            <a:pPr algn="l">
+              <a:buNone/>
+              <a:defRPr sz="2700" b="1">
+                <a:solidFill>
+                  <a:srgbClr val="101820"/>
+                </a:solidFill>
+                <a:latin typeface="Arial"/>
+                <a:ea typeface="Arial"/>
+                <a:cs typeface="Arial"/>
+              </a:defRPr>
+            </a:pPr>
+            <a:r>
+              <a:rPr sz="2700" b="1">
+                <a:solidFill>
+                  <a:srgbClr val="101820"/>
+                </a:solidFill>
+                <a:latin typeface="Arial"/>
+                <a:ea typeface="Arial"/>
+                <a:cs typeface="Arial"/>
+              </a:rPr>
+              <a:t>The replay is admissible—and the exact stock implementation stops</a:t>
+            </a:r>
+          </a:p>
+        </p:txBody>
+      </p:sp>
+      <p:sp>
+        <p:nvSpPr>
+          <p:cNvPr id="3" name="">
+            <a:extLst xmlns:a="http://schemas.openxmlformats.org/drawingml/2006/main">
+              <a:ext uri="{FF2B5EF4-FFF2-40B4-BE49-F238E27FC236}">
+                <a16:creationId xmlns:a16="http://schemas.microsoft.com/office/drawing/2014/main" id="{0E0B56DB-4E40-4B87-BA34-B14274318353}"/>
+              </a:ext>
+            </a:extLst>
+          </p:cNvPr>
+          <p:cNvSpPr>
+            <a:spLocks xmlns:a="http://schemas.openxmlformats.org/drawingml/2006/main" noGrp="1"/>
+          </p:cNvSpPr>
+          <p:nvPr/>
+        </p:nvSpPr>
+        <p:spPr>
+          <a:xfrm xmlns:a="http://schemas.openxmlformats.org/drawingml/2006/main">
+            <a:off x="400050" y="1428750"/>
+            <a:ext cx="11391900" cy="0"/>
+          </a:xfrm>
+          <a:prstGeom xmlns:a="http://schemas.openxmlformats.org/drawingml/2006/main" prst="line">
+            <a:avLst/>
+          </a:prstGeom>
+          <a:noFill xmlns:a="http://schemas.openxmlformats.org/drawingml/2006/main"/>
+          <a:ln xmlns:a="http://schemas.openxmlformats.org/drawingml/2006/main" w="9525">
+            <a:solidFill>
+              <a:srgbClr val="B8BCC4"/>
+            </a:solidFill>
+            <a:prstDash val="solid"/>
+          </a:ln>
+        </p:spPr>
+      </p:sp>
+      <p:sp>
+        <p:nvSpPr>
+          <p:cNvPr id="4" name="">
+            <a:extLst xmlns:a="http://schemas.openxmlformats.org/drawingml/2006/main">
+              <a:ext uri="{FF2B5EF4-FFF2-40B4-BE49-F238E27FC236}">
+                <a16:creationId xmlns:a16="http://schemas.microsoft.com/office/drawing/2014/main" id="{609465AD-88DC-48BC-BDAC-EBEFA9C8F7B5}"/>
+              </a:ext>
+            </a:extLst>
+          </p:cNvPr>
+          <p:cNvSpPr>
+            <a:spLocks xmlns:a="http://schemas.openxmlformats.org/drawingml/2006/main" noGrp="1"/>
+          </p:cNvSpPr>
+          <p:nvPr/>
+        </p:nvSpPr>
+        <p:spPr>
+          <a:xfrm xmlns:a="http://schemas.openxmlformats.org/drawingml/2006/main">
+            <a:off x="11163300" y="6362700"/>
+            <a:ext cx="609600" cy="228600"/>
+          </a:xfrm>
+          <a:prstGeom xmlns:a="http://schemas.openxmlformats.org/drawingml/2006/main" prst="rect">
+            <a:avLst/>
+          </a:prstGeom>
+          <a:noFill xmlns:a="http://schemas.openxmlformats.org/drawingml/2006/main"/>
+          <a:ln xmlns:a="http://schemas.openxmlformats.org/drawingml/2006/main" w="0">
+            <a:noFill/>
+            <a:prstDash val="solid"/>
+          </a:ln>
+        </p:spPr>
+        <p:txBody>
+          <a:bodyPr xmlns:a="http://schemas.openxmlformats.org/drawingml/2006/main" anchor="t"/>
+          <a:lstStyle xmlns:a="http://schemas.openxmlformats.org/drawingml/2006/main"/>
+          <a:p xmlns:a="http://schemas.openxmlformats.org/drawingml/2006/main">
+            <a:pPr algn="r">
+              <a:buNone/>
+              <a:defRPr sz="1200" b="0">
+                <a:solidFill>
+                  <a:srgbClr val="52616B"/>
+                </a:solidFill>
+                <a:latin typeface="Arial"/>
+                <a:ea typeface="Arial"/>
+                <a:cs typeface="Arial"/>
+              </a:defRPr>
+            </a:pPr>
+            <a:r>
+              <a:rPr sz="1200" b="0">
+                <a:solidFill>
+                  <a:srgbClr val="52616B"/>
+                </a:solidFill>
+                <a:latin typeface="Arial"/>
+                <a:ea typeface="Arial"/>
+                <a:cs typeface="Arial"/>
+              </a:rPr>
+              <a:t>42</a:t>
+            </a:r>
+          </a:p>
+        </p:txBody>
+      </p:sp>
+      <p:sp>
+        <p:nvSpPr>
+          <p:cNvPr id="5" name="">
+            <a:extLst xmlns:a="http://schemas.openxmlformats.org/drawingml/2006/main">
+              <a:ext uri="{FF2B5EF4-FFF2-40B4-BE49-F238E27FC236}">
+                <a16:creationId xmlns:a16="http://schemas.microsoft.com/office/drawing/2014/main" id="{CD393174-0A3C-4E18-A0E5-CFFEAB42B506}"/>
+              </a:ext>
+            </a:extLst>
+          </p:cNvPr>
+          <p:cNvSpPr>
+            <a:spLocks xmlns:a="http://schemas.openxmlformats.org/drawingml/2006/main" noGrp="1"/>
+          </p:cNvSpPr>
+          <p:nvPr/>
+        </p:nvSpPr>
+        <p:spPr>
+          <a:xfrm xmlns:a="http://schemas.openxmlformats.org/drawingml/2006/main">
+            <a:off x="666750" y="1752600"/>
+            <a:ext cx="10858500" cy="1028700"/>
+          </a:xfrm>
+          <a:prstGeom xmlns:a="http://schemas.openxmlformats.org/drawingml/2006/main" prst="rect">
+            <a:avLst/>
+          </a:prstGeom>
+          <a:solidFill xmlns:a="http://schemas.openxmlformats.org/drawingml/2006/main">
+            <a:srgbClr val="E6F2EC"/>
+          </a:solidFill>
+          <a:ln xmlns:a="http://schemas.openxmlformats.org/drawingml/2006/main" w="9525">
+            <a:solidFill>
+              <a:srgbClr val="2E7D5B"/>
+            </a:solidFill>
+            <a:prstDash val="solid"/>
+          </a:ln>
+        </p:spPr>
+      </p:sp>
+      <p:sp>
+        <p:nvSpPr>
+          <p:cNvPr id="6" name="">
+            <a:extLst xmlns:a="http://schemas.openxmlformats.org/drawingml/2006/main">
+              <a:ext uri="{FF2B5EF4-FFF2-40B4-BE49-F238E27FC236}">
+                <a16:creationId xmlns:a16="http://schemas.microsoft.com/office/drawing/2014/main" id="{802C9A30-9CD1-4907-B5B7-2F6BE57885E8}"/>
+              </a:ext>
+            </a:extLst>
+          </p:cNvPr>
+          <p:cNvSpPr>
+            <a:spLocks xmlns:a="http://schemas.openxmlformats.org/drawingml/2006/main" noGrp="1"/>
+          </p:cNvSpPr>
+          <p:nvPr/>
+        </p:nvSpPr>
+        <p:spPr>
+          <a:xfrm xmlns:a="http://schemas.openxmlformats.org/drawingml/2006/main">
+            <a:off x="952500" y="2000250"/>
+            <a:ext cx="2190750" cy="400050"/>
+          </a:xfrm>
+          <a:prstGeom xmlns:a="http://schemas.openxmlformats.org/drawingml/2006/main" prst="rect">
+            <a:avLst/>
+          </a:prstGeom>
+          <a:noFill xmlns:a="http://schemas.openxmlformats.org/drawingml/2006/main"/>
+          <a:ln xmlns:a="http://schemas.openxmlformats.org/drawingml/2006/main" w="0">
+            <a:noFill/>
+            <a:prstDash val="solid"/>
+          </a:ln>
+        </p:spPr>
+        <p:txBody>
+          <a:bodyPr xmlns:a="http://schemas.openxmlformats.org/drawingml/2006/main" anchor="t"/>
+          <a:lstStyle xmlns:a="http://schemas.openxmlformats.org/drawingml/2006/main"/>
+          <a:p xmlns:a="http://schemas.openxmlformats.org/drawingml/2006/main">
+            <a:pPr algn="l">
+              <a:buNone/>
+              <a:defRPr sz="2025" b="1">
+                <a:solidFill>
+                  <a:srgbClr val="2E7D5B"/>
+                </a:solidFill>
+                <a:latin typeface="Arial"/>
+                <a:ea typeface="Arial"/>
+                <a:cs typeface="Arial"/>
+              </a:defRPr>
+            </a:pPr>
+            <a:r>
+              <a:rPr sz="2025" b="1">
+                <a:solidFill>
+                  <a:srgbClr val="2E7D5B"/>
+                </a:solidFill>
+                <a:latin typeface="Arial"/>
+                <a:ea typeface="Arial"/>
+                <a:cs typeface="Arial"/>
+              </a:rPr>
+              <a:t>Established</a:t>
+            </a:r>
+          </a:p>
+        </p:txBody>
+      </p:sp>
+      <p:sp>
+        <p:nvSpPr>
+          <p:cNvPr id="7" name="">
+            <a:extLst xmlns:a="http://schemas.openxmlformats.org/drawingml/2006/main">
+              <a:ext uri="{FF2B5EF4-FFF2-40B4-BE49-F238E27FC236}">
+                <a16:creationId xmlns:a16="http://schemas.microsoft.com/office/drawing/2014/main" id="{4C0B6826-C1CD-407B-B1BD-7E0FDA1C4296}"/>
+              </a:ext>
+            </a:extLst>
+          </p:cNvPr>
+          <p:cNvSpPr>
+            <a:spLocks xmlns:a="http://schemas.openxmlformats.org/drawingml/2006/main" noGrp="1"/>
+          </p:cNvSpPr>
+          <p:nvPr/>
+        </p:nvSpPr>
+        <p:spPr>
+          <a:xfrm xmlns:a="http://schemas.openxmlformats.org/drawingml/2006/main">
+            <a:off x="3276600" y="1943100"/>
+            <a:ext cx="7772400" cy="647700"/>
+          </a:xfrm>
+          <a:prstGeom xmlns:a="http://schemas.openxmlformats.org/drawingml/2006/main" prst="rect">
+            <a:avLst/>
+          </a:prstGeom>
+          <a:noFill xmlns:a="http://schemas.openxmlformats.org/drawingml/2006/main"/>
+          <a:ln xmlns:a="http://schemas.openxmlformats.org/drawingml/2006/main" w="0">
+            <a:noFill/>
+            <a:prstDash val="solid"/>
+          </a:ln>
+        </p:spPr>
+        <p:txBody>
+          <a:bodyPr xmlns:a="http://schemas.openxmlformats.org/drawingml/2006/main" anchor="t"/>
+          <a:lstStyle xmlns:a="http://schemas.openxmlformats.org/drawingml/2006/main"/>
+          <a:p xmlns:a="http://schemas.openxmlformats.org/drawingml/2006/main">
+            <a:pPr algn="l">
+              <a:buNone/>
+              <a:defRPr sz="1725" b="0">
+                <a:solidFill>
+                  <a:srgbClr val="101820"/>
+                </a:solidFill>
+                <a:latin typeface="Arial"/>
+                <a:ea typeface="Arial"/>
+                <a:cs typeface="Arial"/>
+              </a:defRPr>
+            </a:pPr>
+            <a:r>
+              <a:rPr sz="1725" b="0">
+                <a:solidFill>
+                  <a:srgbClr val="101820"/>
+                </a:solidFill>
+                <a:latin typeface="Arial"/>
+                <a:ea typeface="Arial"/>
+                <a:cs typeface="Arial"/>
+              </a:rPr>
+              <a:t>The frozen registry, source timing, breadth, execution, and terminal-value controls passed all 10 gates.</a:t>
+            </a:r>
+          </a:p>
+        </p:txBody>
+      </p:sp>
+      <p:sp>
+        <p:nvSpPr>
+          <p:cNvPr id="8" name="">
+            <a:extLst xmlns:a="http://schemas.openxmlformats.org/drawingml/2006/main">
+              <a:ext uri="{FF2B5EF4-FFF2-40B4-BE49-F238E27FC236}">
+                <a16:creationId xmlns:a16="http://schemas.microsoft.com/office/drawing/2014/main" id="{3AFAF26A-2C8D-481A-8C17-B8A9A3967177}"/>
+              </a:ext>
+            </a:extLst>
+          </p:cNvPr>
+          <p:cNvSpPr>
+            <a:spLocks xmlns:a="http://schemas.openxmlformats.org/drawingml/2006/main" noGrp="1"/>
+          </p:cNvSpPr>
+          <p:nvPr/>
+        </p:nvSpPr>
+        <p:spPr>
+          <a:xfrm xmlns:a="http://schemas.openxmlformats.org/drawingml/2006/main">
+            <a:off x="666750" y="3048000"/>
+            <a:ext cx="10858500" cy="1028700"/>
+          </a:xfrm>
+          <a:prstGeom xmlns:a="http://schemas.openxmlformats.org/drawingml/2006/main" prst="rect">
+            <a:avLst/>
+          </a:prstGeom>
+          <a:solidFill xmlns:a="http://schemas.openxmlformats.org/drawingml/2006/main">
+            <a:srgbClr val="F7E7E2"/>
+          </a:solidFill>
+          <a:ln xmlns:a="http://schemas.openxmlformats.org/drawingml/2006/main" w="9525">
+            <a:solidFill>
+              <a:srgbClr val="C8553D"/>
+            </a:solidFill>
+            <a:prstDash val="solid"/>
+          </a:ln>
+        </p:spPr>
+      </p:sp>
+      <p:sp>
+        <p:nvSpPr>
+          <p:cNvPr id="9" name="">
+            <a:extLst xmlns:a="http://schemas.openxmlformats.org/drawingml/2006/main">
+              <a:ext uri="{FF2B5EF4-FFF2-40B4-BE49-F238E27FC236}">
+                <a16:creationId xmlns:a16="http://schemas.microsoft.com/office/drawing/2014/main" id="{DDE8FBE1-8020-4B7A-932E-FC73716C919B}"/>
+              </a:ext>
+            </a:extLst>
+          </p:cNvPr>
+          <p:cNvSpPr>
+            <a:spLocks xmlns:a="http://schemas.openxmlformats.org/drawingml/2006/main" noGrp="1"/>
+          </p:cNvSpPr>
+          <p:nvPr/>
+        </p:nvSpPr>
+        <p:spPr>
+          <a:xfrm xmlns:a="http://schemas.openxmlformats.org/drawingml/2006/main">
+            <a:off x="952500" y="3295650"/>
+            <a:ext cx="2190750" cy="400050"/>
+          </a:xfrm>
+          <a:prstGeom xmlns:a="http://schemas.openxmlformats.org/drawingml/2006/main" prst="rect">
+            <a:avLst/>
+          </a:prstGeom>
+          <a:noFill xmlns:a="http://schemas.openxmlformats.org/drawingml/2006/main"/>
+          <a:ln xmlns:a="http://schemas.openxmlformats.org/drawingml/2006/main" w="0">
+            <a:noFill/>
+            <a:prstDash val="solid"/>
+          </a:ln>
+        </p:spPr>
+        <p:txBody>
+          <a:bodyPr xmlns:a="http://schemas.openxmlformats.org/drawingml/2006/main" anchor="t"/>
+          <a:lstStyle xmlns:a="http://schemas.openxmlformats.org/drawingml/2006/main"/>
+          <a:p xmlns:a="http://schemas.openxmlformats.org/drawingml/2006/main">
+            <a:pPr algn="l">
+              <a:buNone/>
+              <a:defRPr sz="2025" b="1">
+                <a:solidFill>
+                  <a:srgbClr val="C8553D"/>
+                </a:solidFill>
+                <a:latin typeface="Arial"/>
+                <a:ea typeface="Arial"/>
+                <a:cs typeface="Arial"/>
+              </a:defRPr>
+            </a:pPr>
+            <a:r>
+              <a:rPr sz="2025" b="1">
+                <a:solidFill>
+                  <a:srgbClr val="C8553D"/>
+                </a:solidFill>
+                <a:latin typeface="Arial"/>
+                <a:ea typeface="Arial"/>
+                <a:cs typeface="Arial"/>
+              </a:rPr>
+              <a:t>Not established</a:t>
+            </a:r>
+          </a:p>
+        </p:txBody>
+      </p:sp>
+      <p:sp>
+        <p:nvSpPr>
+          <p:cNvPr id="10" name="">
+            <a:extLst xmlns:a="http://schemas.openxmlformats.org/drawingml/2006/main">
+              <a:ext uri="{FF2B5EF4-FFF2-40B4-BE49-F238E27FC236}">
+                <a16:creationId xmlns:a16="http://schemas.microsoft.com/office/drawing/2014/main" id="{E6DA919C-47F4-4345-87E2-1F6DF9D0EC90}"/>
+              </a:ext>
+            </a:extLst>
+          </p:cNvPr>
+          <p:cNvSpPr>
+            <a:spLocks xmlns:a="http://schemas.openxmlformats.org/drawingml/2006/main" noGrp="1"/>
+          </p:cNvSpPr>
+          <p:nvPr/>
+        </p:nvSpPr>
+        <p:spPr>
+          <a:xfrm xmlns:a="http://schemas.openxmlformats.org/drawingml/2006/main">
+            <a:off x="3276600" y="3238500"/>
+            <a:ext cx="7772400" cy="647700"/>
+          </a:xfrm>
+          <a:prstGeom xmlns:a="http://schemas.openxmlformats.org/drawingml/2006/main" prst="rect">
+            <a:avLst/>
+          </a:prstGeom>
+          <a:noFill xmlns:a="http://schemas.openxmlformats.org/drawingml/2006/main"/>
+          <a:ln xmlns:a="http://schemas.openxmlformats.org/drawingml/2006/main" w="0">
+            <a:noFill/>
+            <a:prstDash val="solid"/>
+          </a:ln>
+        </p:spPr>
+        <p:txBody>
+          <a:bodyPr xmlns:a="http://schemas.openxmlformats.org/drawingml/2006/main" anchor="t"/>
+          <a:lstStyle xmlns:a="http://schemas.openxmlformats.org/drawingml/2006/main"/>
+          <a:p xmlns:a="http://schemas.openxmlformats.org/drawingml/2006/main">
+            <a:pPr algn="l">
+              <a:buNone/>
+              <a:defRPr sz="1725" b="0">
+                <a:solidFill>
+                  <a:srgbClr val="101820"/>
+                </a:solidFill>
+                <a:latin typeface="Arial"/>
+                <a:ea typeface="Arial"/>
+                <a:cs typeface="Arial"/>
+              </a:defRPr>
+            </a:pPr>
+            <a:r>
+              <a:rPr sz="1725" b="0">
+                <a:solidFill>
+                  <a:srgbClr val="101820"/>
+                </a:solidFill>
+                <a:latin typeface="Arial"/>
+                <a:ea typeface="Arial"/>
+                <a:cs typeface="Arial"/>
+              </a:rPr>
+              <a:t>Ranking added only 0.14 CAGR points; the full rule trailed equal weight by 1.27 points.</a:t>
+            </a:r>
+          </a:p>
+        </p:txBody>
+      </p:sp>
+      <p:sp>
+        <p:nvSpPr>
+          <p:cNvPr id="11" name="">
+            <a:extLst xmlns:a="http://schemas.openxmlformats.org/drawingml/2006/main">
+              <a:ext uri="{FF2B5EF4-FFF2-40B4-BE49-F238E27FC236}">
+                <a16:creationId xmlns:a16="http://schemas.microsoft.com/office/drawing/2014/main" id="{0879E259-AD91-4B41-8E67-E5334F74BAB8}"/>
+              </a:ext>
+            </a:extLst>
+          </p:cNvPr>
+          <p:cNvSpPr>
+            <a:spLocks xmlns:a="http://schemas.openxmlformats.org/drawingml/2006/main" noGrp="1"/>
+          </p:cNvSpPr>
+          <p:nvPr/>
+        </p:nvSpPr>
+        <p:spPr>
+          <a:xfrm xmlns:a="http://schemas.openxmlformats.org/drawingml/2006/main">
+            <a:off x="666750" y="4343400"/>
+            <a:ext cx="10858500" cy="1028700"/>
+          </a:xfrm>
+          <a:prstGeom xmlns:a="http://schemas.openxmlformats.org/drawingml/2006/main" prst="rect">
+            <a:avLst/>
+          </a:prstGeom>
+          <a:solidFill xmlns:a="http://schemas.openxmlformats.org/drawingml/2006/main">
+            <a:srgbClr val="EDEDED"/>
+          </a:solidFill>
+          <a:ln xmlns:a="http://schemas.openxmlformats.org/drawingml/2006/main" w="9525">
+            <a:solidFill>
+              <a:srgbClr val="52616B"/>
+            </a:solidFill>
+            <a:prstDash val="solid"/>
+          </a:ln>
+        </p:spPr>
+      </p:sp>
+      <p:sp>
+        <p:nvSpPr>
+          <p:cNvPr id="12" name="">
+            <a:extLst xmlns:a="http://schemas.openxmlformats.org/drawingml/2006/main">
+              <a:ext uri="{FF2B5EF4-FFF2-40B4-BE49-F238E27FC236}">
+                <a16:creationId xmlns:a16="http://schemas.microsoft.com/office/drawing/2014/main" id="{FE0E70E3-6874-4441-9FD1-1060221212D9}"/>
+              </a:ext>
+            </a:extLst>
+          </p:cNvPr>
+          <p:cNvSpPr>
+            <a:spLocks xmlns:a="http://schemas.openxmlformats.org/drawingml/2006/main" noGrp="1"/>
+          </p:cNvSpPr>
+          <p:nvPr/>
+        </p:nvSpPr>
+        <p:spPr>
+          <a:xfrm xmlns:a="http://schemas.openxmlformats.org/drawingml/2006/main">
+            <a:off x="952500" y="4591050"/>
+            <a:ext cx="2190750" cy="400050"/>
+          </a:xfrm>
+          <a:prstGeom xmlns:a="http://schemas.openxmlformats.org/drawingml/2006/main" prst="rect">
+            <a:avLst/>
+          </a:prstGeom>
+          <a:noFill xmlns:a="http://schemas.openxmlformats.org/drawingml/2006/main"/>
+          <a:ln xmlns:a="http://schemas.openxmlformats.org/drawingml/2006/main" w="0">
+            <a:noFill/>
+            <a:prstDash val="solid"/>
+          </a:ln>
+        </p:spPr>
+        <p:txBody>
+          <a:bodyPr xmlns:a="http://schemas.openxmlformats.org/drawingml/2006/main" anchor="t"/>
+          <a:lstStyle xmlns:a="http://schemas.openxmlformats.org/drawingml/2006/main"/>
+          <a:p xmlns:a="http://schemas.openxmlformats.org/drawingml/2006/main">
+            <a:pPr algn="l">
+              <a:buNone/>
+              <a:defRPr sz="2025" b="1">
+                <a:solidFill>
+                  <a:srgbClr val="52616B"/>
+                </a:solidFill>
+                <a:latin typeface="Arial"/>
+                <a:ea typeface="Arial"/>
+                <a:cs typeface="Arial"/>
+              </a:defRPr>
+            </a:pPr>
+            <a:r>
+              <a:rPr sz="2025" b="1">
+                <a:solidFill>
+                  <a:srgbClr val="52616B"/>
+                </a:solidFill>
+                <a:latin typeface="Arial"/>
+                <a:ea typeface="Arial"/>
+                <a:cs typeface="Arial"/>
+              </a:rPr>
+              <a:t>Decision</a:t>
+            </a:r>
+          </a:p>
+        </p:txBody>
+      </p:sp>
+      <p:sp>
+        <p:nvSpPr>
+          <p:cNvPr id="13" name="">
+            <a:extLst xmlns:a="http://schemas.openxmlformats.org/drawingml/2006/main">
+              <a:ext uri="{FF2B5EF4-FFF2-40B4-BE49-F238E27FC236}">
+                <a16:creationId xmlns:a16="http://schemas.microsoft.com/office/drawing/2014/main" id="{7D88D2F7-BBA9-4B06-83BF-EF6C40360B55}"/>
+              </a:ext>
+            </a:extLst>
+          </p:cNvPr>
+          <p:cNvSpPr>
+            <a:spLocks xmlns:a="http://schemas.openxmlformats.org/drawingml/2006/main" noGrp="1"/>
+          </p:cNvSpPr>
+          <p:nvPr/>
+        </p:nvSpPr>
+        <p:spPr>
+          <a:xfrm xmlns:a="http://schemas.openxmlformats.org/drawingml/2006/main">
+            <a:off x="3276600" y="4533900"/>
+            <a:ext cx="7772400" cy="647700"/>
+          </a:xfrm>
+          <a:prstGeom xmlns:a="http://schemas.openxmlformats.org/drawingml/2006/main" prst="rect">
+            <a:avLst/>
+          </a:prstGeom>
+          <a:noFill xmlns:a="http://schemas.openxmlformats.org/drawingml/2006/main"/>
+          <a:ln xmlns:a="http://schemas.openxmlformats.org/drawingml/2006/main" w="0">
+            <a:noFill/>
+            <a:prstDash val="solid"/>
+          </a:ln>
+        </p:spPr>
+        <p:txBody>
+          <a:bodyPr xmlns:a="http://schemas.openxmlformats.org/drawingml/2006/main" anchor="t"/>
+          <a:lstStyle xmlns:a="http://schemas.openxmlformats.org/drawingml/2006/main"/>
+          <a:p xmlns:a="http://schemas.openxmlformats.org/drawingml/2006/main">
+            <a:pPr algn="l">
+              <a:buNone/>
+              <a:defRPr sz="1725" b="0">
+                <a:solidFill>
+                  <a:srgbClr val="101820"/>
+                </a:solidFill>
+                <a:latin typeface="Arial"/>
+                <a:ea typeface="Arial"/>
+                <a:cs typeface="Arial"/>
+              </a:defRPr>
+            </a:pPr>
+            <a:r>
+              <a:rPr sz="1725" b="0">
+                <a:solidFill>
+                  <a:srgbClr val="101820"/>
+                </a:solidFill>
+                <a:latin typeface="Arial"/>
+                <a:ea typeface="Arial"/>
+                <a:cs typeface="Arial"/>
+              </a:rPr>
+              <a:t>STOP this broad-stock implementation as written; do not tune horizons, breadth, or gates to rescue it.</a:t>
+            </a:r>
+          </a:p>
+        </p:txBody>
+      </p:sp>
+      <p:sp>
+        <p:nvSpPr>
+          <p:cNvPr id="14" name="">
+            <a:extLst xmlns:a="http://schemas.openxmlformats.org/drawingml/2006/main">
+              <a:ext uri="{FF2B5EF4-FFF2-40B4-BE49-F238E27FC236}">
+                <a16:creationId xmlns:a16="http://schemas.microsoft.com/office/drawing/2014/main" id="{F7E3D076-54D1-4B3D-8F4A-D11630B25FFC}"/>
+              </a:ext>
+            </a:extLst>
+          </p:cNvPr>
+          <p:cNvSpPr>
+            <a:spLocks xmlns:a="http://schemas.openxmlformats.org/drawingml/2006/main" noGrp="1"/>
+          </p:cNvSpPr>
+          <p:nvPr/>
+        </p:nvSpPr>
+        <p:spPr>
+          <a:xfrm xmlns:a="http://schemas.openxmlformats.org/drawingml/2006/main">
+            <a:off x="2114550" y="5753100"/>
+            <a:ext cx="7962900" cy="495300"/>
+          </a:xfrm>
+          <a:prstGeom xmlns:a="http://schemas.openxmlformats.org/drawingml/2006/main" prst="rect">
+            <a:avLst/>
+          </a:prstGeom>
+          <a:solidFill xmlns:a="http://schemas.openxmlformats.org/drawingml/2006/main">
+            <a:srgbClr val="EAF5FB"/>
+          </a:solidFill>
+          <a:ln xmlns:a="http://schemas.openxmlformats.org/drawingml/2006/main" w="9525">
+            <a:solidFill>
+              <a:srgbClr val="6DCBF4"/>
+            </a:solidFill>
+            <a:prstDash val="solid"/>
+          </a:ln>
+        </p:spPr>
+      </p:sp>
+      <p:sp>
+        <p:nvSpPr>
+          <p:cNvPr id="15" name="">
+            <a:extLst xmlns:a="http://schemas.openxmlformats.org/drawingml/2006/main">
+              <a:ext uri="{FF2B5EF4-FFF2-40B4-BE49-F238E27FC236}">
+                <a16:creationId xmlns:a16="http://schemas.microsoft.com/office/drawing/2014/main" id="{FF7807EE-5E9A-4AC4-A3F2-FA1CED7A80A8}"/>
+              </a:ext>
+            </a:extLst>
+          </p:cNvPr>
+          <p:cNvSpPr>
+            <a:spLocks xmlns:a="http://schemas.openxmlformats.org/drawingml/2006/main" noGrp="1"/>
+          </p:cNvSpPr>
+          <p:nvPr/>
+        </p:nvSpPr>
+        <p:spPr>
+          <a:xfrm xmlns:a="http://schemas.openxmlformats.org/drawingml/2006/main">
+            <a:off x="2343150" y="5753100"/>
+            <a:ext cx="7505700" cy="457200"/>
+          </a:xfrm>
+          <a:prstGeom xmlns:a="http://schemas.openxmlformats.org/drawingml/2006/main" prst="rect">
+            <a:avLst/>
+          </a:prstGeom>
+          <a:noFill xmlns:a="http://schemas.openxmlformats.org/drawingml/2006/main"/>
+          <a:ln xmlns:a="http://schemas.openxmlformats.org/drawingml/2006/main" w="0">
+            <a:noFill/>
+            <a:prstDash val="solid"/>
+          </a:ln>
+        </p:spPr>
+        <p:txBody>
+          <a:bodyPr xmlns:a="http://schemas.openxmlformats.org/drawingml/2006/main" anchor="t"/>
+          <a:lstStyle xmlns:a="http://schemas.openxmlformats.org/drawingml/2006/main"/>
+          <a:p xmlns:a="http://schemas.openxmlformats.org/drawingml/2006/main">
+            <a:pPr algn="ctr">
+              <a:buNone/>
+              <a:defRPr sz="1350" b="1">
+                <a:solidFill>
+                  <a:srgbClr val="3D8DFF"/>
+                </a:solidFill>
+                <a:latin typeface="Arial"/>
+                <a:ea typeface="Arial"/>
+                <a:cs typeface="Arial"/>
+              </a:defRPr>
+            </a:pPr>
+            <a:r>
+              <a:rPr sz="1350" b="1">
+                <a:solidFill>
+                  <a:srgbClr val="3D8DFF"/>
+                </a:solidFill>
+                <a:latin typeface="Arial"/>
+                <a:ea typeface="Arial"/>
+                <a:cs typeface="Arial"/>
+              </a:rPr>
+              <a:t>A clean falsification is progress: the original ranking clue did not survive.</a:t>
+            </a:r>
+          </a:p>
+        </p:txBody>
+      </p:sp>
+    </p:spTree>
+    <p:extLst>
+      <p:ext uri="{BB962C8B-B14F-4D97-AF65-F5344CB8AC3E}">
+        <p14:creationId xmlns:p14="http://schemas.microsoft.com/office/powerpoint/2010/main" val="733918031"/>
+      </p:ext>
+    </p:extLst>
+  </p:cSld>
+</p:sld>
+</file>
+
+<file path=ppt/slides/slide43.xml><?xml version="1.0" encoding="utf-8"?>
+<p:sld xmlns:p="http://schemas.openxmlformats.org/presentationml/2006/main">
+  <p:cSld>
+    <p:bg>
+      <p:bgPr>
+        <a:solidFill xmlns:a="http://schemas.openxmlformats.org/drawingml/2006/main">
+          <a:srgbClr val="FFFFFF"/>
+        </a:solidFill>
+      </p:bgPr>
+    </p:bg>
+    <p:spTree>
+      <p:nvGrpSpPr>
+        <p:cNvPr id="1" name=""/>
+        <p:cNvGrpSpPr/>
+        <p:nvPr/>
+      </p:nvGrpSpPr>
+      <p:grpSpPr>
+        <a:xfrm xmlns:a="http://schemas.openxmlformats.org/drawingml/2006/main"/>
+      </p:grpSpPr>
+      <p:sp>
+        <p:nvSpPr>
+          <p:cNvPr id="16" name="">
+            <a:extLst xmlns:a="http://schemas.openxmlformats.org/drawingml/2006/main">
+              <a:ext uri="{FF2B5EF4-FFF2-40B4-BE49-F238E27FC236}">
+                <a16:creationId xmlns:a16="http://schemas.microsoft.com/office/drawing/2014/main" id="{0643D917-60C1-49B6-A04E-D85D24522DCE}"/>
+              </a:ext>
+            </a:extLst>
+          </p:cNvPr>
+          <p:cNvSpPr>
+            <a:spLocks xmlns:a="http://schemas.openxmlformats.org/drawingml/2006/main" noGrp="1"/>
+          </p:cNvSpPr>
+          <p:nvPr/>
+        </p:nvSpPr>
+        <p:spPr>
+          <a:xfrm xmlns:a="http://schemas.openxmlformats.org/drawingml/2006/main">
+            <a:off x="400050" y="228600"/>
+            <a:ext cx="2857500" cy="228600"/>
+          </a:xfrm>
+          <a:prstGeom xmlns:a="http://schemas.openxmlformats.org/drawingml/2006/main" prst="rect">
+            <a:avLst/>
+          </a:prstGeom>
+          <a:noFill xmlns:a="http://schemas.openxmlformats.org/drawingml/2006/main"/>
+          <a:ln xmlns:a="http://schemas.openxmlformats.org/drawingml/2006/main" w="0">
+            <a:noFill/>
+            <a:prstDash val="solid"/>
+          </a:ln>
+        </p:spPr>
+        <p:txBody>
+          <a:bodyPr xmlns:a="http://schemas.openxmlformats.org/drawingml/2006/main" anchor="t"/>
+          <a:lstStyle xmlns:a="http://schemas.openxmlformats.org/drawingml/2006/main"/>
+          <a:p xmlns:a="http://schemas.openxmlformats.org/drawingml/2006/main">
+            <a:pPr algn="l">
+              <a:buNone/>
+              <a:defRPr sz="1200" b="1">
+                <a:solidFill>
+                  <a:srgbClr val="3D8DFF"/>
+                </a:solidFill>
+                <a:latin typeface="Arial"/>
+                <a:ea typeface="Arial"/>
+                <a:cs typeface="Arial"/>
+              </a:defRPr>
+            </a:pPr>
+            <a:r>
+              <a:rPr sz="1200" b="1">
+                <a:solidFill>
+                  <a:srgbClr val="3D8DFF"/>
+                </a:solidFill>
+                <a:latin typeface="Arial"/>
+                <a:ea typeface="Arial"/>
+                <a:cs typeface="Arial"/>
+              </a:rPr>
+              <a:t>PORTFOLIO HUDDLE</a:t>
+            </a:r>
+          </a:p>
+        </p:txBody>
+      </p:sp>
+      <p:sp>
+        <p:nvSpPr>
+          <p:cNvPr id="2" name="">
+            <a:extLst xmlns:a="http://schemas.openxmlformats.org/drawingml/2006/main">
+              <a:ext uri="{FF2B5EF4-FFF2-40B4-BE49-F238E27FC236}">
+                <a16:creationId xmlns:a16="http://schemas.microsoft.com/office/drawing/2014/main" id="{3F51F0D8-19C8-434E-90A3-9CD80434373E}"/>
+              </a:ext>
+            </a:extLst>
+          </p:cNvPr>
+          <p:cNvSpPr>
+            <a:spLocks xmlns:a="http://schemas.openxmlformats.org/drawingml/2006/main" noGrp="1"/>
+          </p:cNvSpPr>
+          <p:nvPr/>
+        </p:nvSpPr>
+        <p:spPr>
+          <a:xfrm xmlns:a="http://schemas.openxmlformats.org/drawingml/2006/main">
+            <a:off x="400050" y="476250"/>
+            <a:ext cx="11049000" cy="819150"/>
+          </a:xfrm>
+          <a:prstGeom xmlns:a="http://schemas.openxmlformats.org/drawingml/2006/main" prst="rect">
+            <a:avLst/>
+          </a:prstGeom>
+          <a:noFill xmlns:a="http://schemas.openxmlformats.org/drawingml/2006/main"/>
+          <a:ln xmlns:a="http://schemas.openxmlformats.org/drawingml/2006/main" w="0">
+            <a:noFill/>
+            <a:prstDash val="solid"/>
+          </a:ln>
+        </p:spPr>
+        <p:txBody>
+          <a:bodyPr xmlns:a="http://schemas.openxmlformats.org/drawingml/2006/main" anchor="t"/>
+          <a:lstStyle xmlns:a="http://schemas.openxmlformats.org/drawingml/2006/main"/>
+          <a:p xmlns:a="http://schemas.openxmlformats.org/drawingml/2006/main">
+            <a:pPr algn="l">
+              <a:buNone/>
+              <a:defRPr sz="2700" b="1">
+                <a:solidFill>
+                  <a:srgbClr val="101820"/>
+                </a:solidFill>
+                <a:latin typeface="Arial"/>
+                <a:ea typeface="Arial"/>
+                <a:cs typeface="Arial"/>
+              </a:defRPr>
+            </a:pPr>
+            <a:r>
+              <a:rPr sz="2700" b="1">
+                <a:solidFill>
+                  <a:srgbClr val="101820"/>
+                </a:solidFill>
+                <a:latin typeface="Arial"/>
+                <a:ea typeface="Arial"/>
+                <a:cs typeface="Arial"/>
+              </a:rPr>
+              <a:t>Algorithm research need not hold the ordinary wealth plan hostage</a:t>
+            </a:r>
+          </a:p>
+        </p:txBody>
+      </p:sp>
+      <p:sp>
+        <p:nvSpPr>
+          <p:cNvPr id="3" name="">
+            <a:extLst xmlns:a="http://schemas.openxmlformats.org/drawingml/2006/main">
+              <a:ext uri="{FF2B5EF4-FFF2-40B4-BE49-F238E27FC236}">
+                <a16:creationId xmlns:a16="http://schemas.microsoft.com/office/drawing/2014/main" id="{9C82D8E5-4706-4E1C-8A9C-3CB6FFDCDE1D}"/>
+              </a:ext>
+            </a:extLst>
+          </p:cNvPr>
+          <p:cNvSpPr>
+            <a:spLocks xmlns:a="http://schemas.openxmlformats.org/drawingml/2006/main" noGrp="1"/>
+          </p:cNvSpPr>
+          <p:nvPr/>
+        </p:nvSpPr>
+        <p:spPr>
+          <a:xfrm xmlns:a="http://schemas.openxmlformats.org/drawingml/2006/main">
+            <a:off x="400050" y="1428750"/>
+            <a:ext cx="11391900" cy="0"/>
+          </a:xfrm>
+          <a:prstGeom xmlns:a="http://schemas.openxmlformats.org/drawingml/2006/main" prst="line">
+            <a:avLst/>
+          </a:prstGeom>
+          <a:noFill xmlns:a="http://schemas.openxmlformats.org/drawingml/2006/main"/>
+          <a:ln xmlns:a="http://schemas.openxmlformats.org/drawingml/2006/main" w="9525">
+            <a:solidFill>
+              <a:srgbClr val="B8BCC4"/>
+            </a:solidFill>
+            <a:prstDash val="solid"/>
+          </a:ln>
+        </p:spPr>
+      </p:sp>
+      <p:sp>
+        <p:nvSpPr>
+          <p:cNvPr id="4" name="">
+            <a:extLst xmlns:a="http://schemas.openxmlformats.org/drawingml/2006/main">
+              <a:ext uri="{FF2B5EF4-FFF2-40B4-BE49-F238E27FC236}">
+                <a16:creationId xmlns:a16="http://schemas.microsoft.com/office/drawing/2014/main" id="{8452295D-1E22-4BA1-B87C-35FC318DE242}"/>
+              </a:ext>
+            </a:extLst>
+          </p:cNvPr>
+          <p:cNvSpPr>
+            <a:spLocks xmlns:a="http://schemas.openxmlformats.org/drawingml/2006/main" noGrp="1"/>
+          </p:cNvSpPr>
+          <p:nvPr/>
+        </p:nvSpPr>
+        <p:spPr>
+          <a:xfrm xmlns:a="http://schemas.openxmlformats.org/drawingml/2006/main">
+            <a:off x="11163300" y="6362700"/>
+            <a:ext cx="609600" cy="228600"/>
+          </a:xfrm>
+          <a:prstGeom xmlns:a="http://schemas.openxmlformats.org/drawingml/2006/main" prst="rect">
+            <a:avLst/>
+          </a:prstGeom>
+          <a:noFill xmlns:a="http://schemas.openxmlformats.org/drawingml/2006/main"/>
+          <a:ln xmlns:a="http://schemas.openxmlformats.org/drawingml/2006/main" w="0">
+            <a:noFill/>
+            <a:prstDash val="solid"/>
+          </a:ln>
+        </p:spPr>
+        <p:txBody>
+          <a:bodyPr xmlns:a="http://schemas.openxmlformats.org/drawingml/2006/main" anchor="t"/>
+          <a:lstStyle xmlns:a="http://schemas.openxmlformats.org/drawingml/2006/main"/>
+          <a:p xmlns:a="http://schemas.openxmlformats.org/drawingml/2006/main">
+            <a:pPr algn="r">
+              <a:buNone/>
+              <a:defRPr sz="1200" b="0">
+                <a:solidFill>
+                  <a:srgbClr val="52616B"/>
+                </a:solidFill>
+                <a:latin typeface="Arial"/>
+                <a:ea typeface="Arial"/>
+                <a:cs typeface="Arial"/>
+              </a:defRPr>
+            </a:pPr>
+            <a:r>
+              <a:rPr sz="1200" b="0">
+                <a:solidFill>
+                  <a:srgbClr val="52616B"/>
+                </a:solidFill>
+                <a:latin typeface="Arial"/>
+                <a:ea typeface="Arial"/>
+                <a:cs typeface="Arial"/>
+              </a:rPr>
+              <a:t>43</a:t>
+            </a:r>
+          </a:p>
+        </p:txBody>
+      </p:sp>
+      <p:sp>
+        <p:nvSpPr>
+          <p:cNvPr id="5" name="">
+            <a:extLst xmlns:a="http://schemas.openxmlformats.org/drawingml/2006/main">
+              <a:ext uri="{FF2B5EF4-FFF2-40B4-BE49-F238E27FC236}">
+                <a16:creationId xmlns:a16="http://schemas.microsoft.com/office/drawing/2014/main" id="{EA84F263-DCB7-4ECF-AC3C-B71C047C289B}"/>
+              </a:ext>
+            </a:extLst>
+          </p:cNvPr>
+          <p:cNvSpPr>
+            <a:spLocks xmlns:a="http://schemas.openxmlformats.org/drawingml/2006/main" noGrp="1"/>
+          </p:cNvSpPr>
+          <p:nvPr/>
+        </p:nvSpPr>
+        <p:spPr>
+          <a:xfrm xmlns:a="http://schemas.openxmlformats.org/drawingml/2006/main">
+            <a:off x="628650" y="1790700"/>
+            <a:ext cx="4953000" cy="3257550"/>
+          </a:xfrm>
+          <a:prstGeom xmlns:a="http://schemas.openxmlformats.org/drawingml/2006/main" prst="rect">
+            <a:avLst/>
+          </a:prstGeom>
+          <a:solidFill xmlns:a="http://schemas.openxmlformats.org/drawingml/2006/main">
+            <a:srgbClr val="E6F2EC"/>
+          </a:solidFill>
+          <a:ln xmlns:a="http://schemas.openxmlformats.org/drawingml/2006/main" w="9525">
+            <a:solidFill>
+              <a:srgbClr val="2E7D5B"/>
+            </a:solidFill>
+            <a:prstDash val="solid"/>
+          </a:ln>
+        </p:spPr>
+      </p:sp>
+      <p:sp>
+        <p:nvSpPr>
+          <p:cNvPr id="6" name="">
+            <a:extLst xmlns:a="http://schemas.openxmlformats.org/drawingml/2006/main">
+              <a:ext uri="{FF2B5EF4-FFF2-40B4-BE49-F238E27FC236}">
+                <a16:creationId xmlns:a16="http://schemas.microsoft.com/office/drawing/2014/main" id="{2535A567-86A3-447F-ABF8-3D7CC1CFCEE3}"/>
+              </a:ext>
+            </a:extLst>
+          </p:cNvPr>
+          <p:cNvSpPr>
+            <a:spLocks xmlns:a="http://schemas.openxmlformats.org/drawingml/2006/main" noGrp="1"/>
+          </p:cNvSpPr>
+          <p:nvPr/>
+        </p:nvSpPr>
+        <p:spPr>
+          <a:xfrm xmlns:a="http://schemas.openxmlformats.org/drawingml/2006/main">
+            <a:off x="971550" y="2114550"/>
+            <a:ext cx="3238500" cy="247650"/>
+          </a:xfrm>
+          <a:prstGeom xmlns:a="http://schemas.openxmlformats.org/drawingml/2006/main" prst="rect">
+            <a:avLst/>
+          </a:prstGeom>
+          <a:noFill xmlns:a="http://schemas.openxmlformats.org/drawingml/2006/main"/>
+          <a:ln xmlns:a="http://schemas.openxmlformats.org/drawingml/2006/main" w="0">
+            <a:noFill/>
+            <a:prstDash val="solid"/>
+          </a:ln>
+        </p:spPr>
+        <p:txBody>
+          <a:bodyPr xmlns:a="http://schemas.openxmlformats.org/drawingml/2006/main" anchor="t"/>
+          <a:lstStyle xmlns:a="http://schemas.openxmlformats.org/drawingml/2006/main"/>
+          <a:p xmlns:a="http://schemas.openxmlformats.org/drawingml/2006/main">
+            <a:pPr algn="l">
+              <a:buNone/>
+              <a:defRPr sz="1275" b="1">
+                <a:solidFill>
+                  <a:srgbClr val="2E7D5B"/>
+                </a:solidFill>
+                <a:latin typeface="Arial"/>
+                <a:ea typeface="Arial"/>
+                <a:cs typeface="Arial"/>
+              </a:defRPr>
+            </a:pPr>
+            <a:r>
+              <a:rPr sz="1275" b="1">
+                <a:solidFill>
+                  <a:srgbClr val="2E7D5B"/>
+                </a:solidFill>
+                <a:latin typeface="Arial"/>
+                <a:ea typeface="Arial"/>
+                <a:cs typeface="Arial"/>
+              </a:rPr>
+              <a:t>CONVENTIONAL CORE</a:t>
+            </a:r>
+          </a:p>
+        </p:txBody>
+      </p:sp>
+      <p:sp>
+        <p:nvSpPr>
+          <p:cNvPr id="7" name="">
+            <a:extLst xmlns:a="http://schemas.openxmlformats.org/drawingml/2006/main">
+              <a:ext uri="{FF2B5EF4-FFF2-40B4-BE49-F238E27FC236}">
+                <a16:creationId xmlns:a16="http://schemas.microsoft.com/office/drawing/2014/main" id="{B0EF5351-B0F9-4A7A-9512-D9DE9A581079}"/>
+              </a:ext>
+            </a:extLst>
+          </p:cNvPr>
+          <p:cNvSpPr>
+            <a:spLocks xmlns:a="http://schemas.openxmlformats.org/drawingml/2006/main" noGrp="1"/>
+          </p:cNvSpPr>
+          <p:nvPr/>
+        </p:nvSpPr>
+        <p:spPr>
+          <a:xfrm xmlns:a="http://schemas.openxmlformats.org/drawingml/2006/main">
+            <a:off x="971550" y="2667000"/>
+            <a:ext cx="1809750" cy="876300"/>
+          </a:xfrm>
+          <a:prstGeom xmlns:a="http://schemas.openxmlformats.org/drawingml/2006/main" prst="rect">
+            <a:avLst/>
+          </a:prstGeom>
+          <a:noFill xmlns:a="http://schemas.openxmlformats.org/drawingml/2006/main"/>
+          <a:ln xmlns:a="http://schemas.openxmlformats.org/drawingml/2006/main" w="0">
+            <a:noFill/>
+            <a:prstDash val="solid"/>
+          </a:ln>
+        </p:spPr>
+        <p:txBody>
+          <a:bodyPr xmlns:a="http://schemas.openxmlformats.org/drawingml/2006/main" anchor="t"/>
+          <a:lstStyle xmlns:a="http://schemas.openxmlformats.org/drawingml/2006/main"/>
+          <a:p xmlns:a="http://schemas.openxmlformats.org/drawingml/2006/main">
+            <a:pPr algn="l">
+              <a:buNone/>
+              <a:defRPr sz="5100" b="1">
+                <a:solidFill>
+                  <a:srgbClr val="2E7D5B"/>
+                </a:solidFill>
+                <a:latin typeface="Arial"/>
+                <a:ea typeface="Arial"/>
+                <a:cs typeface="Arial"/>
+              </a:defRPr>
+            </a:pPr>
+            <a:r>
+              <a:rPr sz="5100" b="1">
+                <a:solidFill>
+                  <a:srgbClr val="2E7D5B"/>
+                </a:solidFill>
+                <a:latin typeface="Arial"/>
+                <a:ea typeface="Arial"/>
+                <a:cs typeface="Arial"/>
+              </a:rPr>
+              <a:t>NOW</a:t>
+            </a:r>
+          </a:p>
+        </p:txBody>
+      </p:sp>
+      <p:sp>
+        <p:nvSpPr>
+          <p:cNvPr id="8" name="">
+            <a:extLst xmlns:a="http://schemas.openxmlformats.org/drawingml/2006/main">
+              <a:ext uri="{FF2B5EF4-FFF2-40B4-BE49-F238E27FC236}">
+                <a16:creationId xmlns:a16="http://schemas.microsoft.com/office/drawing/2014/main" id="{845D259F-CD58-4A41-8E58-6185E679F682}"/>
+              </a:ext>
+            </a:extLst>
+          </p:cNvPr>
+          <p:cNvSpPr>
+            <a:spLocks xmlns:a="http://schemas.openxmlformats.org/drawingml/2006/main" noGrp="1"/>
+          </p:cNvSpPr>
+          <p:nvPr/>
+        </p:nvSpPr>
+        <p:spPr>
+          <a:xfrm xmlns:a="http://schemas.openxmlformats.org/drawingml/2006/main">
+            <a:off x="2800350" y="2914650"/>
+            <a:ext cx="2324100" cy="457200"/>
+          </a:xfrm>
+          <a:prstGeom xmlns:a="http://schemas.openxmlformats.org/drawingml/2006/main" prst="rect">
+            <a:avLst/>
+          </a:prstGeom>
+          <a:noFill xmlns:a="http://schemas.openxmlformats.org/drawingml/2006/main"/>
+          <a:ln xmlns:a="http://schemas.openxmlformats.org/drawingml/2006/main" w="0">
+            <a:noFill/>
+            <a:prstDash val="solid"/>
+          </a:ln>
+        </p:spPr>
+        <p:txBody>
+          <a:bodyPr xmlns:a="http://schemas.openxmlformats.org/drawingml/2006/main" anchor="t"/>
+          <a:lstStyle xmlns:a="http://schemas.openxmlformats.org/drawingml/2006/main"/>
+          <a:p xmlns:a="http://schemas.openxmlformats.org/drawingml/2006/main">
+            <a:pPr algn="l">
+              <a:buNone/>
+              <a:defRPr sz="2100" b="1">
+                <a:solidFill>
+                  <a:srgbClr val="101820"/>
+                </a:solidFill>
+                <a:latin typeface="Arial"/>
+                <a:ea typeface="Arial"/>
+                <a:cs typeface="Arial"/>
+              </a:defRPr>
+            </a:pPr>
+            <a:r>
+              <a:rPr sz="2100" b="1">
+                <a:solidFill>
+                  <a:srgbClr val="101820"/>
+                </a:solidFill>
+                <a:latin typeface="Arial"/>
+                <a:ea typeface="Arial"/>
+                <a:cs typeface="Arial"/>
+              </a:rPr>
+              <a:t>build the wealth plan</a:t>
+            </a:r>
+          </a:p>
+        </p:txBody>
+      </p:sp>
+      <p:sp>
+        <p:nvSpPr>
+          <p:cNvPr id="9" name="">
+            <a:extLst xmlns:a="http://schemas.openxmlformats.org/drawingml/2006/main">
+              <a:ext uri="{FF2B5EF4-FFF2-40B4-BE49-F238E27FC236}">
+                <a16:creationId xmlns:a16="http://schemas.microsoft.com/office/drawing/2014/main" id="{2B561A00-F2ED-46FB-9D93-63A3E1AD5803}"/>
+              </a:ext>
+            </a:extLst>
+          </p:cNvPr>
+          <p:cNvSpPr>
+            <a:spLocks xmlns:a="http://schemas.openxmlformats.org/drawingml/2006/main" noGrp="1"/>
+          </p:cNvSpPr>
+          <p:nvPr/>
+        </p:nvSpPr>
+        <p:spPr>
+          <a:xfrm xmlns:a="http://schemas.openxmlformats.org/drawingml/2006/main">
+            <a:off x="971550" y="3810000"/>
+            <a:ext cx="4000500" cy="933450"/>
+          </a:xfrm>
+          <a:prstGeom xmlns:a="http://schemas.openxmlformats.org/drawingml/2006/main" prst="rect">
+            <a:avLst/>
+          </a:prstGeom>
+          <a:noFill xmlns:a="http://schemas.openxmlformats.org/drawingml/2006/main"/>
+          <a:ln xmlns:a="http://schemas.openxmlformats.org/drawingml/2006/main" w="0">
+            <a:noFill/>
+            <a:prstDash val="solid"/>
+          </a:ln>
+        </p:spPr>
+        <p:txBody>
+          <a:bodyPr xmlns:a="http://schemas.openxmlformats.org/drawingml/2006/main" anchor="t"/>
+          <a:lstStyle xmlns:a="http://schemas.openxmlformats.org/drawingml/2006/main"/>
+          <a:p xmlns:a="http://schemas.openxmlformats.org/drawingml/2006/main">
+            <a:pPr algn="l">
+              <a:buNone/>
+              <a:defRPr sz="1800" b="0">
+                <a:solidFill>
+                  <a:srgbClr val="52616B"/>
+                </a:solidFill>
+                <a:latin typeface="Arial"/>
+                <a:ea typeface="Arial"/>
+                <a:cs typeface="Arial"/>
+              </a:defRPr>
+            </a:pPr>
+            <a:r>
+              <a:rPr sz="1800" b="0">
+                <a:solidFill>
+                  <a:srgbClr val="52616B"/>
+                </a:solidFill>
+                <a:latin typeface="Arial"/>
+                <a:ea typeface="Arial"/>
+                <a:cs typeface="Arial"/>
+              </a:rPr>
+              <a:t>Emergency and near-term reserve</a:t>
+            </a:r>
+          </a:p>
+          <a:p xmlns:a="http://schemas.openxmlformats.org/drawingml/2006/main">
+            <a:pPr algn="l">
+              <a:buNone/>
+              <a:defRPr sz="1800" b="0">
+                <a:solidFill>
+                  <a:srgbClr val="52616B"/>
+                </a:solidFill>
+                <a:latin typeface="Arial"/>
+                <a:ea typeface="Arial"/>
+                <a:cs typeface="Arial"/>
+              </a:defRPr>
+            </a:pPr>
+            <a:r>
+              <a:rPr sz="1800" b="0">
+                <a:solidFill>
+                  <a:srgbClr val="52616B"/>
+                </a:solidFill>
+                <a:latin typeface="Arial"/>
+                <a:ea typeface="Arial"/>
+                <a:cs typeface="Arial"/>
+              </a:rPr>
+              <a:t>Low-cost diversified funds</a:t>
+            </a:r>
+          </a:p>
+          <a:p xmlns:a="http://schemas.openxmlformats.org/drawingml/2006/main">
+            <a:pPr algn="l">
+              <a:buNone/>
+              <a:defRPr sz="1800" b="0">
+                <a:solidFill>
+                  <a:srgbClr val="52616B"/>
+                </a:solidFill>
+                <a:latin typeface="Arial"/>
+                <a:ea typeface="Arial"/>
+                <a:cs typeface="Arial"/>
+              </a:defRPr>
+            </a:pPr>
+            <a:r>
+              <a:rPr sz="1800" b="0">
+                <a:solidFill>
+                  <a:srgbClr val="52616B"/>
+                </a:solidFill>
+                <a:latin typeface="Arial"/>
+                <a:ea typeface="Arial"/>
+                <a:cs typeface="Arial"/>
+              </a:rPr>
+              <a:t>Allocation matched to horizon</a:t>
+            </a:r>
+          </a:p>
+        </p:txBody>
+      </p:sp>
+      <p:sp>
+        <p:nvSpPr>
+          <p:cNvPr id="10" name="">
+            <a:extLst xmlns:a="http://schemas.openxmlformats.org/drawingml/2006/main">
+              <a:ext uri="{FF2B5EF4-FFF2-40B4-BE49-F238E27FC236}">
+                <a16:creationId xmlns:a16="http://schemas.microsoft.com/office/drawing/2014/main" id="{D80FDF2D-786A-4D34-8C53-03F5531FEFAA}"/>
+              </a:ext>
+            </a:extLst>
+          </p:cNvPr>
+          <p:cNvSpPr>
+            <a:spLocks xmlns:a="http://schemas.openxmlformats.org/drawingml/2006/main" noGrp="1"/>
+          </p:cNvSpPr>
+          <p:nvPr/>
+        </p:nvSpPr>
+        <p:spPr>
+          <a:xfrm xmlns:a="http://schemas.openxmlformats.org/drawingml/2006/main">
+            <a:off x="6191250" y="1790700"/>
+            <a:ext cx="4953000" cy="3257550"/>
+          </a:xfrm>
+          <a:prstGeom xmlns:a="http://schemas.openxmlformats.org/drawingml/2006/main" prst="rect">
+            <a:avLst/>
+          </a:prstGeom>
+          <a:solidFill xmlns:a="http://schemas.openxmlformats.org/drawingml/2006/main">
+            <a:srgbClr val="F7E7E2"/>
+          </a:solidFill>
+          <a:ln xmlns:a="http://schemas.openxmlformats.org/drawingml/2006/main" w="9525">
+            <a:solidFill>
+              <a:srgbClr val="C8553D"/>
+            </a:solidFill>
+            <a:prstDash val="solid"/>
+          </a:ln>
+        </p:spPr>
+      </p:sp>
+      <p:sp>
+        <p:nvSpPr>
+          <p:cNvPr id="11" name="">
+            <a:extLst xmlns:a="http://schemas.openxmlformats.org/drawingml/2006/main">
+              <a:ext uri="{FF2B5EF4-FFF2-40B4-BE49-F238E27FC236}">
+                <a16:creationId xmlns:a16="http://schemas.microsoft.com/office/drawing/2014/main" id="{E4150C52-9BF1-4205-AAE7-8463BBDA6FD9}"/>
+              </a:ext>
+            </a:extLst>
+          </p:cNvPr>
+          <p:cNvSpPr>
+            <a:spLocks xmlns:a="http://schemas.openxmlformats.org/drawingml/2006/main" noGrp="1"/>
+          </p:cNvSpPr>
+          <p:nvPr/>
+        </p:nvSpPr>
+        <p:spPr>
+          <a:xfrm xmlns:a="http://schemas.openxmlformats.org/drawingml/2006/main">
+            <a:off x="6534150" y="2114550"/>
+            <a:ext cx="3714750" cy="247650"/>
+          </a:xfrm>
+          <a:prstGeom xmlns:a="http://schemas.openxmlformats.org/drawingml/2006/main" prst="rect">
+            <a:avLst/>
+          </a:prstGeom>
+          <a:noFill xmlns:a="http://schemas.openxmlformats.org/drawingml/2006/main"/>
+          <a:ln xmlns:a="http://schemas.openxmlformats.org/drawingml/2006/main" w="0">
+            <a:noFill/>
+            <a:prstDash val="solid"/>
+          </a:ln>
+        </p:spPr>
+        <p:txBody>
+          <a:bodyPr xmlns:a="http://schemas.openxmlformats.org/drawingml/2006/main" anchor="t"/>
+          <a:lstStyle xmlns:a="http://schemas.openxmlformats.org/drawingml/2006/main"/>
+          <a:p xmlns:a="http://schemas.openxmlformats.org/drawingml/2006/main">
+            <a:pPr algn="l">
+              <a:buNone/>
+              <a:defRPr sz="1275" b="1">
+                <a:solidFill>
+                  <a:srgbClr val="C8553D"/>
+                </a:solidFill>
+                <a:latin typeface="Arial"/>
+                <a:ea typeface="Arial"/>
+                <a:cs typeface="Arial"/>
+              </a:defRPr>
+            </a:pPr>
+            <a:r>
+              <a:rPr sz="1275" b="1">
+                <a:solidFill>
+                  <a:srgbClr val="C8553D"/>
+                </a:solidFill>
+                <a:latin typeface="Arial"/>
+                <a:ea typeface="Arial"/>
+                <a:cs typeface="Arial"/>
+              </a:rPr>
+              <a:t>RESEARCH SLEEVE</a:t>
+            </a:r>
+          </a:p>
+        </p:txBody>
+      </p:sp>
+      <p:sp>
+        <p:nvSpPr>
+          <p:cNvPr id="12" name="">
+            <a:extLst xmlns:a="http://schemas.openxmlformats.org/drawingml/2006/main">
+              <a:ext uri="{FF2B5EF4-FFF2-40B4-BE49-F238E27FC236}">
+                <a16:creationId xmlns:a16="http://schemas.microsoft.com/office/drawing/2014/main" id="{0606DC9E-2BF6-4A3D-8AA4-5B9D11332D44}"/>
+              </a:ext>
+            </a:extLst>
+          </p:cNvPr>
+          <p:cNvSpPr>
+            <a:spLocks xmlns:a="http://schemas.openxmlformats.org/drawingml/2006/main" noGrp="1"/>
+          </p:cNvSpPr>
+          <p:nvPr/>
+        </p:nvSpPr>
+        <p:spPr>
+          <a:xfrm xmlns:a="http://schemas.openxmlformats.org/drawingml/2006/main">
+            <a:off x="6534150" y="2724150"/>
+            <a:ext cx="4000500" cy="704850"/>
+          </a:xfrm>
+          <a:prstGeom xmlns:a="http://schemas.openxmlformats.org/drawingml/2006/main" prst="rect">
+            <a:avLst/>
+          </a:prstGeom>
+          <a:noFill xmlns:a="http://schemas.openxmlformats.org/drawingml/2006/main"/>
+          <a:ln xmlns:a="http://schemas.openxmlformats.org/drawingml/2006/main" w="0">
+            <a:noFill/>
+            <a:prstDash val="solid"/>
+          </a:ln>
+        </p:spPr>
+        <p:txBody>
+          <a:bodyPr xmlns:a="http://schemas.openxmlformats.org/drawingml/2006/main" anchor="t"/>
+          <a:lstStyle xmlns:a="http://schemas.openxmlformats.org/drawingml/2006/main"/>
+          <a:p xmlns:a="http://schemas.openxmlformats.org/drawingml/2006/main">
+            <a:pPr algn="l">
+              <a:buNone/>
+              <a:defRPr sz="4050" b="1">
+                <a:solidFill>
+                  <a:srgbClr val="C8553D"/>
+                </a:solidFill>
+                <a:latin typeface="Arial"/>
+                <a:ea typeface="Arial"/>
+                <a:cs typeface="Arial"/>
+              </a:defRPr>
+            </a:pPr>
+            <a:r>
+              <a:rPr sz="4050" b="1">
+                <a:solidFill>
+                  <a:srgbClr val="C8553D"/>
+                </a:solidFill>
+                <a:latin typeface="Arial"/>
+                <a:ea typeface="Arial"/>
+                <a:cs typeface="Arial"/>
+              </a:rPr>
+              <a:t>SMALL</a:t>
+            </a:r>
+          </a:p>
+        </p:txBody>
+      </p:sp>
+      <p:sp>
+        <p:nvSpPr>
+          <p:cNvPr id="13" name="">
+            <a:extLst xmlns:a="http://schemas.openxmlformats.org/drawingml/2006/main">
+              <a:ext uri="{FF2B5EF4-FFF2-40B4-BE49-F238E27FC236}">
+                <a16:creationId xmlns:a16="http://schemas.microsoft.com/office/drawing/2014/main" id="{03283D39-FBEA-479D-88E1-46F1F4C330B5}"/>
+              </a:ext>
+            </a:extLst>
+          </p:cNvPr>
+          <p:cNvSpPr>
+            <a:spLocks xmlns:a="http://schemas.openxmlformats.org/drawingml/2006/main" noGrp="1"/>
+          </p:cNvSpPr>
+          <p:nvPr/>
+        </p:nvSpPr>
+        <p:spPr>
+          <a:xfrm xmlns:a="http://schemas.openxmlformats.org/drawingml/2006/main">
+            <a:off x="6534150" y="3429000"/>
+            <a:ext cx="4000500" cy="457200"/>
+          </a:xfrm>
+          <a:prstGeom xmlns:a="http://schemas.openxmlformats.org/drawingml/2006/main" prst="rect">
+            <a:avLst/>
+          </a:prstGeom>
+          <a:noFill xmlns:a="http://schemas.openxmlformats.org/drawingml/2006/main"/>
+          <a:ln xmlns:a="http://schemas.openxmlformats.org/drawingml/2006/main" w="0">
+            <a:noFill/>
+            <a:prstDash val="solid"/>
+          </a:ln>
+        </p:spPr>
+        <p:txBody>
+          <a:bodyPr xmlns:a="http://schemas.openxmlformats.org/drawingml/2006/main" anchor="t"/>
+          <a:lstStyle xmlns:a="http://schemas.openxmlformats.org/drawingml/2006/main"/>
+          <a:p xmlns:a="http://schemas.openxmlformats.org/drawingml/2006/main">
+            <a:pPr algn="l">
+              <a:buNone/>
+              <a:defRPr sz="2175" b="1">
+                <a:solidFill>
+                  <a:srgbClr val="101820"/>
+                </a:solidFill>
+                <a:latin typeface="Arial"/>
+                <a:ea typeface="Arial"/>
+                <a:cs typeface="Arial"/>
+              </a:defRPr>
+            </a:pPr>
+            <a:r>
+              <a:rPr sz="2175" b="1">
+                <a:solidFill>
+                  <a:srgbClr val="101820"/>
+                </a:solidFill>
+                <a:latin typeface="Arial"/>
+                <a:ea typeface="Arial"/>
+                <a:cs typeface="Arial"/>
+              </a:rPr>
+              <a:t>ring-fence experiments</a:t>
+            </a:r>
+          </a:p>
+        </p:txBody>
+      </p:sp>
+      <p:sp>
+        <p:nvSpPr>
+          <p:cNvPr id="14" name="">
+            <a:extLst xmlns:a="http://schemas.openxmlformats.org/drawingml/2006/main">
+              <a:ext uri="{FF2B5EF4-FFF2-40B4-BE49-F238E27FC236}">
+                <a16:creationId xmlns:a16="http://schemas.microsoft.com/office/drawing/2014/main" id="{DB7B3C09-EAFE-41D8-880B-D0BE56096F33}"/>
+              </a:ext>
+            </a:extLst>
+          </p:cNvPr>
+          <p:cNvSpPr>
+            <a:spLocks xmlns:a="http://schemas.openxmlformats.org/drawingml/2006/main" noGrp="1"/>
+          </p:cNvSpPr>
+          <p:nvPr/>
+        </p:nvSpPr>
+        <p:spPr>
+          <a:xfrm xmlns:a="http://schemas.openxmlformats.org/drawingml/2006/main">
+            <a:off x="6534150" y="4000500"/>
+            <a:ext cx="4000500" cy="876300"/>
+          </a:xfrm>
+          <a:prstGeom xmlns:a="http://schemas.openxmlformats.org/drawingml/2006/main" prst="rect">
+            <a:avLst/>
+          </a:prstGeom>
+          <a:noFill xmlns:a="http://schemas.openxmlformats.org/drawingml/2006/main"/>
+          <a:ln xmlns:a="http://schemas.openxmlformats.org/drawingml/2006/main" w="0">
+            <a:noFill/>
+            <a:prstDash val="solid"/>
+          </a:ln>
+        </p:spPr>
+        <p:txBody>
+          <a:bodyPr xmlns:a="http://schemas.openxmlformats.org/drawingml/2006/main" anchor="t"/>
+          <a:lstStyle xmlns:a="http://schemas.openxmlformats.org/drawingml/2006/main"/>
+          <a:p xmlns:a="http://schemas.openxmlformats.org/drawingml/2006/main">
+            <a:pPr algn="l">
+              <a:buNone/>
+              <a:defRPr sz="1500" b="0">
+                <a:solidFill>
+                  <a:srgbClr val="52616B"/>
+                </a:solidFill>
+                <a:latin typeface="Arial"/>
+                <a:ea typeface="Arial"/>
+                <a:cs typeface="Arial"/>
+              </a:defRPr>
+            </a:pPr>
+            <a:r>
+              <a:rPr sz="1500" b="0">
+                <a:solidFill>
+                  <a:srgbClr val="52616B"/>
+                </a:solidFill>
+                <a:latin typeface="Arial"/>
+                <a:ea typeface="Arial"/>
+                <a:cs typeface="Arial"/>
+              </a:rPr>
+              <a:t>Capital capped in advance</a:t>
+            </a:r>
+          </a:p>
+          <a:p xmlns:a="http://schemas.openxmlformats.org/drawingml/2006/main">
+            <a:pPr algn="l">
+              <a:buNone/>
+              <a:defRPr sz="1500" b="0">
+                <a:solidFill>
+                  <a:srgbClr val="52616B"/>
+                </a:solidFill>
+                <a:latin typeface="Arial"/>
+                <a:ea typeface="Arial"/>
+                <a:cs typeface="Arial"/>
+              </a:defRPr>
+            </a:pPr>
+            <a:r>
+              <a:rPr sz="1500" b="0">
+                <a:solidFill>
+                  <a:srgbClr val="52616B"/>
+                </a:solidFill>
+                <a:latin typeface="Arial"/>
+                <a:ea typeface="Arial"/>
+                <a:cs typeface="Arial"/>
+              </a:rPr>
+              <a:t>No required money or leverage</a:t>
+            </a:r>
+          </a:p>
+          <a:p xmlns:a="http://schemas.openxmlformats.org/drawingml/2006/main">
+            <a:pPr algn="l">
+              <a:buNone/>
+              <a:defRPr sz="1500" b="0">
+                <a:solidFill>
+                  <a:srgbClr val="52616B"/>
+                </a:solidFill>
+                <a:latin typeface="Arial"/>
+                <a:ea typeface="Arial"/>
+                <a:cs typeface="Arial"/>
+              </a:defRPr>
+            </a:pPr>
+            <a:r>
+              <a:rPr sz="1500" b="0">
+                <a:solidFill>
+                  <a:srgbClr val="52616B"/>
+                </a:solidFill>
+                <a:latin typeface="Arial"/>
+                <a:ea typeface="Arial"/>
+                <a:cs typeface="Arial"/>
+              </a:rPr>
+              <a:t>Scale only after forward evidence</a:t>
+            </a:r>
+          </a:p>
+        </p:txBody>
+      </p:sp>
+      <p:sp>
+        <p:nvSpPr>
+          <p:cNvPr id="15" name="">
+            <a:extLst xmlns:a="http://schemas.openxmlformats.org/drawingml/2006/main">
+              <a:ext uri="{FF2B5EF4-FFF2-40B4-BE49-F238E27FC236}">
+                <a16:creationId xmlns:a16="http://schemas.microsoft.com/office/drawing/2014/main" id="{0DF58B95-FF34-44E3-BD69-0887709C26B4}"/>
+              </a:ext>
+            </a:extLst>
+          </p:cNvPr>
+          <p:cNvSpPr>
+            <a:spLocks xmlns:a="http://schemas.openxmlformats.org/drawingml/2006/main" noGrp="1"/>
+          </p:cNvSpPr>
+          <p:nvPr/>
+        </p:nvSpPr>
+        <p:spPr>
+          <a:xfrm xmlns:a="http://schemas.openxmlformats.org/drawingml/2006/main">
+            <a:off x="2133600" y="5505450"/>
+            <a:ext cx="7924800" cy="381000"/>
+          </a:xfrm>
+          <a:prstGeom xmlns:a="http://schemas.openxmlformats.org/drawingml/2006/main" prst="rect">
+            <a:avLst/>
+          </a:prstGeom>
+          <a:noFill xmlns:a="http://schemas.openxmlformats.org/drawingml/2006/main"/>
+          <a:ln xmlns:a="http://schemas.openxmlformats.org/drawingml/2006/main" w="0">
+            <a:noFill/>
+            <a:prstDash val="solid"/>
+          </a:ln>
+        </p:spPr>
+        <p:txBody>
+          <a:bodyPr xmlns:a="http://schemas.openxmlformats.org/drawingml/2006/main" anchor="t"/>
+          <a:lstStyle xmlns:a="http://schemas.openxmlformats.org/drawingml/2006/main"/>
+          <a:p xmlns:a="http://schemas.openxmlformats.org/drawingml/2006/main">
+            <a:pPr algn="ctr">
+              <a:buNone/>
+              <a:defRPr sz="2175" b="1">
+                <a:solidFill>
+                  <a:srgbClr val="101820"/>
+                </a:solidFill>
+                <a:latin typeface="Arial"/>
+                <a:ea typeface="Arial"/>
+                <a:cs typeface="Arial"/>
+              </a:defRPr>
+            </a:pPr>
+            <a:r>
+              <a:rPr sz="2175" b="1">
+                <a:solidFill>
+                  <a:srgbClr val="101820"/>
+                </a:solidFill>
+                <a:latin typeface="Arial"/>
+                <a:ea typeface="Arial"/>
+                <a:cs typeface="Arial"/>
+              </a:rPr>
+              <a:t>Separate the compounding plan from the research bet.</a:t>
+            </a:r>
+          </a:p>
+        </p:txBody>
+      </p:sp>
+    </p:spTree>
+    <p:extLst>
+      <p:ext uri="{BB962C8B-B14F-4D97-AF65-F5344CB8AC3E}">
+        <p14:creationId xmlns:p14="http://schemas.microsoft.com/office/powerpoint/2010/main" val="1503881080"/>
       </p:ext>
     </p:extLst>
   </p:cSld>
